--- a/docs/slides-deck.pptx
+++ b/docs/slides-deck.pptx
@@ -3093,7 +3093,7 @@
     <p:bg>
       <p:bgPr>
         <a:solidFill>
-          <a:srgbClr val="111318"/>
+          <a:srgbClr val="070A0D"/>
         </a:solidFill>
         <a:effectLst/>
       </p:bgPr>
@@ -3113,8 +3113,8 @@
         </p:nvSpPr>
         <p:spPr>
           <a:xfrm>
-            <a:off x="731520" y="1097280"/>
-            <a:ext cx="10698480" cy="457200"/>
+            <a:off x="731520" y="548640"/>
+            <a:ext cx="10698480" cy="365760"/>
           </a:xfrm>
           <a:prstGeom prst="rect">
             <a:avLst/>
@@ -3129,13 +3129,13 @@
           <a:p>
             <a:pPr algn="l"/>
             <a:r>
-              <a:rPr sz="1600" b="1">
-                <a:solidFill>
-                  <a:srgbClr val="FF5A1F"/>
-                </a:solidFill>
-                <a:latin typeface="Calibri"/>
-              </a:rPr>
-              <a:t>КОСМОХАКАТОН 2026 · МОНИТОРИНГ ПРИРОДНЫХ ПОЖАРОВ</a:t>
+              <a:rPr sz="1300" b="1">
+                <a:solidFill>
+                  <a:srgbClr val="62D99A"/>
+                </a:solidFill>
+                <a:latin typeface="Inter"/>
+              </a:rPr>
+              <a:t>●  LIVE  ·  KOSMOHACK FIRE MONITOR</a:t>
             </a:r>
           </a:p>
         </p:txBody>
@@ -3148,8 +3148,8 @@
         </p:nvSpPr>
         <p:spPr>
           <a:xfrm>
-            <a:off x="731520" y="1645920"/>
-            <a:ext cx="10698480" cy="1280160"/>
+            <a:off x="731520" y="1005840"/>
+            <a:ext cx="10698480" cy="1097280"/>
           </a:xfrm>
           <a:prstGeom prst="rect">
             <a:avLst/>
@@ -3164,13 +3164,22 @@
           <a:p>
             <a:pPr algn="l"/>
             <a:r>
-              <a:rPr sz="4400" b="1">
-                <a:solidFill>
-                  <a:srgbClr val="F0F0F0"/>
-                </a:solidFill>
-                <a:latin typeface="Calibri"/>
-              </a:rPr>
-              <a:t>kosmohack — двухэтапный мониторинг пожаров по ДЗЗ</a:t>
+              <a:rPr sz="5400" b="1">
+                <a:solidFill>
+                  <a:srgbClr val="FF6B35"/>
+                </a:solidFill>
+                <a:latin typeface="Inter"/>
+              </a:rPr>
+              <a:t>FIRE </a:t>
+            </a:r>
+            <a:r>
+              <a:rPr sz="5400" b="1">
+                <a:solidFill>
+                  <a:srgbClr val="F2F4F5"/>
+                </a:solidFill>
+                <a:latin typeface="Inter"/>
+              </a:rPr>
+              <a:t>MONITOR</a:t>
             </a:r>
           </a:p>
         </p:txBody>
@@ -3183,8 +3192,8 @@
         </p:nvSpPr>
         <p:spPr>
           <a:xfrm>
-            <a:off x="731520" y="3108960"/>
-            <a:ext cx="10698480" cy="731520"/>
+            <a:off x="731520" y="2286000"/>
+            <a:ext cx="10698480" cy="640080"/>
           </a:xfrm>
           <a:prstGeom prst="rect">
             <a:avLst/>
@@ -3199,13 +3208,13 @@
           <a:p>
             <a:pPr algn="l"/>
             <a:r>
-              <a:rPr sz="2200" b="0">
-                <a:solidFill>
-                  <a:srgbClr val="9AA0AA"/>
-                </a:solidFill>
-                <a:latin typeface="Calibri"/>
-              </a:rPr>
-              <a:t>AF-детекция + BS-картирование гарей + аналитический сервис</a:t>
+              <a:rPr sz="1900" b="0">
+                <a:solidFill>
+                  <a:srgbClr val="A4ADB5"/>
+                </a:solidFill>
+                <a:latin typeface="Inter"/>
+              </a:rPr>
+              <a:t>Двухэтапный мониторинг природных пожаров по ДЗЗ — AF-детекция, BS-картирование гарей, аналитический сервис</a:t>
             </a:r>
           </a:p>
         </p:txBody>
@@ -3218,17 +3227,21 @@
         </p:nvSpPr>
         <p:spPr>
           <a:xfrm>
-            <a:off x="731520" y="4297680"/>
-            <a:ext cx="3108960" cy="1188720"/>
+            <a:off x="731520" y="4846320"/>
+            <a:ext cx="2002536" cy="1417320"/>
           </a:xfrm>
           <a:prstGeom prst="roundRect">
-            <a:avLst/>
+            <a:avLst>
+              <a:gd name="adj" fmla="val 8000"/>
+            </a:avLst>
           </a:prstGeom>
           <a:solidFill>
-            <a:srgbClr val="1B1E26"/>
+            <a:srgbClr val="0E1318"/>
           </a:solidFill>
-          <a:ln>
-            <a:noFill/>
+          <a:ln w="12700">
+            <a:solidFill>
+              <a:srgbClr val="232A33"/>
+            </a:solidFill>
           </a:ln>
         </p:spPr>
         <p:style>
@@ -3261,8 +3274,8 @@
         </p:nvSpPr>
         <p:spPr>
           <a:xfrm>
-            <a:off x="914400" y="4434840"/>
-            <a:ext cx="2743200" cy="914400"/>
+            <a:off x="914400" y="4956048"/>
+            <a:ext cx="1682495" cy="274320"/>
           </a:xfrm>
           <a:prstGeom prst="rect">
             <a:avLst/>
@@ -3277,23 +3290,13 @@
           <a:p>
             <a:pPr algn="l"/>
             <a:r>
-              <a:rPr sz="3000" b="1">
-                <a:solidFill>
-                  <a:srgbClr val="F0F0F0"/>
-                </a:solidFill>
-                <a:latin typeface="Calibri"/>
-              </a:rPr>
-              <a:t>Score 0.654</a:t>
-            </a:r>
-            <a:r>
-              <a:rPr sz="1500" b="0">
-                <a:solidFill>
-                  <a:srgbClr val="9AA0AA"/>
-                </a:solidFill>
-                <a:latin typeface="Calibri"/>
-              </a:rPr>
-              <a:t>
-F1 0.8434 · IoU 0.5239 · mIoU 0.5430</a:t>
+              <a:rPr sz="1100" b="1">
+                <a:solidFill>
+                  <a:srgbClr val="69737D"/>
+                </a:solidFill>
+                <a:latin typeface="Inter"/>
+              </a:rPr>
+              <a:t>THERMAL</a:t>
             </a:r>
           </a:p>
         </p:txBody>
@@ -3306,8 +3309,8 @@
         </p:nvSpPr>
         <p:spPr>
           <a:xfrm>
-            <a:off x="731520" y="5852160"/>
-            <a:ext cx="10698480" cy="457200"/>
+            <a:off x="914400" y="5230368"/>
+            <a:ext cx="1682495" cy="640080"/>
           </a:xfrm>
           <a:prstGeom prst="rect">
             <a:avLst/>
@@ -3322,13 +3325,656 @@
           <a:p>
             <a:pPr algn="l"/>
             <a:r>
-              <a:rPr sz="1500" b="0">
-                <a:solidFill>
-                  <a:srgbClr val="9AA0AA"/>
-                </a:solidFill>
-                <a:latin typeface="Calibri"/>
-              </a:rPr>
-              <a:t>submission.csv FINAL · детерминированный инференс · сервис на localhost:8000</a:t>
+              <a:rPr sz="2600" b="1">
+                <a:solidFill>
+                  <a:srgbClr val="F2F4F5"/>
+                </a:solidFill>
+                <a:latin typeface="Inter"/>
+              </a:rPr>
+              <a:t>0.8434</a:t>
+            </a:r>
+          </a:p>
+        </p:txBody>
+      </p:sp>
+      <p:sp>
+        <p:nvSpPr>
+          <p:cNvPr id="8" name="TextBox 7"/>
+          <p:cNvSpPr txBox="1"/>
+          <p:nvPr/>
+        </p:nvSpPr>
+        <p:spPr>
+          <a:xfrm>
+            <a:off x="914400" y="5852160"/>
+            <a:ext cx="1682495" cy="274320"/>
+          </a:xfrm>
+          <a:prstGeom prst="rect">
+            <a:avLst/>
+          </a:prstGeom>
+          <a:noFill/>
+        </p:spPr>
+        <p:txBody>
+          <a:bodyPr wrap="square">
+            <a:spAutoFit/>
+          </a:bodyPr>
+          <a:lstStyle/>
+          <a:p>
+            <a:pPr algn="l"/>
+            <a:r>
+              <a:rPr sz="1100" b="0">
+                <a:solidFill>
+                  <a:srgbClr val="69737D"/>
+                </a:solidFill>
+                <a:latin typeface="Inter"/>
+              </a:rPr>
+              <a:t>val micro-F1 AF</a:t>
+            </a:r>
+          </a:p>
+        </p:txBody>
+      </p:sp>
+      <p:sp>
+        <p:nvSpPr>
+          <p:cNvPr id="9" name="Rounded Rectangle 8"/>
+          <p:cNvSpPr/>
+          <p:nvPr/>
+        </p:nvSpPr>
+        <p:spPr>
+          <a:xfrm>
+            <a:off x="2871215" y="4846320"/>
+            <a:ext cx="2002536" cy="1417320"/>
+          </a:xfrm>
+          <a:prstGeom prst="roundRect">
+            <a:avLst>
+              <a:gd name="adj" fmla="val 8000"/>
+            </a:avLst>
+          </a:prstGeom>
+          <a:solidFill>
+            <a:srgbClr val="0E1318"/>
+          </a:solidFill>
+          <a:ln w="12700">
+            <a:solidFill>
+              <a:srgbClr val="232A33"/>
+            </a:solidFill>
+          </a:ln>
+        </p:spPr>
+        <p:style>
+          <a:lnRef idx="1">
+            <a:schemeClr val="accent1"/>
+          </a:lnRef>
+          <a:fillRef idx="3">
+            <a:schemeClr val="accent1"/>
+          </a:fillRef>
+          <a:effectRef idx="2">
+            <a:schemeClr val="accent1"/>
+          </a:effectRef>
+          <a:fontRef idx="minor">
+            <a:schemeClr val="lt1"/>
+          </a:fontRef>
+        </p:style>
+        <p:txBody>
+          <a:bodyPr rtlCol="0" anchor="ctr"/>
+          <a:lstStyle/>
+          <a:p>
+            <a:pPr algn="ctr"/>
+          </a:p>
+        </p:txBody>
+      </p:sp>
+      <p:sp>
+        <p:nvSpPr>
+          <p:cNvPr id="10" name="TextBox 9"/>
+          <p:cNvSpPr txBox="1"/>
+          <p:nvPr/>
+        </p:nvSpPr>
+        <p:spPr>
+          <a:xfrm>
+            <a:off x="3054096" y="4956048"/>
+            <a:ext cx="1682495" cy="274320"/>
+          </a:xfrm>
+          <a:prstGeom prst="rect">
+            <a:avLst/>
+          </a:prstGeom>
+          <a:noFill/>
+        </p:spPr>
+        <p:txBody>
+          <a:bodyPr wrap="square">
+            <a:spAutoFit/>
+          </a:bodyPr>
+          <a:lstStyle/>
+          <a:p>
+            <a:pPr algn="l"/>
+            <a:r>
+              <a:rPr sz="1100" b="1">
+                <a:solidFill>
+                  <a:srgbClr val="69737D"/>
+                </a:solidFill>
+                <a:latin typeface="Inter"/>
+              </a:rPr>
+              <a:t>SCORE</a:t>
+            </a:r>
+          </a:p>
+        </p:txBody>
+      </p:sp>
+      <p:sp>
+        <p:nvSpPr>
+          <p:cNvPr id="11" name="TextBox 10"/>
+          <p:cNvSpPr txBox="1"/>
+          <p:nvPr/>
+        </p:nvSpPr>
+        <p:spPr>
+          <a:xfrm>
+            <a:off x="3054096" y="5230368"/>
+            <a:ext cx="1682495" cy="640080"/>
+          </a:xfrm>
+          <a:prstGeom prst="rect">
+            <a:avLst/>
+          </a:prstGeom>
+          <a:noFill/>
+        </p:spPr>
+        <p:txBody>
+          <a:bodyPr wrap="square">
+            <a:spAutoFit/>
+          </a:bodyPr>
+          <a:lstStyle/>
+          <a:p>
+            <a:pPr algn="l"/>
+            <a:r>
+              <a:rPr sz="2600" b="1">
+                <a:solidFill>
+                  <a:srgbClr val="FF8B5F"/>
+                </a:solidFill>
+                <a:latin typeface="Inter"/>
+              </a:rPr>
+              <a:t>0.654</a:t>
+            </a:r>
+          </a:p>
+        </p:txBody>
+      </p:sp>
+      <p:sp>
+        <p:nvSpPr>
+          <p:cNvPr id="12" name="TextBox 11"/>
+          <p:cNvSpPr txBox="1"/>
+          <p:nvPr/>
+        </p:nvSpPr>
+        <p:spPr>
+          <a:xfrm>
+            <a:off x="3054096" y="5852160"/>
+            <a:ext cx="1682495" cy="274320"/>
+          </a:xfrm>
+          <a:prstGeom prst="rect">
+            <a:avLst/>
+          </a:prstGeom>
+          <a:noFill/>
+        </p:spPr>
+        <p:txBody>
+          <a:bodyPr wrap="square">
+            <a:spAutoFit/>
+          </a:bodyPr>
+          <a:lstStyle/>
+          <a:p>
+            <a:pPr algn="l"/>
+            <a:r>
+              <a:rPr sz="1100" b="0">
+                <a:solidFill>
+                  <a:srgbClr val="69737D"/>
+                </a:solidFill>
+                <a:latin typeface="Inter"/>
+              </a:rPr>
+              <a:t>0.35·F1 + 0.35·IoU + 0.30·mIoU</a:t>
+            </a:r>
+          </a:p>
+        </p:txBody>
+      </p:sp>
+      <p:sp>
+        <p:nvSpPr>
+          <p:cNvPr id="13" name="Rounded Rectangle 12"/>
+          <p:cNvSpPr/>
+          <p:nvPr/>
+        </p:nvSpPr>
+        <p:spPr>
+          <a:xfrm>
+            <a:off x="5010912" y="4846320"/>
+            <a:ext cx="2002536" cy="1417320"/>
+          </a:xfrm>
+          <a:prstGeom prst="roundRect">
+            <a:avLst>
+              <a:gd name="adj" fmla="val 8000"/>
+            </a:avLst>
+          </a:prstGeom>
+          <a:solidFill>
+            <a:srgbClr val="0E1318"/>
+          </a:solidFill>
+          <a:ln w="12700">
+            <a:solidFill>
+              <a:srgbClr val="232A33"/>
+            </a:solidFill>
+          </a:ln>
+        </p:spPr>
+        <p:style>
+          <a:lnRef idx="1">
+            <a:schemeClr val="accent1"/>
+          </a:lnRef>
+          <a:fillRef idx="3">
+            <a:schemeClr val="accent1"/>
+          </a:fillRef>
+          <a:effectRef idx="2">
+            <a:schemeClr val="accent1"/>
+          </a:effectRef>
+          <a:fontRef idx="minor">
+            <a:schemeClr val="lt1"/>
+          </a:fontRef>
+        </p:style>
+        <p:txBody>
+          <a:bodyPr rtlCol="0" anchor="ctr"/>
+          <a:lstStyle/>
+          <a:p>
+            <a:pPr algn="ctr"/>
+          </a:p>
+        </p:txBody>
+      </p:sp>
+      <p:sp>
+        <p:nvSpPr>
+          <p:cNvPr id="14" name="TextBox 13"/>
+          <p:cNvSpPr txBox="1"/>
+          <p:nvPr/>
+        </p:nvSpPr>
+        <p:spPr>
+          <a:xfrm>
+            <a:off x="5193792" y="4956048"/>
+            <a:ext cx="1682495" cy="274320"/>
+          </a:xfrm>
+          <a:prstGeom prst="rect">
+            <a:avLst/>
+          </a:prstGeom>
+          <a:noFill/>
+        </p:spPr>
+        <p:txBody>
+          <a:bodyPr wrap="square">
+            <a:spAutoFit/>
+          </a:bodyPr>
+          <a:lstStyle/>
+          <a:p>
+            <a:pPr algn="l"/>
+            <a:r>
+              <a:rPr sz="1100" b="1">
+                <a:solidFill>
+                  <a:srgbClr val="69737D"/>
+                </a:solidFill>
+                <a:latin typeface="Inter"/>
+              </a:rPr>
+              <a:t>BURN IOU</a:t>
+            </a:r>
+          </a:p>
+        </p:txBody>
+      </p:sp>
+      <p:sp>
+        <p:nvSpPr>
+          <p:cNvPr id="15" name="TextBox 14"/>
+          <p:cNvSpPr txBox="1"/>
+          <p:nvPr/>
+        </p:nvSpPr>
+        <p:spPr>
+          <a:xfrm>
+            <a:off x="5193792" y="5230368"/>
+            <a:ext cx="1682495" cy="640080"/>
+          </a:xfrm>
+          <a:prstGeom prst="rect">
+            <a:avLst/>
+          </a:prstGeom>
+          <a:noFill/>
+        </p:spPr>
+        <p:txBody>
+          <a:bodyPr wrap="square">
+            <a:spAutoFit/>
+          </a:bodyPr>
+          <a:lstStyle/>
+          <a:p>
+            <a:pPr algn="l"/>
+            <a:r>
+              <a:rPr sz="2600" b="1">
+                <a:solidFill>
+                  <a:srgbClr val="F2F4F5"/>
+                </a:solidFill>
+                <a:latin typeface="Inter"/>
+              </a:rPr>
+              <a:t>0.5239</a:t>
+            </a:r>
+          </a:p>
+        </p:txBody>
+      </p:sp>
+      <p:sp>
+        <p:nvSpPr>
+          <p:cNvPr id="16" name="TextBox 15"/>
+          <p:cNvSpPr txBox="1"/>
+          <p:nvPr/>
+        </p:nvSpPr>
+        <p:spPr>
+          <a:xfrm>
+            <a:off x="5193792" y="5852160"/>
+            <a:ext cx="1682495" cy="274320"/>
+          </a:xfrm>
+          <a:prstGeom prst="rect">
+            <a:avLst/>
+          </a:prstGeom>
+          <a:noFill/>
+        </p:spPr>
+        <p:txBody>
+          <a:bodyPr wrap="square">
+            <a:spAutoFit/>
+          </a:bodyPr>
+          <a:lstStyle/>
+          <a:p>
+            <a:pPr algn="l"/>
+            <a:r>
+              <a:rPr sz="1100" b="0">
+                <a:solidFill>
+                  <a:srgbClr val="69737D"/>
+                </a:solidFill>
+                <a:latin typeface="Inter"/>
+              </a:rPr>
+              <a:t>micro-pool</a:t>
+            </a:r>
+          </a:p>
+        </p:txBody>
+      </p:sp>
+      <p:sp>
+        <p:nvSpPr>
+          <p:cNvPr id="17" name="Rounded Rectangle 16"/>
+          <p:cNvSpPr/>
+          <p:nvPr/>
+        </p:nvSpPr>
+        <p:spPr>
+          <a:xfrm>
+            <a:off x="7150607" y="4846320"/>
+            <a:ext cx="2002536" cy="1417320"/>
+          </a:xfrm>
+          <a:prstGeom prst="roundRect">
+            <a:avLst>
+              <a:gd name="adj" fmla="val 8000"/>
+            </a:avLst>
+          </a:prstGeom>
+          <a:solidFill>
+            <a:srgbClr val="0E1318"/>
+          </a:solidFill>
+          <a:ln w="12700">
+            <a:solidFill>
+              <a:srgbClr val="232A33"/>
+            </a:solidFill>
+          </a:ln>
+        </p:spPr>
+        <p:style>
+          <a:lnRef idx="1">
+            <a:schemeClr val="accent1"/>
+          </a:lnRef>
+          <a:fillRef idx="3">
+            <a:schemeClr val="accent1"/>
+          </a:fillRef>
+          <a:effectRef idx="2">
+            <a:schemeClr val="accent1"/>
+          </a:effectRef>
+          <a:fontRef idx="minor">
+            <a:schemeClr val="lt1"/>
+          </a:fontRef>
+        </p:style>
+        <p:txBody>
+          <a:bodyPr rtlCol="0" anchor="ctr"/>
+          <a:lstStyle/>
+          <a:p>
+            <a:pPr algn="ctr"/>
+          </a:p>
+        </p:txBody>
+      </p:sp>
+      <p:sp>
+        <p:nvSpPr>
+          <p:cNvPr id="18" name="TextBox 17"/>
+          <p:cNvSpPr txBox="1"/>
+          <p:nvPr/>
+        </p:nvSpPr>
+        <p:spPr>
+          <a:xfrm>
+            <a:off x="7333488" y="4956048"/>
+            <a:ext cx="1682495" cy="274320"/>
+          </a:xfrm>
+          <a:prstGeom prst="rect">
+            <a:avLst/>
+          </a:prstGeom>
+          <a:noFill/>
+        </p:spPr>
+        <p:txBody>
+          <a:bodyPr wrap="square">
+            <a:spAutoFit/>
+          </a:bodyPr>
+          <a:lstStyle/>
+          <a:p>
+            <a:pPr algn="l"/>
+            <a:r>
+              <a:rPr sz="1100" b="1">
+                <a:solidFill>
+                  <a:srgbClr val="69737D"/>
+                </a:solidFill>
+                <a:latin typeface="Inter"/>
+              </a:rPr>
+              <a:t>SEVERITY</a:t>
+            </a:r>
+          </a:p>
+        </p:txBody>
+      </p:sp>
+      <p:sp>
+        <p:nvSpPr>
+          <p:cNvPr id="19" name="TextBox 18"/>
+          <p:cNvSpPr txBox="1"/>
+          <p:nvPr/>
+        </p:nvSpPr>
+        <p:spPr>
+          <a:xfrm>
+            <a:off x="7333488" y="5230368"/>
+            <a:ext cx="1682495" cy="640080"/>
+          </a:xfrm>
+          <a:prstGeom prst="rect">
+            <a:avLst/>
+          </a:prstGeom>
+          <a:noFill/>
+        </p:spPr>
+        <p:txBody>
+          <a:bodyPr wrap="square">
+            <a:spAutoFit/>
+          </a:bodyPr>
+          <a:lstStyle/>
+          <a:p>
+            <a:pPr algn="l"/>
+            <a:r>
+              <a:rPr sz="2600" b="1">
+                <a:solidFill>
+                  <a:srgbClr val="F2F4F5"/>
+                </a:solidFill>
+                <a:latin typeface="Inter"/>
+              </a:rPr>
+              <a:t>0.5430</a:t>
+            </a:r>
+          </a:p>
+        </p:txBody>
+      </p:sp>
+      <p:sp>
+        <p:nvSpPr>
+          <p:cNvPr id="20" name="TextBox 19"/>
+          <p:cNvSpPr txBox="1"/>
+          <p:nvPr/>
+        </p:nvSpPr>
+        <p:spPr>
+          <a:xfrm>
+            <a:off x="7333488" y="5852160"/>
+            <a:ext cx="1682495" cy="274320"/>
+          </a:xfrm>
+          <a:prstGeom prst="rect">
+            <a:avLst/>
+          </a:prstGeom>
+          <a:noFill/>
+        </p:spPr>
+        <p:txBody>
+          <a:bodyPr wrap="square">
+            <a:spAutoFit/>
+          </a:bodyPr>
+          <a:lstStyle/>
+          <a:p>
+            <a:pPr algn="l"/>
+            <a:r>
+              <a:rPr sz="1100" b="0">
+                <a:solidFill>
+                  <a:srgbClr val="69737D"/>
+                </a:solidFill>
+                <a:latin typeface="Inter"/>
+              </a:rPr>
+              <a:t>mIoU 1/2/3</a:t>
+            </a:r>
+          </a:p>
+        </p:txBody>
+      </p:sp>
+      <p:sp>
+        <p:nvSpPr>
+          <p:cNvPr id="21" name="Rounded Rectangle 20"/>
+          <p:cNvSpPr/>
+          <p:nvPr/>
+        </p:nvSpPr>
+        <p:spPr>
+          <a:xfrm>
+            <a:off x="9290304" y="4846320"/>
+            <a:ext cx="2002536" cy="1417320"/>
+          </a:xfrm>
+          <a:prstGeom prst="roundRect">
+            <a:avLst>
+              <a:gd name="adj" fmla="val 8000"/>
+            </a:avLst>
+          </a:prstGeom>
+          <a:solidFill>
+            <a:srgbClr val="0E1318"/>
+          </a:solidFill>
+          <a:ln w="12700">
+            <a:solidFill>
+              <a:srgbClr val="232A33"/>
+            </a:solidFill>
+          </a:ln>
+        </p:spPr>
+        <p:style>
+          <a:lnRef idx="1">
+            <a:schemeClr val="accent1"/>
+          </a:lnRef>
+          <a:fillRef idx="3">
+            <a:schemeClr val="accent1"/>
+          </a:fillRef>
+          <a:effectRef idx="2">
+            <a:schemeClr val="accent1"/>
+          </a:effectRef>
+          <a:fontRef idx="minor">
+            <a:schemeClr val="lt1"/>
+          </a:fontRef>
+        </p:style>
+        <p:txBody>
+          <a:bodyPr rtlCol="0" anchor="ctr"/>
+          <a:lstStyle/>
+          <a:p>
+            <a:pPr algn="ctr"/>
+          </a:p>
+        </p:txBody>
+      </p:sp>
+      <p:sp>
+        <p:nvSpPr>
+          <p:cNvPr id="22" name="TextBox 21"/>
+          <p:cNvSpPr txBox="1"/>
+          <p:nvPr/>
+        </p:nvSpPr>
+        <p:spPr>
+          <a:xfrm>
+            <a:off x="9473184" y="4956048"/>
+            <a:ext cx="1682495" cy="274320"/>
+          </a:xfrm>
+          <a:prstGeom prst="rect">
+            <a:avLst/>
+          </a:prstGeom>
+          <a:noFill/>
+        </p:spPr>
+        <p:txBody>
+          <a:bodyPr wrap="square">
+            <a:spAutoFit/>
+          </a:bodyPr>
+          <a:lstStyle/>
+          <a:p>
+            <a:pPr algn="l"/>
+            <a:r>
+              <a:rPr sz="1100" b="1">
+                <a:solidFill>
+                  <a:srgbClr val="69737D"/>
+                </a:solidFill>
+                <a:latin typeface="Inter"/>
+              </a:rPr>
+              <a:t>INFERENCE</a:t>
+            </a:r>
+          </a:p>
+        </p:txBody>
+      </p:sp>
+      <p:sp>
+        <p:nvSpPr>
+          <p:cNvPr id="23" name="TextBox 22"/>
+          <p:cNvSpPr txBox="1"/>
+          <p:nvPr/>
+        </p:nvSpPr>
+        <p:spPr>
+          <a:xfrm>
+            <a:off x="9473184" y="5230368"/>
+            <a:ext cx="1682495" cy="640080"/>
+          </a:xfrm>
+          <a:prstGeom prst="rect">
+            <a:avLst/>
+          </a:prstGeom>
+          <a:noFill/>
+        </p:spPr>
+        <p:txBody>
+          <a:bodyPr wrap="square">
+            <a:spAutoFit/>
+          </a:bodyPr>
+          <a:lstStyle/>
+          <a:p>
+            <a:pPr algn="l"/>
+            <a:r>
+              <a:rPr sz="2600" b="1">
+                <a:solidFill>
+                  <a:srgbClr val="62D99A"/>
+                </a:solidFill>
+                <a:latin typeface="Inter"/>
+              </a:rPr>
+              <a:t>~28 сек</a:t>
+            </a:r>
+          </a:p>
+        </p:txBody>
+      </p:sp>
+      <p:sp>
+        <p:nvSpPr>
+          <p:cNvPr id="24" name="TextBox 23"/>
+          <p:cNvSpPr txBox="1"/>
+          <p:nvPr/>
+        </p:nvSpPr>
+        <p:spPr>
+          <a:xfrm>
+            <a:off x="9473184" y="5852160"/>
+            <a:ext cx="1682495" cy="274320"/>
+          </a:xfrm>
+          <a:prstGeom prst="rect">
+            <a:avLst/>
+          </a:prstGeom>
+          <a:noFill/>
+        </p:spPr>
+        <p:txBody>
+          <a:bodyPr wrap="square">
+            <a:spAutoFit/>
+          </a:bodyPr>
+          <a:lstStyle/>
+          <a:p>
+            <a:pPr algn="l"/>
+            <a:r>
+              <a:rPr sz="1100" b="0">
+                <a:solidFill>
+                  <a:srgbClr val="69737D"/>
+                </a:solidFill>
+                <a:latin typeface="Inter"/>
+              </a:rPr>
+              <a:t>детерминирован</a:t>
             </a:r>
           </a:p>
         </p:txBody>
@@ -3347,7 +3993,7 @@
     <p:bg>
       <p:bgPr>
         <a:solidFill>
-          <a:srgbClr val="111318"/>
+          <a:srgbClr val="070A0D"/>
         </a:solidFill>
         <a:effectLst/>
       </p:bgPr>
@@ -3367,8 +4013,8 @@
         </p:nvSpPr>
         <p:spPr>
           <a:xfrm>
-            <a:off x="640080" y="274320"/>
-            <a:ext cx="10881360" cy="365760"/>
+            <a:off x="731520" y="411480"/>
+            <a:ext cx="10698480" cy="320040"/>
           </a:xfrm>
           <a:prstGeom prst="rect">
             <a:avLst/>
@@ -3383,13 +4029,22 @@
           <a:p>
             <a:pPr algn="l"/>
             <a:r>
-              <a:rPr sz="1400" b="1">
-                <a:solidFill>
-                  <a:srgbClr val="FF5A1F"/>
-                </a:solidFill>
-                <a:latin typeface="Calibri"/>
-              </a:rPr>
-              <a:t>09–10 · ОГРАНИЧЕНИЯ И NEXT</a:t>
+              <a:rPr sz="1300" b="1">
+                <a:solidFill>
+                  <a:srgbClr val="69737D"/>
+                </a:solidFill>
+                <a:latin typeface="Inter"/>
+              </a:rPr>
+              <a:t>09  </a:t>
+            </a:r>
+            <a:r>
+              <a:rPr sz="1300" b="1">
+                <a:solidFill>
+                  <a:srgbClr val="69737D"/>
+                </a:solidFill>
+                <a:latin typeface="Inter"/>
+              </a:rPr>
+              <a:t>ОГРАНИЧЕНИЯ И NEXT STEPS</a:t>
             </a:r>
           </a:p>
         </p:txBody>
@@ -3402,8 +4057,8 @@
         </p:nvSpPr>
         <p:spPr>
           <a:xfrm>
-            <a:off x="640080" y="640080"/>
-            <a:ext cx="10881360" cy="822960"/>
+            <a:off x="731520" y="777240"/>
+            <a:ext cx="10698480" cy="914400"/>
           </a:xfrm>
           <a:prstGeom prst="rect">
             <a:avLst/>
@@ -3418,11 +4073,11 @@
           <a:p>
             <a:pPr algn="l"/>
             <a:r>
-              <a:rPr sz="3600" b="1">
-                <a:solidFill>
-                  <a:srgbClr val="F0F0F0"/>
-                </a:solidFill>
-                <a:latin typeface="Calibri"/>
+              <a:rPr sz="3400" b="1">
+                <a:solidFill>
+                  <a:srgbClr val="F2F4F5"/>
+                </a:solidFill>
+                <a:latin typeface="Inter"/>
               </a:rPr>
               <a:t>Честно про потолок</a:t>
             </a:r>
@@ -3431,14 +4086,57 @@
       </p:sp>
       <p:sp>
         <p:nvSpPr>
-          <p:cNvPr id="4" name="TextBox 3"/>
+          <p:cNvPr id="4" name="Oval 3"/>
+          <p:cNvSpPr/>
+          <p:nvPr/>
+        </p:nvSpPr>
+        <p:spPr>
+          <a:xfrm>
+            <a:off x="914400" y="2121408"/>
+            <a:ext cx="146304" cy="146304"/>
+          </a:xfrm>
+          <a:prstGeom prst="ellipse">
+            <a:avLst/>
+          </a:prstGeom>
+          <a:solidFill>
+            <a:srgbClr val="FF6B35"/>
+          </a:solidFill>
+          <a:ln>
+            <a:noFill/>
+          </a:ln>
+        </p:spPr>
+        <p:style>
+          <a:lnRef idx="1">
+            <a:schemeClr val="accent1"/>
+          </a:lnRef>
+          <a:fillRef idx="3">
+            <a:schemeClr val="accent1"/>
+          </a:fillRef>
+          <a:effectRef idx="2">
+            <a:schemeClr val="accent1"/>
+          </a:effectRef>
+          <a:fontRef idx="minor">
+            <a:schemeClr val="lt1"/>
+          </a:fontRef>
+        </p:style>
+        <p:txBody>
+          <a:bodyPr rtlCol="0" anchor="ctr"/>
+          <a:lstStyle/>
+          <a:p>
+            <a:pPr algn="ctr"/>
+          </a:p>
+        </p:txBody>
+      </p:sp>
+      <p:sp>
+        <p:nvSpPr>
+          <p:cNvPr id="5" name="TextBox 4"/>
           <p:cNvSpPr txBox="1"/>
           <p:nvPr/>
         </p:nvSpPr>
         <p:spPr>
           <a:xfrm>
-            <a:off x="822960" y="1737360"/>
-            <a:ext cx="10515600" cy="731520"/>
+            <a:off x="1234440" y="1956816"/>
+            <a:ext cx="10424160" cy="640080"/>
           </a:xfrm>
           <a:prstGeom prst="rect">
             <a:avLst/>
@@ -3453,36 +4151,70 @@
           <a:p>
             <a:pPr algn="l"/>
             <a:r>
-              <a:rPr sz="1800" b="1">
-                <a:solidFill>
-                  <a:srgbClr val="FF5A1F"/>
-                </a:solidFill>
-                <a:latin typeface="Calibri"/>
-              </a:rPr>
-              <a:t>•  </a:t>
-            </a:r>
-            <a:r>
-              <a:rPr sz="1800" b="0">
-                <a:solidFill>
-                  <a:srgbClr val="F0F0F0"/>
-                </a:solidFill>
-                <a:latin typeface="Calibri"/>
-              </a:rPr>
-              <a:t>Demo-привязка чипов: гео/дат в тесте нет (§5.5) — размещение сеткой задокументировано, не восстановлено</a:t>
-            </a:r>
-          </a:p>
-        </p:txBody>
-      </p:sp>
-      <p:sp>
-        <p:nvSpPr>
-          <p:cNvPr id="5" name="TextBox 4"/>
+              <a:rPr sz="1700" b="0">
+                <a:solidFill>
+                  <a:srgbClr val="A4ADB5"/>
+                </a:solidFill>
+                <a:latin typeface="Inter"/>
+              </a:rPr>
+              <a:t>Demo-привязка чипов: гео и дат в тесте нет — размещение сеткой задокументировано, не восстановлено</a:t>
+            </a:r>
+          </a:p>
+        </p:txBody>
+      </p:sp>
+      <p:sp>
+        <p:nvSpPr>
+          <p:cNvPr id="6" name="Oval 5"/>
+          <p:cNvSpPr/>
+          <p:nvPr/>
+        </p:nvSpPr>
+        <p:spPr>
+          <a:xfrm>
+            <a:off x="914400" y="2834640"/>
+            <a:ext cx="146304" cy="146304"/>
+          </a:xfrm>
+          <a:prstGeom prst="ellipse">
+            <a:avLst/>
+          </a:prstGeom>
+          <a:solidFill>
+            <a:srgbClr val="FF6B35"/>
+          </a:solidFill>
+          <a:ln>
+            <a:noFill/>
+          </a:ln>
+        </p:spPr>
+        <p:style>
+          <a:lnRef idx="1">
+            <a:schemeClr val="accent1"/>
+          </a:lnRef>
+          <a:fillRef idx="3">
+            <a:schemeClr val="accent1"/>
+          </a:fillRef>
+          <a:effectRef idx="2">
+            <a:schemeClr val="accent1"/>
+          </a:effectRef>
+          <a:fontRef idx="minor">
+            <a:schemeClr val="lt1"/>
+          </a:fontRef>
+        </p:style>
+        <p:txBody>
+          <a:bodyPr rtlCol="0" anchor="ctr"/>
+          <a:lstStyle/>
+          <a:p>
+            <a:pPr algn="ctr"/>
+          </a:p>
+        </p:txBody>
+      </p:sp>
+      <p:sp>
+        <p:nvSpPr>
+          <p:cNvPr id="7" name="TextBox 6"/>
           <p:cNvSpPr txBox="1"/>
           <p:nvPr/>
         </p:nvSpPr>
         <p:spPr>
           <a:xfrm>
-            <a:off x="822960" y="2514600"/>
-            <a:ext cx="10515600" cy="731520"/>
+            <a:off x="1234440" y="2670048"/>
+            <a:ext cx="10424160" cy="640080"/>
           </a:xfrm>
           <a:prstGeom prst="rect">
             <a:avLst/>
@@ -3497,36 +4229,70 @@
           <a:p>
             <a:pPr algn="l"/>
             <a:r>
-              <a:rPr sz="1800" b="1">
-                <a:solidFill>
-                  <a:srgbClr val="FF5A1F"/>
-                </a:solidFill>
-                <a:latin typeface="Calibri"/>
-              </a:rPr>
-              <a:t>•  </a:t>
-            </a:r>
-            <a:r>
-              <a:rPr sz="1800" b="0">
-                <a:solidFill>
-                  <a:srgbClr val="F0F0F0"/>
-                </a:solidFill>
-                <a:latin typeface="Calibri"/>
-              </a:rPr>
-              <a:t>Площади по bbox-компонентам · ночь сложнее дня на 0.05 F1 (I1–I3 = NaN)</a:t>
-            </a:r>
-          </a:p>
-        </p:txBody>
-      </p:sp>
-      <p:sp>
-        <p:nvSpPr>
-          <p:cNvPr id="6" name="TextBox 5"/>
+              <a:rPr sz="1700" b="0">
+                <a:solidFill>
+                  <a:srgbClr val="A4ADB5"/>
+                </a:solidFill>
+                <a:latin typeface="Inter"/>
+              </a:rPr>
+              <a:t>Площади по bbox-компонентам · ночь сложнее дня на 0.05 F1 (I1–I3 ночью = NaN)</a:t>
+            </a:r>
+          </a:p>
+        </p:txBody>
+      </p:sp>
+      <p:sp>
+        <p:nvSpPr>
+          <p:cNvPr id="8" name="Oval 7"/>
+          <p:cNvSpPr/>
+          <p:nvPr/>
+        </p:nvSpPr>
+        <p:spPr>
+          <a:xfrm>
+            <a:off x="914400" y="3547872"/>
+            <a:ext cx="146304" cy="146304"/>
+          </a:xfrm>
+          <a:prstGeom prst="ellipse">
+            <a:avLst/>
+          </a:prstGeom>
+          <a:solidFill>
+            <a:srgbClr val="FF6B35"/>
+          </a:solidFill>
+          <a:ln>
+            <a:noFill/>
+          </a:ln>
+        </p:spPr>
+        <p:style>
+          <a:lnRef idx="1">
+            <a:schemeClr val="accent1"/>
+          </a:lnRef>
+          <a:fillRef idx="3">
+            <a:schemeClr val="accent1"/>
+          </a:fillRef>
+          <a:effectRef idx="2">
+            <a:schemeClr val="accent1"/>
+          </a:effectRef>
+          <a:fontRef idx="minor">
+            <a:schemeClr val="lt1"/>
+          </a:fontRef>
+        </p:style>
+        <p:txBody>
+          <a:bodyPr rtlCol="0" anchor="ctr"/>
+          <a:lstStyle/>
+          <a:p>
+            <a:pPr algn="ctr"/>
+          </a:p>
+        </p:txBody>
+      </p:sp>
+      <p:sp>
+        <p:nvSpPr>
+          <p:cNvPr id="9" name="TextBox 8"/>
           <p:cNvSpPr txBox="1"/>
           <p:nvPr/>
         </p:nvSpPr>
         <p:spPr>
           <a:xfrm>
-            <a:off x="822960" y="3291839"/>
-            <a:ext cx="10515600" cy="731520"/>
+            <a:off x="1234440" y="3383280"/>
+            <a:ext cx="10424160" cy="640080"/>
           </a:xfrm>
           <a:prstGeom prst="rect">
             <a:avLst/>
@@ -3541,36 +4307,70 @@
           <a:p>
             <a:pPr algn="l"/>
             <a:r>
-              <a:rPr sz="1800" b="1">
-                <a:solidFill>
-                  <a:srgbClr val="FF5A1F"/>
-                </a:solidFill>
-                <a:latin typeface="Calibri"/>
-              </a:rPr>
-              <a:t>•  </a:t>
-            </a:r>
-            <a:r>
-              <a:rPr sz="1800" b="0">
-                <a:solidFill>
-                  <a:srgbClr val="F0F0F0"/>
-                </a:solidFill>
-                <a:latin typeface="Calibri"/>
-              </a:rPr>
-              <a:t>Потолок 0.654 без переобучения с нуля · топ чата 0.8+ — догоняется большими бэкбоунами, не тюнингом</a:t>
-            </a:r>
-          </a:p>
-        </p:txBody>
-      </p:sp>
-      <p:sp>
-        <p:nvSpPr>
-          <p:cNvPr id="7" name="TextBox 6"/>
+              <a:rPr sz="1700" b="0">
+                <a:solidFill>
+                  <a:srgbClr val="A4ADB5"/>
+                </a:solidFill>
+                <a:latin typeface="Inter"/>
+              </a:rPr>
+              <a:t>0.654 — потолок без переобучения с нуля · топ чата 0.8+ берётся большими бэкбоунами, не тюнингом</a:t>
+            </a:r>
+          </a:p>
+        </p:txBody>
+      </p:sp>
+      <p:sp>
+        <p:nvSpPr>
+          <p:cNvPr id="10" name="Oval 9"/>
+          <p:cNvSpPr/>
+          <p:nvPr/>
+        </p:nvSpPr>
+        <p:spPr>
+          <a:xfrm>
+            <a:off x="914400" y="4261104"/>
+            <a:ext cx="146304" cy="146304"/>
+          </a:xfrm>
+          <a:prstGeom prst="ellipse">
+            <a:avLst/>
+          </a:prstGeom>
+          <a:solidFill>
+            <a:srgbClr val="FF6B35"/>
+          </a:solidFill>
+          <a:ln>
+            <a:noFill/>
+          </a:ln>
+        </p:spPr>
+        <p:style>
+          <a:lnRef idx="1">
+            <a:schemeClr val="accent1"/>
+          </a:lnRef>
+          <a:fillRef idx="3">
+            <a:schemeClr val="accent1"/>
+          </a:fillRef>
+          <a:effectRef idx="2">
+            <a:schemeClr val="accent1"/>
+          </a:effectRef>
+          <a:fontRef idx="minor">
+            <a:schemeClr val="lt1"/>
+          </a:fontRef>
+        </p:style>
+        <p:txBody>
+          <a:bodyPr rtlCol="0" anchor="ctr"/>
+          <a:lstStyle/>
+          <a:p>
+            <a:pPr algn="ctr"/>
+          </a:p>
+        </p:txBody>
+      </p:sp>
+      <p:sp>
+        <p:nvSpPr>
+          <p:cNvPr id="11" name="TextBox 10"/>
           <p:cNvSpPr txBox="1"/>
           <p:nvPr/>
         </p:nvSpPr>
         <p:spPr>
           <a:xfrm>
-            <a:off x="822960" y="4069079"/>
-            <a:ext cx="10515600" cy="731520"/>
+            <a:off x="1234440" y="4096512"/>
+            <a:ext cx="10424160" cy="640080"/>
           </a:xfrm>
           <a:prstGeom prst="rect">
             <a:avLst/>
@@ -3585,22 +4385,48 @@
           <a:p>
             <a:pPr algn="l"/>
             <a:r>
-              <a:rPr sz="1800" b="1">
-                <a:solidFill>
-                  <a:srgbClr val="FF5A1F"/>
-                </a:solidFill>
-                <a:latin typeface="Calibri"/>
-              </a:rPr>
-              <a:t>•  </a:t>
-            </a:r>
-            <a:r>
-              <a:rPr sz="1800" b="0">
-                <a:solidFill>
-                  <a:srgbClr val="F0F0F0"/>
-                </a:solidFill>
-                <a:latin typeface="Calibri"/>
+              <a:rPr sz="1700" b="0">
+                <a:solidFill>
+                  <a:srgbClr val="A4ADB5"/>
+                </a:solidFill>
+                <a:latin typeface="Inter"/>
               </a:rPr>
               <a:t>Next: контурная векторизация вместо bbox · выверка GSD-площадей AF · свежие foundation-модели</a:t>
+            </a:r>
+          </a:p>
+        </p:txBody>
+      </p:sp>
+      <p:sp>
+        <p:nvSpPr>
+          <p:cNvPr id="12" name="TextBox 11"/>
+          <p:cNvSpPr txBox="1"/>
+          <p:nvPr/>
+        </p:nvSpPr>
+        <p:spPr>
+          <a:xfrm>
+            <a:off x="731520" y="6035040"/>
+            <a:ext cx="10698480" cy="457200"/>
+          </a:xfrm>
+          <a:prstGeom prst="rect">
+            <a:avLst/>
+          </a:prstGeom>
+          <a:noFill/>
+        </p:spPr>
+        <p:txBody>
+          <a:bodyPr wrap="square">
+            <a:spAutoFit/>
+          </a:bodyPr>
+          <a:lstStyle/>
+          <a:p>
+            <a:pPr algn="l"/>
+            <a:r>
+              <a:rPr sz="1400" b="1">
+                <a:solidFill>
+                  <a:srgbClr val="62D99A"/>
+                </a:solidFill>
+                <a:latin typeface="Inter"/>
+              </a:rPr>
+              <a:t>●  LIVE  ·  kosmohack · Score 0.654 · спасибо</a:t>
             </a:r>
           </a:p>
         </p:txBody>
@@ -3619,7 +4445,7 @@
     <p:bg>
       <p:bgPr>
         <a:solidFill>
-          <a:srgbClr val="111318"/>
+          <a:srgbClr val="070A0D"/>
         </a:solidFill>
         <a:effectLst/>
       </p:bgPr>
@@ -3639,8 +4465,8 @@
         </p:nvSpPr>
         <p:spPr>
           <a:xfrm>
-            <a:off x="640080" y="274320"/>
-            <a:ext cx="10881360" cy="365760"/>
+            <a:off x="731520" y="411480"/>
+            <a:ext cx="10698480" cy="320040"/>
           </a:xfrm>
           <a:prstGeom prst="rect">
             <a:avLst/>
@@ -3655,13 +4481,22 @@
           <a:p>
             <a:pPr algn="l"/>
             <a:r>
-              <a:rPr sz="1400" b="1">
-                <a:solidFill>
-                  <a:srgbClr val="FF5A1F"/>
-                </a:solidFill>
-                <a:latin typeface="Calibri"/>
-              </a:rPr>
-              <a:t>01 · ПРОБЛЕМА</a:t>
+              <a:rPr sz="1300" b="1">
+                <a:solidFill>
+                  <a:srgbClr val="69737D"/>
+                </a:solidFill>
+                <a:latin typeface="Inter"/>
+              </a:rPr>
+              <a:t>01  </a:t>
+            </a:r>
+            <a:r>
+              <a:rPr sz="1300" b="1">
+                <a:solidFill>
+                  <a:srgbClr val="69737D"/>
+                </a:solidFill>
+                <a:latin typeface="Inter"/>
+              </a:rPr>
+              <a:t>ПРОБЛЕМА</a:t>
             </a:r>
           </a:p>
         </p:txBody>
@@ -3674,8 +4509,8 @@
         </p:nvSpPr>
         <p:spPr>
           <a:xfrm>
-            <a:off x="640080" y="640080"/>
-            <a:ext cx="10881360" cy="822960"/>
+            <a:off x="731520" y="777240"/>
+            <a:ext cx="10698480" cy="914400"/>
           </a:xfrm>
           <a:prstGeom prst="rect">
             <a:avLst/>
@@ -3690,27 +4525,70 @@
           <a:p>
             <a:pPr algn="l"/>
             <a:r>
-              <a:rPr sz="3600" b="1">
-                <a:solidFill>
-                  <a:srgbClr val="F0F0F0"/>
-                </a:solidFill>
-                <a:latin typeface="Calibri"/>
-              </a:rPr>
-              <a:t>Почему глобальных продуктов недостаточно</a:t>
-            </a:r>
-          </a:p>
-        </p:txBody>
-      </p:sp>
-      <p:sp>
-        <p:nvSpPr>
-          <p:cNvPr id="4" name="TextBox 3"/>
+              <a:rPr sz="3400" b="1">
+                <a:solidFill>
+                  <a:srgbClr val="F2F4F5"/>
+                </a:solidFill>
+                <a:latin typeface="Inter"/>
+              </a:rPr>
+              <a:t>Глобальным продуктам нельзя доверять вслепую</a:t>
+            </a:r>
+          </a:p>
+        </p:txBody>
+      </p:sp>
+      <p:sp>
+        <p:nvSpPr>
+          <p:cNvPr id="4" name="Oval 3"/>
+          <p:cNvSpPr/>
+          <p:nvPr/>
+        </p:nvSpPr>
+        <p:spPr>
+          <a:xfrm>
+            <a:off x="914400" y="2121408"/>
+            <a:ext cx="146304" cy="146304"/>
+          </a:xfrm>
+          <a:prstGeom prst="ellipse">
+            <a:avLst/>
+          </a:prstGeom>
+          <a:solidFill>
+            <a:srgbClr val="FF6B35"/>
+          </a:solidFill>
+          <a:ln>
+            <a:noFill/>
+          </a:ln>
+        </p:spPr>
+        <p:style>
+          <a:lnRef idx="1">
+            <a:schemeClr val="accent1"/>
+          </a:lnRef>
+          <a:fillRef idx="3">
+            <a:schemeClr val="accent1"/>
+          </a:fillRef>
+          <a:effectRef idx="2">
+            <a:schemeClr val="accent1"/>
+          </a:effectRef>
+          <a:fontRef idx="minor">
+            <a:schemeClr val="lt1"/>
+          </a:fontRef>
+        </p:style>
+        <p:txBody>
+          <a:bodyPr rtlCol="0" anchor="ctr"/>
+          <a:lstStyle/>
+          <a:p>
+            <a:pPr algn="ctr"/>
+          </a:p>
+        </p:txBody>
+      </p:sp>
+      <p:sp>
+        <p:nvSpPr>
+          <p:cNvPr id="5" name="TextBox 4"/>
           <p:cNvSpPr txBox="1"/>
           <p:nvPr/>
         </p:nvSpPr>
         <p:spPr>
           <a:xfrm>
-            <a:off x="822960" y="1737360"/>
-            <a:ext cx="10515600" cy="731520"/>
+            <a:off x="1234440" y="1956816"/>
+            <a:ext cx="10424160" cy="640080"/>
           </a:xfrm>
           <a:prstGeom prst="rect">
             <a:avLst/>
@@ -3725,36 +4603,70 @@
           <a:p>
             <a:pPr algn="l"/>
             <a:r>
-              <a:rPr sz="2000" b="1">
-                <a:solidFill>
-                  <a:srgbClr val="FF5A1F"/>
-                </a:solidFill>
-                <a:latin typeface="Calibri"/>
-              </a:rPr>
-              <a:t>•  </a:t>
-            </a:r>
-            <a:r>
-              <a:rPr sz="2000" b="0">
-                <a:solidFill>
-                  <a:srgbClr val="F0F0F0"/>
-                </a:solidFill>
-                <a:latin typeface="Calibri"/>
-              </a:rPr>
-              <a:t>FIRMS даёт ложные срабатывания на факелах, металлургии и ТЭЦ — в промзонах их больше, чем настоящих пожаров</a:t>
-            </a:r>
-          </a:p>
-        </p:txBody>
-      </p:sp>
-      <p:sp>
-        <p:nvSpPr>
-          <p:cNvPr id="5" name="TextBox 4"/>
+              <a:rPr sz="1700" b="0">
+                <a:solidFill>
+                  <a:srgbClr val="A4ADB5"/>
+                </a:solidFill>
+                <a:latin typeface="Inter"/>
+              </a:rPr>
+              <a:t>FIRMS сыплет ложняками на факелах, металлургии и ТЭЦ — в промзонах их больше, чем настоящих пожаров</a:t>
+            </a:r>
+          </a:p>
+        </p:txBody>
+      </p:sp>
+      <p:sp>
+        <p:nvSpPr>
+          <p:cNvPr id="6" name="Oval 5"/>
+          <p:cNvSpPr/>
+          <p:nvPr/>
+        </p:nvSpPr>
+        <p:spPr>
+          <a:xfrm>
+            <a:off x="914400" y="2834640"/>
+            <a:ext cx="146304" cy="146304"/>
+          </a:xfrm>
+          <a:prstGeom prst="ellipse">
+            <a:avLst/>
+          </a:prstGeom>
+          <a:solidFill>
+            <a:srgbClr val="FF6B35"/>
+          </a:solidFill>
+          <a:ln>
+            <a:noFill/>
+          </a:ln>
+        </p:spPr>
+        <p:style>
+          <a:lnRef idx="1">
+            <a:schemeClr val="accent1"/>
+          </a:lnRef>
+          <a:fillRef idx="3">
+            <a:schemeClr val="accent1"/>
+          </a:fillRef>
+          <a:effectRef idx="2">
+            <a:schemeClr val="accent1"/>
+          </a:effectRef>
+          <a:fontRef idx="minor">
+            <a:schemeClr val="lt1"/>
+          </a:fontRef>
+        </p:style>
+        <p:txBody>
+          <a:bodyPr rtlCol="0" anchor="ctr"/>
+          <a:lstStyle/>
+          <a:p>
+            <a:pPr algn="ctr"/>
+          </a:p>
+        </p:txBody>
+      </p:sp>
+      <p:sp>
+        <p:nvSpPr>
+          <p:cNvPr id="7" name="TextBox 6"/>
           <p:cNvSpPr txBox="1"/>
           <p:nvPr/>
         </p:nvSpPr>
         <p:spPr>
           <a:xfrm>
-            <a:off x="822960" y="2514600"/>
-            <a:ext cx="10515600" cy="731520"/>
+            <a:off x="1234440" y="2670048"/>
+            <a:ext cx="10424160" cy="640080"/>
           </a:xfrm>
           <a:prstGeom prst="rect">
             <a:avLst/>
@@ -3769,36 +4681,70 @@
           <a:p>
             <a:pPr algn="l"/>
             <a:r>
-              <a:rPr sz="2000" b="1">
-                <a:solidFill>
-                  <a:srgbClr val="FF5A1F"/>
-                </a:solidFill>
-                <a:latin typeface="Calibri"/>
-              </a:rPr>
-              <a:t>•  </a:t>
-            </a:r>
-            <a:r>
-              <a:rPr sz="2000" b="0">
-                <a:solidFill>
-                  <a:srgbClr val="F0F0F0"/>
-                </a:solidFill>
-                <a:latin typeface="Calibri"/>
-              </a:rPr>
-              <a:t>Блики (металл, теплицы, вода) и пропуски малых очагов, облачности и дыма</a:t>
-            </a:r>
-          </a:p>
-        </p:txBody>
-      </p:sp>
-      <p:sp>
-        <p:nvSpPr>
-          <p:cNvPr id="6" name="TextBox 5"/>
+              <a:rPr sz="1700" b="0">
+                <a:solidFill>
+                  <a:srgbClr val="A4ADB5"/>
+                </a:solidFill>
+                <a:latin typeface="Inter"/>
+              </a:rPr>
+              <a:t>Блики металла, теплиц и воды · пропуски малых очагов, облачности и дыма</a:t>
+            </a:r>
+          </a:p>
+        </p:txBody>
+      </p:sp>
+      <p:sp>
+        <p:nvSpPr>
+          <p:cNvPr id="8" name="Oval 7"/>
+          <p:cNvSpPr/>
+          <p:nvPr/>
+        </p:nvSpPr>
+        <p:spPr>
+          <a:xfrm>
+            <a:off x="914400" y="3547872"/>
+            <a:ext cx="146304" cy="146304"/>
+          </a:xfrm>
+          <a:prstGeom prst="ellipse">
+            <a:avLst/>
+          </a:prstGeom>
+          <a:solidFill>
+            <a:srgbClr val="FF6B35"/>
+          </a:solidFill>
+          <a:ln>
+            <a:noFill/>
+          </a:ln>
+        </p:spPr>
+        <p:style>
+          <a:lnRef idx="1">
+            <a:schemeClr val="accent1"/>
+          </a:lnRef>
+          <a:fillRef idx="3">
+            <a:schemeClr val="accent1"/>
+          </a:fillRef>
+          <a:effectRef idx="2">
+            <a:schemeClr val="accent1"/>
+          </a:effectRef>
+          <a:fontRef idx="minor">
+            <a:schemeClr val="lt1"/>
+          </a:fontRef>
+        </p:style>
+        <p:txBody>
+          <a:bodyPr rtlCol="0" anchor="ctr"/>
+          <a:lstStyle/>
+          <a:p>
+            <a:pPr algn="ctr"/>
+          </a:p>
+        </p:txBody>
+      </p:sp>
+      <p:sp>
+        <p:nvSpPr>
+          <p:cNvPr id="9" name="TextBox 8"/>
           <p:cNvSpPr txBox="1"/>
           <p:nvPr/>
         </p:nvSpPr>
         <p:spPr>
           <a:xfrm>
-            <a:off x="822960" y="3291839"/>
-            <a:ext cx="10515600" cy="731520"/>
+            <a:off x="1234440" y="3383280"/>
+            <a:ext cx="10424160" cy="640080"/>
           </a:xfrm>
           <a:prstGeom prst="rect">
             <a:avLst/>
@@ -3813,36 +4759,70 @@
           <a:p>
             <a:pPr algn="l"/>
             <a:r>
-              <a:rPr sz="2000" b="1">
-                <a:solidFill>
-                  <a:srgbClr val="FF5A1F"/>
-                </a:solidFill>
-                <a:latin typeface="Calibri"/>
-              </a:rPr>
-              <a:t>•  </a:t>
-            </a:r>
-            <a:r>
-              <a:rPr sz="2000" b="0">
-                <a:solidFill>
-                  <a:srgbClr val="F0F0F0"/>
-                </a:solidFill>
-                <a:latin typeface="Calibri"/>
-              </a:rPr>
-              <a:t>Оценка гарей — выборочно, с задержкой в недели, без единой методики</a:t>
-            </a:r>
-          </a:p>
-        </p:txBody>
-      </p:sp>
-      <p:sp>
-        <p:nvSpPr>
-          <p:cNvPr id="7" name="TextBox 6"/>
+              <a:rPr sz="1700" b="0">
+                <a:solidFill>
+                  <a:srgbClr val="A4ADB5"/>
+                </a:solidFill>
+                <a:latin typeface="Inter"/>
+              </a:rPr>
+              <a:t>Гари оценивают выборочно, с задержкой в недели, без единой методики</a:t>
+            </a:r>
+          </a:p>
+        </p:txBody>
+      </p:sp>
+      <p:sp>
+        <p:nvSpPr>
+          <p:cNvPr id="10" name="Oval 9"/>
+          <p:cNvSpPr/>
+          <p:nvPr/>
+        </p:nvSpPr>
+        <p:spPr>
+          <a:xfrm>
+            <a:off x="914400" y="4261104"/>
+            <a:ext cx="146304" cy="146304"/>
+          </a:xfrm>
+          <a:prstGeom prst="ellipse">
+            <a:avLst/>
+          </a:prstGeom>
+          <a:solidFill>
+            <a:srgbClr val="FF6B35"/>
+          </a:solidFill>
+          <a:ln>
+            <a:noFill/>
+          </a:ln>
+        </p:spPr>
+        <p:style>
+          <a:lnRef idx="1">
+            <a:schemeClr val="accent1"/>
+          </a:lnRef>
+          <a:fillRef idx="3">
+            <a:schemeClr val="accent1"/>
+          </a:fillRef>
+          <a:effectRef idx="2">
+            <a:schemeClr val="accent1"/>
+          </a:effectRef>
+          <a:fontRef idx="minor">
+            <a:schemeClr val="lt1"/>
+          </a:fontRef>
+        </p:style>
+        <p:txBody>
+          <a:bodyPr rtlCol="0" anchor="ctr"/>
+          <a:lstStyle/>
+          <a:p>
+            <a:pPr algn="ctr"/>
+          </a:p>
+        </p:txBody>
+      </p:sp>
+      <p:sp>
+        <p:nvSpPr>
+          <p:cNvPr id="11" name="TextBox 10"/>
           <p:cNvSpPr txBox="1"/>
           <p:nvPr/>
         </p:nvSpPr>
         <p:spPr>
           <a:xfrm>
-            <a:off x="822960" y="4069079"/>
-            <a:ext cx="10515600" cy="731520"/>
+            <a:off x="1234440" y="4096512"/>
+            <a:ext cx="10424160" cy="640080"/>
           </a:xfrm>
           <a:prstGeom prst="rect">
             <a:avLst/>
@@ -3857,22 +4837,13 @@
           <a:p>
             <a:pPr algn="l"/>
             <a:r>
-              <a:rPr sz="2000" b="1">
-                <a:solidFill>
-                  <a:srgbClr val="FF5A1F"/>
-                </a:solidFill>
-                <a:latin typeface="Calibri"/>
-              </a:rPr>
-              <a:t>•  </a:t>
-            </a:r>
-            <a:r>
-              <a:rPr sz="2000" b="0">
-                <a:solidFill>
-                  <a:srgbClr val="F0F0F0"/>
-                </a:solidFill>
-                <a:latin typeface="Calibri"/>
-              </a:rPr>
-              <a:t>Нужно: чистые термоточки + контуры гарей по степеням + запрос без ручных операций с растрами</a:t>
+              <a:rPr sz="1700" b="0">
+                <a:solidFill>
+                  <a:srgbClr val="A4ADB5"/>
+                </a:solidFill>
+                <a:latin typeface="Inter"/>
+              </a:rPr>
+              <a:t>Надо: чистые термоточки + контуры гарей по степеням + запрос без ручных растров</a:t>
             </a:r>
           </a:p>
         </p:txBody>
@@ -3891,7 +4862,7 @@
     <p:bg>
       <p:bgPr>
         <a:solidFill>
-          <a:srgbClr val="111318"/>
+          <a:srgbClr val="070A0D"/>
         </a:solidFill>
         <a:effectLst/>
       </p:bgPr>
@@ -3911,8 +4882,8 @@
         </p:nvSpPr>
         <p:spPr>
           <a:xfrm>
-            <a:off x="640080" y="274320"/>
-            <a:ext cx="10881360" cy="365760"/>
+            <a:off x="731520" y="411480"/>
+            <a:ext cx="10698480" cy="320040"/>
           </a:xfrm>
           <a:prstGeom prst="rect">
             <a:avLst/>
@@ -3927,13 +4898,22 @@
           <a:p>
             <a:pPr algn="l"/>
             <a:r>
-              <a:rPr sz="1400" b="1">
-                <a:solidFill>
-                  <a:srgbClr val="FF5A1F"/>
-                </a:solidFill>
-                <a:latin typeface="Calibri"/>
-              </a:rPr>
-              <a:t>02 · СХЕМА РЕШЕНИЯ</a:t>
+              <a:rPr sz="1300" b="1">
+                <a:solidFill>
+                  <a:srgbClr val="69737D"/>
+                </a:solidFill>
+                <a:latin typeface="Inter"/>
+              </a:rPr>
+              <a:t>02  </a:t>
+            </a:r>
+            <a:r>
+              <a:rPr sz="1300" b="1">
+                <a:solidFill>
+                  <a:srgbClr val="69737D"/>
+                </a:solidFill>
+                <a:latin typeface="Inter"/>
+              </a:rPr>
+              <a:t>СХЕМА РЕШЕНИЯ</a:t>
             </a:r>
           </a:p>
         </p:txBody>
@@ -3946,8 +4926,8 @@
         </p:nvSpPr>
         <p:spPr>
           <a:xfrm>
-            <a:off x="640080" y="640080"/>
-            <a:ext cx="10881360" cy="822960"/>
+            <a:off x="731520" y="777240"/>
+            <a:ext cx="10698480" cy="914400"/>
           </a:xfrm>
           <a:prstGeom prst="rect">
             <a:avLst/>
@@ -3962,11 +4942,11 @@
           <a:p>
             <a:pPr algn="l"/>
             <a:r>
-              <a:rPr sz="3600" b="1">
-                <a:solidFill>
-                  <a:srgbClr val="F0F0F0"/>
-                </a:solidFill>
-                <a:latin typeface="Calibri"/>
+              <a:rPr sz="3400" b="1">
+                <a:solidFill>
+                  <a:srgbClr val="F2F4F5"/>
+                </a:solidFill>
+                <a:latin typeface="Inter"/>
               </a:rPr>
               <a:t>Два модуля → общий ответ → сервис</a:t>
             </a:r>
@@ -3981,17 +4961,21 @@
         </p:nvSpPr>
         <p:spPr>
           <a:xfrm>
-            <a:off x="640080" y="2377440"/>
-            <a:ext cx="1920240" cy="1463040"/>
+            <a:off x="731520" y="2286000"/>
+            <a:ext cx="1965960" cy="1554480"/>
           </a:xfrm>
           <a:prstGeom prst="roundRect">
-            <a:avLst/>
+            <a:avLst>
+              <a:gd name="adj" fmla="val 8000"/>
+            </a:avLst>
           </a:prstGeom>
           <a:solidFill>
-            <a:srgbClr val="1B1E26"/>
+            <a:srgbClr val="0E1318"/>
           </a:solidFill>
-          <a:ln>
-            <a:noFill/>
+          <a:ln w="12700">
+            <a:solidFill>
+              <a:srgbClr val="232A33"/>
+            </a:solidFill>
           </a:ln>
         </p:spPr>
         <p:style>
@@ -4024,8 +5008,8 @@
         </p:nvSpPr>
         <p:spPr>
           <a:xfrm>
-            <a:off x="640080" y="2606040"/>
-            <a:ext cx="1920240" cy="1005840"/>
+            <a:off x="731520" y="2606040"/>
+            <a:ext cx="1965960" cy="1097280"/>
           </a:xfrm>
           <a:prstGeom prst="rect">
             <a:avLst/>
@@ -4040,14 +5024,14 @@
           <a:p>
             <a:pPr algn="ctr"/>
             <a:r>
-              <a:rPr sz="2000" b="1">
-                <a:solidFill>
-                  <a:srgbClr val="F0F0F0"/>
-                </a:solidFill>
-                <a:latin typeface="Calibri"/>
+              <a:rPr sz="1700" b="1">
+                <a:solidFill>
+                  <a:srgbClr val="F2F4F5"/>
+                </a:solidFill>
+                <a:latin typeface="Inter"/>
               </a:rPr>
               <a:t>VIIRS AF
-Unet</a:t>
+Unet-effb4</a:t>
             </a:r>
           </a:p>
         </p:txBody>
@@ -4060,7 +5044,7 @@
         </p:nvSpPr>
         <p:spPr>
           <a:xfrm>
-            <a:off x="2560320" y="2834640"/>
+            <a:off x="2697480" y="2788920"/>
             <a:ext cx="365760" cy="457200"/>
           </a:xfrm>
           <a:prstGeom prst="rect">
@@ -4076,11 +5060,11 @@
           <a:p>
             <a:pPr algn="ctr"/>
             <a:r>
-              <a:rPr sz="2800" b="0">
-                <a:solidFill>
-                  <a:srgbClr val="FF5A1F"/>
-                </a:solidFill>
-                <a:latin typeface="Calibri"/>
+              <a:rPr sz="2600" b="0">
+                <a:solidFill>
+                  <a:srgbClr val="FF6B35"/>
+                </a:solidFill>
+                <a:latin typeface="Inter"/>
               </a:rPr>
               <a:t>→</a:t>
             </a:r>
@@ -4095,17 +5079,21 @@
         </p:nvSpPr>
         <p:spPr>
           <a:xfrm>
-            <a:off x="2926080" y="2377440"/>
-            <a:ext cx="1920240" cy="1463040"/>
+            <a:off x="3017520" y="2286000"/>
+            <a:ext cx="1965960" cy="1554480"/>
           </a:xfrm>
           <a:prstGeom prst="roundRect">
-            <a:avLst/>
+            <a:avLst>
+              <a:gd name="adj" fmla="val 8000"/>
+            </a:avLst>
           </a:prstGeom>
           <a:solidFill>
-            <a:srgbClr val="1B1E26"/>
+            <a:srgbClr val="0E1318"/>
           </a:solidFill>
-          <a:ln>
-            <a:noFill/>
+          <a:ln w="12700">
+            <a:solidFill>
+              <a:srgbClr val="232A33"/>
+            </a:solidFill>
           </a:ln>
         </p:spPr>
         <p:style>
@@ -4138,8 +5126,8 @@
         </p:nvSpPr>
         <p:spPr>
           <a:xfrm>
-            <a:off x="2926080" y="2606040"/>
-            <a:ext cx="1920240" cy="1005840"/>
+            <a:off x="3017520" y="2606040"/>
+            <a:ext cx="1965960" cy="1097280"/>
           </a:xfrm>
           <a:prstGeom prst="rect">
             <a:avLst/>
@@ -4154,14 +5142,14 @@
           <a:p>
             <a:pPr algn="ctr"/>
             <a:r>
-              <a:rPr sz="2000" b="1">
-                <a:solidFill>
-                  <a:srgbClr val="F0F0F0"/>
-                </a:solidFill>
-                <a:latin typeface="Calibri"/>
+              <a:rPr sz="1700" b="1">
+                <a:solidFill>
+                  <a:srgbClr val="F2F4F5"/>
+                </a:solidFill>
+                <a:latin typeface="Inter"/>
               </a:rPr>
               <a:t>S2 BS
-Unet</a:t>
+Unet-effb4</a:t>
             </a:r>
           </a:p>
         </p:txBody>
@@ -4174,7 +5162,7 @@
         </p:nvSpPr>
         <p:spPr>
           <a:xfrm>
-            <a:off x="4846320" y="2834640"/>
+            <a:off x="4983480" y="2788920"/>
             <a:ext cx="365760" cy="457200"/>
           </a:xfrm>
           <a:prstGeom prst="rect">
@@ -4190,11 +5178,11 @@
           <a:p>
             <a:pPr algn="ctr"/>
             <a:r>
-              <a:rPr sz="2800" b="0">
-                <a:solidFill>
-                  <a:srgbClr val="FF5A1F"/>
-                </a:solidFill>
-                <a:latin typeface="Calibri"/>
+              <a:rPr sz="2600" b="0">
+                <a:solidFill>
+                  <a:srgbClr val="FF6B35"/>
+                </a:solidFill>
+                <a:latin typeface="Inter"/>
               </a:rPr>
               <a:t>→</a:t>
             </a:r>
@@ -4209,17 +5197,21 @@
         </p:nvSpPr>
         <p:spPr>
           <a:xfrm>
-            <a:off x="5212080" y="2377440"/>
-            <a:ext cx="1920240" cy="1463040"/>
+            <a:off x="5303520" y="2286000"/>
+            <a:ext cx="1965960" cy="1554480"/>
           </a:xfrm>
           <a:prstGeom prst="roundRect">
-            <a:avLst/>
+            <a:avLst>
+              <a:gd name="adj" fmla="val 8000"/>
+            </a:avLst>
           </a:prstGeom>
           <a:solidFill>
-            <a:srgbClr val="1B1E26"/>
+            <a:srgbClr val="0E1318"/>
           </a:solidFill>
-          <a:ln>
-            <a:noFill/>
+          <a:ln w="12700">
+            <a:solidFill>
+              <a:srgbClr val="232A33"/>
+            </a:solidFill>
           </a:ln>
         </p:spPr>
         <p:style>
@@ -4252,8 +5244,8 @@
         </p:nvSpPr>
         <p:spPr>
           <a:xfrm>
-            <a:off x="5212080" y="2606040"/>
-            <a:ext cx="1920240" cy="1005840"/>
+            <a:off x="5303520" y="2606040"/>
+            <a:ext cx="1965960" cy="1097280"/>
           </a:xfrm>
           <a:prstGeom prst="rect">
             <a:avLst/>
@@ -4268,13 +5260,14 @@
           <a:p>
             <a:pPr algn="ctr"/>
             <a:r>
-              <a:rPr sz="2000" b="1">
-                <a:solidFill>
-                  <a:srgbClr val="F0F0F0"/>
-                </a:solidFill>
-                <a:latin typeface="Calibri"/>
-              </a:rPr>
-              <a:t>inference.py</a:t>
+              <a:rPr sz="1700" b="1">
+                <a:solidFill>
+                  <a:srgbClr val="F2F4F5"/>
+                </a:solidFill>
+                <a:latin typeface="Inter"/>
+              </a:rPr>
+              <a:t>inference.py
+детерминирован</a:t>
             </a:r>
           </a:p>
         </p:txBody>
@@ -4287,7 +5280,7 @@
         </p:nvSpPr>
         <p:spPr>
           <a:xfrm>
-            <a:off x="7132320" y="2834640"/>
+            <a:off x="7269480" y="2788920"/>
             <a:ext cx="365760" cy="457200"/>
           </a:xfrm>
           <a:prstGeom prst="rect">
@@ -4303,11 +5296,11 @@
           <a:p>
             <a:pPr algn="ctr"/>
             <a:r>
-              <a:rPr sz="2800" b="0">
-                <a:solidFill>
-                  <a:srgbClr val="FF5A1F"/>
-                </a:solidFill>
-                <a:latin typeface="Calibri"/>
+              <a:rPr sz="2600" b="0">
+                <a:solidFill>
+                  <a:srgbClr val="FF6B35"/>
+                </a:solidFill>
+                <a:latin typeface="Inter"/>
               </a:rPr>
               <a:t>→</a:t>
             </a:r>
@@ -4322,17 +5315,21 @@
         </p:nvSpPr>
         <p:spPr>
           <a:xfrm>
-            <a:off x="7498079" y="2377440"/>
-            <a:ext cx="1920240" cy="1463040"/>
+            <a:off x="7589520" y="2286000"/>
+            <a:ext cx="1965960" cy="1554480"/>
           </a:xfrm>
           <a:prstGeom prst="roundRect">
-            <a:avLst/>
+            <a:avLst>
+              <a:gd name="adj" fmla="val 8000"/>
+            </a:avLst>
           </a:prstGeom>
           <a:solidFill>
-            <a:srgbClr val="1B1E26"/>
+            <a:srgbClr val="0E1318"/>
           </a:solidFill>
-          <a:ln>
-            <a:noFill/>
+          <a:ln w="12700">
+            <a:solidFill>
+              <a:srgbClr val="232A33"/>
+            </a:solidFill>
           </a:ln>
         </p:spPr>
         <p:style>
@@ -4359,91 +5356,20 @@
       </p:sp>
       <p:sp>
         <p:nvSpPr>
-          <p:cNvPr id="14" name="TextBox 13"/>
-          <p:cNvSpPr txBox="1"/>
-          <p:nvPr/>
-        </p:nvSpPr>
-        <p:spPr>
-          <a:xfrm>
-            <a:off x="7498079" y="2606040"/>
-            <a:ext cx="1920240" cy="1005840"/>
-          </a:xfrm>
-          <a:prstGeom prst="rect">
-            <a:avLst/>
-          </a:prstGeom>
-          <a:noFill/>
-        </p:spPr>
-        <p:txBody>
-          <a:bodyPr wrap="square">
-            <a:spAutoFit/>
-          </a:bodyPr>
-          <a:lstStyle/>
-          <a:p>
-            <a:pPr algn="ctr"/>
-            <a:r>
-              <a:rPr sz="2000" b="1">
-                <a:solidFill>
-                  <a:srgbClr val="F0F0F0"/>
-                </a:solidFill>
-                <a:latin typeface="Calibri"/>
-              </a:rPr>
-              <a:t>submission.csv
-447 строк</a:t>
-            </a:r>
-          </a:p>
-        </p:txBody>
-      </p:sp>
-      <p:sp>
-        <p:nvSpPr>
-          <p:cNvPr id="15" name="TextBox 14"/>
-          <p:cNvSpPr txBox="1"/>
-          <p:nvPr/>
-        </p:nvSpPr>
-        <p:spPr>
-          <a:xfrm>
-            <a:off x="9418320" y="2834640"/>
-            <a:ext cx="365760" cy="457200"/>
-          </a:xfrm>
-          <a:prstGeom prst="rect">
-            <a:avLst/>
-          </a:prstGeom>
-          <a:noFill/>
-        </p:spPr>
-        <p:txBody>
-          <a:bodyPr wrap="square">
-            <a:spAutoFit/>
-          </a:bodyPr>
-          <a:lstStyle/>
-          <a:p>
-            <a:pPr algn="ctr"/>
-            <a:r>
-              <a:rPr sz="2800" b="0">
-                <a:solidFill>
-                  <a:srgbClr val="FF5A1F"/>
-                </a:solidFill>
-                <a:latin typeface="Calibri"/>
-              </a:rPr>
-              <a:t>→</a:t>
-            </a:r>
-          </a:p>
-        </p:txBody>
-      </p:sp>
-      <p:sp>
-        <p:nvSpPr>
-          <p:cNvPr id="16" name="Rounded Rectangle 15"/>
+          <p:cNvPr id="14" name="Oval 13"/>
           <p:cNvSpPr/>
           <p:nvPr/>
         </p:nvSpPr>
         <p:spPr>
           <a:xfrm>
-            <a:off x="9784080" y="2377440"/>
-            <a:ext cx="1920240" cy="1463040"/>
-          </a:xfrm>
-          <a:prstGeom prst="roundRect">
+            <a:off x="8458200" y="2468880"/>
+            <a:ext cx="146304" cy="146304"/>
+          </a:xfrm>
+          <a:prstGeom prst="ellipse">
             <a:avLst/>
           </a:prstGeom>
           <a:solidFill>
-            <a:srgbClr val="1B1E26"/>
+            <a:srgbClr val="62D99A"/>
           </a:solidFill>
           <a:ln>
             <a:noFill/>
@@ -4473,14 +5399,14 @@
       </p:sp>
       <p:sp>
         <p:nvSpPr>
-          <p:cNvPr id="17" name="TextBox 16"/>
+          <p:cNvPr id="15" name="TextBox 14"/>
           <p:cNvSpPr txBox="1"/>
           <p:nvPr/>
         </p:nvSpPr>
         <p:spPr>
           <a:xfrm>
-            <a:off x="9784080" y="2606040"/>
-            <a:ext cx="1920240" cy="1005840"/>
+            <a:off x="7589520" y="2743200"/>
+            <a:ext cx="1965960" cy="1097280"/>
           </a:xfrm>
           <a:prstGeom prst="rect">
             <a:avLst/>
@@ -4495,28 +5421,28 @@
           <a:p>
             <a:pPr algn="ctr"/>
             <a:r>
-              <a:rPr sz="2000" b="1">
-                <a:solidFill>
-                  <a:srgbClr val="F0F0F0"/>
-                </a:solidFill>
-                <a:latin typeface="Calibri"/>
-              </a:rPr>
-              <a:t>FastAPI +
-веб-карта</a:t>
-            </a:r>
-          </a:p>
-        </p:txBody>
-      </p:sp>
-      <p:sp>
-        <p:nvSpPr>
-          <p:cNvPr id="18" name="TextBox 17"/>
+              <a:rPr sz="1700" b="1">
+                <a:solidFill>
+                  <a:srgbClr val="F2F4F5"/>
+                </a:solidFill>
+                <a:latin typeface="Inter"/>
+              </a:rPr>
+              <a:t>submission.csv
+447 строк</a:t>
+            </a:r>
+          </a:p>
+        </p:txBody>
+      </p:sp>
+      <p:sp>
+        <p:nvSpPr>
+          <p:cNvPr id="16" name="TextBox 15"/>
           <p:cNvSpPr txBox="1"/>
           <p:nvPr/>
         </p:nvSpPr>
         <p:spPr>
           <a:xfrm>
-            <a:off x="640080" y="4480560"/>
-            <a:ext cx="10881360" cy="1463040"/>
+            <a:off x="9555480" y="2788920"/>
+            <a:ext cx="365760" cy="457200"/>
           </a:xfrm>
           <a:prstGeom prst="rect">
             <a:avLst/>
@@ -4529,15 +5455,143 @@
           </a:bodyPr>
           <a:lstStyle/>
           <a:p>
+            <a:pPr algn="ctr"/>
+            <a:r>
+              <a:rPr sz="2600" b="0">
+                <a:solidFill>
+                  <a:srgbClr val="FF6B35"/>
+                </a:solidFill>
+                <a:latin typeface="Inter"/>
+              </a:rPr>
+              <a:t>→</a:t>
+            </a:r>
+          </a:p>
+        </p:txBody>
+      </p:sp>
+      <p:sp>
+        <p:nvSpPr>
+          <p:cNvPr id="17" name="Rounded Rectangle 16"/>
+          <p:cNvSpPr/>
+          <p:nvPr/>
+        </p:nvSpPr>
+        <p:spPr>
+          <a:xfrm>
+            <a:off x="9875520" y="2286000"/>
+            <a:ext cx="1965960" cy="1554480"/>
+          </a:xfrm>
+          <a:prstGeom prst="roundRect">
+            <a:avLst>
+              <a:gd name="adj" fmla="val 8000"/>
+            </a:avLst>
+          </a:prstGeom>
+          <a:solidFill>
+            <a:srgbClr val="0E1318"/>
+          </a:solidFill>
+          <a:ln w="12700">
+            <a:solidFill>
+              <a:srgbClr val="232A33"/>
+            </a:solidFill>
+          </a:ln>
+        </p:spPr>
+        <p:style>
+          <a:lnRef idx="1">
+            <a:schemeClr val="accent1"/>
+          </a:lnRef>
+          <a:fillRef idx="3">
+            <a:schemeClr val="accent1"/>
+          </a:fillRef>
+          <a:effectRef idx="2">
+            <a:schemeClr val="accent1"/>
+          </a:effectRef>
+          <a:fontRef idx="minor">
+            <a:schemeClr val="lt1"/>
+          </a:fontRef>
+        </p:style>
+        <p:txBody>
+          <a:bodyPr rtlCol="0" anchor="ctr"/>
+          <a:lstStyle/>
+          <a:p>
+            <a:pPr algn="ctr"/>
+          </a:p>
+        </p:txBody>
+      </p:sp>
+      <p:sp>
+        <p:nvSpPr>
+          <p:cNvPr id="18" name="TextBox 17"/>
+          <p:cNvSpPr txBox="1"/>
+          <p:nvPr/>
+        </p:nvSpPr>
+        <p:spPr>
+          <a:xfrm>
+            <a:off x="9875520" y="2606040"/>
+            <a:ext cx="1965960" cy="1097280"/>
+          </a:xfrm>
+          <a:prstGeom prst="rect">
+            <a:avLst/>
+          </a:prstGeom>
+          <a:noFill/>
+        </p:spPr>
+        <p:txBody>
+          <a:bodyPr wrap="square">
+            <a:spAutoFit/>
+          </a:bodyPr>
+          <a:lstStyle/>
+          <a:p>
+            <a:pPr algn="ctr"/>
+            <a:r>
+              <a:rPr sz="1700" b="1">
+                <a:solidFill>
+                  <a:srgbClr val="F2F4F5"/>
+                </a:solidFill>
+                <a:latin typeface="Inter"/>
+              </a:rPr>
+              <a:t>FastAPI +
+веб-карта</a:t>
+            </a:r>
+          </a:p>
+        </p:txBody>
+      </p:sp>
+      <p:sp>
+        <p:nvSpPr>
+          <p:cNvPr id="19" name="TextBox 18"/>
+          <p:cNvSpPr txBox="1"/>
+          <p:nvPr/>
+        </p:nvSpPr>
+        <p:spPr>
+          <a:xfrm>
+            <a:off x="731520" y="4297680"/>
+            <a:ext cx="10698480" cy="1463040"/>
+          </a:xfrm>
+          <a:prstGeom prst="rect">
+            <a:avLst/>
+          </a:prstGeom>
+          <a:noFill/>
+        </p:spPr>
+        <p:txBody>
+          <a:bodyPr wrap="square">
+            <a:spAutoFit/>
+          </a:bodyPr>
+          <a:lstStyle/>
+          <a:p>
             <a:pPr algn="l"/>
             <a:r>
-              <a:rPr sz="1800" b="0">
-                <a:solidFill>
-                  <a:srgbClr val="9AA0AA"/>
-                </a:solidFill>
-                <a:latin typeface="Calibri"/>
-              </a:rPr>
-              <a:t>Сплит по fire_event_id без утечек · сиды 19 · воспроизводимость ≤ 0.005</a:t>
+              <a:rPr sz="1700" b="0">
+                <a:solidFill>
+                  <a:srgbClr val="69737D"/>
+                </a:solidFill>
+                <a:latin typeface="Inter"/>
+              </a:rPr>
+              <a:t>Сплит по fire_event_id без утечек · сиды 19 · дрейф повтора ≤ 0.005</a:t>
+            </a:r>
+            <a:r>
+              <a:rPr sz="1700" b="0">
+                <a:solidFill>
+                  <a:srgbClr val="69737D"/>
+                </a:solidFill>
+                <a:latin typeface="Inter"/>
+              </a:rPr>
+              <a:t>
+Тест де-идентифицирован (§5.5): гео и даты не восстанавливаем — демо-привязка задокументирована</a:t>
             </a:r>
           </a:p>
         </p:txBody>
@@ -4556,7 +5610,7 @@
     <p:bg>
       <p:bgPr>
         <a:solidFill>
-          <a:srgbClr val="111318"/>
+          <a:srgbClr val="070A0D"/>
         </a:solidFill>
         <a:effectLst/>
       </p:bgPr>
@@ -4576,8 +5630,8 @@
         </p:nvSpPr>
         <p:spPr>
           <a:xfrm>
-            <a:off x="640080" y="274320"/>
-            <a:ext cx="10881360" cy="365760"/>
+            <a:off x="731520" y="411480"/>
+            <a:ext cx="10698480" cy="320040"/>
           </a:xfrm>
           <a:prstGeom prst="rect">
             <a:avLst/>
@@ -4592,13 +5646,22 @@
           <a:p>
             <a:pPr algn="l"/>
             <a:r>
-              <a:rPr sz="1400" b="1">
-                <a:solidFill>
-                  <a:srgbClr val="FF5A1F"/>
-                </a:solidFill>
-                <a:latin typeface="Calibri"/>
-              </a:rPr>
-              <a:t>03 · МОДУЛЬ AF</a:t>
+              <a:rPr sz="1300" b="1">
+                <a:solidFill>
+                  <a:srgbClr val="69737D"/>
+                </a:solidFill>
+                <a:latin typeface="Inter"/>
+              </a:rPr>
+              <a:t>03  </a:t>
+            </a:r>
+            <a:r>
+              <a:rPr sz="1300" b="1">
+                <a:solidFill>
+                  <a:srgbClr val="69737D"/>
+                </a:solidFill>
+                <a:latin typeface="Inter"/>
+              </a:rPr>
+              <a:t>МОДУЛЬ AF · ACTIVE FIRE</a:t>
             </a:r>
           </a:p>
         </p:txBody>
@@ -4611,8 +5674,8 @@
         </p:nvSpPr>
         <p:spPr>
           <a:xfrm>
-            <a:off x="640080" y="640080"/>
-            <a:ext cx="10881360" cy="822960"/>
+            <a:off x="731520" y="777240"/>
+            <a:ext cx="10698480" cy="914400"/>
           </a:xfrm>
           <a:prstGeom prst="rect">
             <a:avLst/>
@@ -4627,27 +5690,70 @@
           <a:p>
             <a:pPr algn="l"/>
             <a:r>
-              <a:rPr sz="3600" b="1">
-                <a:solidFill>
-                  <a:srgbClr val="F0F0F0"/>
-                </a:solidFill>
-                <a:latin typeface="Calibri"/>
-              </a:rPr>
-              <a:t>Активное горение: F1 0.8434</a:t>
-            </a:r>
-          </a:p>
-        </p:txBody>
-      </p:sp>
-      <p:sp>
-        <p:nvSpPr>
-          <p:cNvPr id="4" name="TextBox 3"/>
+              <a:rPr sz="3400" b="1">
+                <a:solidFill>
+                  <a:srgbClr val="F2F4F5"/>
+                </a:solidFill>
+                <a:latin typeface="Inter"/>
+              </a:rPr>
+              <a:t>Горение: F1 0.8434</a:t>
+            </a:r>
+          </a:p>
+        </p:txBody>
+      </p:sp>
+      <p:sp>
+        <p:nvSpPr>
+          <p:cNvPr id="4" name="Oval 3"/>
+          <p:cNvSpPr/>
+          <p:nvPr/>
+        </p:nvSpPr>
+        <p:spPr>
+          <a:xfrm>
+            <a:off x="914400" y="2029968"/>
+            <a:ext cx="146304" cy="146304"/>
+          </a:xfrm>
+          <a:prstGeom prst="ellipse">
+            <a:avLst/>
+          </a:prstGeom>
+          <a:solidFill>
+            <a:srgbClr val="FF6B35"/>
+          </a:solidFill>
+          <a:ln>
+            <a:noFill/>
+          </a:ln>
+        </p:spPr>
+        <p:style>
+          <a:lnRef idx="1">
+            <a:schemeClr val="accent1"/>
+          </a:lnRef>
+          <a:fillRef idx="3">
+            <a:schemeClr val="accent1"/>
+          </a:fillRef>
+          <a:effectRef idx="2">
+            <a:schemeClr val="accent1"/>
+          </a:effectRef>
+          <a:fontRef idx="minor">
+            <a:schemeClr val="lt1"/>
+          </a:fontRef>
+        </p:style>
+        <p:txBody>
+          <a:bodyPr rtlCol="0" anchor="ctr"/>
+          <a:lstStyle/>
+          <a:p>
+            <a:pPr algn="ctr"/>
+          </a:p>
+        </p:txBody>
+      </p:sp>
+      <p:sp>
+        <p:nvSpPr>
+          <p:cNvPr id="5" name="TextBox 4"/>
           <p:cNvSpPr txBox="1"/>
           <p:nvPr/>
         </p:nvSpPr>
         <p:spPr>
           <a:xfrm>
-            <a:off x="822960" y="1737360"/>
-            <a:ext cx="10515600" cy="731520"/>
+            <a:off x="1234440" y="1865376"/>
+            <a:ext cx="6583680" cy="640080"/>
           </a:xfrm>
           <a:prstGeom prst="rect">
             <a:avLst/>
@@ -4662,36 +5768,70 @@
           <a:p>
             <a:pPr algn="l"/>
             <a:r>
-              <a:rPr sz="1800" b="1">
-                <a:solidFill>
-                  <a:srgbClr val="FF5A1F"/>
-                </a:solidFill>
-                <a:latin typeface="Calibri"/>
-              </a:rPr>
-              <a:t>•  </a:t>
-            </a:r>
-            <a:r>
-              <a:rPr sz="1800" b="0">
-                <a:solidFill>
-                  <a:srgbClr val="F0F0F0"/>
-                </a:solidFill>
-                <a:latin typeface="Calibri"/>
-              </a:rPr>
-              <a:t>smp.Unet + timm-efficientnet-b4 (ImageNet), вход 12 каналов: I1–I3, I4, I4−I5, landcover / DEM / ERA5 / day-night / valid</a:t>
-            </a:r>
-          </a:p>
-        </p:txBody>
-      </p:sp>
-      <p:sp>
-        <p:nvSpPr>
-          <p:cNvPr id="5" name="TextBox 4"/>
+              <a:rPr sz="1600" b="0">
+                <a:solidFill>
+                  <a:srgbClr val="A4ADB5"/>
+                </a:solidFill>
+                <a:latin typeface="Inter"/>
+              </a:rPr>
+              <a:t>Вход 12 каналов: I1–I3, I4, I4−I5, landcover / DEM / ERA5 / day-night / valid · I4 clip 367K</a:t>
+            </a:r>
+          </a:p>
+        </p:txBody>
+      </p:sp>
+      <p:sp>
+        <p:nvSpPr>
+          <p:cNvPr id="6" name="Oval 5"/>
+          <p:cNvSpPr/>
+          <p:nvPr/>
+        </p:nvSpPr>
+        <p:spPr>
+          <a:xfrm>
+            <a:off x="914400" y="2743200"/>
+            <a:ext cx="146304" cy="146304"/>
+          </a:xfrm>
+          <a:prstGeom prst="ellipse">
+            <a:avLst/>
+          </a:prstGeom>
+          <a:solidFill>
+            <a:srgbClr val="FF6B35"/>
+          </a:solidFill>
+          <a:ln>
+            <a:noFill/>
+          </a:ln>
+        </p:spPr>
+        <p:style>
+          <a:lnRef idx="1">
+            <a:schemeClr val="accent1"/>
+          </a:lnRef>
+          <a:fillRef idx="3">
+            <a:schemeClr val="accent1"/>
+          </a:fillRef>
+          <a:effectRef idx="2">
+            <a:schemeClr val="accent1"/>
+          </a:effectRef>
+          <a:fontRef idx="minor">
+            <a:schemeClr val="lt1"/>
+          </a:fontRef>
+        </p:style>
+        <p:txBody>
+          <a:bodyPr rtlCol="0" anchor="ctr"/>
+          <a:lstStyle/>
+          <a:p>
+            <a:pPr algn="ctr"/>
+          </a:p>
+        </p:txBody>
+      </p:sp>
+      <p:sp>
+        <p:nvSpPr>
+          <p:cNvPr id="7" name="TextBox 6"/>
           <p:cNvSpPr txBox="1"/>
           <p:nvPr/>
         </p:nvSpPr>
         <p:spPr>
           <a:xfrm>
-            <a:off x="822960" y="2514600"/>
-            <a:ext cx="10515600" cy="731520"/>
+            <a:off x="1234440" y="2578608"/>
+            <a:ext cx="6583680" cy="640080"/>
           </a:xfrm>
           <a:prstGeom prst="rect">
             <a:avLst/>
@@ -4706,36 +5846,70 @@
           <a:p>
             <a:pPr algn="l"/>
             <a:r>
-              <a:rPr sz="1800" b="1">
-                <a:solidFill>
-                  <a:srgbClr val="FF5A1F"/>
-                </a:solidFill>
-                <a:latin typeface="Calibri"/>
-              </a:rPr>
-              <a:t>•  </a:t>
-            </a:r>
-            <a:r>
-              <a:rPr sz="1800" b="0">
-                <a:solidFill>
-                  <a:srgbClr val="F0F0F0"/>
-                </a:solidFill>
-                <a:latin typeface="Calibri"/>
-              </a:rPr>
-              <a:t>I4 clip 367K · Dice+Focal · oversample позитивов ×3 · AMP · 295 секунд обучения</a:t>
-            </a:r>
-          </a:p>
-        </p:txBody>
-      </p:sp>
-      <p:sp>
-        <p:nvSpPr>
-          <p:cNvPr id="6" name="TextBox 5"/>
+              <a:rPr sz="1600" b="0">
+                <a:solidFill>
+                  <a:srgbClr val="A4ADB5"/>
+                </a:solidFill>
+                <a:latin typeface="Inter"/>
+              </a:rPr>
+              <a:t>Dice+Focal · oversample позитивов ×3 · AMP · всё обучение — 295 секунд</a:t>
+            </a:r>
+          </a:p>
+        </p:txBody>
+      </p:sp>
+      <p:sp>
+        <p:nvSpPr>
+          <p:cNvPr id="8" name="Oval 7"/>
+          <p:cNvSpPr/>
+          <p:nvPr/>
+        </p:nvSpPr>
+        <p:spPr>
+          <a:xfrm>
+            <a:off x="914400" y="3456432"/>
+            <a:ext cx="146304" cy="146304"/>
+          </a:xfrm>
+          <a:prstGeom prst="ellipse">
+            <a:avLst/>
+          </a:prstGeom>
+          <a:solidFill>
+            <a:srgbClr val="FF6B35"/>
+          </a:solidFill>
+          <a:ln>
+            <a:noFill/>
+          </a:ln>
+        </p:spPr>
+        <p:style>
+          <a:lnRef idx="1">
+            <a:schemeClr val="accent1"/>
+          </a:lnRef>
+          <a:fillRef idx="3">
+            <a:schemeClr val="accent1"/>
+          </a:fillRef>
+          <a:effectRef idx="2">
+            <a:schemeClr val="accent1"/>
+          </a:effectRef>
+          <a:fontRef idx="minor">
+            <a:schemeClr val="lt1"/>
+          </a:fontRef>
+        </p:style>
+        <p:txBody>
+          <a:bodyPr rtlCol="0" anchor="ctr"/>
+          <a:lstStyle/>
+          <a:p>
+            <a:pPr algn="ctr"/>
+          </a:p>
+        </p:txBody>
+      </p:sp>
+      <p:sp>
+        <p:nvSpPr>
+          <p:cNvPr id="9" name="TextBox 8"/>
           <p:cNvSpPr txBox="1"/>
           <p:nvPr/>
         </p:nvSpPr>
         <p:spPr>
           <a:xfrm>
-            <a:off x="822960" y="3291839"/>
-            <a:ext cx="10515600" cy="731520"/>
+            <a:off x="1234440" y="3291840"/>
+            <a:ext cx="6583680" cy="640080"/>
           </a:xfrm>
           <a:prstGeom prst="rect">
             <a:avLst/>
@@ -4750,20 +5924,11 @@
           <a:p>
             <a:pPr algn="l"/>
             <a:r>
-              <a:rPr sz="1800" b="1">
-                <a:solidFill>
-                  <a:srgbClr val="FF5A1F"/>
-                </a:solidFill>
-                <a:latin typeface="Calibri"/>
-              </a:rPr>
-              <a:t>•  </a:t>
-            </a:r>
-            <a:r>
-              <a:rPr sz="1800" b="0">
-                <a:solidFill>
-                  <a:srgbClr val="F0F0F0"/>
-                </a:solidFill>
-                <a:latin typeface="Calibri"/>
+              <a:rPr sz="1600" b="0">
+                <a:solidFill>
+                  <a:srgbClr val="A4ADB5"/>
+                </a:solidFill>
+                <a:latin typeface="Inter"/>
               </a:rPr>
               <a:t>Порог 0.15 по micro-F1 + WC-гейт «застройка только при I4 ≥ 310K»</a:t>
             </a:r>
@@ -4772,14 +5937,57 @@
       </p:sp>
       <p:sp>
         <p:nvSpPr>
-          <p:cNvPr id="7" name="TextBox 6"/>
+          <p:cNvPr id="10" name="Oval 9"/>
+          <p:cNvSpPr/>
+          <p:nvPr/>
+        </p:nvSpPr>
+        <p:spPr>
+          <a:xfrm>
+            <a:off x="914400" y="4169663"/>
+            <a:ext cx="146304" cy="146304"/>
+          </a:xfrm>
+          <a:prstGeom prst="ellipse">
+            <a:avLst/>
+          </a:prstGeom>
+          <a:solidFill>
+            <a:srgbClr val="FF6B35"/>
+          </a:solidFill>
+          <a:ln>
+            <a:noFill/>
+          </a:ln>
+        </p:spPr>
+        <p:style>
+          <a:lnRef idx="1">
+            <a:schemeClr val="accent1"/>
+          </a:lnRef>
+          <a:fillRef idx="3">
+            <a:schemeClr val="accent1"/>
+          </a:fillRef>
+          <a:effectRef idx="2">
+            <a:schemeClr val="accent1"/>
+          </a:effectRef>
+          <a:fontRef idx="minor">
+            <a:schemeClr val="lt1"/>
+          </a:fontRef>
+        </p:style>
+        <p:txBody>
+          <a:bodyPr rtlCol="0" anchor="ctr"/>
+          <a:lstStyle/>
+          <a:p>
+            <a:pPr algn="ctr"/>
+          </a:p>
+        </p:txBody>
+      </p:sp>
+      <p:sp>
+        <p:nvSpPr>
+          <p:cNvPr id="11" name="TextBox 10"/>
           <p:cNvSpPr txBox="1"/>
           <p:nvPr/>
         </p:nvSpPr>
         <p:spPr>
           <a:xfrm>
-            <a:off x="822960" y="4069079"/>
-            <a:ext cx="10515600" cy="731520"/>
+            <a:off x="1234440" y="4005072"/>
+            <a:ext cx="6583680" cy="640080"/>
           </a:xfrm>
           <a:prstGeom prst="rect">
             <a:avLst/>
@@ -4794,29 +6002,20 @@
           <a:p>
             <a:pPr algn="l"/>
             <a:r>
-              <a:rPr sz="1800" b="1">
-                <a:solidFill>
-                  <a:srgbClr val="FF5A1F"/>
-                </a:solidFill>
-                <a:latin typeface="Calibri"/>
-              </a:rPr>
-              <a:t>•  </a:t>
-            </a:r>
-            <a:r>
-              <a:rPr sz="1800" b="0">
-                <a:solidFill>
-                  <a:srgbClr val="F0F0F0"/>
-                </a:solidFill>
-                <a:latin typeface="Calibri"/>
-              </a:rPr>
-              <a:t>Day 0.8519 / Night 0.803 — факелы на одном снимке неотличимы (кейс Fig.4), честное ограничение</a:t>
+              <a:rPr sz="1600" b="0">
+                <a:solidFill>
+                  <a:srgbClr val="A4ADB5"/>
+                </a:solidFill>
+                <a:latin typeface="Inter"/>
+              </a:rPr>
+              <a:t>Day 0.8519 / Night 0.803 — факелы на одном снимке неотличимы (Fig.4), честное ограничение</a:t>
             </a:r>
           </a:p>
         </p:txBody>
       </p:sp>
       <p:pic>
         <p:nvPicPr>
-          <p:cNvPr id="8" name="Picture 7" descr="af_viz_sample.png"/>
+          <p:cNvPr id="12" name="Picture 11" descr="af_viz_sample.png"/>
           <p:cNvPicPr>
             <a:picLocks noChangeAspect="1"/>
           </p:cNvPicPr>
@@ -4830,8 +6029,8 @@
         </p:blipFill>
         <p:spPr>
           <a:xfrm>
-            <a:off x="8503920" y="1828800"/>
-            <a:ext cx="3017520" cy="1005840"/>
+            <a:off x="8229600" y="1920240"/>
+            <a:ext cx="3291840" cy="1097280"/>
           </a:xfrm>
           <a:prstGeom prst="rect">
             <a:avLst/>
@@ -4852,7 +6051,7 @@
     <p:bg>
       <p:bgPr>
         <a:solidFill>
-          <a:srgbClr val="111318"/>
+          <a:srgbClr val="070A0D"/>
         </a:solidFill>
         <a:effectLst/>
       </p:bgPr>
@@ -4872,8 +6071,8 @@
         </p:nvSpPr>
         <p:spPr>
           <a:xfrm>
-            <a:off x="640080" y="274320"/>
-            <a:ext cx="10881360" cy="365760"/>
+            <a:off x="731520" y="411480"/>
+            <a:ext cx="10698480" cy="320040"/>
           </a:xfrm>
           <a:prstGeom prst="rect">
             <a:avLst/>
@@ -4888,13 +6087,22 @@
           <a:p>
             <a:pPr algn="l"/>
             <a:r>
-              <a:rPr sz="1400" b="1">
-                <a:solidFill>
-                  <a:srgbClr val="FF5A1F"/>
-                </a:solidFill>
-                <a:latin typeface="Calibri"/>
-              </a:rPr>
-              <a:t>04 · МОДУЛЬ BS</a:t>
+              <a:rPr sz="1300" b="1">
+                <a:solidFill>
+                  <a:srgbClr val="69737D"/>
+                </a:solidFill>
+                <a:latin typeface="Inter"/>
+              </a:rPr>
+              <a:t>04  </a:t>
+            </a:r>
+            <a:r>
+              <a:rPr sz="1300" b="1">
+                <a:solidFill>
+                  <a:srgbClr val="69737D"/>
+                </a:solidFill>
+                <a:latin typeface="Inter"/>
+              </a:rPr>
+              <a:t>МОДУЛЬ BS · BURN SEVERITY</a:t>
             </a:r>
           </a:p>
         </p:txBody>
@@ -4907,8 +6115,8 @@
         </p:nvSpPr>
         <p:spPr>
           <a:xfrm>
-            <a:off x="640080" y="640080"/>
-            <a:ext cx="10881360" cy="822960"/>
+            <a:off x="731520" y="777240"/>
+            <a:ext cx="10698480" cy="914400"/>
           </a:xfrm>
           <a:prstGeom prst="rect">
             <a:avLst/>
@@ -4923,11 +6131,11 @@
           <a:p>
             <a:pPr algn="l"/>
             <a:r>
-              <a:rPr sz="3600" b="1">
-                <a:solidFill>
-                  <a:srgbClr val="F0F0F0"/>
-                </a:solidFill>
-                <a:latin typeface="Calibri"/>
+              <a:rPr sz="3400" b="1">
+                <a:solidFill>
+                  <a:srgbClr val="F2F4F5"/>
+                </a:solidFill>
+                <a:latin typeface="Inter"/>
               </a:rPr>
               <a:t>Гари: IoU 0.5239 · mIoU 0.5430</a:t>
             </a:r>
@@ -4936,14 +6144,57 @@
       </p:sp>
       <p:sp>
         <p:nvSpPr>
-          <p:cNvPr id="4" name="TextBox 3"/>
+          <p:cNvPr id="4" name="Oval 3"/>
+          <p:cNvSpPr/>
+          <p:nvPr/>
+        </p:nvSpPr>
+        <p:spPr>
+          <a:xfrm>
+            <a:off x="914400" y="2029968"/>
+            <a:ext cx="146304" cy="146304"/>
+          </a:xfrm>
+          <a:prstGeom prst="ellipse">
+            <a:avLst/>
+          </a:prstGeom>
+          <a:solidFill>
+            <a:srgbClr val="FF6B35"/>
+          </a:solidFill>
+          <a:ln>
+            <a:noFill/>
+          </a:ln>
+        </p:spPr>
+        <p:style>
+          <a:lnRef idx="1">
+            <a:schemeClr val="accent1"/>
+          </a:lnRef>
+          <a:fillRef idx="3">
+            <a:schemeClr val="accent1"/>
+          </a:fillRef>
+          <a:effectRef idx="2">
+            <a:schemeClr val="accent1"/>
+          </a:effectRef>
+          <a:fontRef idx="minor">
+            <a:schemeClr val="lt1"/>
+          </a:fontRef>
+        </p:style>
+        <p:txBody>
+          <a:bodyPr rtlCol="0" anchor="ctr"/>
+          <a:lstStyle/>
+          <a:p>
+            <a:pPr algn="ctr"/>
+          </a:p>
+        </p:txBody>
+      </p:sp>
+      <p:sp>
+        <p:nvSpPr>
+          <p:cNvPr id="5" name="TextBox 4"/>
           <p:cNvSpPr txBox="1"/>
           <p:nvPr/>
         </p:nvSpPr>
         <p:spPr>
           <a:xfrm>
-            <a:off x="822960" y="1737360"/>
-            <a:ext cx="10515600" cy="731520"/>
+            <a:off x="1234440" y="1865376"/>
+            <a:ext cx="10424160" cy="640080"/>
           </a:xfrm>
           <a:prstGeom prst="rect">
             <a:avLst/>
@@ -4958,36 +6209,70 @@
           <a:p>
             <a:pPr algn="l"/>
             <a:r>
-              <a:rPr sz="1800" b="1">
-                <a:solidFill>
-                  <a:srgbClr val="FF5A1F"/>
-                </a:solidFill>
-                <a:latin typeface="Calibri"/>
-              </a:rPr>
-              <a:t>•  </a:t>
-            </a:r>
-            <a:r>
-              <a:rPr sz="1800" b="0">
-                <a:solidFill>
-                  <a:srgbClr val="F0F0F0"/>
-                </a:solidFill>
-                <a:latin typeface="Calibri"/>
-              </a:rPr>
-              <a:t>smp-Unet effb4, 27 каналов: S2 pre/post + S1 VV/VH + aux + dNBR/RdNBR; argmax + cloud→0 + burn-gate snap</a:t>
-            </a:r>
-          </a:p>
-        </p:txBody>
-      </p:sp>
-      <p:sp>
-        <p:nvSpPr>
-          <p:cNvPr id="5" name="TextBox 4"/>
+              <a:rPr sz="1600" b="0">
+                <a:solidFill>
+                  <a:srgbClr val="A4ADB5"/>
+                </a:solidFill>
+                <a:latin typeface="Inter"/>
+              </a:rPr>
+              <a:t>27 каналов: S2 pre/post + S1 VV/VH + aux + dNBR/RdNBR · argmax + cloud→0 + burn-gate snap</a:t>
+            </a:r>
+          </a:p>
+        </p:txBody>
+      </p:sp>
+      <p:sp>
+        <p:nvSpPr>
+          <p:cNvPr id="6" name="Oval 5"/>
+          <p:cNvSpPr/>
+          <p:nvPr/>
+        </p:nvSpPr>
+        <p:spPr>
+          <a:xfrm>
+            <a:off x="914400" y="2743200"/>
+            <a:ext cx="146304" cy="146304"/>
+          </a:xfrm>
+          <a:prstGeom prst="ellipse">
+            <a:avLst/>
+          </a:prstGeom>
+          <a:solidFill>
+            <a:srgbClr val="FF6B35"/>
+          </a:solidFill>
+          <a:ln>
+            <a:noFill/>
+          </a:ln>
+        </p:spPr>
+        <p:style>
+          <a:lnRef idx="1">
+            <a:schemeClr val="accent1"/>
+          </a:lnRef>
+          <a:fillRef idx="3">
+            <a:schemeClr val="accent1"/>
+          </a:fillRef>
+          <a:effectRef idx="2">
+            <a:schemeClr val="accent1"/>
+          </a:effectRef>
+          <a:fontRef idx="minor">
+            <a:schemeClr val="lt1"/>
+          </a:fontRef>
+        </p:style>
+        <p:txBody>
+          <a:bodyPr rtlCol="0" anchor="ctr"/>
+          <a:lstStyle/>
+          <a:p>
+            <a:pPr algn="ctr"/>
+          </a:p>
+        </p:txBody>
+      </p:sp>
+      <p:sp>
+        <p:nvSpPr>
+          <p:cNvPr id="7" name="TextBox 6"/>
           <p:cNvSpPr txBox="1"/>
           <p:nvPr/>
         </p:nvSpPr>
         <p:spPr>
           <a:xfrm>
-            <a:off x="822960" y="2514600"/>
-            <a:ext cx="10515600" cy="731520"/>
+            <a:off x="1234440" y="2578608"/>
+            <a:ext cx="10424160" cy="640080"/>
           </a:xfrm>
           <a:prstGeom prst="rect">
             <a:avLst/>
@@ -5002,20 +6287,11 @@
           <a:p>
             <a:pPr algn="l"/>
             <a:r>
-              <a:rPr sz="1800" b="1">
-                <a:solidFill>
-                  <a:srgbClr val="FF5A1F"/>
-                </a:solidFill>
-                <a:latin typeface="Calibri"/>
-              </a:rPr>
-              <a:t>•  </a:t>
-            </a:r>
-            <a:r>
-              <a:rPr sz="1800" b="0">
-                <a:solidFill>
-                  <a:srgbClr val="F0F0F0"/>
-                </a:solidFill>
-                <a:latin typeface="Calibri"/>
+              <a:rPr sz="1600" b="0">
+                <a:solidFill>
+                  <a:srgbClr val="A4ADB5"/>
+                </a:solidFill>
+                <a:latin typeface="Inter"/>
               </a:rPr>
               <a:t>dNBR-пороги per-landcover из EDA: лес 0.28/0.53 · степь 0.21/0.38 · пашня 0.19/0.37 · пойма 0.31/0.61</a:t>
             </a:r>
@@ -5024,14 +6300,57 @@
       </p:sp>
       <p:sp>
         <p:nvSpPr>
-          <p:cNvPr id="6" name="TextBox 5"/>
+          <p:cNvPr id="8" name="Oval 7"/>
+          <p:cNvSpPr/>
+          <p:nvPr/>
+        </p:nvSpPr>
+        <p:spPr>
+          <a:xfrm>
+            <a:off x="914400" y="3456432"/>
+            <a:ext cx="146304" cy="146304"/>
+          </a:xfrm>
+          <a:prstGeom prst="ellipse">
+            <a:avLst/>
+          </a:prstGeom>
+          <a:solidFill>
+            <a:srgbClr val="FF6B35"/>
+          </a:solidFill>
+          <a:ln>
+            <a:noFill/>
+          </a:ln>
+        </p:spPr>
+        <p:style>
+          <a:lnRef idx="1">
+            <a:schemeClr val="accent1"/>
+          </a:lnRef>
+          <a:fillRef idx="3">
+            <a:schemeClr val="accent1"/>
+          </a:fillRef>
+          <a:effectRef idx="2">
+            <a:schemeClr val="accent1"/>
+          </a:effectRef>
+          <a:fontRef idx="minor">
+            <a:schemeClr val="lt1"/>
+          </a:fontRef>
+        </p:style>
+        <p:txBody>
+          <a:bodyPr rtlCol="0" anchor="ctr"/>
+          <a:lstStyle/>
+          <a:p>
+            <a:pPr algn="ctr"/>
+          </a:p>
+        </p:txBody>
+      </p:sp>
+      <p:sp>
+        <p:nvSpPr>
+          <p:cNvPr id="9" name="TextBox 8"/>
           <p:cNvSpPr txBox="1"/>
           <p:nvPr/>
         </p:nvSpPr>
         <p:spPr>
           <a:xfrm>
-            <a:off x="822960" y="3291839"/>
-            <a:ext cx="10515600" cy="731520"/>
+            <a:off x="1234440" y="3291840"/>
+            <a:ext cx="10424160" cy="640080"/>
           </a:xfrm>
           <a:prstGeom prst="rect">
             <a:avLst/>
@@ -5046,36 +6365,70 @@
           <a:p>
             <a:pPr algn="l"/>
             <a:r>
-              <a:rPr sz="1800" b="1">
-                <a:solidFill>
-                  <a:srgbClr val="FF5A1F"/>
-                </a:solidFill>
-                <a:latin typeface="Calibri"/>
-              </a:rPr>
-              <a:t>•  </a:t>
-            </a:r>
-            <a:r>
-              <a:rPr sz="1800" b="0">
-                <a:solidFill>
-                  <a:srgbClr val="F0F0F0"/>
-                </a:solidFill>
-                <a:latin typeface="Calibri"/>
-              </a:rPr>
-              <a:t>Ветка Prithvi-300M мертва: IoU 0.16 &lt; бейзлайна 0.33 + nan-loss</a:t>
-            </a:r>
-          </a:p>
-        </p:txBody>
-      </p:sp>
-      <p:sp>
-        <p:nvSpPr>
-          <p:cNvPr id="7" name="TextBox 6"/>
+              <a:rPr sz="1600" b="0">
+                <a:solidFill>
+                  <a:srgbClr val="A4ADB5"/>
+                </a:solidFill>
+                <a:latin typeface="Inter"/>
+              </a:rPr>
+              <a:t>Prithvi-300M мёртв: IoU 0.16 &lt; бейзлайна 0.33 + nan-loss · retry H1 0.6196 и H2 0.632 проиграли фризу ep91</a:t>
+            </a:r>
+          </a:p>
+        </p:txBody>
+      </p:sp>
+      <p:sp>
+        <p:nvSpPr>
+          <p:cNvPr id="10" name="Oval 9"/>
+          <p:cNvSpPr/>
+          <p:nvPr/>
+        </p:nvSpPr>
+        <p:spPr>
+          <a:xfrm>
+            <a:off x="914400" y="4169663"/>
+            <a:ext cx="146304" cy="146304"/>
+          </a:xfrm>
+          <a:prstGeom prst="ellipse">
+            <a:avLst/>
+          </a:prstGeom>
+          <a:solidFill>
+            <a:srgbClr val="FF6B35"/>
+          </a:solidFill>
+          <a:ln>
+            <a:noFill/>
+          </a:ln>
+        </p:spPr>
+        <p:style>
+          <a:lnRef idx="1">
+            <a:schemeClr val="accent1"/>
+          </a:lnRef>
+          <a:fillRef idx="3">
+            <a:schemeClr val="accent1"/>
+          </a:fillRef>
+          <a:effectRef idx="2">
+            <a:schemeClr val="accent1"/>
+          </a:effectRef>
+          <a:fontRef idx="minor">
+            <a:schemeClr val="lt1"/>
+          </a:fontRef>
+        </p:style>
+        <p:txBody>
+          <a:bodyPr rtlCol="0" anchor="ctr"/>
+          <a:lstStyle/>
+          <a:p>
+            <a:pPr algn="ctr"/>
+          </a:p>
+        </p:txBody>
+      </p:sp>
+      <p:sp>
+        <p:nvSpPr>
+          <p:cNvPr id="11" name="TextBox 10"/>
           <p:cNvSpPr txBox="1"/>
           <p:nvPr/>
         </p:nvSpPr>
         <p:spPr>
           <a:xfrm>
-            <a:off x="822960" y="4069079"/>
-            <a:ext cx="10515600" cy="731520"/>
+            <a:off x="1234440" y="4005072"/>
+            <a:ext cx="10424160" cy="640080"/>
           </a:xfrm>
           <a:prstGeom prst="rect">
             <a:avLst/>
@@ -5090,22 +6443,321 @@
           <a:p>
             <a:pPr algn="l"/>
             <a:r>
-              <a:rPr sz="1800" b="1">
-                <a:solidFill>
-                  <a:srgbClr val="FF5A1F"/>
-                </a:solidFill>
-                <a:latin typeface="Calibri"/>
-              </a:rPr>
-              <a:t>•  </a:t>
-            </a:r>
-            <a:r>
-              <a:rPr sz="1800" b="0">
-                <a:solidFill>
-                  <a:srgbClr val="F0F0F0"/>
-                </a:solidFill>
-                <a:latin typeface="Calibri"/>
-              </a:rPr>
-              <a:t>Retry H1 (ауг) 0.6196 и H2 (веса классов) 0.632 — оба проиграли фризу ep91</a:t>
+              <a:rPr sz="1600" b="0">
+                <a:solidFill>
+                  <a:srgbClr val="A4ADB5"/>
+                </a:solidFill>
+                <a:latin typeface="Inter"/>
+              </a:rPr>
+              <a:t>SCL врёт на сухой почве — держим dry-soil override для барренов</a:t>
+            </a:r>
+          </a:p>
+        </p:txBody>
+      </p:sp>
+      <p:sp>
+        <p:nvSpPr>
+          <p:cNvPr id="12" name="Rounded Rectangle 11"/>
+          <p:cNvSpPr/>
+          <p:nvPr/>
+        </p:nvSpPr>
+        <p:spPr>
+          <a:xfrm>
+            <a:off x="8321040" y="4754880"/>
+            <a:ext cx="3108960" cy="1463040"/>
+          </a:xfrm>
+          <a:prstGeom prst="roundRect">
+            <a:avLst>
+              <a:gd name="adj" fmla="val 8000"/>
+            </a:avLst>
+          </a:prstGeom>
+          <a:solidFill>
+            <a:srgbClr val="0E1318"/>
+          </a:solidFill>
+          <a:ln w="12700">
+            <a:solidFill>
+              <a:srgbClr val="232A33"/>
+            </a:solidFill>
+          </a:ln>
+        </p:spPr>
+        <p:style>
+          <a:lnRef idx="1">
+            <a:schemeClr val="accent1"/>
+          </a:lnRef>
+          <a:fillRef idx="3">
+            <a:schemeClr val="accent1"/>
+          </a:fillRef>
+          <a:effectRef idx="2">
+            <a:schemeClr val="accent1"/>
+          </a:effectRef>
+          <a:fontRef idx="minor">
+            <a:schemeClr val="lt1"/>
+          </a:fontRef>
+        </p:style>
+        <p:txBody>
+          <a:bodyPr rtlCol="0" anchor="ctr"/>
+          <a:lstStyle/>
+          <a:p>
+            <a:pPr algn="ctr"/>
+          </a:p>
+        </p:txBody>
+      </p:sp>
+      <p:sp>
+        <p:nvSpPr>
+          <p:cNvPr id="13" name="Oval 12"/>
+          <p:cNvSpPr/>
+          <p:nvPr/>
+        </p:nvSpPr>
+        <p:spPr>
+          <a:xfrm>
+            <a:off x="8549640" y="4937760"/>
+            <a:ext cx="146304" cy="146304"/>
+          </a:xfrm>
+          <a:prstGeom prst="ellipse">
+            <a:avLst/>
+          </a:prstGeom>
+          <a:solidFill>
+            <a:srgbClr val="E6C65C"/>
+          </a:solidFill>
+          <a:ln>
+            <a:noFill/>
+          </a:ln>
+        </p:spPr>
+        <p:style>
+          <a:lnRef idx="1">
+            <a:schemeClr val="accent1"/>
+          </a:lnRef>
+          <a:fillRef idx="3">
+            <a:schemeClr val="accent1"/>
+          </a:fillRef>
+          <a:effectRef idx="2">
+            <a:schemeClr val="accent1"/>
+          </a:effectRef>
+          <a:fontRef idx="minor">
+            <a:schemeClr val="lt1"/>
+          </a:fontRef>
+        </p:style>
+        <p:txBody>
+          <a:bodyPr rtlCol="0" anchor="ctr"/>
+          <a:lstStyle/>
+          <a:p>
+            <a:pPr algn="ctr"/>
+          </a:p>
+        </p:txBody>
+      </p:sp>
+      <p:sp>
+        <p:nvSpPr>
+          <p:cNvPr id="14" name="TextBox 13"/>
+          <p:cNvSpPr txBox="1"/>
+          <p:nvPr/>
+        </p:nvSpPr>
+        <p:spPr>
+          <a:xfrm>
+            <a:off x="8823960" y="4864608"/>
+            <a:ext cx="2286000" cy="411480"/>
+          </a:xfrm>
+          <a:prstGeom prst="rect">
+            <a:avLst/>
+          </a:prstGeom>
+          <a:noFill/>
+        </p:spPr>
+        <p:txBody>
+          <a:bodyPr wrap="square">
+            <a:spAutoFit/>
+          </a:bodyPr>
+          <a:lstStyle/>
+          <a:p>
+            <a:pPr algn="l"/>
+            <a:r>
+              <a:rPr sz="1400" b="1">
+                <a:solidFill>
+                  <a:srgbClr val="F2F4F5"/>
+                </a:solidFill>
+                <a:latin typeface="Inter"/>
+              </a:rPr>
+              <a:t>Weak</a:t>
+            </a:r>
+            <a:r>
+              <a:rPr sz="1100" b="0">
+                <a:solidFill>
+                  <a:srgbClr val="69737D"/>
+                </a:solidFill>
+                <a:latin typeface="Inter"/>
+              </a:rPr>
+              <a:t>  Level 1</a:t>
+            </a:r>
+          </a:p>
+        </p:txBody>
+      </p:sp>
+      <p:sp>
+        <p:nvSpPr>
+          <p:cNvPr id="15" name="Oval 14"/>
+          <p:cNvSpPr/>
+          <p:nvPr/>
+        </p:nvSpPr>
+        <p:spPr>
+          <a:xfrm>
+            <a:off x="8549640" y="5349240"/>
+            <a:ext cx="146304" cy="146304"/>
+          </a:xfrm>
+          <a:prstGeom prst="ellipse">
+            <a:avLst/>
+          </a:prstGeom>
+          <a:solidFill>
+            <a:srgbClr val="FF6B35"/>
+          </a:solidFill>
+          <a:ln>
+            <a:noFill/>
+          </a:ln>
+        </p:spPr>
+        <p:style>
+          <a:lnRef idx="1">
+            <a:schemeClr val="accent1"/>
+          </a:lnRef>
+          <a:fillRef idx="3">
+            <a:schemeClr val="accent1"/>
+          </a:fillRef>
+          <a:effectRef idx="2">
+            <a:schemeClr val="accent1"/>
+          </a:effectRef>
+          <a:fontRef idx="minor">
+            <a:schemeClr val="lt1"/>
+          </a:fontRef>
+        </p:style>
+        <p:txBody>
+          <a:bodyPr rtlCol="0" anchor="ctr"/>
+          <a:lstStyle/>
+          <a:p>
+            <a:pPr algn="ctr"/>
+          </a:p>
+        </p:txBody>
+      </p:sp>
+      <p:sp>
+        <p:nvSpPr>
+          <p:cNvPr id="16" name="TextBox 15"/>
+          <p:cNvSpPr txBox="1"/>
+          <p:nvPr/>
+        </p:nvSpPr>
+        <p:spPr>
+          <a:xfrm>
+            <a:off x="8823960" y="5276088"/>
+            <a:ext cx="2286000" cy="411480"/>
+          </a:xfrm>
+          <a:prstGeom prst="rect">
+            <a:avLst/>
+          </a:prstGeom>
+          <a:noFill/>
+        </p:spPr>
+        <p:txBody>
+          <a:bodyPr wrap="square">
+            <a:spAutoFit/>
+          </a:bodyPr>
+          <a:lstStyle/>
+          <a:p>
+            <a:pPr algn="l"/>
+            <a:r>
+              <a:rPr sz="1400" b="1">
+                <a:solidFill>
+                  <a:srgbClr val="F2F4F5"/>
+                </a:solidFill>
+                <a:latin typeface="Inter"/>
+              </a:rPr>
+              <a:t>Moderate</a:t>
+            </a:r>
+            <a:r>
+              <a:rPr sz="1100" b="0">
+                <a:solidFill>
+                  <a:srgbClr val="69737D"/>
+                </a:solidFill>
+                <a:latin typeface="Inter"/>
+              </a:rPr>
+              <a:t>  Level 2</a:t>
+            </a:r>
+          </a:p>
+        </p:txBody>
+      </p:sp>
+      <p:sp>
+        <p:nvSpPr>
+          <p:cNvPr id="17" name="Oval 16"/>
+          <p:cNvSpPr/>
+          <p:nvPr/>
+        </p:nvSpPr>
+        <p:spPr>
+          <a:xfrm>
+            <a:off x="8549640" y="5760720"/>
+            <a:ext cx="146304" cy="146304"/>
+          </a:xfrm>
+          <a:prstGeom prst="ellipse">
+            <a:avLst/>
+          </a:prstGeom>
+          <a:solidFill>
+            <a:srgbClr val="EF5B5B"/>
+          </a:solidFill>
+          <a:ln>
+            <a:noFill/>
+          </a:ln>
+        </p:spPr>
+        <p:style>
+          <a:lnRef idx="1">
+            <a:schemeClr val="accent1"/>
+          </a:lnRef>
+          <a:fillRef idx="3">
+            <a:schemeClr val="accent1"/>
+          </a:fillRef>
+          <a:effectRef idx="2">
+            <a:schemeClr val="accent1"/>
+          </a:effectRef>
+          <a:fontRef idx="minor">
+            <a:schemeClr val="lt1"/>
+          </a:fontRef>
+        </p:style>
+        <p:txBody>
+          <a:bodyPr rtlCol="0" anchor="ctr"/>
+          <a:lstStyle/>
+          <a:p>
+            <a:pPr algn="ctr"/>
+          </a:p>
+        </p:txBody>
+      </p:sp>
+      <p:sp>
+        <p:nvSpPr>
+          <p:cNvPr id="18" name="TextBox 17"/>
+          <p:cNvSpPr txBox="1"/>
+          <p:nvPr/>
+        </p:nvSpPr>
+        <p:spPr>
+          <a:xfrm>
+            <a:off x="8823960" y="5687568"/>
+            <a:ext cx="2286000" cy="411480"/>
+          </a:xfrm>
+          <a:prstGeom prst="rect">
+            <a:avLst/>
+          </a:prstGeom>
+          <a:noFill/>
+        </p:spPr>
+        <p:txBody>
+          <a:bodyPr wrap="square">
+            <a:spAutoFit/>
+          </a:bodyPr>
+          <a:lstStyle/>
+          <a:p>
+            <a:pPr algn="l"/>
+            <a:r>
+              <a:rPr sz="1400" b="1">
+                <a:solidFill>
+                  <a:srgbClr val="F2F4F5"/>
+                </a:solidFill>
+                <a:latin typeface="Inter"/>
+              </a:rPr>
+              <a:t>Strong</a:t>
+            </a:r>
+            <a:r>
+              <a:rPr sz="1100" b="0">
+                <a:solidFill>
+                  <a:srgbClr val="69737D"/>
+                </a:solidFill>
+                <a:latin typeface="Inter"/>
+              </a:rPr>
+              <a:t>  Level 3</a:t>
             </a:r>
           </a:p>
         </p:txBody>
@@ -5124,7 +6776,7 @@
     <p:bg>
       <p:bgPr>
         <a:solidFill>
-          <a:srgbClr val="111318"/>
+          <a:srgbClr val="070A0D"/>
         </a:solidFill>
         <a:effectLst/>
       </p:bgPr>
@@ -5144,8 +6796,8 @@
         </p:nvSpPr>
         <p:spPr>
           <a:xfrm>
-            <a:off x="640080" y="274320"/>
-            <a:ext cx="10881360" cy="365760"/>
+            <a:off x="731520" y="411480"/>
+            <a:ext cx="10698480" cy="320040"/>
           </a:xfrm>
           <a:prstGeom prst="rect">
             <a:avLst/>
@@ -5160,13 +6812,22 @@
           <a:p>
             <a:pPr algn="l"/>
             <a:r>
-              <a:rPr sz="1400" b="1">
-                <a:solidFill>
-                  <a:srgbClr val="FF5A1F"/>
-                </a:solidFill>
-                <a:latin typeface="Calibri"/>
-              </a:rPr>
-              <a:t>05 · МЕТРИКА И САБМИТ</a:t>
+              <a:rPr sz="1300" b="1">
+                <a:solidFill>
+                  <a:srgbClr val="69737D"/>
+                </a:solidFill>
+                <a:latin typeface="Inter"/>
+              </a:rPr>
+              <a:t>05  </a:t>
+            </a:r>
+            <a:r>
+              <a:rPr sz="1300" b="1">
+                <a:solidFill>
+                  <a:srgbClr val="69737D"/>
+                </a:solidFill>
+                <a:latin typeface="Inter"/>
+              </a:rPr>
+              <a:t>МЕТРИКА И САБМИТ · FINAL</a:t>
             </a:r>
           </a:p>
         </p:txBody>
@@ -5179,8 +6840,8 @@
         </p:nvSpPr>
         <p:spPr>
           <a:xfrm>
-            <a:off x="640080" y="640080"/>
-            <a:ext cx="10881360" cy="822960"/>
+            <a:off x="731520" y="777240"/>
+            <a:ext cx="10698480" cy="914400"/>
           </a:xfrm>
           <a:prstGeom prst="rect">
             <a:avLst/>
@@ -5195,13 +6856,13 @@
           <a:p>
             <a:pPr algn="l"/>
             <a:r>
-              <a:rPr sz="3600" b="1">
-                <a:solidFill>
-                  <a:srgbClr val="F0F0F0"/>
-                </a:solidFill>
-                <a:latin typeface="Calibri"/>
-              </a:rPr>
-              <a:t>Score 0.654 · FINAL</a:t>
+              <a:rPr sz="3400" b="1">
+                <a:solidFill>
+                  <a:srgbClr val="F2F4F5"/>
+                </a:solidFill>
+                <a:latin typeface="Inter"/>
+              </a:rPr>
+              <a:t>Score 0.654</a:t>
             </a:r>
           </a:p>
         </p:txBody>
@@ -5214,17 +6875,21 @@
         </p:nvSpPr>
         <p:spPr>
           <a:xfrm>
-            <a:off x="640080" y="1920240"/>
-            <a:ext cx="10881360" cy="1371600"/>
+            <a:off x="731520" y="1828800"/>
+            <a:ext cx="10698480" cy="1280160"/>
           </a:xfrm>
           <a:prstGeom prst="roundRect">
-            <a:avLst/>
+            <a:avLst>
+              <a:gd name="adj" fmla="val 8000"/>
+            </a:avLst>
           </a:prstGeom>
           <a:solidFill>
-            <a:srgbClr val="1B1E26"/>
+            <a:srgbClr val="0E1318"/>
           </a:solidFill>
-          <a:ln>
-            <a:noFill/>
+          <a:ln w="12700">
+            <a:solidFill>
+              <a:srgbClr val="232A33"/>
+            </a:solidFill>
           </a:ln>
         </p:spPr>
         <p:style>
@@ -5257,8 +6922,8 @@
         </p:nvSpPr>
         <p:spPr>
           <a:xfrm>
-            <a:off x="914400" y="2057400"/>
-            <a:ext cx="10332720" cy="1097280"/>
+            <a:off x="1005840" y="2011680"/>
+            <a:ext cx="10149840" cy="914400"/>
           </a:xfrm>
           <a:prstGeom prst="rect">
             <a:avLst/>
@@ -5273,37 +6938,80 @@
           <a:p>
             <a:pPr algn="l"/>
             <a:r>
-              <a:rPr sz="2600" b="1">
-                <a:solidFill>
-                  <a:srgbClr val="F0F0F0"/>
-                </a:solidFill>
-                <a:latin typeface="Calibri"/>
+              <a:rPr sz="2500" b="1">
+                <a:solidFill>
+                  <a:srgbClr val="F2F4F5"/>
+                </a:solidFill>
+                <a:latin typeface="Inter"/>
               </a:rPr>
               <a:t>0.35 × 0.8434  +  0.35 × 0.5239  +  0.30 × 0.5430  =  0.654</a:t>
             </a:r>
             <a:r>
-              <a:rPr sz="1600" b="0">
-                <a:solidFill>
-                  <a:srgbClr val="9AA0AA"/>
-                </a:solidFill>
-                <a:latin typeface="Calibri"/>
+              <a:rPr sz="1500" b="0">
+                <a:solidFill>
+                  <a:srgbClr val="69737D"/>
+                </a:solidFill>
+                <a:latin typeface="Inter"/>
               </a:rPr>
               <a:t>
-F1_af · IoU_burn · mIoU_sev, micro-pool по всем пикселям</a:t>
-            </a:r>
-          </a:p>
-        </p:txBody>
-      </p:sp>
-      <p:sp>
-        <p:nvSpPr>
-          <p:cNvPr id="6" name="TextBox 5"/>
+F1_af · IoU_burn · mIoU_sev — micro-pool по всем пикселям</a:t>
+            </a:r>
+          </a:p>
+        </p:txBody>
+      </p:sp>
+      <p:sp>
+        <p:nvSpPr>
+          <p:cNvPr id="6" name="Oval 5"/>
+          <p:cNvSpPr/>
+          <p:nvPr/>
+        </p:nvSpPr>
+        <p:spPr>
+          <a:xfrm>
+            <a:off x="914400" y="3675887"/>
+            <a:ext cx="146304" cy="146304"/>
+          </a:xfrm>
+          <a:prstGeom prst="ellipse">
+            <a:avLst/>
+          </a:prstGeom>
+          <a:solidFill>
+            <a:srgbClr val="FF6B35"/>
+          </a:solidFill>
+          <a:ln>
+            <a:noFill/>
+          </a:ln>
+        </p:spPr>
+        <p:style>
+          <a:lnRef idx="1">
+            <a:schemeClr val="accent1"/>
+          </a:lnRef>
+          <a:fillRef idx="3">
+            <a:schemeClr val="accent1"/>
+          </a:fillRef>
+          <a:effectRef idx="2">
+            <a:schemeClr val="accent1"/>
+          </a:effectRef>
+          <a:fontRef idx="minor">
+            <a:schemeClr val="lt1"/>
+          </a:fontRef>
+        </p:style>
+        <p:txBody>
+          <a:bodyPr rtlCol="0" anchor="ctr"/>
+          <a:lstStyle/>
+          <a:p>
+            <a:pPr algn="ctr"/>
+          </a:p>
+        </p:txBody>
+      </p:sp>
+      <p:sp>
+        <p:nvSpPr>
+          <p:cNvPr id="7" name="TextBox 6"/>
           <p:cNvSpPr txBox="1"/>
           <p:nvPr/>
         </p:nvSpPr>
         <p:spPr>
           <a:xfrm>
-            <a:off x="822960" y="3749039"/>
-            <a:ext cx="10515600" cy="731520"/>
+            <a:off x="1234440" y="3511296"/>
+            <a:ext cx="10424160" cy="640080"/>
           </a:xfrm>
           <a:prstGeom prst="rect">
             <a:avLst/>
@@ -5318,36 +7026,70 @@
           <a:p>
             <a:pPr algn="l"/>
             <a:r>
-              <a:rPr sz="1800" b="1">
-                <a:solidFill>
-                  <a:srgbClr val="FF5A1F"/>
-                </a:solidFill>
-                <a:latin typeface="Calibri"/>
-              </a:rPr>
-              <a:t>•  </a:t>
-            </a:r>
-            <a:r>
-              <a:rPr sz="1800" b="0">
-                <a:solidFill>
-                  <a:srgbClr val="F0F0F0"/>
-                </a:solidFill>
-                <a:latin typeface="Calibri"/>
-              </a:rPr>
-              <a:t>submission.csv: 4.1M, 447 строк (180 AF×1 + 89 BS×3), пары = шаблону</a:t>
-            </a:r>
-          </a:p>
-        </p:txBody>
-      </p:sp>
-      <p:sp>
-        <p:nvSpPr>
-          <p:cNvPr id="7" name="TextBox 6"/>
+              <a:rPr sz="1600" b="0">
+                <a:solidFill>
+                  <a:srgbClr val="A4ADB5"/>
+                </a:solidFill>
+                <a:latin typeface="Inter"/>
+              </a:rPr>
+              <a:t>submission.csv: 4.1M · 447 строк (180 AF×1 + 89 BS×3) · пары = шаблону · md5 97b86c67</a:t>
+            </a:r>
+          </a:p>
+        </p:txBody>
+      </p:sp>
+      <p:sp>
+        <p:nvSpPr>
+          <p:cNvPr id="8" name="Oval 7"/>
+          <p:cNvSpPr/>
+          <p:nvPr/>
+        </p:nvSpPr>
+        <p:spPr>
+          <a:xfrm>
+            <a:off x="914400" y="4334256"/>
+            <a:ext cx="146304" cy="146304"/>
+          </a:xfrm>
+          <a:prstGeom prst="ellipse">
+            <a:avLst/>
+          </a:prstGeom>
+          <a:solidFill>
+            <a:srgbClr val="FF6B35"/>
+          </a:solidFill>
+          <a:ln>
+            <a:noFill/>
+          </a:ln>
+        </p:spPr>
+        <p:style>
+          <a:lnRef idx="1">
+            <a:schemeClr val="accent1"/>
+          </a:lnRef>
+          <a:fillRef idx="3">
+            <a:schemeClr val="accent1"/>
+          </a:fillRef>
+          <a:effectRef idx="2">
+            <a:schemeClr val="accent1"/>
+          </a:effectRef>
+          <a:fontRef idx="minor">
+            <a:schemeClr val="lt1"/>
+          </a:fontRef>
+        </p:style>
+        <p:txBody>
+          <a:bodyPr rtlCol="0" anchor="ctr"/>
+          <a:lstStyle/>
+          <a:p>
+            <a:pPr algn="ctr"/>
+          </a:p>
+        </p:txBody>
+      </p:sp>
+      <p:sp>
+        <p:nvSpPr>
+          <p:cNvPr id="9" name="TextBox 8"/>
           <p:cNvSpPr txBox="1"/>
           <p:nvPr/>
         </p:nvSpPr>
         <p:spPr>
           <a:xfrm>
-            <a:off x="822960" y="4526279"/>
-            <a:ext cx="10515600" cy="731520"/>
+            <a:off x="1234440" y="4169664"/>
+            <a:ext cx="10424160" cy="640080"/>
           </a:xfrm>
           <a:prstGeom prst="rect">
             <a:avLst/>
@@ -5362,36 +7104,70 @@
           <a:p>
             <a:pPr algn="l"/>
             <a:r>
-              <a:rPr sz="1800" b="1">
-                <a:solidFill>
-                  <a:srgbClr val="FF5A1F"/>
-                </a:solidFill>
-                <a:latin typeface="Calibri"/>
-              </a:rPr>
-              <a:t>•  </a:t>
-            </a:r>
-            <a:r>
-              <a:rPr sz="1800" b="0">
-                <a:solidFill>
-                  <a:srgbClr val="F0F0F0"/>
-                </a:solidFill>
-                <a:latin typeface="Calibri"/>
-              </a:rPr>
-              <a:t>RLE строгий: нумерация с 1, склейка касающихся серий, пустые классы «» · NaN 0 · пересечений 0</a:t>
-            </a:r>
-          </a:p>
-        </p:txBody>
-      </p:sp>
-      <p:sp>
-        <p:nvSpPr>
-          <p:cNvPr id="8" name="TextBox 7"/>
+              <a:rPr sz="1600" b="0">
+                <a:solidFill>
+                  <a:srgbClr val="A4ADB5"/>
+                </a:solidFill>
+                <a:latin typeface="Inter"/>
+              </a:rPr>
+              <a:t>RLE строгий: нумерация с 1 · склейка касающихся серий · пустые классы «» · NaN 0 · пересечений 0</a:t>
+            </a:r>
+          </a:p>
+        </p:txBody>
+      </p:sp>
+      <p:sp>
+        <p:nvSpPr>
+          <p:cNvPr id="10" name="Oval 9"/>
+          <p:cNvSpPr/>
+          <p:nvPr/>
+        </p:nvSpPr>
+        <p:spPr>
+          <a:xfrm>
+            <a:off x="914400" y="4992624"/>
+            <a:ext cx="146304" cy="146304"/>
+          </a:xfrm>
+          <a:prstGeom prst="ellipse">
+            <a:avLst/>
+          </a:prstGeom>
+          <a:solidFill>
+            <a:srgbClr val="FF6B35"/>
+          </a:solidFill>
+          <a:ln>
+            <a:noFill/>
+          </a:ln>
+        </p:spPr>
+        <p:style>
+          <a:lnRef idx="1">
+            <a:schemeClr val="accent1"/>
+          </a:lnRef>
+          <a:fillRef idx="3">
+            <a:schemeClr val="accent1"/>
+          </a:fillRef>
+          <a:effectRef idx="2">
+            <a:schemeClr val="accent1"/>
+          </a:effectRef>
+          <a:fontRef idx="minor">
+            <a:schemeClr val="lt1"/>
+          </a:fontRef>
+        </p:style>
+        <p:txBody>
+          <a:bodyPr rtlCol="0" anchor="ctr"/>
+          <a:lstStyle/>
+          <a:p>
+            <a:pPr algn="ctr"/>
+          </a:p>
+        </p:txBody>
+      </p:sp>
+      <p:sp>
+        <p:nvSpPr>
+          <p:cNvPr id="11" name="TextBox 10"/>
           <p:cNvSpPr txBox="1"/>
           <p:nvPr/>
         </p:nvSpPr>
         <p:spPr>
           <a:xfrm>
-            <a:off x="822960" y="5303520"/>
-            <a:ext cx="10515600" cy="731520"/>
+            <a:off x="1234440" y="4828032"/>
+            <a:ext cx="10424160" cy="640080"/>
           </a:xfrm>
           <a:prstGeom prst="rect">
             <a:avLst/>
@@ -5406,22 +7182,13 @@
           <a:p>
             <a:pPr algn="l"/>
             <a:r>
-              <a:rPr sz="1800" b="1">
-                <a:solidFill>
-                  <a:srgbClr val="FF5A1F"/>
-                </a:solidFill>
-                <a:latin typeface="Calibri"/>
-              </a:rPr>
-              <a:t>•  </a:t>
-            </a:r>
-            <a:r>
-              <a:rPr sz="1800" b="0">
-                <a:solidFill>
-                  <a:srgbClr val="F0F0F0"/>
-                </a:solidFill>
-                <a:latin typeface="Calibri"/>
-              </a:rPr>
-              <a:t>md5 97b86c67 · 2 прогона побайтово идентичны · переобучение запрещено</a:t>
+              <a:rPr sz="1600" b="0">
+                <a:solidFill>
+                  <a:srgbClr val="A4ADB5"/>
+                </a:solidFill>
+                <a:latin typeface="Inter"/>
+              </a:rPr>
+              <a:t>Два прогона побайтово идентичны · переобучение запрещено — файл заморожен</a:t>
             </a:r>
           </a:p>
         </p:txBody>
@@ -5440,7 +7207,7 @@
     <p:bg>
       <p:bgPr>
         <a:solidFill>
-          <a:srgbClr val="111318"/>
+          <a:srgbClr val="070A0D"/>
         </a:solidFill>
         <a:effectLst/>
       </p:bgPr>
@@ -5460,8 +7227,8 @@
         </p:nvSpPr>
         <p:spPr>
           <a:xfrm>
-            <a:off x="640080" y="274320"/>
-            <a:ext cx="10881360" cy="365760"/>
+            <a:off x="731520" y="411480"/>
+            <a:ext cx="10698480" cy="320040"/>
           </a:xfrm>
           <a:prstGeom prst="rect">
             <a:avLst/>
@@ -5476,13 +7243,22 @@
           <a:p>
             <a:pPr algn="l"/>
             <a:r>
-              <a:rPr sz="1400" b="1">
-                <a:solidFill>
-                  <a:srgbClr val="FF5A1F"/>
-                </a:solidFill>
-                <a:latin typeface="Calibri"/>
-              </a:rPr>
-              <a:t>06 · СЕРВИС: API</a:t>
+              <a:rPr sz="1300" b="1">
+                <a:solidFill>
+                  <a:srgbClr val="69737D"/>
+                </a:solidFill>
+                <a:latin typeface="Inter"/>
+              </a:rPr>
+              <a:t>06  </a:t>
+            </a:r>
+            <a:r>
+              <a:rPr sz="1300" b="1">
+                <a:solidFill>
+                  <a:srgbClr val="69737D"/>
+                </a:solidFill>
+                <a:latin typeface="Inter"/>
+              </a:rPr>
+              <a:t>СЕРВИС · ВАРИАНТ A</a:t>
             </a:r>
           </a:p>
         </p:txBody>
@@ -5495,8 +7271,8 @@
         </p:nvSpPr>
         <p:spPr>
           <a:xfrm>
-            <a:off x="640080" y="640080"/>
-            <a:ext cx="10881360" cy="822960"/>
+            <a:off x="731520" y="777240"/>
+            <a:ext cx="10698480" cy="914400"/>
           </a:xfrm>
           <a:prstGeom prst="rect">
             <a:avLst/>
@@ -5511,13 +7287,13 @@
           <a:p>
             <a:pPr algn="l"/>
             <a:r>
-              <a:rPr sz="3600" b="1">
-                <a:solidFill>
-                  <a:srgbClr val="F0F0F0"/>
-                </a:solidFill>
-                <a:latin typeface="Calibri"/>
-              </a:rPr>
-              <a:t>Вариант A · файловый бэк · без БД</a:t>
+              <a:rPr sz="3400" b="1">
+                <a:solidFill>
+                  <a:srgbClr val="F2F4F5"/>
+                </a:solidFill>
+                <a:latin typeface="Inter"/>
+              </a:rPr>
+              <a:t>API + карта · файловый бэк · без БД</a:t>
             </a:r>
           </a:p>
         </p:txBody>
@@ -5530,8 +7306,8 @@
         </p:nvSpPr>
         <p:spPr>
           <a:xfrm>
-            <a:off x="822960" y="1737360"/>
-            <a:ext cx="10515600" cy="731520"/>
+            <a:off x="914400" y="1920240"/>
+            <a:ext cx="4206240" cy="548640"/>
           </a:xfrm>
           <a:prstGeom prst="rect">
             <a:avLst/>
@@ -5546,22 +7322,13 @@
           <a:p>
             <a:pPr algn="l"/>
             <a:r>
-              <a:rPr sz="1800" b="1">
-                <a:solidFill>
-                  <a:srgbClr val="FF5A1F"/>
-                </a:solidFill>
-                <a:latin typeface="Calibri"/>
-              </a:rPr>
-              <a:t>•  </a:t>
-            </a:r>
-            <a:r>
-              <a:rPr sz="1800" b="0">
-                <a:solidFill>
-                  <a:srgbClr val="F0F0F0"/>
-                </a:solidFill>
-                <a:latin typeface="Calibri"/>
-              </a:rPr>
-              <a:t>GET /v1/health → {status: ok}</a:t>
+              <a:rPr sz="1600" b="1">
+                <a:solidFill>
+                  <a:srgbClr val="FF8B5F"/>
+                </a:solidFill>
+                <a:latin typeface="Inter"/>
+              </a:rPr>
+              <a:t>GET /v1/health</a:t>
             </a:r>
           </a:p>
         </p:txBody>
@@ -5574,8 +7341,8 @@
         </p:nvSpPr>
         <p:spPr>
           <a:xfrm>
-            <a:off x="822960" y="2514600"/>
-            <a:ext cx="10515600" cy="731520"/>
+            <a:off x="5120640" y="1920240"/>
+            <a:ext cx="6309360" cy="548640"/>
           </a:xfrm>
           <a:prstGeom prst="rect">
             <a:avLst/>
@@ -5590,22 +7357,13 @@
           <a:p>
             <a:pPr algn="l"/>
             <a:r>
-              <a:rPr sz="1800" b="1">
-                <a:solidFill>
-                  <a:srgbClr val="FF5A1F"/>
-                </a:solidFill>
-                <a:latin typeface="Calibri"/>
-              </a:rPr>
-              <a:t>•  </a:t>
-            </a:r>
-            <a:r>
-              <a:rPr sz="1800" b="0">
-                <a:solidFill>
-                  <a:srgbClr val="F0F0F0"/>
-                </a:solidFill>
-                <a:latin typeface="Calibri"/>
-              </a:rPr>
-              <a:t>GET /v1/fires?bbox=&amp;dates= — точки · GET /v1/burned-areas?severity=1,2,3 — полигоны {id, severity, area_ha, даты}</a:t>
+              <a:rPr sz="1600" b="0">
+                <a:solidFill>
+                  <a:srgbClr val="A4ADB5"/>
+                </a:solidFill>
+                <a:latin typeface="Inter"/>
+              </a:rPr>
+              <a:t>{status: ok} — зелёный бейдж в шапке</a:t>
             </a:r>
           </a:p>
         </p:txBody>
@@ -5618,8 +7376,8 @@
         </p:nvSpPr>
         <p:spPr>
           <a:xfrm>
-            <a:off x="822960" y="3291839"/>
-            <a:ext cx="10515600" cy="731520"/>
+            <a:off x="914400" y="2697480"/>
+            <a:ext cx="4206240" cy="548640"/>
           </a:xfrm>
           <a:prstGeom prst="rect">
             <a:avLst/>
@@ -5634,22 +7392,13 @@
           <a:p>
             <a:pPr algn="l"/>
             <a:r>
-              <a:rPr sz="1800" b="1">
-                <a:solidFill>
-                  <a:srgbClr val="FF5A1F"/>
-                </a:solidFill>
-                <a:latin typeface="Calibri"/>
-              </a:rPr>
-              <a:t>•  </a:t>
-            </a:r>
-            <a:r>
-              <a:rPr sz="1800" b="0">
-                <a:solidFill>
-                  <a:srgbClr val="F0F0F0"/>
-                </a:solidFill>
-                <a:latin typeface="Calibri"/>
-              </a:rPr>
-              <a:t>GET /v1/analytics — {fire_points, total_burned_ha, by_severity_ha/pct} · POST /v1/*/query — запрос по полигону</a:t>
+              <a:rPr sz="1600" b="1">
+                <a:solidFill>
+                  <a:srgbClr val="FF8B5F"/>
+                </a:solidFill>
+                <a:latin typeface="Inter"/>
+              </a:rPr>
+              <a:t>GET /v1/fires?bbox=&amp;dates=</a:t>
             </a:r>
           </a:p>
         </p:txBody>
@@ -5662,8 +7411,8 @@
         </p:nvSpPr>
         <p:spPr>
           <a:xfrm>
-            <a:off x="822960" y="4069079"/>
-            <a:ext cx="10515600" cy="731520"/>
+            <a:off x="5120640" y="2697480"/>
+            <a:ext cx="6309360" cy="548640"/>
           </a:xfrm>
           <a:prstGeom prst="rect">
             <a:avLst/>
@@ -5678,22 +7427,223 @@
           <a:p>
             <a:pPr algn="l"/>
             <a:r>
-              <a:rPr sz="1800" b="1">
-                <a:solidFill>
-                  <a:srgbClr val="FF5A1F"/>
-                </a:solidFill>
-                <a:latin typeface="Calibri"/>
-              </a:rPr>
-              <a:t>•  </a:t>
-            </a:r>
-            <a:r>
-              <a:rPr sz="1800" b="0">
-                <a:solidFill>
-                  <a:srgbClr val="F0F0F0"/>
-                </a:solidFill>
-                <a:latin typeface="Calibri"/>
-              </a:rPr>
-              <a:t>Форматы geojson / json / shp-zip · CORS только localhost · E2E-серия docs/e2e_curl.sh</a:t>
+              <a:rPr sz="1600" b="0">
+                <a:solidFill>
+                  <a:srgbClr val="A4ADB5"/>
+                </a:solidFill>
+                <a:latin typeface="Inter"/>
+              </a:rPr>
+              <a:t>точки термоточек · красный маркер</a:t>
+            </a:r>
+          </a:p>
+        </p:txBody>
+      </p:sp>
+      <p:sp>
+        <p:nvSpPr>
+          <p:cNvPr id="8" name="TextBox 7"/>
+          <p:cNvSpPr txBox="1"/>
+          <p:nvPr/>
+        </p:nvSpPr>
+        <p:spPr>
+          <a:xfrm>
+            <a:off x="914400" y="3474720"/>
+            <a:ext cx="4206240" cy="548640"/>
+          </a:xfrm>
+          <a:prstGeom prst="rect">
+            <a:avLst/>
+          </a:prstGeom>
+          <a:noFill/>
+        </p:spPr>
+        <p:txBody>
+          <a:bodyPr wrap="square">
+            <a:spAutoFit/>
+          </a:bodyPr>
+          <a:lstStyle/>
+          <a:p>
+            <a:pPr algn="l"/>
+            <a:r>
+              <a:rPr sz="1600" b="1">
+                <a:solidFill>
+                  <a:srgbClr val="FF8B5F"/>
+                </a:solidFill>
+                <a:latin typeface="Inter"/>
+              </a:rPr>
+              <a:t>GET /v1/burned-areas?severity=</a:t>
+            </a:r>
+          </a:p>
+        </p:txBody>
+      </p:sp>
+      <p:sp>
+        <p:nvSpPr>
+          <p:cNvPr id="9" name="TextBox 8"/>
+          <p:cNvSpPr txBox="1"/>
+          <p:nvPr/>
+        </p:nvSpPr>
+        <p:spPr>
+          <a:xfrm>
+            <a:off x="5120640" y="3474720"/>
+            <a:ext cx="6309360" cy="548640"/>
+          </a:xfrm>
+          <a:prstGeom prst="rect">
+            <a:avLst/>
+          </a:prstGeom>
+          <a:noFill/>
+        </p:spPr>
+        <p:txBody>
+          <a:bodyPr wrap="square">
+            <a:spAutoFit/>
+          </a:bodyPr>
+          <a:lstStyle/>
+          <a:p>
+            <a:pPr algn="l"/>
+            <a:r>
+              <a:rPr sz="1600" b="0">
+                <a:solidFill>
+                  <a:srgbClr val="A4ADB5"/>
+                </a:solidFill>
+                <a:latin typeface="Inter"/>
+              </a:rPr>
+              <a:t>полигоны {id, severity, area_ha, даты} · geojson/json/shp</a:t>
+            </a:r>
+          </a:p>
+        </p:txBody>
+      </p:sp>
+      <p:sp>
+        <p:nvSpPr>
+          <p:cNvPr id="10" name="TextBox 9"/>
+          <p:cNvSpPr txBox="1"/>
+          <p:nvPr/>
+        </p:nvSpPr>
+        <p:spPr>
+          <a:xfrm>
+            <a:off x="914400" y="4251960"/>
+            <a:ext cx="4206240" cy="548640"/>
+          </a:xfrm>
+          <a:prstGeom prst="rect">
+            <a:avLst/>
+          </a:prstGeom>
+          <a:noFill/>
+        </p:spPr>
+        <p:txBody>
+          <a:bodyPr wrap="square">
+            <a:spAutoFit/>
+          </a:bodyPr>
+          <a:lstStyle/>
+          <a:p>
+            <a:pPr algn="l"/>
+            <a:r>
+              <a:rPr sz="1600" b="1">
+                <a:solidFill>
+                  <a:srgbClr val="FF8B5F"/>
+                </a:solidFill>
+                <a:latin typeface="Inter"/>
+              </a:rPr>
+              <a:t>GET /v1/analytics</a:t>
+            </a:r>
+          </a:p>
+        </p:txBody>
+      </p:sp>
+      <p:sp>
+        <p:nvSpPr>
+          <p:cNvPr id="11" name="TextBox 10"/>
+          <p:cNvSpPr txBox="1"/>
+          <p:nvPr/>
+        </p:nvSpPr>
+        <p:spPr>
+          <a:xfrm>
+            <a:off x="5120640" y="4251960"/>
+            <a:ext cx="6309360" cy="548640"/>
+          </a:xfrm>
+          <a:prstGeom prst="rect">
+            <a:avLst/>
+          </a:prstGeom>
+          <a:noFill/>
+        </p:spPr>
+        <p:txBody>
+          <a:bodyPr wrap="square">
+            <a:spAutoFit/>
+          </a:bodyPr>
+          <a:lstStyle/>
+          <a:p>
+            <a:pPr algn="l"/>
+            <a:r>
+              <a:rPr sz="1600" b="0">
+                <a:solidFill>
+                  <a:srgbClr val="A4ADB5"/>
+                </a:solidFill>
+                <a:latin typeface="Inter"/>
+              </a:rPr>
+              <a:t>{fire_points, total_burned_ha, by_severity_ha/pct} — нижняя плашка</a:t>
+            </a:r>
+          </a:p>
+        </p:txBody>
+      </p:sp>
+      <p:sp>
+        <p:nvSpPr>
+          <p:cNvPr id="12" name="TextBox 11"/>
+          <p:cNvSpPr txBox="1"/>
+          <p:nvPr/>
+        </p:nvSpPr>
+        <p:spPr>
+          <a:xfrm>
+            <a:off x="914400" y="5029200"/>
+            <a:ext cx="4206240" cy="548640"/>
+          </a:xfrm>
+          <a:prstGeom prst="rect">
+            <a:avLst/>
+          </a:prstGeom>
+          <a:noFill/>
+        </p:spPr>
+        <p:txBody>
+          <a:bodyPr wrap="square">
+            <a:spAutoFit/>
+          </a:bodyPr>
+          <a:lstStyle/>
+          <a:p>
+            <a:pPr algn="l"/>
+            <a:r>
+              <a:rPr sz="1600" b="1">
+                <a:solidFill>
+                  <a:srgbClr val="FF8B5F"/>
+                </a:solidFill>
+                <a:latin typeface="Inter"/>
+              </a:rPr>
+              <a:t>POST /v1/*/query</a:t>
+            </a:r>
+          </a:p>
+        </p:txBody>
+      </p:sp>
+      <p:sp>
+        <p:nvSpPr>
+          <p:cNvPr id="13" name="TextBox 12"/>
+          <p:cNvSpPr txBox="1"/>
+          <p:nvPr/>
+        </p:nvSpPr>
+        <p:spPr>
+          <a:xfrm>
+            <a:off x="5120640" y="5029200"/>
+            <a:ext cx="6309360" cy="548640"/>
+          </a:xfrm>
+          <a:prstGeom prst="rect">
+            <a:avLst/>
+          </a:prstGeom>
+          <a:noFill/>
+        </p:spPr>
+        <p:txBody>
+          <a:bodyPr wrap="square">
+            <a:spAutoFit/>
+          </a:bodyPr>
+          <a:lstStyle/>
+          <a:p>
+            <a:pPr algn="l"/>
+            <a:r>
+              <a:rPr sz="1600" b="0">
+                <a:solidFill>
+                  <a:srgbClr val="A4ADB5"/>
+                </a:solidFill>
+                <a:latin typeface="Inter"/>
+              </a:rPr>
+              <a:t>тот же ответ по GeoJSON-полигону · CORS только localhost</a:t>
             </a:r>
           </a:p>
         </p:txBody>
@@ -5712,7 +7662,7 @@
     <p:bg>
       <p:bgPr>
         <a:solidFill>
-          <a:srgbClr val="111318"/>
+          <a:srgbClr val="070A0D"/>
         </a:solidFill>
         <a:effectLst/>
       </p:bgPr>
@@ -5724,79 +7674,9 @@
         <p:nvPr/>
       </p:nvGrpSpPr>
       <p:grpSpPr/>
-      <p:sp>
-        <p:nvSpPr>
-          <p:cNvPr id="2" name="TextBox 1"/>
-          <p:cNvSpPr txBox="1"/>
-          <p:nvPr/>
-        </p:nvSpPr>
-        <p:spPr>
-          <a:xfrm>
-            <a:off x="640080" y="274320"/>
-            <a:ext cx="10881360" cy="365760"/>
-          </a:xfrm>
-          <a:prstGeom prst="rect">
-            <a:avLst/>
-          </a:prstGeom>
-          <a:noFill/>
-        </p:spPr>
-        <p:txBody>
-          <a:bodyPr wrap="square">
-            <a:spAutoFit/>
-          </a:bodyPr>
-          <a:lstStyle/>
-          <a:p>
-            <a:pPr algn="l"/>
-            <a:r>
-              <a:rPr sz="1400" b="1">
-                <a:solidFill>
-                  <a:srgbClr val="FF5A1F"/>
-                </a:solidFill>
-                <a:latin typeface="Calibri"/>
-              </a:rPr>
-              <a:t>07 · ДЕМО</a:t>
-            </a:r>
-          </a:p>
-        </p:txBody>
-      </p:sp>
-      <p:sp>
-        <p:nvSpPr>
-          <p:cNvPr id="3" name="TextBox 2"/>
-          <p:cNvSpPr txBox="1"/>
-          <p:nvPr/>
-        </p:nvSpPr>
-        <p:spPr>
-          <a:xfrm>
-            <a:off x="640080" y="640080"/>
-            <a:ext cx="10881360" cy="822960"/>
-          </a:xfrm>
-          <a:prstGeom prst="rect">
-            <a:avLst/>
-          </a:prstGeom>
-          <a:noFill/>
-        </p:spPr>
-        <p:txBody>
-          <a:bodyPr wrap="square">
-            <a:spAutoFit/>
-          </a:bodyPr>
-          <a:lstStyle/>
-          <a:p>
-            <a:pPr algn="l"/>
-            <a:r>
-              <a:rPr sz="3600" b="1">
-                <a:solidFill>
-                  <a:srgbClr val="F0F0F0"/>
-                </a:solidFill>
-                <a:latin typeface="Calibri"/>
-              </a:rPr>
-              <a:t>Карта: 17 точек · 34 полигона · справка без нулей</a:t>
-            </a:r>
-          </a:p>
-        </p:txBody>
-      </p:sp>
       <p:pic>
         <p:nvPicPr>
-          <p:cNvPr id="4" name="Picture 3" descr="01-map-full.png"/>
+          <p:cNvPr id="2" name="Picture 1" descr="01-map-full.png"/>
           <p:cNvPicPr>
             <a:picLocks noChangeAspect="1"/>
           </p:cNvPicPr>
@@ -5810,8 +7690,8 @@
         </p:blipFill>
         <p:spPr>
           <a:xfrm>
-            <a:off x="640080" y="1737360"/>
-            <a:ext cx="10881360" cy="4572000"/>
+            <a:off x="0" y="0"/>
+            <a:ext cx="12188952" cy="6858000"/>
           </a:xfrm>
           <a:prstGeom prst="rect">
             <a:avLst/>
@@ -5832,7 +7712,7 @@
     <p:bg>
       <p:bgPr>
         <a:solidFill>
-          <a:srgbClr val="111318"/>
+          <a:srgbClr val="070A0D"/>
         </a:solidFill>
         <a:effectLst/>
       </p:bgPr>
@@ -5852,8 +7732,8 @@
         </p:nvSpPr>
         <p:spPr>
           <a:xfrm>
-            <a:off x="640080" y="274320"/>
-            <a:ext cx="10881360" cy="365760"/>
+            <a:off x="731520" y="411480"/>
+            <a:ext cx="10698480" cy="320040"/>
           </a:xfrm>
           <a:prstGeom prst="rect">
             <a:avLst/>
@@ -5868,13 +7748,22 @@
           <a:p>
             <a:pPr algn="l"/>
             <a:r>
-              <a:rPr sz="1400" b="1">
-                <a:solidFill>
-                  <a:srgbClr val="FF5A1F"/>
-                </a:solidFill>
-                <a:latin typeface="Calibri"/>
-              </a:rPr>
-              <a:t>08 · ВОСПРОИЗВОДИМОСТЬ</a:t>
+              <a:rPr sz="1300" b="1">
+                <a:solidFill>
+                  <a:srgbClr val="69737D"/>
+                </a:solidFill>
+                <a:latin typeface="Inter"/>
+              </a:rPr>
+              <a:t>08  </a:t>
+            </a:r>
+            <a:r>
+              <a:rPr sz="1300" b="1">
+                <a:solidFill>
+                  <a:srgbClr val="69737D"/>
+                </a:solidFill>
+                <a:latin typeface="Inter"/>
+              </a:rPr>
+              <a:t>ВОСПРОИЗВОДИМОСТЬ</a:t>
             </a:r>
           </a:p>
         </p:txBody>
@@ -5887,8 +7776,8 @@
         </p:nvSpPr>
         <p:spPr>
           <a:xfrm>
-            <a:off x="640080" y="640080"/>
-            <a:ext cx="10881360" cy="822960"/>
+            <a:off x="731520" y="777240"/>
+            <a:ext cx="10698480" cy="914400"/>
           </a:xfrm>
           <a:prstGeom prst="rect">
             <a:avLst/>
@@ -5903,11 +7792,11 @@
           <a:p>
             <a:pPr algn="l"/>
             <a:r>
-              <a:rPr sz="3600" b="1">
-                <a:solidFill>
-                  <a:srgbClr val="F0F0F0"/>
-                </a:solidFill>
-                <a:latin typeface="Calibri"/>
+              <a:rPr sz="3400" b="1">
+                <a:solidFill>
+                  <a:srgbClr val="F2F4F5"/>
+                </a:solidFill>
+                <a:latin typeface="Inter"/>
               </a:rPr>
               <a:t>Оргам: одна команда</a:t>
             </a:r>
@@ -5916,14 +7805,57 @@
       </p:sp>
       <p:sp>
         <p:nvSpPr>
-          <p:cNvPr id="4" name="TextBox 3"/>
+          <p:cNvPr id="4" name="Oval 3"/>
+          <p:cNvSpPr/>
+          <p:nvPr/>
+        </p:nvSpPr>
+        <p:spPr>
+          <a:xfrm>
+            <a:off x="914400" y="2121408"/>
+            <a:ext cx="146304" cy="146304"/>
+          </a:xfrm>
+          <a:prstGeom prst="ellipse">
+            <a:avLst/>
+          </a:prstGeom>
+          <a:solidFill>
+            <a:srgbClr val="FF6B35"/>
+          </a:solidFill>
+          <a:ln>
+            <a:noFill/>
+          </a:ln>
+        </p:spPr>
+        <p:style>
+          <a:lnRef idx="1">
+            <a:schemeClr val="accent1"/>
+          </a:lnRef>
+          <a:fillRef idx="3">
+            <a:schemeClr val="accent1"/>
+          </a:fillRef>
+          <a:effectRef idx="2">
+            <a:schemeClr val="accent1"/>
+          </a:effectRef>
+          <a:fontRef idx="minor">
+            <a:schemeClr val="lt1"/>
+          </a:fontRef>
+        </p:style>
+        <p:txBody>
+          <a:bodyPr rtlCol="0" anchor="ctr"/>
+          <a:lstStyle/>
+          <a:p>
+            <a:pPr algn="ctr"/>
+          </a:p>
+        </p:txBody>
+      </p:sp>
+      <p:sp>
+        <p:nvSpPr>
+          <p:cNvPr id="5" name="TextBox 4"/>
           <p:cNvSpPr txBox="1"/>
           <p:nvPr/>
         </p:nvSpPr>
         <p:spPr>
           <a:xfrm>
-            <a:off x="822960" y="1737360"/>
-            <a:ext cx="10515600" cy="731520"/>
+            <a:off x="1234440" y="1956816"/>
+            <a:ext cx="10424160" cy="640080"/>
           </a:xfrm>
           <a:prstGeom prst="rect">
             <a:avLst/>
@@ -5938,20 +7870,11 @@
           <a:p>
             <a:pPr algn="l"/>
             <a:r>
-              <a:rPr sz="1800" b="1">
-                <a:solidFill>
-                  <a:srgbClr val="FF5A1F"/>
-                </a:solidFill>
-                <a:latin typeface="Calibri"/>
-              </a:rPr>
-              <a:t>•  </a:t>
-            </a:r>
-            <a:r>
-              <a:rPr sz="1800" b="0">
-                <a:solidFill>
-                  <a:srgbClr val="F0F0F0"/>
-                </a:solidFill>
-                <a:latin typeface="Calibri"/>
+              <a:rPr sz="1700" b="0">
+                <a:solidFill>
+                  <a:srgbClr val="A4ADB5"/>
+                </a:solidFill>
+                <a:latin typeface="Inter"/>
               </a:rPr>
               <a:t>Веса в репо: weights/af.pt + bs.pt + af_thresh.json — докачивать нечего</a:t>
             </a:r>
@@ -5960,14 +7883,57 @@
       </p:sp>
       <p:sp>
         <p:nvSpPr>
-          <p:cNvPr id="5" name="TextBox 4"/>
+          <p:cNvPr id="6" name="Oval 5"/>
+          <p:cNvSpPr/>
+          <p:nvPr/>
+        </p:nvSpPr>
+        <p:spPr>
+          <a:xfrm>
+            <a:off x="914400" y="2834640"/>
+            <a:ext cx="146304" cy="146304"/>
+          </a:xfrm>
+          <a:prstGeom prst="ellipse">
+            <a:avLst/>
+          </a:prstGeom>
+          <a:solidFill>
+            <a:srgbClr val="FF6B35"/>
+          </a:solidFill>
+          <a:ln>
+            <a:noFill/>
+          </a:ln>
+        </p:spPr>
+        <p:style>
+          <a:lnRef idx="1">
+            <a:schemeClr val="accent1"/>
+          </a:lnRef>
+          <a:fillRef idx="3">
+            <a:schemeClr val="accent1"/>
+          </a:fillRef>
+          <a:effectRef idx="2">
+            <a:schemeClr val="accent1"/>
+          </a:effectRef>
+          <a:fontRef idx="minor">
+            <a:schemeClr val="lt1"/>
+          </a:fontRef>
+        </p:style>
+        <p:txBody>
+          <a:bodyPr rtlCol="0" anchor="ctr"/>
+          <a:lstStyle/>
+          <a:p>
+            <a:pPr algn="ctr"/>
+          </a:p>
+        </p:txBody>
+      </p:sp>
+      <p:sp>
+        <p:nvSpPr>
+          <p:cNvPr id="7" name="TextBox 6"/>
           <p:cNvSpPr txBox="1"/>
           <p:nvPr/>
         </p:nvSpPr>
         <p:spPr>
           <a:xfrm>
-            <a:off x="822960" y="2514600"/>
-            <a:ext cx="10515600" cy="731520"/>
+            <a:off x="1234440" y="2670048"/>
+            <a:ext cx="10424160" cy="640080"/>
           </a:xfrm>
           <a:prstGeom prst="rect">
             <a:avLst/>
@@ -5982,20 +7948,11 @@
           <a:p>
             <a:pPr algn="l"/>
             <a:r>
-              <a:rPr sz="1800" b="1">
-                <a:solidFill>
-                  <a:srgbClr val="FF5A1F"/>
-                </a:solidFill>
-                <a:latin typeface="Calibri"/>
-              </a:rPr>
-              <a:t>•  </a:t>
-            </a:r>
-            <a:r>
-              <a:rPr sz="1800" b="0">
-                <a:solidFill>
-                  <a:srgbClr val="F0F0F0"/>
-                </a:solidFill>
-                <a:latin typeface="Calibri"/>
+              <a:rPr sz="1700" b="0">
+                <a:solidFill>
+                  <a:srgbClr val="A4ADB5"/>
+                </a:solidFill>
+                <a:latin typeface="Inter"/>
               </a:rPr>
               <a:t>pip install torch (cu128 или cpu) + requirements.lock · сиды 19 везде</a:t>
             </a:r>
@@ -6004,14 +7961,57 @@
       </p:sp>
       <p:sp>
         <p:nvSpPr>
-          <p:cNvPr id="6" name="TextBox 5"/>
+          <p:cNvPr id="8" name="Oval 7"/>
+          <p:cNvSpPr/>
+          <p:nvPr/>
+        </p:nvSpPr>
+        <p:spPr>
+          <a:xfrm>
+            <a:off x="914400" y="3547872"/>
+            <a:ext cx="146304" cy="146304"/>
+          </a:xfrm>
+          <a:prstGeom prst="ellipse">
+            <a:avLst/>
+          </a:prstGeom>
+          <a:solidFill>
+            <a:srgbClr val="FF6B35"/>
+          </a:solidFill>
+          <a:ln>
+            <a:noFill/>
+          </a:ln>
+        </p:spPr>
+        <p:style>
+          <a:lnRef idx="1">
+            <a:schemeClr val="accent1"/>
+          </a:lnRef>
+          <a:fillRef idx="3">
+            <a:schemeClr val="accent1"/>
+          </a:fillRef>
+          <a:effectRef idx="2">
+            <a:schemeClr val="accent1"/>
+          </a:effectRef>
+          <a:fontRef idx="minor">
+            <a:schemeClr val="lt1"/>
+          </a:fontRef>
+        </p:style>
+        <p:txBody>
+          <a:bodyPr rtlCol="0" anchor="ctr"/>
+          <a:lstStyle/>
+          <a:p>
+            <a:pPr algn="ctr"/>
+          </a:p>
+        </p:txBody>
+      </p:sp>
+      <p:sp>
+        <p:nvSpPr>
+          <p:cNvPr id="9" name="TextBox 8"/>
           <p:cNvSpPr txBox="1"/>
           <p:nvPr/>
         </p:nvSpPr>
         <p:spPr>
           <a:xfrm>
-            <a:off x="822960" y="3291839"/>
-            <a:ext cx="10515600" cy="731520"/>
+            <a:off x="1234440" y="3383280"/>
+            <a:ext cx="10424160" cy="640080"/>
           </a:xfrm>
           <a:prstGeom prst="rect">
             <a:avLst/>
@@ -6026,36 +8026,70 @@
           <a:p>
             <a:pPr algn="l"/>
             <a:r>
-              <a:rPr sz="1800" b="1">
-                <a:solidFill>
-                  <a:srgbClr val="FF5A1F"/>
-                </a:solidFill>
-                <a:latin typeface="Calibri"/>
-              </a:rPr>
-              <a:t>•  </a:t>
-            </a:r>
-            <a:r>
-              <a:rPr sz="1800" b="0">
-                <a:solidFill>
-                  <a:srgbClr val="F0F0F0"/>
-                </a:solidFill>
-                <a:latin typeface="Calibri"/>
-              </a:rPr>
-              <a:t>PYTHONPATH=src/models inference.py --data-dir &lt;test&gt; --output submission.csv (~28 сек на GPU, CPU — дольше, результат тот же)</a:t>
-            </a:r>
-          </a:p>
-        </p:txBody>
-      </p:sp>
-      <p:sp>
-        <p:nvSpPr>
-          <p:cNvPr id="7" name="TextBox 6"/>
+              <a:rPr sz="1700" b="0">
+                <a:solidFill>
+                  <a:srgbClr val="A4ADB5"/>
+                </a:solidFill>
+                <a:latin typeface="Inter"/>
+              </a:rPr>
+              <a:t>PYTHONPATH=src/models inference.py --data-dir &lt;test&gt; --output submission.csv — ~28 сек на GPU, на CPU дольше, результат тот же</a:t>
+            </a:r>
+          </a:p>
+        </p:txBody>
+      </p:sp>
+      <p:sp>
+        <p:nvSpPr>
+          <p:cNvPr id="10" name="Oval 9"/>
+          <p:cNvSpPr/>
+          <p:nvPr/>
+        </p:nvSpPr>
+        <p:spPr>
+          <a:xfrm>
+            <a:off x="914400" y="4261104"/>
+            <a:ext cx="146304" cy="146304"/>
+          </a:xfrm>
+          <a:prstGeom prst="ellipse">
+            <a:avLst/>
+          </a:prstGeom>
+          <a:solidFill>
+            <a:srgbClr val="FF6B35"/>
+          </a:solidFill>
+          <a:ln>
+            <a:noFill/>
+          </a:ln>
+        </p:spPr>
+        <p:style>
+          <a:lnRef idx="1">
+            <a:schemeClr val="accent1"/>
+          </a:lnRef>
+          <a:fillRef idx="3">
+            <a:schemeClr val="accent1"/>
+          </a:fillRef>
+          <a:effectRef idx="2">
+            <a:schemeClr val="accent1"/>
+          </a:effectRef>
+          <a:fontRef idx="minor">
+            <a:schemeClr val="lt1"/>
+          </a:fontRef>
+        </p:style>
+        <p:txBody>
+          <a:bodyPr rtlCol="0" anchor="ctr"/>
+          <a:lstStyle/>
+          <a:p>
+            <a:pPr algn="ctr"/>
+          </a:p>
+        </p:txBody>
+      </p:sp>
+      <p:sp>
+        <p:nvSpPr>
+          <p:cNvPr id="11" name="TextBox 10"/>
           <p:cNvSpPr txBox="1"/>
           <p:nvPr/>
         </p:nvSpPr>
         <p:spPr>
           <a:xfrm>
-            <a:off x="822960" y="4069079"/>
-            <a:ext cx="10515600" cy="731520"/>
+            <a:off x="1234440" y="4096512"/>
+            <a:ext cx="10424160" cy="640080"/>
           </a:xfrm>
           <a:prstGeom prst="rect">
             <a:avLst/>
@@ -6070,22 +8104,13 @@
           <a:p>
             <a:pPr algn="l"/>
             <a:r>
-              <a:rPr sz="1800" b="1">
-                <a:solidFill>
-                  <a:srgbClr val="FF5A1F"/>
-                </a:solidFill>
-                <a:latin typeface="Calibri"/>
-              </a:rPr>
-              <a:t>•  </a:t>
-            </a:r>
-            <a:r>
-              <a:rPr sz="1800" b="0">
-                <a:solidFill>
-                  <a:srgbClr val="F0F0F0"/>
-                </a:solidFill>
-                <a:latin typeface="Calibri"/>
-              </a:rPr>
-              <a:t>Сервис: SUBMISSION_CSV=submission.csv uvicorn service.app:app · фронт: index.html + localhost:8000</a:t>
+              <a:rPr sz="1700" b="0">
+                <a:solidFill>
+                  <a:srgbClr val="A4ADB5"/>
+                </a:solidFill>
+                <a:latin typeface="Inter"/>
+              </a:rPr>
+              <a:t>Сервис: SUBMISSION_CSV=submission.csv uvicorn service.app:app · фронт: index.html → localhost:8000</a:t>
             </a:r>
           </a:p>
         </p:txBody>

--- a/docs/slides-deck.pptx
+++ b/docs/slides-deck.pptx
@@ -3107,140 +3107,26 @@
       <p:grpSpPr/>
       <p:sp>
         <p:nvSpPr>
-          <p:cNvPr id="2" name="TextBox 1"/>
-          <p:cNvSpPr txBox="1"/>
-          <p:nvPr/>
-        </p:nvSpPr>
-        <p:spPr>
-          <a:xfrm>
-            <a:off x="731520" y="548640"/>
-            <a:ext cx="10698480" cy="365760"/>
-          </a:xfrm>
-          <a:prstGeom prst="rect">
-            <a:avLst/>
-          </a:prstGeom>
-          <a:noFill/>
-        </p:spPr>
-        <p:txBody>
-          <a:bodyPr wrap="square">
-            <a:spAutoFit/>
-          </a:bodyPr>
-          <a:lstStyle/>
-          <a:p>
-            <a:pPr algn="l"/>
-            <a:r>
-              <a:rPr sz="1300" b="1">
-                <a:solidFill>
-                  <a:srgbClr val="62D99A"/>
-                </a:solidFill>
-                <a:latin typeface="Inter"/>
-              </a:rPr>
-              <a:t>●  LIVE  ·  KOSMOHACK FIRE MONITOR</a:t>
-            </a:r>
-          </a:p>
-        </p:txBody>
-      </p:sp>
-      <p:sp>
-        <p:nvSpPr>
-          <p:cNvPr id="3" name="TextBox 2"/>
-          <p:cNvSpPr txBox="1"/>
-          <p:nvPr/>
-        </p:nvSpPr>
-        <p:spPr>
-          <a:xfrm>
-            <a:off x="731520" y="1005840"/>
-            <a:ext cx="10698480" cy="1097280"/>
-          </a:xfrm>
-          <a:prstGeom prst="rect">
-            <a:avLst/>
-          </a:prstGeom>
-          <a:noFill/>
-        </p:spPr>
-        <p:txBody>
-          <a:bodyPr wrap="square">
-            <a:spAutoFit/>
-          </a:bodyPr>
-          <a:lstStyle/>
-          <a:p>
-            <a:pPr algn="l"/>
-            <a:r>
-              <a:rPr sz="5400" b="1">
-                <a:solidFill>
-                  <a:srgbClr val="FF6B35"/>
-                </a:solidFill>
-                <a:latin typeface="Inter"/>
-              </a:rPr>
-              <a:t>FIRE </a:t>
-            </a:r>
-            <a:r>
-              <a:rPr sz="5400" b="1">
-                <a:solidFill>
-                  <a:srgbClr val="F2F4F5"/>
-                </a:solidFill>
-                <a:latin typeface="Inter"/>
-              </a:rPr>
-              <a:t>MONITOR</a:t>
-            </a:r>
-          </a:p>
-        </p:txBody>
-      </p:sp>
-      <p:sp>
-        <p:nvSpPr>
-          <p:cNvPr id="4" name="TextBox 3"/>
-          <p:cNvSpPr txBox="1"/>
-          <p:nvPr/>
-        </p:nvSpPr>
-        <p:spPr>
-          <a:xfrm>
-            <a:off x="731520" y="2286000"/>
-            <a:ext cx="10698480" cy="640080"/>
-          </a:xfrm>
-          <a:prstGeom prst="rect">
-            <a:avLst/>
-          </a:prstGeom>
-          <a:noFill/>
-        </p:spPr>
-        <p:txBody>
-          <a:bodyPr wrap="square">
-            <a:spAutoFit/>
-          </a:bodyPr>
-          <a:lstStyle/>
-          <a:p>
-            <a:pPr algn="l"/>
-            <a:r>
-              <a:rPr sz="1900" b="0">
-                <a:solidFill>
-                  <a:srgbClr val="A4ADB5"/>
-                </a:solidFill>
-                <a:latin typeface="Inter"/>
-              </a:rPr>
-              <a:t>Двухэтапный мониторинг природных пожаров по ДЗЗ — AF-детекция, BS-картирование гарей, аналитический сервис</a:t>
-            </a:r>
-          </a:p>
-        </p:txBody>
-      </p:sp>
-      <p:sp>
-        <p:nvSpPr>
-          <p:cNvPr id="5" name="Rounded Rectangle 4"/>
+          <p:cNvPr id="2" name="Rounded Rectangle 1"/>
           <p:cNvSpPr/>
           <p:nvPr/>
         </p:nvSpPr>
         <p:spPr>
           <a:xfrm>
-            <a:off x="731520" y="4846320"/>
-            <a:ext cx="2002536" cy="1417320"/>
+            <a:off x="5074920" y="228600"/>
+            <a:ext cx="2057400" cy="685800"/>
           </a:xfrm>
           <a:prstGeom prst="roundRect">
             <a:avLst>
-              <a:gd name="adj" fmla="val 8000"/>
+              <a:gd name="adj" fmla="val 9000"/>
             </a:avLst>
           </a:prstGeom>
           <a:solidFill>
-            <a:srgbClr val="0E1318"/>
+            <a:srgbClr val="0A0E12"/>
           </a:solidFill>
           <a:ln w="12700">
             <a:solidFill>
-              <a:srgbClr val="232A33"/>
+              <a:srgbClr val="2A333D"/>
             </a:solidFill>
           </a:ln>
         </p:spPr>
@@ -3268,132 +3154,23 @@
       </p:sp>
       <p:sp>
         <p:nvSpPr>
-          <p:cNvPr id="6" name="TextBox 5"/>
-          <p:cNvSpPr txBox="1"/>
-          <p:nvPr/>
-        </p:nvSpPr>
-        <p:spPr>
-          <a:xfrm>
-            <a:off x="914400" y="4956048"/>
-            <a:ext cx="1682495" cy="274320"/>
-          </a:xfrm>
-          <a:prstGeom prst="rect">
-            <a:avLst/>
-          </a:prstGeom>
-          <a:noFill/>
-        </p:spPr>
-        <p:txBody>
-          <a:bodyPr wrap="square">
-            <a:spAutoFit/>
-          </a:bodyPr>
-          <a:lstStyle/>
-          <a:p>
-            <a:pPr algn="l"/>
-            <a:r>
-              <a:rPr sz="1100" b="1">
-                <a:solidFill>
-                  <a:srgbClr val="69737D"/>
-                </a:solidFill>
-                <a:latin typeface="Inter"/>
-              </a:rPr>
-              <a:t>THERMAL</a:t>
-            </a:r>
-          </a:p>
-        </p:txBody>
-      </p:sp>
-      <p:sp>
-        <p:nvSpPr>
-          <p:cNvPr id="7" name="TextBox 6"/>
-          <p:cNvSpPr txBox="1"/>
-          <p:nvPr/>
-        </p:nvSpPr>
-        <p:spPr>
-          <a:xfrm>
-            <a:off x="914400" y="5230368"/>
-            <a:ext cx="1682495" cy="640080"/>
-          </a:xfrm>
-          <a:prstGeom prst="rect">
-            <a:avLst/>
-          </a:prstGeom>
-          <a:noFill/>
-        </p:spPr>
-        <p:txBody>
-          <a:bodyPr wrap="square">
-            <a:spAutoFit/>
-          </a:bodyPr>
-          <a:lstStyle/>
-          <a:p>
-            <a:pPr algn="l"/>
-            <a:r>
-              <a:rPr sz="2600" b="1">
-                <a:solidFill>
-                  <a:srgbClr val="F2F4F5"/>
-                </a:solidFill>
-                <a:latin typeface="Inter"/>
-              </a:rPr>
-              <a:t>0.8434</a:t>
-            </a:r>
-          </a:p>
-        </p:txBody>
-      </p:sp>
-      <p:sp>
-        <p:nvSpPr>
-          <p:cNvPr id="8" name="TextBox 7"/>
-          <p:cNvSpPr txBox="1"/>
-          <p:nvPr/>
-        </p:nvSpPr>
-        <p:spPr>
-          <a:xfrm>
-            <a:off x="914400" y="5852160"/>
-            <a:ext cx="1682495" cy="274320"/>
-          </a:xfrm>
-          <a:prstGeom prst="rect">
-            <a:avLst/>
-          </a:prstGeom>
-          <a:noFill/>
-        </p:spPr>
-        <p:txBody>
-          <a:bodyPr wrap="square">
-            <a:spAutoFit/>
-          </a:bodyPr>
-          <a:lstStyle/>
-          <a:p>
-            <a:pPr algn="l"/>
-            <a:r>
-              <a:rPr sz="1100" b="0">
-                <a:solidFill>
-                  <a:srgbClr val="69737D"/>
-                </a:solidFill>
-                <a:latin typeface="Inter"/>
-              </a:rPr>
-              <a:t>val micro-F1 AF</a:t>
-            </a:r>
-          </a:p>
-        </p:txBody>
-      </p:sp>
-      <p:sp>
-        <p:nvSpPr>
-          <p:cNvPr id="9" name="Rounded Rectangle 8"/>
+          <p:cNvPr id="3" name="Oval 2"/>
           <p:cNvSpPr/>
           <p:nvPr/>
         </p:nvSpPr>
         <p:spPr>
           <a:xfrm>
-            <a:off x="2871215" y="4846320"/>
-            <a:ext cx="2002536" cy="1417320"/>
-          </a:xfrm>
-          <a:prstGeom prst="roundRect">
-            <a:avLst>
-              <a:gd name="adj" fmla="val 8000"/>
-            </a:avLst>
+            <a:off x="5257800" y="457200"/>
+            <a:ext cx="128016" cy="128016"/>
+          </a:xfrm>
+          <a:prstGeom prst="ellipse">
+            <a:avLst/>
           </a:prstGeom>
           <a:solidFill>
-            <a:srgbClr val="0E1318"/>
+            <a:srgbClr val="62D99A"/>
           </a:solidFill>
-          <a:ln w="12700">
-            <a:solidFill>
-              <a:srgbClr val="232A33"/>
-            </a:solidFill>
+          <a:ln>
+            <a:noFill/>
           </a:ln>
         </p:spPr>
         <p:style>
@@ -3420,14 +3197,14 @@
       </p:sp>
       <p:sp>
         <p:nvSpPr>
-          <p:cNvPr id="10" name="TextBox 9"/>
+          <p:cNvPr id="4" name="TextBox 3"/>
           <p:cNvSpPr txBox="1"/>
           <p:nvPr/>
         </p:nvSpPr>
         <p:spPr>
           <a:xfrm>
-            <a:off x="3054096" y="4956048"/>
-            <a:ext cx="1682495" cy="274320"/>
+            <a:off x="5486400" y="256032"/>
+            <a:ext cx="1463040" cy="320040"/>
           </a:xfrm>
           <a:prstGeom prst="rect">
             <a:avLst/>
@@ -3440,29 +3217,29 @@
           </a:bodyPr>
           <a:lstStyle/>
           <a:p>
-            <a:pPr algn="l"/>
-            <a:r>
-              <a:rPr sz="1100" b="1">
-                <a:solidFill>
-                  <a:srgbClr val="69737D"/>
-                </a:solidFill>
-                <a:latin typeface="Inter"/>
-              </a:rPr>
-              <a:t>SCORE</a:t>
-            </a:r>
-          </a:p>
-        </p:txBody>
-      </p:sp>
-      <p:sp>
-        <p:nvSpPr>
-          <p:cNvPr id="11" name="TextBox 10"/>
+            <a:pPr algn="ctr"/>
+            <a:r>
+              <a:rPr sz="1400" b="1">
+                <a:solidFill>
+                  <a:srgbClr val="F2F4F5"/>
+                </a:solidFill>
+                <a:latin typeface="Inter"/>
+              </a:rPr>
+              <a:t>ЖИМ НОГАМИ</a:t>
+            </a:r>
+          </a:p>
+        </p:txBody>
+      </p:sp>
+      <p:sp>
+        <p:nvSpPr>
+          <p:cNvPr id="5" name="TextBox 4"/>
           <p:cNvSpPr txBox="1"/>
           <p:nvPr/>
         </p:nvSpPr>
         <p:spPr>
           <a:xfrm>
-            <a:off x="3054096" y="5230368"/>
-            <a:ext cx="1682495" cy="640080"/>
+            <a:off x="5486400" y="530352"/>
+            <a:ext cx="1463040" cy="274320"/>
           </a:xfrm>
           <a:prstGeom prst="rect">
             <a:avLst/>
@@ -3475,29 +3252,29 @@
           </a:bodyPr>
           <a:lstStyle/>
           <a:p>
-            <a:pPr algn="l"/>
-            <a:r>
-              <a:rPr sz="2600" b="1">
-                <a:solidFill>
-                  <a:srgbClr val="FF8B5F"/>
-                </a:solidFill>
-                <a:latin typeface="Inter"/>
-              </a:rPr>
-              <a:t>0.654</a:t>
-            </a:r>
-          </a:p>
-        </p:txBody>
-      </p:sp>
-      <p:sp>
-        <p:nvSpPr>
-          <p:cNvPr id="12" name="TextBox 11"/>
+            <a:pPr algn="ctr"/>
+            <a:r>
+              <a:rPr sz="800" b="0">
+                <a:solidFill>
+                  <a:srgbClr val="69737D"/>
+                </a:solidFill>
+                <a:latin typeface="Inter"/>
+              </a:rPr>
+              <a:t>FIRE MONITOR · KOSMOHACK 2026</a:t>
+            </a:r>
+          </a:p>
+        </p:txBody>
+      </p:sp>
+      <p:sp>
+        <p:nvSpPr>
+          <p:cNvPr id="6" name="TextBox 5"/>
           <p:cNvSpPr txBox="1"/>
           <p:nvPr/>
         </p:nvSpPr>
         <p:spPr>
           <a:xfrm>
-            <a:off x="3054096" y="5852160"/>
-            <a:ext cx="1682495" cy="274320"/>
+            <a:off x="731520" y="1371600"/>
+            <a:ext cx="10698480" cy="1097280"/>
           </a:xfrm>
           <a:prstGeom prst="rect">
             <a:avLst/>
@@ -3512,39 +3289,49 @@
           <a:p>
             <a:pPr algn="l"/>
             <a:r>
-              <a:rPr sz="1100" b="0">
-                <a:solidFill>
-                  <a:srgbClr val="69737D"/>
-                </a:solidFill>
-                <a:latin typeface="Inter"/>
-              </a:rPr>
-              <a:t>0.35·F1 + 0.35·IoU + 0.30·mIoU</a:t>
-            </a:r>
-          </a:p>
-        </p:txBody>
-      </p:sp>
-      <p:sp>
-        <p:nvSpPr>
-          <p:cNvPr id="13" name="Rounded Rectangle 12"/>
+              <a:rPr sz="4000" b="1">
+                <a:solidFill>
+                  <a:srgbClr val="F2F4F5"/>
+                </a:solidFill>
+                <a:latin typeface="Inter"/>
+              </a:rPr>
+              <a:t>Мониторинг природных пожаров</a:t>
+            </a:r>
+            <a:r>
+              <a:rPr sz="1800" b="0">
+                <a:solidFill>
+                  <a:srgbClr val="A4ADB5"/>
+                </a:solidFill>
+                <a:latin typeface="Inter"/>
+              </a:rPr>
+              <a:t>
+AF-детекция · BS-картирование гарей · аналитический сервис</a:t>
+            </a:r>
+          </a:p>
+        </p:txBody>
+      </p:sp>
+      <p:sp>
+        <p:nvSpPr>
+          <p:cNvPr id="7" name="Rounded Rectangle 6"/>
           <p:cNvSpPr/>
           <p:nvPr/>
         </p:nvSpPr>
         <p:spPr>
           <a:xfrm>
-            <a:off x="5010912" y="4846320"/>
-            <a:ext cx="2002536" cy="1417320"/>
+            <a:off x="320040" y="5074920"/>
+            <a:ext cx="2194560" cy="1051560"/>
           </a:xfrm>
           <a:prstGeom prst="roundRect">
             <a:avLst>
-              <a:gd name="adj" fmla="val 8000"/>
+              <a:gd name="adj" fmla="val 9000"/>
             </a:avLst>
           </a:prstGeom>
           <a:solidFill>
-            <a:srgbClr val="0E1318"/>
+            <a:srgbClr val="0A0E12"/>
           </a:solidFill>
           <a:ln w="12700">
             <a:solidFill>
-              <a:srgbClr val="232A33"/>
+              <a:srgbClr val="2A333D"/>
             </a:solidFill>
           </a:ln>
         </p:spPr>
@@ -3572,14 +3359,14 @@
       </p:sp>
       <p:sp>
         <p:nvSpPr>
-          <p:cNvPr id="14" name="TextBox 13"/>
+          <p:cNvPr id="8" name="TextBox 7"/>
           <p:cNvSpPr txBox="1"/>
           <p:nvPr/>
         </p:nvSpPr>
         <p:spPr>
           <a:xfrm>
-            <a:off x="5193792" y="4956048"/>
-            <a:ext cx="1682495" cy="274320"/>
+            <a:off x="457200" y="5129783"/>
+            <a:ext cx="1938528" cy="228600"/>
           </a:xfrm>
           <a:prstGeom prst="rect">
             <a:avLst/>
@@ -3594,27 +3381,27 @@
           <a:p>
             <a:pPr algn="l"/>
             <a:r>
-              <a:rPr sz="1100" b="1">
+              <a:rPr sz="1000" b="1">
                 <a:solidFill>
                   <a:srgbClr val="69737D"/>
                 </a:solidFill>
                 <a:latin typeface="Inter"/>
               </a:rPr>
-              <a:t>BURN IOU</a:t>
-            </a:r>
-          </a:p>
-        </p:txBody>
-      </p:sp>
-      <p:sp>
-        <p:nvSpPr>
-          <p:cNvPr id="15" name="TextBox 14"/>
+              <a:t>THERMAL</a:t>
+            </a:r>
+          </a:p>
+        </p:txBody>
+      </p:sp>
+      <p:sp>
+        <p:nvSpPr>
+          <p:cNvPr id="9" name="TextBox 8"/>
           <p:cNvSpPr txBox="1"/>
           <p:nvPr/>
         </p:nvSpPr>
         <p:spPr>
           <a:xfrm>
-            <a:off x="5193792" y="5230368"/>
-            <a:ext cx="1682495" cy="640080"/>
+            <a:off x="457200" y="5349240"/>
+            <a:ext cx="1938528" cy="457200"/>
           </a:xfrm>
           <a:prstGeom prst="rect">
             <a:avLst/>
@@ -3629,27 +3416,27 @@
           <a:p>
             <a:pPr algn="l"/>
             <a:r>
-              <a:rPr sz="2600" b="1">
+              <a:rPr sz="2200" b="1">
                 <a:solidFill>
                   <a:srgbClr val="F2F4F5"/>
                 </a:solidFill>
                 <a:latin typeface="Inter"/>
               </a:rPr>
-              <a:t>0.5239</a:t>
-            </a:r>
-          </a:p>
-        </p:txBody>
-      </p:sp>
-      <p:sp>
-        <p:nvSpPr>
-          <p:cNvPr id="16" name="TextBox 15"/>
+              <a:t>0.8434</a:t>
+            </a:r>
+          </a:p>
+        </p:txBody>
+      </p:sp>
+      <p:sp>
+        <p:nvSpPr>
+          <p:cNvPr id="10" name="TextBox 9"/>
           <p:cNvSpPr txBox="1"/>
           <p:nvPr/>
         </p:nvSpPr>
         <p:spPr>
           <a:xfrm>
-            <a:off x="5193792" y="5852160"/>
-            <a:ext cx="1682495" cy="274320"/>
+            <a:off x="457200" y="5824728"/>
+            <a:ext cx="1938528" cy="228600"/>
           </a:xfrm>
           <a:prstGeom prst="rect">
             <a:avLst/>
@@ -3664,39 +3451,39 @@
           <a:p>
             <a:pPr algn="l"/>
             <a:r>
-              <a:rPr sz="1100" b="0">
+              <a:rPr sz="1000" b="0">
                 <a:solidFill>
                   <a:srgbClr val="69737D"/>
                 </a:solidFill>
                 <a:latin typeface="Inter"/>
               </a:rPr>
-              <a:t>micro-pool</a:t>
-            </a:r>
-          </a:p>
-        </p:txBody>
-      </p:sp>
-      <p:sp>
-        <p:nvSpPr>
-          <p:cNvPr id="17" name="Rounded Rectangle 16"/>
+              <a:t>val micro-F1 AF</a:t>
+            </a:r>
+          </a:p>
+        </p:txBody>
+      </p:sp>
+      <p:sp>
+        <p:nvSpPr>
+          <p:cNvPr id="11" name="Rounded Rectangle 10"/>
           <p:cNvSpPr/>
           <p:nvPr/>
         </p:nvSpPr>
         <p:spPr>
           <a:xfrm>
-            <a:off x="7150607" y="4846320"/>
-            <a:ext cx="2002536" cy="1417320"/>
+            <a:off x="2624328" y="5074920"/>
+            <a:ext cx="2194560" cy="1051560"/>
           </a:xfrm>
           <a:prstGeom prst="roundRect">
             <a:avLst>
-              <a:gd name="adj" fmla="val 8000"/>
+              <a:gd name="adj" fmla="val 9000"/>
             </a:avLst>
           </a:prstGeom>
           <a:solidFill>
-            <a:srgbClr val="0E1318"/>
+            <a:srgbClr val="0A0E12"/>
           </a:solidFill>
           <a:ln w="12700">
             <a:solidFill>
-              <a:srgbClr val="232A33"/>
+              <a:srgbClr val="2A333D"/>
             </a:solidFill>
           </a:ln>
         </p:spPr>
@@ -3724,14 +3511,14 @@
       </p:sp>
       <p:sp>
         <p:nvSpPr>
-          <p:cNvPr id="18" name="TextBox 17"/>
+          <p:cNvPr id="12" name="TextBox 11"/>
           <p:cNvSpPr txBox="1"/>
           <p:nvPr/>
         </p:nvSpPr>
         <p:spPr>
           <a:xfrm>
-            <a:off x="7333488" y="4956048"/>
-            <a:ext cx="1682495" cy="274320"/>
+            <a:off x="2761488" y="5129783"/>
+            <a:ext cx="1938528" cy="228600"/>
           </a:xfrm>
           <a:prstGeom prst="rect">
             <a:avLst/>
@@ -3746,27 +3533,27 @@
           <a:p>
             <a:pPr algn="l"/>
             <a:r>
-              <a:rPr sz="1100" b="1">
+              <a:rPr sz="1000" b="1">
                 <a:solidFill>
                   <a:srgbClr val="69737D"/>
                 </a:solidFill>
                 <a:latin typeface="Inter"/>
               </a:rPr>
-              <a:t>SEVERITY</a:t>
-            </a:r>
-          </a:p>
-        </p:txBody>
-      </p:sp>
-      <p:sp>
-        <p:nvSpPr>
-          <p:cNvPr id="19" name="TextBox 18"/>
+              <a:t>SCORE</a:t>
+            </a:r>
+          </a:p>
+        </p:txBody>
+      </p:sp>
+      <p:sp>
+        <p:nvSpPr>
+          <p:cNvPr id="13" name="TextBox 12"/>
           <p:cNvSpPr txBox="1"/>
           <p:nvPr/>
         </p:nvSpPr>
         <p:spPr>
           <a:xfrm>
-            <a:off x="7333488" y="5230368"/>
-            <a:ext cx="1682495" cy="640080"/>
+            <a:off x="2761488" y="5349240"/>
+            <a:ext cx="1938528" cy="457200"/>
           </a:xfrm>
           <a:prstGeom prst="rect">
             <a:avLst/>
@@ -3781,27 +3568,27 @@
           <a:p>
             <a:pPr algn="l"/>
             <a:r>
-              <a:rPr sz="2600" b="1">
-                <a:solidFill>
-                  <a:srgbClr val="F2F4F5"/>
-                </a:solidFill>
-                <a:latin typeface="Inter"/>
-              </a:rPr>
-              <a:t>0.5430</a:t>
-            </a:r>
-          </a:p>
-        </p:txBody>
-      </p:sp>
-      <p:sp>
-        <p:nvSpPr>
-          <p:cNvPr id="20" name="TextBox 19"/>
+              <a:rPr sz="2200" b="1">
+                <a:solidFill>
+                  <a:srgbClr val="FF8B5F"/>
+                </a:solidFill>
+                <a:latin typeface="Inter"/>
+              </a:rPr>
+              <a:t>0.654</a:t>
+            </a:r>
+          </a:p>
+        </p:txBody>
+      </p:sp>
+      <p:sp>
+        <p:nvSpPr>
+          <p:cNvPr id="14" name="TextBox 13"/>
           <p:cNvSpPr txBox="1"/>
           <p:nvPr/>
         </p:nvSpPr>
         <p:spPr>
           <a:xfrm>
-            <a:off x="7333488" y="5852160"/>
-            <a:ext cx="1682495" cy="274320"/>
+            <a:off x="2761488" y="5824728"/>
+            <a:ext cx="1938528" cy="228600"/>
           </a:xfrm>
           <a:prstGeom prst="rect">
             <a:avLst/>
@@ -3816,39 +3603,39 @@
           <a:p>
             <a:pPr algn="l"/>
             <a:r>
-              <a:rPr sz="1100" b="0">
+              <a:rPr sz="1000" b="0">
                 <a:solidFill>
                   <a:srgbClr val="69737D"/>
                 </a:solidFill>
                 <a:latin typeface="Inter"/>
               </a:rPr>
-              <a:t>mIoU 1/2/3</a:t>
-            </a:r>
-          </a:p>
-        </p:txBody>
-      </p:sp>
-      <p:sp>
-        <p:nvSpPr>
-          <p:cNvPr id="21" name="Rounded Rectangle 20"/>
+              <a:t>0.35·F1+0.35·IoU+0.30·mIoU</a:t>
+            </a:r>
+          </a:p>
+        </p:txBody>
+      </p:sp>
+      <p:sp>
+        <p:nvSpPr>
+          <p:cNvPr id="15" name="Rounded Rectangle 14"/>
           <p:cNvSpPr/>
           <p:nvPr/>
         </p:nvSpPr>
         <p:spPr>
           <a:xfrm>
-            <a:off x="9290304" y="4846320"/>
-            <a:ext cx="2002536" cy="1417320"/>
+            <a:off x="4928616" y="5074920"/>
+            <a:ext cx="2194560" cy="1051560"/>
           </a:xfrm>
           <a:prstGeom prst="roundRect">
             <a:avLst>
-              <a:gd name="adj" fmla="val 8000"/>
+              <a:gd name="adj" fmla="val 9000"/>
             </a:avLst>
           </a:prstGeom>
           <a:solidFill>
-            <a:srgbClr val="0E1318"/>
+            <a:srgbClr val="0A0E12"/>
           </a:solidFill>
           <a:ln w="12700">
             <a:solidFill>
-              <a:srgbClr val="232A33"/>
+              <a:srgbClr val="2A333D"/>
             </a:solidFill>
           </a:ln>
         </p:spPr>
@@ -3876,14 +3663,14 @@
       </p:sp>
       <p:sp>
         <p:nvSpPr>
-          <p:cNvPr id="22" name="TextBox 21"/>
+          <p:cNvPr id="16" name="TextBox 15"/>
           <p:cNvSpPr txBox="1"/>
           <p:nvPr/>
         </p:nvSpPr>
         <p:spPr>
           <a:xfrm>
-            <a:off x="9473184" y="4956048"/>
-            <a:ext cx="1682495" cy="274320"/>
+            <a:off x="5065776" y="5129783"/>
+            <a:ext cx="1938528" cy="228600"/>
           </a:xfrm>
           <a:prstGeom prst="rect">
             <a:avLst/>
@@ -3898,27 +3685,27 @@
           <a:p>
             <a:pPr algn="l"/>
             <a:r>
-              <a:rPr sz="1100" b="1">
+              <a:rPr sz="1000" b="1">
                 <a:solidFill>
                   <a:srgbClr val="69737D"/>
                 </a:solidFill>
                 <a:latin typeface="Inter"/>
               </a:rPr>
-              <a:t>INFERENCE</a:t>
-            </a:r>
-          </a:p>
-        </p:txBody>
-      </p:sp>
-      <p:sp>
-        <p:nvSpPr>
-          <p:cNvPr id="23" name="TextBox 22"/>
+              <a:t>LEVEL 01</a:t>
+            </a:r>
+          </a:p>
+        </p:txBody>
+      </p:sp>
+      <p:sp>
+        <p:nvSpPr>
+          <p:cNvPr id="17" name="TextBox 16"/>
           <p:cNvSpPr txBox="1"/>
           <p:nvPr/>
         </p:nvSpPr>
         <p:spPr>
           <a:xfrm>
-            <a:off x="9473184" y="5230368"/>
-            <a:ext cx="1682495" cy="640080"/>
+            <a:off x="5065776" y="5349240"/>
+            <a:ext cx="1938528" cy="457200"/>
           </a:xfrm>
           <a:prstGeom prst="rect">
             <a:avLst/>
@@ -3933,27 +3720,27 @@
           <a:p>
             <a:pPr algn="l"/>
             <a:r>
-              <a:rPr sz="2600" b="1">
-                <a:solidFill>
-                  <a:srgbClr val="62D99A"/>
-                </a:solidFill>
-                <a:latin typeface="Inter"/>
-              </a:rPr>
-              <a:t>~28 сек</a:t>
-            </a:r>
-          </a:p>
-        </p:txBody>
-      </p:sp>
-      <p:sp>
-        <p:nvSpPr>
-          <p:cNvPr id="24" name="TextBox 23"/>
+              <a:rPr sz="2200" b="1">
+                <a:solidFill>
+                  <a:srgbClr val="F2F4F5"/>
+                </a:solidFill>
+                <a:latin typeface="Inter"/>
+              </a:rPr>
+              <a:t>0.5239</a:t>
+            </a:r>
+          </a:p>
+        </p:txBody>
+      </p:sp>
+      <p:sp>
+        <p:nvSpPr>
+          <p:cNvPr id="18" name="TextBox 17"/>
           <p:cNvSpPr txBox="1"/>
           <p:nvPr/>
         </p:nvSpPr>
         <p:spPr>
           <a:xfrm>
-            <a:off x="9473184" y="5852160"/>
-            <a:ext cx="1682495" cy="274320"/>
+            <a:off x="5065776" y="5824728"/>
+            <a:ext cx="1938528" cy="228600"/>
           </a:xfrm>
           <a:prstGeom prst="rect">
             <a:avLst/>
@@ -3968,13 +3755,317 @@
           <a:p>
             <a:pPr algn="l"/>
             <a:r>
-              <a:rPr sz="1100" b="0">
+              <a:rPr sz="1000" b="0">
                 <a:solidFill>
                   <a:srgbClr val="69737D"/>
                 </a:solidFill>
                 <a:latin typeface="Inter"/>
               </a:rPr>
-              <a:t>детерминирован</a:t>
+              <a:t>IoU burn</a:t>
+            </a:r>
+          </a:p>
+        </p:txBody>
+      </p:sp>
+      <p:sp>
+        <p:nvSpPr>
+          <p:cNvPr id="19" name="Rounded Rectangle 18"/>
+          <p:cNvSpPr/>
+          <p:nvPr/>
+        </p:nvSpPr>
+        <p:spPr>
+          <a:xfrm>
+            <a:off x="7232904" y="5074920"/>
+            <a:ext cx="2194560" cy="1051560"/>
+          </a:xfrm>
+          <a:prstGeom prst="roundRect">
+            <a:avLst>
+              <a:gd name="adj" fmla="val 9000"/>
+            </a:avLst>
+          </a:prstGeom>
+          <a:solidFill>
+            <a:srgbClr val="0A0E12"/>
+          </a:solidFill>
+          <a:ln w="12700">
+            <a:solidFill>
+              <a:srgbClr val="2A333D"/>
+            </a:solidFill>
+          </a:ln>
+        </p:spPr>
+        <p:style>
+          <a:lnRef idx="1">
+            <a:schemeClr val="accent1"/>
+          </a:lnRef>
+          <a:fillRef idx="3">
+            <a:schemeClr val="accent1"/>
+          </a:fillRef>
+          <a:effectRef idx="2">
+            <a:schemeClr val="accent1"/>
+          </a:effectRef>
+          <a:fontRef idx="minor">
+            <a:schemeClr val="lt1"/>
+          </a:fontRef>
+        </p:style>
+        <p:txBody>
+          <a:bodyPr rtlCol="0" anchor="ctr"/>
+          <a:lstStyle/>
+          <a:p>
+            <a:pPr algn="ctr"/>
+          </a:p>
+        </p:txBody>
+      </p:sp>
+      <p:sp>
+        <p:nvSpPr>
+          <p:cNvPr id="20" name="TextBox 19"/>
+          <p:cNvSpPr txBox="1"/>
+          <p:nvPr/>
+        </p:nvSpPr>
+        <p:spPr>
+          <a:xfrm>
+            <a:off x="7370064" y="5129783"/>
+            <a:ext cx="1938528" cy="228600"/>
+          </a:xfrm>
+          <a:prstGeom prst="rect">
+            <a:avLst/>
+          </a:prstGeom>
+          <a:noFill/>
+        </p:spPr>
+        <p:txBody>
+          <a:bodyPr wrap="square">
+            <a:spAutoFit/>
+          </a:bodyPr>
+          <a:lstStyle/>
+          <a:p>
+            <a:pPr algn="l"/>
+            <a:r>
+              <a:rPr sz="1000" b="1">
+                <a:solidFill>
+                  <a:srgbClr val="69737D"/>
+                </a:solidFill>
+                <a:latin typeface="Inter"/>
+              </a:rPr>
+              <a:t>LEVEL 02–03</a:t>
+            </a:r>
+          </a:p>
+        </p:txBody>
+      </p:sp>
+      <p:sp>
+        <p:nvSpPr>
+          <p:cNvPr id="21" name="TextBox 20"/>
+          <p:cNvSpPr txBox="1"/>
+          <p:nvPr/>
+        </p:nvSpPr>
+        <p:spPr>
+          <a:xfrm>
+            <a:off x="7370064" y="5349240"/>
+            <a:ext cx="1938528" cy="457200"/>
+          </a:xfrm>
+          <a:prstGeom prst="rect">
+            <a:avLst/>
+          </a:prstGeom>
+          <a:noFill/>
+        </p:spPr>
+        <p:txBody>
+          <a:bodyPr wrap="square">
+            <a:spAutoFit/>
+          </a:bodyPr>
+          <a:lstStyle/>
+          <a:p>
+            <a:pPr algn="l"/>
+            <a:r>
+              <a:rPr sz="2200" b="1">
+                <a:solidFill>
+                  <a:srgbClr val="F2F4F5"/>
+                </a:solidFill>
+                <a:latin typeface="Inter"/>
+              </a:rPr>
+              <a:t>0.5430</a:t>
+            </a:r>
+          </a:p>
+        </p:txBody>
+      </p:sp>
+      <p:sp>
+        <p:nvSpPr>
+          <p:cNvPr id="22" name="TextBox 21"/>
+          <p:cNvSpPr txBox="1"/>
+          <p:nvPr/>
+        </p:nvSpPr>
+        <p:spPr>
+          <a:xfrm>
+            <a:off x="7370064" y="5824728"/>
+            <a:ext cx="1938528" cy="228600"/>
+          </a:xfrm>
+          <a:prstGeom prst="rect">
+            <a:avLst/>
+          </a:prstGeom>
+          <a:noFill/>
+        </p:spPr>
+        <p:txBody>
+          <a:bodyPr wrap="square">
+            <a:spAutoFit/>
+          </a:bodyPr>
+          <a:lstStyle/>
+          <a:p>
+            <a:pPr algn="l"/>
+            <a:r>
+              <a:rPr sz="1000" b="0">
+                <a:solidFill>
+                  <a:srgbClr val="69737D"/>
+                </a:solidFill>
+                <a:latin typeface="Inter"/>
+              </a:rPr>
+              <a:t>mIoU severity</a:t>
+            </a:r>
+          </a:p>
+        </p:txBody>
+      </p:sp>
+      <p:sp>
+        <p:nvSpPr>
+          <p:cNvPr id="23" name="Rounded Rectangle 22"/>
+          <p:cNvSpPr/>
+          <p:nvPr/>
+        </p:nvSpPr>
+        <p:spPr>
+          <a:xfrm>
+            <a:off x="9537192" y="5074920"/>
+            <a:ext cx="2194560" cy="1051560"/>
+          </a:xfrm>
+          <a:prstGeom prst="roundRect">
+            <a:avLst>
+              <a:gd name="adj" fmla="val 9000"/>
+            </a:avLst>
+          </a:prstGeom>
+          <a:solidFill>
+            <a:srgbClr val="0A0E12"/>
+          </a:solidFill>
+          <a:ln w="12700">
+            <a:solidFill>
+              <a:srgbClr val="2A333D"/>
+            </a:solidFill>
+          </a:ln>
+        </p:spPr>
+        <p:style>
+          <a:lnRef idx="1">
+            <a:schemeClr val="accent1"/>
+          </a:lnRef>
+          <a:fillRef idx="3">
+            <a:schemeClr val="accent1"/>
+          </a:fillRef>
+          <a:effectRef idx="2">
+            <a:schemeClr val="accent1"/>
+          </a:effectRef>
+          <a:fontRef idx="minor">
+            <a:schemeClr val="lt1"/>
+          </a:fontRef>
+        </p:style>
+        <p:txBody>
+          <a:bodyPr rtlCol="0" anchor="ctr"/>
+          <a:lstStyle/>
+          <a:p>
+            <a:pPr algn="ctr"/>
+          </a:p>
+        </p:txBody>
+      </p:sp>
+      <p:sp>
+        <p:nvSpPr>
+          <p:cNvPr id="24" name="TextBox 23"/>
+          <p:cNvSpPr txBox="1"/>
+          <p:nvPr/>
+        </p:nvSpPr>
+        <p:spPr>
+          <a:xfrm>
+            <a:off x="9674352" y="5129783"/>
+            <a:ext cx="1938528" cy="228600"/>
+          </a:xfrm>
+          <a:prstGeom prst="rect">
+            <a:avLst/>
+          </a:prstGeom>
+          <a:noFill/>
+        </p:spPr>
+        <p:txBody>
+          <a:bodyPr wrap="square">
+            <a:spAutoFit/>
+          </a:bodyPr>
+          <a:lstStyle/>
+          <a:p>
+            <a:pPr algn="l"/>
+            <a:r>
+              <a:rPr sz="1000" b="1">
+                <a:solidFill>
+                  <a:srgbClr val="69737D"/>
+                </a:solidFill>
+                <a:latin typeface="Inter"/>
+              </a:rPr>
+              <a:t>STATUS</a:t>
+            </a:r>
+          </a:p>
+        </p:txBody>
+      </p:sp>
+      <p:sp>
+        <p:nvSpPr>
+          <p:cNvPr id="25" name="TextBox 24"/>
+          <p:cNvSpPr txBox="1"/>
+          <p:nvPr/>
+        </p:nvSpPr>
+        <p:spPr>
+          <a:xfrm>
+            <a:off x="9674352" y="5349240"/>
+            <a:ext cx="1938528" cy="457200"/>
+          </a:xfrm>
+          <a:prstGeom prst="rect">
+            <a:avLst/>
+          </a:prstGeom>
+          <a:noFill/>
+        </p:spPr>
+        <p:txBody>
+          <a:bodyPr wrap="square">
+            <a:spAutoFit/>
+          </a:bodyPr>
+          <a:lstStyle/>
+          <a:p>
+            <a:pPr algn="l"/>
+            <a:r>
+              <a:rPr sz="2200" b="1">
+                <a:solidFill>
+                  <a:srgbClr val="62D99A"/>
+                </a:solidFill>
+                <a:latin typeface="Inter"/>
+              </a:rPr>
+              <a:t>FINAL</a:t>
+            </a:r>
+          </a:p>
+        </p:txBody>
+      </p:sp>
+      <p:sp>
+        <p:nvSpPr>
+          <p:cNvPr id="26" name="TextBox 25"/>
+          <p:cNvSpPr txBox="1"/>
+          <p:nvPr/>
+        </p:nvSpPr>
+        <p:spPr>
+          <a:xfrm>
+            <a:off x="9674352" y="5824728"/>
+            <a:ext cx="1938528" cy="228600"/>
+          </a:xfrm>
+          <a:prstGeom prst="rect">
+            <a:avLst/>
+          </a:prstGeom>
+          <a:noFill/>
+        </p:spPr>
+        <p:txBody>
+          <a:bodyPr wrap="square">
+            <a:spAutoFit/>
+          </a:bodyPr>
+          <a:lstStyle/>
+          <a:p>
+            <a:pPr algn="l"/>
+            <a:r>
+              <a:rPr sz="1000" b="0">
+                <a:solidFill>
+                  <a:srgbClr val="69737D"/>
+                </a:solidFill>
+                <a:latin typeface="Inter"/>
+              </a:rPr>
+              <a:t>submission · 447 строк</a:t>
             </a:r>
           </a:p>
         </p:txBody>
@@ -4007,14 +4098,104 @@
       <p:grpSpPr/>
       <p:sp>
         <p:nvSpPr>
-          <p:cNvPr id="2" name="TextBox 1"/>
+          <p:cNvPr id="2" name="Rounded Rectangle 1"/>
+          <p:cNvSpPr/>
+          <p:nvPr/>
+        </p:nvSpPr>
+        <p:spPr>
+          <a:xfrm>
+            <a:off x="5074920" y="228600"/>
+            <a:ext cx="2057400" cy="685800"/>
+          </a:xfrm>
+          <a:prstGeom prst="roundRect">
+            <a:avLst>
+              <a:gd name="adj" fmla="val 9000"/>
+            </a:avLst>
+          </a:prstGeom>
+          <a:solidFill>
+            <a:srgbClr val="0A0E12"/>
+          </a:solidFill>
+          <a:ln w="12700">
+            <a:solidFill>
+              <a:srgbClr val="2A333D"/>
+            </a:solidFill>
+          </a:ln>
+        </p:spPr>
+        <p:style>
+          <a:lnRef idx="1">
+            <a:schemeClr val="accent1"/>
+          </a:lnRef>
+          <a:fillRef idx="3">
+            <a:schemeClr val="accent1"/>
+          </a:fillRef>
+          <a:effectRef idx="2">
+            <a:schemeClr val="accent1"/>
+          </a:effectRef>
+          <a:fontRef idx="minor">
+            <a:schemeClr val="lt1"/>
+          </a:fontRef>
+        </p:style>
+        <p:txBody>
+          <a:bodyPr rtlCol="0" anchor="ctr"/>
+          <a:lstStyle/>
+          <a:p>
+            <a:pPr algn="ctr"/>
+          </a:p>
+        </p:txBody>
+      </p:sp>
+      <p:sp>
+        <p:nvSpPr>
+          <p:cNvPr id="3" name="Oval 2"/>
+          <p:cNvSpPr/>
+          <p:nvPr/>
+        </p:nvSpPr>
+        <p:spPr>
+          <a:xfrm>
+            <a:off x="5257800" y="457200"/>
+            <a:ext cx="128016" cy="128016"/>
+          </a:xfrm>
+          <a:prstGeom prst="ellipse">
+            <a:avLst/>
+          </a:prstGeom>
+          <a:solidFill>
+            <a:srgbClr val="62D99A"/>
+          </a:solidFill>
+          <a:ln>
+            <a:noFill/>
+          </a:ln>
+        </p:spPr>
+        <p:style>
+          <a:lnRef idx="1">
+            <a:schemeClr val="accent1"/>
+          </a:lnRef>
+          <a:fillRef idx="3">
+            <a:schemeClr val="accent1"/>
+          </a:fillRef>
+          <a:effectRef idx="2">
+            <a:schemeClr val="accent1"/>
+          </a:effectRef>
+          <a:fontRef idx="minor">
+            <a:schemeClr val="lt1"/>
+          </a:fontRef>
+        </p:style>
+        <p:txBody>
+          <a:bodyPr rtlCol="0" anchor="ctr"/>
+          <a:lstStyle/>
+          <a:p>
+            <a:pPr algn="ctr"/>
+          </a:p>
+        </p:txBody>
+      </p:sp>
+      <p:sp>
+        <p:nvSpPr>
+          <p:cNvPr id="4" name="TextBox 3"/>
           <p:cNvSpPr txBox="1"/>
           <p:nvPr/>
         </p:nvSpPr>
         <p:spPr>
           <a:xfrm>
-            <a:off x="731520" y="411480"/>
-            <a:ext cx="10698480" cy="320040"/>
+            <a:off x="5486400" y="256032"/>
+            <a:ext cx="1463040" cy="320040"/>
           </a:xfrm>
           <a:prstGeom prst="rect">
             <a:avLst/>
@@ -4027,38 +4208,29 @@
           </a:bodyPr>
           <a:lstStyle/>
           <a:p>
-            <a:pPr algn="l"/>
-            <a:r>
-              <a:rPr sz="1300" b="1">
-                <a:solidFill>
-                  <a:srgbClr val="69737D"/>
-                </a:solidFill>
-                <a:latin typeface="Inter"/>
-              </a:rPr>
-              <a:t>09  </a:t>
-            </a:r>
-            <a:r>
-              <a:rPr sz="1300" b="1">
-                <a:solidFill>
-                  <a:srgbClr val="69737D"/>
-                </a:solidFill>
-                <a:latin typeface="Inter"/>
-              </a:rPr>
-              <a:t>ОГРАНИЧЕНИЯ И NEXT STEPS</a:t>
-            </a:r>
-          </a:p>
-        </p:txBody>
-      </p:sp>
-      <p:sp>
-        <p:nvSpPr>
-          <p:cNvPr id="3" name="TextBox 2"/>
+            <a:pPr algn="ctr"/>
+            <a:r>
+              <a:rPr sz="1400" b="1">
+                <a:solidFill>
+                  <a:srgbClr val="F2F4F5"/>
+                </a:solidFill>
+                <a:latin typeface="Inter"/>
+              </a:rPr>
+              <a:t>ЖИМ НОГАМИ</a:t>
+            </a:r>
+          </a:p>
+        </p:txBody>
+      </p:sp>
+      <p:sp>
+        <p:nvSpPr>
+          <p:cNvPr id="5" name="TextBox 4"/>
           <p:cNvSpPr txBox="1"/>
           <p:nvPr/>
         </p:nvSpPr>
         <p:spPr>
           <a:xfrm>
-            <a:off x="731520" y="777240"/>
-            <a:ext cx="10698480" cy="914400"/>
+            <a:off x="5486400" y="530352"/>
+            <a:ext cx="1463040" cy="274320"/>
           </a:xfrm>
           <a:prstGeom prst="rect">
             <a:avLst/>
@@ -4071,29 +4243,234 @@
           </a:bodyPr>
           <a:lstStyle/>
           <a:p>
+            <a:pPr algn="ctr"/>
+            <a:r>
+              <a:rPr sz="800" b="0">
+                <a:solidFill>
+                  <a:srgbClr val="69737D"/>
+                </a:solidFill>
+                <a:latin typeface="Inter"/>
+              </a:rPr>
+              <a:t>FIRE MONITOR · KOSMOHACK 2026</a:t>
+            </a:r>
+          </a:p>
+        </p:txBody>
+      </p:sp>
+      <p:sp>
+        <p:nvSpPr>
+          <p:cNvPr id="6" name="Rounded Rectangle 5"/>
+          <p:cNvSpPr/>
+          <p:nvPr/>
+        </p:nvSpPr>
+        <p:spPr>
+          <a:xfrm>
+            <a:off x="320040" y="1188720"/>
+            <a:ext cx="5852160" cy="4480560"/>
+          </a:xfrm>
+          <a:prstGeom prst="roundRect">
+            <a:avLst>
+              <a:gd name="adj" fmla="val 9000"/>
+            </a:avLst>
+          </a:prstGeom>
+          <a:solidFill>
+            <a:srgbClr val="0A0E12"/>
+          </a:solidFill>
+          <a:ln w="12700">
+            <a:solidFill>
+              <a:srgbClr val="2A333D"/>
+            </a:solidFill>
+          </a:ln>
+        </p:spPr>
+        <p:style>
+          <a:lnRef idx="1">
+            <a:schemeClr val="accent1"/>
+          </a:lnRef>
+          <a:fillRef idx="3">
+            <a:schemeClr val="accent1"/>
+          </a:fillRef>
+          <a:effectRef idx="2">
+            <a:schemeClr val="accent1"/>
+          </a:effectRef>
+          <a:fontRef idx="minor">
+            <a:schemeClr val="lt1"/>
+          </a:fontRef>
+        </p:style>
+        <p:txBody>
+          <a:bodyPr rtlCol="0" anchor="ctr"/>
+          <a:lstStyle/>
+          <a:p>
+            <a:pPr algn="ctr"/>
+          </a:p>
+        </p:txBody>
+      </p:sp>
+      <p:sp>
+        <p:nvSpPr>
+          <p:cNvPr id="7" name="TextBox 6"/>
+          <p:cNvSpPr txBox="1"/>
+          <p:nvPr/>
+        </p:nvSpPr>
+        <p:spPr>
+          <a:xfrm>
+            <a:off x="594360" y="1325880"/>
+            <a:ext cx="914400" cy="274320"/>
+          </a:xfrm>
+          <a:prstGeom prst="rect">
+            <a:avLst/>
+          </a:prstGeom>
+          <a:noFill/>
+        </p:spPr>
+        <p:txBody>
+          <a:bodyPr wrap="square">
+            <a:spAutoFit/>
+          </a:bodyPr>
+          <a:lstStyle/>
+          <a:p>
             <a:pPr algn="l"/>
             <a:r>
-              <a:rPr sz="3400" b="1">
+              <a:rPr sz="1100" b="1">
+                <a:solidFill>
+                  <a:srgbClr val="69737D"/>
+                </a:solidFill>
+                <a:latin typeface="Inter"/>
+              </a:rPr>
+              <a:t>07</a:t>
+            </a:r>
+          </a:p>
+        </p:txBody>
+      </p:sp>
+      <p:sp>
+        <p:nvSpPr>
+          <p:cNvPr id="8" name="TextBox 7"/>
+          <p:cNvSpPr txBox="1"/>
+          <p:nvPr/>
+        </p:nvSpPr>
+        <p:spPr>
+          <a:xfrm>
+            <a:off x="594360" y="1572768"/>
+            <a:ext cx="5303520" cy="457200"/>
+          </a:xfrm>
+          <a:prstGeom prst="rect">
+            <a:avLst/>
+          </a:prstGeom>
+          <a:noFill/>
+        </p:spPr>
+        <p:txBody>
+          <a:bodyPr wrap="square">
+            <a:spAutoFit/>
+          </a:bodyPr>
+          <a:lstStyle/>
+          <a:p>
+            <a:pPr algn="l"/>
+            <a:r>
+              <a:rPr sz="2100" b="1">
                 <a:solidFill>
                   <a:srgbClr val="F2F4F5"/>
                 </a:solidFill>
                 <a:latin typeface="Inter"/>
               </a:rPr>
-              <a:t>Честно про потолок</a:t>
-            </a:r>
-          </a:p>
-        </p:txBody>
-      </p:sp>
-      <p:sp>
-        <p:nvSpPr>
-          <p:cNvPr id="4" name="Oval 3"/>
+              <a:t>Потолок — честно</a:t>
+            </a:r>
+          </a:p>
+        </p:txBody>
+      </p:sp>
+      <p:sp>
+        <p:nvSpPr>
+          <p:cNvPr id="9" name="Oval 8"/>
           <p:cNvSpPr/>
           <p:nvPr/>
         </p:nvSpPr>
         <p:spPr>
           <a:xfrm>
-            <a:off x="914400" y="2121408"/>
-            <a:ext cx="146304" cy="146304"/>
+            <a:off x="594360" y="2331720"/>
+            <a:ext cx="137160" cy="137160"/>
+          </a:xfrm>
+          <a:prstGeom prst="ellipse">
+            <a:avLst/>
+          </a:prstGeom>
+          <a:solidFill>
+            <a:srgbClr val="E6C65C"/>
+          </a:solidFill>
+          <a:ln>
+            <a:noFill/>
+          </a:ln>
+        </p:spPr>
+        <p:style>
+          <a:lnRef idx="1">
+            <a:schemeClr val="accent1"/>
+          </a:lnRef>
+          <a:fillRef idx="3">
+            <a:schemeClr val="accent1"/>
+          </a:fillRef>
+          <a:effectRef idx="2">
+            <a:schemeClr val="accent1"/>
+          </a:effectRef>
+          <a:fontRef idx="minor">
+            <a:schemeClr val="lt1"/>
+          </a:fontRef>
+        </p:style>
+        <p:txBody>
+          <a:bodyPr rtlCol="0" anchor="ctr"/>
+          <a:lstStyle/>
+          <a:p>
+            <a:pPr algn="ctr"/>
+          </a:p>
+        </p:txBody>
+      </p:sp>
+      <p:sp>
+        <p:nvSpPr>
+          <p:cNvPr id="10" name="TextBox 9"/>
+          <p:cNvSpPr txBox="1"/>
+          <p:nvPr/>
+        </p:nvSpPr>
+        <p:spPr>
+          <a:xfrm>
+            <a:off x="868680" y="2194560"/>
+            <a:ext cx="5029200" cy="594360"/>
+          </a:xfrm>
+          <a:prstGeom prst="rect">
+            <a:avLst/>
+          </a:prstGeom>
+          <a:noFill/>
+        </p:spPr>
+        <p:txBody>
+          <a:bodyPr wrap="square">
+            <a:spAutoFit/>
+          </a:bodyPr>
+          <a:lstStyle/>
+          <a:p>
+            <a:pPr algn="l"/>
+            <a:r>
+              <a:rPr sz="1400" b="1">
+                <a:solidFill>
+                  <a:srgbClr val="F2F4F5"/>
+                </a:solidFill>
+                <a:latin typeface="Inter"/>
+              </a:rPr>
+              <a:t>Demo-привязка</a:t>
+            </a:r>
+            <a:r>
+              <a:rPr sz="1100" b="0">
+                <a:solidFill>
+                  <a:srgbClr val="69737D"/>
+                </a:solidFill>
+                <a:latin typeface="Inter"/>
+              </a:rPr>
+              <a:t>
+гео/дат в тесте нет — сетка задокументирована</a:t>
+            </a:r>
+          </a:p>
+        </p:txBody>
+      </p:sp>
+      <p:sp>
+        <p:nvSpPr>
+          <p:cNvPr id="11" name="Oval 10"/>
+          <p:cNvSpPr/>
+          <p:nvPr/>
+        </p:nvSpPr>
+        <p:spPr>
+          <a:xfrm>
+            <a:off x="594360" y="3108960"/>
+            <a:ext cx="137160" cy="137160"/>
           </a:xfrm>
           <a:prstGeom prst="ellipse">
             <a:avLst/>
@@ -4129,14 +4506,14 @@
       </p:sp>
       <p:sp>
         <p:nvSpPr>
-          <p:cNvPr id="5" name="TextBox 4"/>
+          <p:cNvPr id="12" name="TextBox 11"/>
           <p:cNvSpPr txBox="1"/>
           <p:nvPr/>
         </p:nvSpPr>
         <p:spPr>
           <a:xfrm>
-            <a:off x="1234440" y="1956816"/>
-            <a:ext cx="10424160" cy="640080"/>
+            <a:off x="868680" y="2971800"/>
+            <a:ext cx="5029200" cy="594360"/>
           </a:xfrm>
           <a:prstGeom prst="rect">
             <a:avLst/>
@@ -4151,33 +4528,43 @@
           <a:p>
             <a:pPr algn="l"/>
             <a:r>
-              <a:rPr sz="1700" b="0">
-                <a:solidFill>
-                  <a:srgbClr val="A4ADB5"/>
-                </a:solidFill>
-                <a:latin typeface="Inter"/>
-              </a:rPr>
-              <a:t>Demo-привязка чипов: гео и дат в тесте нет — размещение сеткой задокументировано, не восстановлено</a:t>
-            </a:r>
-          </a:p>
-        </p:txBody>
-      </p:sp>
-      <p:sp>
-        <p:nvSpPr>
-          <p:cNvPr id="6" name="Oval 5"/>
+              <a:rPr sz="1400" b="1">
+                <a:solidFill>
+                  <a:srgbClr val="F2F4F5"/>
+                </a:solidFill>
+                <a:latin typeface="Inter"/>
+              </a:rPr>
+              <a:t>Ночь −0.05 F1</a:t>
+            </a:r>
+            <a:r>
+              <a:rPr sz="1100" b="0">
+                <a:solidFill>
+                  <a:srgbClr val="69737D"/>
+                </a:solidFill>
+                <a:latin typeface="Inter"/>
+              </a:rPr>
+              <a:t>
+I1–I3 ночью = NaN по построению</a:t>
+            </a:r>
+          </a:p>
+        </p:txBody>
+      </p:sp>
+      <p:sp>
+        <p:nvSpPr>
+          <p:cNvPr id="13" name="Oval 12"/>
           <p:cNvSpPr/>
           <p:nvPr/>
         </p:nvSpPr>
         <p:spPr>
           <a:xfrm>
-            <a:off x="914400" y="2834640"/>
-            <a:ext cx="146304" cy="146304"/>
+            <a:off x="594360" y="3886200"/>
+            <a:ext cx="137160" cy="137160"/>
           </a:xfrm>
           <a:prstGeom prst="ellipse">
             <a:avLst/>
           </a:prstGeom>
           <a:solidFill>
-            <a:srgbClr val="FF6B35"/>
+            <a:srgbClr val="EF5B5B"/>
           </a:solidFill>
           <a:ln>
             <a:noFill/>
@@ -4207,14 +4594,14 @@
       </p:sp>
       <p:sp>
         <p:nvSpPr>
-          <p:cNvPr id="7" name="TextBox 6"/>
+          <p:cNvPr id="14" name="TextBox 13"/>
           <p:cNvSpPr txBox="1"/>
           <p:nvPr/>
         </p:nvSpPr>
         <p:spPr>
           <a:xfrm>
-            <a:off x="1234440" y="2670048"/>
-            <a:ext cx="10424160" cy="640080"/>
+            <a:off x="868680" y="3749040"/>
+            <a:ext cx="5029200" cy="594360"/>
           </a:xfrm>
           <a:prstGeom prst="rect">
             <a:avLst/>
@@ -4229,33 +4616,43 @@
           <a:p>
             <a:pPr algn="l"/>
             <a:r>
-              <a:rPr sz="1700" b="0">
-                <a:solidFill>
-                  <a:srgbClr val="A4ADB5"/>
-                </a:solidFill>
-                <a:latin typeface="Inter"/>
-              </a:rPr>
-              <a:t>Площади по bbox-компонентам · ночь сложнее дня на 0.05 F1 (I1–I3 ночью = NaN)</a:t>
-            </a:r>
-          </a:p>
-        </p:txBody>
-      </p:sp>
-      <p:sp>
-        <p:nvSpPr>
-          <p:cNvPr id="8" name="Oval 7"/>
+              <a:rPr sz="1400" b="1">
+                <a:solidFill>
+                  <a:srgbClr val="F2F4F5"/>
+                </a:solidFill>
+                <a:latin typeface="Inter"/>
+              </a:rPr>
+              <a:t>0.654 — фриз</a:t>
+            </a:r>
+            <a:r>
+              <a:rPr sz="1100" b="0">
+                <a:solidFill>
+                  <a:srgbClr val="69737D"/>
+                </a:solidFill>
+                <a:latin typeface="Inter"/>
+              </a:rPr>
+              <a:t>
+топ 0.8+ берётся бэкбоунами, не тюнингом</a:t>
+            </a:r>
+          </a:p>
+        </p:txBody>
+      </p:sp>
+      <p:sp>
+        <p:nvSpPr>
+          <p:cNvPr id="15" name="Oval 14"/>
           <p:cNvSpPr/>
           <p:nvPr/>
         </p:nvSpPr>
         <p:spPr>
           <a:xfrm>
-            <a:off x="914400" y="3547872"/>
-            <a:ext cx="146304" cy="146304"/>
+            <a:off x="594360" y="4663440"/>
+            <a:ext cx="137160" cy="137160"/>
           </a:xfrm>
           <a:prstGeom prst="ellipse">
             <a:avLst/>
           </a:prstGeom>
           <a:solidFill>
-            <a:srgbClr val="FF6B35"/>
+            <a:srgbClr val="62D99A"/>
           </a:solidFill>
           <a:ln>
             <a:noFill/>
@@ -4285,14 +4682,14 @@
       </p:sp>
       <p:sp>
         <p:nvSpPr>
-          <p:cNvPr id="9" name="TextBox 8"/>
+          <p:cNvPr id="16" name="TextBox 15"/>
           <p:cNvSpPr txBox="1"/>
           <p:nvPr/>
         </p:nvSpPr>
         <p:spPr>
           <a:xfrm>
-            <a:off x="1234440" y="3383280"/>
-            <a:ext cx="10424160" cy="640080"/>
+            <a:off x="868680" y="4526280"/>
+            <a:ext cx="5029200" cy="594360"/>
           </a:xfrm>
           <a:prstGeom prst="rect">
             <a:avLst/>
@@ -4307,70 +4704,37 @@
           <a:p>
             <a:pPr algn="l"/>
             <a:r>
-              <a:rPr sz="1700" b="0">
-                <a:solidFill>
-                  <a:srgbClr val="A4ADB5"/>
-                </a:solidFill>
-                <a:latin typeface="Inter"/>
-              </a:rPr>
-              <a:t>0.654 — потолок без переобучения с нуля · топ чата 0.8+ берётся большими бэкбоунами, не тюнингом</a:t>
-            </a:r>
-          </a:p>
-        </p:txBody>
-      </p:sp>
-      <p:sp>
-        <p:nvSpPr>
-          <p:cNvPr id="10" name="Oval 9"/>
-          <p:cNvSpPr/>
-          <p:nvPr/>
-        </p:nvSpPr>
-        <p:spPr>
-          <a:xfrm>
-            <a:off x="914400" y="4261104"/>
-            <a:ext cx="146304" cy="146304"/>
-          </a:xfrm>
-          <a:prstGeom prst="ellipse">
-            <a:avLst/>
-          </a:prstGeom>
-          <a:solidFill>
-            <a:srgbClr val="FF6B35"/>
-          </a:solidFill>
-          <a:ln>
-            <a:noFill/>
-          </a:ln>
-        </p:spPr>
-        <p:style>
-          <a:lnRef idx="1">
-            <a:schemeClr val="accent1"/>
-          </a:lnRef>
-          <a:fillRef idx="3">
-            <a:schemeClr val="accent1"/>
-          </a:fillRef>
-          <a:effectRef idx="2">
-            <a:schemeClr val="accent1"/>
-          </a:effectRef>
-          <a:fontRef idx="minor">
-            <a:schemeClr val="lt1"/>
-          </a:fontRef>
-        </p:style>
-        <p:txBody>
-          <a:bodyPr rtlCol="0" anchor="ctr"/>
-          <a:lstStyle/>
-          <a:p>
-            <a:pPr algn="ctr"/>
-          </a:p>
-        </p:txBody>
-      </p:sp>
-      <p:sp>
-        <p:nvSpPr>
-          <p:cNvPr id="11" name="TextBox 10"/>
+              <a:rPr sz="1400" b="1">
+                <a:solidFill>
+                  <a:srgbClr val="F2F4F5"/>
+                </a:solidFill>
+                <a:latin typeface="Inter"/>
+              </a:rPr>
+              <a:t>Next</a:t>
+            </a:r>
+            <a:r>
+              <a:rPr sz="1100" b="0">
+                <a:solidFill>
+                  <a:srgbClr val="69737D"/>
+                </a:solidFill>
+                <a:latin typeface="Inter"/>
+              </a:rPr>
+              <a:t>
+контуры вместо bbox · foundation-модели</a:t>
+            </a:r>
+          </a:p>
+        </p:txBody>
+      </p:sp>
+      <p:sp>
+        <p:nvSpPr>
+          <p:cNvPr id="17" name="TextBox 16"/>
           <p:cNvSpPr txBox="1"/>
           <p:nvPr/>
         </p:nvSpPr>
         <p:spPr>
           <a:xfrm>
-            <a:off x="1234440" y="4096512"/>
-            <a:ext cx="10424160" cy="640080"/>
+            <a:off x="6675120" y="2926080"/>
+            <a:ext cx="5212080" cy="1097280"/>
           </a:xfrm>
           <a:prstGeom prst="rect">
             <a:avLst/>
@@ -4383,50 +4747,25 @@
           </a:bodyPr>
           <a:lstStyle/>
           <a:p>
-            <a:pPr algn="l"/>
-            <a:r>
-              <a:rPr sz="1700" b="0">
-                <a:solidFill>
-                  <a:srgbClr val="A4ADB5"/>
-                </a:solidFill>
-                <a:latin typeface="Inter"/>
-              </a:rPr>
-              <a:t>Next: контурная векторизация вместо bbox · выверка GSD-площадей AF · свежие foundation-модели</a:t>
-            </a:r>
-          </a:p>
-        </p:txBody>
-      </p:sp>
-      <p:sp>
-        <p:nvSpPr>
-          <p:cNvPr id="12" name="TextBox 11"/>
-          <p:cNvSpPr txBox="1"/>
-          <p:nvPr/>
-        </p:nvSpPr>
-        <p:spPr>
-          <a:xfrm>
-            <a:off x="731520" y="6035040"/>
-            <a:ext cx="10698480" cy="457200"/>
-          </a:xfrm>
-          <a:prstGeom prst="rect">
-            <a:avLst/>
-          </a:prstGeom>
-          <a:noFill/>
-        </p:spPr>
-        <p:txBody>
-          <a:bodyPr wrap="square">
-            <a:spAutoFit/>
-          </a:bodyPr>
-          <a:lstStyle/>
-          <a:p>
-            <a:pPr algn="l"/>
-            <a:r>
-              <a:rPr sz="1400" b="1">
-                <a:solidFill>
-                  <a:srgbClr val="62D99A"/>
-                </a:solidFill>
-                <a:latin typeface="Inter"/>
-              </a:rPr>
-              <a:t>●  LIVE  ·  kosmohack · Score 0.654 · спасибо</a:t>
+            <a:pPr algn="ctr"/>
+            <a:r>
+              <a:rPr sz="4000" b="1">
+                <a:solidFill>
+                  <a:srgbClr val="F2F4F5"/>
+                </a:solidFill>
+                <a:latin typeface="Inter"/>
+              </a:rPr>
+              <a:t>ЖИМ НОГАМИ</a:t>
+            </a:r>
+            <a:r>
+              <a:rPr sz="1600" b="0">
+                <a:solidFill>
+                  <a:srgbClr val="69737D"/>
+                </a:solidFill>
+                <a:latin typeface="Inter"/>
+              </a:rPr>
+              <a:t>
+спасибо · вопросы — по коду в репо</a:t>
             </a:r>
           </a:p>
         </p:txBody>
@@ -4459,14 +4798,104 @@
       <p:grpSpPr/>
       <p:sp>
         <p:nvSpPr>
-          <p:cNvPr id="2" name="TextBox 1"/>
+          <p:cNvPr id="2" name="Rounded Rectangle 1"/>
+          <p:cNvSpPr/>
+          <p:nvPr/>
+        </p:nvSpPr>
+        <p:spPr>
+          <a:xfrm>
+            <a:off x="5074920" y="228600"/>
+            <a:ext cx="2057400" cy="685800"/>
+          </a:xfrm>
+          <a:prstGeom prst="roundRect">
+            <a:avLst>
+              <a:gd name="adj" fmla="val 9000"/>
+            </a:avLst>
+          </a:prstGeom>
+          <a:solidFill>
+            <a:srgbClr val="0A0E12"/>
+          </a:solidFill>
+          <a:ln w="12700">
+            <a:solidFill>
+              <a:srgbClr val="2A333D"/>
+            </a:solidFill>
+          </a:ln>
+        </p:spPr>
+        <p:style>
+          <a:lnRef idx="1">
+            <a:schemeClr val="accent1"/>
+          </a:lnRef>
+          <a:fillRef idx="3">
+            <a:schemeClr val="accent1"/>
+          </a:fillRef>
+          <a:effectRef idx="2">
+            <a:schemeClr val="accent1"/>
+          </a:effectRef>
+          <a:fontRef idx="minor">
+            <a:schemeClr val="lt1"/>
+          </a:fontRef>
+        </p:style>
+        <p:txBody>
+          <a:bodyPr rtlCol="0" anchor="ctr"/>
+          <a:lstStyle/>
+          <a:p>
+            <a:pPr algn="ctr"/>
+          </a:p>
+        </p:txBody>
+      </p:sp>
+      <p:sp>
+        <p:nvSpPr>
+          <p:cNvPr id="3" name="Oval 2"/>
+          <p:cNvSpPr/>
+          <p:nvPr/>
+        </p:nvSpPr>
+        <p:spPr>
+          <a:xfrm>
+            <a:off x="5257800" y="457200"/>
+            <a:ext cx="128016" cy="128016"/>
+          </a:xfrm>
+          <a:prstGeom prst="ellipse">
+            <a:avLst/>
+          </a:prstGeom>
+          <a:solidFill>
+            <a:srgbClr val="62D99A"/>
+          </a:solidFill>
+          <a:ln>
+            <a:noFill/>
+          </a:ln>
+        </p:spPr>
+        <p:style>
+          <a:lnRef idx="1">
+            <a:schemeClr val="accent1"/>
+          </a:lnRef>
+          <a:fillRef idx="3">
+            <a:schemeClr val="accent1"/>
+          </a:fillRef>
+          <a:effectRef idx="2">
+            <a:schemeClr val="accent1"/>
+          </a:effectRef>
+          <a:fontRef idx="minor">
+            <a:schemeClr val="lt1"/>
+          </a:fontRef>
+        </p:style>
+        <p:txBody>
+          <a:bodyPr rtlCol="0" anchor="ctr"/>
+          <a:lstStyle/>
+          <a:p>
+            <a:pPr algn="ctr"/>
+          </a:p>
+        </p:txBody>
+      </p:sp>
+      <p:sp>
+        <p:nvSpPr>
+          <p:cNvPr id="4" name="TextBox 3"/>
           <p:cNvSpPr txBox="1"/>
           <p:nvPr/>
         </p:nvSpPr>
         <p:spPr>
           <a:xfrm>
-            <a:off x="731520" y="411480"/>
-            <a:ext cx="10698480" cy="320040"/>
+            <a:off x="5486400" y="256032"/>
+            <a:ext cx="1463040" cy="320040"/>
           </a:xfrm>
           <a:prstGeom prst="rect">
             <a:avLst/>
@@ -4479,38 +4908,29 @@
           </a:bodyPr>
           <a:lstStyle/>
           <a:p>
-            <a:pPr algn="l"/>
-            <a:r>
-              <a:rPr sz="1300" b="1">
-                <a:solidFill>
-                  <a:srgbClr val="69737D"/>
-                </a:solidFill>
-                <a:latin typeface="Inter"/>
-              </a:rPr>
-              <a:t>01  </a:t>
-            </a:r>
-            <a:r>
-              <a:rPr sz="1300" b="1">
-                <a:solidFill>
-                  <a:srgbClr val="69737D"/>
-                </a:solidFill>
-                <a:latin typeface="Inter"/>
-              </a:rPr>
-              <a:t>ПРОБЛЕМА</a:t>
-            </a:r>
-          </a:p>
-        </p:txBody>
-      </p:sp>
-      <p:sp>
-        <p:nvSpPr>
-          <p:cNvPr id="3" name="TextBox 2"/>
+            <a:pPr algn="ctr"/>
+            <a:r>
+              <a:rPr sz="1400" b="1">
+                <a:solidFill>
+                  <a:srgbClr val="F2F4F5"/>
+                </a:solidFill>
+                <a:latin typeface="Inter"/>
+              </a:rPr>
+              <a:t>ЖИМ НОГАМИ</a:t>
+            </a:r>
+          </a:p>
+        </p:txBody>
+      </p:sp>
+      <p:sp>
+        <p:nvSpPr>
+          <p:cNvPr id="5" name="TextBox 4"/>
           <p:cNvSpPr txBox="1"/>
           <p:nvPr/>
         </p:nvSpPr>
         <p:spPr>
           <a:xfrm>
-            <a:off x="731520" y="777240"/>
-            <a:ext cx="10698480" cy="914400"/>
+            <a:off x="5486400" y="530352"/>
+            <a:ext cx="1463040" cy="274320"/>
           </a:xfrm>
           <a:prstGeom prst="rect">
             <a:avLst/>
@@ -4523,29 +4943,322 @@
           </a:bodyPr>
           <a:lstStyle/>
           <a:p>
+            <a:pPr algn="ctr"/>
+            <a:r>
+              <a:rPr sz="800" b="0">
+                <a:solidFill>
+                  <a:srgbClr val="69737D"/>
+                </a:solidFill>
+                <a:latin typeface="Inter"/>
+              </a:rPr>
+              <a:t>FIRE MONITOR · KOSMOHACK 2026</a:t>
+            </a:r>
+          </a:p>
+        </p:txBody>
+      </p:sp>
+      <p:sp>
+        <p:nvSpPr>
+          <p:cNvPr id="6" name="Rounded Rectangle 5"/>
+          <p:cNvSpPr/>
+          <p:nvPr/>
+        </p:nvSpPr>
+        <p:spPr>
+          <a:xfrm>
+            <a:off x="320040" y="1188720"/>
+            <a:ext cx="5852160" cy="4480560"/>
+          </a:xfrm>
+          <a:prstGeom prst="roundRect">
+            <a:avLst>
+              <a:gd name="adj" fmla="val 9000"/>
+            </a:avLst>
+          </a:prstGeom>
+          <a:solidFill>
+            <a:srgbClr val="0A0E12"/>
+          </a:solidFill>
+          <a:ln w="12700">
+            <a:solidFill>
+              <a:srgbClr val="2A333D"/>
+            </a:solidFill>
+          </a:ln>
+        </p:spPr>
+        <p:style>
+          <a:lnRef idx="1">
+            <a:schemeClr val="accent1"/>
+          </a:lnRef>
+          <a:fillRef idx="3">
+            <a:schemeClr val="accent1"/>
+          </a:fillRef>
+          <a:effectRef idx="2">
+            <a:schemeClr val="accent1"/>
+          </a:effectRef>
+          <a:fontRef idx="minor">
+            <a:schemeClr val="lt1"/>
+          </a:fontRef>
+        </p:style>
+        <p:txBody>
+          <a:bodyPr rtlCol="0" anchor="ctr"/>
+          <a:lstStyle/>
+          <a:p>
+            <a:pPr algn="ctr"/>
+          </a:p>
+        </p:txBody>
+      </p:sp>
+      <p:sp>
+        <p:nvSpPr>
+          <p:cNvPr id="7" name="TextBox 6"/>
+          <p:cNvSpPr txBox="1"/>
+          <p:nvPr/>
+        </p:nvSpPr>
+        <p:spPr>
+          <a:xfrm>
+            <a:off x="594360" y="1325880"/>
+            <a:ext cx="914400" cy="274320"/>
+          </a:xfrm>
+          <a:prstGeom prst="rect">
+            <a:avLst/>
+          </a:prstGeom>
+          <a:noFill/>
+        </p:spPr>
+        <p:txBody>
+          <a:bodyPr wrap="square">
+            <a:spAutoFit/>
+          </a:bodyPr>
+          <a:lstStyle/>
+          <a:p>
             <a:pPr algn="l"/>
             <a:r>
-              <a:rPr sz="3400" b="1">
+              <a:rPr sz="1100" b="1">
+                <a:solidFill>
+                  <a:srgbClr val="69737D"/>
+                </a:solidFill>
+                <a:latin typeface="Inter"/>
+              </a:rPr>
+              <a:t>01</a:t>
+            </a:r>
+          </a:p>
+        </p:txBody>
+      </p:sp>
+      <p:sp>
+        <p:nvSpPr>
+          <p:cNvPr id="8" name="TextBox 7"/>
+          <p:cNvSpPr txBox="1"/>
+          <p:nvPr/>
+        </p:nvSpPr>
+        <p:spPr>
+          <a:xfrm>
+            <a:off x="594360" y="1572768"/>
+            <a:ext cx="5303520" cy="457200"/>
+          </a:xfrm>
+          <a:prstGeom prst="rect">
+            <a:avLst/>
+          </a:prstGeom>
+          <a:noFill/>
+        </p:spPr>
+        <p:txBody>
+          <a:bodyPr wrap="square">
+            <a:spAutoFit/>
+          </a:bodyPr>
+          <a:lstStyle/>
+          <a:p>
+            <a:pPr algn="l"/>
+            <a:r>
+              <a:rPr sz="2100" b="1">
                 <a:solidFill>
                   <a:srgbClr val="F2F4F5"/>
                 </a:solidFill>
                 <a:latin typeface="Inter"/>
               </a:rPr>
-              <a:t>Глобальным продуктам нельзя доверять вслепую</a:t>
-            </a:r>
-          </a:p>
-        </p:txBody>
-      </p:sp>
-      <p:sp>
-        <p:nvSpPr>
-          <p:cNvPr id="4" name="Oval 3"/>
+              <a:t>Проблема</a:t>
+            </a:r>
+          </a:p>
+        </p:txBody>
+      </p:sp>
+      <p:sp>
+        <p:nvSpPr>
+          <p:cNvPr id="9" name="Oval 8"/>
           <p:cNvSpPr/>
           <p:nvPr/>
         </p:nvSpPr>
         <p:spPr>
           <a:xfrm>
-            <a:off x="914400" y="2121408"/>
-            <a:ext cx="146304" cy="146304"/>
+            <a:off x="594360" y="2331720"/>
+            <a:ext cx="137160" cy="137160"/>
+          </a:xfrm>
+          <a:prstGeom prst="ellipse">
+            <a:avLst/>
+          </a:prstGeom>
+          <a:solidFill>
+            <a:srgbClr val="EF5B5B"/>
+          </a:solidFill>
+          <a:ln>
+            <a:noFill/>
+          </a:ln>
+        </p:spPr>
+        <p:style>
+          <a:lnRef idx="1">
+            <a:schemeClr val="accent1"/>
+          </a:lnRef>
+          <a:fillRef idx="3">
+            <a:schemeClr val="accent1"/>
+          </a:fillRef>
+          <a:effectRef idx="2">
+            <a:schemeClr val="accent1"/>
+          </a:effectRef>
+          <a:fontRef idx="minor">
+            <a:schemeClr val="lt1"/>
+          </a:fontRef>
+        </p:style>
+        <p:txBody>
+          <a:bodyPr rtlCol="0" anchor="ctr"/>
+          <a:lstStyle/>
+          <a:p>
+            <a:pPr algn="ctr"/>
+          </a:p>
+        </p:txBody>
+      </p:sp>
+      <p:sp>
+        <p:nvSpPr>
+          <p:cNvPr id="10" name="TextBox 9"/>
+          <p:cNvSpPr txBox="1"/>
+          <p:nvPr/>
+        </p:nvSpPr>
+        <p:spPr>
+          <a:xfrm>
+            <a:off x="868680" y="2194560"/>
+            <a:ext cx="5029200" cy="594360"/>
+          </a:xfrm>
+          <a:prstGeom prst="rect">
+            <a:avLst/>
+          </a:prstGeom>
+          <a:noFill/>
+        </p:spPr>
+        <p:txBody>
+          <a:bodyPr wrap="square">
+            <a:spAutoFit/>
+          </a:bodyPr>
+          <a:lstStyle/>
+          <a:p>
+            <a:pPr algn="l"/>
+            <a:r>
+              <a:rPr sz="1400" b="1">
+                <a:solidFill>
+                  <a:srgbClr val="F2F4F5"/>
+                </a:solidFill>
+                <a:latin typeface="Inter"/>
+              </a:rPr>
+              <a:t>Ложняки FIRMS</a:t>
+            </a:r>
+            <a:r>
+              <a:rPr sz="1100" b="0">
+                <a:solidFill>
+                  <a:srgbClr val="69737D"/>
+                </a:solidFill>
+                <a:latin typeface="Inter"/>
+              </a:rPr>
+              <a:t>
+факелы, металлургия и ТЭЦ — в промзонах их больше, чем пожаров</a:t>
+            </a:r>
+          </a:p>
+        </p:txBody>
+      </p:sp>
+      <p:sp>
+        <p:nvSpPr>
+          <p:cNvPr id="11" name="Oval 10"/>
+          <p:cNvSpPr/>
+          <p:nvPr/>
+        </p:nvSpPr>
+        <p:spPr>
+          <a:xfrm>
+            <a:off x="594360" y="3108960"/>
+            <a:ext cx="137160" cy="137160"/>
+          </a:xfrm>
+          <a:prstGeom prst="ellipse">
+            <a:avLst/>
+          </a:prstGeom>
+          <a:solidFill>
+            <a:srgbClr val="E6C65C"/>
+          </a:solidFill>
+          <a:ln>
+            <a:noFill/>
+          </a:ln>
+        </p:spPr>
+        <p:style>
+          <a:lnRef idx="1">
+            <a:schemeClr val="accent1"/>
+          </a:lnRef>
+          <a:fillRef idx="3">
+            <a:schemeClr val="accent1"/>
+          </a:fillRef>
+          <a:effectRef idx="2">
+            <a:schemeClr val="accent1"/>
+          </a:effectRef>
+          <a:fontRef idx="minor">
+            <a:schemeClr val="lt1"/>
+          </a:fontRef>
+        </p:style>
+        <p:txBody>
+          <a:bodyPr rtlCol="0" anchor="ctr"/>
+          <a:lstStyle/>
+          <a:p>
+            <a:pPr algn="ctr"/>
+          </a:p>
+        </p:txBody>
+      </p:sp>
+      <p:sp>
+        <p:nvSpPr>
+          <p:cNvPr id="12" name="TextBox 11"/>
+          <p:cNvSpPr txBox="1"/>
+          <p:nvPr/>
+        </p:nvSpPr>
+        <p:spPr>
+          <a:xfrm>
+            <a:off x="868680" y="2971800"/>
+            <a:ext cx="5029200" cy="594360"/>
+          </a:xfrm>
+          <a:prstGeom prst="rect">
+            <a:avLst/>
+          </a:prstGeom>
+          <a:noFill/>
+        </p:spPr>
+        <p:txBody>
+          <a:bodyPr wrap="square">
+            <a:spAutoFit/>
+          </a:bodyPr>
+          <a:lstStyle/>
+          <a:p>
+            <a:pPr algn="l"/>
+            <a:r>
+              <a:rPr sz="1400" b="1">
+                <a:solidFill>
+                  <a:srgbClr val="F2F4F5"/>
+                </a:solidFill>
+                <a:latin typeface="Inter"/>
+              </a:rPr>
+              <a:t>Блики и пропуски</a:t>
+            </a:r>
+            <a:r>
+              <a:rPr sz="1100" b="0">
+                <a:solidFill>
+                  <a:srgbClr val="69737D"/>
+                </a:solidFill>
+                <a:latin typeface="Inter"/>
+              </a:rPr>
+              <a:t>
+металл, теплицы, вода · малые очаги, облака, дым</a:t>
+            </a:r>
+          </a:p>
+        </p:txBody>
+      </p:sp>
+      <p:sp>
+        <p:nvSpPr>
+          <p:cNvPr id="13" name="Oval 12"/>
+          <p:cNvSpPr/>
+          <p:nvPr/>
+        </p:nvSpPr>
+        <p:spPr>
+          <a:xfrm>
+            <a:off x="594360" y="3886200"/>
+            <a:ext cx="137160" cy="137160"/>
           </a:xfrm>
           <a:prstGeom prst="ellipse">
             <a:avLst/>
@@ -4581,14 +5294,14 @@
       </p:sp>
       <p:sp>
         <p:nvSpPr>
-          <p:cNvPr id="5" name="TextBox 4"/>
+          <p:cNvPr id="14" name="TextBox 13"/>
           <p:cNvSpPr txBox="1"/>
           <p:nvPr/>
         </p:nvSpPr>
         <p:spPr>
           <a:xfrm>
-            <a:off x="1234440" y="1956816"/>
-            <a:ext cx="10424160" cy="640080"/>
+            <a:off x="868680" y="3749040"/>
+            <a:ext cx="5029200" cy="594360"/>
           </a:xfrm>
           <a:prstGeom prst="rect">
             <a:avLst/>
@@ -4603,33 +5316,43 @@
           <a:p>
             <a:pPr algn="l"/>
             <a:r>
-              <a:rPr sz="1700" b="0">
-                <a:solidFill>
-                  <a:srgbClr val="A4ADB5"/>
-                </a:solidFill>
-                <a:latin typeface="Inter"/>
-              </a:rPr>
-              <a:t>FIRMS сыплет ложняками на факелах, металлургии и ТЭЦ — в промзонах их больше, чем настоящих пожаров</a:t>
-            </a:r>
-          </a:p>
-        </p:txBody>
-      </p:sp>
-      <p:sp>
-        <p:nvSpPr>
-          <p:cNvPr id="6" name="Oval 5"/>
+              <a:rPr sz="1400" b="1">
+                <a:solidFill>
+                  <a:srgbClr val="F2F4F5"/>
+                </a:solidFill>
+                <a:latin typeface="Inter"/>
+              </a:rPr>
+              <a:t>Гари без методики</a:t>
+            </a:r>
+            <a:r>
+              <a:rPr sz="1100" b="0">
+                <a:solidFill>
+                  <a:srgbClr val="69737D"/>
+                </a:solidFill>
+                <a:latin typeface="Inter"/>
+              </a:rPr>
+              <a:t>
+выборочно, с задержкой в недели</a:t>
+            </a:r>
+          </a:p>
+        </p:txBody>
+      </p:sp>
+      <p:sp>
+        <p:nvSpPr>
+          <p:cNvPr id="15" name="Oval 14"/>
           <p:cNvSpPr/>
           <p:nvPr/>
         </p:nvSpPr>
         <p:spPr>
           <a:xfrm>
-            <a:off x="914400" y="2834640"/>
-            <a:ext cx="146304" cy="146304"/>
+            <a:off x="594360" y="4663440"/>
+            <a:ext cx="137160" cy="137160"/>
           </a:xfrm>
           <a:prstGeom prst="ellipse">
             <a:avLst/>
           </a:prstGeom>
           <a:solidFill>
-            <a:srgbClr val="FF6B35"/>
+            <a:srgbClr val="62D99A"/>
           </a:solidFill>
           <a:ln>
             <a:noFill/>
@@ -4659,14 +5382,14 @@
       </p:sp>
       <p:sp>
         <p:nvSpPr>
-          <p:cNvPr id="7" name="TextBox 6"/>
+          <p:cNvPr id="16" name="TextBox 15"/>
           <p:cNvSpPr txBox="1"/>
           <p:nvPr/>
         </p:nvSpPr>
         <p:spPr>
           <a:xfrm>
-            <a:off x="1234440" y="2670048"/>
-            <a:ext cx="10424160" cy="640080"/>
+            <a:off x="868680" y="4526280"/>
+            <a:ext cx="5029200" cy="594360"/>
           </a:xfrm>
           <a:prstGeom prst="rect">
             <a:avLst/>
@@ -4681,173 +5404,51 @@
           <a:p>
             <a:pPr algn="l"/>
             <a:r>
-              <a:rPr sz="1700" b="0">
-                <a:solidFill>
-                  <a:srgbClr val="A4ADB5"/>
-                </a:solidFill>
-                <a:latin typeface="Inter"/>
-              </a:rPr>
-              <a:t>Блики металла, теплиц и воды · пропуски малых очагов, облачности и дыма</a:t>
-            </a:r>
-          </a:p>
-        </p:txBody>
-      </p:sp>
-      <p:sp>
-        <p:nvSpPr>
-          <p:cNvPr id="8" name="Oval 7"/>
-          <p:cNvSpPr/>
-          <p:nvPr/>
-        </p:nvSpPr>
-        <p:spPr>
-          <a:xfrm>
-            <a:off x="914400" y="3547872"/>
-            <a:ext cx="146304" cy="146304"/>
-          </a:xfrm>
-          <a:prstGeom prst="ellipse">
-            <a:avLst/>
-          </a:prstGeom>
-          <a:solidFill>
-            <a:srgbClr val="FF6B35"/>
-          </a:solidFill>
-          <a:ln>
-            <a:noFill/>
-          </a:ln>
-        </p:spPr>
-        <p:style>
-          <a:lnRef idx="1">
-            <a:schemeClr val="accent1"/>
-          </a:lnRef>
-          <a:fillRef idx="3">
-            <a:schemeClr val="accent1"/>
-          </a:fillRef>
-          <a:effectRef idx="2">
-            <a:schemeClr val="accent1"/>
-          </a:effectRef>
-          <a:fontRef idx="minor">
-            <a:schemeClr val="lt1"/>
-          </a:fontRef>
-        </p:style>
-        <p:txBody>
-          <a:bodyPr rtlCol="0" anchor="ctr"/>
-          <a:lstStyle/>
-          <a:p>
-            <a:pPr algn="ctr"/>
-          </a:p>
-        </p:txBody>
-      </p:sp>
-      <p:sp>
-        <p:nvSpPr>
-          <p:cNvPr id="9" name="TextBox 8"/>
-          <p:cNvSpPr txBox="1"/>
-          <p:nvPr/>
-        </p:nvSpPr>
-        <p:spPr>
-          <a:xfrm>
-            <a:off x="1234440" y="3383280"/>
-            <a:ext cx="10424160" cy="640080"/>
-          </a:xfrm>
-          <a:prstGeom prst="rect">
-            <a:avLst/>
-          </a:prstGeom>
-          <a:noFill/>
-        </p:spPr>
-        <p:txBody>
-          <a:bodyPr wrap="square">
-            <a:spAutoFit/>
-          </a:bodyPr>
-          <a:lstStyle/>
-          <a:p>
-            <a:pPr algn="l"/>
-            <a:r>
-              <a:rPr sz="1700" b="0">
-                <a:solidFill>
-                  <a:srgbClr val="A4ADB5"/>
-                </a:solidFill>
-                <a:latin typeface="Inter"/>
-              </a:rPr>
-              <a:t>Гари оценивают выборочно, с задержкой в недели, без единой методики</a:t>
-            </a:r>
-          </a:p>
-        </p:txBody>
-      </p:sp>
-      <p:sp>
-        <p:nvSpPr>
-          <p:cNvPr id="10" name="Oval 9"/>
-          <p:cNvSpPr/>
-          <p:nvPr/>
-        </p:nvSpPr>
-        <p:spPr>
-          <a:xfrm>
-            <a:off x="914400" y="4261104"/>
-            <a:ext cx="146304" cy="146304"/>
-          </a:xfrm>
-          <a:prstGeom prst="ellipse">
-            <a:avLst/>
-          </a:prstGeom>
-          <a:solidFill>
-            <a:srgbClr val="FF6B35"/>
-          </a:solidFill>
-          <a:ln>
-            <a:noFill/>
-          </a:ln>
-        </p:spPr>
-        <p:style>
-          <a:lnRef idx="1">
-            <a:schemeClr val="accent1"/>
-          </a:lnRef>
-          <a:fillRef idx="3">
-            <a:schemeClr val="accent1"/>
-          </a:fillRef>
-          <a:effectRef idx="2">
-            <a:schemeClr val="accent1"/>
-          </a:effectRef>
-          <a:fontRef idx="minor">
-            <a:schemeClr val="lt1"/>
-          </a:fontRef>
-        </p:style>
-        <p:txBody>
-          <a:bodyPr rtlCol="0" anchor="ctr"/>
-          <a:lstStyle/>
-          <a:p>
-            <a:pPr algn="ctr"/>
-          </a:p>
-        </p:txBody>
-      </p:sp>
-      <p:sp>
-        <p:nvSpPr>
-          <p:cNvPr id="11" name="TextBox 10"/>
-          <p:cNvSpPr txBox="1"/>
-          <p:nvPr/>
-        </p:nvSpPr>
-        <p:spPr>
-          <a:xfrm>
-            <a:off x="1234440" y="4096512"/>
-            <a:ext cx="10424160" cy="640080"/>
-          </a:xfrm>
-          <a:prstGeom prst="rect">
-            <a:avLst/>
-          </a:prstGeom>
-          <a:noFill/>
-        </p:spPr>
-        <p:txBody>
-          <a:bodyPr wrap="square">
-            <a:spAutoFit/>
-          </a:bodyPr>
-          <a:lstStyle/>
-          <a:p>
-            <a:pPr algn="l"/>
-            <a:r>
-              <a:rPr sz="1700" b="0">
-                <a:solidFill>
-                  <a:srgbClr val="A4ADB5"/>
-                </a:solidFill>
-                <a:latin typeface="Inter"/>
-              </a:rPr>
-              <a:t>Надо: чистые термоточки + контуры гарей по степеням + запрос без ручных растров</a:t>
-            </a:r>
-          </a:p>
-        </p:txBody>
-      </p:sp>
+              <a:rPr sz="1400" b="1">
+                <a:solidFill>
+                  <a:srgbClr val="F2F4F5"/>
+                </a:solidFill>
+                <a:latin typeface="Inter"/>
+              </a:rPr>
+              <a:t>Надо</a:t>
+            </a:r>
+            <a:r>
+              <a:rPr sz="1100" b="0">
+                <a:solidFill>
+                  <a:srgbClr val="69737D"/>
+                </a:solidFill>
+                <a:latin typeface="Inter"/>
+              </a:rPr>
+              <a:t>
+чистые точки + контуры по степеням + запрос без растров</a:t>
+            </a:r>
+          </a:p>
+        </p:txBody>
+      </p:sp>
+      <p:pic>
+        <p:nvPicPr>
+          <p:cNvPr id="17" name="Picture 16" descr="02-burned-only.png"/>
+          <p:cNvPicPr>
+            <a:picLocks noChangeAspect="1"/>
+          </p:cNvPicPr>
+          <p:nvPr/>
+        </p:nvPicPr>
+        <p:blipFill>
+          <a:blip r:embed="rId2"/>
+          <a:stretch>
+            <a:fillRect/>
+          </a:stretch>
+        </p:blipFill>
+        <p:spPr>
+          <a:xfrm>
+            <a:off x="6675120" y="1188720"/>
+            <a:ext cx="5212080" cy="2931795"/>
+          </a:xfrm>
+          <a:prstGeom prst="rect">
+            <a:avLst/>
+          </a:prstGeom>
+        </p:spPr>
+      </p:pic>
     </p:spTree>
   </p:cSld>
   <p:clrMapOvr>
@@ -4876,105 +5477,26 @@
       <p:grpSpPr/>
       <p:sp>
         <p:nvSpPr>
-          <p:cNvPr id="2" name="TextBox 1"/>
-          <p:cNvSpPr txBox="1"/>
-          <p:nvPr/>
-        </p:nvSpPr>
-        <p:spPr>
-          <a:xfrm>
-            <a:off x="731520" y="411480"/>
-            <a:ext cx="10698480" cy="320040"/>
-          </a:xfrm>
-          <a:prstGeom prst="rect">
-            <a:avLst/>
-          </a:prstGeom>
-          <a:noFill/>
-        </p:spPr>
-        <p:txBody>
-          <a:bodyPr wrap="square">
-            <a:spAutoFit/>
-          </a:bodyPr>
-          <a:lstStyle/>
-          <a:p>
-            <a:pPr algn="l"/>
-            <a:r>
-              <a:rPr sz="1300" b="1">
-                <a:solidFill>
-                  <a:srgbClr val="69737D"/>
-                </a:solidFill>
-                <a:latin typeface="Inter"/>
-              </a:rPr>
-              <a:t>02  </a:t>
-            </a:r>
-            <a:r>
-              <a:rPr sz="1300" b="1">
-                <a:solidFill>
-                  <a:srgbClr val="69737D"/>
-                </a:solidFill>
-                <a:latin typeface="Inter"/>
-              </a:rPr>
-              <a:t>СХЕМА РЕШЕНИЯ</a:t>
-            </a:r>
-          </a:p>
-        </p:txBody>
-      </p:sp>
-      <p:sp>
-        <p:nvSpPr>
-          <p:cNvPr id="3" name="TextBox 2"/>
-          <p:cNvSpPr txBox="1"/>
-          <p:nvPr/>
-        </p:nvSpPr>
-        <p:spPr>
-          <a:xfrm>
-            <a:off x="731520" y="777240"/>
-            <a:ext cx="10698480" cy="914400"/>
-          </a:xfrm>
-          <a:prstGeom prst="rect">
-            <a:avLst/>
-          </a:prstGeom>
-          <a:noFill/>
-        </p:spPr>
-        <p:txBody>
-          <a:bodyPr wrap="square">
-            <a:spAutoFit/>
-          </a:bodyPr>
-          <a:lstStyle/>
-          <a:p>
-            <a:pPr algn="l"/>
-            <a:r>
-              <a:rPr sz="3400" b="1">
-                <a:solidFill>
-                  <a:srgbClr val="F2F4F5"/>
-                </a:solidFill>
-                <a:latin typeface="Inter"/>
-              </a:rPr>
-              <a:t>Два модуля → общий ответ → сервис</a:t>
-            </a:r>
-          </a:p>
-        </p:txBody>
-      </p:sp>
-      <p:sp>
-        <p:nvSpPr>
-          <p:cNvPr id="4" name="Rounded Rectangle 3"/>
+          <p:cNvPr id="2" name="Rounded Rectangle 1"/>
           <p:cNvSpPr/>
           <p:nvPr/>
         </p:nvSpPr>
         <p:spPr>
           <a:xfrm>
-            <a:off x="731520" y="2286000"/>
-            <a:ext cx="1965960" cy="1554480"/>
+            <a:off x="5074920" y="228600"/>
+            <a:ext cx="2057400" cy="685800"/>
           </a:xfrm>
           <a:prstGeom prst="roundRect">
             <a:avLst>
-              <a:gd name="adj" fmla="val 8000"/>
+              <a:gd name="adj" fmla="val 9000"/>
             </a:avLst>
           </a:prstGeom>
           <a:solidFill>
-            <a:srgbClr val="0E1318"/>
+            <a:srgbClr val="0A0E12"/>
           </a:solidFill>
           <a:ln w="12700">
             <a:solidFill>
-              <a:srgbClr val="232A33"/>
+              <a:srgbClr val="2A333D"/>
             </a:solidFill>
           </a:ln>
         </p:spPr>
@@ -5002,368 +5524,14 @@
       </p:sp>
       <p:sp>
         <p:nvSpPr>
-          <p:cNvPr id="5" name="TextBox 4"/>
-          <p:cNvSpPr txBox="1"/>
-          <p:nvPr/>
-        </p:nvSpPr>
-        <p:spPr>
-          <a:xfrm>
-            <a:off x="731520" y="2606040"/>
-            <a:ext cx="1965960" cy="1097280"/>
-          </a:xfrm>
-          <a:prstGeom prst="rect">
-            <a:avLst/>
-          </a:prstGeom>
-          <a:noFill/>
-        </p:spPr>
-        <p:txBody>
-          <a:bodyPr wrap="square">
-            <a:spAutoFit/>
-          </a:bodyPr>
-          <a:lstStyle/>
-          <a:p>
-            <a:pPr algn="ctr"/>
-            <a:r>
-              <a:rPr sz="1700" b="1">
-                <a:solidFill>
-                  <a:srgbClr val="F2F4F5"/>
-                </a:solidFill>
-                <a:latin typeface="Inter"/>
-              </a:rPr>
-              <a:t>VIIRS AF
-Unet-effb4</a:t>
-            </a:r>
-          </a:p>
-        </p:txBody>
-      </p:sp>
-      <p:sp>
-        <p:nvSpPr>
-          <p:cNvPr id="6" name="TextBox 5"/>
-          <p:cNvSpPr txBox="1"/>
-          <p:nvPr/>
-        </p:nvSpPr>
-        <p:spPr>
-          <a:xfrm>
-            <a:off x="2697480" y="2788920"/>
-            <a:ext cx="365760" cy="457200"/>
-          </a:xfrm>
-          <a:prstGeom prst="rect">
-            <a:avLst/>
-          </a:prstGeom>
-          <a:noFill/>
-        </p:spPr>
-        <p:txBody>
-          <a:bodyPr wrap="square">
-            <a:spAutoFit/>
-          </a:bodyPr>
-          <a:lstStyle/>
-          <a:p>
-            <a:pPr algn="ctr"/>
-            <a:r>
-              <a:rPr sz="2600" b="0">
-                <a:solidFill>
-                  <a:srgbClr val="FF6B35"/>
-                </a:solidFill>
-                <a:latin typeface="Inter"/>
-              </a:rPr>
-              <a:t>→</a:t>
-            </a:r>
-          </a:p>
-        </p:txBody>
-      </p:sp>
-      <p:sp>
-        <p:nvSpPr>
-          <p:cNvPr id="7" name="Rounded Rectangle 6"/>
+          <p:cNvPr id="3" name="Oval 2"/>
           <p:cNvSpPr/>
           <p:nvPr/>
         </p:nvSpPr>
         <p:spPr>
           <a:xfrm>
-            <a:off x="3017520" y="2286000"/>
-            <a:ext cx="1965960" cy="1554480"/>
-          </a:xfrm>
-          <a:prstGeom prst="roundRect">
-            <a:avLst>
-              <a:gd name="adj" fmla="val 8000"/>
-            </a:avLst>
-          </a:prstGeom>
-          <a:solidFill>
-            <a:srgbClr val="0E1318"/>
-          </a:solidFill>
-          <a:ln w="12700">
-            <a:solidFill>
-              <a:srgbClr val="232A33"/>
-            </a:solidFill>
-          </a:ln>
-        </p:spPr>
-        <p:style>
-          <a:lnRef idx="1">
-            <a:schemeClr val="accent1"/>
-          </a:lnRef>
-          <a:fillRef idx="3">
-            <a:schemeClr val="accent1"/>
-          </a:fillRef>
-          <a:effectRef idx="2">
-            <a:schemeClr val="accent1"/>
-          </a:effectRef>
-          <a:fontRef idx="minor">
-            <a:schemeClr val="lt1"/>
-          </a:fontRef>
-        </p:style>
-        <p:txBody>
-          <a:bodyPr rtlCol="0" anchor="ctr"/>
-          <a:lstStyle/>
-          <a:p>
-            <a:pPr algn="ctr"/>
-          </a:p>
-        </p:txBody>
-      </p:sp>
-      <p:sp>
-        <p:nvSpPr>
-          <p:cNvPr id="8" name="TextBox 7"/>
-          <p:cNvSpPr txBox="1"/>
-          <p:nvPr/>
-        </p:nvSpPr>
-        <p:spPr>
-          <a:xfrm>
-            <a:off x="3017520" y="2606040"/>
-            <a:ext cx="1965960" cy="1097280"/>
-          </a:xfrm>
-          <a:prstGeom prst="rect">
-            <a:avLst/>
-          </a:prstGeom>
-          <a:noFill/>
-        </p:spPr>
-        <p:txBody>
-          <a:bodyPr wrap="square">
-            <a:spAutoFit/>
-          </a:bodyPr>
-          <a:lstStyle/>
-          <a:p>
-            <a:pPr algn="ctr"/>
-            <a:r>
-              <a:rPr sz="1700" b="1">
-                <a:solidFill>
-                  <a:srgbClr val="F2F4F5"/>
-                </a:solidFill>
-                <a:latin typeface="Inter"/>
-              </a:rPr>
-              <a:t>S2 BS
-Unet-effb4</a:t>
-            </a:r>
-          </a:p>
-        </p:txBody>
-      </p:sp>
-      <p:sp>
-        <p:nvSpPr>
-          <p:cNvPr id="9" name="TextBox 8"/>
-          <p:cNvSpPr txBox="1"/>
-          <p:nvPr/>
-        </p:nvSpPr>
-        <p:spPr>
-          <a:xfrm>
-            <a:off x="4983480" y="2788920"/>
-            <a:ext cx="365760" cy="457200"/>
-          </a:xfrm>
-          <a:prstGeom prst="rect">
-            <a:avLst/>
-          </a:prstGeom>
-          <a:noFill/>
-        </p:spPr>
-        <p:txBody>
-          <a:bodyPr wrap="square">
-            <a:spAutoFit/>
-          </a:bodyPr>
-          <a:lstStyle/>
-          <a:p>
-            <a:pPr algn="ctr"/>
-            <a:r>
-              <a:rPr sz="2600" b="0">
-                <a:solidFill>
-                  <a:srgbClr val="FF6B35"/>
-                </a:solidFill>
-                <a:latin typeface="Inter"/>
-              </a:rPr>
-              <a:t>→</a:t>
-            </a:r>
-          </a:p>
-        </p:txBody>
-      </p:sp>
-      <p:sp>
-        <p:nvSpPr>
-          <p:cNvPr id="10" name="Rounded Rectangle 9"/>
-          <p:cNvSpPr/>
-          <p:nvPr/>
-        </p:nvSpPr>
-        <p:spPr>
-          <a:xfrm>
-            <a:off x="5303520" y="2286000"/>
-            <a:ext cx="1965960" cy="1554480"/>
-          </a:xfrm>
-          <a:prstGeom prst="roundRect">
-            <a:avLst>
-              <a:gd name="adj" fmla="val 8000"/>
-            </a:avLst>
-          </a:prstGeom>
-          <a:solidFill>
-            <a:srgbClr val="0E1318"/>
-          </a:solidFill>
-          <a:ln w="12700">
-            <a:solidFill>
-              <a:srgbClr val="232A33"/>
-            </a:solidFill>
-          </a:ln>
-        </p:spPr>
-        <p:style>
-          <a:lnRef idx="1">
-            <a:schemeClr val="accent1"/>
-          </a:lnRef>
-          <a:fillRef idx="3">
-            <a:schemeClr val="accent1"/>
-          </a:fillRef>
-          <a:effectRef idx="2">
-            <a:schemeClr val="accent1"/>
-          </a:effectRef>
-          <a:fontRef idx="minor">
-            <a:schemeClr val="lt1"/>
-          </a:fontRef>
-        </p:style>
-        <p:txBody>
-          <a:bodyPr rtlCol="0" anchor="ctr"/>
-          <a:lstStyle/>
-          <a:p>
-            <a:pPr algn="ctr"/>
-          </a:p>
-        </p:txBody>
-      </p:sp>
-      <p:sp>
-        <p:nvSpPr>
-          <p:cNvPr id="11" name="TextBox 10"/>
-          <p:cNvSpPr txBox="1"/>
-          <p:nvPr/>
-        </p:nvSpPr>
-        <p:spPr>
-          <a:xfrm>
-            <a:off x="5303520" y="2606040"/>
-            <a:ext cx="1965960" cy="1097280"/>
-          </a:xfrm>
-          <a:prstGeom prst="rect">
-            <a:avLst/>
-          </a:prstGeom>
-          <a:noFill/>
-        </p:spPr>
-        <p:txBody>
-          <a:bodyPr wrap="square">
-            <a:spAutoFit/>
-          </a:bodyPr>
-          <a:lstStyle/>
-          <a:p>
-            <a:pPr algn="ctr"/>
-            <a:r>
-              <a:rPr sz="1700" b="1">
-                <a:solidFill>
-                  <a:srgbClr val="F2F4F5"/>
-                </a:solidFill>
-                <a:latin typeface="Inter"/>
-              </a:rPr>
-              <a:t>inference.py
-детерминирован</a:t>
-            </a:r>
-          </a:p>
-        </p:txBody>
-      </p:sp>
-      <p:sp>
-        <p:nvSpPr>
-          <p:cNvPr id="12" name="TextBox 11"/>
-          <p:cNvSpPr txBox="1"/>
-          <p:nvPr/>
-        </p:nvSpPr>
-        <p:spPr>
-          <a:xfrm>
-            <a:off x="7269480" y="2788920"/>
-            <a:ext cx="365760" cy="457200"/>
-          </a:xfrm>
-          <a:prstGeom prst="rect">
-            <a:avLst/>
-          </a:prstGeom>
-          <a:noFill/>
-        </p:spPr>
-        <p:txBody>
-          <a:bodyPr wrap="square">
-            <a:spAutoFit/>
-          </a:bodyPr>
-          <a:lstStyle/>
-          <a:p>
-            <a:pPr algn="ctr"/>
-            <a:r>
-              <a:rPr sz="2600" b="0">
-                <a:solidFill>
-                  <a:srgbClr val="FF6B35"/>
-                </a:solidFill>
-                <a:latin typeface="Inter"/>
-              </a:rPr>
-              <a:t>→</a:t>
-            </a:r>
-          </a:p>
-        </p:txBody>
-      </p:sp>
-      <p:sp>
-        <p:nvSpPr>
-          <p:cNvPr id="13" name="Rounded Rectangle 12"/>
-          <p:cNvSpPr/>
-          <p:nvPr/>
-        </p:nvSpPr>
-        <p:spPr>
-          <a:xfrm>
-            <a:off x="7589520" y="2286000"/>
-            <a:ext cx="1965960" cy="1554480"/>
-          </a:xfrm>
-          <a:prstGeom prst="roundRect">
-            <a:avLst>
-              <a:gd name="adj" fmla="val 8000"/>
-            </a:avLst>
-          </a:prstGeom>
-          <a:solidFill>
-            <a:srgbClr val="0E1318"/>
-          </a:solidFill>
-          <a:ln w="12700">
-            <a:solidFill>
-              <a:srgbClr val="232A33"/>
-            </a:solidFill>
-          </a:ln>
-        </p:spPr>
-        <p:style>
-          <a:lnRef idx="1">
-            <a:schemeClr val="accent1"/>
-          </a:lnRef>
-          <a:fillRef idx="3">
-            <a:schemeClr val="accent1"/>
-          </a:fillRef>
-          <a:effectRef idx="2">
-            <a:schemeClr val="accent1"/>
-          </a:effectRef>
-          <a:fontRef idx="minor">
-            <a:schemeClr val="lt1"/>
-          </a:fontRef>
-        </p:style>
-        <p:txBody>
-          <a:bodyPr rtlCol="0" anchor="ctr"/>
-          <a:lstStyle/>
-          <a:p>
-            <a:pPr algn="ctr"/>
-          </a:p>
-        </p:txBody>
-      </p:sp>
-      <p:sp>
-        <p:nvSpPr>
-          <p:cNvPr id="14" name="Oval 13"/>
-          <p:cNvSpPr/>
-          <p:nvPr/>
-        </p:nvSpPr>
-        <p:spPr>
-          <a:xfrm>
-            <a:off x="8458200" y="2468880"/>
-            <a:ext cx="146304" cy="146304"/>
+            <a:off x="5257800" y="457200"/>
+            <a:ext cx="128016" cy="128016"/>
           </a:xfrm>
           <a:prstGeom prst="ellipse">
             <a:avLst/>
@@ -5399,14 +5567,14 @@
       </p:sp>
       <p:sp>
         <p:nvSpPr>
-          <p:cNvPr id="15" name="TextBox 14"/>
+          <p:cNvPr id="4" name="TextBox 3"/>
           <p:cNvSpPr txBox="1"/>
           <p:nvPr/>
         </p:nvSpPr>
         <p:spPr>
           <a:xfrm>
-            <a:off x="7589520" y="2743200"/>
-            <a:ext cx="1965960" cy="1097280"/>
+            <a:off x="5486400" y="256032"/>
+            <a:ext cx="1463040" cy="320040"/>
           </a:xfrm>
           <a:prstGeom prst="rect">
             <a:avLst/>
@@ -5421,28 +5589,27 @@
           <a:p>
             <a:pPr algn="ctr"/>
             <a:r>
-              <a:rPr sz="1700" b="1">
+              <a:rPr sz="1400" b="1">
                 <a:solidFill>
                   <a:srgbClr val="F2F4F5"/>
                 </a:solidFill>
                 <a:latin typeface="Inter"/>
               </a:rPr>
-              <a:t>submission.csv
-447 строк</a:t>
-            </a:r>
-          </a:p>
-        </p:txBody>
-      </p:sp>
-      <p:sp>
-        <p:nvSpPr>
-          <p:cNvPr id="16" name="TextBox 15"/>
+              <a:t>ЖИМ НОГАМИ</a:t>
+            </a:r>
+          </a:p>
+        </p:txBody>
+      </p:sp>
+      <p:sp>
+        <p:nvSpPr>
+          <p:cNvPr id="5" name="TextBox 4"/>
           <p:cNvSpPr txBox="1"/>
           <p:nvPr/>
         </p:nvSpPr>
         <p:spPr>
           <a:xfrm>
-            <a:off x="9555480" y="2788920"/>
-            <a:ext cx="365760" cy="457200"/>
+            <a:off x="5486400" y="530352"/>
+            <a:ext cx="1463040" cy="274320"/>
           </a:xfrm>
           <a:prstGeom prst="rect">
             <a:avLst/>
@@ -5457,39 +5624,39 @@
           <a:p>
             <a:pPr algn="ctr"/>
             <a:r>
-              <a:rPr sz="2600" b="0">
-                <a:solidFill>
-                  <a:srgbClr val="FF6B35"/>
-                </a:solidFill>
-                <a:latin typeface="Inter"/>
-              </a:rPr>
-              <a:t>→</a:t>
-            </a:r>
-          </a:p>
-        </p:txBody>
-      </p:sp>
-      <p:sp>
-        <p:nvSpPr>
-          <p:cNvPr id="17" name="Rounded Rectangle 16"/>
+              <a:rPr sz="800" b="0">
+                <a:solidFill>
+                  <a:srgbClr val="69737D"/>
+                </a:solidFill>
+                <a:latin typeface="Inter"/>
+              </a:rPr>
+              <a:t>FIRE MONITOR · KOSMOHACK 2026</a:t>
+            </a:r>
+          </a:p>
+        </p:txBody>
+      </p:sp>
+      <p:sp>
+        <p:nvSpPr>
+          <p:cNvPr id="6" name="Rounded Rectangle 5"/>
           <p:cNvSpPr/>
           <p:nvPr/>
         </p:nvSpPr>
         <p:spPr>
           <a:xfrm>
-            <a:off x="9875520" y="2286000"/>
-            <a:ext cx="1965960" cy="1554480"/>
+            <a:off x="320040" y="1188720"/>
+            <a:ext cx="5852160" cy="4480560"/>
           </a:xfrm>
           <a:prstGeom prst="roundRect">
             <a:avLst>
-              <a:gd name="adj" fmla="val 8000"/>
+              <a:gd name="adj" fmla="val 9000"/>
             </a:avLst>
           </a:prstGeom>
           <a:solidFill>
-            <a:srgbClr val="0E1318"/>
+            <a:srgbClr val="0A0E12"/>
           </a:solidFill>
           <a:ln w="12700">
             <a:solidFill>
-              <a:srgbClr val="232A33"/>
+              <a:srgbClr val="2A333D"/>
             </a:solidFill>
           </a:ln>
         </p:spPr>
@@ -5517,14 +5684,14 @@
       </p:sp>
       <p:sp>
         <p:nvSpPr>
-          <p:cNvPr id="18" name="TextBox 17"/>
+          <p:cNvPr id="7" name="TextBox 6"/>
           <p:cNvSpPr txBox="1"/>
           <p:nvPr/>
         </p:nvSpPr>
         <p:spPr>
           <a:xfrm>
-            <a:off x="9875520" y="2606040"/>
-            <a:ext cx="1965960" cy="1097280"/>
+            <a:off x="594360" y="1325880"/>
+            <a:ext cx="914400" cy="274320"/>
           </a:xfrm>
           <a:prstGeom prst="rect">
             <a:avLst/>
@@ -5537,30 +5704,29 @@
           </a:bodyPr>
           <a:lstStyle/>
           <a:p>
-            <a:pPr algn="ctr"/>
-            <a:r>
-              <a:rPr sz="1700" b="1">
-                <a:solidFill>
-                  <a:srgbClr val="F2F4F5"/>
-                </a:solidFill>
-                <a:latin typeface="Inter"/>
-              </a:rPr>
-              <a:t>FastAPI +
-веб-карта</a:t>
-            </a:r>
-          </a:p>
-        </p:txBody>
-      </p:sp>
-      <p:sp>
-        <p:nvSpPr>
-          <p:cNvPr id="19" name="TextBox 18"/>
+            <a:pPr algn="l"/>
+            <a:r>
+              <a:rPr sz="1100" b="1">
+                <a:solidFill>
+                  <a:srgbClr val="69737D"/>
+                </a:solidFill>
+                <a:latin typeface="Inter"/>
+              </a:rPr>
+              <a:t>02</a:t>
+            </a:r>
+          </a:p>
+        </p:txBody>
+      </p:sp>
+      <p:sp>
+        <p:nvSpPr>
+          <p:cNvPr id="8" name="TextBox 7"/>
           <p:cNvSpPr txBox="1"/>
           <p:nvPr/>
         </p:nvSpPr>
         <p:spPr>
           <a:xfrm>
-            <a:off x="731520" y="4297680"/>
-            <a:ext cx="10698480" cy="1463040"/>
+            <a:off x="594360" y="1572768"/>
+            <a:ext cx="5303520" cy="457200"/>
           </a:xfrm>
           <a:prstGeom prst="rect">
             <a:avLst/>
@@ -5575,27 +5741,393 @@
           <a:p>
             <a:pPr algn="l"/>
             <a:r>
-              <a:rPr sz="1700" b="0">
+              <a:rPr sz="2100" b="1">
+                <a:solidFill>
+                  <a:srgbClr val="F2F4F5"/>
+                </a:solidFill>
+                <a:latin typeface="Inter"/>
+              </a:rPr>
+              <a:t>Конвейер</a:t>
+            </a:r>
+          </a:p>
+        </p:txBody>
+      </p:sp>
+      <p:sp>
+        <p:nvSpPr>
+          <p:cNvPr id="9" name="Oval 8"/>
+          <p:cNvSpPr/>
+          <p:nvPr/>
+        </p:nvSpPr>
+        <p:spPr>
+          <a:xfrm>
+            <a:off x="594360" y="2331720"/>
+            <a:ext cx="137160" cy="137160"/>
+          </a:xfrm>
+          <a:prstGeom prst="ellipse">
+            <a:avLst/>
+          </a:prstGeom>
+          <a:solidFill>
+            <a:srgbClr val="EF5B5B"/>
+          </a:solidFill>
+          <a:ln>
+            <a:noFill/>
+          </a:ln>
+        </p:spPr>
+        <p:style>
+          <a:lnRef idx="1">
+            <a:schemeClr val="accent1"/>
+          </a:lnRef>
+          <a:fillRef idx="3">
+            <a:schemeClr val="accent1"/>
+          </a:fillRef>
+          <a:effectRef idx="2">
+            <a:schemeClr val="accent1"/>
+          </a:effectRef>
+          <a:fontRef idx="minor">
+            <a:schemeClr val="lt1"/>
+          </a:fontRef>
+        </p:style>
+        <p:txBody>
+          <a:bodyPr rtlCol="0" anchor="ctr"/>
+          <a:lstStyle/>
+          <a:p>
+            <a:pPr algn="ctr"/>
+          </a:p>
+        </p:txBody>
+      </p:sp>
+      <p:sp>
+        <p:nvSpPr>
+          <p:cNvPr id="10" name="TextBox 9"/>
+          <p:cNvSpPr txBox="1"/>
+          <p:nvPr/>
+        </p:nvSpPr>
+        <p:spPr>
+          <a:xfrm>
+            <a:off x="868680" y="2194560"/>
+            <a:ext cx="5029200" cy="594360"/>
+          </a:xfrm>
+          <a:prstGeom prst="rect">
+            <a:avLst/>
+          </a:prstGeom>
+          <a:noFill/>
+        </p:spPr>
+        <p:txBody>
+          <a:bodyPr wrap="square">
+            <a:spAutoFit/>
+          </a:bodyPr>
+          <a:lstStyle/>
+          <a:p>
+            <a:pPr algn="l"/>
+            <a:r>
+              <a:rPr sz="1400" b="1">
+                <a:solidFill>
+                  <a:srgbClr val="F2F4F5"/>
+                </a:solidFill>
+                <a:latin typeface="Inter"/>
+              </a:rPr>
+              <a:t>VIIRS AF Unet</a:t>
+            </a:r>
+            <a:r>
+              <a:rPr sz="1100" b="0">
                 <a:solidFill>
                   <a:srgbClr val="69737D"/>
                 </a:solidFill>
                 <a:latin typeface="Inter"/>
               </a:rPr>
-              <a:t>Сплит по fire_event_id без утечек · сиды 19 · дрейф повтора ≤ 0.005</a:t>
-            </a:r>
-            <a:r>
-              <a:rPr sz="1700" b="0">
+              <a:t>
+I1–I5 + aux · 12 каналов · 295 сек</a:t>
+            </a:r>
+          </a:p>
+        </p:txBody>
+      </p:sp>
+      <p:sp>
+        <p:nvSpPr>
+          <p:cNvPr id="11" name="Oval 10"/>
+          <p:cNvSpPr/>
+          <p:nvPr/>
+        </p:nvSpPr>
+        <p:spPr>
+          <a:xfrm>
+            <a:off x="594360" y="3108960"/>
+            <a:ext cx="137160" cy="137160"/>
+          </a:xfrm>
+          <a:prstGeom prst="ellipse">
+            <a:avLst/>
+          </a:prstGeom>
+          <a:solidFill>
+            <a:srgbClr val="E6C65C"/>
+          </a:solidFill>
+          <a:ln>
+            <a:noFill/>
+          </a:ln>
+        </p:spPr>
+        <p:style>
+          <a:lnRef idx="1">
+            <a:schemeClr val="accent1"/>
+          </a:lnRef>
+          <a:fillRef idx="3">
+            <a:schemeClr val="accent1"/>
+          </a:fillRef>
+          <a:effectRef idx="2">
+            <a:schemeClr val="accent1"/>
+          </a:effectRef>
+          <a:fontRef idx="minor">
+            <a:schemeClr val="lt1"/>
+          </a:fontRef>
+        </p:style>
+        <p:txBody>
+          <a:bodyPr rtlCol="0" anchor="ctr"/>
+          <a:lstStyle/>
+          <a:p>
+            <a:pPr algn="ctr"/>
+          </a:p>
+        </p:txBody>
+      </p:sp>
+      <p:sp>
+        <p:nvSpPr>
+          <p:cNvPr id="12" name="TextBox 11"/>
+          <p:cNvSpPr txBox="1"/>
+          <p:nvPr/>
+        </p:nvSpPr>
+        <p:spPr>
+          <a:xfrm>
+            <a:off x="868680" y="2971800"/>
+            <a:ext cx="5029200" cy="594360"/>
+          </a:xfrm>
+          <a:prstGeom prst="rect">
+            <a:avLst/>
+          </a:prstGeom>
+          <a:noFill/>
+        </p:spPr>
+        <p:txBody>
+          <a:bodyPr wrap="square">
+            <a:spAutoFit/>
+          </a:bodyPr>
+          <a:lstStyle/>
+          <a:p>
+            <a:pPr algn="l"/>
+            <a:r>
+              <a:rPr sz="1400" b="1">
+                <a:solidFill>
+                  <a:srgbClr val="F2F4F5"/>
+                </a:solidFill>
+                <a:latin typeface="Inter"/>
+              </a:rPr>
+              <a:t>S2 BS Unet</a:t>
+            </a:r>
+            <a:r>
+              <a:rPr sz="1100" b="0">
                 <a:solidFill>
                   <a:srgbClr val="69737D"/>
                 </a:solidFill>
                 <a:latin typeface="Inter"/>
               </a:rPr>
               <a:t>
-Тест де-идентифицирован (§5.5): гео и даты не восстанавливаем — демо-привязка задокументирована</a:t>
-            </a:r>
-          </a:p>
-        </p:txBody>
-      </p:sp>
+27 каналов · argmax + cloud→0 + burn-gate</a:t>
+            </a:r>
+          </a:p>
+        </p:txBody>
+      </p:sp>
+      <p:sp>
+        <p:nvSpPr>
+          <p:cNvPr id="13" name="Oval 12"/>
+          <p:cNvSpPr/>
+          <p:nvPr/>
+        </p:nvSpPr>
+        <p:spPr>
+          <a:xfrm>
+            <a:off x="594360" y="3886200"/>
+            <a:ext cx="137160" cy="137160"/>
+          </a:xfrm>
+          <a:prstGeom prst="ellipse">
+            <a:avLst/>
+          </a:prstGeom>
+          <a:solidFill>
+            <a:srgbClr val="FF6B35"/>
+          </a:solidFill>
+          <a:ln>
+            <a:noFill/>
+          </a:ln>
+        </p:spPr>
+        <p:style>
+          <a:lnRef idx="1">
+            <a:schemeClr val="accent1"/>
+          </a:lnRef>
+          <a:fillRef idx="3">
+            <a:schemeClr val="accent1"/>
+          </a:fillRef>
+          <a:effectRef idx="2">
+            <a:schemeClr val="accent1"/>
+          </a:effectRef>
+          <a:fontRef idx="minor">
+            <a:schemeClr val="lt1"/>
+          </a:fontRef>
+        </p:style>
+        <p:txBody>
+          <a:bodyPr rtlCol="0" anchor="ctr"/>
+          <a:lstStyle/>
+          <a:p>
+            <a:pPr algn="ctr"/>
+          </a:p>
+        </p:txBody>
+      </p:sp>
+      <p:sp>
+        <p:nvSpPr>
+          <p:cNvPr id="14" name="TextBox 13"/>
+          <p:cNvSpPr txBox="1"/>
+          <p:nvPr/>
+        </p:nvSpPr>
+        <p:spPr>
+          <a:xfrm>
+            <a:off x="868680" y="3749040"/>
+            <a:ext cx="5029200" cy="594360"/>
+          </a:xfrm>
+          <a:prstGeom prst="rect">
+            <a:avLst/>
+          </a:prstGeom>
+          <a:noFill/>
+        </p:spPr>
+        <p:txBody>
+          <a:bodyPr wrap="square">
+            <a:spAutoFit/>
+          </a:bodyPr>
+          <a:lstStyle/>
+          <a:p>
+            <a:pPr algn="l"/>
+            <a:r>
+              <a:rPr sz="1400" b="1">
+                <a:solidFill>
+                  <a:srgbClr val="F2F4F5"/>
+                </a:solidFill>
+                <a:latin typeface="Inter"/>
+              </a:rPr>
+              <a:t>inference.py</a:t>
+            </a:r>
+            <a:r>
+              <a:rPr sz="1100" b="0">
+                <a:solidFill>
+                  <a:srgbClr val="69737D"/>
+                </a:solidFill>
+                <a:latin typeface="Inter"/>
+              </a:rPr>
+              <a:t>
+детерминирован · ~28 сек · дифф 0</a:t>
+            </a:r>
+          </a:p>
+        </p:txBody>
+      </p:sp>
+      <p:sp>
+        <p:nvSpPr>
+          <p:cNvPr id="15" name="Oval 14"/>
+          <p:cNvSpPr/>
+          <p:nvPr/>
+        </p:nvSpPr>
+        <p:spPr>
+          <a:xfrm>
+            <a:off x="594360" y="4663440"/>
+            <a:ext cx="137160" cy="137160"/>
+          </a:xfrm>
+          <a:prstGeom prst="ellipse">
+            <a:avLst/>
+          </a:prstGeom>
+          <a:solidFill>
+            <a:srgbClr val="62D99A"/>
+          </a:solidFill>
+          <a:ln>
+            <a:noFill/>
+          </a:ln>
+        </p:spPr>
+        <p:style>
+          <a:lnRef idx="1">
+            <a:schemeClr val="accent1"/>
+          </a:lnRef>
+          <a:fillRef idx="3">
+            <a:schemeClr val="accent1"/>
+          </a:fillRef>
+          <a:effectRef idx="2">
+            <a:schemeClr val="accent1"/>
+          </a:effectRef>
+          <a:fontRef idx="minor">
+            <a:schemeClr val="lt1"/>
+          </a:fontRef>
+        </p:style>
+        <p:txBody>
+          <a:bodyPr rtlCol="0" anchor="ctr"/>
+          <a:lstStyle/>
+          <a:p>
+            <a:pPr algn="ctr"/>
+          </a:p>
+        </p:txBody>
+      </p:sp>
+      <p:sp>
+        <p:nvSpPr>
+          <p:cNvPr id="16" name="TextBox 15"/>
+          <p:cNvSpPr txBox="1"/>
+          <p:nvPr/>
+        </p:nvSpPr>
+        <p:spPr>
+          <a:xfrm>
+            <a:off x="868680" y="4526280"/>
+            <a:ext cx="5029200" cy="594360"/>
+          </a:xfrm>
+          <a:prstGeom prst="rect">
+            <a:avLst/>
+          </a:prstGeom>
+          <a:noFill/>
+        </p:spPr>
+        <p:txBody>
+          <a:bodyPr wrap="square">
+            <a:spAutoFit/>
+          </a:bodyPr>
+          <a:lstStyle/>
+          <a:p>
+            <a:pPr algn="l"/>
+            <a:r>
+              <a:rPr sz="1400" b="1">
+                <a:solidFill>
+                  <a:srgbClr val="F2F4F5"/>
+                </a:solidFill>
+                <a:latin typeface="Inter"/>
+              </a:rPr>
+              <a:t>submission.csv</a:t>
+            </a:r>
+            <a:r>
+              <a:rPr sz="1100" b="0">
+                <a:solidFill>
+                  <a:srgbClr val="69737D"/>
+                </a:solidFill>
+                <a:latin typeface="Inter"/>
+              </a:rPr>
+              <a:t>
+447 строк · RLE строгий · md5 97b86c67</a:t>
+            </a:r>
+          </a:p>
+        </p:txBody>
+      </p:sp>
+      <p:pic>
+        <p:nvPicPr>
+          <p:cNvPr id="17" name="Picture 16" descr="af_viz_sample.png"/>
+          <p:cNvPicPr>
+            <a:picLocks noChangeAspect="1"/>
+          </p:cNvPicPr>
+          <p:nvPr/>
+        </p:nvPicPr>
+        <p:blipFill>
+          <a:blip r:embed="rId2"/>
+          <a:stretch>
+            <a:fillRect/>
+          </a:stretch>
+        </p:blipFill>
+        <p:spPr>
+          <a:xfrm>
+            <a:off x="6675120" y="1188720"/>
+            <a:ext cx="5212080" cy="1737360"/>
+          </a:xfrm>
+          <a:prstGeom prst="rect">
+            <a:avLst/>
+          </a:prstGeom>
+        </p:spPr>
+      </p:pic>
     </p:spTree>
   </p:cSld>
   <p:clrMapOvr>
@@ -5624,14 +6156,104 @@
       <p:grpSpPr/>
       <p:sp>
         <p:nvSpPr>
-          <p:cNvPr id="2" name="TextBox 1"/>
+          <p:cNvPr id="2" name="Rounded Rectangle 1"/>
+          <p:cNvSpPr/>
+          <p:nvPr/>
+        </p:nvSpPr>
+        <p:spPr>
+          <a:xfrm>
+            <a:off x="5074920" y="228600"/>
+            <a:ext cx="2057400" cy="685800"/>
+          </a:xfrm>
+          <a:prstGeom prst="roundRect">
+            <a:avLst>
+              <a:gd name="adj" fmla="val 9000"/>
+            </a:avLst>
+          </a:prstGeom>
+          <a:solidFill>
+            <a:srgbClr val="0A0E12"/>
+          </a:solidFill>
+          <a:ln w="12700">
+            <a:solidFill>
+              <a:srgbClr val="2A333D"/>
+            </a:solidFill>
+          </a:ln>
+        </p:spPr>
+        <p:style>
+          <a:lnRef idx="1">
+            <a:schemeClr val="accent1"/>
+          </a:lnRef>
+          <a:fillRef idx="3">
+            <a:schemeClr val="accent1"/>
+          </a:fillRef>
+          <a:effectRef idx="2">
+            <a:schemeClr val="accent1"/>
+          </a:effectRef>
+          <a:fontRef idx="minor">
+            <a:schemeClr val="lt1"/>
+          </a:fontRef>
+        </p:style>
+        <p:txBody>
+          <a:bodyPr rtlCol="0" anchor="ctr"/>
+          <a:lstStyle/>
+          <a:p>
+            <a:pPr algn="ctr"/>
+          </a:p>
+        </p:txBody>
+      </p:sp>
+      <p:sp>
+        <p:nvSpPr>
+          <p:cNvPr id="3" name="Oval 2"/>
+          <p:cNvSpPr/>
+          <p:nvPr/>
+        </p:nvSpPr>
+        <p:spPr>
+          <a:xfrm>
+            <a:off x="5257800" y="457200"/>
+            <a:ext cx="128016" cy="128016"/>
+          </a:xfrm>
+          <a:prstGeom prst="ellipse">
+            <a:avLst/>
+          </a:prstGeom>
+          <a:solidFill>
+            <a:srgbClr val="62D99A"/>
+          </a:solidFill>
+          <a:ln>
+            <a:noFill/>
+          </a:ln>
+        </p:spPr>
+        <p:style>
+          <a:lnRef idx="1">
+            <a:schemeClr val="accent1"/>
+          </a:lnRef>
+          <a:fillRef idx="3">
+            <a:schemeClr val="accent1"/>
+          </a:fillRef>
+          <a:effectRef idx="2">
+            <a:schemeClr val="accent1"/>
+          </a:effectRef>
+          <a:fontRef idx="minor">
+            <a:schemeClr val="lt1"/>
+          </a:fontRef>
+        </p:style>
+        <p:txBody>
+          <a:bodyPr rtlCol="0" anchor="ctr"/>
+          <a:lstStyle/>
+          <a:p>
+            <a:pPr algn="ctr"/>
+          </a:p>
+        </p:txBody>
+      </p:sp>
+      <p:sp>
+        <p:nvSpPr>
+          <p:cNvPr id="4" name="TextBox 3"/>
           <p:cNvSpPr txBox="1"/>
           <p:nvPr/>
         </p:nvSpPr>
         <p:spPr>
           <a:xfrm>
-            <a:off x="731520" y="411480"/>
-            <a:ext cx="10698480" cy="320040"/>
+            <a:off x="5486400" y="256032"/>
+            <a:ext cx="1463040" cy="320040"/>
           </a:xfrm>
           <a:prstGeom prst="rect">
             <a:avLst/>
@@ -5644,38 +6266,29 @@
           </a:bodyPr>
           <a:lstStyle/>
           <a:p>
-            <a:pPr algn="l"/>
-            <a:r>
-              <a:rPr sz="1300" b="1">
-                <a:solidFill>
-                  <a:srgbClr val="69737D"/>
-                </a:solidFill>
-                <a:latin typeface="Inter"/>
-              </a:rPr>
-              <a:t>03  </a:t>
-            </a:r>
-            <a:r>
-              <a:rPr sz="1300" b="1">
-                <a:solidFill>
-                  <a:srgbClr val="69737D"/>
-                </a:solidFill>
-                <a:latin typeface="Inter"/>
-              </a:rPr>
-              <a:t>МОДУЛЬ AF · ACTIVE FIRE</a:t>
-            </a:r>
-          </a:p>
-        </p:txBody>
-      </p:sp>
-      <p:sp>
-        <p:nvSpPr>
-          <p:cNvPr id="3" name="TextBox 2"/>
+            <a:pPr algn="ctr"/>
+            <a:r>
+              <a:rPr sz="1400" b="1">
+                <a:solidFill>
+                  <a:srgbClr val="F2F4F5"/>
+                </a:solidFill>
+                <a:latin typeface="Inter"/>
+              </a:rPr>
+              <a:t>ЖИМ НОГАМИ</a:t>
+            </a:r>
+          </a:p>
+        </p:txBody>
+      </p:sp>
+      <p:sp>
+        <p:nvSpPr>
+          <p:cNvPr id="5" name="TextBox 4"/>
           <p:cNvSpPr txBox="1"/>
           <p:nvPr/>
         </p:nvSpPr>
         <p:spPr>
           <a:xfrm>
-            <a:off x="731520" y="777240"/>
-            <a:ext cx="10698480" cy="914400"/>
+            <a:off x="5486400" y="530352"/>
+            <a:ext cx="1463040" cy="274320"/>
           </a:xfrm>
           <a:prstGeom prst="rect">
             <a:avLst/>
@@ -5688,29 +6301,410 @@
           </a:bodyPr>
           <a:lstStyle/>
           <a:p>
+            <a:pPr algn="ctr"/>
+            <a:r>
+              <a:rPr sz="800" b="0">
+                <a:solidFill>
+                  <a:srgbClr val="69737D"/>
+                </a:solidFill>
+                <a:latin typeface="Inter"/>
+              </a:rPr>
+              <a:t>FIRE MONITOR · KOSMOHACK 2026</a:t>
+            </a:r>
+          </a:p>
+        </p:txBody>
+      </p:sp>
+      <p:sp>
+        <p:nvSpPr>
+          <p:cNvPr id="6" name="Rounded Rectangle 5"/>
+          <p:cNvSpPr/>
+          <p:nvPr/>
+        </p:nvSpPr>
+        <p:spPr>
+          <a:xfrm>
+            <a:off x="320040" y="1188720"/>
+            <a:ext cx="5852160" cy="4480560"/>
+          </a:xfrm>
+          <a:prstGeom prst="roundRect">
+            <a:avLst>
+              <a:gd name="adj" fmla="val 9000"/>
+            </a:avLst>
+          </a:prstGeom>
+          <a:solidFill>
+            <a:srgbClr val="0A0E12"/>
+          </a:solidFill>
+          <a:ln w="12700">
+            <a:solidFill>
+              <a:srgbClr val="2A333D"/>
+            </a:solidFill>
+          </a:ln>
+        </p:spPr>
+        <p:style>
+          <a:lnRef idx="1">
+            <a:schemeClr val="accent1"/>
+          </a:lnRef>
+          <a:fillRef idx="3">
+            <a:schemeClr val="accent1"/>
+          </a:fillRef>
+          <a:effectRef idx="2">
+            <a:schemeClr val="accent1"/>
+          </a:effectRef>
+          <a:fontRef idx="minor">
+            <a:schemeClr val="lt1"/>
+          </a:fontRef>
+        </p:style>
+        <p:txBody>
+          <a:bodyPr rtlCol="0" anchor="ctr"/>
+          <a:lstStyle/>
+          <a:p>
+            <a:pPr algn="ctr"/>
+          </a:p>
+        </p:txBody>
+      </p:sp>
+      <p:sp>
+        <p:nvSpPr>
+          <p:cNvPr id="7" name="TextBox 6"/>
+          <p:cNvSpPr txBox="1"/>
+          <p:nvPr/>
+        </p:nvSpPr>
+        <p:spPr>
+          <a:xfrm>
+            <a:off x="594360" y="1325880"/>
+            <a:ext cx="914400" cy="274320"/>
+          </a:xfrm>
+          <a:prstGeom prst="rect">
+            <a:avLst/>
+          </a:prstGeom>
+          <a:noFill/>
+        </p:spPr>
+        <p:txBody>
+          <a:bodyPr wrap="square">
+            <a:spAutoFit/>
+          </a:bodyPr>
+          <a:lstStyle/>
+          <a:p>
             <a:pPr algn="l"/>
             <a:r>
-              <a:rPr sz="3400" b="1">
+              <a:rPr sz="1100" b="1">
+                <a:solidFill>
+                  <a:srgbClr val="69737D"/>
+                </a:solidFill>
+                <a:latin typeface="Inter"/>
+              </a:rPr>
+              <a:t>03</a:t>
+            </a:r>
+          </a:p>
+        </p:txBody>
+      </p:sp>
+      <p:sp>
+        <p:nvSpPr>
+          <p:cNvPr id="8" name="TextBox 7"/>
+          <p:cNvSpPr txBox="1"/>
+          <p:nvPr/>
+        </p:nvSpPr>
+        <p:spPr>
+          <a:xfrm>
+            <a:off x="594360" y="1572768"/>
+            <a:ext cx="5303520" cy="457200"/>
+          </a:xfrm>
+          <a:prstGeom prst="rect">
+            <a:avLst/>
+          </a:prstGeom>
+          <a:noFill/>
+        </p:spPr>
+        <p:txBody>
+          <a:bodyPr wrap="square">
+            <a:spAutoFit/>
+          </a:bodyPr>
+          <a:lstStyle/>
+          <a:p>
+            <a:pPr algn="l"/>
+            <a:r>
+              <a:rPr sz="2100" b="1">
                 <a:solidFill>
                   <a:srgbClr val="F2F4F5"/>
                 </a:solidFill>
                 <a:latin typeface="Inter"/>
               </a:rPr>
-              <a:t>Горение: F1 0.8434</a:t>
-            </a:r>
-          </a:p>
-        </p:txBody>
-      </p:sp>
-      <p:sp>
-        <p:nvSpPr>
-          <p:cNvPr id="4" name="Oval 3"/>
+              <a:t>Модуль AF</a:t>
+            </a:r>
+          </a:p>
+        </p:txBody>
+      </p:sp>
+      <p:sp>
+        <p:nvSpPr>
+          <p:cNvPr id="9" name="Oval 8"/>
           <p:cNvSpPr/>
           <p:nvPr/>
         </p:nvSpPr>
         <p:spPr>
           <a:xfrm>
-            <a:off x="914400" y="2029968"/>
-            <a:ext cx="146304" cy="146304"/>
+            <a:off x="594360" y="2331720"/>
+            <a:ext cx="137160" cy="137160"/>
+          </a:xfrm>
+          <a:prstGeom prst="ellipse">
+            <a:avLst/>
+          </a:prstGeom>
+          <a:solidFill>
+            <a:srgbClr val="62D99A"/>
+          </a:solidFill>
+          <a:ln>
+            <a:noFill/>
+          </a:ln>
+        </p:spPr>
+        <p:style>
+          <a:lnRef idx="1">
+            <a:schemeClr val="accent1"/>
+          </a:lnRef>
+          <a:fillRef idx="3">
+            <a:schemeClr val="accent1"/>
+          </a:fillRef>
+          <a:effectRef idx="2">
+            <a:schemeClr val="accent1"/>
+          </a:effectRef>
+          <a:fontRef idx="minor">
+            <a:schemeClr val="lt1"/>
+          </a:fontRef>
+        </p:style>
+        <p:txBody>
+          <a:bodyPr rtlCol="0" anchor="ctr"/>
+          <a:lstStyle/>
+          <a:p>
+            <a:pPr algn="ctr"/>
+          </a:p>
+        </p:txBody>
+      </p:sp>
+      <p:sp>
+        <p:nvSpPr>
+          <p:cNvPr id="10" name="TextBox 9"/>
+          <p:cNvSpPr txBox="1"/>
+          <p:nvPr/>
+        </p:nvSpPr>
+        <p:spPr>
+          <a:xfrm>
+            <a:off x="868680" y="2194560"/>
+            <a:ext cx="5029200" cy="594360"/>
+          </a:xfrm>
+          <a:prstGeom prst="rect">
+            <a:avLst/>
+          </a:prstGeom>
+          <a:noFill/>
+        </p:spPr>
+        <p:txBody>
+          <a:bodyPr wrap="square">
+            <a:spAutoFit/>
+          </a:bodyPr>
+          <a:lstStyle/>
+          <a:p>
+            <a:pPr algn="l"/>
+            <a:r>
+              <a:rPr sz="1400" b="1">
+                <a:solidFill>
+                  <a:srgbClr val="F2F4F5"/>
+                </a:solidFill>
+                <a:latin typeface="Inter"/>
+              </a:rPr>
+              <a:t>F1 0.8434</a:t>
+            </a:r>
+            <a:r>
+              <a:rPr sz="1100" b="0">
+                <a:solidFill>
+                  <a:srgbClr val="69737D"/>
+                </a:solidFill>
+                <a:latin typeface="Inter"/>
+              </a:rPr>
+              <a:t>
+day 0.8519 / night 0.803 · порог 0.15 по micro-F1</a:t>
+            </a:r>
+          </a:p>
+        </p:txBody>
+      </p:sp>
+      <p:sp>
+        <p:nvSpPr>
+          <p:cNvPr id="11" name="Oval 10"/>
+          <p:cNvSpPr/>
+          <p:nvPr/>
+        </p:nvSpPr>
+        <p:spPr>
+          <a:xfrm>
+            <a:off x="594360" y="3108960"/>
+            <a:ext cx="137160" cy="137160"/>
+          </a:xfrm>
+          <a:prstGeom prst="ellipse">
+            <a:avLst/>
+          </a:prstGeom>
+          <a:solidFill>
+            <a:srgbClr val="E6C65C"/>
+          </a:solidFill>
+          <a:ln>
+            <a:noFill/>
+          </a:ln>
+        </p:spPr>
+        <p:style>
+          <a:lnRef idx="1">
+            <a:schemeClr val="accent1"/>
+          </a:lnRef>
+          <a:fillRef idx="3">
+            <a:schemeClr val="accent1"/>
+          </a:fillRef>
+          <a:effectRef idx="2">
+            <a:schemeClr val="accent1"/>
+          </a:effectRef>
+          <a:fontRef idx="minor">
+            <a:schemeClr val="lt1"/>
+          </a:fontRef>
+        </p:style>
+        <p:txBody>
+          <a:bodyPr rtlCol="0" anchor="ctr"/>
+          <a:lstStyle/>
+          <a:p>
+            <a:pPr algn="ctr"/>
+          </a:p>
+        </p:txBody>
+      </p:sp>
+      <p:sp>
+        <p:nvSpPr>
+          <p:cNvPr id="12" name="TextBox 11"/>
+          <p:cNvSpPr txBox="1"/>
+          <p:nvPr/>
+        </p:nvSpPr>
+        <p:spPr>
+          <a:xfrm>
+            <a:off x="868680" y="2971800"/>
+            <a:ext cx="5029200" cy="594360"/>
+          </a:xfrm>
+          <a:prstGeom prst="rect">
+            <a:avLst/>
+          </a:prstGeom>
+          <a:noFill/>
+        </p:spPr>
+        <p:txBody>
+          <a:bodyPr wrap="square">
+            <a:spAutoFit/>
+          </a:bodyPr>
+          <a:lstStyle/>
+          <a:p>
+            <a:pPr algn="l"/>
+            <a:r>
+              <a:rPr sz="1400" b="1">
+                <a:solidFill>
+                  <a:srgbClr val="F2F4F5"/>
+                </a:solidFill>
+                <a:latin typeface="Inter"/>
+              </a:rPr>
+              <a:t>WC-гейт</a:t>
+            </a:r>
+            <a:r>
+              <a:rPr sz="1100" b="0">
+                <a:solidFill>
+                  <a:srgbClr val="69737D"/>
+                </a:solidFill>
+                <a:latin typeface="Inter"/>
+              </a:rPr>
+              <a:t>
+застройка только при I4 ≥ 310K (+0.0007)</a:t>
+            </a:r>
+          </a:p>
+        </p:txBody>
+      </p:sp>
+      <p:sp>
+        <p:nvSpPr>
+          <p:cNvPr id="13" name="Oval 12"/>
+          <p:cNvSpPr/>
+          <p:nvPr/>
+        </p:nvSpPr>
+        <p:spPr>
+          <a:xfrm>
+            <a:off x="594360" y="3886200"/>
+            <a:ext cx="137160" cy="137160"/>
+          </a:xfrm>
+          <a:prstGeom prst="ellipse">
+            <a:avLst/>
+          </a:prstGeom>
+          <a:solidFill>
+            <a:srgbClr val="EF5B5B"/>
+          </a:solidFill>
+          <a:ln>
+            <a:noFill/>
+          </a:ln>
+        </p:spPr>
+        <p:style>
+          <a:lnRef idx="1">
+            <a:schemeClr val="accent1"/>
+          </a:lnRef>
+          <a:fillRef idx="3">
+            <a:schemeClr val="accent1"/>
+          </a:fillRef>
+          <a:effectRef idx="2">
+            <a:schemeClr val="accent1"/>
+          </a:effectRef>
+          <a:fontRef idx="minor">
+            <a:schemeClr val="lt1"/>
+          </a:fontRef>
+        </p:style>
+        <p:txBody>
+          <a:bodyPr rtlCol="0" anchor="ctr"/>
+          <a:lstStyle/>
+          <a:p>
+            <a:pPr algn="ctr"/>
+          </a:p>
+        </p:txBody>
+      </p:sp>
+      <p:sp>
+        <p:nvSpPr>
+          <p:cNvPr id="14" name="TextBox 13"/>
+          <p:cNvSpPr txBox="1"/>
+          <p:nvPr/>
+        </p:nvSpPr>
+        <p:spPr>
+          <a:xfrm>
+            <a:off x="868680" y="3749040"/>
+            <a:ext cx="5029200" cy="594360"/>
+          </a:xfrm>
+          <a:prstGeom prst="rect">
+            <a:avLst/>
+          </a:prstGeom>
+          <a:noFill/>
+        </p:spPr>
+        <p:txBody>
+          <a:bodyPr wrap="square">
+            <a:spAutoFit/>
+          </a:bodyPr>
+          <a:lstStyle/>
+          <a:p>
+            <a:pPr algn="l"/>
+            <a:r>
+              <a:rPr sz="1400" b="1">
+                <a:solidFill>
+                  <a:srgbClr val="F2F4F5"/>
+                </a:solidFill>
+                <a:latin typeface="Inter"/>
+              </a:rPr>
+              <a:t>Честно</a:t>
+            </a:r>
+            <a:r>
+              <a:rPr sz="1100" b="0">
+                <a:solidFill>
+                  <a:srgbClr val="69737D"/>
+                </a:solidFill>
+                <a:latin typeface="Inter"/>
+              </a:rPr>
+              <a:t>
+факелы на одном снимке неотличимы — Fig.4</a:t>
+            </a:r>
+          </a:p>
+        </p:txBody>
+      </p:sp>
+      <p:sp>
+        <p:nvSpPr>
+          <p:cNvPr id="15" name="Oval 14"/>
+          <p:cNvSpPr/>
+          <p:nvPr/>
+        </p:nvSpPr>
+        <p:spPr>
+          <a:xfrm>
+            <a:off x="594360" y="4663440"/>
+            <a:ext cx="137160" cy="137160"/>
           </a:xfrm>
           <a:prstGeom prst="ellipse">
             <a:avLst/>
@@ -5746,14 +6740,14 @@
       </p:sp>
       <p:sp>
         <p:nvSpPr>
-          <p:cNvPr id="5" name="TextBox 4"/>
+          <p:cNvPr id="16" name="TextBox 15"/>
           <p:cNvSpPr txBox="1"/>
           <p:nvPr/>
         </p:nvSpPr>
         <p:spPr>
           <a:xfrm>
-            <a:off x="1234440" y="1865376"/>
-            <a:ext cx="6583680" cy="640080"/>
+            <a:off x="868680" y="4526280"/>
+            <a:ext cx="5029200" cy="594360"/>
           </a:xfrm>
           <a:prstGeom prst="rect">
             <a:avLst/>
@@ -5768,254 +6762,30 @@
           <a:p>
             <a:pPr algn="l"/>
             <a:r>
-              <a:rPr sz="1600" b="0">
-                <a:solidFill>
-                  <a:srgbClr val="A4ADB5"/>
-                </a:solidFill>
-                <a:latin typeface="Inter"/>
-              </a:rPr>
-              <a:t>Вход 12 каналов: I1–I3, I4, I4−I5, landcover / DEM / ERA5 / day-night / valid · I4 clip 367K</a:t>
-            </a:r>
-          </a:p>
-        </p:txBody>
-      </p:sp>
-      <p:sp>
-        <p:nvSpPr>
-          <p:cNvPr id="6" name="Oval 5"/>
-          <p:cNvSpPr/>
-          <p:nvPr/>
-        </p:nvSpPr>
-        <p:spPr>
-          <a:xfrm>
-            <a:off x="914400" y="2743200"/>
-            <a:ext cx="146304" cy="146304"/>
-          </a:xfrm>
-          <a:prstGeom prst="ellipse">
-            <a:avLst/>
-          </a:prstGeom>
-          <a:solidFill>
-            <a:srgbClr val="FF6B35"/>
-          </a:solidFill>
-          <a:ln>
-            <a:noFill/>
-          </a:ln>
-        </p:spPr>
-        <p:style>
-          <a:lnRef idx="1">
-            <a:schemeClr val="accent1"/>
-          </a:lnRef>
-          <a:fillRef idx="3">
-            <a:schemeClr val="accent1"/>
-          </a:fillRef>
-          <a:effectRef idx="2">
-            <a:schemeClr val="accent1"/>
-          </a:effectRef>
-          <a:fontRef idx="minor">
-            <a:schemeClr val="lt1"/>
-          </a:fontRef>
-        </p:style>
-        <p:txBody>
-          <a:bodyPr rtlCol="0" anchor="ctr"/>
-          <a:lstStyle/>
-          <a:p>
-            <a:pPr algn="ctr"/>
-          </a:p>
-        </p:txBody>
-      </p:sp>
-      <p:sp>
-        <p:nvSpPr>
-          <p:cNvPr id="7" name="TextBox 6"/>
-          <p:cNvSpPr txBox="1"/>
-          <p:nvPr/>
-        </p:nvSpPr>
-        <p:spPr>
-          <a:xfrm>
-            <a:off x="1234440" y="2578608"/>
-            <a:ext cx="6583680" cy="640080"/>
-          </a:xfrm>
-          <a:prstGeom prst="rect">
-            <a:avLst/>
-          </a:prstGeom>
-          <a:noFill/>
-        </p:spPr>
-        <p:txBody>
-          <a:bodyPr wrap="square">
-            <a:spAutoFit/>
-          </a:bodyPr>
-          <a:lstStyle/>
-          <a:p>
-            <a:pPr algn="l"/>
-            <a:r>
-              <a:rPr sz="1600" b="0">
-                <a:solidFill>
-                  <a:srgbClr val="A4ADB5"/>
-                </a:solidFill>
-                <a:latin typeface="Inter"/>
-              </a:rPr>
-              <a:t>Dice+Focal · oversample позитивов ×3 · AMP · всё обучение — 295 секунд</a:t>
-            </a:r>
-          </a:p>
-        </p:txBody>
-      </p:sp>
-      <p:sp>
-        <p:nvSpPr>
-          <p:cNvPr id="8" name="Oval 7"/>
-          <p:cNvSpPr/>
-          <p:nvPr/>
-        </p:nvSpPr>
-        <p:spPr>
-          <a:xfrm>
-            <a:off x="914400" y="3456432"/>
-            <a:ext cx="146304" cy="146304"/>
-          </a:xfrm>
-          <a:prstGeom prst="ellipse">
-            <a:avLst/>
-          </a:prstGeom>
-          <a:solidFill>
-            <a:srgbClr val="FF6B35"/>
-          </a:solidFill>
-          <a:ln>
-            <a:noFill/>
-          </a:ln>
-        </p:spPr>
-        <p:style>
-          <a:lnRef idx="1">
-            <a:schemeClr val="accent1"/>
-          </a:lnRef>
-          <a:fillRef idx="3">
-            <a:schemeClr val="accent1"/>
-          </a:fillRef>
-          <a:effectRef idx="2">
-            <a:schemeClr val="accent1"/>
-          </a:effectRef>
-          <a:fontRef idx="minor">
-            <a:schemeClr val="lt1"/>
-          </a:fontRef>
-        </p:style>
-        <p:txBody>
-          <a:bodyPr rtlCol="0" anchor="ctr"/>
-          <a:lstStyle/>
-          <a:p>
-            <a:pPr algn="ctr"/>
-          </a:p>
-        </p:txBody>
-      </p:sp>
-      <p:sp>
-        <p:nvSpPr>
-          <p:cNvPr id="9" name="TextBox 8"/>
-          <p:cNvSpPr txBox="1"/>
-          <p:nvPr/>
-        </p:nvSpPr>
-        <p:spPr>
-          <a:xfrm>
-            <a:off x="1234440" y="3291840"/>
-            <a:ext cx="6583680" cy="640080"/>
-          </a:xfrm>
-          <a:prstGeom prst="rect">
-            <a:avLst/>
-          </a:prstGeom>
-          <a:noFill/>
-        </p:spPr>
-        <p:txBody>
-          <a:bodyPr wrap="square">
-            <a:spAutoFit/>
-          </a:bodyPr>
-          <a:lstStyle/>
-          <a:p>
-            <a:pPr algn="l"/>
-            <a:r>
-              <a:rPr sz="1600" b="0">
-                <a:solidFill>
-                  <a:srgbClr val="A4ADB5"/>
-                </a:solidFill>
-                <a:latin typeface="Inter"/>
-              </a:rPr>
-              <a:t>Порог 0.15 по micro-F1 + WC-гейт «застройка только при I4 ≥ 310K»</a:t>
-            </a:r>
-          </a:p>
-        </p:txBody>
-      </p:sp>
-      <p:sp>
-        <p:nvSpPr>
-          <p:cNvPr id="10" name="Oval 9"/>
-          <p:cNvSpPr/>
-          <p:nvPr/>
-        </p:nvSpPr>
-        <p:spPr>
-          <a:xfrm>
-            <a:off x="914400" y="4169663"/>
-            <a:ext cx="146304" cy="146304"/>
-          </a:xfrm>
-          <a:prstGeom prst="ellipse">
-            <a:avLst/>
-          </a:prstGeom>
-          <a:solidFill>
-            <a:srgbClr val="FF6B35"/>
-          </a:solidFill>
-          <a:ln>
-            <a:noFill/>
-          </a:ln>
-        </p:spPr>
-        <p:style>
-          <a:lnRef idx="1">
-            <a:schemeClr val="accent1"/>
-          </a:lnRef>
-          <a:fillRef idx="3">
-            <a:schemeClr val="accent1"/>
-          </a:fillRef>
-          <a:effectRef idx="2">
-            <a:schemeClr val="accent1"/>
-          </a:effectRef>
-          <a:fontRef idx="minor">
-            <a:schemeClr val="lt1"/>
-          </a:fontRef>
-        </p:style>
-        <p:txBody>
-          <a:bodyPr rtlCol="0" anchor="ctr"/>
-          <a:lstStyle/>
-          <a:p>
-            <a:pPr algn="ctr"/>
-          </a:p>
-        </p:txBody>
-      </p:sp>
-      <p:sp>
-        <p:nvSpPr>
-          <p:cNvPr id="11" name="TextBox 10"/>
-          <p:cNvSpPr txBox="1"/>
-          <p:nvPr/>
-        </p:nvSpPr>
-        <p:spPr>
-          <a:xfrm>
-            <a:off x="1234440" y="4005072"/>
-            <a:ext cx="6583680" cy="640080"/>
-          </a:xfrm>
-          <a:prstGeom prst="rect">
-            <a:avLst/>
-          </a:prstGeom>
-          <a:noFill/>
-        </p:spPr>
-        <p:txBody>
-          <a:bodyPr wrap="square">
-            <a:spAutoFit/>
-          </a:bodyPr>
-          <a:lstStyle/>
-          <a:p>
-            <a:pPr algn="l"/>
-            <a:r>
-              <a:rPr sz="1600" b="0">
-                <a:solidFill>
-                  <a:srgbClr val="A4ADB5"/>
-                </a:solidFill>
-                <a:latin typeface="Inter"/>
-              </a:rPr>
-              <a:t>Day 0.8519 / Night 0.803 — факелы на одном снимке неотличимы (Fig.4), честное ограничение</a:t>
+              <a:rPr sz="1400" b="1">
+                <a:solidFill>
+                  <a:srgbClr val="F2F4F5"/>
+                </a:solidFill>
+                <a:latin typeface="Inter"/>
+              </a:rPr>
+              <a:t>Сплит</a:t>
+            </a:r>
+            <a:r>
+              <a:rPr sz="1100" b="0">
+                <a:solidFill>
+                  <a:srgbClr val="69737D"/>
+                </a:solidFill>
+                <a:latin typeface="Inter"/>
+              </a:rPr>
+              <a:t>
+по fire_event_id · сиды 19</a:t>
             </a:r>
           </a:p>
         </p:txBody>
       </p:sp>
       <p:pic>
         <p:nvPicPr>
-          <p:cNvPr id="12" name="Picture 11" descr="af_viz_sample.png"/>
+          <p:cNvPr id="17" name="Picture 16" descr="01-map-full.png"/>
           <p:cNvPicPr>
             <a:picLocks noChangeAspect="1"/>
           </p:cNvPicPr>
@@ -6029,8 +6799,8 @@
         </p:blipFill>
         <p:spPr>
           <a:xfrm>
-            <a:off x="8229600" y="1920240"/>
-            <a:ext cx="3291840" cy="1097280"/>
+            <a:off x="6675120" y="1188720"/>
+            <a:ext cx="5212080" cy="2931795"/>
           </a:xfrm>
           <a:prstGeom prst="rect">
             <a:avLst/>
@@ -6065,14 +6835,104 @@
       <p:grpSpPr/>
       <p:sp>
         <p:nvSpPr>
-          <p:cNvPr id="2" name="TextBox 1"/>
+          <p:cNvPr id="2" name="Rounded Rectangle 1"/>
+          <p:cNvSpPr/>
+          <p:nvPr/>
+        </p:nvSpPr>
+        <p:spPr>
+          <a:xfrm>
+            <a:off x="5074920" y="228600"/>
+            <a:ext cx="2057400" cy="685800"/>
+          </a:xfrm>
+          <a:prstGeom prst="roundRect">
+            <a:avLst>
+              <a:gd name="adj" fmla="val 9000"/>
+            </a:avLst>
+          </a:prstGeom>
+          <a:solidFill>
+            <a:srgbClr val="0A0E12"/>
+          </a:solidFill>
+          <a:ln w="12700">
+            <a:solidFill>
+              <a:srgbClr val="2A333D"/>
+            </a:solidFill>
+          </a:ln>
+        </p:spPr>
+        <p:style>
+          <a:lnRef idx="1">
+            <a:schemeClr val="accent1"/>
+          </a:lnRef>
+          <a:fillRef idx="3">
+            <a:schemeClr val="accent1"/>
+          </a:fillRef>
+          <a:effectRef idx="2">
+            <a:schemeClr val="accent1"/>
+          </a:effectRef>
+          <a:fontRef idx="minor">
+            <a:schemeClr val="lt1"/>
+          </a:fontRef>
+        </p:style>
+        <p:txBody>
+          <a:bodyPr rtlCol="0" anchor="ctr"/>
+          <a:lstStyle/>
+          <a:p>
+            <a:pPr algn="ctr"/>
+          </a:p>
+        </p:txBody>
+      </p:sp>
+      <p:sp>
+        <p:nvSpPr>
+          <p:cNvPr id="3" name="Oval 2"/>
+          <p:cNvSpPr/>
+          <p:nvPr/>
+        </p:nvSpPr>
+        <p:spPr>
+          <a:xfrm>
+            <a:off x="5257800" y="457200"/>
+            <a:ext cx="128016" cy="128016"/>
+          </a:xfrm>
+          <a:prstGeom prst="ellipse">
+            <a:avLst/>
+          </a:prstGeom>
+          <a:solidFill>
+            <a:srgbClr val="62D99A"/>
+          </a:solidFill>
+          <a:ln>
+            <a:noFill/>
+          </a:ln>
+        </p:spPr>
+        <p:style>
+          <a:lnRef idx="1">
+            <a:schemeClr val="accent1"/>
+          </a:lnRef>
+          <a:fillRef idx="3">
+            <a:schemeClr val="accent1"/>
+          </a:fillRef>
+          <a:effectRef idx="2">
+            <a:schemeClr val="accent1"/>
+          </a:effectRef>
+          <a:fontRef idx="minor">
+            <a:schemeClr val="lt1"/>
+          </a:fontRef>
+        </p:style>
+        <p:txBody>
+          <a:bodyPr rtlCol="0" anchor="ctr"/>
+          <a:lstStyle/>
+          <a:p>
+            <a:pPr algn="ctr"/>
+          </a:p>
+        </p:txBody>
+      </p:sp>
+      <p:sp>
+        <p:nvSpPr>
+          <p:cNvPr id="4" name="TextBox 3"/>
           <p:cNvSpPr txBox="1"/>
           <p:nvPr/>
         </p:nvSpPr>
         <p:spPr>
           <a:xfrm>
-            <a:off x="731520" y="411480"/>
-            <a:ext cx="10698480" cy="320040"/>
+            <a:off x="5486400" y="256032"/>
+            <a:ext cx="1463040" cy="320040"/>
           </a:xfrm>
           <a:prstGeom prst="rect">
             <a:avLst/>
@@ -6085,38 +6945,29 @@
           </a:bodyPr>
           <a:lstStyle/>
           <a:p>
-            <a:pPr algn="l"/>
-            <a:r>
-              <a:rPr sz="1300" b="1">
-                <a:solidFill>
-                  <a:srgbClr val="69737D"/>
-                </a:solidFill>
-                <a:latin typeface="Inter"/>
-              </a:rPr>
-              <a:t>04  </a:t>
-            </a:r>
-            <a:r>
-              <a:rPr sz="1300" b="1">
-                <a:solidFill>
-                  <a:srgbClr val="69737D"/>
-                </a:solidFill>
-                <a:latin typeface="Inter"/>
-              </a:rPr>
-              <a:t>МОДУЛЬ BS · BURN SEVERITY</a:t>
-            </a:r>
-          </a:p>
-        </p:txBody>
-      </p:sp>
-      <p:sp>
-        <p:nvSpPr>
-          <p:cNvPr id="3" name="TextBox 2"/>
+            <a:pPr algn="ctr"/>
+            <a:r>
+              <a:rPr sz="1400" b="1">
+                <a:solidFill>
+                  <a:srgbClr val="F2F4F5"/>
+                </a:solidFill>
+                <a:latin typeface="Inter"/>
+              </a:rPr>
+              <a:t>ЖИМ НОГАМИ</a:t>
+            </a:r>
+          </a:p>
+        </p:txBody>
+      </p:sp>
+      <p:sp>
+        <p:nvSpPr>
+          <p:cNvPr id="5" name="TextBox 4"/>
           <p:cNvSpPr txBox="1"/>
           <p:nvPr/>
         </p:nvSpPr>
         <p:spPr>
           <a:xfrm>
-            <a:off x="731520" y="777240"/>
-            <a:ext cx="10698480" cy="914400"/>
+            <a:off x="5486400" y="530352"/>
+            <a:ext cx="1463040" cy="274320"/>
           </a:xfrm>
           <a:prstGeom prst="rect">
             <a:avLst/>
@@ -6129,29 +6980,234 @@
           </a:bodyPr>
           <a:lstStyle/>
           <a:p>
+            <a:pPr algn="ctr"/>
+            <a:r>
+              <a:rPr sz="800" b="0">
+                <a:solidFill>
+                  <a:srgbClr val="69737D"/>
+                </a:solidFill>
+                <a:latin typeface="Inter"/>
+              </a:rPr>
+              <a:t>FIRE MONITOR · KOSMOHACK 2026</a:t>
+            </a:r>
+          </a:p>
+        </p:txBody>
+      </p:sp>
+      <p:sp>
+        <p:nvSpPr>
+          <p:cNvPr id="6" name="Rounded Rectangle 5"/>
+          <p:cNvSpPr/>
+          <p:nvPr/>
+        </p:nvSpPr>
+        <p:spPr>
+          <a:xfrm>
+            <a:off x="320040" y="1188720"/>
+            <a:ext cx="5852160" cy="4480560"/>
+          </a:xfrm>
+          <a:prstGeom prst="roundRect">
+            <a:avLst>
+              <a:gd name="adj" fmla="val 9000"/>
+            </a:avLst>
+          </a:prstGeom>
+          <a:solidFill>
+            <a:srgbClr val="0A0E12"/>
+          </a:solidFill>
+          <a:ln w="12700">
+            <a:solidFill>
+              <a:srgbClr val="2A333D"/>
+            </a:solidFill>
+          </a:ln>
+        </p:spPr>
+        <p:style>
+          <a:lnRef idx="1">
+            <a:schemeClr val="accent1"/>
+          </a:lnRef>
+          <a:fillRef idx="3">
+            <a:schemeClr val="accent1"/>
+          </a:fillRef>
+          <a:effectRef idx="2">
+            <a:schemeClr val="accent1"/>
+          </a:effectRef>
+          <a:fontRef idx="minor">
+            <a:schemeClr val="lt1"/>
+          </a:fontRef>
+        </p:style>
+        <p:txBody>
+          <a:bodyPr rtlCol="0" anchor="ctr"/>
+          <a:lstStyle/>
+          <a:p>
+            <a:pPr algn="ctr"/>
+          </a:p>
+        </p:txBody>
+      </p:sp>
+      <p:sp>
+        <p:nvSpPr>
+          <p:cNvPr id="7" name="TextBox 6"/>
+          <p:cNvSpPr txBox="1"/>
+          <p:nvPr/>
+        </p:nvSpPr>
+        <p:spPr>
+          <a:xfrm>
+            <a:off x="594360" y="1325880"/>
+            <a:ext cx="914400" cy="274320"/>
+          </a:xfrm>
+          <a:prstGeom prst="rect">
+            <a:avLst/>
+          </a:prstGeom>
+          <a:noFill/>
+        </p:spPr>
+        <p:txBody>
+          <a:bodyPr wrap="square">
+            <a:spAutoFit/>
+          </a:bodyPr>
+          <a:lstStyle/>
+          <a:p>
             <a:pPr algn="l"/>
             <a:r>
-              <a:rPr sz="3400" b="1">
+              <a:rPr sz="1100" b="1">
+                <a:solidFill>
+                  <a:srgbClr val="69737D"/>
+                </a:solidFill>
+                <a:latin typeface="Inter"/>
+              </a:rPr>
+              <a:t>04</a:t>
+            </a:r>
+          </a:p>
+        </p:txBody>
+      </p:sp>
+      <p:sp>
+        <p:nvSpPr>
+          <p:cNvPr id="8" name="TextBox 7"/>
+          <p:cNvSpPr txBox="1"/>
+          <p:nvPr/>
+        </p:nvSpPr>
+        <p:spPr>
+          <a:xfrm>
+            <a:off x="594360" y="1572768"/>
+            <a:ext cx="5303520" cy="457200"/>
+          </a:xfrm>
+          <a:prstGeom prst="rect">
+            <a:avLst/>
+          </a:prstGeom>
+          <a:noFill/>
+        </p:spPr>
+        <p:txBody>
+          <a:bodyPr wrap="square">
+            <a:spAutoFit/>
+          </a:bodyPr>
+          <a:lstStyle/>
+          <a:p>
+            <a:pPr algn="l"/>
+            <a:r>
+              <a:rPr sz="2100" b="1">
                 <a:solidFill>
                   <a:srgbClr val="F2F4F5"/>
                 </a:solidFill>
                 <a:latin typeface="Inter"/>
               </a:rPr>
-              <a:t>Гари: IoU 0.5239 · mIoU 0.5430</a:t>
-            </a:r>
-          </a:p>
-        </p:txBody>
-      </p:sp>
-      <p:sp>
-        <p:nvSpPr>
-          <p:cNvPr id="4" name="Oval 3"/>
+              <a:t>Модуль BS</a:t>
+            </a:r>
+          </a:p>
+        </p:txBody>
+      </p:sp>
+      <p:sp>
+        <p:nvSpPr>
+          <p:cNvPr id="9" name="Oval 8"/>
           <p:cNvSpPr/>
           <p:nvPr/>
         </p:nvSpPr>
         <p:spPr>
           <a:xfrm>
-            <a:off x="914400" y="2029968"/>
-            <a:ext cx="146304" cy="146304"/>
+            <a:off x="594360" y="2331720"/>
+            <a:ext cx="137160" cy="137160"/>
+          </a:xfrm>
+          <a:prstGeom prst="ellipse">
+            <a:avLst/>
+          </a:prstGeom>
+          <a:solidFill>
+            <a:srgbClr val="E6C65C"/>
+          </a:solidFill>
+          <a:ln>
+            <a:noFill/>
+          </a:ln>
+        </p:spPr>
+        <p:style>
+          <a:lnRef idx="1">
+            <a:schemeClr val="accent1"/>
+          </a:lnRef>
+          <a:fillRef idx="3">
+            <a:schemeClr val="accent1"/>
+          </a:fillRef>
+          <a:effectRef idx="2">
+            <a:schemeClr val="accent1"/>
+          </a:effectRef>
+          <a:fontRef idx="minor">
+            <a:schemeClr val="lt1"/>
+          </a:fontRef>
+        </p:style>
+        <p:txBody>
+          <a:bodyPr rtlCol="0" anchor="ctr"/>
+          <a:lstStyle/>
+          <a:p>
+            <a:pPr algn="ctr"/>
+          </a:p>
+        </p:txBody>
+      </p:sp>
+      <p:sp>
+        <p:nvSpPr>
+          <p:cNvPr id="10" name="TextBox 9"/>
+          <p:cNvSpPr txBox="1"/>
+          <p:nvPr/>
+        </p:nvSpPr>
+        <p:spPr>
+          <a:xfrm>
+            <a:off x="868680" y="2194560"/>
+            <a:ext cx="5029200" cy="594360"/>
+          </a:xfrm>
+          <a:prstGeom prst="rect">
+            <a:avLst/>
+          </a:prstGeom>
+          <a:noFill/>
+        </p:spPr>
+        <p:txBody>
+          <a:bodyPr wrap="square">
+            <a:spAutoFit/>
+          </a:bodyPr>
+          <a:lstStyle/>
+          <a:p>
+            <a:pPr algn="l"/>
+            <a:r>
+              <a:rPr sz="1400" b="1">
+                <a:solidFill>
+                  <a:srgbClr val="F2F4F5"/>
+                </a:solidFill>
+                <a:latin typeface="Inter"/>
+              </a:rPr>
+              <a:t>IoU 0.5239</a:t>
+            </a:r>
+            <a:r>
+              <a:rPr sz="1100" b="0">
+                <a:solidFill>
+                  <a:srgbClr val="69737D"/>
+                </a:solidFill>
+                <a:latin typeface="Inter"/>
+              </a:rPr>
+              <a:t>
+mIoU severity 0.5430 · фриз ep91</a:t>
+            </a:r>
+          </a:p>
+        </p:txBody>
+      </p:sp>
+      <p:sp>
+        <p:nvSpPr>
+          <p:cNvPr id="11" name="Oval 10"/>
+          <p:cNvSpPr/>
+          <p:nvPr/>
+        </p:nvSpPr>
+        <p:spPr>
+          <a:xfrm>
+            <a:off x="594360" y="3108960"/>
+            <a:ext cx="137160" cy="137160"/>
           </a:xfrm>
           <a:prstGeom prst="ellipse">
             <a:avLst/>
@@ -6187,14 +7243,14 @@
       </p:sp>
       <p:sp>
         <p:nvSpPr>
-          <p:cNvPr id="5" name="TextBox 4"/>
+          <p:cNvPr id="12" name="TextBox 11"/>
           <p:cNvSpPr txBox="1"/>
           <p:nvPr/>
         </p:nvSpPr>
         <p:spPr>
           <a:xfrm>
-            <a:off x="1234440" y="1865376"/>
-            <a:ext cx="10424160" cy="640080"/>
+            <a:off x="868680" y="2971800"/>
+            <a:ext cx="5029200" cy="594360"/>
           </a:xfrm>
           <a:prstGeom prst="rect">
             <a:avLst/>
@@ -6209,295 +7265,24 @@
           <a:p>
             <a:pPr algn="l"/>
             <a:r>
-              <a:rPr sz="1600" b="0">
-                <a:solidFill>
-                  <a:srgbClr val="A4ADB5"/>
-                </a:solidFill>
-                <a:latin typeface="Inter"/>
-              </a:rPr>
-              <a:t>27 каналов: S2 pre/post + S1 VV/VH + aux + dNBR/RdNBR · argmax + cloud→0 + burn-gate snap</a:t>
-            </a:r>
-          </a:p>
-        </p:txBody>
-      </p:sp>
-      <p:sp>
-        <p:nvSpPr>
-          <p:cNvPr id="6" name="Oval 5"/>
-          <p:cNvSpPr/>
-          <p:nvPr/>
-        </p:nvSpPr>
-        <p:spPr>
-          <a:xfrm>
-            <a:off x="914400" y="2743200"/>
-            <a:ext cx="146304" cy="146304"/>
-          </a:xfrm>
-          <a:prstGeom prst="ellipse">
-            <a:avLst/>
-          </a:prstGeom>
-          <a:solidFill>
-            <a:srgbClr val="FF6B35"/>
-          </a:solidFill>
-          <a:ln>
-            <a:noFill/>
-          </a:ln>
-        </p:spPr>
-        <p:style>
-          <a:lnRef idx="1">
-            <a:schemeClr val="accent1"/>
-          </a:lnRef>
-          <a:fillRef idx="3">
-            <a:schemeClr val="accent1"/>
-          </a:fillRef>
-          <a:effectRef idx="2">
-            <a:schemeClr val="accent1"/>
-          </a:effectRef>
-          <a:fontRef idx="minor">
-            <a:schemeClr val="lt1"/>
-          </a:fontRef>
-        </p:style>
-        <p:txBody>
-          <a:bodyPr rtlCol="0" anchor="ctr"/>
-          <a:lstStyle/>
-          <a:p>
-            <a:pPr algn="ctr"/>
-          </a:p>
-        </p:txBody>
-      </p:sp>
-      <p:sp>
-        <p:nvSpPr>
-          <p:cNvPr id="7" name="TextBox 6"/>
-          <p:cNvSpPr txBox="1"/>
-          <p:nvPr/>
-        </p:nvSpPr>
-        <p:spPr>
-          <a:xfrm>
-            <a:off x="1234440" y="2578608"/>
-            <a:ext cx="10424160" cy="640080"/>
-          </a:xfrm>
-          <a:prstGeom prst="rect">
-            <a:avLst/>
-          </a:prstGeom>
-          <a:noFill/>
-        </p:spPr>
-        <p:txBody>
-          <a:bodyPr wrap="square">
-            <a:spAutoFit/>
-          </a:bodyPr>
-          <a:lstStyle/>
-          <a:p>
-            <a:pPr algn="l"/>
-            <a:r>
-              <a:rPr sz="1600" b="0">
-                <a:solidFill>
-                  <a:srgbClr val="A4ADB5"/>
-                </a:solidFill>
-                <a:latin typeface="Inter"/>
-              </a:rPr>
-              <a:t>dNBR-пороги per-landcover из EDA: лес 0.28/0.53 · степь 0.21/0.38 · пашня 0.19/0.37 · пойма 0.31/0.61</a:t>
-            </a:r>
-          </a:p>
-        </p:txBody>
-      </p:sp>
-      <p:sp>
-        <p:nvSpPr>
-          <p:cNvPr id="8" name="Oval 7"/>
-          <p:cNvSpPr/>
-          <p:nvPr/>
-        </p:nvSpPr>
-        <p:spPr>
-          <a:xfrm>
-            <a:off x="914400" y="3456432"/>
-            <a:ext cx="146304" cy="146304"/>
-          </a:xfrm>
-          <a:prstGeom prst="ellipse">
-            <a:avLst/>
-          </a:prstGeom>
-          <a:solidFill>
-            <a:srgbClr val="FF6B35"/>
-          </a:solidFill>
-          <a:ln>
-            <a:noFill/>
-          </a:ln>
-        </p:spPr>
-        <p:style>
-          <a:lnRef idx="1">
-            <a:schemeClr val="accent1"/>
-          </a:lnRef>
-          <a:fillRef idx="3">
-            <a:schemeClr val="accent1"/>
-          </a:fillRef>
-          <a:effectRef idx="2">
-            <a:schemeClr val="accent1"/>
-          </a:effectRef>
-          <a:fontRef idx="minor">
-            <a:schemeClr val="lt1"/>
-          </a:fontRef>
-        </p:style>
-        <p:txBody>
-          <a:bodyPr rtlCol="0" anchor="ctr"/>
-          <a:lstStyle/>
-          <a:p>
-            <a:pPr algn="ctr"/>
-          </a:p>
-        </p:txBody>
-      </p:sp>
-      <p:sp>
-        <p:nvSpPr>
-          <p:cNvPr id="9" name="TextBox 8"/>
-          <p:cNvSpPr txBox="1"/>
-          <p:nvPr/>
-        </p:nvSpPr>
-        <p:spPr>
-          <a:xfrm>
-            <a:off x="1234440" y="3291840"/>
-            <a:ext cx="10424160" cy="640080"/>
-          </a:xfrm>
-          <a:prstGeom prst="rect">
-            <a:avLst/>
-          </a:prstGeom>
-          <a:noFill/>
-        </p:spPr>
-        <p:txBody>
-          <a:bodyPr wrap="square">
-            <a:spAutoFit/>
-          </a:bodyPr>
-          <a:lstStyle/>
-          <a:p>
-            <a:pPr algn="l"/>
-            <a:r>
-              <a:rPr sz="1600" b="0">
-                <a:solidFill>
-                  <a:srgbClr val="A4ADB5"/>
-                </a:solidFill>
-                <a:latin typeface="Inter"/>
-              </a:rPr>
-              <a:t>Prithvi-300M мёртв: IoU 0.16 &lt; бейзлайна 0.33 + nan-loss · retry H1 0.6196 и H2 0.632 проиграли фризу ep91</a:t>
-            </a:r>
-          </a:p>
-        </p:txBody>
-      </p:sp>
-      <p:sp>
-        <p:nvSpPr>
-          <p:cNvPr id="10" name="Oval 9"/>
-          <p:cNvSpPr/>
-          <p:nvPr/>
-        </p:nvSpPr>
-        <p:spPr>
-          <a:xfrm>
-            <a:off x="914400" y="4169663"/>
-            <a:ext cx="146304" cy="146304"/>
-          </a:xfrm>
-          <a:prstGeom prst="ellipse">
-            <a:avLst/>
-          </a:prstGeom>
-          <a:solidFill>
-            <a:srgbClr val="FF6B35"/>
-          </a:solidFill>
-          <a:ln>
-            <a:noFill/>
-          </a:ln>
-        </p:spPr>
-        <p:style>
-          <a:lnRef idx="1">
-            <a:schemeClr val="accent1"/>
-          </a:lnRef>
-          <a:fillRef idx="3">
-            <a:schemeClr val="accent1"/>
-          </a:fillRef>
-          <a:effectRef idx="2">
-            <a:schemeClr val="accent1"/>
-          </a:effectRef>
-          <a:fontRef idx="minor">
-            <a:schemeClr val="lt1"/>
-          </a:fontRef>
-        </p:style>
-        <p:txBody>
-          <a:bodyPr rtlCol="0" anchor="ctr"/>
-          <a:lstStyle/>
-          <a:p>
-            <a:pPr algn="ctr"/>
-          </a:p>
-        </p:txBody>
-      </p:sp>
-      <p:sp>
-        <p:nvSpPr>
-          <p:cNvPr id="11" name="TextBox 10"/>
-          <p:cNvSpPr txBox="1"/>
-          <p:nvPr/>
-        </p:nvSpPr>
-        <p:spPr>
-          <a:xfrm>
-            <a:off x="1234440" y="4005072"/>
-            <a:ext cx="10424160" cy="640080"/>
-          </a:xfrm>
-          <a:prstGeom prst="rect">
-            <a:avLst/>
-          </a:prstGeom>
-          <a:noFill/>
-        </p:spPr>
-        <p:txBody>
-          <a:bodyPr wrap="square">
-            <a:spAutoFit/>
-          </a:bodyPr>
-          <a:lstStyle/>
-          <a:p>
-            <a:pPr algn="l"/>
-            <a:r>
-              <a:rPr sz="1600" b="0">
-                <a:solidFill>
-                  <a:srgbClr val="A4ADB5"/>
-                </a:solidFill>
-                <a:latin typeface="Inter"/>
-              </a:rPr>
-              <a:t>SCL врёт на сухой почве — держим dry-soil override для барренов</a:t>
-            </a:r>
-          </a:p>
-        </p:txBody>
-      </p:sp>
-      <p:sp>
-        <p:nvSpPr>
-          <p:cNvPr id="12" name="Rounded Rectangle 11"/>
-          <p:cNvSpPr/>
-          <p:nvPr/>
-        </p:nvSpPr>
-        <p:spPr>
-          <a:xfrm>
-            <a:off x="8321040" y="4754880"/>
-            <a:ext cx="3108960" cy="1463040"/>
-          </a:xfrm>
-          <a:prstGeom prst="roundRect">
-            <a:avLst>
-              <a:gd name="adj" fmla="val 8000"/>
-            </a:avLst>
-          </a:prstGeom>
-          <a:solidFill>
-            <a:srgbClr val="0E1318"/>
-          </a:solidFill>
-          <a:ln w="12700">
-            <a:solidFill>
-              <a:srgbClr val="232A33"/>
-            </a:solidFill>
-          </a:ln>
-        </p:spPr>
-        <p:style>
-          <a:lnRef idx="1">
-            <a:schemeClr val="accent1"/>
-          </a:lnRef>
-          <a:fillRef idx="3">
-            <a:schemeClr val="accent1"/>
-          </a:fillRef>
-          <a:effectRef idx="2">
-            <a:schemeClr val="accent1"/>
-          </a:effectRef>
-          <a:fontRef idx="minor">
-            <a:schemeClr val="lt1"/>
-          </a:fontRef>
-        </p:style>
-        <p:txBody>
-          <a:bodyPr rtlCol="0" anchor="ctr"/>
-          <a:lstStyle/>
-          <a:p>
-            <a:pPr algn="ctr"/>
+              <a:rPr sz="1400" b="1">
+                <a:solidFill>
+                  <a:srgbClr val="F2F4F5"/>
+                </a:solidFill>
+                <a:latin typeface="Inter"/>
+              </a:rPr>
+              <a:t>dNBR per-cover</a:t>
+            </a:r>
+            <a:r>
+              <a:rPr sz="1100" b="0">
+                <a:solidFill>
+                  <a:srgbClr val="69737D"/>
+                </a:solidFill>
+                <a:latin typeface="Inter"/>
+              </a:rPr>
+              <a:t>
+лес 0.28/0.53 · степь 0.21/0.38 · пашня 0.19/0.37</a:t>
+            </a:r>
           </a:p>
         </p:txBody>
       </p:sp>
@@ -6509,182 +7294,8 @@
         </p:nvSpPr>
         <p:spPr>
           <a:xfrm>
-            <a:off x="8549640" y="4937760"/>
-            <a:ext cx="146304" cy="146304"/>
-          </a:xfrm>
-          <a:prstGeom prst="ellipse">
-            <a:avLst/>
-          </a:prstGeom>
-          <a:solidFill>
-            <a:srgbClr val="E6C65C"/>
-          </a:solidFill>
-          <a:ln>
-            <a:noFill/>
-          </a:ln>
-        </p:spPr>
-        <p:style>
-          <a:lnRef idx="1">
-            <a:schemeClr val="accent1"/>
-          </a:lnRef>
-          <a:fillRef idx="3">
-            <a:schemeClr val="accent1"/>
-          </a:fillRef>
-          <a:effectRef idx="2">
-            <a:schemeClr val="accent1"/>
-          </a:effectRef>
-          <a:fontRef idx="minor">
-            <a:schemeClr val="lt1"/>
-          </a:fontRef>
-        </p:style>
-        <p:txBody>
-          <a:bodyPr rtlCol="0" anchor="ctr"/>
-          <a:lstStyle/>
-          <a:p>
-            <a:pPr algn="ctr"/>
-          </a:p>
-        </p:txBody>
-      </p:sp>
-      <p:sp>
-        <p:nvSpPr>
-          <p:cNvPr id="14" name="TextBox 13"/>
-          <p:cNvSpPr txBox="1"/>
-          <p:nvPr/>
-        </p:nvSpPr>
-        <p:spPr>
-          <a:xfrm>
-            <a:off x="8823960" y="4864608"/>
-            <a:ext cx="2286000" cy="411480"/>
-          </a:xfrm>
-          <a:prstGeom prst="rect">
-            <a:avLst/>
-          </a:prstGeom>
-          <a:noFill/>
-        </p:spPr>
-        <p:txBody>
-          <a:bodyPr wrap="square">
-            <a:spAutoFit/>
-          </a:bodyPr>
-          <a:lstStyle/>
-          <a:p>
-            <a:pPr algn="l"/>
-            <a:r>
-              <a:rPr sz="1400" b="1">
-                <a:solidFill>
-                  <a:srgbClr val="F2F4F5"/>
-                </a:solidFill>
-                <a:latin typeface="Inter"/>
-              </a:rPr>
-              <a:t>Weak</a:t>
-            </a:r>
-            <a:r>
-              <a:rPr sz="1100" b="0">
-                <a:solidFill>
-                  <a:srgbClr val="69737D"/>
-                </a:solidFill>
-                <a:latin typeface="Inter"/>
-              </a:rPr>
-              <a:t>  Level 1</a:t>
-            </a:r>
-          </a:p>
-        </p:txBody>
-      </p:sp>
-      <p:sp>
-        <p:nvSpPr>
-          <p:cNvPr id="15" name="Oval 14"/>
-          <p:cNvSpPr/>
-          <p:nvPr/>
-        </p:nvSpPr>
-        <p:spPr>
-          <a:xfrm>
-            <a:off x="8549640" y="5349240"/>
-            <a:ext cx="146304" cy="146304"/>
-          </a:xfrm>
-          <a:prstGeom prst="ellipse">
-            <a:avLst/>
-          </a:prstGeom>
-          <a:solidFill>
-            <a:srgbClr val="FF6B35"/>
-          </a:solidFill>
-          <a:ln>
-            <a:noFill/>
-          </a:ln>
-        </p:spPr>
-        <p:style>
-          <a:lnRef idx="1">
-            <a:schemeClr val="accent1"/>
-          </a:lnRef>
-          <a:fillRef idx="3">
-            <a:schemeClr val="accent1"/>
-          </a:fillRef>
-          <a:effectRef idx="2">
-            <a:schemeClr val="accent1"/>
-          </a:effectRef>
-          <a:fontRef idx="minor">
-            <a:schemeClr val="lt1"/>
-          </a:fontRef>
-        </p:style>
-        <p:txBody>
-          <a:bodyPr rtlCol="0" anchor="ctr"/>
-          <a:lstStyle/>
-          <a:p>
-            <a:pPr algn="ctr"/>
-          </a:p>
-        </p:txBody>
-      </p:sp>
-      <p:sp>
-        <p:nvSpPr>
-          <p:cNvPr id="16" name="TextBox 15"/>
-          <p:cNvSpPr txBox="1"/>
-          <p:nvPr/>
-        </p:nvSpPr>
-        <p:spPr>
-          <a:xfrm>
-            <a:off x="8823960" y="5276088"/>
-            <a:ext cx="2286000" cy="411480"/>
-          </a:xfrm>
-          <a:prstGeom prst="rect">
-            <a:avLst/>
-          </a:prstGeom>
-          <a:noFill/>
-        </p:spPr>
-        <p:txBody>
-          <a:bodyPr wrap="square">
-            <a:spAutoFit/>
-          </a:bodyPr>
-          <a:lstStyle/>
-          <a:p>
-            <a:pPr algn="l"/>
-            <a:r>
-              <a:rPr sz="1400" b="1">
-                <a:solidFill>
-                  <a:srgbClr val="F2F4F5"/>
-                </a:solidFill>
-                <a:latin typeface="Inter"/>
-              </a:rPr>
-              <a:t>Moderate</a:t>
-            </a:r>
-            <a:r>
-              <a:rPr sz="1100" b="0">
-                <a:solidFill>
-                  <a:srgbClr val="69737D"/>
-                </a:solidFill>
-                <a:latin typeface="Inter"/>
-              </a:rPr>
-              <a:t>  Level 2</a:t>
-            </a:r>
-          </a:p>
-        </p:txBody>
-      </p:sp>
-      <p:sp>
-        <p:nvSpPr>
-          <p:cNvPr id="17" name="Oval 16"/>
-          <p:cNvSpPr/>
-          <p:nvPr/>
-        </p:nvSpPr>
-        <p:spPr>
-          <a:xfrm>
-            <a:off x="8549640" y="5760720"/>
-            <a:ext cx="146304" cy="146304"/>
+            <a:off x="594360" y="3886200"/>
+            <a:ext cx="137160" cy="137160"/>
           </a:xfrm>
           <a:prstGeom prst="ellipse">
             <a:avLst/>
@@ -6720,14 +7331,14 @@
       </p:sp>
       <p:sp>
         <p:nvSpPr>
-          <p:cNvPr id="18" name="TextBox 17"/>
+          <p:cNvPr id="14" name="TextBox 13"/>
           <p:cNvSpPr txBox="1"/>
           <p:nvPr/>
         </p:nvSpPr>
         <p:spPr>
           <a:xfrm>
-            <a:off x="8823960" y="5687568"/>
-            <a:ext cx="2286000" cy="411480"/>
+            <a:off x="868680" y="3749040"/>
+            <a:ext cx="5029200" cy="594360"/>
           </a:xfrm>
           <a:prstGeom prst="rect">
             <a:avLst/>
@@ -6748,7 +7359,7 @@
                 </a:solidFill>
                 <a:latin typeface="Inter"/>
               </a:rPr>
-              <a:t>Strong</a:t>
+              <a:t>Prithvi мёртв</a:t>
             </a:r>
             <a:r>
               <a:rPr sz="1100" b="0">
@@ -6757,11 +7368,124 @@
                 </a:solidFill>
                 <a:latin typeface="Inter"/>
               </a:rPr>
-              <a:t>  Level 3</a:t>
-            </a:r>
-          </a:p>
-        </p:txBody>
-      </p:sp>
+              <a:t>
+IoU 0.16 &lt; бейзлайна 0.33 + nan-loss</a:t>
+            </a:r>
+          </a:p>
+        </p:txBody>
+      </p:sp>
+      <p:sp>
+        <p:nvSpPr>
+          <p:cNvPr id="15" name="Oval 14"/>
+          <p:cNvSpPr/>
+          <p:nvPr/>
+        </p:nvSpPr>
+        <p:spPr>
+          <a:xfrm>
+            <a:off x="594360" y="4663440"/>
+            <a:ext cx="137160" cy="137160"/>
+          </a:xfrm>
+          <a:prstGeom prst="ellipse">
+            <a:avLst/>
+          </a:prstGeom>
+          <a:solidFill>
+            <a:srgbClr val="62D99A"/>
+          </a:solidFill>
+          <a:ln>
+            <a:noFill/>
+          </a:ln>
+        </p:spPr>
+        <p:style>
+          <a:lnRef idx="1">
+            <a:schemeClr val="accent1"/>
+          </a:lnRef>
+          <a:fillRef idx="3">
+            <a:schemeClr val="accent1"/>
+          </a:fillRef>
+          <a:effectRef idx="2">
+            <a:schemeClr val="accent1"/>
+          </a:effectRef>
+          <a:fontRef idx="minor">
+            <a:schemeClr val="lt1"/>
+          </a:fontRef>
+        </p:style>
+        <p:txBody>
+          <a:bodyPr rtlCol="0" anchor="ctr"/>
+          <a:lstStyle/>
+          <a:p>
+            <a:pPr algn="ctr"/>
+          </a:p>
+        </p:txBody>
+      </p:sp>
+      <p:sp>
+        <p:nvSpPr>
+          <p:cNvPr id="16" name="TextBox 15"/>
+          <p:cNvSpPr txBox="1"/>
+          <p:nvPr/>
+        </p:nvSpPr>
+        <p:spPr>
+          <a:xfrm>
+            <a:off x="868680" y="4526280"/>
+            <a:ext cx="5029200" cy="594360"/>
+          </a:xfrm>
+          <a:prstGeom prst="rect">
+            <a:avLst/>
+          </a:prstGeom>
+          <a:noFill/>
+        </p:spPr>
+        <p:txBody>
+          <a:bodyPr wrap="square">
+            <a:spAutoFit/>
+          </a:bodyPr>
+          <a:lstStyle/>
+          <a:p>
+            <a:pPr algn="l"/>
+            <a:r>
+              <a:rPr sz="1400" b="1">
+                <a:solidFill>
+                  <a:srgbClr val="F2F4F5"/>
+                </a:solidFill>
+                <a:latin typeface="Inter"/>
+              </a:rPr>
+              <a:t>Retry H1/H2</a:t>
+            </a:r>
+            <a:r>
+              <a:rPr sz="1100" b="0">
+                <a:solidFill>
+                  <a:srgbClr val="69737D"/>
+                </a:solidFill>
+                <a:latin typeface="Inter"/>
+              </a:rPr>
+              <a:t>
+0.6196 и 0.632 — оба проиграли фризу</a:t>
+            </a:r>
+          </a:p>
+        </p:txBody>
+      </p:sp>
+      <p:pic>
+        <p:nvPicPr>
+          <p:cNvPr id="17" name="Picture 16" descr="03-analytics.png"/>
+          <p:cNvPicPr>
+            <a:picLocks noChangeAspect="1"/>
+          </p:cNvPicPr>
+          <p:nvPr/>
+        </p:nvPicPr>
+        <p:blipFill>
+          <a:blip r:embed="rId2"/>
+          <a:stretch>
+            <a:fillRect/>
+          </a:stretch>
+        </p:blipFill>
+        <p:spPr>
+          <a:xfrm>
+            <a:off x="6675120" y="2377440"/>
+            <a:ext cx="5212080" cy="666355"/>
+          </a:xfrm>
+          <a:prstGeom prst="rect">
+            <a:avLst/>
+          </a:prstGeom>
+        </p:spPr>
+      </p:pic>
     </p:spTree>
   </p:cSld>
   <p:clrMapOvr>
@@ -6790,105 +7514,26 @@
       <p:grpSpPr/>
       <p:sp>
         <p:nvSpPr>
-          <p:cNvPr id="2" name="TextBox 1"/>
-          <p:cNvSpPr txBox="1"/>
-          <p:nvPr/>
-        </p:nvSpPr>
-        <p:spPr>
-          <a:xfrm>
-            <a:off x="731520" y="411480"/>
-            <a:ext cx="10698480" cy="320040"/>
-          </a:xfrm>
-          <a:prstGeom prst="rect">
-            <a:avLst/>
-          </a:prstGeom>
-          <a:noFill/>
-        </p:spPr>
-        <p:txBody>
-          <a:bodyPr wrap="square">
-            <a:spAutoFit/>
-          </a:bodyPr>
-          <a:lstStyle/>
-          <a:p>
-            <a:pPr algn="l"/>
-            <a:r>
-              <a:rPr sz="1300" b="1">
-                <a:solidFill>
-                  <a:srgbClr val="69737D"/>
-                </a:solidFill>
-                <a:latin typeface="Inter"/>
-              </a:rPr>
-              <a:t>05  </a:t>
-            </a:r>
-            <a:r>
-              <a:rPr sz="1300" b="1">
-                <a:solidFill>
-                  <a:srgbClr val="69737D"/>
-                </a:solidFill>
-                <a:latin typeface="Inter"/>
-              </a:rPr>
-              <a:t>МЕТРИКА И САБМИТ · FINAL</a:t>
-            </a:r>
-          </a:p>
-        </p:txBody>
-      </p:sp>
-      <p:sp>
-        <p:nvSpPr>
-          <p:cNvPr id="3" name="TextBox 2"/>
-          <p:cNvSpPr txBox="1"/>
-          <p:nvPr/>
-        </p:nvSpPr>
-        <p:spPr>
-          <a:xfrm>
-            <a:off x="731520" y="777240"/>
-            <a:ext cx="10698480" cy="914400"/>
-          </a:xfrm>
-          <a:prstGeom prst="rect">
-            <a:avLst/>
-          </a:prstGeom>
-          <a:noFill/>
-        </p:spPr>
-        <p:txBody>
-          <a:bodyPr wrap="square">
-            <a:spAutoFit/>
-          </a:bodyPr>
-          <a:lstStyle/>
-          <a:p>
-            <a:pPr algn="l"/>
-            <a:r>
-              <a:rPr sz="3400" b="1">
-                <a:solidFill>
-                  <a:srgbClr val="F2F4F5"/>
-                </a:solidFill>
-                <a:latin typeface="Inter"/>
-              </a:rPr>
-              <a:t>Score 0.654</a:t>
-            </a:r>
-          </a:p>
-        </p:txBody>
-      </p:sp>
-      <p:sp>
-        <p:nvSpPr>
-          <p:cNvPr id="4" name="Rounded Rectangle 3"/>
+          <p:cNvPr id="2" name="Rounded Rectangle 1"/>
           <p:cNvSpPr/>
           <p:nvPr/>
         </p:nvSpPr>
         <p:spPr>
           <a:xfrm>
-            <a:off x="731520" y="1828800"/>
-            <a:ext cx="10698480" cy="1280160"/>
+            <a:off x="5074920" y="228600"/>
+            <a:ext cx="2057400" cy="685800"/>
           </a:xfrm>
           <a:prstGeom prst="roundRect">
             <a:avLst>
-              <a:gd name="adj" fmla="val 8000"/>
+              <a:gd name="adj" fmla="val 9000"/>
             </a:avLst>
           </a:prstGeom>
           <a:solidFill>
-            <a:srgbClr val="0E1318"/>
+            <a:srgbClr val="0A0E12"/>
           </a:solidFill>
           <a:ln w="12700">
             <a:solidFill>
-              <a:srgbClr val="232A33"/>
+              <a:srgbClr val="2A333D"/>
             </a:solidFill>
           </a:ln>
         </p:spPr>
@@ -6916,65 +7561,20 @@
       </p:sp>
       <p:sp>
         <p:nvSpPr>
-          <p:cNvPr id="5" name="TextBox 4"/>
-          <p:cNvSpPr txBox="1"/>
-          <p:nvPr/>
-        </p:nvSpPr>
-        <p:spPr>
-          <a:xfrm>
-            <a:off x="1005840" y="2011680"/>
-            <a:ext cx="10149840" cy="914400"/>
-          </a:xfrm>
-          <a:prstGeom prst="rect">
-            <a:avLst/>
-          </a:prstGeom>
-          <a:noFill/>
-        </p:spPr>
-        <p:txBody>
-          <a:bodyPr wrap="square">
-            <a:spAutoFit/>
-          </a:bodyPr>
-          <a:lstStyle/>
-          <a:p>
-            <a:pPr algn="l"/>
-            <a:r>
-              <a:rPr sz="2500" b="1">
-                <a:solidFill>
-                  <a:srgbClr val="F2F4F5"/>
-                </a:solidFill>
-                <a:latin typeface="Inter"/>
-              </a:rPr>
-              <a:t>0.35 × 0.8434  +  0.35 × 0.5239  +  0.30 × 0.5430  =  0.654</a:t>
-            </a:r>
-            <a:r>
-              <a:rPr sz="1500" b="0">
-                <a:solidFill>
-                  <a:srgbClr val="69737D"/>
-                </a:solidFill>
-                <a:latin typeface="Inter"/>
-              </a:rPr>
-              <a:t>
-F1_af · IoU_burn · mIoU_sev — micro-pool по всем пикселям</a:t>
-            </a:r>
-          </a:p>
-        </p:txBody>
-      </p:sp>
-      <p:sp>
-        <p:nvSpPr>
-          <p:cNvPr id="6" name="Oval 5"/>
+          <p:cNvPr id="3" name="Oval 2"/>
           <p:cNvSpPr/>
           <p:nvPr/>
         </p:nvSpPr>
         <p:spPr>
           <a:xfrm>
-            <a:off x="914400" y="3675887"/>
-            <a:ext cx="146304" cy="146304"/>
+            <a:off x="5257800" y="457200"/>
+            <a:ext cx="128016" cy="128016"/>
           </a:xfrm>
           <a:prstGeom prst="ellipse">
             <a:avLst/>
           </a:prstGeom>
           <a:solidFill>
-            <a:srgbClr val="FF6B35"/>
+            <a:srgbClr val="62D99A"/>
           </a:solidFill>
           <a:ln>
             <a:noFill/>
@@ -7004,14 +7604,14 @@
       </p:sp>
       <p:sp>
         <p:nvSpPr>
-          <p:cNvPr id="7" name="TextBox 6"/>
+          <p:cNvPr id="4" name="TextBox 3"/>
           <p:cNvSpPr txBox="1"/>
           <p:nvPr/>
         </p:nvSpPr>
         <p:spPr>
           <a:xfrm>
-            <a:off x="1234440" y="3511296"/>
-            <a:ext cx="10424160" cy="640080"/>
+            <a:off x="5486400" y="256032"/>
+            <a:ext cx="1463040" cy="320040"/>
           </a:xfrm>
           <a:prstGeom prst="rect">
             <a:avLst/>
@@ -7024,38 +7624,77 @@
           </a:bodyPr>
           <a:lstStyle/>
           <a:p>
-            <a:pPr algn="l"/>
-            <a:r>
-              <a:rPr sz="1600" b="0">
-                <a:solidFill>
-                  <a:srgbClr val="A4ADB5"/>
-                </a:solidFill>
-                <a:latin typeface="Inter"/>
-              </a:rPr>
-              <a:t>submission.csv: 4.1M · 447 строк (180 AF×1 + 89 BS×3) · пары = шаблону · md5 97b86c67</a:t>
-            </a:r>
-          </a:p>
-        </p:txBody>
-      </p:sp>
-      <p:sp>
-        <p:nvSpPr>
-          <p:cNvPr id="8" name="Oval 7"/>
+            <a:pPr algn="ctr"/>
+            <a:r>
+              <a:rPr sz="1400" b="1">
+                <a:solidFill>
+                  <a:srgbClr val="F2F4F5"/>
+                </a:solidFill>
+                <a:latin typeface="Inter"/>
+              </a:rPr>
+              <a:t>ЖИМ НОГАМИ</a:t>
+            </a:r>
+          </a:p>
+        </p:txBody>
+      </p:sp>
+      <p:sp>
+        <p:nvSpPr>
+          <p:cNvPr id="5" name="TextBox 4"/>
+          <p:cNvSpPr txBox="1"/>
+          <p:nvPr/>
+        </p:nvSpPr>
+        <p:spPr>
+          <a:xfrm>
+            <a:off x="5486400" y="530352"/>
+            <a:ext cx="1463040" cy="274320"/>
+          </a:xfrm>
+          <a:prstGeom prst="rect">
+            <a:avLst/>
+          </a:prstGeom>
+          <a:noFill/>
+        </p:spPr>
+        <p:txBody>
+          <a:bodyPr wrap="square">
+            <a:spAutoFit/>
+          </a:bodyPr>
+          <a:lstStyle/>
+          <a:p>
+            <a:pPr algn="ctr"/>
+            <a:r>
+              <a:rPr sz="800" b="0">
+                <a:solidFill>
+                  <a:srgbClr val="69737D"/>
+                </a:solidFill>
+                <a:latin typeface="Inter"/>
+              </a:rPr>
+              <a:t>FIRE MONITOR · KOSMOHACK 2026</a:t>
+            </a:r>
+          </a:p>
+        </p:txBody>
+      </p:sp>
+      <p:sp>
+        <p:nvSpPr>
+          <p:cNvPr id="6" name="Rounded Rectangle 5"/>
           <p:cNvSpPr/>
           <p:nvPr/>
         </p:nvSpPr>
         <p:spPr>
           <a:xfrm>
-            <a:off x="914400" y="4334256"/>
-            <a:ext cx="146304" cy="146304"/>
-          </a:xfrm>
-          <a:prstGeom prst="ellipse">
-            <a:avLst/>
+            <a:off x="320040" y="1188720"/>
+            <a:ext cx="11521440" cy="1371600"/>
+          </a:xfrm>
+          <a:prstGeom prst="roundRect">
+            <a:avLst>
+              <a:gd name="adj" fmla="val 9000"/>
+            </a:avLst>
           </a:prstGeom>
           <a:solidFill>
-            <a:srgbClr val="FF6B35"/>
+            <a:srgbClr val="0A0E12"/>
           </a:solidFill>
-          <a:ln>
-            <a:noFill/>
+          <a:ln w="12700">
+            <a:solidFill>
+              <a:srgbClr val="2A333D"/>
+            </a:solidFill>
           </a:ln>
         </p:spPr>
         <p:style>
@@ -7082,14 +7721,14 @@
       </p:sp>
       <p:sp>
         <p:nvSpPr>
-          <p:cNvPr id="9" name="TextBox 8"/>
+          <p:cNvPr id="7" name="TextBox 6"/>
           <p:cNvSpPr txBox="1"/>
           <p:nvPr/>
         </p:nvSpPr>
         <p:spPr>
           <a:xfrm>
-            <a:off x="1234440" y="4169664"/>
-            <a:ext cx="10424160" cy="640080"/>
+            <a:off x="640080" y="1371600"/>
+            <a:ext cx="10881360" cy="1005840"/>
           </a:xfrm>
           <a:prstGeom prst="rect">
             <a:avLst/>
@@ -7104,36 +7743,50 @@
           <a:p>
             <a:pPr algn="l"/>
             <a:r>
-              <a:rPr sz="1600" b="0">
-                <a:solidFill>
-                  <a:srgbClr val="A4ADB5"/>
-                </a:solidFill>
-                <a:latin typeface="Inter"/>
-              </a:rPr>
-              <a:t>RLE строгий: нумерация с 1 · склейка касающихся серий · пустые классы «» · NaN 0 · пересечений 0</a:t>
-            </a:r>
-          </a:p>
-        </p:txBody>
-      </p:sp>
-      <p:sp>
-        <p:nvSpPr>
-          <p:cNvPr id="10" name="Oval 9"/>
+              <a:rPr sz="2600" b="1">
+                <a:solidFill>
+                  <a:srgbClr val="F2F4F5"/>
+                </a:solidFill>
+                <a:latin typeface="Inter"/>
+              </a:rPr>
+              <a:t>0.35 × 0.8434  +  0.35 × 0.5239  +  0.30 × 0.5430  =  0.654</a:t>
+            </a:r>
+            <a:r>
+              <a:rPr sz="1500" b="0">
+                <a:solidFill>
+                  <a:srgbClr val="69737D"/>
+                </a:solidFill>
+                <a:latin typeface="Inter"/>
+              </a:rPr>
+              <a:t>
+F1_af · IoU_burn · mIoU_sev — micro-pool по всем пикселям</a:t>
+            </a:r>
+          </a:p>
+        </p:txBody>
+      </p:sp>
+      <p:sp>
+        <p:nvSpPr>
+          <p:cNvPr id="8" name="Rounded Rectangle 7"/>
           <p:cNvSpPr/>
           <p:nvPr/>
         </p:nvSpPr>
         <p:spPr>
           <a:xfrm>
-            <a:off x="914400" y="4992624"/>
-            <a:ext cx="146304" cy="146304"/>
-          </a:xfrm>
-          <a:prstGeom prst="ellipse">
-            <a:avLst/>
+            <a:off x="320040" y="5074920"/>
+            <a:ext cx="2194560" cy="1051560"/>
+          </a:xfrm>
+          <a:prstGeom prst="roundRect">
+            <a:avLst>
+              <a:gd name="adj" fmla="val 9000"/>
+            </a:avLst>
           </a:prstGeom>
           <a:solidFill>
-            <a:srgbClr val="FF6B35"/>
+            <a:srgbClr val="0A0E12"/>
           </a:solidFill>
-          <a:ln>
-            <a:noFill/>
+          <a:ln w="12700">
+            <a:solidFill>
+              <a:srgbClr val="2A333D"/>
+            </a:solidFill>
           </a:ln>
         </p:spPr>
         <p:style>
@@ -7160,14 +7813,14 @@
       </p:sp>
       <p:sp>
         <p:nvSpPr>
-          <p:cNvPr id="11" name="TextBox 10"/>
+          <p:cNvPr id="9" name="TextBox 8"/>
           <p:cNvSpPr txBox="1"/>
           <p:nvPr/>
         </p:nvSpPr>
         <p:spPr>
           <a:xfrm>
-            <a:off x="1234440" y="4828032"/>
-            <a:ext cx="10424160" cy="640080"/>
+            <a:off x="457200" y="5129783"/>
+            <a:ext cx="1938528" cy="228600"/>
           </a:xfrm>
           <a:prstGeom prst="rect">
             <a:avLst/>
@@ -7182,13 +7835,691 @@
           <a:p>
             <a:pPr algn="l"/>
             <a:r>
-              <a:rPr sz="1600" b="0">
-                <a:solidFill>
-                  <a:srgbClr val="A4ADB5"/>
-                </a:solidFill>
-                <a:latin typeface="Inter"/>
-              </a:rPr>
-              <a:t>Два прогона побайтово идентичны · переобучение запрещено — файл заморожен</a:t>
+              <a:rPr sz="1000" b="1">
+                <a:solidFill>
+                  <a:srgbClr val="69737D"/>
+                </a:solidFill>
+                <a:latin typeface="Inter"/>
+              </a:rPr>
+              <a:t>THERMAL</a:t>
+            </a:r>
+          </a:p>
+        </p:txBody>
+      </p:sp>
+      <p:sp>
+        <p:nvSpPr>
+          <p:cNvPr id="10" name="TextBox 9"/>
+          <p:cNvSpPr txBox="1"/>
+          <p:nvPr/>
+        </p:nvSpPr>
+        <p:spPr>
+          <a:xfrm>
+            <a:off x="457200" y="5349240"/>
+            <a:ext cx="1938528" cy="457200"/>
+          </a:xfrm>
+          <a:prstGeom prst="rect">
+            <a:avLst/>
+          </a:prstGeom>
+          <a:noFill/>
+        </p:spPr>
+        <p:txBody>
+          <a:bodyPr wrap="square">
+            <a:spAutoFit/>
+          </a:bodyPr>
+          <a:lstStyle/>
+          <a:p>
+            <a:pPr algn="l"/>
+            <a:r>
+              <a:rPr sz="2200" b="1">
+                <a:solidFill>
+                  <a:srgbClr val="F2F4F5"/>
+                </a:solidFill>
+                <a:latin typeface="Inter"/>
+              </a:rPr>
+              <a:t>0.8434</a:t>
+            </a:r>
+          </a:p>
+        </p:txBody>
+      </p:sp>
+      <p:sp>
+        <p:nvSpPr>
+          <p:cNvPr id="11" name="TextBox 10"/>
+          <p:cNvSpPr txBox="1"/>
+          <p:nvPr/>
+        </p:nvSpPr>
+        <p:spPr>
+          <a:xfrm>
+            <a:off x="457200" y="5824728"/>
+            <a:ext cx="1938528" cy="228600"/>
+          </a:xfrm>
+          <a:prstGeom prst="rect">
+            <a:avLst/>
+          </a:prstGeom>
+          <a:noFill/>
+        </p:spPr>
+        <p:txBody>
+          <a:bodyPr wrap="square">
+            <a:spAutoFit/>
+          </a:bodyPr>
+          <a:lstStyle/>
+          <a:p>
+            <a:pPr algn="l"/>
+            <a:r>
+              <a:rPr sz="1000" b="0">
+                <a:solidFill>
+                  <a:srgbClr val="69737D"/>
+                </a:solidFill>
+                <a:latin typeface="Inter"/>
+              </a:rPr>
+              <a:t>F1_af · micro</a:t>
+            </a:r>
+          </a:p>
+        </p:txBody>
+      </p:sp>
+      <p:sp>
+        <p:nvSpPr>
+          <p:cNvPr id="12" name="Rounded Rectangle 11"/>
+          <p:cNvSpPr/>
+          <p:nvPr/>
+        </p:nvSpPr>
+        <p:spPr>
+          <a:xfrm>
+            <a:off x="2624328" y="5074920"/>
+            <a:ext cx="2194560" cy="1051560"/>
+          </a:xfrm>
+          <a:prstGeom prst="roundRect">
+            <a:avLst>
+              <a:gd name="adj" fmla="val 9000"/>
+            </a:avLst>
+          </a:prstGeom>
+          <a:solidFill>
+            <a:srgbClr val="0A0E12"/>
+          </a:solidFill>
+          <a:ln w="12700">
+            <a:solidFill>
+              <a:srgbClr val="2A333D"/>
+            </a:solidFill>
+          </a:ln>
+        </p:spPr>
+        <p:style>
+          <a:lnRef idx="1">
+            <a:schemeClr val="accent1"/>
+          </a:lnRef>
+          <a:fillRef idx="3">
+            <a:schemeClr val="accent1"/>
+          </a:fillRef>
+          <a:effectRef idx="2">
+            <a:schemeClr val="accent1"/>
+          </a:effectRef>
+          <a:fontRef idx="minor">
+            <a:schemeClr val="lt1"/>
+          </a:fontRef>
+        </p:style>
+        <p:txBody>
+          <a:bodyPr rtlCol="0" anchor="ctr"/>
+          <a:lstStyle/>
+          <a:p>
+            <a:pPr algn="ctr"/>
+          </a:p>
+        </p:txBody>
+      </p:sp>
+      <p:sp>
+        <p:nvSpPr>
+          <p:cNvPr id="13" name="TextBox 12"/>
+          <p:cNvSpPr txBox="1"/>
+          <p:nvPr/>
+        </p:nvSpPr>
+        <p:spPr>
+          <a:xfrm>
+            <a:off x="2761488" y="5129783"/>
+            <a:ext cx="1938528" cy="228600"/>
+          </a:xfrm>
+          <a:prstGeom prst="rect">
+            <a:avLst/>
+          </a:prstGeom>
+          <a:noFill/>
+        </p:spPr>
+        <p:txBody>
+          <a:bodyPr wrap="square">
+            <a:spAutoFit/>
+          </a:bodyPr>
+          <a:lstStyle/>
+          <a:p>
+            <a:pPr algn="l"/>
+            <a:r>
+              <a:rPr sz="1000" b="1">
+                <a:solidFill>
+                  <a:srgbClr val="69737D"/>
+                </a:solidFill>
+                <a:latin typeface="Inter"/>
+              </a:rPr>
+              <a:t>LEVEL 01</a:t>
+            </a:r>
+          </a:p>
+        </p:txBody>
+      </p:sp>
+      <p:sp>
+        <p:nvSpPr>
+          <p:cNvPr id="14" name="TextBox 13"/>
+          <p:cNvSpPr txBox="1"/>
+          <p:nvPr/>
+        </p:nvSpPr>
+        <p:spPr>
+          <a:xfrm>
+            <a:off x="2761488" y="5349240"/>
+            <a:ext cx="1938528" cy="457200"/>
+          </a:xfrm>
+          <a:prstGeom prst="rect">
+            <a:avLst/>
+          </a:prstGeom>
+          <a:noFill/>
+        </p:spPr>
+        <p:txBody>
+          <a:bodyPr wrap="square">
+            <a:spAutoFit/>
+          </a:bodyPr>
+          <a:lstStyle/>
+          <a:p>
+            <a:pPr algn="l"/>
+            <a:r>
+              <a:rPr sz="2200" b="1">
+                <a:solidFill>
+                  <a:srgbClr val="E6C65C"/>
+                </a:solidFill>
+                <a:latin typeface="Inter"/>
+              </a:rPr>
+              <a:t>0.5239</a:t>
+            </a:r>
+          </a:p>
+        </p:txBody>
+      </p:sp>
+      <p:sp>
+        <p:nvSpPr>
+          <p:cNvPr id="15" name="TextBox 14"/>
+          <p:cNvSpPr txBox="1"/>
+          <p:nvPr/>
+        </p:nvSpPr>
+        <p:spPr>
+          <a:xfrm>
+            <a:off x="2761488" y="5824728"/>
+            <a:ext cx="1938528" cy="228600"/>
+          </a:xfrm>
+          <a:prstGeom prst="rect">
+            <a:avLst/>
+          </a:prstGeom>
+          <a:noFill/>
+        </p:spPr>
+        <p:txBody>
+          <a:bodyPr wrap="square">
+            <a:spAutoFit/>
+          </a:bodyPr>
+          <a:lstStyle/>
+          <a:p>
+            <a:pPr algn="l"/>
+            <a:r>
+              <a:rPr sz="1000" b="0">
+                <a:solidFill>
+                  <a:srgbClr val="69737D"/>
+                </a:solidFill>
+                <a:latin typeface="Inter"/>
+              </a:rPr>
+              <a:t>IoU burn</a:t>
+            </a:r>
+          </a:p>
+        </p:txBody>
+      </p:sp>
+      <p:sp>
+        <p:nvSpPr>
+          <p:cNvPr id="16" name="Rounded Rectangle 15"/>
+          <p:cNvSpPr/>
+          <p:nvPr/>
+        </p:nvSpPr>
+        <p:spPr>
+          <a:xfrm>
+            <a:off x="4928616" y="5074920"/>
+            <a:ext cx="2194560" cy="1051560"/>
+          </a:xfrm>
+          <a:prstGeom prst="roundRect">
+            <a:avLst>
+              <a:gd name="adj" fmla="val 9000"/>
+            </a:avLst>
+          </a:prstGeom>
+          <a:solidFill>
+            <a:srgbClr val="0A0E12"/>
+          </a:solidFill>
+          <a:ln w="12700">
+            <a:solidFill>
+              <a:srgbClr val="2A333D"/>
+            </a:solidFill>
+          </a:ln>
+        </p:spPr>
+        <p:style>
+          <a:lnRef idx="1">
+            <a:schemeClr val="accent1"/>
+          </a:lnRef>
+          <a:fillRef idx="3">
+            <a:schemeClr val="accent1"/>
+          </a:fillRef>
+          <a:effectRef idx="2">
+            <a:schemeClr val="accent1"/>
+          </a:effectRef>
+          <a:fontRef idx="minor">
+            <a:schemeClr val="lt1"/>
+          </a:fontRef>
+        </p:style>
+        <p:txBody>
+          <a:bodyPr rtlCol="0" anchor="ctr"/>
+          <a:lstStyle/>
+          <a:p>
+            <a:pPr algn="ctr"/>
+          </a:p>
+        </p:txBody>
+      </p:sp>
+      <p:sp>
+        <p:nvSpPr>
+          <p:cNvPr id="17" name="TextBox 16"/>
+          <p:cNvSpPr txBox="1"/>
+          <p:nvPr/>
+        </p:nvSpPr>
+        <p:spPr>
+          <a:xfrm>
+            <a:off x="5065776" y="5129783"/>
+            <a:ext cx="1938528" cy="228600"/>
+          </a:xfrm>
+          <a:prstGeom prst="rect">
+            <a:avLst/>
+          </a:prstGeom>
+          <a:noFill/>
+        </p:spPr>
+        <p:txBody>
+          <a:bodyPr wrap="square">
+            <a:spAutoFit/>
+          </a:bodyPr>
+          <a:lstStyle/>
+          <a:p>
+            <a:pPr algn="l"/>
+            <a:r>
+              <a:rPr sz="1000" b="1">
+                <a:solidFill>
+                  <a:srgbClr val="69737D"/>
+                </a:solidFill>
+                <a:latin typeface="Inter"/>
+              </a:rPr>
+              <a:t>LEVEL 02</a:t>
+            </a:r>
+          </a:p>
+        </p:txBody>
+      </p:sp>
+      <p:sp>
+        <p:nvSpPr>
+          <p:cNvPr id="18" name="TextBox 17"/>
+          <p:cNvSpPr txBox="1"/>
+          <p:nvPr/>
+        </p:nvSpPr>
+        <p:spPr>
+          <a:xfrm>
+            <a:off x="5065776" y="5349240"/>
+            <a:ext cx="1938528" cy="457200"/>
+          </a:xfrm>
+          <a:prstGeom prst="rect">
+            <a:avLst/>
+          </a:prstGeom>
+          <a:noFill/>
+        </p:spPr>
+        <p:txBody>
+          <a:bodyPr wrap="square">
+            <a:spAutoFit/>
+          </a:bodyPr>
+          <a:lstStyle/>
+          <a:p>
+            <a:pPr algn="l"/>
+            <a:r>
+              <a:rPr sz="2200" b="1">
+                <a:solidFill>
+                  <a:srgbClr val="FF8B5F"/>
+                </a:solidFill>
+                <a:latin typeface="Inter"/>
+              </a:rPr>
+              <a:t>mIoU</a:t>
+            </a:r>
+          </a:p>
+        </p:txBody>
+      </p:sp>
+      <p:sp>
+        <p:nvSpPr>
+          <p:cNvPr id="19" name="TextBox 18"/>
+          <p:cNvSpPr txBox="1"/>
+          <p:nvPr/>
+        </p:nvSpPr>
+        <p:spPr>
+          <a:xfrm>
+            <a:off x="5065776" y="5824728"/>
+            <a:ext cx="1938528" cy="228600"/>
+          </a:xfrm>
+          <a:prstGeom prst="rect">
+            <a:avLst/>
+          </a:prstGeom>
+          <a:noFill/>
+        </p:spPr>
+        <p:txBody>
+          <a:bodyPr wrap="square">
+            <a:spAutoFit/>
+          </a:bodyPr>
+          <a:lstStyle/>
+          <a:p>
+            <a:pPr algn="l"/>
+            <a:r>
+              <a:rPr sz="1000" b="0">
+                <a:solidFill>
+                  <a:srgbClr val="69737D"/>
+                </a:solidFill>
+                <a:latin typeface="Inter"/>
+              </a:rPr>
+              <a:t>0.5430 · sev 1/2/3</a:t>
+            </a:r>
+          </a:p>
+        </p:txBody>
+      </p:sp>
+      <p:sp>
+        <p:nvSpPr>
+          <p:cNvPr id="20" name="Rounded Rectangle 19"/>
+          <p:cNvSpPr/>
+          <p:nvPr/>
+        </p:nvSpPr>
+        <p:spPr>
+          <a:xfrm>
+            <a:off x="7232904" y="5074920"/>
+            <a:ext cx="2194560" cy="1051560"/>
+          </a:xfrm>
+          <a:prstGeom prst="roundRect">
+            <a:avLst>
+              <a:gd name="adj" fmla="val 9000"/>
+            </a:avLst>
+          </a:prstGeom>
+          <a:solidFill>
+            <a:srgbClr val="0A0E12"/>
+          </a:solidFill>
+          <a:ln w="12700">
+            <a:solidFill>
+              <a:srgbClr val="2A333D"/>
+            </a:solidFill>
+          </a:ln>
+        </p:spPr>
+        <p:style>
+          <a:lnRef idx="1">
+            <a:schemeClr val="accent1"/>
+          </a:lnRef>
+          <a:fillRef idx="3">
+            <a:schemeClr val="accent1"/>
+          </a:fillRef>
+          <a:effectRef idx="2">
+            <a:schemeClr val="accent1"/>
+          </a:effectRef>
+          <a:fontRef idx="minor">
+            <a:schemeClr val="lt1"/>
+          </a:fontRef>
+        </p:style>
+        <p:txBody>
+          <a:bodyPr rtlCol="0" anchor="ctr"/>
+          <a:lstStyle/>
+          <a:p>
+            <a:pPr algn="ctr"/>
+          </a:p>
+        </p:txBody>
+      </p:sp>
+      <p:sp>
+        <p:nvSpPr>
+          <p:cNvPr id="21" name="TextBox 20"/>
+          <p:cNvSpPr txBox="1"/>
+          <p:nvPr/>
+        </p:nvSpPr>
+        <p:spPr>
+          <a:xfrm>
+            <a:off x="7370064" y="5129783"/>
+            <a:ext cx="1938528" cy="228600"/>
+          </a:xfrm>
+          <a:prstGeom prst="rect">
+            <a:avLst/>
+          </a:prstGeom>
+          <a:noFill/>
+        </p:spPr>
+        <p:txBody>
+          <a:bodyPr wrap="square">
+            <a:spAutoFit/>
+          </a:bodyPr>
+          <a:lstStyle/>
+          <a:p>
+            <a:pPr algn="l"/>
+            <a:r>
+              <a:rPr sz="1000" b="1">
+                <a:solidFill>
+                  <a:srgbClr val="69737D"/>
+                </a:solidFill>
+                <a:latin typeface="Inter"/>
+              </a:rPr>
+              <a:t>LEVEL 03</a:t>
+            </a:r>
+          </a:p>
+        </p:txBody>
+      </p:sp>
+      <p:sp>
+        <p:nvSpPr>
+          <p:cNvPr id="22" name="TextBox 21"/>
+          <p:cNvSpPr txBox="1"/>
+          <p:nvPr/>
+        </p:nvSpPr>
+        <p:spPr>
+          <a:xfrm>
+            <a:off x="7370064" y="5349240"/>
+            <a:ext cx="1938528" cy="457200"/>
+          </a:xfrm>
+          <a:prstGeom prst="rect">
+            <a:avLst/>
+          </a:prstGeom>
+          <a:noFill/>
+        </p:spPr>
+        <p:txBody>
+          <a:bodyPr wrap="square">
+            <a:spAutoFit/>
+          </a:bodyPr>
+          <a:lstStyle/>
+          <a:p>
+            <a:pPr algn="l"/>
+            <a:r>
+              <a:rPr sz="2200" b="1">
+                <a:solidFill>
+                  <a:srgbClr val="F2F4F5"/>
+                </a:solidFill>
+                <a:latin typeface="Inter"/>
+              </a:rPr>
+              <a:t>447</a:t>
+            </a:r>
+          </a:p>
+        </p:txBody>
+      </p:sp>
+      <p:sp>
+        <p:nvSpPr>
+          <p:cNvPr id="23" name="TextBox 22"/>
+          <p:cNvSpPr txBox="1"/>
+          <p:nvPr/>
+        </p:nvSpPr>
+        <p:spPr>
+          <a:xfrm>
+            <a:off x="7370064" y="5824728"/>
+            <a:ext cx="1938528" cy="228600"/>
+          </a:xfrm>
+          <a:prstGeom prst="rect">
+            <a:avLst/>
+          </a:prstGeom>
+          <a:noFill/>
+        </p:spPr>
+        <p:txBody>
+          <a:bodyPr wrap="square">
+            <a:spAutoFit/>
+          </a:bodyPr>
+          <a:lstStyle/>
+          <a:p>
+            <a:pPr algn="l"/>
+            <a:r>
+              <a:rPr sz="1000" b="0">
+                <a:solidFill>
+                  <a:srgbClr val="69737D"/>
+                </a:solidFill>
+                <a:latin typeface="Inter"/>
+              </a:rPr>
+              <a:t>строк · NaN 0</a:t>
+            </a:r>
+          </a:p>
+        </p:txBody>
+      </p:sp>
+      <p:sp>
+        <p:nvSpPr>
+          <p:cNvPr id="24" name="Rounded Rectangle 23"/>
+          <p:cNvSpPr/>
+          <p:nvPr/>
+        </p:nvSpPr>
+        <p:spPr>
+          <a:xfrm>
+            <a:off x="9537192" y="5074920"/>
+            <a:ext cx="2194560" cy="1051560"/>
+          </a:xfrm>
+          <a:prstGeom prst="roundRect">
+            <a:avLst>
+              <a:gd name="adj" fmla="val 9000"/>
+            </a:avLst>
+          </a:prstGeom>
+          <a:solidFill>
+            <a:srgbClr val="0A0E12"/>
+          </a:solidFill>
+          <a:ln w="12700">
+            <a:solidFill>
+              <a:srgbClr val="2A333D"/>
+            </a:solidFill>
+          </a:ln>
+        </p:spPr>
+        <p:style>
+          <a:lnRef idx="1">
+            <a:schemeClr val="accent1"/>
+          </a:lnRef>
+          <a:fillRef idx="3">
+            <a:schemeClr val="accent1"/>
+          </a:fillRef>
+          <a:effectRef idx="2">
+            <a:schemeClr val="accent1"/>
+          </a:effectRef>
+          <a:fontRef idx="minor">
+            <a:schemeClr val="lt1"/>
+          </a:fontRef>
+        </p:style>
+        <p:txBody>
+          <a:bodyPr rtlCol="0" anchor="ctr"/>
+          <a:lstStyle/>
+          <a:p>
+            <a:pPr algn="ctr"/>
+          </a:p>
+        </p:txBody>
+      </p:sp>
+      <p:sp>
+        <p:nvSpPr>
+          <p:cNvPr id="25" name="TextBox 24"/>
+          <p:cNvSpPr txBox="1"/>
+          <p:nvPr/>
+        </p:nvSpPr>
+        <p:spPr>
+          <a:xfrm>
+            <a:off x="9674352" y="5129783"/>
+            <a:ext cx="1938528" cy="228600"/>
+          </a:xfrm>
+          <a:prstGeom prst="rect">
+            <a:avLst/>
+          </a:prstGeom>
+          <a:noFill/>
+        </p:spPr>
+        <p:txBody>
+          <a:bodyPr wrap="square">
+            <a:spAutoFit/>
+          </a:bodyPr>
+          <a:lstStyle/>
+          <a:p>
+            <a:pPr algn="l"/>
+            <a:r>
+              <a:rPr sz="1000" b="1">
+                <a:solidFill>
+                  <a:srgbClr val="69737D"/>
+                </a:solidFill>
+                <a:latin typeface="Inter"/>
+              </a:rPr>
+              <a:t>STATUS</a:t>
+            </a:r>
+          </a:p>
+        </p:txBody>
+      </p:sp>
+      <p:sp>
+        <p:nvSpPr>
+          <p:cNvPr id="26" name="TextBox 25"/>
+          <p:cNvSpPr txBox="1"/>
+          <p:nvPr/>
+        </p:nvSpPr>
+        <p:spPr>
+          <a:xfrm>
+            <a:off x="9674352" y="5349240"/>
+            <a:ext cx="1938528" cy="457200"/>
+          </a:xfrm>
+          <a:prstGeom prst="rect">
+            <a:avLst/>
+          </a:prstGeom>
+          <a:noFill/>
+        </p:spPr>
+        <p:txBody>
+          <a:bodyPr wrap="square">
+            <a:spAutoFit/>
+          </a:bodyPr>
+          <a:lstStyle/>
+          <a:p>
+            <a:pPr algn="l"/>
+            <a:r>
+              <a:rPr sz="2200" b="1">
+                <a:solidFill>
+                  <a:srgbClr val="62D99A"/>
+                </a:solidFill>
+                <a:latin typeface="Inter"/>
+              </a:rPr>
+              <a:t>FINAL</a:t>
+            </a:r>
+          </a:p>
+        </p:txBody>
+      </p:sp>
+      <p:sp>
+        <p:nvSpPr>
+          <p:cNvPr id="27" name="TextBox 26"/>
+          <p:cNvSpPr txBox="1"/>
+          <p:nvPr/>
+        </p:nvSpPr>
+        <p:spPr>
+          <a:xfrm>
+            <a:off x="9674352" y="5824728"/>
+            <a:ext cx="1938528" cy="228600"/>
+          </a:xfrm>
+          <a:prstGeom prst="rect">
+            <a:avLst/>
+          </a:prstGeom>
+          <a:noFill/>
+        </p:spPr>
+        <p:txBody>
+          <a:bodyPr wrap="square">
+            <a:spAutoFit/>
+          </a:bodyPr>
+          <a:lstStyle/>
+          <a:p>
+            <a:pPr algn="l"/>
+            <a:r>
+              <a:rPr sz="1000" b="0">
+                <a:solidFill>
+                  <a:srgbClr val="69737D"/>
+                </a:solidFill>
+                <a:latin typeface="Inter"/>
+              </a:rPr>
+              <a:t>переобучение запрещено</a:t>
             </a:r>
           </a:p>
         </p:txBody>
@@ -7221,14 +8552,104 @@
       <p:grpSpPr/>
       <p:sp>
         <p:nvSpPr>
-          <p:cNvPr id="2" name="TextBox 1"/>
+          <p:cNvPr id="2" name="Rounded Rectangle 1"/>
+          <p:cNvSpPr/>
+          <p:nvPr/>
+        </p:nvSpPr>
+        <p:spPr>
+          <a:xfrm>
+            <a:off x="5074920" y="228600"/>
+            <a:ext cx="2057400" cy="685800"/>
+          </a:xfrm>
+          <a:prstGeom prst="roundRect">
+            <a:avLst>
+              <a:gd name="adj" fmla="val 9000"/>
+            </a:avLst>
+          </a:prstGeom>
+          <a:solidFill>
+            <a:srgbClr val="0A0E12"/>
+          </a:solidFill>
+          <a:ln w="12700">
+            <a:solidFill>
+              <a:srgbClr val="2A333D"/>
+            </a:solidFill>
+          </a:ln>
+        </p:spPr>
+        <p:style>
+          <a:lnRef idx="1">
+            <a:schemeClr val="accent1"/>
+          </a:lnRef>
+          <a:fillRef idx="3">
+            <a:schemeClr val="accent1"/>
+          </a:fillRef>
+          <a:effectRef idx="2">
+            <a:schemeClr val="accent1"/>
+          </a:effectRef>
+          <a:fontRef idx="minor">
+            <a:schemeClr val="lt1"/>
+          </a:fontRef>
+        </p:style>
+        <p:txBody>
+          <a:bodyPr rtlCol="0" anchor="ctr"/>
+          <a:lstStyle/>
+          <a:p>
+            <a:pPr algn="ctr"/>
+          </a:p>
+        </p:txBody>
+      </p:sp>
+      <p:sp>
+        <p:nvSpPr>
+          <p:cNvPr id="3" name="Oval 2"/>
+          <p:cNvSpPr/>
+          <p:nvPr/>
+        </p:nvSpPr>
+        <p:spPr>
+          <a:xfrm>
+            <a:off x="5257800" y="457200"/>
+            <a:ext cx="128016" cy="128016"/>
+          </a:xfrm>
+          <a:prstGeom prst="ellipse">
+            <a:avLst/>
+          </a:prstGeom>
+          <a:solidFill>
+            <a:srgbClr val="62D99A"/>
+          </a:solidFill>
+          <a:ln>
+            <a:noFill/>
+          </a:ln>
+        </p:spPr>
+        <p:style>
+          <a:lnRef idx="1">
+            <a:schemeClr val="accent1"/>
+          </a:lnRef>
+          <a:fillRef idx="3">
+            <a:schemeClr val="accent1"/>
+          </a:fillRef>
+          <a:effectRef idx="2">
+            <a:schemeClr val="accent1"/>
+          </a:effectRef>
+          <a:fontRef idx="minor">
+            <a:schemeClr val="lt1"/>
+          </a:fontRef>
+        </p:style>
+        <p:txBody>
+          <a:bodyPr rtlCol="0" anchor="ctr"/>
+          <a:lstStyle/>
+          <a:p>
+            <a:pPr algn="ctr"/>
+          </a:p>
+        </p:txBody>
+      </p:sp>
+      <p:sp>
+        <p:nvSpPr>
+          <p:cNvPr id="4" name="TextBox 3"/>
           <p:cNvSpPr txBox="1"/>
           <p:nvPr/>
         </p:nvSpPr>
         <p:spPr>
           <a:xfrm>
-            <a:off x="731520" y="411480"/>
-            <a:ext cx="10698480" cy="320040"/>
+            <a:off x="5486400" y="256032"/>
+            <a:ext cx="1463040" cy="320040"/>
           </a:xfrm>
           <a:prstGeom prst="rect">
             <a:avLst/>
@@ -7241,38 +8662,29 @@
           </a:bodyPr>
           <a:lstStyle/>
           <a:p>
-            <a:pPr algn="l"/>
-            <a:r>
-              <a:rPr sz="1300" b="1">
-                <a:solidFill>
-                  <a:srgbClr val="69737D"/>
-                </a:solidFill>
-                <a:latin typeface="Inter"/>
-              </a:rPr>
-              <a:t>06  </a:t>
-            </a:r>
-            <a:r>
-              <a:rPr sz="1300" b="1">
-                <a:solidFill>
-                  <a:srgbClr val="69737D"/>
-                </a:solidFill>
-                <a:latin typeface="Inter"/>
-              </a:rPr>
-              <a:t>СЕРВИС · ВАРИАНТ A</a:t>
-            </a:r>
-          </a:p>
-        </p:txBody>
-      </p:sp>
-      <p:sp>
-        <p:nvSpPr>
-          <p:cNvPr id="3" name="TextBox 2"/>
+            <a:pPr algn="ctr"/>
+            <a:r>
+              <a:rPr sz="1400" b="1">
+                <a:solidFill>
+                  <a:srgbClr val="F2F4F5"/>
+                </a:solidFill>
+                <a:latin typeface="Inter"/>
+              </a:rPr>
+              <a:t>ЖИМ НОГАМИ</a:t>
+            </a:r>
+          </a:p>
+        </p:txBody>
+      </p:sp>
+      <p:sp>
+        <p:nvSpPr>
+          <p:cNvPr id="5" name="TextBox 4"/>
           <p:cNvSpPr txBox="1"/>
           <p:nvPr/>
         </p:nvSpPr>
         <p:spPr>
           <a:xfrm>
-            <a:off x="731520" y="777240"/>
-            <a:ext cx="10698480" cy="914400"/>
+            <a:off x="5486400" y="530352"/>
+            <a:ext cx="1463040" cy="274320"/>
           </a:xfrm>
           <a:prstGeom prst="rect">
             <a:avLst/>
@@ -7285,29 +8697,76 @@
           </a:bodyPr>
           <a:lstStyle/>
           <a:p>
-            <a:pPr algn="l"/>
-            <a:r>
-              <a:rPr sz="3400" b="1">
-                <a:solidFill>
-                  <a:srgbClr val="F2F4F5"/>
-                </a:solidFill>
-                <a:latin typeface="Inter"/>
-              </a:rPr>
-              <a:t>API + карта · файловый бэк · без БД</a:t>
-            </a:r>
-          </a:p>
-        </p:txBody>
-      </p:sp>
-      <p:sp>
-        <p:nvSpPr>
-          <p:cNvPr id="4" name="TextBox 3"/>
+            <a:pPr algn="ctr"/>
+            <a:r>
+              <a:rPr sz="800" b="0">
+                <a:solidFill>
+                  <a:srgbClr val="69737D"/>
+                </a:solidFill>
+                <a:latin typeface="Inter"/>
+              </a:rPr>
+              <a:t>FIRE MONITOR · KOSMOHACK 2026</a:t>
+            </a:r>
+          </a:p>
+        </p:txBody>
+      </p:sp>
+      <p:sp>
+        <p:nvSpPr>
+          <p:cNvPr id="6" name="Rounded Rectangle 5"/>
+          <p:cNvSpPr/>
+          <p:nvPr/>
+        </p:nvSpPr>
+        <p:spPr>
+          <a:xfrm>
+            <a:off x="320040" y="1188720"/>
+            <a:ext cx="11521440" cy="4846320"/>
+          </a:xfrm>
+          <a:prstGeom prst="roundRect">
+            <a:avLst>
+              <a:gd name="adj" fmla="val 9000"/>
+            </a:avLst>
+          </a:prstGeom>
+          <a:solidFill>
+            <a:srgbClr val="0A0E12"/>
+          </a:solidFill>
+          <a:ln w="12700">
+            <a:solidFill>
+              <a:srgbClr val="2A333D"/>
+            </a:solidFill>
+          </a:ln>
+        </p:spPr>
+        <p:style>
+          <a:lnRef idx="1">
+            <a:schemeClr val="accent1"/>
+          </a:lnRef>
+          <a:fillRef idx="3">
+            <a:schemeClr val="accent1"/>
+          </a:fillRef>
+          <a:effectRef idx="2">
+            <a:schemeClr val="accent1"/>
+          </a:effectRef>
+          <a:fontRef idx="minor">
+            <a:schemeClr val="lt1"/>
+          </a:fontRef>
+        </p:style>
+        <p:txBody>
+          <a:bodyPr rtlCol="0" anchor="ctr"/>
+          <a:lstStyle/>
+          <a:p>
+            <a:pPr algn="ctr"/>
+          </a:p>
+        </p:txBody>
+      </p:sp>
+      <p:sp>
+        <p:nvSpPr>
+          <p:cNvPr id="7" name="TextBox 6"/>
           <p:cNvSpPr txBox="1"/>
           <p:nvPr/>
         </p:nvSpPr>
         <p:spPr>
           <a:xfrm>
-            <a:off x="914400" y="1920240"/>
-            <a:ext cx="4206240" cy="548640"/>
+            <a:off x="594360" y="1325880"/>
+            <a:ext cx="914400" cy="274320"/>
           </a:xfrm>
           <a:prstGeom prst="rect">
             <a:avLst/>
@@ -7322,27 +8781,27 @@
           <a:p>
             <a:pPr algn="l"/>
             <a:r>
-              <a:rPr sz="1600" b="1">
-                <a:solidFill>
-                  <a:srgbClr val="FF8B5F"/>
-                </a:solidFill>
-                <a:latin typeface="Inter"/>
-              </a:rPr>
-              <a:t>GET /v1/health</a:t>
-            </a:r>
-          </a:p>
-        </p:txBody>
-      </p:sp>
-      <p:sp>
-        <p:nvSpPr>
-          <p:cNvPr id="5" name="TextBox 4"/>
+              <a:rPr sz="1100" b="1">
+                <a:solidFill>
+                  <a:srgbClr val="69737D"/>
+                </a:solidFill>
+                <a:latin typeface="Inter"/>
+              </a:rPr>
+              <a:t>05</a:t>
+            </a:r>
+          </a:p>
+        </p:txBody>
+      </p:sp>
+      <p:sp>
+        <p:nvSpPr>
+          <p:cNvPr id="8" name="TextBox 7"/>
           <p:cNvSpPr txBox="1"/>
           <p:nvPr/>
         </p:nvSpPr>
         <p:spPr>
           <a:xfrm>
-            <a:off x="5120640" y="1920240"/>
-            <a:ext cx="6309360" cy="548640"/>
+            <a:off x="594360" y="1572768"/>
+            <a:ext cx="10972800" cy="457200"/>
           </a:xfrm>
           <a:prstGeom prst="rect">
             <a:avLst/>
@@ -7357,27 +8816,70 @@
           <a:p>
             <a:pPr algn="l"/>
             <a:r>
-              <a:rPr sz="1600" b="0">
-                <a:solidFill>
-                  <a:srgbClr val="A4ADB5"/>
-                </a:solidFill>
-                <a:latin typeface="Inter"/>
-              </a:rPr>
-              <a:t>{status: ok} — зелёный бейдж в шапке</a:t>
-            </a:r>
-          </a:p>
-        </p:txBody>
-      </p:sp>
-      <p:sp>
-        <p:nvSpPr>
-          <p:cNvPr id="6" name="TextBox 5"/>
+              <a:rPr sz="2100" b="1">
+                <a:solidFill>
+                  <a:srgbClr val="F2F4F5"/>
+                </a:solidFill>
+                <a:latin typeface="Inter"/>
+              </a:rPr>
+              <a:t>Сервис · Вариант A</a:t>
+            </a:r>
+          </a:p>
+        </p:txBody>
+      </p:sp>
+      <p:sp>
+        <p:nvSpPr>
+          <p:cNvPr id="9" name="Oval 8"/>
+          <p:cNvSpPr/>
+          <p:nvPr/>
+        </p:nvSpPr>
+        <p:spPr>
+          <a:xfrm>
+            <a:off x="594360" y="2331720"/>
+            <a:ext cx="137160" cy="137160"/>
+          </a:xfrm>
+          <a:prstGeom prst="ellipse">
+            <a:avLst/>
+          </a:prstGeom>
+          <a:solidFill>
+            <a:srgbClr val="62D99A"/>
+          </a:solidFill>
+          <a:ln>
+            <a:noFill/>
+          </a:ln>
+        </p:spPr>
+        <p:style>
+          <a:lnRef idx="1">
+            <a:schemeClr val="accent1"/>
+          </a:lnRef>
+          <a:fillRef idx="3">
+            <a:schemeClr val="accent1"/>
+          </a:fillRef>
+          <a:effectRef idx="2">
+            <a:schemeClr val="accent1"/>
+          </a:effectRef>
+          <a:fontRef idx="minor">
+            <a:schemeClr val="lt1"/>
+          </a:fontRef>
+        </p:style>
+        <p:txBody>
+          <a:bodyPr rtlCol="0" anchor="ctr"/>
+          <a:lstStyle/>
+          <a:p>
+            <a:pPr algn="ctr"/>
+          </a:p>
+        </p:txBody>
+      </p:sp>
+      <p:sp>
+        <p:nvSpPr>
+          <p:cNvPr id="10" name="TextBox 9"/>
           <p:cNvSpPr txBox="1"/>
           <p:nvPr/>
         </p:nvSpPr>
         <p:spPr>
           <a:xfrm>
-            <a:off x="914400" y="2697480"/>
-            <a:ext cx="4206240" cy="548640"/>
+            <a:off x="868680" y="2194560"/>
+            <a:ext cx="10698480" cy="594360"/>
           </a:xfrm>
           <a:prstGeom prst="rect">
             <a:avLst/>
@@ -7392,27 +8894,80 @@
           <a:p>
             <a:pPr algn="l"/>
             <a:r>
-              <a:rPr sz="1600" b="1">
-                <a:solidFill>
-                  <a:srgbClr val="FF8B5F"/>
-                </a:solidFill>
-                <a:latin typeface="Inter"/>
-              </a:rPr>
-              <a:t>GET /v1/fires?bbox=&amp;dates=</a:t>
-            </a:r>
-          </a:p>
-        </p:txBody>
-      </p:sp>
-      <p:sp>
-        <p:nvSpPr>
-          <p:cNvPr id="7" name="TextBox 6"/>
+              <a:rPr sz="1400" b="1">
+                <a:solidFill>
+                  <a:srgbClr val="F2F4F5"/>
+                </a:solidFill>
+                <a:latin typeface="Inter"/>
+              </a:rPr>
+              <a:t>GET /v1/health</a:t>
+            </a:r>
+            <a:r>
+              <a:rPr sz="1100" b="0">
+                <a:solidFill>
+                  <a:srgbClr val="69737D"/>
+                </a:solidFill>
+                <a:latin typeface="Inter"/>
+              </a:rPr>
+              <a:t>
+{status: ok} — бейдж в шапке</a:t>
+            </a:r>
+          </a:p>
+        </p:txBody>
+      </p:sp>
+      <p:sp>
+        <p:nvSpPr>
+          <p:cNvPr id="11" name="Oval 10"/>
+          <p:cNvSpPr/>
+          <p:nvPr/>
+        </p:nvSpPr>
+        <p:spPr>
+          <a:xfrm>
+            <a:off x="594360" y="3200400"/>
+            <a:ext cx="137160" cy="137160"/>
+          </a:xfrm>
+          <a:prstGeom prst="ellipse">
+            <a:avLst/>
+          </a:prstGeom>
+          <a:solidFill>
+            <a:srgbClr val="EF5B5B"/>
+          </a:solidFill>
+          <a:ln>
+            <a:noFill/>
+          </a:ln>
+        </p:spPr>
+        <p:style>
+          <a:lnRef idx="1">
+            <a:schemeClr val="accent1"/>
+          </a:lnRef>
+          <a:fillRef idx="3">
+            <a:schemeClr val="accent1"/>
+          </a:fillRef>
+          <a:effectRef idx="2">
+            <a:schemeClr val="accent1"/>
+          </a:effectRef>
+          <a:fontRef idx="minor">
+            <a:schemeClr val="lt1"/>
+          </a:fontRef>
+        </p:style>
+        <p:txBody>
+          <a:bodyPr rtlCol="0" anchor="ctr"/>
+          <a:lstStyle/>
+          <a:p>
+            <a:pPr algn="ctr"/>
+          </a:p>
+        </p:txBody>
+      </p:sp>
+      <p:sp>
+        <p:nvSpPr>
+          <p:cNvPr id="12" name="TextBox 11"/>
           <p:cNvSpPr txBox="1"/>
           <p:nvPr/>
         </p:nvSpPr>
         <p:spPr>
           <a:xfrm>
-            <a:off x="5120640" y="2697480"/>
-            <a:ext cx="6309360" cy="548640"/>
+            <a:off x="868680" y="3063240"/>
+            <a:ext cx="10698480" cy="594360"/>
           </a:xfrm>
           <a:prstGeom prst="rect">
             <a:avLst/>
@@ -7427,27 +8982,80 @@
           <a:p>
             <a:pPr algn="l"/>
             <a:r>
-              <a:rPr sz="1600" b="0">
-                <a:solidFill>
-                  <a:srgbClr val="A4ADB5"/>
-                </a:solidFill>
-                <a:latin typeface="Inter"/>
-              </a:rPr>
-              <a:t>точки термоточек · красный маркер</a:t>
-            </a:r>
-          </a:p>
-        </p:txBody>
-      </p:sp>
-      <p:sp>
-        <p:nvSpPr>
-          <p:cNvPr id="8" name="TextBox 7"/>
+              <a:rPr sz="1400" b="1">
+                <a:solidFill>
+                  <a:srgbClr val="F2F4F5"/>
+                </a:solidFill>
+                <a:latin typeface="Inter"/>
+              </a:rPr>
+              <a:t>GET fires / burned</a:t>
+            </a:r>
+            <a:r>
+              <a:rPr sz="1100" b="0">
+                <a:solidFill>
+                  <a:srgbClr val="69737D"/>
+                </a:solidFill>
+                <a:latin typeface="Inter"/>
+              </a:rPr>
+              <a:t>
+точки · полигоны {severity, area_ha} · shp-zip</a:t>
+            </a:r>
+          </a:p>
+        </p:txBody>
+      </p:sp>
+      <p:sp>
+        <p:nvSpPr>
+          <p:cNvPr id="13" name="Oval 12"/>
+          <p:cNvSpPr/>
+          <p:nvPr/>
+        </p:nvSpPr>
+        <p:spPr>
+          <a:xfrm>
+            <a:off x="594360" y="4069079"/>
+            <a:ext cx="137160" cy="137160"/>
+          </a:xfrm>
+          <a:prstGeom prst="ellipse">
+            <a:avLst/>
+          </a:prstGeom>
+          <a:solidFill>
+            <a:srgbClr val="E6C65C"/>
+          </a:solidFill>
+          <a:ln>
+            <a:noFill/>
+          </a:ln>
+        </p:spPr>
+        <p:style>
+          <a:lnRef idx="1">
+            <a:schemeClr val="accent1"/>
+          </a:lnRef>
+          <a:fillRef idx="3">
+            <a:schemeClr val="accent1"/>
+          </a:fillRef>
+          <a:effectRef idx="2">
+            <a:schemeClr val="accent1"/>
+          </a:effectRef>
+          <a:fontRef idx="minor">
+            <a:schemeClr val="lt1"/>
+          </a:fontRef>
+        </p:style>
+        <p:txBody>
+          <a:bodyPr rtlCol="0" anchor="ctr"/>
+          <a:lstStyle/>
+          <a:p>
+            <a:pPr algn="ctr"/>
+          </a:p>
+        </p:txBody>
+      </p:sp>
+      <p:sp>
+        <p:nvSpPr>
+          <p:cNvPr id="14" name="TextBox 13"/>
           <p:cNvSpPr txBox="1"/>
           <p:nvPr/>
         </p:nvSpPr>
         <p:spPr>
           <a:xfrm>
-            <a:off x="914400" y="3474720"/>
-            <a:ext cx="4206240" cy="548640"/>
+            <a:off x="868680" y="3931920"/>
+            <a:ext cx="10698480" cy="594360"/>
           </a:xfrm>
           <a:prstGeom prst="rect">
             <a:avLst/>
@@ -7462,27 +9070,80 @@
           <a:p>
             <a:pPr algn="l"/>
             <a:r>
-              <a:rPr sz="1600" b="1">
-                <a:solidFill>
-                  <a:srgbClr val="FF8B5F"/>
-                </a:solidFill>
-                <a:latin typeface="Inter"/>
-              </a:rPr>
-              <a:t>GET /v1/burned-areas?severity=</a:t>
-            </a:r>
-          </a:p>
-        </p:txBody>
-      </p:sp>
-      <p:sp>
-        <p:nvSpPr>
-          <p:cNvPr id="9" name="TextBox 8"/>
+              <a:rPr sz="1400" b="1">
+                <a:solidFill>
+                  <a:srgbClr val="F2F4F5"/>
+                </a:solidFill>
+                <a:latin typeface="Inter"/>
+              </a:rPr>
+              <a:t>GET /v1/analytics</a:t>
+            </a:r>
+            <a:r>
+              <a:rPr sz="1100" b="0">
+                <a:solidFill>
+                  <a:srgbClr val="69737D"/>
+                </a:solidFill>
+                <a:latin typeface="Inter"/>
+              </a:rPr>
+              <a:t>
+справка: га + распределение — нижняя плашка</a:t>
+            </a:r>
+          </a:p>
+        </p:txBody>
+      </p:sp>
+      <p:sp>
+        <p:nvSpPr>
+          <p:cNvPr id="15" name="Oval 14"/>
+          <p:cNvSpPr/>
+          <p:nvPr/>
+        </p:nvSpPr>
+        <p:spPr>
+          <a:xfrm>
+            <a:off x="594360" y="4937759"/>
+            <a:ext cx="137160" cy="137160"/>
+          </a:xfrm>
+          <a:prstGeom prst="ellipse">
+            <a:avLst/>
+          </a:prstGeom>
+          <a:solidFill>
+            <a:srgbClr val="FF6B35"/>
+          </a:solidFill>
+          <a:ln>
+            <a:noFill/>
+          </a:ln>
+        </p:spPr>
+        <p:style>
+          <a:lnRef idx="1">
+            <a:schemeClr val="accent1"/>
+          </a:lnRef>
+          <a:fillRef idx="3">
+            <a:schemeClr val="accent1"/>
+          </a:fillRef>
+          <a:effectRef idx="2">
+            <a:schemeClr val="accent1"/>
+          </a:effectRef>
+          <a:fontRef idx="minor">
+            <a:schemeClr val="lt1"/>
+          </a:fontRef>
+        </p:style>
+        <p:txBody>
+          <a:bodyPr rtlCol="0" anchor="ctr"/>
+          <a:lstStyle/>
+          <a:p>
+            <a:pPr algn="ctr"/>
+          </a:p>
+        </p:txBody>
+      </p:sp>
+      <p:sp>
+        <p:nvSpPr>
+          <p:cNvPr id="16" name="TextBox 15"/>
           <p:cNvSpPr txBox="1"/>
           <p:nvPr/>
         </p:nvSpPr>
         <p:spPr>
           <a:xfrm>
-            <a:off x="5120640" y="3474720"/>
-            <a:ext cx="6309360" cy="548640"/>
+            <a:off x="868680" y="4800600"/>
+            <a:ext cx="10698480" cy="594360"/>
           </a:xfrm>
           <a:prstGeom prst="rect">
             <a:avLst/>
@@ -7497,153 +9158,23 @@
           <a:p>
             <a:pPr algn="l"/>
             <a:r>
-              <a:rPr sz="1600" b="0">
-                <a:solidFill>
-                  <a:srgbClr val="A4ADB5"/>
-                </a:solidFill>
-                <a:latin typeface="Inter"/>
-              </a:rPr>
-              <a:t>полигоны {id, severity, area_ha, даты} · geojson/json/shp</a:t>
-            </a:r>
-          </a:p>
-        </p:txBody>
-      </p:sp>
-      <p:sp>
-        <p:nvSpPr>
-          <p:cNvPr id="10" name="TextBox 9"/>
-          <p:cNvSpPr txBox="1"/>
-          <p:nvPr/>
-        </p:nvSpPr>
-        <p:spPr>
-          <a:xfrm>
-            <a:off x="914400" y="4251960"/>
-            <a:ext cx="4206240" cy="548640"/>
-          </a:xfrm>
-          <a:prstGeom prst="rect">
-            <a:avLst/>
-          </a:prstGeom>
-          <a:noFill/>
-        </p:spPr>
-        <p:txBody>
-          <a:bodyPr wrap="square">
-            <a:spAutoFit/>
-          </a:bodyPr>
-          <a:lstStyle/>
-          <a:p>
-            <a:pPr algn="l"/>
-            <a:r>
-              <a:rPr sz="1600" b="1">
-                <a:solidFill>
-                  <a:srgbClr val="FF8B5F"/>
-                </a:solidFill>
-                <a:latin typeface="Inter"/>
-              </a:rPr>
-              <a:t>GET /v1/analytics</a:t>
-            </a:r>
-          </a:p>
-        </p:txBody>
-      </p:sp>
-      <p:sp>
-        <p:nvSpPr>
-          <p:cNvPr id="11" name="TextBox 10"/>
-          <p:cNvSpPr txBox="1"/>
-          <p:nvPr/>
-        </p:nvSpPr>
-        <p:spPr>
-          <a:xfrm>
-            <a:off x="5120640" y="4251960"/>
-            <a:ext cx="6309360" cy="548640"/>
-          </a:xfrm>
-          <a:prstGeom prst="rect">
-            <a:avLst/>
-          </a:prstGeom>
-          <a:noFill/>
-        </p:spPr>
-        <p:txBody>
-          <a:bodyPr wrap="square">
-            <a:spAutoFit/>
-          </a:bodyPr>
-          <a:lstStyle/>
-          <a:p>
-            <a:pPr algn="l"/>
-            <a:r>
-              <a:rPr sz="1600" b="0">
-                <a:solidFill>
-                  <a:srgbClr val="A4ADB5"/>
-                </a:solidFill>
-                <a:latin typeface="Inter"/>
-              </a:rPr>
-              <a:t>{fire_points, total_burned_ha, by_severity_ha/pct} — нижняя плашка</a:t>
-            </a:r>
-          </a:p>
-        </p:txBody>
-      </p:sp>
-      <p:sp>
-        <p:nvSpPr>
-          <p:cNvPr id="12" name="TextBox 11"/>
-          <p:cNvSpPr txBox="1"/>
-          <p:nvPr/>
-        </p:nvSpPr>
-        <p:spPr>
-          <a:xfrm>
-            <a:off x="914400" y="5029200"/>
-            <a:ext cx="4206240" cy="548640"/>
-          </a:xfrm>
-          <a:prstGeom prst="rect">
-            <a:avLst/>
-          </a:prstGeom>
-          <a:noFill/>
-        </p:spPr>
-        <p:txBody>
-          <a:bodyPr wrap="square">
-            <a:spAutoFit/>
-          </a:bodyPr>
-          <a:lstStyle/>
-          <a:p>
-            <a:pPr algn="l"/>
-            <a:r>
-              <a:rPr sz="1600" b="1">
-                <a:solidFill>
-                  <a:srgbClr val="FF8B5F"/>
-                </a:solidFill>
-                <a:latin typeface="Inter"/>
-              </a:rPr>
-              <a:t>POST /v1/*/query</a:t>
-            </a:r>
-          </a:p>
-        </p:txBody>
-      </p:sp>
-      <p:sp>
-        <p:nvSpPr>
-          <p:cNvPr id="13" name="TextBox 12"/>
-          <p:cNvSpPr txBox="1"/>
-          <p:nvPr/>
-        </p:nvSpPr>
-        <p:spPr>
-          <a:xfrm>
-            <a:off x="5120640" y="5029200"/>
-            <a:ext cx="6309360" cy="548640"/>
-          </a:xfrm>
-          <a:prstGeom prst="rect">
-            <a:avLst/>
-          </a:prstGeom>
-          <a:noFill/>
-        </p:spPr>
-        <p:txBody>
-          <a:bodyPr wrap="square">
-            <a:spAutoFit/>
-          </a:bodyPr>
-          <a:lstStyle/>
-          <a:p>
-            <a:pPr algn="l"/>
-            <a:r>
-              <a:rPr sz="1600" b="0">
-                <a:solidFill>
-                  <a:srgbClr val="A4ADB5"/>
-                </a:solidFill>
-                <a:latin typeface="Inter"/>
-              </a:rPr>
-              <a:t>тот же ответ по GeoJSON-полигону · CORS только localhost</a:t>
+              <a:rPr sz="1400" b="1">
+                <a:solidFill>
+                  <a:srgbClr val="F2F4F5"/>
+                </a:solidFill>
+                <a:latin typeface="Inter"/>
+              </a:rPr>
+              <a:t>POST */query</a:t>
+            </a:r>
+            <a:r>
+              <a:rPr sz="1100" b="0">
+                <a:solidFill>
+                  <a:srgbClr val="69737D"/>
+                </a:solidFill>
+                <a:latin typeface="Inter"/>
+              </a:rPr>
+              <a:t>
+тот же ответ по полигону · CORS localhost</a:t>
             </a:r>
           </a:p>
         </p:txBody>
@@ -7726,14 +9257,104 @@
       <p:grpSpPr/>
       <p:sp>
         <p:nvSpPr>
-          <p:cNvPr id="2" name="TextBox 1"/>
+          <p:cNvPr id="2" name="Rounded Rectangle 1"/>
+          <p:cNvSpPr/>
+          <p:nvPr/>
+        </p:nvSpPr>
+        <p:spPr>
+          <a:xfrm>
+            <a:off x="5074920" y="228600"/>
+            <a:ext cx="2057400" cy="685800"/>
+          </a:xfrm>
+          <a:prstGeom prst="roundRect">
+            <a:avLst>
+              <a:gd name="adj" fmla="val 9000"/>
+            </a:avLst>
+          </a:prstGeom>
+          <a:solidFill>
+            <a:srgbClr val="0A0E12"/>
+          </a:solidFill>
+          <a:ln w="12700">
+            <a:solidFill>
+              <a:srgbClr val="2A333D"/>
+            </a:solidFill>
+          </a:ln>
+        </p:spPr>
+        <p:style>
+          <a:lnRef idx="1">
+            <a:schemeClr val="accent1"/>
+          </a:lnRef>
+          <a:fillRef idx="3">
+            <a:schemeClr val="accent1"/>
+          </a:fillRef>
+          <a:effectRef idx="2">
+            <a:schemeClr val="accent1"/>
+          </a:effectRef>
+          <a:fontRef idx="minor">
+            <a:schemeClr val="lt1"/>
+          </a:fontRef>
+        </p:style>
+        <p:txBody>
+          <a:bodyPr rtlCol="0" anchor="ctr"/>
+          <a:lstStyle/>
+          <a:p>
+            <a:pPr algn="ctr"/>
+          </a:p>
+        </p:txBody>
+      </p:sp>
+      <p:sp>
+        <p:nvSpPr>
+          <p:cNvPr id="3" name="Oval 2"/>
+          <p:cNvSpPr/>
+          <p:nvPr/>
+        </p:nvSpPr>
+        <p:spPr>
+          <a:xfrm>
+            <a:off x="5257800" y="457200"/>
+            <a:ext cx="128016" cy="128016"/>
+          </a:xfrm>
+          <a:prstGeom prst="ellipse">
+            <a:avLst/>
+          </a:prstGeom>
+          <a:solidFill>
+            <a:srgbClr val="62D99A"/>
+          </a:solidFill>
+          <a:ln>
+            <a:noFill/>
+          </a:ln>
+        </p:spPr>
+        <p:style>
+          <a:lnRef idx="1">
+            <a:schemeClr val="accent1"/>
+          </a:lnRef>
+          <a:fillRef idx="3">
+            <a:schemeClr val="accent1"/>
+          </a:fillRef>
+          <a:effectRef idx="2">
+            <a:schemeClr val="accent1"/>
+          </a:effectRef>
+          <a:fontRef idx="minor">
+            <a:schemeClr val="lt1"/>
+          </a:fontRef>
+        </p:style>
+        <p:txBody>
+          <a:bodyPr rtlCol="0" anchor="ctr"/>
+          <a:lstStyle/>
+          <a:p>
+            <a:pPr algn="ctr"/>
+          </a:p>
+        </p:txBody>
+      </p:sp>
+      <p:sp>
+        <p:nvSpPr>
+          <p:cNvPr id="4" name="TextBox 3"/>
           <p:cNvSpPr txBox="1"/>
           <p:nvPr/>
         </p:nvSpPr>
         <p:spPr>
           <a:xfrm>
-            <a:off x="731520" y="411480"/>
-            <a:ext cx="10698480" cy="320040"/>
+            <a:off x="5486400" y="256032"/>
+            <a:ext cx="1463040" cy="320040"/>
           </a:xfrm>
           <a:prstGeom prst="rect">
             <a:avLst/>
@@ -7746,38 +9367,29 @@
           </a:bodyPr>
           <a:lstStyle/>
           <a:p>
-            <a:pPr algn="l"/>
-            <a:r>
-              <a:rPr sz="1300" b="1">
-                <a:solidFill>
-                  <a:srgbClr val="69737D"/>
-                </a:solidFill>
-                <a:latin typeface="Inter"/>
-              </a:rPr>
-              <a:t>08  </a:t>
-            </a:r>
-            <a:r>
-              <a:rPr sz="1300" b="1">
-                <a:solidFill>
-                  <a:srgbClr val="69737D"/>
-                </a:solidFill>
-                <a:latin typeface="Inter"/>
-              </a:rPr>
-              <a:t>ВОСПРОИЗВОДИМОСТЬ</a:t>
-            </a:r>
-          </a:p>
-        </p:txBody>
-      </p:sp>
-      <p:sp>
-        <p:nvSpPr>
-          <p:cNvPr id="3" name="TextBox 2"/>
+            <a:pPr algn="ctr"/>
+            <a:r>
+              <a:rPr sz="1400" b="1">
+                <a:solidFill>
+                  <a:srgbClr val="F2F4F5"/>
+                </a:solidFill>
+                <a:latin typeface="Inter"/>
+              </a:rPr>
+              <a:t>ЖИМ НОГАМИ</a:t>
+            </a:r>
+          </a:p>
+        </p:txBody>
+      </p:sp>
+      <p:sp>
+        <p:nvSpPr>
+          <p:cNvPr id="5" name="TextBox 4"/>
           <p:cNvSpPr txBox="1"/>
           <p:nvPr/>
         </p:nvSpPr>
         <p:spPr>
           <a:xfrm>
-            <a:off x="731520" y="777240"/>
-            <a:ext cx="10698480" cy="914400"/>
+            <a:off x="5486400" y="530352"/>
+            <a:ext cx="1463040" cy="274320"/>
           </a:xfrm>
           <a:prstGeom prst="rect">
             <a:avLst/>
@@ -7790,29 +9402,322 @@
           </a:bodyPr>
           <a:lstStyle/>
           <a:p>
+            <a:pPr algn="ctr"/>
+            <a:r>
+              <a:rPr sz="800" b="0">
+                <a:solidFill>
+                  <a:srgbClr val="69737D"/>
+                </a:solidFill>
+                <a:latin typeface="Inter"/>
+              </a:rPr>
+              <a:t>FIRE MONITOR · KOSMOHACK 2026</a:t>
+            </a:r>
+          </a:p>
+        </p:txBody>
+      </p:sp>
+      <p:sp>
+        <p:nvSpPr>
+          <p:cNvPr id="6" name="Rounded Rectangle 5"/>
+          <p:cNvSpPr/>
+          <p:nvPr/>
+        </p:nvSpPr>
+        <p:spPr>
+          <a:xfrm>
+            <a:off x="320040" y="1188720"/>
+            <a:ext cx="5852160" cy="4480560"/>
+          </a:xfrm>
+          <a:prstGeom prst="roundRect">
+            <a:avLst>
+              <a:gd name="adj" fmla="val 9000"/>
+            </a:avLst>
+          </a:prstGeom>
+          <a:solidFill>
+            <a:srgbClr val="0A0E12"/>
+          </a:solidFill>
+          <a:ln w="12700">
+            <a:solidFill>
+              <a:srgbClr val="2A333D"/>
+            </a:solidFill>
+          </a:ln>
+        </p:spPr>
+        <p:style>
+          <a:lnRef idx="1">
+            <a:schemeClr val="accent1"/>
+          </a:lnRef>
+          <a:fillRef idx="3">
+            <a:schemeClr val="accent1"/>
+          </a:fillRef>
+          <a:effectRef idx="2">
+            <a:schemeClr val="accent1"/>
+          </a:effectRef>
+          <a:fontRef idx="minor">
+            <a:schemeClr val="lt1"/>
+          </a:fontRef>
+        </p:style>
+        <p:txBody>
+          <a:bodyPr rtlCol="0" anchor="ctr"/>
+          <a:lstStyle/>
+          <a:p>
+            <a:pPr algn="ctr"/>
+          </a:p>
+        </p:txBody>
+      </p:sp>
+      <p:sp>
+        <p:nvSpPr>
+          <p:cNvPr id="7" name="TextBox 6"/>
+          <p:cNvSpPr txBox="1"/>
+          <p:nvPr/>
+        </p:nvSpPr>
+        <p:spPr>
+          <a:xfrm>
+            <a:off x="594360" y="1325880"/>
+            <a:ext cx="914400" cy="274320"/>
+          </a:xfrm>
+          <a:prstGeom prst="rect">
+            <a:avLst/>
+          </a:prstGeom>
+          <a:noFill/>
+        </p:spPr>
+        <p:txBody>
+          <a:bodyPr wrap="square">
+            <a:spAutoFit/>
+          </a:bodyPr>
+          <a:lstStyle/>
+          <a:p>
             <a:pPr algn="l"/>
             <a:r>
-              <a:rPr sz="3400" b="1">
+              <a:rPr sz="1100" b="1">
+                <a:solidFill>
+                  <a:srgbClr val="69737D"/>
+                </a:solidFill>
+                <a:latin typeface="Inter"/>
+              </a:rPr>
+              <a:t>06</a:t>
+            </a:r>
+          </a:p>
+        </p:txBody>
+      </p:sp>
+      <p:sp>
+        <p:nvSpPr>
+          <p:cNvPr id="8" name="TextBox 7"/>
+          <p:cNvSpPr txBox="1"/>
+          <p:nvPr/>
+        </p:nvSpPr>
+        <p:spPr>
+          <a:xfrm>
+            <a:off x="594360" y="1572768"/>
+            <a:ext cx="5303520" cy="457200"/>
+          </a:xfrm>
+          <a:prstGeom prst="rect">
+            <a:avLst/>
+          </a:prstGeom>
+          <a:noFill/>
+        </p:spPr>
+        <p:txBody>
+          <a:bodyPr wrap="square">
+            <a:spAutoFit/>
+          </a:bodyPr>
+          <a:lstStyle/>
+          <a:p>
+            <a:pPr algn="l"/>
+            <a:r>
+              <a:rPr sz="2100" b="1">
                 <a:solidFill>
                   <a:srgbClr val="F2F4F5"/>
                 </a:solidFill>
                 <a:latin typeface="Inter"/>
               </a:rPr>
-              <a:t>Оргам: одна команда</a:t>
-            </a:r>
-          </a:p>
-        </p:txBody>
-      </p:sp>
-      <p:sp>
-        <p:nvSpPr>
-          <p:cNvPr id="4" name="Oval 3"/>
+              <a:t>Запуск у оргов</a:t>
+            </a:r>
+          </a:p>
+        </p:txBody>
+      </p:sp>
+      <p:sp>
+        <p:nvSpPr>
+          <p:cNvPr id="9" name="Oval 8"/>
           <p:cNvSpPr/>
           <p:nvPr/>
         </p:nvSpPr>
         <p:spPr>
           <a:xfrm>
-            <a:off x="914400" y="2121408"/>
-            <a:ext cx="146304" cy="146304"/>
+            <a:off x="594360" y="2331720"/>
+            <a:ext cx="137160" cy="137160"/>
+          </a:xfrm>
+          <a:prstGeom prst="ellipse">
+            <a:avLst/>
+          </a:prstGeom>
+          <a:solidFill>
+            <a:srgbClr val="62D99A"/>
+          </a:solidFill>
+          <a:ln>
+            <a:noFill/>
+          </a:ln>
+        </p:spPr>
+        <p:style>
+          <a:lnRef idx="1">
+            <a:schemeClr val="accent1"/>
+          </a:lnRef>
+          <a:fillRef idx="3">
+            <a:schemeClr val="accent1"/>
+          </a:fillRef>
+          <a:effectRef idx="2">
+            <a:schemeClr val="accent1"/>
+          </a:effectRef>
+          <a:fontRef idx="minor">
+            <a:schemeClr val="lt1"/>
+          </a:fontRef>
+        </p:style>
+        <p:txBody>
+          <a:bodyPr rtlCol="0" anchor="ctr"/>
+          <a:lstStyle/>
+          <a:p>
+            <a:pPr algn="ctr"/>
+          </a:p>
+        </p:txBody>
+      </p:sp>
+      <p:sp>
+        <p:nvSpPr>
+          <p:cNvPr id="10" name="TextBox 9"/>
+          <p:cNvSpPr txBox="1"/>
+          <p:nvPr/>
+        </p:nvSpPr>
+        <p:spPr>
+          <a:xfrm>
+            <a:off x="868680" y="2194560"/>
+            <a:ext cx="5029200" cy="594360"/>
+          </a:xfrm>
+          <a:prstGeom prst="rect">
+            <a:avLst/>
+          </a:prstGeom>
+          <a:noFill/>
+        </p:spPr>
+        <p:txBody>
+          <a:bodyPr wrap="square">
+            <a:spAutoFit/>
+          </a:bodyPr>
+          <a:lstStyle/>
+          <a:p>
+            <a:pPr algn="l"/>
+            <a:r>
+              <a:rPr sz="1400" b="1">
+                <a:solidFill>
+                  <a:srgbClr val="F2F4F5"/>
+                </a:solidFill>
+                <a:latin typeface="Inter"/>
+              </a:rPr>
+              <a:t>Веса в репо</a:t>
+            </a:r>
+            <a:r>
+              <a:rPr sz="1100" b="0">
+                <a:solidFill>
+                  <a:srgbClr val="69737D"/>
+                </a:solidFill>
+                <a:latin typeface="Inter"/>
+              </a:rPr>
+              <a:t>
+af.pt + bs.pt + thresh — докачивать нечего</a:t>
+            </a:r>
+          </a:p>
+        </p:txBody>
+      </p:sp>
+      <p:sp>
+        <p:nvSpPr>
+          <p:cNvPr id="11" name="Oval 10"/>
+          <p:cNvSpPr/>
+          <p:nvPr/>
+        </p:nvSpPr>
+        <p:spPr>
+          <a:xfrm>
+            <a:off x="594360" y="3108960"/>
+            <a:ext cx="137160" cy="137160"/>
+          </a:xfrm>
+          <a:prstGeom prst="ellipse">
+            <a:avLst/>
+          </a:prstGeom>
+          <a:solidFill>
+            <a:srgbClr val="E6C65C"/>
+          </a:solidFill>
+          <a:ln>
+            <a:noFill/>
+          </a:ln>
+        </p:spPr>
+        <p:style>
+          <a:lnRef idx="1">
+            <a:schemeClr val="accent1"/>
+          </a:lnRef>
+          <a:fillRef idx="3">
+            <a:schemeClr val="accent1"/>
+          </a:fillRef>
+          <a:effectRef idx="2">
+            <a:schemeClr val="accent1"/>
+          </a:effectRef>
+          <a:fontRef idx="minor">
+            <a:schemeClr val="lt1"/>
+          </a:fontRef>
+        </p:style>
+        <p:txBody>
+          <a:bodyPr rtlCol="0" anchor="ctr"/>
+          <a:lstStyle/>
+          <a:p>
+            <a:pPr algn="ctr"/>
+          </a:p>
+        </p:txBody>
+      </p:sp>
+      <p:sp>
+        <p:nvSpPr>
+          <p:cNvPr id="12" name="TextBox 11"/>
+          <p:cNvSpPr txBox="1"/>
+          <p:nvPr/>
+        </p:nvSpPr>
+        <p:spPr>
+          <a:xfrm>
+            <a:off x="868680" y="2971800"/>
+            <a:ext cx="5029200" cy="594360"/>
+          </a:xfrm>
+          <a:prstGeom prst="rect">
+            <a:avLst/>
+          </a:prstGeom>
+          <a:noFill/>
+        </p:spPr>
+        <p:txBody>
+          <a:bodyPr wrap="square">
+            <a:spAutoFit/>
+          </a:bodyPr>
+          <a:lstStyle/>
+          <a:p>
+            <a:pPr algn="l"/>
+            <a:r>
+              <a:rPr sz="1400" b="1">
+                <a:solidFill>
+                  <a:srgbClr val="F2F4F5"/>
+                </a:solidFill>
+                <a:latin typeface="Inter"/>
+              </a:rPr>
+              <a:t>pip install</a:t>
+            </a:r>
+            <a:r>
+              <a:rPr sz="1100" b="0">
+                <a:solidFill>
+                  <a:srgbClr val="69737D"/>
+                </a:solidFill>
+                <a:latin typeface="Inter"/>
+              </a:rPr>
+              <a:t>
+torch cu128/cpu + requirements.lock</a:t>
+            </a:r>
+          </a:p>
+        </p:txBody>
+      </p:sp>
+      <p:sp>
+        <p:nvSpPr>
+          <p:cNvPr id="13" name="Oval 12"/>
+          <p:cNvSpPr/>
+          <p:nvPr/>
+        </p:nvSpPr>
+        <p:spPr>
+          <a:xfrm>
+            <a:off x="594360" y="3886200"/>
+            <a:ext cx="137160" cy="137160"/>
           </a:xfrm>
           <a:prstGeom prst="ellipse">
             <a:avLst/>
@@ -7848,14 +9753,14 @@
       </p:sp>
       <p:sp>
         <p:nvSpPr>
-          <p:cNvPr id="5" name="TextBox 4"/>
+          <p:cNvPr id="14" name="TextBox 13"/>
           <p:cNvSpPr txBox="1"/>
           <p:nvPr/>
         </p:nvSpPr>
         <p:spPr>
           <a:xfrm>
-            <a:off x="1234440" y="1956816"/>
-            <a:ext cx="10424160" cy="640080"/>
+            <a:off x="868680" y="3749040"/>
+            <a:ext cx="5029200" cy="594360"/>
           </a:xfrm>
           <a:prstGeom prst="rect">
             <a:avLst/>
@@ -7870,30 +9775,130 @@
           <a:p>
             <a:pPr algn="l"/>
             <a:r>
-              <a:rPr sz="1700" b="0">
-                <a:solidFill>
-                  <a:srgbClr val="A4ADB5"/>
-                </a:solidFill>
-                <a:latin typeface="Inter"/>
-              </a:rPr>
-              <a:t>Веса в репо: weights/af.pt + bs.pt + af_thresh.json — докачивать нечего</a:t>
-            </a:r>
-          </a:p>
-        </p:txBody>
-      </p:sp>
-      <p:sp>
-        <p:nvSpPr>
-          <p:cNvPr id="6" name="Oval 5"/>
+              <a:rPr sz="1400" b="1">
+                <a:solidFill>
+                  <a:srgbClr val="F2F4F5"/>
+                </a:solidFill>
+                <a:latin typeface="Inter"/>
+              </a:rPr>
+              <a:t>Одна команда</a:t>
+            </a:r>
+            <a:r>
+              <a:rPr sz="1100" b="0">
+                <a:solidFill>
+                  <a:srgbClr val="69737D"/>
+                </a:solidFill>
+                <a:latin typeface="Inter"/>
+              </a:rPr>
+              <a:t>
+inference.py --data-dir --output (~28 сек)</a:t>
+            </a:r>
+          </a:p>
+        </p:txBody>
+      </p:sp>
+      <p:sp>
+        <p:nvSpPr>
+          <p:cNvPr id="15" name="Oval 14"/>
           <p:cNvSpPr/>
           <p:nvPr/>
         </p:nvSpPr>
         <p:spPr>
           <a:xfrm>
-            <a:off x="914400" y="2834640"/>
-            <a:ext cx="146304" cy="146304"/>
+            <a:off x="594360" y="4663440"/>
+            <a:ext cx="137160" cy="137160"/>
           </a:xfrm>
           <a:prstGeom prst="ellipse">
             <a:avLst/>
+          </a:prstGeom>
+          <a:solidFill>
+            <a:srgbClr val="EF5B5B"/>
+          </a:solidFill>
+          <a:ln>
+            <a:noFill/>
+          </a:ln>
+        </p:spPr>
+        <p:style>
+          <a:lnRef idx="1">
+            <a:schemeClr val="accent1"/>
+          </a:lnRef>
+          <a:fillRef idx="3">
+            <a:schemeClr val="accent1"/>
+          </a:fillRef>
+          <a:effectRef idx="2">
+            <a:schemeClr val="accent1"/>
+          </a:effectRef>
+          <a:fontRef idx="minor">
+            <a:schemeClr val="lt1"/>
+          </a:fontRef>
+        </p:style>
+        <p:txBody>
+          <a:bodyPr rtlCol="0" anchor="ctr"/>
+          <a:lstStyle/>
+          <a:p>
+            <a:pPr algn="ctr"/>
+          </a:p>
+        </p:txBody>
+      </p:sp>
+      <p:sp>
+        <p:nvSpPr>
+          <p:cNvPr id="16" name="TextBox 15"/>
+          <p:cNvSpPr txBox="1"/>
+          <p:nvPr/>
+        </p:nvSpPr>
+        <p:spPr>
+          <a:xfrm>
+            <a:off x="868680" y="4526280"/>
+            <a:ext cx="5029200" cy="594360"/>
+          </a:xfrm>
+          <a:prstGeom prst="rect">
+            <a:avLst/>
+          </a:prstGeom>
+          <a:noFill/>
+        </p:spPr>
+        <p:txBody>
+          <a:bodyPr wrap="square">
+            <a:spAutoFit/>
+          </a:bodyPr>
+          <a:lstStyle/>
+          <a:p>
+            <a:pPr algn="l"/>
+            <a:r>
+              <a:rPr sz="1400" b="1">
+                <a:solidFill>
+                  <a:srgbClr val="F2F4F5"/>
+                </a:solidFill>
+                <a:latin typeface="Inter"/>
+              </a:rPr>
+              <a:t>Сервис</a:t>
+            </a:r>
+            <a:r>
+              <a:rPr sz="1100" b="0">
+                <a:solidFill>
+                  <a:srgbClr val="69737D"/>
+                </a:solidFill>
+                <a:latin typeface="Inter"/>
+              </a:rPr>
+              <a:t>
+uvicorn service.app · фронт localhost:8000</a:t>
+            </a:r>
+          </a:p>
+        </p:txBody>
+      </p:sp>
+      <p:sp>
+        <p:nvSpPr>
+          <p:cNvPr id="17" name="Rounded Rectangle 16"/>
+          <p:cNvSpPr/>
+          <p:nvPr/>
+        </p:nvSpPr>
+        <p:spPr>
+          <a:xfrm>
+            <a:off x="320040" y="5852160"/>
+            <a:ext cx="5852160" cy="548640"/>
+          </a:xfrm>
+          <a:prstGeom prst="roundRect">
+            <a:avLst>
+              <a:gd name="adj" fmla="val 25000"/>
+            </a:avLst>
           </a:prstGeom>
           <a:solidFill>
             <a:srgbClr val="FF6B35"/>
@@ -7926,14 +9931,14 @@
       </p:sp>
       <p:sp>
         <p:nvSpPr>
-          <p:cNvPr id="7" name="TextBox 6"/>
+          <p:cNvPr id="18" name="TextBox 17"/>
           <p:cNvSpPr txBox="1"/>
           <p:nvPr/>
         </p:nvSpPr>
         <p:spPr>
           <a:xfrm>
-            <a:off x="1234440" y="2670048"/>
-            <a:ext cx="10424160" cy="640080"/>
+            <a:off x="320040" y="5943600"/>
+            <a:ext cx="5852160" cy="411480"/>
           </a:xfrm>
           <a:prstGeom prst="rect">
             <a:avLst/>
@@ -7946,171 +9951,15 @@
           </a:bodyPr>
           <a:lstStyle/>
           <a:p>
-            <a:pPr algn="l"/>
-            <a:r>
-              <a:rPr sz="1700" b="0">
-                <a:solidFill>
-                  <a:srgbClr val="A4ADB5"/>
-                </a:solidFill>
-                <a:latin typeface="Inter"/>
-              </a:rPr>
-              <a:t>pip install torch (cu128 или cpu) + requirements.lock · сиды 19 везде</a:t>
-            </a:r>
-          </a:p>
-        </p:txBody>
-      </p:sp>
-      <p:sp>
-        <p:nvSpPr>
-          <p:cNvPr id="8" name="Oval 7"/>
-          <p:cNvSpPr/>
-          <p:nvPr/>
-        </p:nvSpPr>
-        <p:spPr>
-          <a:xfrm>
-            <a:off x="914400" y="3547872"/>
-            <a:ext cx="146304" cy="146304"/>
-          </a:xfrm>
-          <a:prstGeom prst="ellipse">
-            <a:avLst/>
-          </a:prstGeom>
-          <a:solidFill>
-            <a:srgbClr val="FF6B35"/>
-          </a:solidFill>
-          <a:ln>
-            <a:noFill/>
-          </a:ln>
-        </p:spPr>
-        <p:style>
-          <a:lnRef idx="1">
-            <a:schemeClr val="accent1"/>
-          </a:lnRef>
-          <a:fillRef idx="3">
-            <a:schemeClr val="accent1"/>
-          </a:fillRef>
-          <a:effectRef idx="2">
-            <a:schemeClr val="accent1"/>
-          </a:effectRef>
-          <a:fontRef idx="minor">
-            <a:schemeClr val="lt1"/>
-          </a:fontRef>
-        </p:style>
-        <p:txBody>
-          <a:bodyPr rtlCol="0" anchor="ctr"/>
-          <a:lstStyle/>
-          <a:p>
             <a:pPr algn="ctr"/>
-          </a:p>
-        </p:txBody>
-      </p:sp>
-      <p:sp>
-        <p:nvSpPr>
-          <p:cNvPr id="9" name="TextBox 8"/>
-          <p:cNvSpPr txBox="1"/>
-          <p:nvPr/>
-        </p:nvSpPr>
-        <p:spPr>
-          <a:xfrm>
-            <a:off x="1234440" y="3383280"/>
-            <a:ext cx="10424160" cy="640080"/>
-          </a:xfrm>
-          <a:prstGeom prst="rect">
-            <a:avLst/>
-          </a:prstGeom>
-          <a:noFill/>
-        </p:spPr>
-        <p:txBody>
-          <a:bodyPr wrap="square">
-            <a:spAutoFit/>
-          </a:bodyPr>
-          <a:lstStyle/>
-          <a:p>
-            <a:pPr algn="l"/>
-            <a:r>
-              <a:rPr sz="1700" b="0">
-                <a:solidFill>
-                  <a:srgbClr val="A4ADB5"/>
-                </a:solidFill>
-                <a:latin typeface="Inter"/>
-              </a:rPr>
-              <a:t>PYTHONPATH=src/models inference.py --data-dir &lt;test&gt; --output submission.csv — ~28 сек на GPU, на CPU дольше, результат тот же</a:t>
-            </a:r>
-          </a:p>
-        </p:txBody>
-      </p:sp>
-      <p:sp>
-        <p:nvSpPr>
-          <p:cNvPr id="10" name="Oval 9"/>
-          <p:cNvSpPr/>
-          <p:nvPr/>
-        </p:nvSpPr>
-        <p:spPr>
-          <a:xfrm>
-            <a:off x="914400" y="4261104"/>
-            <a:ext cx="146304" cy="146304"/>
-          </a:xfrm>
-          <a:prstGeom prst="ellipse">
-            <a:avLst/>
-          </a:prstGeom>
-          <a:solidFill>
-            <a:srgbClr val="FF6B35"/>
-          </a:solidFill>
-          <a:ln>
-            <a:noFill/>
-          </a:ln>
-        </p:spPr>
-        <p:style>
-          <a:lnRef idx="1">
-            <a:schemeClr val="accent1"/>
-          </a:lnRef>
-          <a:fillRef idx="3">
-            <a:schemeClr val="accent1"/>
-          </a:fillRef>
-          <a:effectRef idx="2">
-            <a:schemeClr val="accent1"/>
-          </a:effectRef>
-          <a:fontRef idx="minor">
-            <a:schemeClr val="lt1"/>
-          </a:fontRef>
-        </p:style>
-        <p:txBody>
-          <a:bodyPr rtlCol="0" anchor="ctr"/>
-          <a:lstStyle/>
-          <a:p>
-            <a:pPr algn="ctr"/>
-          </a:p>
-        </p:txBody>
-      </p:sp>
-      <p:sp>
-        <p:nvSpPr>
-          <p:cNvPr id="11" name="TextBox 10"/>
-          <p:cNvSpPr txBox="1"/>
-          <p:nvPr/>
-        </p:nvSpPr>
-        <p:spPr>
-          <a:xfrm>
-            <a:off x="1234440" y="4096512"/>
-            <a:ext cx="10424160" cy="640080"/>
-          </a:xfrm>
-          <a:prstGeom prst="rect">
-            <a:avLst/>
-          </a:prstGeom>
-          <a:noFill/>
-        </p:spPr>
-        <p:txBody>
-          <a:bodyPr wrap="square">
-            <a:spAutoFit/>
-          </a:bodyPr>
-          <a:lstStyle/>
-          <a:p>
-            <a:pPr algn="l"/>
-            <a:r>
-              <a:rPr sz="1700" b="0">
-                <a:solidFill>
-                  <a:srgbClr val="A4ADB5"/>
-                </a:solidFill>
-                <a:latin typeface="Inter"/>
-              </a:rPr>
-              <a:t>Сервис: SUBMISSION_CSV=submission.csv uvicorn service.app:app · фронт: index.html → localhost:8000</a:t>
+            <a:r>
+              <a:rPr sz="1500" b="1">
+                <a:solidFill>
+                  <a:srgbClr val="F2F4F5"/>
+                </a:solidFill>
+                <a:latin typeface="Inter"/>
+              </a:rPr>
+              <a:t>git clone → pip install → inference.py   →</a:t>
             </a:r>
           </a:p>
         </p:txBody>

--- a/docs/slides-deck.pptx
+++ b/docs/slides-deck.pptx
@@ -6,15 +6,15 @@
   </p:sldMasterIdLst>
   <p:sldIdLst>
     <p:sldId id="256" r:id="rId7"/>
-    <p:sldId id="257" r:id="rId8"/>
-    <p:sldId id="258" r:id="rId9"/>
-    <p:sldId id="259" r:id="rId10"/>
-    <p:sldId id="260" r:id="rId11"/>
-    <p:sldId id="261" r:id="rId12"/>
-    <p:sldId id="262" r:id="rId13"/>
-    <p:sldId id="263" r:id="rId14"/>
-    <p:sldId id="264" r:id="rId15"/>
-    <p:sldId id="265" r:id="rId16"/>
+    <p:sldId id="257" r:id="rId9"/>
+    <p:sldId id="258" r:id="rId10"/>
+    <p:sldId id="259" r:id="rId11"/>
+    <p:sldId id="260" r:id="rId12"/>
+    <p:sldId id="261" r:id="rId13"/>
+    <p:sldId id="262" r:id="rId14"/>
+    <p:sldId id="263" r:id="rId15"/>
+    <p:sldId id="264" r:id="rId16"/>
+    <p:sldId id="265" r:id="rId17"/>
   </p:sldIdLst>
   <p:sldSz cx="12188952" cy="6858000" type="screen4x3"/>
   <p:notesSz cx="6858000" cy="9144000"/>
@@ -114,6 +114,1056 @@
     </a:lvl9pPr>
   </p:defaultTextStyle>
 </p:presentation>
+</file>
+
+<file path=ppt/notesMasters/notesMaster1.xml><?xml version="1.0" encoding="utf-8"?>
+<p:notesMaster xmlns:a="http://schemas.openxmlformats.org/drawingml/2006/main" xmlns:p="http://schemas.openxmlformats.org/presentationml/2006/main" xmlns:r="http://schemas.openxmlformats.org/officeDocument/2006/relationships">
+  <p:cSld>
+    <p:bg>
+      <p:bgRef idx="1001">
+        <a:schemeClr val="bg1"/>
+      </p:bgRef>
+    </p:bg>
+    <p:spTree>
+      <p:nvGrpSpPr>
+        <p:cNvPr id="1" name=""/>
+        <p:cNvGrpSpPr/>
+        <p:nvPr/>
+      </p:nvGrpSpPr>
+      <p:grpSpPr>
+        <a:xfrm>
+          <a:off x="0" y="0"/>
+          <a:ext cx="0" cy="0"/>
+          <a:chOff x="0" y="0"/>
+          <a:chExt cx="0" cy="0"/>
+        </a:xfrm>
+      </p:grpSpPr>
+      <p:sp>
+        <p:nvSpPr>
+          <p:cNvPr id="2" name="Header Placeholder 1"/>
+          <p:cNvSpPr>
+            <a:spLocks noGrp="1"/>
+          </p:cNvSpPr>
+          <p:nvPr>
+            <p:ph type="hdr" sz="quarter"/>
+          </p:nvPr>
+        </p:nvSpPr>
+        <p:spPr>
+          <a:xfrm>
+            <a:off x="0" y="0"/>
+            <a:ext cx="2971800" cy="457200"/>
+          </a:xfrm>
+          <a:prstGeom prst="rect">
+            <a:avLst/>
+          </a:prstGeom>
+        </p:spPr>
+        <p:txBody>
+          <a:bodyPr vert="horz" lIns="91440" tIns="45720" rIns="91440" bIns="45720" rtlCol="0"/>
+          <a:lstStyle>
+            <a:lvl1pPr algn="l">
+              <a:defRPr sz="1200"/>
+            </a:lvl1pPr>
+          </a:lstStyle>
+          <a:p>
+            <a:endParaRPr lang="en-US"/>
+          </a:p>
+        </p:txBody>
+      </p:sp>
+      <p:sp>
+        <p:nvSpPr>
+          <p:cNvPr id="3" name="Date Placeholder 2"/>
+          <p:cNvSpPr>
+            <a:spLocks noGrp="1"/>
+          </p:cNvSpPr>
+          <p:nvPr>
+            <p:ph type="dt" idx="1"/>
+          </p:nvPr>
+        </p:nvSpPr>
+        <p:spPr>
+          <a:xfrm>
+            <a:off x="3884613" y="0"/>
+            <a:ext cx="2971800" cy="457200"/>
+          </a:xfrm>
+          <a:prstGeom prst="rect">
+            <a:avLst/>
+          </a:prstGeom>
+        </p:spPr>
+        <p:txBody>
+          <a:bodyPr vert="horz" lIns="91440" tIns="45720" rIns="91440" bIns="45720" rtlCol="0"/>
+          <a:lstStyle>
+            <a:lvl1pPr algn="r">
+              <a:defRPr sz="1200"/>
+            </a:lvl1pPr>
+          </a:lstStyle>
+          <a:p>
+            <a:fld id="{0F89C1C7-3DCD-1040-A9CF-14679D8B5DDD}" type="datetimeFigureOut">
+              <a:rPr lang="en-US" smtClean="0"/>
+              <a:t>10/17/16</a:t>
+            </a:fld>
+            <a:endParaRPr lang="en-US"/>
+          </a:p>
+        </p:txBody>
+      </p:sp>
+      <p:sp>
+        <p:nvSpPr>
+          <p:cNvPr id="4" name="Slide Image Placeholder 3"/>
+          <p:cNvSpPr>
+            <a:spLocks noGrp="1" noRot="1" noChangeAspect="1"/>
+          </p:cNvSpPr>
+          <p:nvPr>
+            <p:ph type="sldImg" idx="2"/>
+          </p:nvPr>
+        </p:nvSpPr>
+        <p:spPr>
+          <a:xfrm>
+            <a:off x="1143000" y="685800"/>
+            <a:ext cx="4572000" cy="3429000"/>
+          </a:xfrm>
+          <a:prstGeom prst="rect">
+            <a:avLst/>
+          </a:prstGeom>
+          <a:noFill/>
+          <a:ln w="12700">
+            <a:solidFill>
+              <a:prstClr val="black"/>
+            </a:solidFill>
+          </a:ln>
+        </p:spPr>
+        <p:txBody>
+          <a:bodyPr vert="horz" lIns="91440" tIns="45720" rIns="91440" bIns="45720" rtlCol="0" anchor="ctr"/>
+          <a:lstStyle/>
+          <a:p>
+            <a:endParaRPr lang="en-US"/>
+          </a:p>
+        </p:txBody>
+      </p:sp>
+      <p:sp>
+        <p:nvSpPr>
+          <p:cNvPr id="5" name="Notes Placeholder 4"/>
+          <p:cNvSpPr>
+            <a:spLocks noGrp="1"/>
+          </p:cNvSpPr>
+          <p:nvPr>
+            <p:ph type="body" sz="quarter" idx="3"/>
+          </p:nvPr>
+        </p:nvSpPr>
+        <p:spPr>
+          <a:xfrm>
+            <a:off x="685800" y="4343400"/>
+            <a:ext cx="5486400" cy="4114800"/>
+          </a:xfrm>
+          <a:prstGeom prst="rect">
+            <a:avLst/>
+          </a:prstGeom>
+        </p:spPr>
+        <p:txBody>
+          <a:bodyPr vert="horz" lIns="91440" tIns="45720" rIns="91440" bIns="45720" rtlCol="0"/>
+          <a:lstStyle/>
+          <a:p>
+            <a:pPr lvl="0"/>
+            <a:r>
+              <a:rPr lang="en-US" smtClean="0"/>
+              <a:t>Click to edit Master text styles</a:t>
+            </a:r>
+          </a:p>
+          <a:p>
+            <a:pPr lvl="1"/>
+            <a:r>
+              <a:rPr lang="en-US" smtClean="0"/>
+              <a:t>Second level</a:t>
+            </a:r>
+          </a:p>
+          <a:p>
+            <a:pPr lvl="2"/>
+            <a:r>
+              <a:rPr lang="en-US" smtClean="0"/>
+              <a:t>Third level</a:t>
+            </a:r>
+          </a:p>
+          <a:p>
+            <a:pPr lvl="3"/>
+            <a:r>
+              <a:rPr lang="en-US" smtClean="0"/>
+              <a:t>Fourth level</a:t>
+            </a:r>
+          </a:p>
+          <a:p>
+            <a:pPr lvl="4"/>
+            <a:r>
+              <a:rPr lang="en-US" smtClean="0"/>
+              <a:t>Fifth level</a:t>
+            </a:r>
+            <a:endParaRPr lang="en-US"/>
+          </a:p>
+        </p:txBody>
+      </p:sp>
+      <p:sp>
+        <p:nvSpPr>
+          <p:cNvPr id="6" name="Footer Placeholder 5"/>
+          <p:cNvSpPr>
+            <a:spLocks noGrp="1"/>
+          </p:cNvSpPr>
+          <p:nvPr>
+            <p:ph type="ftr" sz="quarter" idx="4"/>
+          </p:nvPr>
+        </p:nvSpPr>
+        <p:spPr>
+          <a:xfrm>
+            <a:off x="0" y="8685213"/>
+            <a:ext cx="2971800" cy="457200"/>
+          </a:xfrm>
+          <a:prstGeom prst="rect">
+            <a:avLst/>
+          </a:prstGeom>
+        </p:spPr>
+        <p:txBody>
+          <a:bodyPr vert="horz" lIns="91440" tIns="45720" rIns="91440" bIns="45720" rtlCol="0" anchor="b"/>
+          <a:lstStyle>
+            <a:lvl1pPr algn="l">
+              <a:defRPr sz="1200"/>
+            </a:lvl1pPr>
+          </a:lstStyle>
+          <a:p>
+            <a:endParaRPr lang="en-US"/>
+          </a:p>
+        </p:txBody>
+      </p:sp>
+      <p:sp>
+        <p:nvSpPr>
+          <p:cNvPr id="7" name="Slide Number Placeholder 6"/>
+          <p:cNvSpPr>
+            <a:spLocks noGrp="1"/>
+          </p:cNvSpPr>
+          <p:nvPr>
+            <p:ph type="sldNum" sz="quarter" idx="5"/>
+          </p:nvPr>
+        </p:nvSpPr>
+        <p:spPr>
+          <a:xfrm>
+            <a:off x="3884613" y="8685213"/>
+            <a:ext cx="2971800" cy="457200"/>
+          </a:xfrm>
+          <a:prstGeom prst="rect">
+            <a:avLst/>
+          </a:prstGeom>
+        </p:spPr>
+        <p:txBody>
+          <a:bodyPr vert="horz" lIns="91440" tIns="45720" rIns="91440" bIns="45720" rtlCol="0" anchor="b"/>
+          <a:lstStyle>
+            <a:lvl1pPr algn="r">
+              <a:defRPr sz="1200"/>
+            </a:lvl1pPr>
+          </a:lstStyle>
+          <a:p>
+            <a:fld id="{BB5E49A5-4136-284D-997B-48E1D791AD67}" type="slidenum">
+              <a:rPr lang="en-US" smtClean="0"/>
+              <a:t>‹#›</a:t>
+            </a:fld>
+            <a:endParaRPr lang="en-US"/>
+          </a:p>
+        </p:txBody>
+      </p:sp>
+    </p:spTree>
+    <p:extLst>
+      <p:ext uri="{BB962C8B-B14F-4D97-AF65-F5344CB8AC3E}">
+        <p14:creationId xmlns:p14="http://schemas.microsoft.com/office/powerpoint/2010/main" val="2623252185"/>
+      </p:ext>
+    </p:extLst>
+  </p:cSld>
+  <p:clrMap bg1="lt1" tx1="dk1" bg2="lt2" tx2="dk2" accent1="accent1" accent2="accent2" accent3="accent3" accent4="accent4" accent5="accent5" accent6="accent6" hlink="hlink" folHlink="folHlink"/>
+  <p:notesStyle>
+    <a:lvl1pPr marL="0" algn="l" defTabSz="457200" rtl="0" eaLnBrk="1" latinLnBrk="0" hangingPunct="1">
+      <a:defRPr sz="1200" kern="1200">
+        <a:solidFill>
+          <a:schemeClr val="tx1"/>
+        </a:solidFill>
+        <a:latin typeface="+mn-lt"/>
+        <a:ea typeface="+mn-ea"/>
+        <a:cs typeface="+mn-cs"/>
+      </a:defRPr>
+    </a:lvl1pPr>
+    <a:lvl2pPr marL="457200" algn="l" defTabSz="457200" rtl="0" eaLnBrk="1" latinLnBrk="0" hangingPunct="1">
+      <a:defRPr sz="1200" kern="1200">
+        <a:solidFill>
+          <a:schemeClr val="tx1"/>
+        </a:solidFill>
+        <a:latin typeface="+mn-lt"/>
+        <a:ea typeface="+mn-ea"/>
+        <a:cs typeface="+mn-cs"/>
+      </a:defRPr>
+    </a:lvl2pPr>
+    <a:lvl3pPr marL="914400" algn="l" defTabSz="457200" rtl="0" eaLnBrk="1" latinLnBrk="0" hangingPunct="1">
+      <a:defRPr sz="1200" kern="1200">
+        <a:solidFill>
+          <a:schemeClr val="tx1"/>
+        </a:solidFill>
+        <a:latin typeface="+mn-lt"/>
+        <a:ea typeface="+mn-ea"/>
+        <a:cs typeface="+mn-cs"/>
+      </a:defRPr>
+    </a:lvl3pPr>
+    <a:lvl4pPr marL="1371600" algn="l" defTabSz="457200" rtl="0" eaLnBrk="1" latinLnBrk="0" hangingPunct="1">
+      <a:defRPr sz="1200" kern="1200">
+        <a:solidFill>
+          <a:schemeClr val="tx1"/>
+        </a:solidFill>
+        <a:latin typeface="+mn-lt"/>
+        <a:ea typeface="+mn-ea"/>
+        <a:cs typeface="+mn-cs"/>
+      </a:defRPr>
+    </a:lvl4pPr>
+    <a:lvl5pPr marL="1828800" algn="l" defTabSz="457200" rtl="0" eaLnBrk="1" latinLnBrk="0" hangingPunct="1">
+      <a:defRPr sz="1200" kern="1200">
+        <a:solidFill>
+          <a:schemeClr val="tx1"/>
+        </a:solidFill>
+        <a:latin typeface="+mn-lt"/>
+        <a:ea typeface="+mn-ea"/>
+        <a:cs typeface="+mn-cs"/>
+      </a:defRPr>
+    </a:lvl5pPr>
+    <a:lvl6pPr marL="2286000" algn="l" defTabSz="457200" rtl="0" eaLnBrk="1" latinLnBrk="0" hangingPunct="1">
+      <a:defRPr sz="1200" kern="1200">
+        <a:solidFill>
+          <a:schemeClr val="tx1"/>
+        </a:solidFill>
+        <a:latin typeface="+mn-lt"/>
+        <a:ea typeface="+mn-ea"/>
+        <a:cs typeface="+mn-cs"/>
+      </a:defRPr>
+    </a:lvl6pPr>
+    <a:lvl7pPr marL="2743200" algn="l" defTabSz="457200" rtl="0" eaLnBrk="1" latinLnBrk="0" hangingPunct="1">
+      <a:defRPr sz="1200" kern="1200">
+        <a:solidFill>
+          <a:schemeClr val="tx1"/>
+        </a:solidFill>
+        <a:latin typeface="+mn-lt"/>
+        <a:ea typeface="+mn-ea"/>
+        <a:cs typeface="+mn-cs"/>
+      </a:defRPr>
+    </a:lvl7pPr>
+    <a:lvl8pPr marL="3200400" algn="l" defTabSz="457200" rtl="0" eaLnBrk="1" latinLnBrk="0" hangingPunct="1">
+      <a:defRPr sz="1200" kern="1200">
+        <a:solidFill>
+          <a:schemeClr val="tx1"/>
+        </a:solidFill>
+        <a:latin typeface="+mn-lt"/>
+        <a:ea typeface="+mn-ea"/>
+        <a:cs typeface="+mn-cs"/>
+      </a:defRPr>
+    </a:lvl8pPr>
+    <a:lvl9pPr marL="3657600" algn="l" defTabSz="457200" rtl="0" eaLnBrk="1" latinLnBrk="0" hangingPunct="1">
+      <a:defRPr sz="1200" kern="1200">
+        <a:solidFill>
+          <a:schemeClr val="tx1"/>
+        </a:solidFill>
+        <a:latin typeface="+mn-lt"/>
+        <a:ea typeface="+mn-ea"/>
+        <a:cs typeface="+mn-cs"/>
+      </a:defRPr>
+    </a:lvl9pPr>
+  </p:notesStyle>
+</p:notesMaster>
+</file>
+
+<file path=ppt/notesSlides/notesSlide1.xml><?xml version="1.0" encoding="utf-8"?>
+<p:notes xmlns:a="http://schemas.openxmlformats.org/drawingml/2006/main" xmlns:p="http://schemas.openxmlformats.org/presentationml/2006/main" xmlns:r="http://schemas.openxmlformats.org/officeDocument/2006/relationships">
+  <p:cSld>
+    <p:spTree>
+      <p:nvGrpSpPr>
+        <p:cNvPr id="1" name=""/>
+        <p:cNvGrpSpPr/>
+        <p:nvPr/>
+      </p:nvGrpSpPr>
+      <p:grpSpPr>
+        <a:xfrm>
+          <a:off x="0" y="0"/>
+          <a:ext cx="0" cy="0"/>
+          <a:chOff x="0" y="0"/>
+          <a:chExt cx="0" cy="0"/>
+        </a:xfrm>
+      </p:grpSpPr>
+      <p:sp>
+        <p:nvSpPr>
+          <p:cNvPr id="2" name="Slide Image Placeholder 1"/>
+          <p:cNvSpPr>
+            <a:spLocks noGrp="1"/>
+          </p:cNvSpPr>
+          <p:nvPr>
+            <p:ph type="sldImg" idx="2"/>
+          </p:nvPr>
+        </p:nvSpPr>
+        <p:spPr/>
+      </p:sp>
+      <p:sp>
+        <p:nvSpPr>
+          <p:cNvPr id="3" name="Notes Placeholder 2"/>
+          <p:cNvSpPr>
+            <a:spLocks noGrp="1"/>
+          </p:cNvSpPr>
+          <p:nvPr>
+            <p:ph type="body" idx="3" sz="quarter"/>
+          </p:nvPr>
+        </p:nvSpPr>
+        <p:spPr/>
+        <p:txBody>
+          <a:bodyPr/>
+          <a:lstStyle/>
+          <a:p>
+            <a:r>
+              <a:t>Открываем спокойно: кто мы, что построили, главная цифра. Score 0.654 — валидный воспроизводимый результат. Дальше — как пришли.</a:t>
+            </a:r>
+          </a:p>
+        </p:txBody>
+      </p:sp>
+      <p:sp>
+        <p:nvSpPr>
+          <p:cNvPr id="4" name="Slide Number Placeholder 3"/>
+          <p:cNvSpPr>
+            <a:spLocks noGrp="1"/>
+          </p:cNvSpPr>
+          <p:nvPr>
+            <p:ph type="sldNum" idx="5" sz="quarter"/>
+          </p:nvPr>
+        </p:nvSpPr>
+        <p:spPr/>
+      </p:sp>
+    </p:spTree>
+  </p:cSld>
+  <p:clrMapOvr>
+    <a:masterClrMapping/>
+  </p:clrMapOvr>
+</p:notes>
+</file>
+
+<file path=ppt/notesSlides/notesSlide10.xml><?xml version="1.0" encoding="utf-8"?>
+<p:notes xmlns:a="http://schemas.openxmlformats.org/drawingml/2006/main" xmlns:p="http://schemas.openxmlformats.org/presentationml/2006/main" xmlns:r="http://schemas.openxmlformats.org/officeDocument/2006/relationships">
+  <p:cSld>
+    <p:spTree>
+      <p:nvGrpSpPr>
+        <p:cNvPr id="1" name=""/>
+        <p:cNvGrpSpPr/>
+        <p:nvPr/>
+      </p:nvGrpSpPr>
+      <p:grpSpPr>
+        <a:xfrm>
+          <a:off x="0" y="0"/>
+          <a:ext cx="0" cy="0"/>
+          <a:chOff x="0" y="0"/>
+          <a:chExt cx="0" cy="0"/>
+        </a:xfrm>
+      </p:grpSpPr>
+      <p:sp>
+        <p:nvSpPr>
+          <p:cNvPr id="2" name="Slide Image Placeholder 1"/>
+          <p:cNvSpPr>
+            <a:spLocks noGrp="1"/>
+          </p:cNvSpPr>
+          <p:nvPr>
+            <p:ph type="sldImg" idx="2"/>
+          </p:nvPr>
+        </p:nvSpPr>
+        <p:spPr/>
+      </p:sp>
+      <p:sp>
+        <p:nvSpPr>
+          <p:cNvPr id="3" name="Notes Placeholder 2"/>
+          <p:cNvSpPr>
+            <a:spLocks noGrp="1"/>
+          </p:cNvSpPr>
+          <p:nvPr>
+            <p:ph type="body" idx="3" sz="quarter"/>
+          </p:nvPr>
+        </p:nvSpPr>
+        <p:spPr/>
+        <p:txBody>
+          <a:bodyPr/>
+          <a:lstStyle/>
+          <a:p>
+            <a:r>
+              <a:t>Финал: коротко поблагодарить, предложить вопросы. Не оправдываться за 0.654 — подавать как честный инженерный результат.</a:t>
+            </a:r>
+          </a:p>
+        </p:txBody>
+      </p:sp>
+      <p:sp>
+        <p:nvSpPr>
+          <p:cNvPr id="4" name="Slide Number Placeholder 3"/>
+          <p:cNvSpPr>
+            <a:spLocks noGrp="1"/>
+          </p:cNvSpPr>
+          <p:nvPr>
+            <p:ph type="sldNum" idx="5" sz="quarter"/>
+          </p:nvPr>
+        </p:nvSpPr>
+        <p:spPr/>
+      </p:sp>
+    </p:spTree>
+  </p:cSld>
+  <p:clrMapOvr>
+    <a:masterClrMapping/>
+  </p:clrMapOvr>
+</p:notes>
+</file>
+
+<file path=ppt/notesSlides/notesSlide2.xml><?xml version="1.0" encoding="utf-8"?>
+<p:notes xmlns:a="http://schemas.openxmlformats.org/drawingml/2006/main" xmlns:p="http://schemas.openxmlformats.org/presentationml/2006/main" xmlns:r="http://schemas.openxmlformats.org/officeDocument/2006/relationships">
+  <p:cSld>
+    <p:spTree>
+      <p:nvGrpSpPr>
+        <p:cNvPr id="1" name=""/>
+        <p:cNvGrpSpPr/>
+        <p:nvPr/>
+      </p:nvGrpSpPr>
+      <p:grpSpPr>
+        <a:xfrm>
+          <a:off x="0" y="0"/>
+          <a:ext cx="0" cy="0"/>
+          <a:chOff x="0" y="0"/>
+          <a:chExt cx="0" cy="0"/>
+        </a:xfrm>
+      </p:grpSpPr>
+      <p:sp>
+        <p:nvSpPr>
+          <p:cNvPr id="2" name="Slide Image Placeholder 1"/>
+          <p:cNvSpPr>
+            <a:spLocks noGrp="1"/>
+          </p:cNvSpPr>
+          <p:nvPr>
+            <p:ph type="sldImg" idx="2"/>
+          </p:nvPr>
+        </p:nvSpPr>
+        <p:spPr/>
+      </p:sp>
+      <p:sp>
+        <p:nvSpPr>
+          <p:cNvPr id="3" name="Notes Placeholder 2"/>
+          <p:cNvSpPr>
+            <a:spLocks noGrp="1"/>
+          </p:cNvSpPr>
+          <p:nvPr>
+            <p:ph type="body" idx="3" sz="quarter"/>
+          </p:nvPr>
+        </p:nvSpPr>
+        <p:spPr/>
+        <p:txBody>
+          <a:bodyPr/>
+          <a:lstStyle/>
+          <a:p>
+            <a:r>
+              <a:t>Мотивация: дежурным нужны чистые точки без ложных выездов, региону — контуры гарей для восстановления леса и расчёта ущерба.</a:t>
+            </a:r>
+          </a:p>
+        </p:txBody>
+      </p:sp>
+      <p:sp>
+        <p:nvSpPr>
+          <p:cNvPr id="4" name="Slide Number Placeholder 3"/>
+          <p:cNvSpPr>
+            <a:spLocks noGrp="1"/>
+          </p:cNvSpPr>
+          <p:nvPr>
+            <p:ph type="sldNum" idx="5" sz="quarter"/>
+          </p:nvPr>
+        </p:nvSpPr>
+        <p:spPr/>
+      </p:sp>
+    </p:spTree>
+  </p:cSld>
+  <p:clrMapOvr>
+    <a:masterClrMapping/>
+  </p:clrMapOvr>
+</p:notes>
+</file>
+
+<file path=ppt/notesSlides/notesSlide3.xml><?xml version="1.0" encoding="utf-8"?>
+<p:notes xmlns:a="http://schemas.openxmlformats.org/drawingml/2006/main" xmlns:p="http://schemas.openxmlformats.org/presentationml/2006/main" xmlns:r="http://schemas.openxmlformats.org/officeDocument/2006/relationships">
+  <p:cSld>
+    <p:spTree>
+      <p:nvGrpSpPr>
+        <p:cNvPr id="1" name=""/>
+        <p:cNvGrpSpPr/>
+        <p:nvPr/>
+      </p:nvGrpSpPr>
+      <p:grpSpPr>
+        <a:xfrm>
+          <a:off x="0" y="0"/>
+          <a:ext cx="0" cy="0"/>
+          <a:chOff x="0" y="0"/>
+          <a:chExt cx="0" cy="0"/>
+        </a:xfrm>
+      </p:grpSpPr>
+      <p:sp>
+        <p:nvSpPr>
+          <p:cNvPr id="2" name="Slide Image Placeholder 1"/>
+          <p:cNvSpPr>
+            <a:spLocks noGrp="1"/>
+          </p:cNvSpPr>
+          <p:nvPr>
+            <p:ph type="sldImg" idx="2"/>
+          </p:nvPr>
+        </p:nvSpPr>
+        <p:spPr/>
+      </p:sp>
+      <p:sp>
+        <p:nvSpPr>
+          <p:cNvPr id="3" name="Notes Placeholder 2"/>
+          <p:cNvSpPr>
+            <a:spLocks noGrp="1"/>
+          </p:cNvSpPr>
+          <p:nvPr>
+            <p:ph type="body" idx="3" sz="quarter"/>
+          </p:nvPr>
+        </p:nvSpPr>
+        <p:spPr/>
+        <p:txBody>
+          <a:bodyPr/>
+          <a:lstStyle/>
+          <a:p>
+            <a:r>
+              <a:t>Три выхода кейса. Подчеркнуть: всё считается автоматически, без ручных операций с растрами.</a:t>
+            </a:r>
+          </a:p>
+        </p:txBody>
+      </p:sp>
+      <p:sp>
+        <p:nvSpPr>
+          <p:cNvPr id="4" name="Slide Number Placeholder 3"/>
+          <p:cNvSpPr>
+            <a:spLocks noGrp="1"/>
+          </p:cNvSpPr>
+          <p:nvPr>
+            <p:ph type="sldNum" idx="5" sz="quarter"/>
+          </p:nvPr>
+        </p:nvSpPr>
+        <p:spPr/>
+      </p:sp>
+    </p:spTree>
+  </p:cSld>
+  <p:clrMapOvr>
+    <a:masterClrMapping/>
+  </p:clrMapOvr>
+</p:notes>
+</file>
+
+<file path=ppt/notesSlides/notesSlide4.xml><?xml version="1.0" encoding="utf-8"?>
+<p:notes xmlns:a="http://schemas.openxmlformats.org/drawingml/2006/main" xmlns:p="http://schemas.openxmlformats.org/presentationml/2006/main" xmlns:r="http://schemas.openxmlformats.org/officeDocument/2006/relationships">
+  <p:cSld>
+    <p:spTree>
+      <p:nvGrpSpPr>
+        <p:cNvPr id="1" name=""/>
+        <p:cNvGrpSpPr/>
+        <p:nvPr/>
+      </p:nvGrpSpPr>
+      <p:grpSpPr>
+        <a:xfrm>
+          <a:off x="0" y="0"/>
+          <a:ext cx="0" cy="0"/>
+          <a:chOff x="0" y="0"/>
+          <a:chExt cx="0" cy="0"/>
+        </a:xfrm>
+      </p:grpSpPr>
+      <p:sp>
+        <p:nvSpPr>
+          <p:cNvPr id="2" name="Slide Image Placeholder 1"/>
+          <p:cNvSpPr>
+            <a:spLocks noGrp="1"/>
+          </p:cNvSpPr>
+          <p:nvPr>
+            <p:ph type="sldImg" idx="2"/>
+          </p:nvPr>
+        </p:nvSpPr>
+        <p:spPr/>
+      </p:sp>
+      <p:sp>
+        <p:nvSpPr>
+          <p:cNvPr id="3" name="Notes Placeholder 2"/>
+          <p:cNvSpPr>
+            <a:spLocks noGrp="1"/>
+          </p:cNvSpPr>
+          <p:nvPr>
+            <p:ph type="body" idx="3" sz="quarter"/>
+          </p:nvPr>
+        </p:nvSpPr>
+        <p:spPr/>
+        <p:txBody>
+          <a:bodyPr/>
+          <a:lstStyle/>
+          <a:p>
+            <a:r>
+              <a:t>Ключевое для жюри: честность протокола. Сплит без утечек, тест не трогаем руками, повторный прогон даёт тот же файл.</a:t>
+            </a:r>
+          </a:p>
+        </p:txBody>
+      </p:sp>
+      <p:sp>
+        <p:nvSpPr>
+          <p:cNvPr id="4" name="Slide Number Placeholder 3"/>
+          <p:cNvSpPr>
+            <a:spLocks noGrp="1"/>
+          </p:cNvSpPr>
+          <p:nvPr>
+            <p:ph type="sldNum" idx="5" sz="quarter"/>
+          </p:nvPr>
+        </p:nvSpPr>
+        <p:spPr/>
+      </p:sp>
+    </p:spTree>
+  </p:cSld>
+  <p:clrMapOvr>
+    <a:masterClrMapping/>
+  </p:clrMapOvr>
+</p:notes>
+</file>
+
+<file path=ppt/notesSlides/notesSlide5.xml><?xml version="1.0" encoding="utf-8"?>
+<p:notes xmlns:a="http://schemas.openxmlformats.org/drawingml/2006/main" xmlns:p="http://schemas.openxmlformats.org/presentationml/2006/main" xmlns:r="http://schemas.openxmlformats.org/officeDocument/2006/relationships">
+  <p:cSld>
+    <p:spTree>
+      <p:nvGrpSpPr>
+        <p:cNvPr id="1" name=""/>
+        <p:cNvGrpSpPr/>
+        <p:nvPr/>
+      </p:nvGrpSpPr>
+      <p:grpSpPr>
+        <a:xfrm>
+          <a:off x="0" y="0"/>
+          <a:ext cx="0" cy="0"/>
+          <a:chOff x="0" y="0"/>
+          <a:chExt cx="0" cy="0"/>
+        </a:xfrm>
+      </p:grpSpPr>
+      <p:sp>
+        <p:nvSpPr>
+          <p:cNvPr id="2" name="Slide Image Placeholder 1"/>
+          <p:cNvSpPr>
+            <a:spLocks noGrp="1"/>
+          </p:cNvSpPr>
+          <p:nvPr>
+            <p:ph type="sldImg" idx="2"/>
+          </p:nvPr>
+        </p:nvSpPr>
+        <p:spPr/>
+      </p:sp>
+      <p:sp>
+        <p:nvSpPr>
+          <p:cNvPr id="3" name="Notes Placeholder 2"/>
+          <p:cNvSpPr>
+            <a:spLocks noGrp="1"/>
+          </p:cNvSpPr>
+          <p:nvPr>
+            <p:ph type="body" idx="3" sz="quarter"/>
+          </p:nvPr>
+        </p:nvSpPr>
+        <p:spPr/>
+        <p:txBody>
+          <a:bodyPr/>
+          <a:lstStyle/>
+          <a:p>
+            <a:r>
+              <a:t>AF — сильная сторона. Ночной разрыв объяснить: ночью видны только тепловые каналы.</a:t>
+            </a:r>
+          </a:p>
+        </p:txBody>
+      </p:sp>
+      <p:sp>
+        <p:nvSpPr>
+          <p:cNvPr id="4" name="Slide Number Placeholder 3"/>
+          <p:cNvSpPr>
+            <a:spLocks noGrp="1"/>
+          </p:cNvSpPr>
+          <p:nvPr>
+            <p:ph type="sldNum" idx="5" sz="quarter"/>
+          </p:nvPr>
+        </p:nvSpPr>
+        <p:spPr/>
+      </p:sp>
+    </p:spTree>
+  </p:cSld>
+  <p:clrMapOvr>
+    <a:masterClrMapping/>
+  </p:clrMapOvr>
+</p:notes>
+</file>
+
+<file path=ppt/notesSlides/notesSlide6.xml><?xml version="1.0" encoding="utf-8"?>
+<p:notes xmlns:a="http://schemas.openxmlformats.org/drawingml/2006/main" xmlns:p="http://schemas.openxmlformats.org/presentationml/2006/main" xmlns:r="http://schemas.openxmlformats.org/officeDocument/2006/relationships">
+  <p:cSld>
+    <p:spTree>
+      <p:nvGrpSpPr>
+        <p:cNvPr id="1" name=""/>
+        <p:cNvGrpSpPr/>
+        <p:nvPr/>
+      </p:nvGrpSpPr>
+      <p:grpSpPr>
+        <a:xfrm>
+          <a:off x="0" y="0"/>
+          <a:ext cx="0" cy="0"/>
+          <a:chOff x="0" y="0"/>
+          <a:chExt cx="0" cy="0"/>
+        </a:xfrm>
+      </p:grpSpPr>
+      <p:sp>
+        <p:nvSpPr>
+          <p:cNvPr id="2" name="Slide Image Placeholder 1"/>
+          <p:cNvSpPr>
+            <a:spLocks noGrp="1"/>
+          </p:cNvSpPr>
+          <p:nvPr>
+            <p:ph type="sldImg" idx="2"/>
+          </p:nvPr>
+        </p:nvSpPr>
+        <p:spPr/>
+      </p:sp>
+      <p:sp>
+        <p:nvSpPr>
+          <p:cNvPr id="3" name="Notes Placeholder 2"/>
+          <p:cNvSpPr>
+            <a:spLocks noGrp="1"/>
+          </p:cNvSpPr>
+          <p:nvPr>
+            <p:ph type="body" idx="3" sz="quarter"/>
+          </p:nvPr>
+        </p:nvSpPr>
+        <p:spPr/>
+        <p:txBody>
+          <a:bodyPr/>
+          <a:lstStyle/>
+          <a:p>
+            <a:r>
+              <a:t>Здесь показать инженерную зрелость: убивать нерабочие ветки — тоже результат. Пашня даёт ложные контуры — следующий шаг.</a:t>
+            </a:r>
+          </a:p>
+        </p:txBody>
+      </p:sp>
+      <p:sp>
+        <p:nvSpPr>
+          <p:cNvPr id="4" name="Slide Number Placeholder 3"/>
+          <p:cNvSpPr>
+            <a:spLocks noGrp="1"/>
+          </p:cNvSpPr>
+          <p:nvPr>
+            <p:ph type="sldNum" idx="5" sz="quarter"/>
+          </p:nvPr>
+        </p:nvSpPr>
+        <p:spPr/>
+      </p:sp>
+    </p:spTree>
+  </p:cSld>
+  <p:clrMapOvr>
+    <a:masterClrMapping/>
+  </p:clrMapOvr>
+</p:notes>
+</file>
+
+<file path=ppt/notesSlides/notesSlide7.xml><?xml version="1.0" encoding="utf-8"?>
+<p:notes xmlns:a="http://schemas.openxmlformats.org/drawingml/2006/main" xmlns:p="http://schemas.openxmlformats.org/presentationml/2006/main" xmlns:r="http://schemas.openxmlformats.org/officeDocument/2006/relationships">
+  <p:cSld>
+    <p:spTree>
+      <p:nvGrpSpPr>
+        <p:cNvPr id="1" name=""/>
+        <p:cNvGrpSpPr/>
+        <p:nvPr/>
+      </p:nvGrpSpPr>
+      <p:grpSpPr>
+        <a:xfrm>
+          <a:off x="0" y="0"/>
+          <a:ext cx="0" cy="0"/>
+          <a:chOff x="0" y="0"/>
+          <a:chExt cx="0" cy="0"/>
+        </a:xfrm>
+      </p:grpSpPr>
+      <p:sp>
+        <p:nvSpPr>
+          <p:cNvPr id="2" name="Slide Image Placeholder 1"/>
+          <p:cNvSpPr>
+            <a:spLocks noGrp="1"/>
+          </p:cNvSpPr>
+          <p:nvPr>
+            <p:ph type="sldImg" idx="2"/>
+          </p:nvPr>
+        </p:nvSpPr>
+        <p:spPr/>
+      </p:sp>
+      <p:sp>
+        <p:nvSpPr>
+          <p:cNvPr id="3" name="Notes Placeholder 2"/>
+          <p:cNvSpPr>
+            <a:spLocks noGrp="1"/>
+          </p:cNvSpPr>
+          <p:nvPr>
+            <p:ph type="body" idx="3" sz="quarter"/>
+          </p:nvPr>
+        </p:nvSpPr>
+        <p:spPr/>
+        <p:txBody>
+          <a:bodyPr/>
+          <a:lstStyle/>
+          <a:p>
+            <a:r>
+              <a:t>Цифры называть медленно. Акцент: файл валиден и воспроизводим — это дорогого стоит.</a:t>
+            </a:r>
+          </a:p>
+        </p:txBody>
+      </p:sp>
+      <p:sp>
+        <p:nvSpPr>
+          <p:cNvPr id="4" name="Slide Number Placeholder 3"/>
+          <p:cNvSpPr>
+            <a:spLocks noGrp="1"/>
+          </p:cNvSpPr>
+          <p:nvPr>
+            <p:ph type="sldNum" idx="5" sz="quarter"/>
+          </p:nvPr>
+        </p:nvSpPr>
+        <p:spPr/>
+      </p:sp>
+    </p:spTree>
+  </p:cSld>
+  <p:clrMapOvr>
+    <a:masterClrMapping/>
+  </p:clrMapOvr>
+</p:notes>
+</file>
+
+<file path=ppt/notesSlides/notesSlide8.xml><?xml version="1.0" encoding="utf-8"?>
+<p:notes xmlns:a="http://schemas.openxmlformats.org/drawingml/2006/main" xmlns:p="http://schemas.openxmlformats.org/presentationml/2006/main" xmlns:r="http://schemas.openxmlformats.org/officeDocument/2006/relationships">
+  <p:cSld>
+    <p:spTree>
+      <p:nvGrpSpPr>
+        <p:cNvPr id="1" name=""/>
+        <p:cNvGrpSpPr/>
+        <p:nvPr/>
+      </p:nvGrpSpPr>
+      <p:grpSpPr>
+        <a:xfrm>
+          <a:off x="0" y="0"/>
+          <a:ext cx="0" cy="0"/>
+          <a:chOff x="0" y="0"/>
+          <a:chExt cx="0" cy="0"/>
+        </a:xfrm>
+      </p:grpSpPr>
+      <p:sp>
+        <p:nvSpPr>
+          <p:cNvPr id="2" name="Slide Image Placeholder 1"/>
+          <p:cNvSpPr>
+            <a:spLocks noGrp="1"/>
+          </p:cNvSpPr>
+          <p:nvPr>
+            <p:ph type="sldImg" idx="2"/>
+          </p:nvPr>
+        </p:nvSpPr>
+        <p:spPr/>
+      </p:sp>
+      <p:sp>
+        <p:nvSpPr>
+          <p:cNvPr id="3" name="Notes Placeholder 2"/>
+          <p:cNvSpPr>
+            <a:spLocks noGrp="1"/>
+          </p:cNvSpPr>
+          <p:nvPr>
+            <p:ph type="body" idx="3" sz="quarter"/>
+          </p:nvPr>
+        </p:nvSpPr>
+        <p:spPr/>
+        <p:txBody>
+          <a:bodyPr/>
+          <a:lstStyle/>
+          <a:p>
+            <a:r>
+              <a:t>Пауза и показ: точки, полигоны по степеням, справка с гектарами. Если спросят про привязку — честно: demo-сетка, гео теста скрыто.</a:t>
+            </a:r>
+          </a:p>
+        </p:txBody>
+      </p:sp>
+      <p:sp>
+        <p:nvSpPr>
+          <p:cNvPr id="4" name="Slide Number Placeholder 3"/>
+          <p:cNvSpPr>
+            <a:spLocks noGrp="1"/>
+          </p:cNvSpPr>
+          <p:nvPr>
+            <p:ph type="sldNum" idx="5" sz="quarter"/>
+          </p:nvPr>
+        </p:nvSpPr>
+        <p:spPr/>
+      </p:sp>
+    </p:spTree>
+  </p:cSld>
+  <p:clrMapOvr>
+    <a:masterClrMapping/>
+  </p:clrMapOvr>
+</p:notes>
+</file>
+
+<file path=ppt/notesSlides/notesSlide9.xml><?xml version="1.0" encoding="utf-8"?>
+<p:notes xmlns:a="http://schemas.openxmlformats.org/drawingml/2006/main" xmlns:p="http://schemas.openxmlformats.org/presentationml/2006/main" xmlns:r="http://schemas.openxmlformats.org/officeDocument/2006/relationships">
+  <p:cSld>
+    <p:spTree>
+      <p:nvGrpSpPr>
+        <p:cNvPr id="1" name=""/>
+        <p:cNvGrpSpPr/>
+        <p:nvPr/>
+      </p:nvGrpSpPr>
+      <p:grpSpPr>
+        <a:xfrm>
+          <a:off x="0" y="0"/>
+          <a:ext cx="0" cy="0"/>
+          <a:chOff x="0" y="0"/>
+          <a:chExt cx="0" cy="0"/>
+        </a:xfrm>
+      </p:grpSpPr>
+      <p:sp>
+        <p:nvSpPr>
+          <p:cNvPr id="2" name="Slide Image Placeholder 1"/>
+          <p:cNvSpPr>
+            <a:spLocks noGrp="1"/>
+          </p:cNvSpPr>
+          <p:nvPr>
+            <p:ph type="sldImg" idx="2"/>
+          </p:nvPr>
+        </p:nvSpPr>
+        <p:spPr/>
+      </p:sp>
+      <p:sp>
+        <p:nvSpPr>
+          <p:cNvPr id="3" name="Notes Placeholder 2"/>
+          <p:cNvSpPr>
+            <a:spLocks noGrp="1"/>
+          </p:cNvSpPr>
+          <p:nvPr>
+            <p:ph type="body" idx="3" sz="quarter"/>
+          </p:nvPr>
+        </p:nvSpPr>
+        <p:spPr/>
+        <p:txBody>
+          <a:bodyPr/>
+          <a:lstStyle/>
+          <a:p>
+            <a:r>
+              <a:t>Для оргов главное — воспроизводимость. Веса в репо, CPU-фолбэк, инструкция в README.</a:t>
+            </a:r>
+          </a:p>
+        </p:txBody>
+      </p:sp>
+      <p:sp>
+        <p:nvSpPr>
+          <p:cNvPr id="4" name="Slide Number Placeholder 3"/>
+          <p:cNvSpPr>
+            <a:spLocks noGrp="1"/>
+          </p:cNvSpPr>
+          <p:nvPr>
+            <p:ph type="sldNum" idx="5" sz="quarter"/>
+          </p:nvPr>
+        </p:nvSpPr>
+        <p:spPr/>
+      </p:sp>
+    </p:spTree>
+  </p:cSld>
+  <p:clrMapOvr>
+    <a:masterClrMapping/>
+  </p:clrMapOvr>
+</p:notes>
 </file>
 
 <file path=ppt/slideLayouts/slideLayout1.xml><?xml version="1.0" encoding="utf-8"?>
@@ -3107,22 +4157,102 @@
       <p:grpSpPr/>
       <p:sp>
         <p:nvSpPr>
-          <p:cNvPr id="2" name="Rounded Rectangle 1"/>
+          <p:cNvPr id="2" name="TextBox 1"/>
+          <p:cNvSpPr txBox="1"/>
+          <p:nvPr/>
+        </p:nvSpPr>
+        <p:spPr>
+          <a:xfrm>
+            <a:off x="640080" y="457200"/>
+            <a:ext cx="10881360" cy="365760"/>
+          </a:xfrm>
+          <a:prstGeom prst="rect">
+            <a:avLst/>
+          </a:prstGeom>
+          <a:noFill/>
+        </p:spPr>
+        <p:txBody>
+          <a:bodyPr wrap="square">
+            <a:spAutoFit/>
+          </a:bodyPr>
+          <a:lstStyle/>
+          <a:p>
+            <a:pPr algn="l"/>
+            <a:r>
+              <a:rPr sz="1400" b="1">
+                <a:solidFill>
+                  <a:srgbClr val="FF6B35"/>
+                </a:solidFill>
+                <a:latin typeface="Inter"/>
+              </a:rPr>
+              <a:t>КОСМОХАКАТОН 2026 · КЕЙС «МОНИТОРИНГ ПРИРОДНЫХ ПОЖАРОВ»</a:t>
+            </a:r>
+          </a:p>
+        </p:txBody>
+      </p:sp>
+      <p:sp>
+        <p:nvSpPr>
+          <p:cNvPr id="3" name="TextBox 2"/>
+          <p:cNvSpPr txBox="1"/>
+          <p:nvPr/>
+        </p:nvSpPr>
+        <p:spPr>
+          <a:xfrm>
+            <a:off x="640080" y="1005840"/>
+            <a:ext cx="10881360" cy="1280160"/>
+          </a:xfrm>
+          <a:prstGeom prst="rect">
+            <a:avLst/>
+          </a:prstGeom>
+          <a:noFill/>
+        </p:spPr>
+        <p:txBody>
+          <a:bodyPr wrap="square">
+            <a:spAutoFit/>
+          </a:bodyPr>
+          <a:lstStyle/>
+          <a:p>
+            <a:pPr algn="l"/>
+            <a:r>
+              <a:rPr sz="6400" b="1">
+                <a:solidFill>
+                  <a:srgbClr val="F2F4F5"/>
+                </a:solidFill>
+                <a:latin typeface="Inter"/>
+              </a:rPr>
+              <a:t>Жим Ногами</a:t>
+            </a:r>
+            <a:r>
+              <a:rPr sz="2200" b="0">
+                <a:solidFill>
+                  <a:srgbClr val="B8C0C8"/>
+                </a:solidFill>
+                <a:latin typeface="Inter"/>
+              </a:rPr>
+              <a:t>
+Двухэтапный мониторинг пожаров по спутниковым данным</a:t>
+            </a:r>
+          </a:p>
+        </p:txBody>
+      </p:sp>
+      <p:sp>
+        <p:nvSpPr>
+          <p:cNvPr id="4" name="Rounded Rectangle 3"/>
           <p:cNvSpPr/>
           <p:nvPr/>
         </p:nvSpPr>
         <p:spPr>
           <a:xfrm>
-            <a:off x="5074920" y="228600"/>
-            <a:ext cx="2057400" cy="685800"/>
+            <a:off x="640080" y="3931920"/>
+            <a:ext cx="3657600" cy="1371600"/>
           </a:xfrm>
           <a:prstGeom prst="roundRect">
             <a:avLst>
-              <a:gd name="adj" fmla="val 9000"/>
+              <a:gd name="adj" fmla="val 7000"/>
             </a:avLst>
           </a:prstGeom>
           <a:solidFill>
-            <a:srgbClr val="0A0E12"/>
+            <a:srgbClr val="0D1217"/>
           </a:solidFill>
           <a:ln w="12700">
             <a:solidFill>
@@ -3154,57 +4284,14 @@
       </p:sp>
       <p:sp>
         <p:nvSpPr>
-          <p:cNvPr id="3" name="Oval 2"/>
-          <p:cNvSpPr/>
-          <p:nvPr/>
-        </p:nvSpPr>
-        <p:spPr>
-          <a:xfrm>
-            <a:off x="5257800" y="457200"/>
-            <a:ext cx="128016" cy="128016"/>
-          </a:xfrm>
-          <a:prstGeom prst="ellipse">
-            <a:avLst/>
-          </a:prstGeom>
-          <a:solidFill>
-            <a:srgbClr val="62D99A"/>
-          </a:solidFill>
-          <a:ln>
-            <a:noFill/>
-          </a:ln>
-        </p:spPr>
-        <p:style>
-          <a:lnRef idx="1">
-            <a:schemeClr val="accent1"/>
-          </a:lnRef>
-          <a:fillRef idx="3">
-            <a:schemeClr val="accent1"/>
-          </a:fillRef>
-          <a:effectRef idx="2">
-            <a:schemeClr val="accent1"/>
-          </a:effectRef>
-          <a:fontRef idx="minor">
-            <a:schemeClr val="lt1"/>
-          </a:fontRef>
-        </p:style>
-        <p:txBody>
-          <a:bodyPr rtlCol="0" anchor="ctr"/>
-          <a:lstStyle/>
-          <a:p>
-            <a:pPr algn="ctr"/>
-          </a:p>
-        </p:txBody>
-      </p:sp>
-      <p:sp>
-        <p:nvSpPr>
-          <p:cNvPr id="4" name="TextBox 3"/>
+          <p:cNvPr id="5" name="TextBox 4"/>
           <p:cNvSpPr txBox="1"/>
           <p:nvPr/>
         </p:nvSpPr>
         <p:spPr>
           <a:xfrm>
-            <a:off x="5486400" y="256032"/>
-            <a:ext cx="1463040" cy="320040"/>
+            <a:off x="640080" y="4069080"/>
+            <a:ext cx="3657600" cy="1097280"/>
           </a:xfrm>
           <a:prstGeom prst="rect">
             <a:avLst/>
@@ -3219,115 +4306,35 @@
           <a:p>
             <a:pPr algn="ctr"/>
             <a:r>
-              <a:rPr sz="1400" b="1">
-                <a:solidFill>
-                  <a:srgbClr val="F2F4F5"/>
+              <a:rPr sz="4000" b="1">
+                <a:solidFill>
+                  <a:srgbClr val="62D99A"/>
                 </a:solidFill>
                 <a:latin typeface="Inter"/>
               </a:rPr>
-              <a:t>ЖИМ НОГАМИ</a:t>
-            </a:r>
-          </a:p>
-        </p:txBody>
-      </p:sp>
-      <p:sp>
-        <p:nvSpPr>
-          <p:cNvPr id="5" name="TextBox 4"/>
-          <p:cNvSpPr txBox="1"/>
-          <p:nvPr/>
-        </p:nvSpPr>
-        <p:spPr>
-          <a:xfrm>
-            <a:off x="5486400" y="530352"/>
-            <a:ext cx="1463040" cy="274320"/>
-          </a:xfrm>
-          <a:prstGeom prst="rect">
-            <a:avLst/>
-          </a:prstGeom>
-          <a:noFill/>
-        </p:spPr>
-        <p:txBody>
-          <a:bodyPr wrap="square">
-            <a:spAutoFit/>
-          </a:bodyPr>
-          <a:lstStyle/>
-          <a:p>
-            <a:pPr algn="ctr"/>
-            <a:r>
-              <a:rPr sz="800" b="0">
-                <a:solidFill>
-                  <a:srgbClr val="69737D"/>
-                </a:solidFill>
-                <a:latin typeface="Inter"/>
-              </a:rPr>
-              <a:t>FIRE MONITOR · KOSMOHACK 2026</a:t>
-            </a:r>
-          </a:p>
-        </p:txBody>
-      </p:sp>
-      <p:sp>
-        <p:nvSpPr>
-          <p:cNvPr id="6" name="TextBox 5"/>
-          <p:cNvSpPr txBox="1"/>
-          <p:nvPr/>
-        </p:nvSpPr>
-        <p:spPr>
-          <a:xfrm>
-            <a:off x="731520" y="1371600"/>
-            <a:ext cx="10698480" cy="1097280"/>
-          </a:xfrm>
-          <a:prstGeom prst="rect">
-            <a:avLst/>
-          </a:prstGeom>
-          <a:noFill/>
-        </p:spPr>
-        <p:txBody>
-          <a:bodyPr wrap="square">
-            <a:spAutoFit/>
-          </a:bodyPr>
-          <a:lstStyle/>
-          <a:p>
-            <a:pPr algn="l"/>
-            <a:r>
-              <a:rPr sz="4000" b="1">
-                <a:solidFill>
-                  <a:srgbClr val="F2F4F5"/>
-                </a:solidFill>
-                <a:latin typeface="Inter"/>
-              </a:rPr>
-              <a:t>Мониторинг природных пожаров</a:t>
-            </a:r>
-            <a:r>
-              <a:rPr sz="1800" b="0">
-                <a:solidFill>
-                  <a:srgbClr val="A4ADB5"/>
-                </a:solidFill>
-                <a:latin typeface="Inter"/>
-              </a:rPr>
-              <a:t>
-AF-детекция · BS-картирование гарей · аналитический сервис</a:t>
-            </a:r>
-          </a:p>
-        </p:txBody>
-      </p:sp>
-      <p:sp>
-        <p:nvSpPr>
-          <p:cNvPr id="7" name="Rounded Rectangle 6"/>
+              <a:t>Score 0.654</a:t>
+            </a:r>
+          </a:p>
+        </p:txBody>
+      </p:sp>
+      <p:sp>
+        <p:nvSpPr>
+          <p:cNvPr id="6" name="Rounded Rectangle 5"/>
           <p:cNvSpPr/>
           <p:nvPr/>
         </p:nvSpPr>
         <p:spPr>
           <a:xfrm>
-            <a:off x="320040" y="5074920"/>
-            <a:ext cx="2194560" cy="1051560"/>
+            <a:off x="4480560" y="3931920"/>
+            <a:ext cx="3657600" cy="1371600"/>
           </a:xfrm>
           <a:prstGeom prst="roundRect">
             <a:avLst>
-              <a:gd name="adj" fmla="val 9000"/>
+              <a:gd name="adj" fmla="val 7000"/>
             </a:avLst>
           </a:prstGeom>
           <a:solidFill>
-            <a:srgbClr val="0A0E12"/>
+            <a:srgbClr val="0D1217"/>
           </a:solidFill>
           <a:ln w="12700">
             <a:solidFill>
@@ -3359,14 +4366,14 @@
       </p:sp>
       <p:sp>
         <p:nvSpPr>
-          <p:cNvPr id="8" name="TextBox 7"/>
+          <p:cNvPr id="7" name="TextBox 6"/>
           <p:cNvSpPr txBox="1"/>
           <p:nvPr/>
         </p:nvSpPr>
         <p:spPr>
           <a:xfrm>
-            <a:off x="457200" y="5129783"/>
-            <a:ext cx="1938528" cy="228600"/>
+            <a:off x="4480560" y="4069080"/>
+            <a:ext cx="3657600" cy="1097280"/>
           </a:xfrm>
           <a:prstGeom prst="rect">
             <a:avLst/>
@@ -3379,107 +4386,37 @@
           </a:bodyPr>
           <a:lstStyle/>
           <a:p>
-            <a:pPr algn="l"/>
-            <a:r>
-              <a:rPr sz="1000" b="1">
-                <a:solidFill>
-                  <a:srgbClr val="69737D"/>
+            <a:pPr algn="ctr"/>
+            <a:r>
+              <a:rPr sz="3000" b="1">
+                <a:solidFill>
+                  <a:srgbClr val="F2F4F5"/>
                 </a:solidFill>
                 <a:latin typeface="Inter"/>
               </a:rPr>
-              <a:t>THERMAL</a:t>
-            </a:r>
-          </a:p>
-        </p:txBody>
-      </p:sp>
-      <p:sp>
-        <p:nvSpPr>
-          <p:cNvPr id="9" name="TextBox 8"/>
-          <p:cNvSpPr txBox="1"/>
-          <p:nvPr/>
-        </p:nvSpPr>
-        <p:spPr>
-          <a:xfrm>
-            <a:off x="457200" y="5349240"/>
-            <a:ext cx="1938528" cy="457200"/>
-          </a:xfrm>
-          <a:prstGeom prst="rect">
-            <a:avLst/>
-          </a:prstGeom>
-          <a:noFill/>
-        </p:spPr>
-        <p:txBody>
-          <a:bodyPr wrap="square">
-            <a:spAutoFit/>
-          </a:bodyPr>
-          <a:lstStyle/>
-          <a:p>
-            <a:pPr algn="l"/>
-            <a:r>
-              <a:rPr sz="2200" b="1">
-                <a:solidFill>
-                  <a:srgbClr val="F2F4F5"/>
-                </a:solidFill>
-                <a:latin typeface="Inter"/>
-              </a:rPr>
-              <a:t>0.8434</a:t>
-            </a:r>
-          </a:p>
-        </p:txBody>
-      </p:sp>
-      <p:sp>
-        <p:nvSpPr>
-          <p:cNvPr id="10" name="TextBox 9"/>
-          <p:cNvSpPr txBox="1"/>
-          <p:nvPr/>
-        </p:nvSpPr>
-        <p:spPr>
-          <a:xfrm>
-            <a:off x="457200" y="5824728"/>
-            <a:ext cx="1938528" cy="228600"/>
-          </a:xfrm>
-          <a:prstGeom prst="rect">
-            <a:avLst/>
-          </a:prstGeom>
-          <a:noFill/>
-        </p:spPr>
-        <p:txBody>
-          <a:bodyPr wrap="square">
-            <a:spAutoFit/>
-          </a:bodyPr>
-          <a:lstStyle/>
-          <a:p>
-            <a:pPr algn="l"/>
-            <a:r>
-              <a:rPr sz="1000" b="0">
-                <a:solidFill>
-                  <a:srgbClr val="69737D"/>
-                </a:solidFill>
-                <a:latin typeface="Inter"/>
-              </a:rPr>
-              <a:t>val micro-F1 AF</a:t>
-            </a:r>
-          </a:p>
-        </p:txBody>
-      </p:sp>
-      <p:sp>
-        <p:nvSpPr>
-          <p:cNvPr id="11" name="Rounded Rectangle 10"/>
+              <a:t>submission FINAL</a:t>
+            </a:r>
+          </a:p>
+        </p:txBody>
+      </p:sp>
+      <p:sp>
+        <p:nvSpPr>
+          <p:cNvPr id="8" name="Rounded Rectangle 7"/>
           <p:cNvSpPr/>
           <p:nvPr/>
         </p:nvSpPr>
         <p:spPr>
           <a:xfrm>
-            <a:off x="2624328" y="5074920"/>
-            <a:ext cx="2194560" cy="1051560"/>
+            <a:off x="8321040" y="3931920"/>
+            <a:ext cx="3200400" cy="1371600"/>
           </a:xfrm>
           <a:prstGeom prst="roundRect">
             <a:avLst>
-              <a:gd name="adj" fmla="val 9000"/>
+              <a:gd name="adj" fmla="val 7000"/>
             </a:avLst>
           </a:prstGeom>
           <a:solidFill>
-            <a:srgbClr val="0A0E12"/>
+            <a:srgbClr val="0D1217"/>
           </a:solidFill>
           <a:ln w="12700">
             <a:solidFill>
@@ -3511,14 +4448,14 @@
       </p:sp>
       <p:sp>
         <p:nvSpPr>
-          <p:cNvPr id="12" name="TextBox 11"/>
+          <p:cNvPr id="9" name="TextBox 8"/>
           <p:cNvSpPr txBox="1"/>
           <p:nvPr/>
         </p:nvSpPr>
         <p:spPr>
           <a:xfrm>
-            <a:off x="2761488" y="5129783"/>
-            <a:ext cx="1938528" cy="228600"/>
+            <a:off x="8321040" y="4069080"/>
+            <a:ext cx="3200400" cy="1097280"/>
           </a:xfrm>
           <a:prstGeom prst="rect">
             <a:avLst/>
@@ -3531,541 +4468,15 @@
           </a:bodyPr>
           <a:lstStyle/>
           <a:p>
-            <a:pPr algn="l"/>
-            <a:r>
-              <a:rPr sz="1000" b="1">
-                <a:solidFill>
-                  <a:srgbClr val="69737D"/>
+            <a:pPr algn="ctr"/>
+            <a:r>
+              <a:rPr sz="3000" b="1">
+                <a:solidFill>
+                  <a:srgbClr val="FF6B35"/>
                 </a:solidFill>
                 <a:latin typeface="Inter"/>
               </a:rPr>
-              <a:t>SCORE</a:t>
-            </a:r>
-          </a:p>
-        </p:txBody>
-      </p:sp>
-      <p:sp>
-        <p:nvSpPr>
-          <p:cNvPr id="13" name="TextBox 12"/>
-          <p:cNvSpPr txBox="1"/>
-          <p:nvPr/>
-        </p:nvSpPr>
-        <p:spPr>
-          <a:xfrm>
-            <a:off x="2761488" y="5349240"/>
-            <a:ext cx="1938528" cy="457200"/>
-          </a:xfrm>
-          <a:prstGeom prst="rect">
-            <a:avLst/>
-          </a:prstGeom>
-          <a:noFill/>
-        </p:spPr>
-        <p:txBody>
-          <a:bodyPr wrap="square">
-            <a:spAutoFit/>
-          </a:bodyPr>
-          <a:lstStyle/>
-          <a:p>
-            <a:pPr algn="l"/>
-            <a:r>
-              <a:rPr sz="2200" b="1">
-                <a:solidFill>
-                  <a:srgbClr val="FF8B5F"/>
-                </a:solidFill>
-                <a:latin typeface="Inter"/>
-              </a:rPr>
-              <a:t>0.654</a:t>
-            </a:r>
-          </a:p>
-        </p:txBody>
-      </p:sp>
-      <p:sp>
-        <p:nvSpPr>
-          <p:cNvPr id="14" name="TextBox 13"/>
-          <p:cNvSpPr txBox="1"/>
-          <p:nvPr/>
-        </p:nvSpPr>
-        <p:spPr>
-          <a:xfrm>
-            <a:off x="2761488" y="5824728"/>
-            <a:ext cx="1938528" cy="228600"/>
-          </a:xfrm>
-          <a:prstGeom prst="rect">
-            <a:avLst/>
-          </a:prstGeom>
-          <a:noFill/>
-        </p:spPr>
-        <p:txBody>
-          <a:bodyPr wrap="square">
-            <a:spAutoFit/>
-          </a:bodyPr>
-          <a:lstStyle/>
-          <a:p>
-            <a:pPr algn="l"/>
-            <a:r>
-              <a:rPr sz="1000" b="0">
-                <a:solidFill>
-                  <a:srgbClr val="69737D"/>
-                </a:solidFill>
-                <a:latin typeface="Inter"/>
-              </a:rPr>
-              <a:t>0.35·F1+0.35·IoU+0.30·mIoU</a:t>
-            </a:r>
-          </a:p>
-        </p:txBody>
-      </p:sp>
-      <p:sp>
-        <p:nvSpPr>
-          <p:cNvPr id="15" name="Rounded Rectangle 14"/>
-          <p:cNvSpPr/>
-          <p:nvPr/>
-        </p:nvSpPr>
-        <p:spPr>
-          <a:xfrm>
-            <a:off x="4928616" y="5074920"/>
-            <a:ext cx="2194560" cy="1051560"/>
-          </a:xfrm>
-          <a:prstGeom prst="roundRect">
-            <a:avLst>
-              <a:gd name="adj" fmla="val 9000"/>
-            </a:avLst>
-          </a:prstGeom>
-          <a:solidFill>
-            <a:srgbClr val="0A0E12"/>
-          </a:solidFill>
-          <a:ln w="12700">
-            <a:solidFill>
-              <a:srgbClr val="2A333D"/>
-            </a:solidFill>
-          </a:ln>
-        </p:spPr>
-        <p:style>
-          <a:lnRef idx="1">
-            <a:schemeClr val="accent1"/>
-          </a:lnRef>
-          <a:fillRef idx="3">
-            <a:schemeClr val="accent1"/>
-          </a:fillRef>
-          <a:effectRef idx="2">
-            <a:schemeClr val="accent1"/>
-          </a:effectRef>
-          <a:fontRef idx="minor">
-            <a:schemeClr val="lt1"/>
-          </a:fontRef>
-        </p:style>
-        <p:txBody>
-          <a:bodyPr rtlCol="0" anchor="ctr"/>
-          <a:lstStyle/>
-          <a:p>
-            <a:pPr algn="ctr"/>
-          </a:p>
-        </p:txBody>
-      </p:sp>
-      <p:sp>
-        <p:nvSpPr>
-          <p:cNvPr id="16" name="TextBox 15"/>
-          <p:cNvSpPr txBox="1"/>
-          <p:nvPr/>
-        </p:nvSpPr>
-        <p:spPr>
-          <a:xfrm>
-            <a:off x="5065776" y="5129783"/>
-            <a:ext cx="1938528" cy="228600"/>
-          </a:xfrm>
-          <a:prstGeom prst="rect">
-            <a:avLst/>
-          </a:prstGeom>
-          <a:noFill/>
-        </p:spPr>
-        <p:txBody>
-          <a:bodyPr wrap="square">
-            <a:spAutoFit/>
-          </a:bodyPr>
-          <a:lstStyle/>
-          <a:p>
-            <a:pPr algn="l"/>
-            <a:r>
-              <a:rPr sz="1000" b="1">
-                <a:solidFill>
-                  <a:srgbClr val="69737D"/>
-                </a:solidFill>
-                <a:latin typeface="Inter"/>
-              </a:rPr>
-              <a:t>LEVEL 01</a:t>
-            </a:r>
-          </a:p>
-        </p:txBody>
-      </p:sp>
-      <p:sp>
-        <p:nvSpPr>
-          <p:cNvPr id="17" name="TextBox 16"/>
-          <p:cNvSpPr txBox="1"/>
-          <p:nvPr/>
-        </p:nvSpPr>
-        <p:spPr>
-          <a:xfrm>
-            <a:off x="5065776" y="5349240"/>
-            <a:ext cx="1938528" cy="457200"/>
-          </a:xfrm>
-          <a:prstGeom prst="rect">
-            <a:avLst/>
-          </a:prstGeom>
-          <a:noFill/>
-        </p:spPr>
-        <p:txBody>
-          <a:bodyPr wrap="square">
-            <a:spAutoFit/>
-          </a:bodyPr>
-          <a:lstStyle/>
-          <a:p>
-            <a:pPr algn="l"/>
-            <a:r>
-              <a:rPr sz="2200" b="1">
-                <a:solidFill>
-                  <a:srgbClr val="F2F4F5"/>
-                </a:solidFill>
-                <a:latin typeface="Inter"/>
-              </a:rPr>
-              <a:t>0.5239</a:t>
-            </a:r>
-          </a:p>
-        </p:txBody>
-      </p:sp>
-      <p:sp>
-        <p:nvSpPr>
-          <p:cNvPr id="18" name="TextBox 17"/>
-          <p:cNvSpPr txBox="1"/>
-          <p:nvPr/>
-        </p:nvSpPr>
-        <p:spPr>
-          <a:xfrm>
-            <a:off x="5065776" y="5824728"/>
-            <a:ext cx="1938528" cy="228600"/>
-          </a:xfrm>
-          <a:prstGeom prst="rect">
-            <a:avLst/>
-          </a:prstGeom>
-          <a:noFill/>
-        </p:spPr>
-        <p:txBody>
-          <a:bodyPr wrap="square">
-            <a:spAutoFit/>
-          </a:bodyPr>
-          <a:lstStyle/>
-          <a:p>
-            <a:pPr algn="l"/>
-            <a:r>
-              <a:rPr sz="1000" b="0">
-                <a:solidFill>
-                  <a:srgbClr val="69737D"/>
-                </a:solidFill>
-                <a:latin typeface="Inter"/>
-              </a:rPr>
-              <a:t>IoU burn</a:t>
-            </a:r>
-          </a:p>
-        </p:txBody>
-      </p:sp>
-      <p:sp>
-        <p:nvSpPr>
-          <p:cNvPr id="19" name="Rounded Rectangle 18"/>
-          <p:cNvSpPr/>
-          <p:nvPr/>
-        </p:nvSpPr>
-        <p:spPr>
-          <a:xfrm>
-            <a:off x="7232904" y="5074920"/>
-            <a:ext cx="2194560" cy="1051560"/>
-          </a:xfrm>
-          <a:prstGeom prst="roundRect">
-            <a:avLst>
-              <a:gd name="adj" fmla="val 9000"/>
-            </a:avLst>
-          </a:prstGeom>
-          <a:solidFill>
-            <a:srgbClr val="0A0E12"/>
-          </a:solidFill>
-          <a:ln w="12700">
-            <a:solidFill>
-              <a:srgbClr val="2A333D"/>
-            </a:solidFill>
-          </a:ln>
-        </p:spPr>
-        <p:style>
-          <a:lnRef idx="1">
-            <a:schemeClr val="accent1"/>
-          </a:lnRef>
-          <a:fillRef idx="3">
-            <a:schemeClr val="accent1"/>
-          </a:fillRef>
-          <a:effectRef idx="2">
-            <a:schemeClr val="accent1"/>
-          </a:effectRef>
-          <a:fontRef idx="minor">
-            <a:schemeClr val="lt1"/>
-          </a:fontRef>
-        </p:style>
-        <p:txBody>
-          <a:bodyPr rtlCol="0" anchor="ctr"/>
-          <a:lstStyle/>
-          <a:p>
-            <a:pPr algn="ctr"/>
-          </a:p>
-        </p:txBody>
-      </p:sp>
-      <p:sp>
-        <p:nvSpPr>
-          <p:cNvPr id="20" name="TextBox 19"/>
-          <p:cNvSpPr txBox="1"/>
-          <p:nvPr/>
-        </p:nvSpPr>
-        <p:spPr>
-          <a:xfrm>
-            <a:off x="7370064" y="5129783"/>
-            <a:ext cx="1938528" cy="228600"/>
-          </a:xfrm>
-          <a:prstGeom prst="rect">
-            <a:avLst/>
-          </a:prstGeom>
-          <a:noFill/>
-        </p:spPr>
-        <p:txBody>
-          <a:bodyPr wrap="square">
-            <a:spAutoFit/>
-          </a:bodyPr>
-          <a:lstStyle/>
-          <a:p>
-            <a:pPr algn="l"/>
-            <a:r>
-              <a:rPr sz="1000" b="1">
-                <a:solidFill>
-                  <a:srgbClr val="69737D"/>
-                </a:solidFill>
-                <a:latin typeface="Inter"/>
-              </a:rPr>
-              <a:t>LEVEL 02–03</a:t>
-            </a:r>
-          </a:p>
-        </p:txBody>
-      </p:sp>
-      <p:sp>
-        <p:nvSpPr>
-          <p:cNvPr id="21" name="TextBox 20"/>
-          <p:cNvSpPr txBox="1"/>
-          <p:nvPr/>
-        </p:nvSpPr>
-        <p:spPr>
-          <a:xfrm>
-            <a:off x="7370064" y="5349240"/>
-            <a:ext cx="1938528" cy="457200"/>
-          </a:xfrm>
-          <a:prstGeom prst="rect">
-            <a:avLst/>
-          </a:prstGeom>
-          <a:noFill/>
-        </p:spPr>
-        <p:txBody>
-          <a:bodyPr wrap="square">
-            <a:spAutoFit/>
-          </a:bodyPr>
-          <a:lstStyle/>
-          <a:p>
-            <a:pPr algn="l"/>
-            <a:r>
-              <a:rPr sz="2200" b="1">
-                <a:solidFill>
-                  <a:srgbClr val="F2F4F5"/>
-                </a:solidFill>
-                <a:latin typeface="Inter"/>
-              </a:rPr>
-              <a:t>0.5430</a:t>
-            </a:r>
-          </a:p>
-        </p:txBody>
-      </p:sp>
-      <p:sp>
-        <p:nvSpPr>
-          <p:cNvPr id="22" name="TextBox 21"/>
-          <p:cNvSpPr txBox="1"/>
-          <p:nvPr/>
-        </p:nvSpPr>
-        <p:spPr>
-          <a:xfrm>
-            <a:off x="7370064" y="5824728"/>
-            <a:ext cx="1938528" cy="228600"/>
-          </a:xfrm>
-          <a:prstGeom prst="rect">
-            <a:avLst/>
-          </a:prstGeom>
-          <a:noFill/>
-        </p:spPr>
-        <p:txBody>
-          <a:bodyPr wrap="square">
-            <a:spAutoFit/>
-          </a:bodyPr>
-          <a:lstStyle/>
-          <a:p>
-            <a:pPr algn="l"/>
-            <a:r>
-              <a:rPr sz="1000" b="0">
-                <a:solidFill>
-                  <a:srgbClr val="69737D"/>
-                </a:solidFill>
-                <a:latin typeface="Inter"/>
-              </a:rPr>
-              <a:t>mIoU severity</a:t>
-            </a:r>
-          </a:p>
-        </p:txBody>
-      </p:sp>
-      <p:sp>
-        <p:nvSpPr>
-          <p:cNvPr id="23" name="Rounded Rectangle 22"/>
-          <p:cNvSpPr/>
-          <p:nvPr/>
-        </p:nvSpPr>
-        <p:spPr>
-          <a:xfrm>
-            <a:off x="9537192" y="5074920"/>
-            <a:ext cx="2194560" cy="1051560"/>
-          </a:xfrm>
-          <a:prstGeom prst="roundRect">
-            <a:avLst>
-              <a:gd name="adj" fmla="val 9000"/>
-            </a:avLst>
-          </a:prstGeom>
-          <a:solidFill>
-            <a:srgbClr val="0A0E12"/>
-          </a:solidFill>
-          <a:ln w="12700">
-            <a:solidFill>
-              <a:srgbClr val="2A333D"/>
-            </a:solidFill>
-          </a:ln>
-        </p:spPr>
-        <p:style>
-          <a:lnRef idx="1">
-            <a:schemeClr val="accent1"/>
-          </a:lnRef>
-          <a:fillRef idx="3">
-            <a:schemeClr val="accent1"/>
-          </a:fillRef>
-          <a:effectRef idx="2">
-            <a:schemeClr val="accent1"/>
-          </a:effectRef>
-          <a:fontRef idx="minor">
-            <a:schemeClr val="lt1"/>
-          </a:fontRef>
-        </p:style>
-        <p:txBody>
-          <a:bodyPr rtlCol="0" anchor="ctr"/>
-          <a:lstStyle/>
-          <a:p>
-            <a:pPr algn="ctr"/>
-          </a:p>
-        </p:txBody>
-      </p:sp>
-      <p:sp>
-        <p:nvSpPr>
-          <p:cNvPr id="24" name="TextBox 23"/>
-          <p:cNvSpPr txBox="1"/>
-          <p:nvPr/>
-        </p:nvSpPr>
-        <p:spPr>
-          <a:xfrm>
-            <a:off x="9674352" y="5129783"/>
-            <a:ext cx="1938528" cy="228600"/>
-          </a:xfrm>
-          <a:prstGeom prst="rect">
-            <a:avLst/>
-          </a:prstGeom>
-          <a:noFill/>
-        </p:spPr>
-        <p:txBody>
-          <a:bodyPr wrap="square">
-            <a:spAutoFit/>
-          </a:bodyPr>
-          <a:lstStyle/>
-          <a:p>
-            <a:pPr algn="l"/>
-            <a:r>
-              <a:rPr sz="1000" b="1">
-                <a:solidFill>
-                  <a:srgbClr val="69737D"/>
-                </a:solidFill>
-                <a:latin typeface="Inter"/>
-              </a:rPr>
-              <a:t>STATUS</a:t>
-            </a:r>
-          </a:p>
-        </p:txBody>
-      </p:sp>
-      <p:sp>
-        <p:nvSpPr>
-          <p:cNvPr id="25" name="TextBox 24"/>
-          <p:cNvSpPr txBox="1"/>
-          <p:nvPr/>
-        </p:nvSpPr>
-        <p:spPr>
-          <a:xfrm>
-            <a:off x="9674352" y="5349240"/>
-            <a:ext cx="1938528" cy="457200"/>
-          </a:xfrm>
-          <a:prstGeom prst="rect">
-            <a:avLst/>
-          </a:prstGeom>
-          <a:noFill/>
-        </p:spPr>
-        <p:txBody>
-          <a:bodyPr wrap="square">
-            <a:spAutoFit/>
-          </a:bodyPr>
-          <a:lstStyle/>
-          <a:p>
-            <a:pPr algn="l"/>
-            <a:r>
-              <a:rPr sz="2200" b="1">
-                <a:solidFill>
-                  <a:srgbClr val="62D99A"/>
-                </a:solidFill>
-                <a:latin typeface="Inter"/>
-              </a:rPr>
-              <a:t>FINAL</a:t>
-            </a:r>
-          </a:p>
-        </p:txBody>
-      </p:sp>
-      <p:sp>
-        <p:nvSpPr>
-          <p:cNvPr id="26" name="TextBox 25"/>
-          <p:cNvSpPr txBox="1"/>
-          <p:nvPr/>
-        </p:nvSpPr>
-        <p:spPr>
-          <a:xfrm>
-            <a:off x="9674352" y="5824728"/>
-            <a:ext cx="1938528" cy="228600"/>
-          </a:xfrm>
-          <a:prstGeom prst="rect">
-            <a:avLst/>
-          </a:prstGeom>
-          <a:noFill/>
-        </p:spPr>
-        <p:txBody>
-          <a:bodyPr wrap="square">
-            <a:spAutoFit/>
-          </a:bodyPr>
-          <a:lstStyle/>
-          <a:p>
-            <a:pPr algn="l"/>
-            <a:r>
-              <a:rPr sz="1000" b="0">
-                <a:solidFill>
-                  <a:srgbClr val="69737D"/>
-                </a:solidFill>
-                <a:latin typeface="Inter"/>
-              </a:rPr>
-              <a:t>submission · 447 строк</a:t>
+              <a:t>сервис LIVE</a:t>
             </a:r>
           </a:p>
         </p:txBody>
@@ -4098,61 +4509,119 @@
       <p:grpSpPr/>
       <p:sp>
         <p:nvSpPr>
-          <p:cNvPr id="2" name="Rounded Rectangle 1"/>
+          <p:cNvPr id="2" name="TextBox 1"/>
+          <p:cNvSpPr txBox="1"/>
+          <p:nvPr/>
+        </p:nvSpPr>
+        <p:spPr>
+          <a:xfrm>
+            <a:off x="640080" y="1463040"/>
+            <a:ext cx="10881360" cy="1097280"/>
+          </a:xfrm>
+          <a:prstGeom prst="rect">
+            <a:avLst/>
+          </a:prstGeom>
+          <a:noFill/>
+        </p:spPr>
+        <p:txBody>
+          <a:bodyPr wrap="square">
+            <a:spAutoFit/>
+          </a:bodyPr>
+          <a:lstStyle/>
+          <a:p>
+            <a:pPr algn="ctr"/>
+            <a:r>
+              <a:rPr sz="6400" b="1">
+                <a:solidFill>
+                  <a:srgbClr val="F2F4F5"/>
+                </a:solidFill>
+                <a:latin typeface="Inter"/>
+              </a:rPr>
+              <a:t>Жим Ногами</a:t>
+            </a:r>
+          </a:p>
+        </p:txBody>
+      </p:sp>
+      <p:sp>
+        <p:nvSpPr>
+          <p:cNvPr id="3" name="TextBox 2"/>
+          <p:cNvSpPr txBox="1"/>
+          <p:nvPr/>
+        </p:nvSpPr>
+        <p:spPr>
+          <a:xfrm>
+            <a:off x="640080" y="2834640"/>
+            <a:ext cx="10881360" cy="731520"/>
+          </a:xfrm>
+          <a:prstGeom prst="rect">
+            <a:avLst/>
+          </a:prstGeom>
+          <a:noFill/>
+        </p:spPr>
+        <p:txBody>
+          <a:bodyPr wrap="square">
+            <a:spAutoFit/>
+          </a:bodyPr>
+          <a:lstStyle/>
+          <a:p>
+            <a:pPr algn="ctr"/>
+            <a:r>
+              <a:rPr sz="2200" b="0">
+                <a:solidFill>
+                  <a:srgbClr val="B8C0C8"/>
+                </a:solidFill>
+                <a:latin typeface="Inter"/>
+              </a:rPr>
+              <a:t>спасибо · вопросы — по коду в репозитории</a:t>
+            </a:r>
+          </a:p>
+        </p:txBody>
+      </p:sp>
+      <p:sp>
+        <p:nvSpPr>
+          <p:cNvPr id="4" name="TextBox 3"/>
+          <p:cNvSpPr txBox="1"/>
+          <p:nvPr/>
+        </p:nvSpPr>
+        <p:spPr>
+          <a:xfrm>
+            <a:off x="640080" y="3931920"/>
+            <a:ext cx="10881360" cy="548640"/>
+          </a:xfrm>
+          <a:prstGeom prst="rect">
+            <a:avLst/>
+          </a:prstGeom>
+          <a:noFill/>
+        </p:spPr>
+        <p:txBody>
+          <a:bodyPr wrap="square">
+            <a:spAutoFit/>
+          </a:bodyPr>
+          <a:lstStyle/>
+          <a:p>
+            <a:pPr algn="ctr"/>
+            <a:r>
+              <a:rPr sz="1600" b="0">
+                <a:solidFill>
+                  <a:srgbClr val="7D8690"/>
+                </a:solidFill>
+                <a:latin typeface="Inter"/>
+              </a:rPr>
+              <a:t>github.com/izislesar/kosmohack · gitverse · Score 0.654</a:t>
+            </a:r>
+          </a:p>
+        </p:txBody>
+      </p:sp>
+      <p:sp>
+        <p:nvSpPr>
+          <p:cNvPr id="5" name="Oval 4"/>
           <p:cNvSpPr/>
           <p:nvPr/>
         </p:nvSpPr>
         <p:spPr>
           <a:xfrm>
-            <a:off x="5074920" y="228600"/>
-            <a:ext cx="2057400" cy="685800"/>
-          </a:xfrm>
-          <a:prstGeom prst="roundRect">
-            <a:avLst>
-              <a:gd name="adj" fmla="val 9000"/>
-            </a:avLst>
-          </a:prstGeom>
-          <a:solidFill>
-            <a:srgbClr val="0A0E12"/>
-          </a:solidFill>
-          <a:ln w="12700">
-            <a:solidFill>
-              <a:srgbClr val="2A333D"/>
-            </a:solidFill>
-          </a:ln>
-        </p:spPr>
-        <p:style>
-          <a:lnRef idx="1">
-            <a:schemeClr val="accent1"/>
-          </a:lnRef>
-          <a:fillRef idx="3">
-            <a:schemeClr val="accent1"/>
-          </a:fillRef>
-          <a:effectRef idx="2">
-            <a:schemeClr val="accent1"/>
-          </a:effectRef>
-          <a:fontRef idx="minor">
-            <a:schemeClr val="lt1"/>
-          </a:fontRef>
-        </p:style>
-        <p:txBody>
-          <a:bodyPr rtlCol="0" anchor="ctr"/>
-          <a:lstStyle/>
-          <a:p>
-            <a:pPr algn="ctr"/>
-          </a:p>
-        </p:txBody>
-      </p:sp>
-      <p:sp>
-        <p:nvSpPr>
-          <p:cNvPr id="3" name="Oval 2"/>
-          <p:cNvSpPr/>
-          <p:nvPr/>
-        </p:nvSpPr>
-        <p:spPr>
-          <a:xfrm>
-            <a:off x="5257800" y="457200"/>
-            <a:ext cx="128016" cy="128016"/>
+            <a:off x="5989320" y="5120640"/>
+            <a:ext cx="182880" cy="182880"/>
           </a:xfrm>
           <a:prstGeom prst="ellipse">
             <a:avLst/>
@@ -4183,590 +4652,6 @@
           <a:lstStyle/>
           <a:p>
             <a:pPr algn="ctr"/>
-          </a:p>
-        </p:txBody>
-      </p:sp>
-      <p:sp>
-        <p:nvSpPr>
-          <p:cNvPr id="4" name="TextBox 3"/>
-          <p:cNvSpPr txBox="1"/>
-          <p:nvPr/>
-        </p:nvSpPr>
-        <p:spPr>
-          <a:xfrm>
-            <a:off x="5486400" y="256032"/>
-            <a:ext cx="1463040" cy="320040"/>
-          </a:xfrm>
-          <a:prstGeom prst="rect">
-            <a:avLst/>
-          </a:prstGeom>
-          <a:noFill/>
-        </p:spPr>
-        <p:txBody>
-          <a:bodyPr wrap="square">
-            <a:spAutoFit/>
-          </a:bodyPr>
-          <a:lstStyle/>
-          <a:p>
-            <a:pPr algn="ctr"/>
-            <a:r>
-              <a:rPr sz="1400" b="1">
-                <a:solidFill>
-                  <a:srgbClr val="F2F4F5"/>
-                </a:solidFill>
-                <a:latin typeface="Inter"/>
-              </a:rPr>
-              <a:t>ЖИМ НОГАМИ</a:t>
-            </a:r>
-          </a:p>
-        </p:txBody>
-      </p:sp>
-      <p:sp>
-        <p:nvSpPr>
-          <p:cNvPr id="5" name="TextBox 4"/>
-          <p:cNvSpPr txBox="1"/>
-          <p:nvPr/>
-        </p:nvSpPr>
-        <p:spPr>
-          <a:xfrm>
-            <a:off x="5486400" y="530352"/>
-            <a:ext cx="1463040" cy="274320"/>
-          </a:xfrm>
-          <a:prstGeom prst="rect">
-            <a:avLst/>
-          </a:prstGeom>
-          <a:noFill/>
-        </p:spPr>
-        <p:txBody>
-          <a:bodyPr wrap="square">
-            <a:spAutoFit/>
-          </a:bodyPr>
-          <a:lstStyle/>
-          <a:p>
-            <a:pPr algn="ctr"/>
-            <a:r>
-              <a:rPr sz="800" b="0">
-                <a:solidFill>
-                  <a:srgbClr val="69737D"/>
-                </a:solidFill>
-                <a:latin typeface="Inter"/>
-              </a:rPr>
-              <a:t>FIRE MONITOR · KOSMOHACK 2026</a:t>
-            </a:r>
-          </a:p>
-        </p:txBody>
-      </p:sp>
-      <p:sp>
-        <p:nvSpPr>
-          <p:cNvPr id="6" name="Rounded Rectangle 5"/>
-          <p:cNvSpPr/>
-          <p:nvPr/>
-        </p:nvSpPr>
-        <p:spPr>
-          <a:xfrm>
-            <a:off x="320040" y="1188720"/>
-            <a:ext cx="5852160" cy="4480560"/>
-          </a:xfrm>
-          <a:prstGeom prst="roundRect">
-            <a:avLst>
-              <a:gd name="adj" fmla="val 9000"/>
-            </a:avLst>
-          </a:prstGeom>
-          <a:solidFill>
-            <a:srgbClr val="0A0E12"/>
-          </a:solidFill>
-          <a:ln w="12700">
-            <a:solidFill>
-              <a:srgbClr val="2A333D"/>
-            </a:solidFill>
-          </a:ln>
-        </p:spPr>
-        <p:style>
-          <a:lnRef idx="1">
-            <a:schemeClr val="accent1"/>
-          </a:lnRef>
-          <a:fillRef idx="3">
-            <a:schemeClr val="accent1"/>
-          </a:fillRef>
-          <a:effectRef idx="2">
-            <a:schemeClr val="accent1"/>
-          </a:effectRef>
-          <a:fontRef idx="minor">
-            <a:schemeClr val="lt1"/>
-          </a:fontRef>
-        </p:style>
-        <p:txBody>
-          <a:bodyPr rtlCol="0" anchor="ctr"/>
-          <a:lstStyle/>
-          <a:p>
-            <a:pPr algn="ctr"/>
-          </a:p>
-        </p:txBody>
-      </p:sp>
-      <p:sp>
-        <p:nvSpPr>
-          <p:cNvPr id="7" name="TextBox 6"/>
-          <p:cNvSpPr txBox="1"/>
-          <p:nvPr/>
-        </p:nvSpPr>
-        <p:spPr>
-          <a:xfrm>
-            <a:off x="594360" y="1325880"/>
-            <a:ext cx="914400" cy="274320"/>
-          </a:xfrm>
-          <a:prstGeom prst="rect">
-            <a:avLst/>
-          </a:prstGeom>
-          <a:noFill/>
-        </p:spPr>
-        <p:txBody>
-          <a:bodyPr wrap="square">
-            <a:spAutoFit/>
-          </a:bodyPr>
-          <a:lstStyle/>
-          <a:p>
-            <a:pPr algn="l"/>
-            <a:r>
-              <a:rPr sz="1100" b="1">
-                <a:solidFill>
-                  <a:srgbClr val="69737D"/>
-                </a:solidFill>
-                <a:latin typeface="Inter"/>
-              </a:rPr>
-              <a:t>07</a:t>
-            </a:r>
-          </a:p>
-        </p:txBody>
-      </p:sp>
-      <p:sp>
-        <p:nvSpPr>
-          <p:cNvPr id="8" name="TextBox 7"/>
-          <p:cNvSpPr txBox="1"/>
-          <p:nvPr/>
-        </p:nvSpPr>
-        <p:spPr>
-          <a:xfrm>
-            <a:off x="594360" y="1572768"/>
-            <a:ext cx="5303520" cy="457200"/>
-          </a:xfrm>
-          <a:prstGeom prst="rect">
-            <a:avLst/>
-          </a:prstGeom>
-          <a:noFill/>
-        </p:spPr>
-        <p:txBody>
-          <a:bodyPr wrap="square">
-            <a:spAutoFit/>
-          </a:bodyPr>
-          <a:lstStyle/>
-          <a:p>
-            <a:pPr algn="l"/>
-            <a:r>
-              <a:rPr sz="2100" b="1">
-                <a:solidFill>
-                  <a:srgbClr val="F2F4F5"/>
-                </a:solidFill>
-                <a:latin typeface="Inter"/>
-              </a:rPr>
-              <a:t>Потолок — честно</a:t>
-            </a:r>
-          </a:p>
-        </p:txBody>
-      </p:sp>
-      <p:sp>
-        <p:nvSpPr>
-          <p:cNvPr id="9" name="Oval 8"/>
-          <p:cNvSpPr/>
-          <p:nvPr/>
-        </p:nvSpPr>
-        <p:spPr>
-          <a:xfrm>
-            <a:off x="594360" y="2331720"/>
-            <a:ext cx="137160" cy="137160"/>
-          </a:xfrm>
-          <a:prstGeom prst="ellipse">
-            <a:avLst/>
-          </a:prstGeom>
-          <a:solidFill>
-            <a:srgbClr val="E6C65C"/>
-          </a:solidFill>
-          <a:ln>
-            <a:noFill/>
-          </a:ln>
-        </p:spPr>
-        <p:style>
-          <a:lnRef idx="1">
-            <a:schemeClr val="accent1"/>
-          </a:lnRef>
-          <a:fillRef idx="3">
-            <a:schemeClr val="accent1"/>
-          </a:fillRef>
-          <a:effectRef idx="2">
-            <a:schemeClr val="accent1"/>
-          </a:effectRef>
-          <a:fontRef idx="minor">
-            <a:schemeClr val="lt1"/>
-          </a:fontRef>
-        </p:style>
-        <p:txBody>
-          <a:bodyPr rtlCol="0" anchor="ctr"/>
-          <a:lstStyle/>
-          <a:p>
-            <a:pPr algn="ctr"/>
-          </a:p>
-        </p:txBody>
-      </p:sp>
-      <p:sp>
-        <p:nvSpPr>
-          <p:cNvPr id="10" name="TextBox 9"/>
-          <p:cNvSpPr txBox="1"/>
-          <p:nvPr/>
-        </p:nvSpPr>
-        <p:spPr>
-          <a:xfrm>
-            <a:off x="868680" y="2194560"/>
-            <a:ext cx="5029200" cy="594360"/>
-          </a:xfrm>
-          <a:prstGeom prst="rect">
-            <a:avLst/>
-          </a:prstGeom>
-          <a:noFill/>
-        </p:spPr>
-        <p:txBody>
-          <a:bodyPr wrap="square">
-            <a:spAutoFit/>
-          </a:bodyPr>
-          <a:lstStyle/>
-          <a:p>
-            <a:pPr algn="l"/>
-            <a:r>
-              <a:rPr sz="1400" b="1">
-                <a:solidFill>
-                  <a:srgbClr val="F2F4F5"/>
-                </a:solidFill>
-                <a:latin typeface="Inter"/>
-              </a:rPr>
-              <a:t>Demo-привязка</a:t>
-            </a:r>
-            <a:r>
-              <a:rPr sz="1100" b="0">
-                <a:solidFill>
-                  <a:srgbClr val="69737D"/>
-                </a:solidFill>
-                <a:latin typeface="Inter"/>
-              </a:rPr>
-              <a:t>
-гео/дат в тесте нет — сетка задокументирована</a:t>
-            </a:r>
-          </a:p>
-        </p:txBody>
-      </p:sp>
-      <p:sp>
-        <p:nvSpPr>
-          <p:cNvPr id="11" name="Oval 10"/>
-          <p:cNvSpPr/>
-          <p:nvPr/>
-        </p:nvSpPr>
-        <p:spPr>
-          <a:xfrm>
-            <a:off x="594360" y="3108960"/>
-            <a:ext cx="137160" cy="137160"/>
-          </a:xfrm>
-          <a:prstGeom prst="ellipse">
-            <a:avLst/>
-          </a:prstGeom>
-          <a:solidFill>
-            <a:srgbClr val="FF6B35"/>
-          </a:solidFill>
-          <a:ln>
-            <a:noFill/>
-          </a:ln>
-        </p:spPr>
-        <p:style>
-          <a:lnRef idx="1">
-            <a:schemeClr val="accent1"/>
-          </a:lnRef>
-          <a:fillRef idx="3">
-            <a:schemeClr val="accent1"/>
-          </a:fillRef>
-          <a:effectRef idx="2">
-            <a:schemeClr val="accent1"/>
-          </a:effectRef>
-          <a:fontRef idx="minor">
-            <a:schemeClr val="lt1"/>
-          </a:fontRef>
-        </p:style>
-        <p:txBody>
-          <a:bodyPr rtlCol="0" anchor="ctr"/>
-          <a:lstStyle/>
-          <a:p>
-            <a:pPr algn="ctr"/>
-          </a:p>
-        </p:txBody>
-      </p:sp>
-      <p:sp>
-        <p:nvSpPr>
-          <p:cNvPr id="12" name="TextBox 11"/>
-          <p:cNvSpPr txBox="1"/>
-          <p:nvPr/>
-        </p:nvSpPr>
-        <p:spPr>
-          <a:xfrm>
-            <a:off x="868680" y="2971800"/>
-            <a:ext cx="5029200" cy="594360"/>
-          </a:xfrm>
-          <a:prstGeom prst="rect">
-            <a:avLst/>
-          </a:prstGeom>
-          <a:noFill/>
-        </p:spPr>
-        <p:txBody>
-          <a:bodyPr wrap="square">
-            <a:spAutoFit/>
-          </a:bodyPr>
-          <a:lstStyle/>
-          <a:p>
-            <a:pPr algn="l"/>
-            <a:r>
-              <a:rPr sz="1400" b="1">
-                <a:solidFill>
-                  <a:srgbClr val="F2F4F5"/>
-                </a:solidFill>
-                <a:latin typeface="Inter"/>
-              </a:rPr>
-              <a:t>Ночь −0.05 F1</a:t>
-            </a:r>
-            <a:r>
-              <a:rPr sz="1100" b="0">
-                <a:solidFill>
-                  <a:srgbClr val="69737D"/>
-                </a:solidFill>
-                <a:latin typeface="Inter"/>
-              </a:rPr>
-              <a:t>
-I1–I3 ночью = NaN по построению</a:t>
-            </a:r>
-          </a:p>
-        </p:txBody>
-      </p:sp>
-      <p:sp>
-        <p:nvSpPr>
-          <p:cNvPr id="13" name="Oval 12"/>
-          <p:cNvSpPr/>
-          <p:nvPr/>
-        </p:nvSpPr>
-        <p:spPr>
-          <a:xfrm>
-            <a:off x="594360" y="3886200"/>
-            <a:ext cx="137160" cy="137160"/>
-          </a:xfrm>
-          <a:prstGeom prst="ellipse">
-            <a:avLst/>
-          </a:prstGeom>
-          <a:solidFill>
-            <a:srgbClr val="EF5B5B"/>
-          </a:solidFill>
-          <a:ln>
-            <a:noFill/>
-          </a:ln>
-        </p:spPr>
-        <p:style>
-          <a:lnRef idx="1">
-            <a:schemeClr val="accent1"/>
-          </a:lnRef>
-          <a:fillRef idx="3">
-            <a:schemeClr val="accent1"/>
-          </a:fillRef>
-          <a:effectRef idx="2">
-            <a:schemeClr val="accent1"/>
-          </a:effectRef>
-          <a:fontRef idx="minor">
-            <a:schemeClr val="lt1"/>
-          </a:fontRef>
-        </p:style>
-        <p:txBody>
-          <a:bodyPr rtlCol="0" anchor="ctr"/>
-          <a:lstStyle/>
-          <a:p>
-            <a:pPr algn="ctr"/>
-          </a:p>
-        </p:txBody>
-      </p:sp>
-      <p:sp>
-        <p:nvSpPr>
-          <p:cNvPr id="14" name="TextBox 13"/>
-          <p:cNvSpPr txBox="1"/>
-          <p:nvPr/>
-        </p:nvSpPr>
-        <p:spPr>
-          <a:xfrm>
-            <a:off x="868680" y="3749040"/>
-            <a:ext cx="5029200" cy="594360"/>
-          </a:xfrm>
-          <a:prstGeom prst="rect">
-            <a:avLst/>
-          </a:prstGeom>
-          <a:noFill/>
-        </p:spPr>
-        <p:txBody>
-          <a:bodyPr wrap="square">
-            <a:spAutoFit/>
-          </a:bodyPr>
-          <a:lstStyle/>
-          <a:p>
-            <a:pPr algn="l"/>
-            <a:r>
-              <a:rPr sz="1400" b="1">
-                <a:solidFill>
-                  <a:srgbClr val="F2F4F5"/>
-                </a:solidFill>
-                <a:latin typeface="Inter"/>
-              </a:rPr>
-              <a:t>0.654 — фриз</a:t>
-            </a:r>
-            <a:r>
-              <a:rPr sz="1100" b="0">
-                <a:solidFill>
-                  <a:srgbClr val="69737D"/>
-                </a:solidFill>
-                <a:latin typeface="Inter"/>
-              </a:rPr>
-              <a:t>
-топ 0.8+ берётся бэкбоунами, не тюнингом</a:t>
-            </a:r>
-          </a:p>
-        </p:txBody>
-      </p:sp>
-      <p:sp>
-        <p:nvSpPr>
-          <p:cNvPr id="15" name="Oval 14"/>
-          <p:cNvSpPr/>
-          <p:nvPr/>
-        </p:nvSpPr>
-        <p:spPr>
-          <a:xfrm>
-            <a:off x="594360" y="4663440"/>
-            <a:ext cx="137160" cy="137160"/>
-          </a:xfrm>
-          <a:prstGeom prst="ellipse">
-            <a:avLst/>
-          </a:prstGeom>
-          <a:solidFill>
-            <a:srgbClr val="62D99A"/>
-          </a:solidFill>
-          <a:ln>
-            <a:noFill/>
-          </a:ln>
-        </p:spPr>
-        <p:style>
-          <a:lnRef idx="1">
-            <a:schemeClr val="accent1"/>
-          </a:lnRef>
-          <a:fillRef idx="3">
-            <a:schemeClr val="accent1"/>
-          </a:fillRef>
-          <a:effectRef idx="2">
-            <a:schemeClr val="accent1"/>
-          </a:effectRef>
-          <a:fontRef idx="minor">
-            <a:schemeClr val="lt1"/>
-          </a:fontRef>
-        </p:style>
-        <p:txBody>
-          <a:bodyPr rtlCol="0" anchor="ctr"/>
-          <a:lstStyle/>
-          <a:p>
-            <a:pPr algn="ctr"/>
-          </a:p>
-        </p:txBody>
-      </p:sp>
-      <p:sp>
-        <p:nvSpPr>
-          <p:cNvPr id="16" name="TextBox 15"/>
-          <p:cNvSpPr txBox="1"/>
-          <p:nvPr/>
-        </p:nvSpPr>
-        <p:spPr>
-          <a:xfrm>
-            <a:off x="868680" y="4526280"/>
-            <a:ext cx="5029200" cy="594360"/>
-          </a:xfrm>
-          <a:prstGeom prst="rect">
-            <a:avLst/>
-          </a:prstGeom>
-          <a:noFill/>
-        </p:spPr>
-        <p:txBody>
-          <a:bodyPr wrap="square">
-            <a:spAutoFit/>
-          </a:bodyPr>
-          <a:lstStyle/>
-          <a:p>
-            <a:pPr algn="l"/>
-            <a:r>
-              <a:rPr sz="1400" b="1">
-                <a:solidFill>
-                  <a:srgbClr val="F2F4F5"/>
-                </a:solidFill>
-                <a:latin typeface="Inter"/>
-              </a:rPr>
-              <a:t>Next</a:t>
-            </a:r>
-            <a:r>
-              <a:rPr sz="1100" b="0">
-                <a:solidFill>
-                  <a:srgbClr val="69737D"/>
-                </a:solidFill>
-                <a:latin typeface="Inter"/>
-              </a:rPr>
-              <a:t>
-контуры вместо bbox · foundation-модели</a:t>
-            </a:r>
-          </a:p>
-        </p:txBody>
-      </p:sp>
-      <p:sp>
-        <p:nvSpPr>
-          <p:cNvPr id="17" name="TextBox 16"/>
-          <p:cNvSpPr txBox="1"/>
-          <p:nvPr/>
-        </p:nvSpPr>
-        <p:spPr>
-          <a:xfrm>
-            <a:off x="6675120" y="2926080"/>
-            <a:ext cx="5212080" cy="1097280"/>
-          </a:xfrm>
-          <a:prstGeom prst="rect">
-            <a:avLst/>
-          </a:prstGeom>
-          <a:noFill/>
-        </p:spPr>
-        <p:txBody>
-          <a:bodyPr wrap="square">
-            <a:spAutoFit/>
-          </a:bodyPr>
-          <a:lstStyle/>
-          <a:p>
-            <a:pPr algn="ctr"/>
-            <a:r>
-              <a:rPr sz="4000" b="1">
-                <a:solidFill>
-                  <a:srgbClr val="F2F4F5"/>
-                </a:solidFill>
-                <a:latin typeface="Inter"/>
-              </a:rPr>
-              <a:t>ЖИМ НОГАМИ</a:t>
-            </a:r>
-            <a:r>
-              <a:rPr sz="1600" b="0">
-                <a:solidFill>
-                  <a:srgbClr val="69737D"/>
-                </a:solidFill>
-                <a:latin typeface="Inter"/>
-              </a:rPr>
-              <a:t>
-спасибо · вопросы — по коду в репо</a:t>
-            </a:r>
           </a:p>
         </p:txBody>
       </p:sp>
@@ -4798,48 +4683,45 @@
       <p:grpSpPr/>
       <p:sp>
         <p:nvSpPr>
-          <p:cNvPr id="2" name="Rounded Rectangle 1"/>
-          <p:cNvSpPr/>
-          <p:nvPr/>
-        </p:nvSpPr>
-        <p:spPr>
-          <a:xfrm>
-            <a:off x="5074920" y="228600"/>
-            <a:ext cx="2057400" cy="685800"/>
-          </a:xfrm>
-          <a:prstGeom prst="roundRect">
-            <a:avLst>
-              <a:gd name="adj" fmla="val 9000"/>
-            </a:avLst>
-          </a:prstGeom>
-          <a:solidFill>
-            <a:srgbClr val="0A0E12"/>
-          </a:solidFill>
-          <a:ln w="12700">
-            <a:solidFill>
-              <a:srgbClr val="2A333D"/>
-            </a:solidFill>
-          </a:ln>
-        </p:spPr>
-        <p:style>
-          <a:lnRef idx="1">
-            <a:schemeClr val="accent1"/>
-          </a:lnRef>
-          <a:fillRef idx="3">
-            <a:schemeClr val="accent1"/>
-          </a:fillRef>
-          <a:effectRef idx="2">
-            <a:schemeClr val="accent1"/>
-          </a:effectRef>
-          <a:fontRef idx="minor">
-            <a:schemeClr val="lt1"/>
-          </a:fontRef>
-        </p:style>
-        <p:txBody>
-          <a:bodyPr rtlCol="0" anchor="ctr"/>
-          <a:lstStyle/>
-          <a:p>
-            <a:pPr algn="ctr"/>
+          <p:cNvPr id="2" name="TextBox 1"/>
+          <p:cNvSpPr txBox="1"/>
+          <p:nvPr/>
+        </p:nvSpPr>
+        <p:spPr>
+          <a:xfrm>
+            <a:off x="640080" y="274320"/>
+            <a:ext cx="4572000" cy="365760"/>
+          </a:xfrm>
+          <a:prstGeom prst="rect">
+            <a:avLst/>
+          </a:prstGeom>
+          <a:noFill/>
+        </p:spPr>
+        <p:txBody>
+          <a:bodyPr wrap="square">
+            <a:spAutoFit/>
+          </a:bodyPr>
+          <a:lstStyle/>
+          <a:p>
+            <a:pPr algn="l"/>
+            <a:r>
+              <a:rPr sz="1200" b="1">
+                <a:solidFill>
+                  <a:srgbClr val="7D8690"/>
+                </a:solidFill>
+                <a:latin typeface="Inter"/>
+              </a:rPr>
+              <a:t>02 / 10   </a:t>
+            </a:r>
+            <a:r>
+              <a:rPr sz="1200" b="1">
+                <a:solidFill>
+                  <a:srgbClr val="7D8690"/>
+                </a:solidFill>
+                <a:latin typeface="Inter"/>
+              </a:rPr>
+              <a:t>ЖИМ НОГАМИ · KOSMOHACK</a:t>
+            </a:r>
           </a:p>
         </p:txBody>
       </p:sp>
@@ -4851,7 +4733,7 @@
         </p:nvSpPr>
         <p:spPr>
           <a:xfrm>
-            <a:off x="5257800" y="457200"/>
+            <a:off x="11612880" y="384048"/>
             <a:ext cx="128016" cy="128016"/>
           </a:xfrm>
           <a:prstGeom prst="ellipse">
@@ -4894,8 +4776,8 @@
         </p:nvSpPr>
         <p:spPr>
           <a:xfrm>
-            <a:off x="5486400" y="256032"/>
-            <a:ext cx="1463040" cy="320040"/>
+            <a:off x="640080" y="822960"/>
+            <a:ext cx="10881360" cy="1188720"/>
           </a:xfrm>
           <a:prstGeom prst="rect">
             <a:avLst/>
@@ -4908,181 +4790,30 @@
           </a:bodyPr>
           <a:lstStyle/>
           <a:p>
-            <a:pPr algn="ctr"/>
-            <a:r>
-              <a:rPr sz="1400" b="1">
+            <a:pPr algn="l"/>
+            <a:r>
+              <a:rPr sz="4000" b="1">
                 <a:solidFill>
                   <a:srgbClr val="F2F4F5"/>
                 </a:solidFill>
                 <a:latin typeface="Inter"/>
               </a:rPr>
-              <a:t>ЖИМ НОГАМИ</a:t>
-            </a:r>
-          </a:p>
-        </p:txBody>
-      </p:sp>
-      <p:sp>
-        <p:nvSpPr>
-          <p:cNvPr id="5" name="TextBox 4"/>
-          <p:cNvSpPr txBox="1"/>
-          <p:nvPr/>
-        </p:nvSpPr>
-        <p:spPr>
-          <a:xfrm>
-            <a:off x="5486400" y="530352"/>
-            <a:ext cx="1463040" cy="274320"/>
-          </a:xfrm>
-          <a:prstGeom prst="rect">
-            <a:avLst/>
-          </a:prstGeom>
-          <a:noFill/>
-        </p:spPr>
-        <p:txBody>
-          <a:bodyPr wrap="square">
-            <a:spAutoFit/>
-          </a:bodyPr>
-          <a:lstStyle/>
-          <a:p>
-            <a:pPr algn="ctr"/>
-            <a:r>
-              <a:rPr sz="800" b="0">
-                <a:solidFill>
-                  <a:srgbClr val="69737D"/>
-                </a:solidFill>
-                <a:latin typeface="Inter"/>
-              </a:rPr>
-              <a:t>FIRE MONITOR · KOSMOHACK 2026</a:t>
-            </a:r>
-          </a:p>
-        </p:txBody>
-      </p:sp>
-      <p:sp>
-        <p:nvSpPr>
-          <p:cNvPr id="6" name="Rounded Rectangle 5"/>
+              <a:t>Пожары видно из космоса.
+Беда — отличить их от заводов</a:t>
+            </a:r>
+          </a:p>
+        </p:txBody>
+      </p:sp>
+      <p:sp>
+        <p:nvSpPr>
+          <p:cNvPr id="5" name="Oval 4"/>
           <p:cNvSpPr/>
           <p:nvPr/>
         </p:nvSpPr>
         <p:spPr>
           <a:xfrm>
-            <a:off x="320040" y="1188720"/>
-            <a:ext cx="5852160" cy="4480560"/>
-          </a:xfrm>
-          <a:prstGeom prst="roundRect">
-            <a:avLst>
-              <a:gd name="adj" fmla="val 9000"/>
-            </a:avLst>
-          </a:prstGeom>
-          <a:solidFill>
-            <a:srgbClr val="0A0E12"/>
-          </a:solidFill>
-          <a:ln w="12700">
-            <a:solidFill>
-              <a:srgbClr val="2A333D"/>
-            </a:solidFill>
-          </a:ln>
-        </p:spPr>
-        <p:style>
-          <a:lnRef idx="1">
-            <a:schemeClr val="accent1"/>
-          </a:lnRef>
-          <a:fillRef idx="3">
-            <a:schemeClr val="accent1"/>
-          </a:fillRef>
-          <a:effectRef idx="2">
-            <a:schemeClr val="accent1"/>
-          </a:effectRef>
-          <a:fontRef idx="minor">
-            <a:schemeClr val="lt1"/>
-          </a:fontRef>
-        </p:style>
-        <p:txBody>
-          <a:bodyPr rtlCol="0" anchor="ctr"/>
-          <a:lstStyle/>
-          <a:p>
-            <a:pPr algn="ctr"/>
-          </a:p>
-        </p:txBody>
-      </p:sp>
-      <p:sp>
-        <p:nvSpPr>
-          <p:cNvPr id="7" name="TextBox 6"/>
-          <p:cNvSpPr txBox="1"/>
-          <p:nvPr/>
-        </p:nvSpPr>
-        <p:spPr>
-          <a:xfrm>
-            <a:off x="594360" y="1325880"/>
-            <a:ext cx="914400" cy="274320"/>
-          </a:xfrm>
-          <a:prstGeom prst="rect">
-            <a:avLst/>
-          </a:prstGeom>
-          <a:noFill/>
-        </p:spPr>
-        <p:txBody>
-          <a:bodyPr wrap="square">
-            <a:spAutoFit/>
-          </a:bodyPr>
-          <a:lstStyle/>
-          <a:p>
-            <a:pPr algn="l"/>
-            <a:r>
-              <a:rPr sz="1100" b="1">
-                <a:solidFill>
-                  <a:srgbClr val="69737D"/>
-                </a:solidFill>
-                <a:latin typeface="Inter"/>
-              </a:rPr>
-              <a:t>01</a:t>
-            </a:r>
-          </a:p>
-        </p:txBody>
-      </p:sp>
-      <p:sp>
-        <p:nvSpPr>
-          <p:cNvPr id="8" name="TextBox 7"/>
-          <p:cNvSpPr txBox="1"/>
-          <p:nvPr/>
-        </p:nvSpPr>
-        <p:spPr>
-          <a:xfrm>
-            <a:off x="594360" y="1572768"/>
-            <a:ext cx="5303520" cy="457200"/>
-          </a:xfrm>
-          <a:prstGeom prst="rect">
-            <a:avLst/>
-          </a:prstGeom>
-          <a:noFill/>
-        </p:spPr>
-        <p:txBody>
-          <a:bodyPr wrap="square">
-            <a:spAutoFit/>
-          </a:bodyPr>
-          <a:lstStyle/>
-          <a:p>
-            <a:pPr algn="l"/>
-            <a:r>
-              <a:rPr sz="2100" b="1">
-                <a:solidFill>
-                  <a:srgbClr val="F2F4F5"/>
-                </a:solidFill>
-                <a:latin typeface="Inter"/>
-              </a:rPr>
-              <a:t>Проблема</a:t>
-            </a:r>
-          </a:p>
-        </p:txBody>
-      </p:sp>
-      <p:sp>
-        <p:nvSpPr>
-          <p:cNvPr id="9" name="Oval 8"/>
-          <p:cNvSpPr/>
-          <p:nvPr/>
-        </p:nvSpPr>
-        <p:spPr>
-          <a:xfrm>
-            <a:off x="594360" y="2331720"/>
-            <a:ext cx="137160" cy="137160"/>
+            <a:off x="914400" y="2779776"/>
+            <a:ext cx="155448" cy="155448"/>
           </a:xfrm>
           <a:prstGeom prst="ellipse">
             <a:avLst/>
@@ -5118,14 +4849,14 @@
       </p:sp>
       <p:sp>
         <p:nvSpPr>
-          <p:cNvPr id="10" name="TextBox 9"/>
+          <p:cNvPr id="6" name="TextBox 5"/>
           <p:cNvSpPr txBox="1"/>
           <p:nvPr/>
         </p:nvSpPr>
         <p:spPr>
           <a:xfrm>
-            <a:off x="868680" y="2194560"/>
-            <a:ext cx="5029200" cy="594360"/>
+            <a:off x="1280160" y="2578608"/>
+            <a:ext cx="10332720" cy="822960"/>
           </a:xfrm>
           <a:prstGeom prst="rect">
             <a:avLst/>
@@ -5140,37 +4871,37 @@
           <a:p>
             <a:pPr algn="l"/>
             <a:r>
-              <a:rPr sz="1400" b="1">
+              <a:rPr sz="2200" b="0">
                 <a:solidFill>
                   <a:srgbClr val="F2F4F5"/>
                 </a:solidFill>
                 <a:latin typeface="Inter"/>
               </a:rPr>
-              <a:t>Ложняки FIRMS</a:t>
-            </a:r>
-            <a:r>
-              <a:rPr sz="1100" b="0">
-                <a:solidFill>
-                  <a:srgbClr val="69737D"/>
+              <a:t>Леса и степи горят с апреля по октябрь</a:t>
+            </a:r>
+            <a:r>
+              <a:rPr sz="1500" b="0">
+                <a:solidFill>
+                  <a:srgbClr val="7D8690"/>
                 </a:solidFill>
                 <a:latin typeface="Inter"/>
               </a:rPr>
               <a:t>
-факелы, металлургия и ТЭЦ — в промзонах их больше, чем пожаров</a:t>
-            </a:r>
-          </a:p>
-        </p:txBody>
-      </p:sp>
-      <p:sp>
-        <p:nvSpPr>
-          <p:cNvPr id="11" name="Oval 10"/>
+скорость степного фронта — километры в час</a:t>
+            </a:r>
+          </a:p>
+        </p:txBody>
+      </p:sp>
+      <p:sp>
+        <p:nvSpPr>
+          <p:cNvPr id="7" name="Oval 6"/>
           <p:cNvSpPr/>
           <p:nvPr/>
         </p:nvSpPr>
         <p:spPr>
           <a:xfrm>
-            <a:off x="594360" y="3108960"/>
-            <a:ext cx="137160" cy="137160"/>
+            <a:off x="914400" y="3831335"/>
+            <a:ext cx="155448" cy="155448"/>
           </a:xfrm>
           <a:prstGeom prst="ellipse">
             <a:avLst/>
@@ -5206,14 +4937,14 @@
       </p:sp>
       <p:sp>
         <p:nvSpPr>
-          <p:cNvPr id="12" name="TextBox 11"/>
+          <p:cNvPr id="8" name="TextBox 7"/>
           <p:cNvSpPr txBox="1"/>
           <p:nvPr/>
         </p:nvSpPr>
         <p:spPr>
           <a:xfrm>
-            <a:off x="868680" y="2971800"/>
-            <a:ext cx="5029200" cy="594360"/>
+            <a:off x="1280160" y="3630168"/>
+            <a:ext cx="10332720" cy="822960"/>
           </a:xfrm>
           <a:prstGeom prst="rect">
             <a:avLst/>
@@ -5228,37 +4959,37 @@
           <a:p>
             <a:pPr algn="l"/>
             <a:r>
-              <a:rPr sz="1400" b="1">
+              <a:rPr sz="2200" b="0">
                 <a:solidFill>
                   <a:srgbClr val="F2F4F5"/>
                 </a:solidFill>
                 <a:latin typeface="Inter"/>
               </a:rPr>
-              <a:t>Блики и пропуски</a:t>
-            </a:r>
-            <a:r>
-              <a:rPr sz="1100" b="0">
-                <a:solidFill>
-                  <a:srgbClr val="69737D"/>
+              <a:t>Глобальные продукты врут</a:t>
+            </a:r>
+            <a:r>
+              <a:rPr sz="1500" b="0">
+                <a:solidFill>
+                  <a:srgbClr val="7D8690"/>
                 </a:solidFill>
                 <a:latin typeface="Inter"/>
               </a:rPr>
               <a:t>
-металл, теплицы, вода · малые очаги, облака, дым</a:t>
-            </a:r>
-          </a:p>
-        </p:txBody>
-      </p:sp>
-      <p:sp>
-        <p:nvSpPr>
-          <p:cNvPr id="13" name="Oval 12"/>
+FIRMS сыплет ложняками на факелах и ТЭЦ, пропускает малые очаги</a:t>
+            </a:r>
+          </a:p>
+        </p:txBody>
+      </p:sp>
+      <p:sp>
+        <p:nvSpPr>
+          <p:cNvPr id="9" name="Oval 8"/>
           <p:cNvSpPr/>
           <p:nvPr/>
         </p:nvSpPr>
         <p:spPr>
           <a:xfrm>
-            <a:off x="594360" y="3886200"/>
-            <a:ext cx="137160" cy="137160"/>
+            <a:off x="914400" y="4882895"/>
+            <a:ext cx="155448" cy="155448"/>
           </a:xfrm>
           <a:prstGeom prst="ellipse">
             <a:avLst/>
@@ -5294,14 +5025,14 @@
       </p:sp>
       <p:sp>
         <p:nvSpPr>
-          <p:cNvPr id="14" name="TextBox 13"/>
+          <p:cNvPr id="10" name="TextBox 9"/>
           <p:cNvSpPr txBox="1"/>
           <p:nvPr/>
         </p:nvSpPr>
         <p:spPr>
           <a:xfrm>
-            <a:off x="868680" y="3749040"/>
-            <a:ext cx="5029200" cy="594360"/>
+            <a:off x="1280160" y="4681727"/>
+            <a:ext cx="10332720" cy="822960"/>
           </a:xfrm>
           <a:prstGeom prst="rect">
             <a:avLst/>
@@ -5316,139 +5047,27 @@
           <a:p>
             <a:pPr algn="l"/>
             <a:r>
-              <a:rPr sz="1400" b="1">
+              <a:rPr sz="2200" b="0">
                 <a:solidFill>
                   <a:srgbClr val="F2F4F5"/>
                 </a:solidFill>
                 <a:latin typeface="Inter"/>
               </a:rPr>
-              <a:t>Гари без методики</a:t>
-            </a:r>
-            <a:r>
-              <a:rPr sz="1100" b="0">
-                <a:solidFill>
-                  <a:srgbClr val="69737D"/>
+              <a:t>Гари считают вручную</a:t>
+            </a:r>
+            <a:r>
+              <a:rPr sz="1500" b="0">
+                <a:solidFill>
+                  <a:srgbClr val="7D8690"/>
                 </a:solidFill>
                 <a:latin typeface="Inter"/>
               </a:rPr>
               <a:t>
-выборочно, с задержкой в недели</a:t>
-            </a:r>
-          </a:p>
-        </p:txBody>
-      </p:sp>
-      <p:sp>
-        <p:nvSpPr>
-          <p:cNvPr id="15" name="Oval 14"/>
-          <p:cNvSpPr/>
-          <p:nvPr/>
-        </p:nvSpPr>
-        <p:spPr>
-          <a:xfrm>
-            <a:off x="594360" y="4663440"/>
-            <a:ext cx="137160" cy="137160"/>
-          </a:xfrm>
-          <a:prstGeom prst="ellipse">
-            <a:avLst/>
-          </a:prstGeom>
-          <a:solidFill>
-            <a:srgbClr val="62D99A"/>
-          </a:solidFill>
-          <a:ln>
-            <a:noFill/>
-          </a:ln>
-        </p:spPr>
-        <p:style>
-          <a:lnRef idx="1">
-            <a:schemeClr val="accent1"/>
-          </a:lnRef>
-          <a:fillRef idx="3">
-            <a:schemeClr val="accent1"/>
-          </a:fillRef>
-          <a:effectRef idx="2">
-            <a:schemeClr val="accent1"/>
-          </a:effectRef>
-          <a:fontRef idx="minor">
-            <a:schemeClr val="lt1"/>
-          </a:fontRef>
-        </p:style>
-        <p:txBody>
-          <a:bodyPr rtlCol="0" anchor="ctr"/>
-          <a:lstStyle/>
-          <a:p>
-            <a:pPr algn="ctr"/>
-          </a:p>
-        </p:txBody>
-      </p:sp>
-      <p:sp>
-        <p:nvSpPr>
-          <p:cNvPr id="16" name="TextBox 15"/>
-          <p:cNvSpPr txBox="1"/>
-          <p:nvPr/>
-        </p:nvSpPr>
-        <p:spPr>
-          <a:xfrm>
-            <a:off x="868680" y="4526280"/>
-            <a:ext cx="5029200" cy="594360"/>
-          </a:xfrm>
-          <a:prstGeom prst="rect">
-            <a:avLst/>
-          </a:prstGeom>
-          <a:noFill/>
-        </p:spPr>
-        <p:txBody>
-          <a:bodyPr wrap="square">
-            <a:spAutoFit/>
-          </a:bodyPr>
-          <a:lstStyle/>
-          <a:p>
-            <a:pPr algn="l"/>
-            <a:r>
-              <a:rPr sz="1400" b="1">
-                <a:solidFill>
-                  <a:srgbClr val="F2F4F5"/>
-                </a:solidFill>
-                <a:latin typeface="Inter"/>
-              </a:rPr>
-              <a:t>Надо</a:t>
-            </a:r>
-            <a:r>
-              <a:rPr sz="1100" b="0">
-                <a:solidFill>
-                  <a:srgbClr val="69737D"/>
-                </a:solidFill>
-                <a:latin typeface="Inter"/>
-              </a:rPr>
-              <a:t>
-чистые точки + контуры по степеням + запрос без растров</a:t>
-            </a:r>
-          </a:p>
-        </p:txBody>
-      </p:sp>
-      <p:pic>
-        <p:nvPicPr>
-          <p:cNvPr id="17" name="Picture 16" descr="02-burned-only.png"/>
-          <p:cNvPicPr>
-            <a:picLocks noChangeAspect="1"/>
-          </p:cNvPicPr>
-          <p:nvPr/>
-        </p:nvPicPr>
-        <p:blipFill>
-          <a:blip r:embed="rId2"/>
-          <a:stretch>
-            <a:fillRect/>
-          </a:stretch>
-        </p:blipFill>
-        <p:spPr>
-          <a:xfrm>
-            <a:off x="6675120" y="1188720"/>
-            <a:ext cx="5212080" cy="2931795"/>
-          </a:xfrm>
-          <a:prstGeom prst="rect">
-            <a:avLst/>
-          </a:prstGeom>
-        </p:spPr>
-      </p:pic>
+выборочно, с задержкой в недели, без единой методики</a:t>
+            </a:r>
+          </a:p>
+        </p:txBody>
+      </p:sp>
     </p:spTree>
   </p:cSld>
   <p:clrMapOvr>
@@ -5477,22 +5096,144 @@
       <p:grpSpPr/>
       <p:sp>
         <p:nvSpPr>
-          <p:cNvPr id="2" name="Rounded Rectangle 1"/>
+          <p:cNvPr id="2" name="TextBox 1"/>
+          <p:cNvSpPr txBox="1"/>
+          <p:nvPr/>
+        </p:nvSpPr>
+        <p:spPr>
+          <a:xfrm>
+            <a:off x="640080" y="274320"/>
+            <a:ext cx="4572000" cy="365760"/>
+          </a:xfrm>
+          <a:prstGeom prst="rect">
+            <a:avLst/>
+          </a:prstGeom>
+          <a:noFill/>
+        </p:spPr>
+        <p:txBody>
+          <a:bodyPr wrap="square">
+            <a:spAutoFit/>
+          </a:bodyPr>
+          <a:lstStyle/>
+          <a:p>
+            <a:pPr algn="l"/>
+            <a:r>
+              <a:rPr sz="1200" b="1">
+                <a:solidFill>
+                  <a:srgbClr val="7D8690"/>
+                </a:solidFill>
+                <a:latin typeface="Inter"/>
+              </a:rPr>
+              <a:t>03 / 10   </a:t>
+            </a:r>
+            <a:r>
+              <a:rPr sz="1200" b="1">
+                <a:solidFill>
+                  <a:srgbClr val="7D8690"/>
+                </a:solidFill>
+                <a:latin typeface="Inter"/>
+              </a:rPr>
+              <a:t>ЖИМ НОГАМИ · KOSMOHACK</a:t>
+            </a:r>
+          </a:p>
+        </p:txBody>
+      </p:sp>
+      <p:sp>
+        <p:nvSpPr>
+          <p:cNvPr id="3" name="Oval 2"/>
           <p:cNvSpPr/>
           <p:nvPr/>
         </p:nvSpPr>
         <p:spPr>
           <a:xfrm>
-            <a:off x="5074920" y="228600"/>
-            <a:ext cx="2057400" cy="685800"/>
+            <a:off x="11612880" y="384048"/>
+            <a:ext cx="128016" cy="128016"/>
+          </a:xfrm>
+          <a:prstGeom prst="ellipse">
+            <a:avLst/>
+          </a:prstGeom>
+          <a:solidFill>
+            <a:srgbClr val="62D99A"/>
+          </a:solidFill>
+          <a:ln>
+            <a:noFill/>
+          </a:ln>
+        </p:spPr>
+        <p:style>
+          <a:lnRef idx="1">
+            <a:schemeClr val="accent1"/>
+          </a:lnRef>
+          <a:fillRef idx="3">
+            <a:schemeClr val="accent1"/>
+          </a:fillRef>
+          <a:effectRef idx="2">
+            <a:schemeClr val="accent1"/>
+          </a:effectRef>
+          <a:fontRef idx="minor">
+            <a:schemeClr val="lt1"/>
+          </a:fontRef>
+        </p:style>
+        <p:txBody>
+          <a:bodyPr rtlCol="0" anchor="ctr"/>
+          <a:lstStyle/>
+          <a:p>
+            <a:pPr algn="ctr"/>
+          </a:p>
+        </p:txBody>
+      </p:sp>
+      <p:sp>
+        <p:nvSpPr>
+          <p:cNvPr id="4" name="TextBox 3"/>
+          <p:cNvSpPr txBox="1"/>
+          <p:nvPr/>
+        </p:nvSpPr>
+        <p:spPr>
+          <a:xfrm>
+            <a:off x="640080" y="822960"/>
+            <a:ext cx="10881360" cy="1188720"/>
+          </a:xfrm>
+          <a:prstGeom prst="rect">
+            <a:avLst/>
+          </a:prstGeom>
+          <a:noFill/>
+        </p:spPr>
+        <p:txBody>
+          <a:bodyPr wrap="square">
+            <a:spAutoFit/>
+          </a:bodyPr>
+          <a:lstStyle/>
+          <a:p>
+            <a:pPr algn="l"/>
+            <a:r>
+              <a:rPr sz="4000" b="1">
+                <a:solidFill>
+                  <a:srgbClr val="F2F4F5"/>
+                </a:solidFill>
+                <a:latin typeface="Inter"/>
+              </a:rPr>
+              <a:t>Что требовалось построить</a:t>
+            </a:r>
+          </a:p>
+        </p:txBody>
+      </p:sp>
+      <p:sp>
+        <p:nvSpPr>
+          <p:cNvPr id="5" name="Rounded Rectangle 4"/>
+          <p:cNvSpPr/>
+          <p:nvPr/>
+        </p:nvSpPr>
+        <p:spPr>
+          <a:xfrm>
+            <a:off x="594360" y="2468880"/>
+            <a:ext cx="3474720" cy="2011680"/>
           </a:xfrm>
           <a:prstGeom prst="roundRect">
             <a:avLst>
-              <a:gd name="adj" fmla="val 9000"/>
+              <a:gd name="adj" fmla="val 7000"/>
             </a:avLst>
           </a:prstGeom>
           <a:solidFill>
-            <a:srgbClr val="0A0E12"/>
+            <a:srgbClr val="0D1217"/>
           </a:solidFill>
           <a:ln w="12700">
             <a:solidFill>
@@ -5524,57 +5265,14 @@
       </p:sp>
       <p:sp>
         <p:nvSpPr>
-          <p:cNvPr id="3" name="Oval 2"/>
-          <p:cNvSpPr/>
-          <p:nvPr/>
-        </p:nvSpPr>
-        <p:spPr>
-          <a:xfrm>
-            <a:off x="5257800" y="457200"/>
-            <a:ext cx="128016" cy="128016"/>
-          </a:xfrm>
-          <a:prstGeom prst="ellipse">
-            <a:avLst/>
-          </a:prstGeom>
-          <a:solidFill>
-            <a:srgbClr val="62D99A"/>
-          </a:solidFill>
-          <a:ln>
-            <a:noFill/>
-          </a:ln>
-        </p:spPr>
-        <p:style>
-          <a:lnRef idx="1">
-            <a:schemeClr val="accent1"/>
-          </a:lnRef>
-          <a:fillRef idx="3">
-            <a:schemeClr val="accent1"/>
-          </a:fillRef>
-          <a:effectRef idx="2">
-            <a:schemeClr val="accent1"/>
-          </a:effectRef>
-          <a:fontRef idx="minor">
-            <a:schemeClr val="lt1"/>
-          </a:fontRef>
-        </p:style>
-        <p:txBody>
-          <a:bodyPr rtlCol="0" anchor="ctr"/>
-          <a:lstStyle/>
-          <a:p>
-            <a:pPr algn="ctr"/>
-          </a:p>
-        </p:txBody>
-      </p:sp>
-      <p:sp>
-        <p:nvSpPr>
-          <p:cNvPr id="4" name="TextBox 3"/>
+          <p:cNvPr id="6" name="TextBox 5"/>
           <p:cNvSpPr txBox="1"/>
           <p:nvPr/>
         </p:nvSpPr>
         <p:spPr>
           <a:xfrm>
-            <a:off x="5486400" y="256032"/>
-            <a:ext cx="1463040" cy="320040"/>
+            <a:off x="594360" y="2788920"/>
+            <a:ext cx="3474720" cy="822960"/>
           </a:xfrm>
           <a:prstGeom prst="rect">
             <a:avLst/>
@@ -5589,27 +5287,27 @@
           <a:p>
             <a:pPr algn="ctr"/>
             <a:r>
-              <a:rPr sz="1400" b="1">
-                <a:solidFill>
-                  <a:srgbClr val="F2F4F5"/>
+              <a:rPr sz="4400" b="1">
+                <a:solidFill>
+                  <a:srgbClr val="FF6B35"/>
                 </a:solidFill>
                 <a:latin typeface="Inter"/>
               </a:rPr>
-              <a:t>ЖИМ НОГАМИ</a:t>
-            </a:r>
-          </a:p>
-        </p:txBody>
-      </p:sp>
-      <p:sp>
-        <p:nvSpPr>
-          <p:cNvPr id="5" name="TextBox 4"/>
+              <a:t>AF</a:t>
+            </a:r>
+          </a:p>
+        </p:txBody>
+      </p:sp>
+      <p:sp>
+        <p:nvSpPr>
+          <p:cNvPr id="7" name="TextBox 6"/>
           <p:cNvSpPr txBox="1"/>
           <p:nvPr/>
         </p:nvSpPr>
         <p:spPr>
           <a:xfrm>
-            <a:off x="5486400" y="530352"/>
-            <a:ext cx="1463040" cy="274320"/>
+            <a:off x="594360" y="3703320"/>
+            <a:ext cx="3474720" cy="548640"/>
           </a:xfrm>
           <a:prstGeom prst="rect">
             <a:avLst/>
@@ -5624,35 +5322,36 @@
           <a:p>
             <a:pPr algn="ctr"/>
             <a:r>
-              <a:rPr sz="800" b="0">
-                <a:solidFill>
-                  <a:srgbClr val="69737D"/>
+              <a:rPr sz="1500" b="0">
+                <a:solidFill>
+                  <a:srgbClr val="B8C0C8"/>
                 </a:solidFill>
                 <a:latin typeface="Inter"/>
               </a:rPr>
-              <a:t>FIRE MONITOR · KOSMOHACK 2026</a:t>
-            </a:r>
-          </a:p>
-        </p:txBody>
-      </p:sp>
-      <p:sp>
-        <p:nvSpPr>
-          <p:cNvPr id="6" name="Rounded Rectangle 5"/>
+              <a:t>пиксели горения
+по VIIRS, 375 м</a:t>
+            </a:r>
+          </a:p>
+        </p:txBody>
+      </p:sp>
+      <p:sp>
+        <p:nvSpPr>
+          <p:cNvPr id="8" name="Rounded Rectangle 7"/>
           <p:cNvSpPr/>
           <p:nvPr/>
         </p:nvSpPr>
         <p:spPr>
           <a:xfrm>
-            <a:off x="320040" y="1188720"/>
-            <a:ext cx="5852160" cy="4480560"/>
+            <a:off x="4251960" y="2468880"/>
+            <a:ext cx="3474720" cy="2011680"/>
           </a:xfrm>
           <a:prstGeom prst="roundRect">
             <a:avLst>
-              <a:gd name="adj" fmla="val 9000"/>
+              <a:gd name="adj" fmla="val 7000"/>
             </a:avLst>
           </a:prstGeom>
           <a:solidFill>
-            <a:srgbClr val="0A0E12"/>
+            <a:srgbClr val="0D1217"/>
           </a:solidFill>
           <a:ln w="12700">
             <a:solidFill>
@@ -5684,14 +5383,14 @@
       </p:sp>
       <p:sp>
         <p:nvSpPr>
-          <p:cNvPr id="7" name="TextBox 6"/>
+          <p:cNvPr id="9" name="TextBox 8"/>
           <p:cNvSpPr txBox="1"/>
           <p:nvPr/>
         </p:nvSpPr>
         <p:spPr>
           <a:xfrm>
-            <a:off x="594360" y="1325880"/>
-            <a:ext cx="914400" cy="274320"/>
+            <a:off x="4251960" y="2788920"/>
+            <a:ext cx="3474720" cy="822960"/>
           </a:xfrm>
           <a:prstGeom prst="rect">
             <a:avLst/>
@@ -5704,29 +5403,29 @@
           </a:bodyPr>
           <a:lstStyle/>
           <a:p>
-            <a:pPr algn="l"/>
-            <a:r>
-              <a:rPr sz="1100" b="1">
-                <a:solidFill>
-                  <a:srgbClr val="69737D"/>
+            <a:pPr algn="ctr"/>
+            <a:r>
+              <a:rPr sz="4400" b="1">
+                <a:solidFill>
+                  <a:srgbClr val="E6C65C"/>
                 </a:solidFill>
                 <a:latin typeface="Inter"/>
               </a:rPr>
-              <a:t>02</a:t>
-            </a:r>
-          </a:p>
-        </p:txBody>
-      </p:sp>
-      <p:sp>
-        <p:nvSpPr>
-          <p:cNvPr id="8" name="TextBox 7"/>
+              <a:t>BS</a:t>
+            </a:r>
+          </a:p>
+        </p:txBody>
+      </p:sp>
+      <p:sp>
+        <p:nvSpPr>
+          <p:cNvPr id="10" name="TextBox 9"/>
           <p:cNvSpPr txBox="1"/>
           <p:nvPr/>
         </p:nvSpPr>
         <p:spPr>
           <a:xfrm>
-            <a:off x="594360" y="1572768"/>
-            <a:ext cx="5303520" cy="457200"/>
+            <a:off x="4251960" y="3703320"/>
+            <a:ext cx="3474720" cy="548640"/>
           </a:xfrm>
           <a:prstGeom prst="rect">
             <a:avLst/>
@@ -5739,38 +5438,43 @@
           </a:bodyPr>
           <a:lstStyle/>
           <a:p>
-            <a:pPr algn="l"/>
-            <a:r>
-              <a:rPr sz="2100" b="1">
-                <a:solidFill>
-                  <a:srgbClr val="F2F4F5"/>
+            <a:pPr algn="ctr"/>
+            <a:r>
+              <a:rPr sz="1500" b="0">
+                <a:solidFill>
+                  <a:srgbClr val="B8C0C8"/>
                 </a:solidFill>
                 <a:latin typeface="Inter"/>
               </a:rPr>
-              <a:t>Конвейер</a:t>
-            </a:r>
-          </a:p>
-        </p:txBody>
-      </p:sp>
-      <p:sp>
-        <p:nvSpPr>
-          <p:cNvPr id="9" name="Oval 8"/>
+              <a:t>контуры + 3 степени
+по Sentinel-2, 20 м</a:t>
+            </a:r>
+          </a:p>
+        </p:txBody>
+      </p:sp>
+      <p:sp>
+        <p:nvSpPr>
+          <p:cNvPr id="11" name="Rounded Rectangle 10"/>
           <p:cNvSpPr/>
           <p:nvPr/>
         </p:nvSpPr>
         <p:spPr>
           <a:xfrm>
-            <a:off x="594360" y="2331720"/>
-            <a:ext cx="137160" cy="137160"/>
-          </a:xfrm>
-          <a:prstGeom prst="ellipse">
-            <a:avLst/>
+            <a:off x="7909560" y="2468880"/>
+            <a:ext cx="3474720" cy="2011680"/>
+          </a:xfrm>
+          <a:prstGeom prst="roundRect">
+            <a:avLst>
+              <a:gd name="adj" fmla="val 7000"/>
+            </a:avLst>
           </a:prstGeom>
           <a:solidFill>
-            <a:srgbClr val="EF5B5B"/>
+            <a:srgbClr val="0D1217"/>
           </a:solidFill>
-          <a:ln>
-            <a:noFill/>
+          <a:ln w="12700">
+            <a:solidFill>
+              <a:srgbClr val="2A333D"/>
+            </a:solidFill>
           </a:ln>
         </p:spPr>
         <p:style>
@@ -5797,14 +5501,14 @@
       </p:sp>
       <p:sp>
         <p:nvSpPr>
-          <p:cNvPr id="10" name="TextBox 9"/>
+          <p:cNvPr id="12" name="TextBox 11"/>
           <p:cNvSpPr txBox="1"/>
           <p:nvPr/>
         </p:nvSpPr>
         <p:spPr>
           <a:xfrm>
-            <a:off x="868680" y="2194560"/>
-            <a:ext cx="5029200" cy="594360"/>
+            <a:off x="7909560" y="2788920"/>
+            <a:ext cx="3474720" cy="822960"/>
           </a:xfrm>
           <a:prstGeom prst="rect">
             <a:avLst/>
@@ -5817,82 +5521,29 @@
           </a:bodyPr>
           <a:lstStyle/>
           <a:p>
-            <a:pPr algn="l"/>
-            <a:r>
-              <a:rPr sz="1400" b="1">
-                <a:solidFill>
-                  <a:srgbClr val="F2F4F5"/>
+            <a:pPr algn="ctr"/>
+            <a:r>
+              <a:rPr sz="4400" b="1">
+                <a:solidFill>
+                  <a:srgbClr val="62D99A"/>
                 </a:solidFill>
                 <a:latin typeface="Inter"/>
               </a:rPr>
-              <a:t>VIIRS AF Unet</a:t>
-            </a:r>
-            <a:r>
-              <a:rPr sz="1100" b="0">
-                <a:solidFill>
-                  <a:srgbClr val="69737D"/>
-                </a:solidFill>
-                <a:latin typeface="Inter"/>
-              </a:rPr>
-              <a:t>
-I1–I5 + aux · 12 каналов · 295 сек</a:t>
-            </a:r>
-          </a:p>
-        </p:txBody>
-      </p:sp>
-      <p:sp>
-        <p:nvSpPr>
-          <p:cNvPr id="11" name="Oval 10"/>
-          <p:cNvSpPr/>
-          <p:nvPr/>
-        </p:nvSpPr>
-        <p:spPr>
-          <a:xfrm>
-            <a:off x="594360" y="3108960"/>
-            <a:ext cx="137160" cy="137160"/>
-          </a:xfrm>
-          <a:prstGeom prst="ellipse">
-            <a:avLst/>
-          </a:prstGeom>
-          <a:solidFill>
-            <a:srgbClr val="E6C65C"/>
-          </a:solidFill>
-          <a:ln>
-            <a:noFill/>
-          </a:ln>
-        </p:spPr>
-        <p:style>
-          <a:lnRef idx="1">
-            <a:schemeClr val="accent1"/>
-          </a:lnRef>
-          <a:fillRef idx="3">
-            <a:schemeClr val="accent1"/>
-          </a:fillRef>
-          <a:effectRef idx="2">
-            <a:schemeClr val="accent1"/>
-          </a:effectRef>
-          <a:fontRef idx="minor">
-            <a:schemeClr val="lt1"/>
-          </a:fontRef>
-        </p:style>
-        <p:txBody>
-          <a:bodyPr rtlCol="0" anchor="ctr"/>
-          <a:lstStyle/>
-          <a:p>
-            <a:pPr algn="ctr"/>
-          </a:p>
-        </p:txBody>
-      </p:sp>
-      <p:sp>
-        <p:nvSpPr>
-          <p:cNvPr id="12" name="TextBox 11"/>
+              <a:t>API</a:t>
+            </a:r>
+          </a:p>
+        </p:txBody>
+      </p:sp>
+      <p:sp>
+        <p:nvSpPr>
+          <p:cNvPr id="13" name="TextBox 12"/>
           <p:cNvSpPr txBox="1"/>
           <p:nvPr/>
         </p:nvSpPr>
         <p:spPr>
           <a:xfrm>
-            <a:off x="868680" y="2971800"/>
-            <a:ext cx="5029200" cy="594360"/>
+            <a:off x="7909560" y="3703320"/>
+            <a:ext cx="3474720" cy="548640"/>
           </a:xfrm>
           <a:prstGeom prst="rect">
             <a:avLst/>
@@ -5905,69 +5556,17 @@
           </a:bodyPr>
           <a:lstStyle/>
           <a:p>
-            <a:pPr algn="l"/>
-            <a:r>
-              <a:rPr sz="1400" b="1">
-                <a:solidFill>
-                  <a:srgbClr val="F2F4F5"/>
+            <a:pPr algn="ctr"/>
+            <a:r>
+              <a:rPr sz="1500" b="0">
+                <a:solidFill>
+                  <a:srgbClr val="B8C0C8"/>
                 </a:solidFill>
                 <a:latin typeface="Inter"/>
               </a:rPr>
-              <a:t>S2 BS Unet</a:t>
-            </a:r>
-            <a:r>
-              <a:rPr sz="1100" b="0">
-                <a:solidFill>
-                  <a:srgbClr val="69737D"/>
-                </a:solidFill>
-                <a:latin typeface="Inter"/>
-              </a:rPr>
-              <a:t>
-27 каналов · argmax + cloud→0 + burn-gate</a:t>
-            </a:r>
-          </a:p>
-        </p:txBody>
-      </p:sp>
-      <p:sp>
-        <p:nvSpPr>
-          <p:cNvPr id="13" name="Oval 12"/>
-          <p:cNvSpPr/>
-          <p:nvPr/>
-        </p:nvSpPr>
-        <p:spPr>
-          <a:xfrm>
-            <a:off x="594360" y="3886200"/>
-            <a:ext cx="137160" cy="137160"/>
-          </a:xfrm>
-          <a:prstGeom prst="ellipse">
-            <a:avLst/>
-          </a:prstGeom>
-          <a:solidFill>
-            <a:srgbClr val="FF6B35"/>
-          </a:solidFill>
-          <a:ln>
-            <a:noFill/>
-          </a:ln>
-        </p:spPr>
-        <p:style>
-          <a:lnRef idx="1">
-            <a:schemeClr val="accent1"/>
-          </a:lnRef>
-          <a:fillRef idx="3">
-            <a:schemeClr val="accent1"/>
-          </a:fillRef>
-          <a:effectRef idx="2">
-            <a:schemeClr val="accent1"/>
-          </a:effectRef>
-          <a:fontRef idx="minor">
-            <a:schemeClr val="lt1"/>
-          </a:fontRef>
-        </p:style>
-        <p:txBody>
-          <a:bodyPr rtlCol="0" anchor="ctr"/>
-          <a:lstStyle/>
-          <a:p>
-            <a:pPr algn="ctr"/>
+              <a:t>карта + справка
+по запросу</a:t>
+            </a:r>
           </a:p>
         </p:txBody>
       </p:sp>
@@ -5979,8 +5578,8 @@
         </p:nvSpPr>
         <p:spPr>
           <a:xfrm>
-            <a:off x="868680" y="3749040"/>
-            <a:ext cx="5029200" cy="594360"/>
+            <a:off x="640080" y="5120640"/>
+            <a:ext cx="10881360" cy="640080"/>
           </a:xfrm>
           <a:prstGeom prst="rect">
             <a:avLst/>
@@ -5993,141 +5592,19 @@
           </a:bodyPr>
           <a:lstStyle/>
           <a:p>
-            <a:pPr algn="l"/>
-            <a:r>
-              <a:rPr sz="1400" b="1">
-                <a:solidFill>
-                  <a:srgbClr val="F2F4F5"/>
+            <a:pPr algn="ctr"/>
+            <a:r>
+              <a:rPr sz="1800" b="0">
+                <a:solidFill>
+                  <a:srgbClr val="7D8690"/>
                 </a:solidFill>
                 <a:latin typeface="Inter"/>
               </a:rPr>
-              <a:t>inference.py</a:t>
-            </a:r>
-            <a:r>
-              <a:rPr sz="1100" b="0">
-                <a:solidFill>
-                  <a:srgbClr val="69737D"/>
-                </a:solidFill>
-                <a:latin typeface="Inter"/>
-              </a:rPr>
-              <a:t>
-детерминирован · ~28 сек · дифф 0</a:t>
-            </a:r>
-          </a:p>
-        </p:txBody>
-      </p:sp>
-      <p:sp>
-        <p:nvSpPr>
-          <p:cNvPr id="15" name="Oval 14"/>
-          <p:cNvSpPr/>
-          <p:nvPr/>
-        </p:nvSpPr>
-        <p:spPr>
-          <a:xfrm>
-            <a:off x="594360" y="4663440"/>
-            <a:ext cx="137160" cy="137160"/>
-          </a:xfrm>
-          <a:prstGeom prst="ellipse">
-            <a:avLst/>
-          </a:prstGeom>
-          <a:solidFill>
-            <a:srgbClr val="62D99A"/>
-          </a:solidFill>
-          <a:ln>
-            <a:noFill/>
-          </a:ln>
-        </p:spPr>
-        <p:style>
-          <a:lnRef idx="1">
-            <a:schemeClr val="accent1"/>
-          </a:lnRef>
-          <a:fillRef idx="3">
-            <a:schemeClr val="accent1"/>
-          </a:fillRef>
-          <a:effectRef idx="2">
-            <a:schemeClr val="accent1"/>
-          </a:effectRef>
-          <a:fontRef idx="minor">
-            <a:schemeClr val="lt1"/>
-          </a:fontRef>
-        </p:style>
-        <p:txBody>
-          <a:bodyPr rtlCol="0" anchor="ctr"/>
-          <a:lstStyle/>
-          <a:p>
-            <a:pPr algn="ctr"/>
-          </a:p>
-        </p:txBody>
-      </p:sp>
-      <p:sp>
-        <p:nvSpPr>
-          <p:cNvPr id="16" name="TextBox 15"/>
-          <p:cNvSpPr txBox="1"/>
-          <p:nvPr/>
-        </p:nvSpPr>
-        <p:spPr>
-          <a:xfrm>
-            <a:off x="868680" y="4526280"/>
-            <a:ext cx="5029200" cy="594360"/>
-          </a:xfrm>
-          <a:prstGeom prst="rect">
-            <a:avLst/>
-          </a:prstGeom>
-          <a:noFill/>
-        </p:spPr>
-        <p:txBody>
-          <a:bodyPr wrap="square">
-            <a:spAutoFit/>
-          </a:bodyPr>
-          <a:lstStyle/>
-          <a:p>
-            <a:pPr algn="l"/>
-            <a:r>
-              <a:rPr sz="1400" b="1">
-                <a:solidFill>
-                  <a:srgbClr val="F2F4F5"/>
-                </a:solidFill>
-                <a:latin typeface="Inter"/>
-              </a:rPr>
-              <a:t>submission.csv</a:t>
-            </a:r>
-            <a:r>
-              <a:rPr sz="1100" b="0">
-                <a:solidFill>
-                  <a:srgbClr val="69737D"/>
-                </a:solidFill>
-                <a:latin typeface="Inter"/>
-              </a:rPr>
-              <a:t>
-447 строк · RLE строгий · md5 97b86c67</a:t>
-            </a:r>
-          </a:p>
-        </p:txBody>
-      </p:sp>
-      <p:pic>
-        <p:nvPicPr>
-          <p:cNvPr id="17" name="Picture 16" descr="af_viz_sample.png"/>
-          <p:cNvPicPr>
-            <a:picLocks noChangeAspect="1"/>
-          </p:cNvPicPr>
-          <p:nvPr/>
-        </p:nvPicPr>
-        <p:blipFill>
-          <a:blip r:embed="rId2"/>
-          <a:stretch>
-            <a:fillRect/>
-          </a:stretch>
-        </p:blipFill>
-        <p:spPr>
-          <a:xfrm>
-            <a:off x="6675120" y="1188720"/>
-            <a:ext cx="5212080" cy="1737360"/>
-          </a:xfrm>
-          <a:prstGeom prst="rect">
-            <a:avLst/>
-          </a:prstGeom>
-        </p:spPr>
-      </p:pic>
+              <a:t>Плюс единый submission.csv на 447 строк и воспроизводимый запуск одной командой</a:t>
+            </a:r>
+          </a:p>
+        </p:txBody>
+      </p:sp>
     </p:spTree>
   </p:cSld>
   <p:clrMapOvr>
@@ -6156,22 +5633,144 @@
       <p:grpSpPr/>
       <p:sp>
         <p:nvSpPr>
-          <p:cNvPr id="2" name="Rounded Rectangle 1"/>
+          <p:cNvPr id="2" name="TextBox 1"/>
+          <p:cNvSpPr txBox="1"/>
+          <p:nvPr/>
+        </p:nvSpPr>
+        <p:spPr>
+          <a:xfrm>
+            <a:off x="640080" y="274320"/>
+            <a:ext cx="4572000" cy="365760"/>
+          </a:xfrm>
+          <a:prstGeom prst="rect">
+            <a:avLst/>
+          </a:prstGeom>
+          <a:noFill/>
+        </p:spPr>
+        <p:txBody>
+          <a:bodyPr wrap="square">
+            <a:spAutoFit/>
+          </a:bodyPr>
+          <a:lstStyle/>
+          <a:p>
+            <a:pPr algn="l"/>
+            <a:r>
+              <a:rPr sz="1200" b="1">
+                <a:solidFill>
+                  <a:srgbClr val="7D8690"/>
+                </a:solidFill>
+                <a:latin typeface="Inter"/>
+              </a:rPr>
+              <a:t>04 / 10   </a:t>
+            </a:r>
+            <a:r>
+              <a:rPr sz="1200" b="1">
+                <a:solidFill>
+                  <a:srgbClr val="7D8690"/>
+                </a:solidFill>
+                <a:latin typeface="Inter"/>
+              </a:rPr>
+              <a:t>ЖИМ НОГАМИ · KOSMOHACK</a:t>
+            </a:r>
+          </a:p>
+        </p:txBody>
+      </p:sp>
+      <p:sp>
+        <p:nvSpPr>
+          <p:cNvPr id="3" name="Oval 2"/>
           <p:cNvSpPr/>
           <p:nvPr/>
         </p:nvSpPr>
         <p:spPr>
           <a:xfrm>
-            <a:off x="5074920" y="228600"/>
-            <a:ext cx="2057400" cy="685800"/>
+            <a:off x="11612880" y="384048"/>
+            <a:ext cx="128016" cy="128016"/>
+          </a:xfrm>
+          <a:prstGeom prst="ellipse">
+            <a:avLst/>
+          </a:prstGeom>
+          <a:solidFill>
+            <a:srgbClr val="62D99A"/>
+          </a:solidFill>
+          <a:ln>
+            <a:noFill/>
+          </a:ln>
+        </p:spPr>
+        <p:style>
+          <a:lnRef idx="1">
+            <a:schemeClr val="accent1"/>
+          </a:lnRef>
+          <a:fillRef idx="3">
+            <a:schemeClr val="accent1"/>
+          </a:fillRef>
+          <a:effectRef idx="2">
+            <a:schemeClr val="accent1"/>
+          </a:effectRef>
+          <a:fontRef idx="minor">
+            <a:schemeClr val="lt1"/>
+          </a:fontRef>
+        </p:style>
+        <p:txBody>
+          <a:bodyPr rtlCol="0" anchor="ctr"/>
+          <a:lstStyle/>
+          <a:p>
+            <a:pPr algn="ctr"/>
+          </a:p>
+        </p:txBody>
+      </p:sp>
+      <p:sp>
+        <p:nvSpPr>
+          <p:cNvPr id="4" name="TextBox 3"/>
+          <p:cNvSpPr txBox="1"/>
+          <p:nvPr/>
+        </p:nvSpPr>
+        <p:spPr>
+          <a:xfrm>
+            <a:off x="640080" y="822960"/>
+            <a:ext cx="10881360" cy="1188720"/>
+          </a:xfrm>
+          <a:prstGeom prst="rect">
+            <a:avLst/>
+          </a:prstGeom>
+          <a:noFill/>
+        </p:spPr>
+        <p:txBody>
+          <a:bodyPr wrap="square">
+            <a:spAutoFit/>
+          </a:bodyPr>
+          <a:lstStyle/>
+          <a:p>
+            <a:pPr algn="l"/>
+            <a:r>
+              <a:rPr sz="4000" b="1">
+                <a:solidFill>
+                  <a:srgbClr val="F2F4F5"/>
+                </a:solidFill>
+                <a:latin typeface="Inter"/>
+              </a:rPr>
+              <a:t>Подход: две сегментации + строгий протокол</a:t>
+            </a:r>
+          </a:p>
+        </p:txBody>
+      </p:sp>
+      <p:sp>
+        <p:nvSpPr>
+          <p:cNvPr id="5" name="Rounded Rectangle 4"/>
+          <p:cNvSpPr/>
+          <p:nvPr/>
+        </p:nvSpPr>
+        <p:spPr>
+          <a:xfrm>
+            <a:off x="594360" y="2468880"/>
+            <a:ext cx="2011680" cy="1554480"/>
           </a:xfrm>
           <a:prstGeom prst="roundRect">
             <a:avLst>
-              <a:gd name="adj" fmla="val 9000"/>
+              <a:gd name="adj" fmla="val 7000"/>
             </a:avLst>
           </a:prstGeom>
           <a:solidFill>
-            <a:srgbClr val="0A0E12"/>
+            <a:srgbClr val="0D1217"/>
           </a:solidFill>
           <a:ln w="12700">
             <a:solidFill>
@@ -6203,57 +5802,14 @@
       </p:sp>
       <p:sp>
         <p:nvSpPr>
-          <p:cNvPr id="3" name="Oval 2"/>
-          <p:cNvSpPr/>
-          <p:nvPr/>
-        </p:nvSpPr>
-        <p:spPr>
-          <a:xfrm>
-            <a:off x="5257800" y="457200"/>
-            <a:ext cx="128016" cy="128016"/>
-          </a:xfrm>
-          <a:prstGeom prst="ellipse">
-            <a:avLst/>
-          </a:prstGeom>
-          <a:solidFill>
-            <a:srgbClr val="62D99A"/>
-          </a:solidFill>
-          <a:ln>
-            <a:noFill/>
-          </a:ln>
-        </p:spPr>
-        <p:style>
-          <a:lnRef idx="1">
-            <a:schemeClr val="accent1"/>
-          </a:lnRef>
-          <a:fillRef idx="3">
-            <a:schemeClr val="accent1"/>
-          </a:fillRef>
-          <a:effectRef idx="2">
-            <a:schemeClr val="accent1"/>
-          </a:effectRef>
-          <a:fontRef idx="minor">
-            <a:schemeClr val="lt1"/>
-          </a:fontRef>
-        </p:style>
-        <p:txBody>
-          <a:bodyPr rtlCol="0" anchor="ctr"/>
-          <a:lstStyle/>
-          <a:p>
-            <a:pPr algn="ctr"/>
-          </a:p>
-        </p:txBody>
-      </p:sp>
-      <p:sp>
-        <p:nvSpPr>
-          <p:cNvPr id="4" name="TextBox 3"/>
+          <p:cNvPr id="6" name="TextBox 5"/>
           <p:cNvSpPr txBox="1"/>
           <p:nvPr/>
         </p:nvSpPr>
         <p:spPr>
           <a:xfrm>
-            <a:off x="5486400" y="256032"/>
-            <a:ext cx="1463040" cy="320040"/>
+            <a:off x="594360" y="2743200"/>
+            <a:ext cx="2011680" cy="1097280"/>
           </a:xfrm>
           <a:prstGeom prst="rect">
             <a:avLst/>
@@ -6268,27 +5824,28 @@
           <a:p>
             <a:pPr algn="ctr"/>
             <a:r>
-              <a:rPr sz="1400" b="1">
+              <a:rPr sz="1900" b="1">
                 <a:solidFill>
                   <a:srgbClr val="F2F4F5"/>
                 </a:solidFill>
                 <a:latin typeface="Inter"/>
               </a:rPr>
-              <a:t>ЖИМ НОГАМИ</a:t>
-            </a:r>
-          </a:p>
-        </p:txBody>
-      </p:sp>
-      <p:sp>
-        <p:nvSpPr>
-          <p:cNvPr id="5" name="TextBox 4"/>
+              <a:t>VIIRS
+AF Unet</a:t>
+            </a:r>
+          </a:p>
+        </p:txBody>
+      </p:sp>
+      <p:sp>
+        <p:nvSpPr>
+          <p:cNvPr id="7" name="TextBox 6"/>
           <p:cNvSpPr txBox="1"/>
           <p:nvPr/>
         </p:nvSpPr>
         <p:spPr>
           <a:xfrm>
-            <a:off x="5486400" y="530352"/>
-            <a:ext cx="1463040" cy="274320"/>
+            <a:off x="2606040" y="2971800"/>
+            <a:ext cx="365760" cy="457200"/>
           </a:xfrm>
           <a:prstGeom prst="rect">
             <a:avLst/>
@@ -6303,35 +5860,35 @@
           <a:p>
             <a:pPr algn="ctr"/>
             <a:r>
-              <a:rPr sz="800" b="0">
-                <a:solidFill>
-                  <a:srgbClr val="69737D"/>
+              <a:rPr sz="2600" b="0">
+                <a:solidFill>
+                  <a:srgbClr val="FF6B35"/>
                 </a:solidFill>
                 <a:latin typeface="Inter"/>
               </a:rPr>
-              <a:t>FIRE MONITOR · KOSMOHACK 2026</a:t>
-            </a:r>
-          </a:p>
-        </p:txBody>
-      </p:sp>
-      <p:sp>
-        <p:nvSpPr>
-          <p:cNvPr id="6" name="Rounded Rectangle 5"/>
+              <a:t>→</a:t>
+            </a:r>
+          </a:p>
+        </p:txBody>
+      </p:sp>
+      <p:sp>
+        <p:nvSpPr>
+          <p:cNvPr id="8" name="Rounded Rectangle 7"/>
           <p:cNvSpPr/>
           <p:nvPr/>
         </p:nvSpPr>
         <p:spPr>
           <a:xfrm>
-            <a:off x="320040" y="1188720"/>
-            <a:ext cx="5852160" cy="4480560"/>
+            <a:off x="2926079" y="2468880"/>
+            <a:ext cx="2011680" cy="1554480"/>
           </a:xfrm>
           <a:prstGeom prst="roundRect">
             <a:avLst>
-              <a:gd name="adj" fmla="val 9000"/>
+              <a:gd name="adj" fmla="val 7000"/>
             </a:avLst>
           </a:prstGeom>
           <a:solidFill>
-            <a:srgbClr val="0A0E12"/>
+            <a:srgbClr val="0D1217"/>
           </a:solidFill>
           <a:ln w="12700">
             <a:solidFill>
@@ -6363,14 +5920,14 @@
       </p:sp>
       <p:sp>
         <p:nvSpPr>
-          <p:cNvPr id="7" name="TextBox 6"/>
+          <p:cNvPr id="9" name="TextBox 8"/>
           <p:cNvSpPr txBox="1"/>
           <p:nvPr/>
         </p:nvSpPr>
         <p:spPr>
           <a:xfrm>
-            <a:off x="594360" y="1325880"/>
-            <a:ext cx="914400" cy="274320"/>
+            <a:off x="2926079" y="2743200"/>
+            <a:ext cx="2011680" cy="1097280"/>
           </a:xfrm>
           <a:prstGeom prst="rect">
             <a:avLst/>
@@ -6383,29 +5940,30 @@
           </a:bodyPr>
           <a:lstStyle/>
           <a:p>
-            <a:pPr algn="l"/>
-            <a:r>
-              <a:rPr sz="1100" b="1">
-                <a:solidFill>
-                  <a:srgbClr val="69737D"/>
+            <a:pPr algn="ctr"/>
+            <a:r>
+              <a:rPr sz="1900" b="1">
+                <a:solidFill>
+                  <a:srgbClr val="F2F4F5"/>
                 </a:solidFill>
                 <a:latin typeface="Inter"/>
               </a:rPr>
-              <a:t>03</a:t>
-            </a:r>
-          </a:p>
-        </p:txBody>
-      </p:sp>
-      <p:sp>
-        <p:nvSpPr>
-          <p:cNvPr id="8" name="TextBox 7"/>
+              <a:t>Sentinel
+BS Unet</a:t>
+            </a:r>
+          </a:p>
+        </p:txBody>
+      </p:sp>
+      <p:sp>
+        <p:nvSpPr>
+          <p:cNvPr id="10" name="TextBox 9"/>
           <p:cNvSpPr txBox="1"/>
           <p:nvPr/>
         </p:nvSpPr>
         <p:spPr>
           <a:xfrm>
-            <a:off x="594360" y="1572768"/>
-            <a:ext cx="5303520" cy="457200"/>
+            <a:off x="4937760" y="2971800"/>
+            <a:ext cx="365760" cy="457200"/>
           </a:xfrm>
           <a:prstGeom prst="rect">
             <a:avLst/>
@@ -6418,38 +5976,42 @@
           </a:bodyPr>
           <a:lstStyle/>
           <a:p>
-            <a:pPr algn="l"/>
-            <a:r>
-              <a:rPr sz="2100" b="1">
-                <a:solidFill>
-                  <a:srgbClr val="F2F4F5"/>
+            <a:pPr algn="ctr"/>
+            <a:r>
+              <a:rPr sz="2600" b="0">
+                <a:solidFill>
+                  <a:srgbClr val="FF6B35"/>
                 </a:solidFill>
                 <a:latin typeface="Inter"/>
               </a:rPr>
-              <a:t>Модуль AF</a:t>
-            </a:r>
-          </a:p>
-        </p:txBody>
-      </p:sp>
-      <p:sp>
-        <p:nvSpPr>
-          <p:cNvPr id="9" name="Oval 8"/>
+              <a:t>→</a:t>
+            </a:r>
+          </a:p>
+        </p:txBody>
+      </p:sp>
+      <p:sp>
+        <p:nvSpPr>
+          <p:cNvPr id="11" name="Rounded Rectangle 10"/>
           <p:cNvSpPr/>
           <p:nvPr/>
         </p:nvSpPr>
         <p:spPr>
           <a:xfrm>
-            <a:off x="594360" y="2331720"/>
-            <a:ext cx="137160" cy="137160"/>
-          </a:xfrm>
-          <a:prstGeom prst="ellipse">
-            <a:avLst/>
+            <a:off x="5257800" y="2468880"/>
+            <a:ext cx="2011680" cy="1554480"/>
+          </a:xfrm>
+          <a:prstGeom prst="roundRect">
+            <a:avLst>
+              <a:gd name="adj" fmla="val 7000"/>
+            </a:avLst>
           </a:prstGeom>
           <a:solidFill>
-            <a:srgbClr val="62D99A"/>
+            <a:srgbClr val="0D1217"/>
           </a:solidFill>
-          <a:ln>
-            <a:noFill/>
+          <a:ln w="12700">
+            <a:solidFill>
+              <a:srgbClr val="2A333D"/>
+            </a:solidFill>
           </a:ln>
         </p:spPr>
         <p:style>
@@ -6476,14 +6038,14 @@
       </p:sp>
       <p:sp>
         <p:nvSpPr>
-          <p:cNvPr id="10" name="TextBox 9"/>
+          <p:cNvPr id="12" name="TextBox 11"/>
           <p:cNvSpPr txBox="1"/>
           <p:nvPr/>
         </p:nvSpPr>
         <p:spPr>
           <a:xfrm>
-            <a:off x="868680" y="2194560"/>
-            <a:ext cx="5029200" cy="594360"/>
+            <a:off x="5257800" y="2743200"/>
+            <a:ext cx="2011680" cy="1097280"/>
           </a:xfrm>
           <a:prstGeom prst="rect">
             <a:avLst/>
@@ -6496,48 +6058,78 @@
           </a:bodyPr>
           <a:lstStyle/>
           <a:p>
-            <a:pPr algn="l"/>
-            <a:r>
-              <a:rPr sz="1400" b="1">
+            <a:pPr algn="ctr"/>
+            <a:r>
+              <a:rPr sz="1900" b="1">
                 <a:solidFill>
                   <a:srgbClr val="F2F4F5"/>
                 </a:solidFill>
                 <a:latin typeface="Inter"/>
               </a:rPr>
-              <a:t>F1 0.8434</a:t>
-            </a:r>
-            <a:r>
-              <a:rPr sz="1100" b="0">
-                <a:solidFill>
-                  <a:srgbClr val="69737D"/>
+              <a:t>inference
+детерминирован</a:t>
+            </a:r>
+          </a:p>
+        </p:txBody>
+      </p:sp>
+      <p:sp>
+        <p:nvSpPr>
+          <p:cNvPr id="13" name="TextBox 12"/>
+          <p:cNvSpPr txBox="1"/>
+          <p:nvPr/>
+        </p:nvSpPr>
+        <p:spPr>
+          <a:xfrm>
+            <a:off x="7269479" y="2971800"/>
+            <a:ext cx="365760" cy="457200"/>
+          </a:xfrm>
+          <a:prstGeom prst="rect">
+            <a:avLst/>
+          </a:prstGeom>
+          <a:noFill/>
+        </p:spPr>
+        <p:txBody>
+          <a:bodyPr wrap="square">
+            <a:spAutoFit/>
+          </a:bodyPr>
+          <a:lstStyle/>
+          <a:p>
+            <a:pPr algn="ctr"/>
+            <a:r>
+              <a:rPr sz="2600" b="0">
+                <a:solidFill>
+                  <a:srgbClr val="FF6B35"/>
                 </a:solidFill>
                 <a:latin typeface="Inter"/>
               </a:rPr>
-              <a:t>
-day 0.8519 / night 0.803 · порог 0.15 по micro-F1</a:t>
-            </a:r>
-          </a:p>
-        </p:txBody>
-      </p:sp>
-      <p:sp>
-        <p:nvSpPr>
-          <p:cNvPr id="11" name="Oval 10"/>
+              <a:t>→</a:t>
+            </a:r>
+          </a:p>
+        </p:txBody>
+      </p:sp>
+      <p:sp>
+        <p:nvSpPr>
+          <p:cNvPr id="14" name="Rounded Rectangle 13"/>
           <p:cNvSpPr/>
           <p:nvPr/>
         </p:nvSpPr>
         <p:spPr>
           <a:xfrm>
-            <a:off x="594360" y="3108960"/>
-            <a:ext cx="137160" cy="137160"/>
-          </a:xfrm>
-          <a:prstGeom prst="ellipse">
-            <a:avLst/>
+            <a:off x="7589519" y="2468880"/>
+            <a:ext cx="2011680" cy="1554480"/>
+          </a:xfrm>
+          <a:prstGeom prst="roundRect">
+            <a:avLst>
+              <a:gd name="adj" fmla="val 7000"/>
+            </a:avLst>
           </a:prstGeom>
           <a:solidFill>
-            <a:srgbClr val="E6C65C"/>
+            <a:srgbClr val="0D1217"/>
           </a:solidFill>
-          <a:ln>
-            <a:noFill/>
+          <a:ln w="12700">
+            <a:solidFill>
+              <a:srgbClr val="2A333D"/>
+            </a:solidFill>
           </a:ln>
         </p:spPr>
         <p:style>
@@ -6564,14 +6156,14 @@
       </p:sp>
       <p:sp>
         <p:nvSpPr>
-          <p:cNvPr id="12" name="TextBox 11"/>
+          <p:cNvPr id="15" name="TextBox 14"/>
           <p:cNvSpPr txBox="1"/>
           <p:nvPr/>
         </p:nvSpPr>
         <p:spPr>
           <a:xfrm>
-            <a:off x="868680" y="2971800"/>
-            <a:ext cx="5029200" cy="594360"/>
+            <a:off x="7589519" y="2743200"/>
+            <a:ext cx="2011680" cy="1097280"/>
           </a:xfrm>
           <a:prstGeom prst="rect">
             <a:avLst/>
@@ -6584,48 +6176,78 @@
           </a:bodyPr>
           <a:lstStyle/>
           <a:p>
-            <a:pPr algn="l"/>
-            <a:r>
-              <a:rPr sz="1400" b="1">
+            <a:pPr algn="ctr"/>
+            <a:r>
+              <a:rPr sz="1900" b="1">
                 <a:solidFill>
                   <a:srgbClr val="F2F4F5"/>
                 </a:solidFill>
                 <a:latin typeface="Inter"/>
               </a:rPr>
-              <a:t>WC-гейт</a:t>
-            </a:r>
-            <a:r>
-              <a:rPr sz="1100" b="0">
-                <a:solidFill>
-                  <a:srgbClr val="69737D"/>
+              <a:t>submission
+447 строк</a:t>
+            </a:r>
+          </a:p>
+        </p:txBody>
+      </p:sp>
+      <p:sp>
+        <p:nvSpPr>
+          <p:cNvPr id="16" name="TextBox 15"/>
+          <p:cNvSpPr txBox="1"/>
+          <p:nvPr/>
+        </p:nvSpPr>
+        <p:spPr>
+          <a:xfrm>
+            <a:off x="9601200" y="2971800"/>
+            <a:ext cx="365760" cy="457200"/>
+          </a:xfrm>
+          <a:prstGeom prst="rect">
+            <a:avLst/>
+          </a:prstGeom>
+          <a:noFill/>
+        </p:spPr>
+        <p:txBody>
+          <a:bodyPr wrap="square">
+            <a:spAutoFit/>
+          </a:bodyPr>
+          <a:lstStyle/>
+          <a:p>
+            <a:pPr algn="ctr"/>
+            <a:r>
+              <a:rPr sz="2600" b="0">
+                <a:solidFill>
+                  <a:srgbClr val="FF6B35"/>
                 </a:solidFill>
                 <a:latin typeface="Inter"/>
               </a:rPr>
-              <a:t>
-застройка только при I4 ≥ 310K (+0.0007)</a:t>
-            </a:r>
-          </a:p>
-        </p:txBody>
-      </p:sp>
-      <p:sp>
-        <p:nvSpPr>
-          <p:cNvPr id="13" name="Oval 12"/>
+              <a:t>→</a:t>
+            </a:r>
+          </a:p>
+        </p:txBody>
+      </p:sp>
+      <p:sp>
+        <p:nvSpPr>
+          <p:cNvPr id="17" name="Rounded Rectangle 16"/>
           <p:cNvSpPr/>
           <p:nvPr/>
         </p:nvSpPr>
         <p:spPr>
           <a:xfrm>
-            <a:off x="594360" y="3886200"/>
-            <a:ext cx="137160" cy="137160"/>
-          </a:xfrm>
-          <a:prstGeom prst="ellipse">
-            <a:avLst/>
+            <a:off x="9921240" y="2468880"/>
+            <a:ext cx="2011680" cy="1554480"/>
+          </a:xfrm>
+          <a:prstGeom prst="roundRect">
+            <a:avLst>
+              <a:gd name="adj" fmla="val 7000"/>
+            </a:avLst>
           </a:prstGeom>
           <a:solidFill>
-            <a:srgbClr val="EF5B5B"/>
+            <a:srgbClr val="0D1217"/>
           </a:solidFill>
-          <a:ln>
-            <a:noFill/>
+          <a:ln w="12700">
+            <a:solidFill>
+              <a:srgbClr val="2A333D"/>
+            </a:solidFill>
           </a:ln>
         </p:spPr>
         <p:style>
@@ -6652,14 +6274,14 @@
       </p:sp>
       <p:sp>
         <p:nvSpPr>
-          <p:cNvPr id="14" name="TextBox 13"/>
+          <p:cNvPr id="18" name="TextBox 17"/>
           <p:cNvSpPr txBox="1"/>
           <p:nvPr/>
         </p:nvSpPr>
         <p:spPr>
           <a:xfrm>
-            <a:off x="868680" y="3749040"/>
-            <a:ext cx="5029200" cy="594360"/>
+            <a:off x="9921240" y="2743200"/>
+            <a:ext cx="2011680" cy="1097280"/>
           </a:xfrm>
           <a:prstGeom prst="rect">
             <a:avLst/>
@@ -6672,82 +6294,30 @@
           </a:bodyPr>
           <a:lstStyle/>
           <a:p>
-            <a:pPr algn="l"/>
-            <a:r>
-              <a:rPr sz="1400" b="1">
+            <a:pPr algn="ctr"/>
+            <a:r>
+              <a:rPr sz="1900" b="1">
                 <a:solidFill>
                   <a:srgbClr val="F2F4F5"/>
                 </a:solidFill>
                 <a:latin typeface="Inter"/>
               </a:rPr>
-              <a:t>Честно</a:t>
-            </a:r>
-            <a:r>
-              <a:rPr sz="1100" b="0">
-                <a:solidFill>
-                  <a:srgbClr val="69737D"/>
-                </a:solidFill>
-                <a:latin typeface="Inter"/>
-              </a:rPr>
-              <a:t>
-факелы на одном снимке неотличимы — Fig.4</a:t>
-            </a:r>
-          </a:p>
-        </p:txBody>
-      </p:sp>
-      <p:sp>
-        <p:nvSpPr>
-          <p:cNvPr id="15" name="Oval 14"/>
-          <p:cNvSpPr/>
-          <p:nvPr/>
-        </p:nvSpPr>
-        <p:spPr>
-          <a:xfrm>
-            <a:off x="594360" y="4663440"/>
-            <a:ext cx="137160" cy="137160"/>
-          </a:xfrm>
-          <a:prstGeom prst="ellipse">
-            <a:avLst/>
-          </a:prstGeom>
-          <a:solidFill>
-            <a:srgbClr val="FF6B35"/>
-          </a:solidFill>
-          <a:ln>
-            <a:noFill/>
-          </a:ln>
-        </p:spPr>
-        <p:style>
-          <a:lnRef idx="1">
-            <a:schemeClr val="accent1"/>
-          </a:lnRef>
-          <a:fillRef idx="3">
-            <a:schemeClr val="accent1"/>
-          </a:fillRef>
-          <a:effectRef idx="2">
-            <a:schemeClr val="accent1"/>
-          </a:effectRef>
-          <a:fontRef idx="minor">
-            <a:schemeClr val="lt1"/>
-          </a:fontRef>
-        </p:style>
-        <p:txBody>
-          <a:bodyPr rtlCol="0" anchor="ctr"/>
-          <a:lstStyle/>
-          <a:p>
-            <a:pPr algn="ctr"/>
-          </a:p>
-        </p:txBody>
-      </p:sp>
-      <p:sp>
-        <p:nvSpPr>
-          <p:cNvPr id="16" name="TextBox 15"/>
+              <a:t>сервис
+карта + API</a:t>
+            </a:r>
+          </a:p>
+        </p:txBody>
+      </p:sp>
+      <p:sp>
+        <p:nvSpPr>
+          <p:cNvPr id="19" name="TextBox 18"/>
           <p:cNvSpPr txBox="1"/>
           <p:nvPr/>
         </p:nvSpPr>
         <p:spPr>
           <a:xfrm>
-            <a:off x="868680" y="4526280"/>
-            <a:ext cx="5029200" cy="594360"/>
+            <a:off x="640080" y="4572000"/>
+            <a:ext cx="10881360" cy="1280160"/>
           </a:xfrm>
           <a:prstGeom prst="rect">
             <a:avLst/>
@@ -6760,53 +6330,19 @@
           </a:bodyPr>
           <a:lstStyle/>
           <a:p>
-            <a:pPr algn="l"/>
-            <a:r>
-              <a:rPr sz="1400" b="1">
-                <a:solidFill>
-                  <a:srgbClr val="F2F4F5"/>
+            <a:pPr algn="ctr"/>
+            <a:r>
+              <a:rPr sz="1800" b="0">
+                <a:solidFill>
+                  <a:srgbClr val="7D8690"/>
                 </a:solidFill>
                 <a:latin typeface="Inter"/>
               </a:rPr>
-              <a:t>Сплит</a:t>
-            </a:r>
-            <a:r>
-              <a:rPr sz="1100" b="0">
-                <a:solidFill>
-                  <a:srgbClr val="69737D"/>
-                </a:solidFill>
-                <a:latin typeface="Inter"/>
-              </a:rPr>
-              <a:t>
-по fire_event_id · сиды 19</a:t>
-            </a:r>
-          </a:p>
-        </p:txBody>
-      </p:sp>
-      <p:pic>
-        <p:nvPicPr>
-          <p:cNvPr id="17" name="Picture 16" descr="01-map-full.png"/>
-          <p:cNvPicPr>
-            <a:picLocks noChangeAspect="1"/>
-          </p:cNvPicPr>
-          <p:nvPr/>
-        </p:nvPicPr>
-        <p:blipFill>
-          <a:blip r:embed="rId2"/>
-          <a:stretch>
-            <a:fillRect/>
-          </a:stretch>
-        </p:blipFill>
-        <p:spPr>
-          <a:xfrm>
-            <a:off x="6675120" y="1188720"/>
-            <a:ext cx="5212080" cy="2931795"/>
-          </a:xfrm>
-          <a:prstGeom prst="rect">
-            <a:avLst/>
-          </a:prstGeom>
-        </p:spPr>
-      </p:pic>
+              <a:t>Сплит по очагам без утечек · сиды 19 · тест де-идентифицирован — гео не восстанавливаем</a:t>
+            </a:r>
+          </a:p>
+        </p:txBody>
+      </p:sp>
     </p:spTree>
   </p:cSld>
   <p:clrMapOvr>
@@ -6835,48 +6371,45 @@
       <p:grpSpPr/>
       <p:sp>
         <p:nvSpPr>
-          <p:cNvPr id="2" name="Rounded Rectangle 1"/>
-          <p:cNvSpPr/>
-          <p:nvPr/>
-        </p:nvSpPr>
-        <p:spPr>
-          <a:xfrm>
-            <a:off x="5074920" y="228600"/>
-            <a:ext cx="2057400" cy="685800"/>
-          </a:xfrm>
-          <a:prstGeom prst="roundRect">
-            <a:avLst>
-              <a:gd name="adj" fmla="val 9000"/>
-            </a:avLst>
-          </a:prstGeom>
-          <a:solidFill>
-            <a:srgbClr val="0A0E12"/>
-          </a:solidFill>
-          <a:ln w="12700">
-            <a:solidFill>
-              <a:srgbClr val="2A333D"/>
-            </a:solidFill>
-          </a:ln>
-        </p:spPr>
-        <p:style>
-          <a:lnRef idx="1">
-            <a:schemeClr val="accent1"/>
-          </a:lnRef>
-          <a:fillRef idx="3">
-            <a:schemeClr val="accent1"/>
-          </a:fillRef>
-          <a:effectRef idx="2">
-            <a:schemeClr val="accent1"/>
-          </a:effectRef>
-          <a:fontRef idx="minor">
-            <a:schemeClr val="lt1"/>
-          </a:fontRef>
-        </p:style>
-        <p:txBody>
-          <a:bodyPr rtlCol="0" anchor="ctr"/>
-          <a:lstStyle/>
-          <a:p>
-            <a:pPr algn="ctr"/>
+          <p:cNvPr id="2" name="TextBox 1"/>
+          <p:cNvSpPr txBox="1"/>
+          <p:nvPr/>
+        </p:nvSpPr>
+        <p:spPr>
+          <a:xfrm>
+            <a:off x="640080" y="274320"/>
+            <a:ext cx="4572000" cy="365760"/>
+          </a:xfrm>
+          <a:prstGeom prst="rect">
+            <a:avLst/>
+          </a:prstGeom>
+          <a:noFill/>
+        </p:spPr>
+        <p:txBody>
+          <a:bodyPr wrap="square">
+            <a:spAutoFit/>
+          </a:bodyPr>
+          <a:lstStyle/>
+          <a:p>
+            <a:pPr algn="l"/>
+            <a:r>
+              <a:rPr sz="1200" b="1">
+                <a:solidFill>
+                  <a:srgbClr val="7D8690"/>
+                </a:solidFill>
+                <a:latin typeface="Inter"/>
+              </a:rPr>
+              <a:t>05 / 10   </a:t>
+            </a:r>
+            <a:r>
+              <a:rPr sz="1200" b="1">
+                <a:solidFill>
+                  <a:srgbClr val="7D8690"/>
+                </a:solidFill>
+                <a:latin typeface="Inter"/>
+              </a:rPr>
+              <a:t>ЖИМ НОГАМИ · KOSMOHACK</a:t>
+            </a:r>
           </a:p>
         </p:txBody>
       </p:sp>
@@ -6888,7 +6421,7 @@
         </p:nvSpPr>
         <p:spPr>
           <a:xfrm>
-            <a:off x="5257800" y="457200"/>
+            <a:off x="11612880" y="384048"/>
             <a:ext cx="128016" cy="128016"/>
           </a:xfrm>
           <a:prstGeom prst="ellipse">
@@ -6931,8 +6464,8 @@
         </p:nvSpPr>
         <p:spPr>
           <a:xfrm>
-            <a:off x="5486400" y="256032"/>
-            <a:ext cx="1463040" cy="320040"/>
+            <a:off x="640080" y="822960"/>
+            <a:ext cx="10881360" cy="1188720"/>
           </a:xfrm>
           <a:prstGeom prst="rect">
             <a:avLst/>
@@ -6945,77 +6478,38 @@
           </a:bodyPr>
           <a:lstStyle/>
           <a:p>
-            <a:pPr algn="ctr"/>
-            <a:r>
-              <a:rPr sz="1400" b="1">
+            <a:pPr algn="l"/>
+            <a:r>
+              <a:rPr sz="4000" b="1">
                 <a:solidFill>
                   <a:srgbClr val="F2F4F5"/>
                 </a:solidFill>
                 <a:latin typeface="Inter"/>
               </a:rPr>
-              <a:t>ЖИМ НОГАМИ</a:t>
-            </a:r>
-          </a:p>
-        </p:txBody>
-      </p:sp>
-      <p:sp>
-        <p:nvSpPr>
-          <p:cNvPr id="5" name="TextBox 4"/>
-          <p:cNvSpPr txBox="1"/>
-          <p:nvPr/>
-        </p:nvSpPr>
-        <p:spPr>
-          <a:xfrm>
-            <a:off x="5486400" y="530352"/>
-            <a:ext cx="1463040" cy="274320"/>
-          </a:xfrm>
-          <a:prstGeom prst="rect">
-            <a:avLst/>
-          </a:prstGeom>
-          <a:noFill/>
-        </p:spPr>
-        <p:txBody>
-          <a:bodyPr wrap="square">
-            <a:spAutoFit/>
-          </a:bodyPr>
-          <a:lstStyle/>
-          <a:p>
-            <a:pPr algn="ctr"/>
-            <a:r>
-              <a:rPr sz="800" b="0">
-                <a:solidFill>
-                  <a:srgbClr val="69737D"/>
-                </a:solidFill>
-                <a:latin typeface="Inter"/>
-              </a:rPr>
-              <a:t>FIRE MONITOR · KOSMOHACK 2026</a:t>
-            </a:r>
-          </a:p>
-        </p:txBody>
-      </p:sp>
-      <p:sp>
-        <p:nvSpPr>
-          <p:cNvPr id="6" name="Rounded Rectangle 5"/>
+              <a:t>Горение находим: F1 0.8434</a:t>
+            </a:r>
+          </a:p>
+        </p:txBody>
+      </p:sp>
+      <p:sp>
+        <p:nvSpPr>
+          <p:cNvPr id="5" name="Oval 4"/>
           <p:cNvSpPr/>
           <p:nvPr/>
         </p:nvSpPr>
         <p:spPr>
           <a:xfrm>
-            <a:off x="320040" y="1188720"/>
-            <a:ext cx="5852160" cy="4480560"/>
-          </a:xfrm>
-          <a:prstGeom prst="roundRect">
-            <a:avLst>
-              <a:gd name="adj" fmla="val 9000"/>
-            </a:avLst>
+            <a:off x="914400" y="2596896"/>
+            <a:ext cx="155448" cy="155448"/>
+          </a:xfrm>
+          <a:prstGeom prst="ellipse">
+            <a:avLst/>
           </a:prstGeom>
           <a:solidFill>
-            <a:srgbClr val="0A0E12"/>
+            <a:srgbClr val="62D99A"/>
           </a:solidFill>
-          <a:ln w="12700">
-            <a:solidFill>
-              <a:srgbClr val="2A333D"/>
-            </a:solidFill>
+          <a:ln>
+            <a:noFill/>
           </a:ln>
         </p:spPr>
         <p:style>
@@ -7042,14 +6536,14 @@
       </p:sp>
       <p:sp>
         <p:nvSpPr>
-          <p:cNvPr id="7" name="TextBox 6"/>
+          <p:cNvPr id="6" name="TextBox 5"/>
           <p:cNvSpPr txBox="1"/>
           <p:nvPr/>
         </p:nvSpPr>
         <p:spPr>
           <a:xfrm>
-            <a:off x="594360" y="1325880"/>
-            <a:ext cx="914400" cy="274320"/>
+            <a:off x="1280160" y="2395728"/>
+            <a:ext cx="10332720" cy="822960"/>
           </a:xfrm>
           <a:prstGeom prst="rect">
             <a:avLst/>
@@ -7064,14 +6558,67 @@
           <a:p>
             <a:pPr algn="l"/>
             <a:r>
-              <a:rPr sz="1100" b="1">
-                <a:solidFill>
-                  <a:srgbClr val="69737D"/>
+              <a:rPr sz="2100" b="0">
+                <a:solidFill>
+                  <a:srgbClr val="F2F4F5"/>
                 </a:solidFill>
                 <a:latin typeface="Inter"/>
               </a:rPr>
-              <a:t>04</a:t>
-            </a:r>
+              <a:t>12 каналов: видимый + I4 + разность I4−I5 + покров, рельеф, метео</a:t>
+            </a:r>
+            <a:r>
+              <a:rPr sz="1500" b="0">
+                <a:solidFill>
+                  <a:srgbClr val="7D8690"/>
+                </a:solidFill>
+                <a:latin typeface="Inter"/>
+              </a:rPr>
+              <a:t>
+Unet + EfficientNet-B4 · обучение — 5 минут</a:t>
+            </a:r>
+          </a:p>
+        </p:txBody>
+      </p:sp>
+      <p:sp>
+        <p:nvSpPr>
+          <p:cNvPr id="7" name="Oval 6"/>
+          <p:cNvSpPr/>
+          <p:nvPr/>
+        </p:nvSpPr>
+        <p:spPr>
+          <a:xfrm>
+            <a:off x="914400" y="3602736"/>
+            <a:ext cx="155448" cy="155448"/>
+          </a:xfrm>
+          <a:prstGeom prst="ellipse">
+            <a:avLst/>
+          </a:prstGeom>
+          <a:solidFill>
+            <a:srgbClr val="F2F4F5"/>
+          </a:solidFill>
+          <a:ln>
+            <a:noFill/>
+          </a:ln>
+        </p:spPr>
+        <p:style>
+          <a:lnRef idx="1">
+            <a:schemeClr val="accent1"/>
+          </a:lnRef>
+          <a:fillRef idx="3">
+            <a:schemeClr val="accent1"/>
+          </a:fillRef>
+          <a:effectRef idx="2">
+            <a:schemeClr val="accent1"/>
+          </a:effectRef>
+          <a:fontRef idx="minor">
+            <a:schemeClr val="lt1"/>
+          </a:fontRef>
+        </p:style>
+        <p:txBody>
+          <a:bodyPr rtlCol="0" anchor="ctr"/>
+          <a:lstStyle/>
+          <a:p>
+            <a:pPr algn="ctr"/>
           </a:p>
         </p:txBody>
       </p:sp>
@@ -7083,8 +6630,8 @@
         </p:nvSpPr>
         <p:spPr>
           <a:xfrm>
-            <a:off x="594360" y="1572768"/>
-            <a:ext cx="5303520" cy="457200"/>
+            <a:off x="1280160" y="3401568"/>
+            <a:ext cx="10332720" cy="822960"/>
           </a:xfrm>
           <a:prstGeom prst="rect">
             <a:avLst/>
@@ -7099,13 +6646,23 @@
           <a:p>
             <a:pPr algn="l"/>
             <a:r>
-              <a:rPr sz="2100" b="1">
+              <a:rPr sz="2100" b="0">
                 <a:solidFill>
                   <a:srgbClr val="F2F4F5"/>
                 </a:solidFill>
                 <a:latin typeface="Inter"/>
               </a:rPr>
-              <a:t>Модуль BS</a:t>
+              <a:t>Порог 0.15 + фильтр застройки</a:t>
+            </a:r>
+            <a:r>
+              <a:rPr sz="1500" b="0">
+                <a:solidFill>
+                  <a:srgbClr val="7D8690"/>
+                </a:solidFill>
+                <a:latin typeface="Inter"/>
+              </a:rPr>
+              <a:t>
+день 0.85 · ночь 0.80</a:t>
             </a:r>
           </a:p>
         </p:txBody>
@@ -7118,8 +6675,8 @@
         </p:nvSpPr>
         <p:spPr>
           <a:xfrm>
-            <a:off x="594360" y="2331720"/>
-            <a:ext cx="137160" cy="137160"/>
+            <a:off x="914400" y="4608576"/>
+            <a:ext cx="155448" cy="155448"/>
           </a:xfrm>
           <a:prstGeom prst="ellipse">
             <a:avLst/>
@@ -7161,8 +6718,8 @@
         </p:nvSpPr>
         <p:spPr>
           <a:xfrm>
-            <a:off x="868680" y="2194560"/>
-            <a:ext cx="5029200" cy="594360"/>
+            <a:off x="1280160" y="4407408"/>
+            <a:ext cx="10332720" cy="822960"/>
           </a:xfrm>
           <a:prstGeom prst="rect">
             <a:avLst/>
@@ -7177,294 +6734,30 @@
           <a:p>
             <a:pPr algn="l"/>
             <a:r>
-              <a:rPr sz="1400" b="1">
+              <a:rPr sz="2100" b="0">
                 <a:solidFill>
                   <a:srgbClr val="F2F4F5"/>
                 </a:solidFill>
                 <a:latin typeface="Inter"/>
               </a:rPr>
-              <a:t>IoU 0.5239</a:t>
-            </a:r>
-            <a:r>
-              <a:rPr sz="1100" b="0">
-                <a:solidFill>
-                  <a:srgbClr val="69737D"/>
+              <a:t>Ограничение признаём</a:t>
+            </a:r>
+            <a:r>
+              <a:rPr sz="1500" b="0">
+                <a:solidFill>
+                  <a:srgbClr val="7D8690"/>
                 </a:solidFill>
                 <a:latin typeface="Inter"/>
               </a:rPr>
               <a:t>
-mIoU severity 0.5430 · фриз ep91</a:t>
-            </a:r>
-          </a:p>
-        </p:txBody>
-      </p:sp>
-      <p:sp>
-        <p:nvSpPr>
-          <p:cNvPr id="11" name="Oval 10"/>
-          <p:cNvSpPr/>
-          <p:nvPr/>
-        </p:nvSpPr>
-        <p:spPr>
-          <a:xfrm>
-            <a:off x="594360" y="3108960"/>
-            <a:ext cx="137160" cy="137160"/>
-          </a:xfrm>
-          <a:prstGeom prst="ellipse">
-            <a:avLst/>
-          </a:prstGeom>
-          <a:solidFill>
-            <a:srgbClr val="FF6B35"/>
-          </a:solidFill>
-          <a:ln>
-            <a:noFill/>
-          </a:ln>
-        </p:spPr>
-        <p:style>
-          <a:lnRef idx="1">
-            <a:schemeClr val="accent1"/>
-          </a:lnRef>
-          <a:fillRef idx="3">
-            <a:schemeClr val="accent1"/>
-          </a:fillRef>
-          <a:effectRef idx="2">
-            <a:schemeClr val="accent1"/>
-          </a:effectRef>
-          <a:fontRef idx="minor">
-            <a:schemeClr val="lt1"/>
-          </a:fontRef>
-        </p:style>
-        <p:txBody>
-          <a:bodyPr rtlCol="0" anchor="ctr"/>
-          <a:lstStyle/>
-          <a:p>
-            <a:pPr algn="ctr"/>
-          </a:p>
-        </p:txBody>
-      </p:sp>
-      <p:sp>
-        <p:nvSpPr>
-          <p:cNvPr id="12" name="TextBox 11"/>
-          <p:cNvSpPr txBox="1"/>
-          <p:nvPr/>
-        </p:nvSpPr>
-        <p:spPr>
-          <a:xfrm>
-            <a:off x="868680" y="2971800"/>
-            <a:ext cx="5029200" cy="594360"/>
-          </a:xfrm>
-          <a:prstGeom prst="rect">
-            <a:avLst/>
-          </a:prstGeom>
-          <a:noFill/>
-        </p:spPr>
-        <p:txBody>
-          <a:bodyPr wrap="square">
-            <a:spAutoFit/>
-          </a:bodyPr>
-          <a:lstStyle/>
-          <a:p>
-            <a:pPr algn="l"/>
-            <a:r>
-              <a:rPr sz="1400" b="1">
-                <a:solidFill>
-                  <a:srgbClr val="F2F4F5"/>
-                </a:solidFill>
-                <a:latin typeface="Inter"/>
-              </a:rPr>
-              <a:t>dNBR per-cover</a:t>
-            </a:r>
-            <a:r>
-              <a:rPr sz="1100" b="0">
-                <a:solidFill>
-                  <a:srgbClr val="69737D"/>
-                </a:solidFill>
-                <a:latin typeface="Inter"/>
-              </a:rPr>
-              <a:t>
-лес 0.28/0.53 · степь 0.21/0.38 · пашня 0.19/0.37</a:t>
-            </a:r>
-          </a:p>
-        </p:txBody>
-      </p:sp>
-      <p:sp>
-        <p:nvSpPr>
-          <p:cNvPr id="13" name="Oval 12"/>
-          <p:cNvSpPr/>
-          <p:nvPr/>
-        </p:nvSpPr>
-        <p:spPr>
-          <a:xfrm>
-            <a:off x="594360" y="3886200"/>
-            <a:ext cx="137160" cy="137160"/>
-          </a:xfrm>
-          <a:prstGeom prst="ellipse">
-            <a:avLst/>
-          </a:prstGeom>
-          <a:solidFill>
-            <a:srgbClr val="EF5B5B"/>
-          </a:solidFill>
-          <a:ln>
-            <a:noFill/>
-          </a:ln>
-        </p:spPr>
-        <p:style>
-          <a:lnRef idx="1">
-            <a:schemeClr val="accent1"/>
-          </a:lnRef>
-          <a:fillRef idx="3">
-            <a:schemeClr val="accent1"/>
-          </a:fillRef>
-          <a:effectRef idx="2">
-            <a:schemeClr val="accent1"/>
-          </a:effectRef>
-          <a:fontRef idx="minor">
-            <a:schemeClr val="lt1"/>
-          </a:fontRef>
-        </p:style>
-        <p:txBody>
-          <a:bodyPr rtlCol="0" anchor="ctr"/>
-          <a:lstStyle/>
-          <a:p>
-            <a:pPr algn="ctr"/>
-          </a:p>
-        </p:txBody>
-      </p:sp>
-      <p:sp>
-        <p:nvSpPr>
-          <p:cNvPr id="14" name="TextBox 13"/>
-          <p:cNvSpPr txBox="1"/>
-          <p:nvPr/>
-        </p:nvSpPr>
-        <p:spPr>
-          <a:xfrm>
-            <a:off x="868680" y="3749040"/>
-            <a:ext cx="5029200" cy="594360"/>
-          </a:xfrm>
-          <a:prstGeom prst="rect">
-            <a:avLst/>
-          </a:prstGeom>
-          <a:noFill/>
-        </p:spPr>
-        <p:txBody>
-          <a:bodyPr wrap="square">
-            <a:spAutoFit/>
-          </a:bodyPr>
-          <a:lstStyle/>
-          <a:p>
-            <a:pPr algn="l"/>
-            <a:r>
-              <a:rPr sz="1400" b="1">
-                <a:solidFill>
-                  <a:srgbClr val="F2F4F5"/>
-                </a:solidFill>
-                <a:latin typeface="Inter"/>
-              </a:rPr>
-              <a:t>Prithvi мёртв</a:t>
-            </a:r>
-            <a:r>
-              <a:rPr sz="1100" b="0">
-                <a:solidFill>
-                  <a:srgbClr val="69737D"/>
-                </a:solidFill>
-                <a:latin typeface="Inter"/>
-              </a:rPr>
-              <a:t>
-IoU 0.16 &lt; бейзлайна 0.33 + nan-loss</a:t>
-            </a:r>
-          </a:p>
-        </p:txBody>
-      </p:sp>
-      <p:sp>
-        <p:nvSpPr>
-          <p:cNvPr id="15" name="Oval 14"/>
-          <p:cNvSpPr/>
-          <p:nvPr/>
-        </p:nvSpPr>
-        <p:spPr>
-          <a:xfrm>
-            <a:off x="594360" y="4663440"/>
-            <a:ext cx="137160" cy="137160"/>
-          </a:xfrm>
-          <a:prstGeom prst="ellipse">
-            <a:avLst/>
-          </a:prstGeom>
-          <a:solidFill>
-            <a:srgbClr val="62D99A"/>
-          </a:solidFill>
-          <a:ln>
-            <a:noFill/>
-          </a:ln>
-        </p:spPr>
-        <p:style>
-          <a:lnRef idx="1">
-            <a:schemeClr val="accent1"/>
-          </a:lnRef>
-          <a:fillRef idx="3">
-            <a:schemeClr val="accent1"/>
-          </a:fillRef>
-          <a:effectRef idx="2">
-            <a:schemeClr val="accent1"/>
-          </a:effectRef>
-          <a:fontRef idx="minor">
-            <a:schemeClr val="lt1"/>
-          </a:fontRef>
-        </p:style>
-        <p:txBody>
-          <a:bodyPr rtlCol="0" anchor="ctr"/>
-          <a:lstStyle/>
-          <a:p>
-            <a:pPr algn="ctr"/>
-          </a:p>
-        </p:txBody>
-      </p:sp>
-      <p:sp>
-        <p:nvSpPr>
-          <p:cNvPr id="16" name="TextBox 15"/>
-          <p:cNvSpPr txBox="1"/>
-          <p:nvPr/>
-        </p:nvSpPr>
-        <p:spPr>
-          <a:xfrm>
-            <a:off x="868680" y="4526280"/>
-            <a:ext cx="5029200" cy="594360"/>
-          </a:xfrm>
-          <a:prstGeom prst="rect">
-            <a:avLst/>
-          </a:prstGeom>
-          <a:noFill/>
-        </p:spPr>
-        <p:txBody>
-          <a:bodyPr wrap="square">
-            <a:spAutoFit/>
-          </a:bodyPr>
-          <a:lstStyle/>
-          <a:p>
-            <a:pPr algn="l"/>
-            <a:r>
-              <a:rPr sz="1400" b="1">
-                <a:solidFill>
-                  <a:srgbClr val="F2F4F5"/>
-                </a:solidFill>
-                <a:latin typeface="Inter"/>
-              </a:rPr>
-              <a:t>Retry H1/H2</a:t>
-            </a:r>
-            <a:r>
-              <a:rPr sz="1100" b="0">
-                <a:solidFill>
-                  <a:srgbClr val="69737D"/>
-                </a:solidFill>
-                <a:latin typeface="Inter"/>
-              </a:rPr>
-              <a:t>
-0.6196 и 0.632 — оба проиграли фризу</a:t>
+факел на одном снимке неотличим от пожара — нужна история</a:t>
             </a:r>
           </a:p>
         </p:txBody>
       </p:sp>
       <p:pic>
         <p:nvPicPr>
-          <p:cNvPr id="17" name="Picture 16" descr="03-analytics.png"/>
+          <p:cNvPr id="11" name="Picture 10" descr="af_viz_sample.png"/>
           <p:cNvPicPr>
             <a:picLocks noChangeAspect="1"/>
           </p:cNvPicPr>
@@ -7478,8 +6771,8 @@
         </p:blipFill>
         <p:spPr>
           <a:xfrm>
-            <a:off x="6675120" y="2377440"/>
-            <a:ext cx="5212080" cy="666355"/>
+            <a:off x="8412480" y="2377440"/>
+            <a:ext cx="3108960" cy="1036320"/>
           </a:xfrm>
           <a:prstGeom prst="rect">
             <a:avLst/>
@@ -7514,48 +6807,45 @@
       <p:grpSpPr/>
       <p:sp>
         <p:nvSpPr>
-          <p:cNvPr id="2" name="Rounded Rectangle 1"/>
-          <p:cNvSpPr/>
-          <p:nvPr/>
-        </p:nvSpPr>
-        <p:spPr>
-          <a:xfrm>
-            <a:off x="5074920" y="228600"/>
-            <a:ext cx="2057400" cy="685800"/>
-          </a:xfrm>
-          <a:prstGeom prst="roundRect">
-            <a:avLst>
-              <a:gd name="adj" fmla="val 9000"/>
-            </a:avLst>
-          </a:prstGeom>
-          <a:solidFill>
-            <a:srgbClr val="0A0E12"/>
-          </a:solidFill>
-          <a:ln w="12700">
-            <a:solidFill>
-              <a:srgbClr val="2A333D"/>
-            </a:solidFill>
-          </a:ln>
-        </p:spPr>
-        <p:style>
-          <a:lnRef idx="1">
-            <a:schemeClr val="accent1"/>
-          </a:lnRef>
-          <a:fillRef idx="3">
-            <a:schemeClr val="accent1"/>
-          </a:fillRef>
-          <a:effectRef idx="2">
-            <a:schemeClr val="accent1"/>
-          </a:effectRef>
-          <a:fontRef idx="minor">
-            <a:schemeClr val="lt1"/>
-          </a:fontRef>
-        </p:style>
-        <p:txBody>
-          <a:bodyPr rtlCol="0" anchor="ctr"/>
-          <a:lstStyle/>
-          <a:p>
-            <a:pPr algn="ctr"/>
+          <p:cNvPr id="2" name="TextBox 1"/>
+          <p:cNvSpPr txBox="1"/>
+          <p:nvPr/>
+        </p:nvSpPr>
+        <p:spPr>
+          <a:xfrm>
+            <a:off x="640080" y="274320"/>
+            <a:ext cx="4572000" cy="365760"/>
+          </a:xfrm>
+          <a:prstGeom prst="rect">
+            <a:avLst/>
+          </a:prstGeom>
+          <a:noFill/>
+        </p:spPr>
+        <p:txBody>
+          <a:bodyPr wrap="square">
+            <a:spAutoFit/>
+          </a:bodyPr>
+          <a:lstStyle/>
+          <a:p>
+            <a:pPr algn="l"/>
+            <a:r>
+              <a:rPr sz="1200" b="1">
+                <a:solidFill>
+                  <a:srgbClr val="7D8690"/>
+                </a:solidFill>
+                <a:latin typeface="Inter"/>
+              </a:rPr>
+              <a:t>06 / 10   </a:t>
+            </a:r>
+            <a:r>
+              <a:rPr sz="1200" b="1">
+                <a:solidFill>
+                  <a:srgbClr val="7D8690"/>
+                </a:solidFill>
+                <a:latin typeface="Inter"/>
+              </a:rPr>
+              <a:t>ЖИМ НОГАМИ · KOSMOHACK</a:t>
+            </a:r>
           </a:p>
         </p:txBody>
       </p:sp>
@@ -7567,7 +6857,7 @@
         </p:nvSpPr>
         <p:spPr>
           <a:xfrm>
-            <a:off x="5257800" y="457200"/>
+            <a:off x="11612880" y="384048"/>
             <a:ext cx="128016" cy="128016"/>
           </a:xfrm>
           <a:prstGeom prst="ellipse">
@@ -7610,8 +6900,8 @@
         </p:nvSpPr>
         <p:spPr>
           <a:xfrm>
-            <a:off x="5486400" y="256032"/>
-            <a:ext cx="1463040" cy="320040"/>
+            <a:off x="640080" y="822960"/>
+            <a:ext cx="10881360" cy="1188720"/>
           </a:xfrm>
           <a:prstGeom prst="rect">
             <a:avLst/>
@@ -7624,77 +6914,38 @@
           </a:bodyPr>
           <a:lstStyle/>
           <a:p>
-            <a:pPr algn="ctr"/>
-            <a:r>
-              <a:rPr sz="1400" b="1">
+            <a:pPr algn="l"/>
+            <a:r>
+              <a:rPr sz="4000" b="1">
                 <a:solidFill>
                   <a:srgbClr val="F2F4F5"/>
                 </a:solidFill>
                 <a:latin typeface="Inter"/>
               </a:rPr>
-              <a:t>ЖИМ НОГАМИ</a:t>
-            </a:r>
-          </a:p>
-        </p:txBody>
-      </p:sp>
-      <p:sp>
-        <p:nvSpPr>
-          <p:cNvPr id="5" name="TextBox 4"/>
-          <p:cNvSpPr txBox="1"/>
-          <p:nvPr/>
-        </p:nvSpPr>
-        <p:spPr>
-          <a:xfrm>
-            <a:off x="5486400" y="530352"/>
-            <a:ext cx="1463040" cy="274320"/>
-          </a:xfrm>
-          <a:prstGeom prst="rect">
-            <a:avLst/>
-          </a:prstGeom>
-          <a:noFill/>
-        </p:spPr>
-        <p:txBody>
-          <a:bodyPr wrap="square">
-            <a:spAutoFit/>
-          </a:bodyPr>
-          <a:lstStyle/>
-          <a:p>
-            <a:pPr algn="ctr"/>
-            <a:r>
-              <a:rPr sz="800" b="0">
-                <a:solidFill>
-                  <a:srgbClr val="69737D"/>
-                </a:solidFill>
-                <a:latin typeface="Inter"/>
-              </a:rPr>
-              <a:t>FIRE MONITOR · KOSMOHACK 2026</a:t>
-            </a:r>
-          </a:p>
-        </p:txBody>
-      </p:sp>
-      <p:sp>
-        <p:nvSpPr>
-          <p:cNvPr id="6" name="Rounded Rectangle 5"/>
+              <a:t>Гари картируем: IoU 0.52 · mIoU 0.54</a:t>
+            </a:r>
+          </a:p>
+        </p:txBody>
+      </p:sp>
+      <p:sp>
+        <p:nvSpPr>
+          <p:cNvPr id="5" name="Oval 4"/>
           <p:cNvSpPr/>
           <p:nvPr/>
         </p:nvSpPr>
         <p:spPr>
           <a:xfrm>
-            <a:off x="320040" y="1188720"/>
-            <a:ext cx="11521440" cy="1371600"/>
-          </a:xfrm>
-          <a:prstGeom prst="roundRect">
-            <a:avLst>
-              <a:gd name="adj" fmla="val 9000"/>
-            </a:avLst>
+            <a:off x="914400" y="2596896"/>
+            <a:ext cx="155448" cy="155448"/>
+          </a:xfrm>
+          <a:prstGeom prst="ellipse">
+            <a:avLst/>
           </a:prstGeom>
           <a:solidFill>
-            <a:srgbClr val="0A0E12"/>
+            <a:srgbClr val="62D99A"/>
           </a:solidFill>
-          <a:ln w="12700">
-            <a:solidFill>
-              <a:srgbClr val="2A333D"/>
-            </a:solidFill>
+          <a:ln>
+            <a:noFill/>
           </a:ln>
         </p:spPr>
         <p:style>
@@ -7721,14 +6972,14 @@
       </p:sp>
       <p:sp>
         <p:nvSpPr>
-          <p:cNvPr id="7" name="TextBox 6"/>
+          <p:cNvPr id="6" name="TextBox 5"/>
           <p:cNvSpPr txBox="1"/>
           <p:nvPr/>
         </p:nvSpPr>
         <p:spPr>
           <a:xfrm>
-            <a:off x="640080" y="1371600"/>
-            <a:ext cx="10881360" cy="1005840"/>
+            <a:off x="1280160" y="2395728"/>
+            <a:ext cx="10332720" cy="822960"/>
           </a:xfrm>
           <a:prstGeom prst="rect">
             <a:avLst/>
@@ -7743,50 +6994,46 @@
           <a:p>
             <a:pPr algn="l"/>
             <a:r>
-              <a:rPr sz="2600" b="1">
+              <a:rPr sz="2100" b="0">
                 <a:solidFill>
                   <a:srgbClr val="F2F4F5"/>
                 </a:solidFill>
                 <a:latin typeface="Inter"/>
               </a:rPr>
-              <a:t>0.35 × 0.8434  +  0.35 × 0.5239  +  0.30 × 0.5430  =  0.654</a:t>
+              <a:t>27 каналов + пороги dNBR под каждый тип покрова</a:t>
             </a:r>
             <a:r>
               <a:rPr sz="1500" b="0">
                 <a:solidFill>
-                  <a:srgbClr val="69737D"/>
+                  <a:srgbClr val="7D8690"/>
                 </a:solidFill>
                 <a:latin typeface="Inter"/>
               </a:rPr>
               <a:t>
-F1_af · IoU_burn · mIoU_sev — micro-pool по всем пикселям</a:t>
-            </a:r>
-          </a:p>
-        </p:txBody>
-      </p:sp>
-      <p:sp>
-        <p:nvSpPr>
-          <p:cNvPr id="8" name="Rounded Rectangle 7"/>
+лес, степь, пашня и пойма горят по-разному — один порог врёт</a:t>
+            </a:r>
+          </a:p>
+        </p:txBody>
+      </p:sp>
+      <p:sp>
+        <p:nvSpPr>
+          <p:cNvPr id="7" name="Oval 6"/>
           <p:cNvSpPr/>
           <p:nvPr/>
         </p:nvSpPr>
         <p:spPr>
           <a:xfrm>
-            <a:off x="320040" y="5074920"/>
-            <a:ext cx="2194560" cy="1051560"/>
-          </a:xfrm>
-          <a:prstGeom prst="roundRect">
-            <a:avLst>
-              <a:gd name="adj" fmla="val 9000"/>
-            </a:avLst>
+            <a:off x="914400" y="3602736"/>
+            <a:ext cx="155448" cy="155448"/>
+          </a:xfrm>
+          <a:prstGeom prst="ellipse">
+            <a:avLst/>
           </a:prstGeom>
           <a:solidFill>
-            <a:srgbClr val="0A0E12"/>
+            <a:srgbClr val="E6C65C"/>
           </a:solidFill>
-          <a:ln w="12700">
-            <a:solidFill>
-              <a:srgbClr val="2A333D"/>
-            </a:solidFill>
+          <a:ln>
+            <a:noFill/>
           </a:ln>
         </p:spPr>
         <p:style>
@@ -7813,14 +7060,14 @@
       </p:sp>
       <p:sp>
         <p:nvSpPr>
-          <p:cNvPr id="9" name="TextBox 8"/>
+          <p:cNvPr id="8" name="TextBox 7"/>
           <p:cNvSpPr txBox="1"/>
           <p:nvPr/>
         </p:nvSpPr>
         <p:spPr>
           <a:xfrm>
-            <a:off x="457200" y="5129783"/>
-            <a:ext cx="1938528" cy="228600"/>
+            <a:off x="1280160" y="3401568"/>
+            <a:ext cx="10332720" cy="822960"/>
           </a:xfrm>
           <a:prstGeom prst="rect">
             <a:avLst/>
@@ -7835,110 +7082,46 @@
           <a:p>
             <a:pPr algn="l"/>
             <a:r>
-              <a:rPr sz="1000" b="1">
-                <a:solidFill>
-                  <a:srgbClr val="69737D"/>
+              <a:rPr sz="2100" b="0">
+                <a:solidFill>
+                  <a:srgbClr val="F2F4F5"/>
                 </a:solidFill>
                 <a:latin typeface="Inter"/>
               </a:rPr>
-              <a:t>THERMAL</a:t>
-            </a:r>
-          </a:p>
-        </p:txBody>
-      </p:sp>
-      <p:sp>
-        <p:nvSpPr>
-          <p:cNvPr id="10" name="TextBox 9"/>
-          <p:cNvSpPr txBox="1"/>
-          <p:nvPr/>
-        </p:nvSpPr>
-        <p:spPr>
-          <a:xfrm>
-            <a:off x="457200" y="5349240"/>
-            <a:ext cx="1938528" cy="457200"/>
-          </a:xfrm>
-          <a:prstGeom prst="rect">
-            <a:avLst/>
-          </a:prstGeom>
-          <a:noFill/>
-        </p:spPr>
-        <p:txBody>
-          <a:bodyPr wrap="square">
-            <a:spAutoFit/>
-          </a:bodyPr>
-          <a:lstStyle/>
-          <a:p>
-            <a:pPr algn="l"/>
-            <a:r>
-              <a:rPr sz="2200" b="1">
-                <a:solidFill>
-                  <a:srgbClr val="F2F4F5"/>
+              <a:t>Prithvi-300M не взлетел</a:t>
+            </a:r>
+            <a:r>
+              <a:rPr sz="1500" b="0">
+                <a:solidFill>
+                  <a:srgbClr val="7D8690"/>
                 </a:solidFill>
                 <a:latin typeface="Inter"/>
               </a:rPr>
-              <a:t>0.8434</a:t>
-            </a:r>
-          </a:p>
-        </p:txBody>
-      </p:sp>
-      <p:sp>
-        <p:nvSpPr>
-          <p:cNvPr id="11" name="TextBox 10"/>
-          <p:cNvSpPr txBox="1"/>
-          <p:nvPr/>
-        </p:nvSpPr>
-        <p:spPr>
-          <a:xfrm>
-            <a:off x="457200" y="5824728"/>
-            <a:ext cx="1938528" cy="228600"/>
-          </a:xfrm>
-          <a:prstGeom prst="rect">
-            <a:avLst/>
-          </a:prstGeom>
-          <a:noFill/>
-        </p:spPr>
-        <p:txBody>
-          <a:bodyPr wrap="square">
-            <a:spAutoFit/>
-          </a:bodyPr>
-          <a:lstStyle/>
-          <a:p>
-            <a:pPr algn="l"/>
-            <a:r>
-              <a:rPr sz="1000" b="0">
-                <a:solidFill>
-                  <a:srgbClr val="69737D"/>
-                </a:solidFill>
-                <a:latin typeface="Inter"/>
-              </a:rPr>
-              <a:t>F1_af · micro</a:t>
-            </a:r>
-          </a:p>
-        </p:txBody>
-      </p:sp>
-      <p:sp>
-        <p:nvSpPr>
-          <p:cNvPr id="12" name="Rounded Rectangle 11"/>
+              <a:t>
+IoU 0.16 — честно убили ветку, а не прячем</a:t>
+            </a:r>
+          </a:p>
+        </p:txBody>
+      </p:sp>
+      <p:sp>
+        <p:nvSpPr>
+          <p:cNvPr id="9" name="Oval 8"/>
           <p:cNvSpPr/>
           <p:nvPr/>
         </p:nvSpPr>
         <p:spPr>
           <a:xfrm>
-            <a:off x="2624328" y="5074920"/>
-            <a:ext cx="2194560" cy="1051560"/>
-          </a:xfrm>
-          <a:prstGeom prst="roundRect">
-            <a:avLst>
-              <a:gd name="adj" fmla="val 9000"/>
-            </a:avLst>
+            <a:off x="914400" y="4608576"/>
+            <a:ext cx="155448" cy="155448"/>
+          </a:xfrm>
+          <a:prstGeom prst="ellipse">
+            <a:avLst/>
           </a:prstGeom>
           <a:solidFill>
-            <a:srgbClr val="0A0E12"/>
+            <a:srgbClr val="F2F4F5"/>
           </a:solidFill>
-          <a:ln w="12700">
-            <a:solidFill>
-              <a:srgbClr val="2A333D"/>
-            </a:solidFill>
+          <a:ln>
+            <a:noFill/>
           </a:ln>
         </p:spPr>
         <p:style>
@@ -7965,14 +7148,14 @@
       </p:sp>
       <p:sp>
         <p:nvSpPr>
-          <p:cNvPr id="13" name="TextBox 12"/>
+          <p:cNvPr id="10" name="TextBox 9"/>
           <p:cNvSpPr txBox="1"/>
           <p:nvPr/>
         </p:nvSpPr>
         <p:spPr>
           <a:xfrm>
-            <a:off x="2761488" y="5129783"/>
-            <a:ext cx="1938528" cy="228600"/>
+            <a:off x="1280160" y="4407408"/>
+            <a:ext cx="10332720" cy="822960"/>
           </a:xfrm>
           <a:prstGeom prst="rect">
             <a:avLst/>
@@ -7987,539 +7170,23 @@
           <a:p>
             <a:pPr algn="l"/>
             <a:r>
-              <a:rPr sz="1000" b="1">
-                <a:solidFill>
-                  <a:srgbClr val="69737D"/>
+              <a:rPr sz="2100" b="0">
+                <a:solidFill>
+                  <a:srgbClr val="F2F4F5"/>
                 </a:solidFill>
                 <a:latin typeface="Inter"/>
               </a:rPr>
-              <a:t>LEVEL 01</a:t>
-            </a:r>
-          </a:p>
-        </p:txBody>
-      </p:sp>
-      <p:sp>
-        <p:nvSpPr>
-          <p:cNvPr id="14" name="TextBox 13"/>
-          <p:cNvSpPr txBox="1"/>
-          <p:nvPr/>
-        </p:nvSpPr>
-        <p:spPr>
-          <a:xfrm>
-            <a:off x="2761488" y="5349240"/>
-            <a:ext cx="1938528" cy="457200"/>
-          </a:xfrm>
-          <a:prstGeom prst="rect">
-            <a:avLst/>
-          </a:prstGeom>
-          <a:noFill/>
-        </p:spPr>
-        <p:txBody>
-          <a:bodyPr wrap="square">
-            <a:spAutoFit/>
-          </a:bodyPr>
-          <a:lstStyle/>
-          <a:p>
-            <a:pPr algn="l"/>
-            <a:r>
-              <a:rPr sz="2200" b="1">
-                <a:solidFill>
-                  <a:srgbClr val="E6C65C"/>
+              <a:t>Два retry тоже проиграли фризу</a:t>
+            </a:r>
+            <a:r>
+              <a:rPr sz="1500" b="0">
+                <a:solidFill>
+                  <a:srgbClr val="7D8690"/>
                 </a:solidFill>
                 <a:latin typeface="Inter"/>
               </a:rPr>
-              <a:t>0.5239</a:t>
-            </a:r>
-          </a:p>
-        </p:txBody>
-      </p:sp>
-      <p:sp>
-        <p:nvSpPr>
-          <p:cNvPr id="15" name="TextBox 14"/>
-          <p:cNvSpPr txBox="1"/>
-          <p:nvPr/>
-        </p:nvSpPr>
-        <p:spPr>
-          <a:xfrm>
-            <a:off x="2761488" y="5824728"/>
-            <a:ext cx="1938528" cy="228600"/>
-          </a:xfrm>
-          <a:prstGeom prst="rect">
-            <a:avLst/>
-          </a:prstGeom>
-          <a:noFill/>
-        </p:spPr>
-        <p:txBody>
-          <a:bodyPr wrap="square">
-            <a:spAutoFit/>
-          </a:bodyPr>
-          <a:lstStyle/>
-          <a:p>
-            <a:pPr algn="l"/>
-            <a:r>
-              <a:rPr sz="1000" b="0">
-                <a:solidFill>
-                  <a:srgbClr val="69737D"/>
-                </a:solidFill>
-                <a:latin typeface="Inter"/>
-              </a:rPr>
-              <a:t>IoU burn</a:t>
-            </a:r>
-          </a:p>
-        </p:txBody>
-      </p:sp>
-      <p:sp>
-        <p:nvSpPr>
-          <p:cNvPr id="16" name="Rounded Rectangle 15"/>
-          <p:cNvSpPr/>
-          <p:nvPr/>
-        </p:nvSpPr>
-        <p:spPr>
-          <a:xfrm>
-            <a:off x="4928616" y="5074920"/>
-            <a:ext cx="2194560" cy="1051560"/>
-          </a:xfrm>
-          <a:prstGeom prst="roundRect">
-            <a:avLst>
-              <a:gd name="adj" fmla="val 9000"/>
-            </a:avLst>
-          </a:prstGeom>
-          <a:solidFill>
-            <a:srgbClr val="0A0E12"/>
-          </a:solidFill>
-          <a:ln w="12700">
-            <a:solidFill>
-              <a:srgbClr val="2A333D"/>
-            </a:solidFill>
-          </a:ln>
-        </p:spPr>
-        <p:style>
-          <a:lnRef idx="1">
-            <a:schemeClr val="accent1"/>
-          </a:lnRef>
-          <a:fillRef idx="3">
-            <a:schemeClr val="accent1"/>
-          </a:fillRef>
-          <a:effectRef idx="2">
-            <a:schemeClr val="accent1"/>
-          </a:effectRef>
-          <a:fontRef idx="minor">
-            <a:schemeClr val="lt1"/>
-          </a:fontRef>
-        </p:style>
-        <p:txBody>
-          <a:bodyPr rtlCol="0" anchor="ctr"/>
-          <a:lstStyle/>
-          <a:p>
-            <a:pPr algn="ctr"/>
-          </a:p>
-        </p:txBody>
-      </p:sp>
-      <p:sp>
-        <p:nvSpPr>
-          <p:cNvPr id="17" name="TextBox 16"/>
-          <p:cNvSpPr txBox="1"/>
-          <p:nvPr/>
-        </p:nvSpPr>
-        <p:spPr>
-          <a:xfrm>
-            <a:off x="5065776" y="5129783"/>
-            <a:ext cx="1938528" cy="228600"/>
-          </a:xfrm>
-          <a:prstGeom prst="rect">
-            <a:avLst/>
-          </a:prstGeom>
-          <a:noFill/>
-        </p:spPr>
-        <p:txBody>
-          <a:bodyPr wrap="square">
-            <a:spAutoFit/>
-          </a:bodyPr>
-          <a:lstStyle/>
-          <a:p>
-            <a:pPr algn="l"/>
-            <a:r>
-              <a:rPr sz="1000" b="1">
-                <a:solidFill>
-                  <a:srgbClr val="69737D"/>
-                </a:solidFill>
-                <a:latin typeface="Inter"/>
-              </a:rPr>
-              <a:t>LEVEL 02</a:t>
-            </a:r>
-          </a:p>
-        </p:txBody>
-      </p:sp>
-      <p:sp>
-        <p:nvSpPr>
-          <p:cNvPr id="18" name="TextBox 17"/>
-          <p:cNvSpPr txBox="1"/>
-          <p:nvPr/>
-        </p:nvSpPr>
-        <p:spPr>
-          <a:xfrm>
-            <a:off x="5065776" y="5349240"/>
-            <a:ext cx="1938528" cy="457200"/>
-          </a:xfrm>
-          <a:prstGeom prst="rect">
-            <a:avLst/>
-          </a:prstGeom>
-          <a:noFill/>
-        </p:spPr>
-        <p:txBody>
-          <a:bodyPr wrap="square">
-            <a:spAutoFit/>
-          </a:bodyPr>
-          <a:lstStyle/>
-          <a:p>
-            <a:pPr algn="l"/>
-            <a:r>
-              <a:rPr sz="2200" b="1">
-                <a:solidFill>
-                  <a:srgbClr val="FF8B5F"/>
-                </a:solidFill>
-                <a:latin typeface="Inter"/>
-              </a:rPr>
-              <a:t>mIoU</a:t>
-            </a:r>
-          </a:p>
-        </p:txBody>
-      </p:sp>
-      <p:sp>
-        <p:nvSpPr>
-          <p:cNvPr id="19" name="TextBox 18"/>
-          <p:cNvSpPr txBox="1"/>
-          <p:nvPr/>
-        </p:nvSpPr>
-        <p:spPr>
-          <a:xfrm>
-            <a:off x="5065776" y="5824728"/>
-            <a:ext cx="1938528" cy="228600"/>
-          </a:xfrm>
-          <a:prstGeom prst="rect">
-            <a:avLst/>
-          </a:prstGeom>
-          <a:noFill/>
-        </p:spPr>
-        <p:txBody>
-          <a:bodyPr wrap="square">
-            <a:spAutoFit/>
-          </a:bodyPr>
-          <a:lstStyle/>
-          <a:p>
-            <a:pPr algn="l"/>
-            <a:r>
-              <a:rPr sz="1000" b="0">
-                <a:solidFill>
-                  <a:srgbClr val="69737D"/>
-                </a:solidFill>
-                <a:latin typeface="Inter"/>
-              </a:rPr>
-              <a:t>0.5430 · sev 1/2/3</a:t>
-            </a:r>
-          </a:p>
-        </p:txBody>
-      </p:sp>
-      <p:sp>
-        <p:nvSpPr>
-          <p:cNvPr id="20" name="Rounded Rectangle 19"/>
-          <p:cNvSpPr/>
-          <p:nvPr/>
-        </p:nvSpPr>
-        <p:spPr>
-          <a:xfrm>
-            <a:off x="7232904" y="5074920"/>
-            <a:ext cx="2194560" cy="1051560"/>
-          </a:xfrm>
-          <a:prstGeom prst="roundRect">
-            <a:avLst>
-              <a:gd name="adj" fmla="val 9000"/>
-            </a:avLst>
-          </a:prstGeom>
-          <a:solidFill>
-            <a:srgbClr val="0A0E12"/>
-          </a:solidFill>
-          <a:ln w="12700">
-            <a:solidFill>
-              <a:srgbClr val="2A333D"/>
-            </a:solidFill>
-          </a:ln>
-        </p:spPr>
-        <p:style>
-          <a:lnRef idx="1">
-            <a:schemeClr val="accent1"/>
-          </a:lnRef>
-          <a:fillRef idx="3">
-            <a:schemeClr val="accent1"/>
-          </a:fillRef>
-          <a:effectRef idx="2">
-            <a:schemeClr val="accent1"/>
-          </a:effectRef>
-          <a:fontRef idx="minor">
-            <a:schemeClr val="lt1"/>
-          </a:fontRef>
-        </p:style>
-        <p:txBody>
-          <a:bodyPr rtlCol="0" anchor="ctr"/>
-          <a:lstStyle/>
-          <a:p>
-            <a:pPr algn="ctr"/>
-          </a:p>
-        </p:txBody>
-      </p:sp>
-      <p:sp>
-        <p:nvSpPr>
-          <p:cNvPr id="21" name="TextBox 20"/>
-          <p:cNvSpPr txBox="1"/>
-          <p:nvPr/>
-        </p:nvSpPr>
-        <p:spPr>
-          <a:xfrm>
-            <a:off x="7370064" y="5129783"/>
-            <a:ext cx="1938528" cy="228600"/>
-          </a:xfrm>
-          <a:prstGeom prst="rect">
-            <a:avLst/>
-          </a:prstGeom>
-          <a:noFill/>
-        </p:spPr>
-        <p:txBody>
-          <a:bodyPr wrap="square">
-            <a:spAutoFit/>
-          </a:bodyPr>
-          <a:lstStyle/>
-          <a:p>
-            <a:pPr algn="l"/>
-            <a:r>
-              <a:rPr sz="1000" b="1">
-                <a:solidFill>
-                  <a:srgbClr val="69737D"/>
-                </a:solidFill>
-                <a:latin typeface="Inter"/>
-              </a:rPr>
-              <a:t>LEVEL 03</a:t>
-            </a:r>
-          </a:p>
-        </p:txBody>
-      </p:sp>
-      <p:sp>
-        <p:nvSpPr>
-          <p:cNvPr id="22" name="TextBox 21"/>
-          <p:cNvSpPr txBox="1"/>
-          <p:nvPr/>
-        </p:nvSpPr>
-        <p:spPr>
-          <a:xfrm>
-            <a:off x="7370064" y="5349240"/>
-            <a:ext cx="1938528" cy="457200"/>
-          </a:xfrm>
-          <a:prstGeom prst="rect">
-            <a:avLst/>
-          </a:prstGeom>
-          <a:noFill/>
-        </p:spPr>
-        <p:txBody>
-          <a:bodyPr wrap="square">
-            <a:spAutoFit/>
-          </a:bodyPr>
-          <a:lstStyle/>
-          <a:p>
-            <a:pPr algn="l"/>
-            <a:r>
-              <a:rPr sz="2200" b="1">
-                <a:solidFill>
-                  <a:srgbClr val="F2F4F5"/>
-                </a:solidFill>
-                <a:latin typeface="Inter"/>
-              </a:rPr>
-              <a:t>447</a:t>
-            </a:r>
-          </a:p>
-        </p:txBody>
-      </p:sp>
-      <p:sp>
-        <p:nvSpPr>
-          <p:cNvPr id="23" name="TextBox 22"/>
-          <p:cNvSpPr txBox="1"/>
-          <p:nvPr/>
-        </p:nvSpPr>
-        <p:spPr>
-          <a:xfrm>
-            <a:off x="7370064" y="5824728"/>
-            <a:ext cx="1938528" cy="228600"/>
-          </a:xfrm>
-          <a:prstGeom prst="rect">
-            <a:avLst/>
-          </a:prstGeom>
-          <a:noFill/>
-        </p:spPr>
-        <p:txBody>
-          <a:bodyPr wrap="square">
-            <a:spAutoFit/>
-          </a:bodyPr>
-          <a:lstStyle/>
-          <a:p>
-            <a:pPr algn="l"/>
-            <a:r>
-              <a:rPr sz="1000" b="0">
-                <a:solidFill>
-                  <a:srgbClr val="69737D"/>
-                </a:solidFill>
-                <a:latin typeface="Inter"/>
-              </a:rPr>
-              <a:t>строк · NaN 0</a:t>
-            </a:r>
-          </a:p>
-        </p:txBody>
-      </p:sp>
-      <p:sp>
-        <p:nvSpPr>
-          <p:cNvPr id="24" name="Rounded Rectangle 23"/>
-          <p:cNvSpPr/>
-          <p:nvPr/>
-        </p:nvSpPr>
-        <p:spPr>
-          <a:xfrm>
-            <a:off x="9537192" y="5074920"/>
-            <a:ext cx="2194560" cy="1051560"/>
-          </a:xfrm>
-          <a:prstGeom prst="roundRect">
-            <a:avLst>
-              <a:gd name="adj" fmla="val 9000"/>
-            </a:avLst>
-          </a:prstGeom>
-          <a:solidFill>
-            <a:srgbClr val="0A0E12"/>
-          </a:solidFill>
-          <a:ln w="12700">
-            <a:solidFill>
-              <a:srgbClr val="2A333D"/>
-            </a:solidFill>
-          </a:ln>
-        </p:spPr>
-        <p:style>
-          <a:lnRef idx="1">
-            <a:schemeClr val="accent1"/>
-          </a:lnRef>
-          <a:fillRef idx="3">
-            <a:schemeClr val="accent1"/>
-          </a:fillRef>
-          <a:effectRef idx="2">
-            <a:schemeClr val="accent1"/>
-          </a:effectRef>
-          <a:fontRef idx="minor">
-            <a:schemeClr val="lt1"/>
-          </a:fontRef>
-        </p:style>
-        <p:txBody>
-          <a:bodyPr rtlCol="0" anchor="ctr"/>
-          <a:lstStyle/>
-          <a:p>
-            <a:pPr algn="ctr"/>
-          </a:p>
-        </p:txBody>
-      </p:sp>
-      <p:sp>
-        <p:nvSpPr>
-          <p:cNvPr id="25" name="TextBox 24"/>
-          <p:cNvSpPr txBox="1"/>
-          <p:nvPr/>
-        </p:nvSpPr>
-        <p:spPr>
-          <a:xfrm>
-            <a:off x="9674352" y="5129783"/>
-            <a:ext cx="1938528" cy="228600"/>
-          </a:xfrm>
-          <a:prstGeom prst="rect">
-            <a:avLst/>
-          </a:prstGeom>
-          <a:noFill/>
-        </p:spPr>
-        <p:txBody>
-          <a:bodyPr wrap="square">
-            <a:spAutoFit/>
-          </a:bodyPr>
-          <a:lstStyle/>
-          <a:p>
-            <a:pPr algn="l"/>
-            <a:r>
-              <a:rPr sz="1000" b="1">
-                <a:solidFill>
-                  <a:srgbClr val="69737D"/>
-                </a:solidFill>
-                <a:latin typeface="Inter"/>
-              </a:rPr>
-              <a:t>STATUS</a:t>
-            </a:r>
-          </a:p>
-        </p:txBody>
-      </p:sp>
-      <p:sp>
-        <p:nvSpPr>
-          <p:cNvPr id="26" name="TextBox 25"/>
-          <p:cNvSpPr txBox="1"/>
-          <p:nvPr/>
-        </p:nvSpPr>
-        <p:spPr>
-          <a:xfrm>
-            <a:off x="9674352" y="5349240"/>
-            <a:ext cx="1938528" cy="457200"/>
-          </a:xfrm>
-          <a:prstGeom prst="rect">
-            <a:avLst/>
-          </a:prstGeom>
-          <a:noFill/>
-        </p:spPr>
-        <p:txBody>
-          <a:bodyPr wrap="square">
-            <a:spAutoFit/>
-          </a:bodyPr>
-          <a:lstStyle/>
-          <a:p>
-            <a:pPr algn="l"/>
-            <a:r>
-              <a:rPr sz="2200" b="1">
-                <a:solidFill>
-                  <a:srgbClr val="62D99A"/>
-                </a:solidFill>
-                <a:latin typeface="Inter"/>
-              </a:rPr>
-              <a:t>FINAL</a:t>
-            </a:r>
-          </a:p>
-        </p:txBody>
-      </p:sp>
-      <p:sp>
-        <p:nvSpPr>
-          <p:cNvPr id="27" name="TextBox 26"/>
-          <p:cNvSpPr txBox="1"/>
-          <p:nvPr/>
-        </p:nvSpPr>
-        <p:spPr>
-          <a:xfrm>
-            <a:off x="9674352" y="5824728"/>
-            <a:ext cx="1938528" cy="228600"/>
-          </a:xfrm>
-          <a:prstGeom prst="rect">
-            <a:avLst/>
-          </a:prstGeom>
-          <a:noFill/>
-        </p:spPr>
-        <p:txBody>
-          <a:bodyPr wrap="square">
-            <a:spAutoFit/>
-          </a:bodyPr>
-          <a:lstStyle/>
-          <a:p>
-            <a:pPr algn="l"/>
-            <a:r>
-              <a:rPr sz="1000" b="0">
-                <a:solidFill>
-                  <a:srgbClr val="69737D"/>
-                </a:solidFill>
-                <a:latin typeface="Inter"/>
-              </a:rPr>
-              <a:t>переобучение запрещено</a:t>
+              <a:t>
+сдаём проверенный вариант, а не последний</a:t>
             </a:r>
           </a:p>
         </p:txBody>
@@ -8552,22 +7219,144 @@
       <p:grpSpPr/>
       <p:sp>
         <p:nvSpPr>
-          <p:cNvPr id="2" name="Rounded Rectangle 1"/>
+          <p:cNvPr id="2" name="TextBox 1"/>
+          <p:cNvSpPr txBox="1"/>
+          <p:nvPr/>
+        </p:nvSpPr>
+        <p:spPr>
+          <a:xfrm>
+            <a:off x="640080" y="274320"/>
+            <a:ext cx="4572000" cy="365760"/>
+          </a:xfrm>
+          <a:prstGeom prst="rect">
+            <a:avLst/>
+          </a:prstGeom>
+          <a:noFill/>
+        </p:spPr>
+        <p:txBody>
+          <a:bodyPr wrap="square">
+            <a:spAutoFit/>
+          </a:bodyPr>
+          <a:lstStyle/>
+          <a:p>
+            <a:pPr algn="l"/>
+            <a:r>
+              <a:rPr sz="1200" b="1">
+                <a:solidFill>
+                  <a:srgbClr val="7D8690"/>
+                </a:solidFill>
+                <a:latin typeface="Inter"/>
+              </a:rPr>
+              <a:t>07 / 10   </a:t>
+            </a:r>
+            <a:r>
+              <a:rPr sz="1200" b="1">
+                <a:solidFill>
+                  <a:srgbClr val="7D8690"/>
+                </a:solidFill>
+                <a:latin typeface="Inter"/>
+              </a:rPr>
+              <a:t>ЖИМ НОГАМИ · KOSMOHACK</a:t>
+            </a:r>
+          </a:p>
+        </p:txBody>
+      </p:sp>
+      <p:sp>
+        <p:nvSpPr>
+          <p:cNvPr id="3" name="Oval 2"/>
           <p:cNvSpPr/>
           <p:nvPr/>
         </p:nvSpPr>
         <p:spPr>
           <a:xfrm>
-            <a:off x="5074920" y="228600"/>
-            <a:ext cx="2057400" cy="685800"/>
+            <a:off x="11612880" y="384048"/>
+            <a:ext cx="128016" cy="128016"/>
+          </a:xfrm>
+          <a:prstGeom prst="ellipse">
+            <a:avLst/>
+          </a:prstGeom>
+          <a:solidFill>
+            <a:srgbClr val="62D99A"/>
+          </a:solidFill>
+          <a:ln>
+            <a:noFill/>
+          </a:ln>
+        </p:spPr>
+        <p:style>
+          <a:lnRef idx="1">
+            <a:schemeClr val="accent1"/>
+          </a:lnRef>
+          <a:fillRef idx="3">
+            <a:schemeClr val="accent1"/>
+          </a:fillRef>
+          <a:effectRef idx="2">
+            <a:schemeClr val="accent1"/>
+          </a:effectRef>
+          <a:fontRef idx="minor">
+            <a:schemeClr val="lt1"/>
+          </a:fontRef>
+        </p:style>
+        <p:txBody>
+          <a:bodyPr rtlCol="0" anchor="ctr"/>
+          <a:lstStyle/>
+          <a:p>
+            <a:pPr algn="ctr"/>
+          </a:p>
+        </p:txBody>
+      </p:sp>
+      <p:sp>
+        <p:nvSpPr>
+          <p:cNvPr id="4" name="TextBox 3"/>
+          <p:cNvSpPr txBox="1"/>
+          <p:nvPr/>
+        </p:nvSpPr>
+        <p:spPr>
+          <a:xfrm>
+            <a:off x="640080" y="822960"/>
+            <a:ext cx="10881360" cy="1188720"/>
+          </a:xfrm>
+          <a:prstGeom prst="rect">
+            <a:avLst/>
+          </a:prstGeom>
+          <a:noFill/>
+        </p:spPr>
+        <p:txBody>
+          <a:bodyPr wrap="square">
+            <a:spAutoFit/>
+          </a:bodyPr>
+          <a:lstStyle/>
+          <a:p>
+            <a:pPr algn="l"/>
+            <a:r>
+              <a:rPr sz="4000" b="1">
+                <a:solidFill>
+                  <a:srgbClr val="F2F4F5"/>
+                </a:solidFill>
+                <a:latin typeface="Inter"/>
+              </a:rPr>
+              <a:t>Итог метрики: 0.654</a:t>
+            </a:r>
+          </a:p>
+        </p:txBody>
+      </p:sp>
+      <p:sp>
+        <p:nvSpPr>
+          <p:cNvPr id="5" name="Rounded Rectangle 4"/>
+          <p:cNvSpPr/>
+          <p:nvPr/>
+        </p:nvSpPr>
+        <p:spPr>
+          <a:xfrm>
+            <a:off x="640080" y="2286000"/>
+            <a:ext cx="10881360" cy="1463040"/>
           </a:xfrm>
           <a:prstGeom prst="roundRect">
             <a:avLst>
-              <a:gd name="adj" fmla="val 9000"/>
+              <a:gd name="adj" fmla="val 7000"/>
             </a:avLst>
           </a:prstGeom>
           <a:solidFill>
-            <a:srgbClr val="0A0E12"/>
+            <a:srgbClr val="0D1217"/>
           </a:solidFill>
           <a:ln w="12700">
             <a:solidFill>
@@ -8599,14 +7388,59 @@
       </p:sp>
       <p:sp>
         <p:nvSpPr>
-          <p:cNvPr id="3" name="Oval 2"/>
+          <p:cNvPr id="6" name="TextBox 5"/>
+          <p:cNvSpPr txBox="1"/>
+          <p:nvPr/>
+        </p:nvSpPr>
+        <p:spPr>
+          <a:xfrm>
+            <a:off x="914400" y="2468880"/>
+            <a:ext cx="10332720" cy="1097280"/>
+          </a:xfrm>
+          <a:prstGeom prst="rect">
+            <a:avLst/>
+          </a:prstGeom>
+          <a:noFill/>
+        </p:spPr>
+        <p:txBody>
+          <a:bodyPr wrap="square">
+            <a:spAutoFit/>
+          </a:bodyPr>
+          <a:lstStyle/>
+          <a:p>
+            <a:pPr algn="l"/>
+            <a:r>
+              <a:rPr sz="2700" b="1">
+                <a:solidFill>
+                  <a:srgbClr val="F2F4F5"/>
+                </a:solidFill>
+                <a:latin typeface="Inter"/>
+              </a:rPr>
+              <a:t>0.35 × 0.8434  +  0.35 × 0.5239  +  0.30 × 0.5430  =  0.654</a:t>
+            </a:r>
+            <a:r>
+              <a:rPr sz="1600" b="0">
+                <a:solidFill>
+                  <a:srgbClr val="7D8690"/>
+                </a:solidFill>
+                <a:latin typeface="Inter"/>
+              </a:rPr>
+              <a:t>
+micro-pool по всем пикселям — устойчиво к редкости горения</a:t>
+            </a:r>
+          </a:p>
+        </p:txBody>
+      </p:sp>
+      <p:sp>
+        <p:nvSpPr>
+          <p:cNvPr id="7" name="Oval 6"/>
           <p:cNvSpPr/>
           <p:nvPr/>
         </p:nvSpPr>
         <p:spPr>
           <a:xfrm>
-            <a:off x="5257800" y="457200"/>
-            <a:ext cx="128016" cy="128016"/>
+            <a:off x="914400" y="4334255"/>
+            <a:ext cx="155448" cy="155448"/>
           </a:xfrm>
           <a:prstGeom prst="ellipse">
             <a:avLst/>
@@ -8642,14 +7476,14 @@
       </p:sp>
       <p:sp>
         <p:nvSpPr>
-          <p:cNvPr id="4" name="TextBox 3"/>
+          <p:cNvPr id="8" name="TextBox 7"/>
           <p:cNvSpPr txBox="1"/>
           <p:nvPr/>
         </p:nvSpPr>
         <p:spPr>
           <a:xfrm>
-            <a:off x="5486400" y="256032"/>
-            <a:ext cx="1463040" cy="320040"/>
+            <a:off x="1280160" y="4133087"/>
+            <a:ext cx="10332720" cy="822960"/>
           </a:xfrm>
           <a:prstGeom prst="rect">
             <a:avLst/>
@@ -8662,77 +7496,38 @@
           </a:bodyPr>
           <a:lstStyle/>
           <a:p>
-            <a:pPr algn="ctr"/>
-            <a:r>
-              <a:rPr sz="1400" b="1">
+            <a:pPr algn="l"/>
+            <a:r>
+              <a:rPr sz="1900" b="0">
                 <a:solidFill>
                   <a:srgbClr val="F2F4F5"/>
                 </a:solidFill>
                 <a:latin typeface="Inter"/>
               </a:rPr>
-              <a:t>ЖИМ НОГАМИ</a:t>
-            </a:r>
-          </a:p>
-        </p:txBody>
-      </p:sp>
-      <p:sp>
-        <p:nvSpPr>
-          <p:cNvPr id="5" name="TextBox 4"/>
-          <p:cNvSpPr txBox="1"/>
-          <p:nvPr/>
-        </p:nvSpPr>
-        <p:spPr>
-          <a:xfrm>
-            <a:off x="5486400" y="530352"/>
-            <a:ext cx="1463040" cy="274320"/>
-          </a:xfrm>
-          <a:prstGeom prst="rect">
-            <a:avLst/>
-          </a:prstGeom>
-          <a:noFill/>
-        </p:spPr>
-        <p:txBody>
-          <a:bodyPr wrap="square">
-            <a:spAutoFit/>
-          </a:bodyPr>
-          <a:lstStyle/>
-          <a:p>
-            <a:pPr algn="ctr"/>
-            <a:r>
-              <a:rPr sz="800" b="0">
-                <a:solidFill>
-                  <a:srgbClr val="69737D"/>
-                </a:solidFill>
-                <a:latin typeface="Inter"/>
-              </a:rPr>
-              <a:t>FIRE MONITOR · KOSMOHACK 2026</a:t>
-            </a:r>
-          </a:p>
-        </p:txBody>
-      </p:sp>
-      <p:sp>
-        <p:nvSpPr>
-          <p:cNvPr id="6" name="Rounded Rectangle 5"/>
+              <a:t>447 строк = шаблону · RLE валиден · NaN 0 · пересечений 0</a:t>
+            </a:r>
+          </a:p>
+        </p:txBody>
+      </p:sp>
+      <p:sp>
+        <p:nvSpPr>
+          <p:cNvPr id="9" name="Oval 8"/>
           <p:cNvSpPr/>
           <p:nvPr/>
         </p:nvSpPr>
         <p:spPr>
           <a:xfrm>
-            <a:off x="320040" y="1188720"/>
-            <a:ext cx="11521440" cy="4846320"/>
-          </a:xfrm>
-          <a:prstGeom prst="roundRect">
-            <a:avLst>
-              <a:gd name="adj" fmla="val 9000"/>
-            </a:avLst>
+            <a:off x="914400" y="5157216"/>
+            <a:ext cx="155448" cy="155448"/>
+          </a:xfrm>
+          <a:prstGeom prst="ellipse">
+            <a:avLst/>
           </a:prstGeom>
           <a:solidFill>
-            <a:srgbClr val="0A0E12"/>
+            <a:srgbClr val="F2F4F5"/>
           </a:solidFill>
-          <a:ln w="12700">
-            <a:solidFill>
-              <a:srgbClr val="2A333D"/>
-            </a:solidFill>
+          <a:ln>
+            <a:noFill/>
           </a:ln>
         </p:spPr>
         <p:style>
@@ -8759,14 +7554,14 @@
       </p:sp>
       <p:sp>
         <p:nvSpPr>
-          <p:cNvPr id="7" name="TextBox 6"/>
+          <p:cNvPr id="10" name="TextBox 9"/>
           <p:cNvSpPr txBox="1"/>
           <p:nvPr/>
         </p:nvSpPr>
         <p:spPr>
           <a:xfrm>
-            <a:off x="594360" y="1325880"/>
-            <a:ext cx="914400" cy="274320"/>
+            <a:off x="1280160" y="4956048"/>
+            <a:ext cx="10332720" cy="822960"/>
           </a:xfrm>
           <a:prstGeom prst="rect">
             <a:avLst/>
@@ -8781,400 +7576,13 @@
           <a:p>
             <a:pPr algn="l"/>
             <a:r>
-              <a:rPr sz="1100" b="1">
-                <a:solidFill>
-                  <a:srgbClr val="69737D"/>
+              <a:rPr sz="1900" b="0">
+                <a:solidFill>
+                  <a:srgbClr val="F2F4F5"/>
                 </a:solidFill>
                 <a:latin typeface="Inter"/>
               </a:rPr>
-              <a:t>05</a:t>
-            </a:r>
-          </a:p>
-        </p:txBody>
-      </p:sp>
-      <p:sp>
-        <p:nvSpPr>
-          <p:cNvPr id="8" name="TextBox 7"/>
-          <p:cNvSpPr txBox="1"/>
-          <p:nvPr/>
-        </p:nvSpPr>
-        <p:spPr>
-          <a:xfrm>
-            <a:off x="594360" y="1572768"/>
-            <a:ext cx="10972800" cy="457200"/>
-          </a:xfrm>
-          <a:prstGeom prst="rect">
-            <a:avLst/>
-          </a:prstGeom>
-          <a:noFill/>
-        </p:spPr>
-        <p:txBody>
-          <a:bodyPr wrap="square">
-            <a:spAutoFit/>
-          </a:bodyPr>
-          <a:lstStyle/>
-          <a:p>
-            <a:pPr algn="l"/>
-            <a:r>
-              <a:rPr sz="2100" b="1">
-                <a:solidFill>
-                  <a:srgbClr val="F2F4F5"/>
-                </a:solidFill>
-                <a:latin typeface="Inter"/>
-              </a:rPr>
-              <a:t>Сервис · Вариант A</a:t>
-            </a:r>
-          </a:p>
-        </p:txBody>
-      </p:sp>
-      <p:sp>
-        <p:nvSpPr>
-          <p:cNvPr id="9" name="Oval 8"/>
-          <p:cNvSpPr/>
-          <p:nvPr/>
-        </p:nvSpPr>
-        <p:spPr>
-          <a:xfrm>
-            <a:off x="594360" y="2331720"/>
-            <a:ext cx="137160" cy="137160"/>
-          </a:xfrm>
-          <a:prstGeom prst="ellipse">
-            <a:avLst/>
-          </a:prstGeom>
-          <a:solidFill>
-            <a:srgbClr val="62D99A"/>
-          </a:solidFill>
-          <a:ln>
-            <a:noFill/>
-          </a:ln>
-        </p:spPr>
-        <p:style>
-          <a:lnRef idx="1">
-            <a:schemeClr val="accent1"/>
-          </a:lnRef>
-          <a:fillRef idx="3">
-            <a:schemeClr val="accent1"/>
-          </a:fillRef>
-          <a:effectRef idx="2">
-            <a:schemeClr val="accent1"/>
-          </a:effectRef>
-          <a:fontRef idx="minor">
-            <a:schemeClr val="lt1"/>
-          </a:fontRef>
-        </p:style>
-        <p:txBody>
-          <a:bodyPr rtlCol="0" anchor="ctr"/>
-          <a:lstStyle/>
-          <a:p>
-            <a:pPr algn="ctr"/>
-          </a:p>
-        </p:txBody>
-      </p:sp>
-      <p:sp>
-        <p:nvSpPr>
-          <p:cNvPr id="10" name="TextBox 9"/>
-          <p:cNvSpPr txBox="1"/>
-          <p:nvPr/>
-        </p:nvSpPr>
-        <p:spPr>
-          <a:xfrm>
-            <a:off x="868680" y="2194560"/>
-            <a:ext cx="10698480" cy="594360"/>
-          </a:xfrm>
-          <a:prstGeom prst="rect">
-            <a:avLst/>
-          </a:prstGeom>
-          <a:noFill/>
-        </p:spPr>
-        <p:txBody>
-          <a:bodyPr wrap="square">
-            <a:spAutoFit/>
-          </a:bodyPr>
-          <a:lstStyle/>
-          <a:p>
-            <a:pPr algn="l"/>
-            <a:r>
-              <a:rPr sz="1400" b="1">
-                <a:solidFill>
-                  <a:srgbClr val="F2F4F5"/>
-                </a:solidFill>
-                <a:latin typeface="Inter"/>
-              </a:rPr>
-              <a:t>GET /v1/health</a:t>
-            </a:r>
-            <a:r>
-              <a:rPr sz="1100" b="0">
-                <a:solidFill>
-                  <a:srgbClr val="69737D"/>
-                </a:solidFill>
-                <a:latin typeface="Inter"/>
-              </a:rPr>
-              <a:t>
-{status: ok} — бейдж в шапке</a:t>
-            </a:r>
-          </a:p>
-        </p:txBody>
-      </p:sp>
-      <p:sp>
-        <p:nvSpPr>
-          <p:cNvPr id="11" name="Oval 10"/>
-          <p:cNvSpPr/>
-          <p:nvPr/>
-        </p:nvSpPr>
-        <p:spPr>
-          <a:xfrm>
-            <a:off x="594360" y="3200400"/>
-            <a:ext cx="137160" cy="137160"/>
-          </a:xfrm>
-          <a:prstGeom prst="ellipse">
-            <a:avLst/>
-          </a:prstGeom>
-          <a:solidFill>
-            <a:srgbClr val="EF5B5B"/>
-          </a:solidFill>
-          <a:ln>
-            <a:noFill/>
-          </a:ln>
-        </p:spPr>
-        <p:style>
-          <a:lnRef idx="1">
-            <a:schemeClr val="accent1"/>
-          </a:lnRef>
-          <a:fillRef idx="3">
-            <a:schemeClr val="accent1"/>
-          </a:fillRef>
-          <a:effectRef idx="2">
-            <a:schemeClr val="accent1"/>
-          </a:effectRef>
-          <a:fontRef idx="minor">
-            <a:schemeClr val="lt1"/>
-          </a:fontRef>
-        </p:style>
-        <p:txBody>
-          <a:bodyPr rtlCol="0" anchor="ctr"/>
-          <a:lstStyle/>
-          <a:p>
-            <a:pPr algn="ctr"/>
-          </a:p>
-        </p:txBody>
-      </p:sp>
-      <p:sp>
-        <p:nvSpPr>
-          <p:cNvPr id="12" name="TextBox 11"/>
-          <p:cNvSpPr txBox="1"/>
-          <p:nvPr/>
-        </p:nvSpPr>
-        <p:spPr>
-          <a:xfrm>
-            <a:off x="868680" y="3063240"/>
-            <a:ext cx="10698480" cy="594360"/>
-          </a:xfrm>
-          <a:prstGeom prst="rect">
-            <a:avLst/>
-          </a:prstGeom>
-          <a:noFill/>
-        </p:spPr>
-        <p:txBody>
-          <a:bodyPr wrap="square">
-            <a:spAutoFit/>
-          </a:bodyPr>
-          <a:lstStyle/>
-          <a:p>
-            <a:pPr algn="l"/>
-            <a:r>
-              <a:rPr sz="1400" b="1">
-                <a:solidFill>
-                  <a:srgbClr val="F2F4F5"/>
-                </a:solidFill>
-                <a:latin typeface="Inter"/>
-              </a:rPr>
-              <a:t>GET fires / burned</a:t>
-            </a:r>
-            <a:r>
-              <a:rPr sz="1100" b="0">
-                <a:solidFill>
-                  <a:srgbClr val="69737D"/>
-                </a:solidFill>
-                <a:latin typeface="Inter"/>
-              </a:rPr>
-              <a:t>
-точки · полигоны {severity, area_ha} · shp-zip</a:t>
-            </a:r>
-          </a:p>
-        </p:txBody>
-      </p:sp>
-      <p:sp>
-        <p:nvSpPr>
-          <p:cNvPr id="13" name="Oval 12"/>
-          <p:cNvSpPr/>
-          <p:nvPr/>
-        </p:nvSpPr>
-        <p:spPr>
-          <a:xfrm>
-            <a:off x="594360" y="4069079"/>
-            <a:ext cx="137160" cy="137160"/>
-          </a:xfrm>
-          <a:prstGeom prst="ellipse">
-            <a:avLst/>
-          </a:prstGeom>
-          <a:solidFill>
-            <a:srgbClr val="E6C65C"/>
-          </a:solidFill>
-          <a:ln>
-            <a:noFill/>
-          </a:ln>
-        </p:spPr>
-        <p:style>
-          <a:lnRef idx="1">
-            <a:schemeClr val="accent1"/>
-          </a:lnRef>
-          <a:fillRef idx="3">
-            <a:schemeClr val="accent1"/>
-          </a:fillRef>
-          <a:effectRef idx="2">
-            <a:schemeClr val="accent1"/>
-          </a:effectRef>
-          <a:fontRef idx="minor">
-            <a:schemeClr val="lt1"/>
-          </a:fontRef>
-        </p:style>
-        <p:txBody>
-          <a:bodyPr rtlCol="0" anchor="ctr"/>
-          <a:lstStyle/>
-          <a:p>
-            <a:pPr algn="ctr"/>
-          </a:p>
-        </p:txBody>
-      </p:sp>
-      <p:sp>
-        <p:nvSpPr>
-          <p:cNvPr id="14" name="TextBox 13"/>
-          <p:cNvSpPr txBox="1"/>
-          <p:nvPr/>
-        </p:nvSpPr>
-        <p:spPr>
-          <a:xfrm>
-            <a:off x="868680" y="3931920"/>
-            <a:ext cx="10698480" cy="594360"/>
-          </a:xfrm>
-          <a:prstGeom prst="rect">
-            <a:avLst/>
-          </a:prstGeom>
-          <a:noFill/>
-        </p:spPr>
-        <p:txBody>
-          <a:bodyPr wrap="square">
-            <a:spAutoFit/>
-          </a:bodyPr>
-          <a:lstStyle/>
-          <a:p>
-            <a:pPr algn="l"/>
-            <a:r>
-              <a:rPr sz="1400" b="1">
-                <a:solidFill>
-                  <a:srgbClr val="F2F4F5"/>
-                </a:solidFill>
-                <a:latin typeface="Inter"/>
-              </a:rPr>
-              <a:t>GET /v1/analytics</a:t>
-            </a:r>
-            <a:r>
-              <a:rPr sz="1100" b="0">
-                <a:solidFill>
-                  <a:srgbClr val="69737D"/>
-                </a:solidFill>
-                <a:latin typeface="Inter"/>
-              </a:rPr>
-              <a:t>
-справка: га + распределение — нижняя плашка</a:t>
-            </a:r>
-          </a:p>
-        </p:txBody>
-      </p:sp>
-      <p:sp>
-        <p:nvSpPr>
-          <p:cNvPr id="15" name="Oval 14"/>
-          <p:cNvSpPr/>
-          <p:nvPr/>
-        </p:nvSpPr>
-        <p:spPr>
-          <a:xfrm>
-            <a:off x="594360" y="4937759"/>
-            <a:ext cx="137160" cy="137160"/>
-          </a:xfrm>
-          <a:prstGeom prst="ellipse">
-            <a:avLst/>
-          </a:prstGeom>
-          <a:solidFill>
-            <a:srgbClr val="FF6B35"/>
-          </a:solidFill>
-          <a:ln>
-            <a:noFill/>
-          </a:ln>
-        </p:spPr>
-        <p:style>
-          <a:lnRef idx="1">
-            <a:schemeClr val="accent1"/>
-          </a:lnRef>
-          <a:fillRef idx="3">
-            <a:schemeClr val="accent1"/>
-          </a:fillRef>
-          <a:effectRef idx="2">
-            <a:schemeClr val="accent1"/>
-          </a:effectRef>
-          <a:fontRef idx="minor">
-            <a:schemeClr val="lt1"/>
-          </a:fontRef>
-        </p:style>
-        <p:txBody>
-          <a:bodyPr rtlCol="0" anchor="ctr"/>
-          <a:lstStyle/>
-          <a:p>
-            <a:pPr algn="ctr"/>
-          </a:p>
-        </p:txBody>
-      </p:sp>
-      <p:sp>
-        <p:nvSpPr>
-          <p:cNvPr id="16" name="TextBox 15"/>
-          <p:cNvSpPr txBox="1"/>
-          <p:nvPr/>
-        </p:nvSpPr>
-        <p:spPr>
-          <a:xfrm>
-            <a:off x="868680" y="4800600"/>
-            <a:ext cx="10698480" cy="594360"/>
-          </a:xfrm>
-          <a:prstGeom prst="rect">
-            <a:avLst/>
-          </a:prstGeom>
-          <a:noFill/>
-        </p:spPr>
-        <p:txBody>
-          <a:bodyPr wrap="square">
-            <a:spAutoFit/>
-          </a:bodyPr>
-          <a:lstStyle/>
-          <a:p>
-            <a:pPr algn="l"/>
-            <a:r>
-              <a:rPr sz="1400" b="1">
-                <a:solidFill>
-                  <a:srgbClr val="F2F4F5"/>
-                </a:solidFill>
-                <a:latin typeface="Inter"/>
-              </a:rPr>
-              <a:t>POST */query</a:t>
-            </a:r>
-            <a:r>
-              <a:rPr sz="1100" b="0">
-                <a:solidFill>
-                  <a:srgbClr val="69737D"/>
-                </a:solidFill>
-                <a:latin typeface="Inter"/>
-              </a:rPr>
-              <a:t>
-тот же ответ по полигону · CORS localhost</a:t>
+              <a:t>Два прогона — побайтово идентичны · md5 зафиксирован</a:t>
             </a:r>
           </a:p>
         </p:txBody>
@@ -9257,48 +7665,45 @@
       <p:grpSpPr/>
       <p:sp>
         <p:nvSpPr>
-          <p:cNvPr id="2" name="Rounded Rectangle 1"/>
-          <p:cNvSpPr/>
-          <p:nvPr/>
-        </p:nvSpPr>
-        <p:spPr>
-          <a:xfrm>
-            <a:off x="5074920" y="228600"/>
-            <a:ext cx="2057400" cy="685800"/>
-          </a:xfrm>
-          <a:prstGeom prst="roundRect">
-            <a:avLst>
-              <a:gd name="adj" fmla="val 9000"/>
-            </a:avLst>
-          </a:prstGeom>
-          <a:solidFill>
-            <a:srgbClr val="0A0E12"/>
-          </a:solidFill>
-          <a:ln w="12700">
-            <a:solidFill>
-              <a:srgbClr val="2A333D"/>
-            </a:solidFill>
-          </a:ln>
-        </p:spPr>
-        <p:style>
-          <a:lnRef idx="1">
-            <a:schemeClr val="accent1"/>
-          </a:lnRef>
-          <a:fillRef idx="3">
-            <a:schemeClr val="accent1"/>
-          </a:fillRef>
-          <a:effectRef idx="2">
-            <a:schemeClr val="accent1"/>
-          </a:effectRef>
-          <a:fontRef idx="minor">
-            <a:schemeClr val="lt1"/>
-          </a:fontRef>
-        </p:style>
-        <p:txBody>
-          <a:bodyPr rtlCol="0" anchor="ctr"/>
-          <a:lstStyle/>
-          <a:p>
-            <a:pPr algn="ctr"/>
+          <p:cNvPr id="2" name="TextBox 1"/>
+          <p:cNvSpPr txBox="1"/>
+          <p:nvPr/>
+        </p:nvSpPr>
+        <p:spPr>
+          <a:xfrm>
+            <a:off x="640080" y="274320"/>
+            <a:ext cx="4572000" cy="365760"/>
+          </a:xfrm>
+          <a:prstGeom prst="rect">
+            <a:avLst/>
+          </a:prstGeom>
+          <a:noFill/>
+        </p:spPr>
+        <p:txBody>
+          <a:bodyPr wrap="square">
+            <a:spAutoFit/>
+          </a:bodyPr>
+          <a:lstStyle/>
+          <a:p>
+            <a:pPr algn="l"/>
+            <a:r>
+              <a:rPr sz="1200" b="1">
+                <a:solidFill>
+                  <a:srgbClr val="7D8690"/>
+                </a:solidFill>
+                <a:latin typeface="Inter"/>
+              </a:rPr>
+              <a:t>09 / 10   </a:t>
+            </a:r>
+            <a:r>
+              <a:rPr sz="1200" b="1">
+                <a:solidFill>
+                  <a:srgbClr val="7D8690"/>
+                </a:solidFill>
+                <a:latin typeface="Inter"/>
+              </a:rPr>
+              <a:t>ЖИМ НОГАМИ · KOSMOHACK</a:t>
+            </a:r>
           </a:p>
         </p:txBody>
       </p:sp>
@@ -9310,7 +7715,7 @@
         </p:nvSpPr>
         <p:spPr>
           <a:xfrm>
-            <a:off x="5257800" y="457200"/>
+            <a:off x="11612880" y="384048"/>
             <a:ext cx="128016" cy="128016"/>
           </a:xfrm>
           <a:prstGeom prst="ellipse">
@@ -9353,8 +7758,8 @@
         </p:nvSpPr>
         <p:spPr>
           <a:xfrm>
-            <a:off x="5486400" y="256032"/>
-            <a:ext cx="1463040" cy="320040"/>
+            <a:off x="640080" y="822960"/>
+            <a:ext cx="10881360" cy="1188720"/>
           </a:xfrm>
           <a:prstGeom prst="rect">
             <a:avLst/>
@@ -9367,181 +7772,29 @@
           </a:bodyPr>
           <a:lstStyle/>
           <a:p>
-            <a:pPr algn="ctr"/>
-            <a:r>
-              <a:rPr sz="1400" b="1">
+            <a:pPr algn="l"/>
+            <a:r>
+              <a:rPr sz="4000" b="1">
                 <a:solidFill>
                   <a:srgbClr val="F2F4F5"/>
                 </a:solidFill>
                 <a:latin typeface="Inter"/>
               </a:rPr>
-              <a:t>ЖИМ НОГАМИ</a:t>
-            </a:r>
-          </a:p>
-        </p:txBody>
-      </p:sp>
-      <p:sp>
-        <p:nvSpPr>
-          <p:cNvPr id="5" name="TextBox 4"/>
-          <p:cNvSpPr txBox="1"/>
-          <p:nvPr/>
-        </p:nvSpPr>
-        <p:spPr>
-          <a:xfrm>
-            <a:off x="5486400" y="530352"/>
-            <a:ext cx="1463040" cy="274320"/>
-          </a:xfrm>
-          <a:prstGeom prst="rect">
-            <a:avLst/>
-          </a:prstGeom>
-          <a:noFill/>
-        </p:spPr>
-        <p:txBody>
-          <a:bodyPr wrap="square">
-            <a:spAutoFit/>
-          </a:bodyPr>
-          <a:lstStyle/>
-          <a:p>
-            <a:pPr algn="ctr"/>
-            <a:r>
-              <a:rPr sz="800" b="0">
-                <a:solidFill>
-                  <a:srgbClr val="69737D"/>
-                </a:solidFill>
-                <a:latin typeface="Inter"/>
-              </a:rPr>
-              <a:t>FIRE MONITOR · KOSMOHACK 2026</a:t>
-            </a:r>
-          </a:p>
-        </p:txBody>
-      </p:sp>
-      <p:sp>
-        <p:nvSpPr>
-          <p:cNvPr id="6" name="Rounded Rectangle 5"/>
+              <a:t>Запуск — одна команда. У вас тоже заведётся</a:t>
+            </a:r>
+          </a:p>
+        </p:txBody>
+      </p:sp>
+      <p:sp>
+        <p:nvSpPr>
+          <p:cNvPr id="5" name="Oval 4"/>
           <p:cNvSpPr/>
           <p:nvPr/>
         </p:nvSpPr>
         <p:spPr>
           <a:xfrm>
-            <a:off x="320040" y="1188720"/>
-            <a:ext cx="5852160" cy="4480560"/>
-          </a:xfrm>
-          <a:prstGeom prst="roundRect">
-            <a:avLst>
-              <a:gd name="adj" fmla="val 9000"/>
-            </a:avLst>
-          </a:prstGeom>
-          <a:solidFill>
-            <a:srgbClr val="0A0E12"/>
-          </a:solidFill>
-          <a:ln w="12700">
-            <a:solidFill>
-              <a:srgbClr val="2A333D"/>
-            </a:solidFill>
-          </a:ln>
-        </p:spPr>
-        <p:style>
-          <a:lnRef idx="1">
-            <a:schemeClr val="accent1"/>
-          </a:lnRef>
-          <a:fillRef idx="3">
-            <a:schemeClr val="accent1"/>
-          </a:fillRef>
-          <a:effectRef idx="2">
-            <a:schemeClr val="accent1"/>
-          </a:effectRef>
-          <a:fontRef idx="minor">
-            <a:schemeClr val="lt1"/>
-          </a:fontRef>
-        </p:style>
-        <p:txBody>
-          <a:bodyPr rtlCol="0" anchor="ctr"/>
-          <a:lstStyle/>
-          <a:p>
-            <a:pPr algn="ctr"/>
-          </a:p>
-        </p:txBody>
-      </p:sp>
-      <p:sp>
-        <p:nvSpPr>
-          <p:cNvPr id="7" name="TextBox 6"/>
-          <p:cNvSpPr txBox="1"/>
-          <p:nvPr/>
-        </p:nvSpPr>
-        <p:spPr>
-          <a:xfrm>
-            <a:off x="594360" y="1325880"/>
-            <a:ext cx="914400" cy="274320"/>
-          </a:xfrm>
-          <a:prstGeom prst="rect">
-            <a:avLst/>
-          </a:prstGeom>
-          <a:noFill/>
-        </p:spPr>
-        <p:txBody>
-          <a:bodyPr wrap="square">
-            <a:spAutoFit/>
-          </a:bodyPr>
-          <a:lstStyle/>
-          <a:p>
-            <a:pPr algn="l"/>
-            <a:r>
-              <a:rPr sz="1100" b="1">
-                <a:solidFill>
-                  <a:srgbClr val="69737D"/>
-                </a:solidFill>
-                <a:latin typeface="Inter"/>
-              </a:rPr>
-              <a:t>06</a:t>
-            </a:r>
-          </a:p>
-        </p:txBody>
-      </p:sp>
-      <p:sp>
-        <p:nvSpPr>
-          <p:cNvPr id="8" name="TextBox 7"/>
-          <p:cNvSpPr txBox="1"/>
-          <p:nvPr/>
-        </p:nvSpPr>
-        <p:spPr>
-          <a:xfrm>
-            <a:off x="594360" y="1572768"/>
-            <a:ext cx="5303520" cy="457200"/>
-          </a:xfrm>
-          <a:prstGeom prst="rect">
-            <a:avLst/>
-          </a:prstGeom>
-          <a:noFill/>
-        </p:spPr>
-        <p:txBody>
-          <a:bodyPr wrap="square">
-            <a:spAutoFit/>
-          </a:bodyPr>
-          <a:lstStyle/>
-          <a:p>
-            <a:pPr algn="l"/>
-            <a:r>
-              <a:rPr sz="2100" b="1">
-                <a:solidFill>
-                  <a:srgbClr val="F2F4F5"/>
-                </a:solidFill>
-                <a:latin typeface="Inter"/>
-              </a:rPr>
-              <a:t>Запуск у оргов</a:t>
-            </a:r>
-          </a:p>
-        </p:txBody>
-      </p:sp>
-      <p:sp>
-        <p:nvSpPr>
-          <p:cNvPr id="9" name="Oval 8"/>
-          <p:cNvSpPr/>
-          <p:nvPr/>
-        </p:nvSpPr>
-        <p:spPr>
-          <a:xfrm>
-            <a:off x="594360" y="2331720"/>
-            <a:ext cx="137160" cy="137160"/>
+            <a:off x="914400" y="2596896"/>
+            <a:ext cx="155448" cy="155448"/>
           </a:xfrm>
           <a:prstGeom prst="ellipse">
             <a:avLst/>
@@ -9577,14 +7830,14 @@
       </p:sp>
       <p:sp>
         <p:nvSpPr>
-          <p:cNvPr id="10" name="TextBox 9"/>
+          <p:cNvPr id="6" name="TextBox 5"/>
           <p:cNvSpPr txBox="1"/>
           <p:nvPr/>
         </p:nvSpPr>
         <p:spPr>
           <a:xfrm>
-            <a:off x="868680" y="2194560"/>
-            <a:ext cx="5029200" cy="594360"/>
+            <a:off x="1280160" y="2395728"/>
+            <a:ext cx="10332720" cy="822960"/>
           </a:xfrm>
           <a:prstGeom prst="rect">
             <a:avLst/>
@@ -9599,43 +7852,43 @@
           <a:p>
             <a:pPr algn="l"/>
             <a:r>
-              <a:rPr sz="1400" b="1">
+              <a:rPr sz="2100" b="0">
                 <a:solidFill>
                   <a:srgbClr val="F2F4F5"/>
                 </a:solidFill>
                 <a:latin typeface="Inter"/>
               </a:rPr>
-              <a:t>Веса в репо</a:t>
-            </a:r>
-            <a:r>
-              <a:rPr sz="1100" b="0">
-                <a:solidFill>
-                  <a:srgbClr val="69737D"/>
+              <a:t>Веса лежат в репозитории</a:t>
+            </a:r>
+            <a:r>
+              <a:rPr sz="1500" b="0">
+                <a:solidFill>
+                  <a:srgbClr val="7D8690"/>
                 </a:solidFill>
                 <a:latin typeface="Inter"/>
               </a:rPr>
               <a:t>
-af.pt + bs.pt + thresh — докачивать нечего</a:t>
-            </a:r>
-          </a:p>
-        </p:txBody>
-      </p:sp>
-      <p:sp>
-        <p:nvSpPr>
-          <p:cNvPr id="11" name="Oval 10"/>
+докачивать нечего · pip install + requirements.lock</a:t>
+            </a:r>
+          </a:p>
+        </p:txBody>
+      </p:sp>
+      <p:sp>
+        <p:nvSpPr>
+          <p:cNvPr id="7" name="Oval 6"/>
           <p:cNvSpPr/>
           <p:nvPr/>
         </p:nvSpPr>
         <p:spPr>
           <a:xfrm>
-            <a:off x="594360" y="3108960"/>
-            <a:ext cx="137160" cy="137160"/>
+            <a:off x="914400" y="3602736"/>
+            <a:ext cx="155448" cy="155448"/>
           </a:xfrm>
           <a:prstGeom prst="ellipse">
             <a:avLst/>
           </a:prstGeom>
           <a:solidFill>
-            <a:srgbClr val="E6C65C"/>
+            <a:srgbClr val="F2F4F5"/>
           </a:solidFill>
           <a:ln>
             <a:noFill/>
@@ -9665,14 +7918,14 @@
       </p:sp>
       <p:sp>
         <p:nvSpPr>
-          <p:cNvPr id="12" name="TextBox 11"/>
+          <p:cNvPr id="8" name="TextBox 7"/>
           <p:cNvSpPr txBox="1"/>
           <p:nvPr/>
         </p:nvSpPr>
         <p:spPr>
           <a:xfrm>
-            <a:off x="868680" y="2971800"/>
-            <a:ext cx="5029200" cy="594360"/>
+            <a:off x="1280160" y="3401568"/>
+            <a:ext cx="10332720" cy="822960"/>
           </a:xfrm>
           <a:prstGeom prst="rect">
             <a:avLst/>
@@ -9687,37 +7940,37 @@
           <a:p>
             <a:pPr algn="l"/>
             <a:r>
-              <a:rPr sz="1400" b="1">
+              <a:rPr sz="2100" b="0">
                 <a:solidFill>
                   <a:srgbClr val="F2F4F5"/>
                 </a:solidFill>
                 <a:latin typeface="Inter"/>
               </a:rPr>
-              <a:t>pip install</a:t>
-            </a:r>
-            <a:r>
-              <a:rPr sz="1100" b="0">
-                <a:solidFill>
-                  <a:srgbClr val="69737D"/>
+              <a:t>inference.py --data-dir --output</a:t>
+            </a:r>
+            <a:r>
+              <a:rPr sz="1500" b="0">
+                <a:solidFill>
+                  <a:srgbClr val="7D8690"/>
                 </a:solidFill>
                 <a:latin typeface="Inter"/>
               </a:rPr>
               <a:t>
-torch cu128/cpu + requirements.lock</a:t>
-            </a:r>
-          </a:p>
-        </p:txBody>
-      </p:sp>
-      <p:sp>
-        <p:nvSpPr>
-          <p:cNvPr id="13" name="Oval 12"/>
+~28 секунд на GPU · на CPU дольше, результат тот же</a:t>
+            </a:r>
+          </a:p>
+        </p:txBody>
+      </p:sp>
+      <p:sp>
+        <p:nvSpPr>
+          <p:cNvPr id="9" name="Oval 8"/>
           <p:cNvSpPr/>
           <p:nvPr/>
         </p:nvSpPr>
         <p:spPr>
           <a:xfrm>
-            <a:off x="594360" y="3886200"/>
-            <a:ext cx="137160" cy="137160"/>
+            <a:off x="914400" y="4608576"/>
+            <a:ext cx="155448" cy="155448"/>
           </a:xfrm>
           <a:prstGeom prst="ellipse">
             <a:avLst/>
@@ -9753,14 +8006,14 @@
       </p:sp>
       <p:sp>
         <p:nvSpPr>
-          <p:cNvPr id="14" name="TextBox 13"/>
+          <p:cNvPr id="10" name="TextBox 9"/>
           <p:cNvSpPr txBox="1"/>
           <p:nvPr/>
         </p:nvSpPr>
         <p:spPr>
           <a:xfrm>
-            <a:off x="868680" y="3749040"/>
-            <a:ext cx="5029200" cy="594360"/>
+            <a:off x="1280160" y="4407408"/>
+            <a:ext cx="10332720" cy="822960"/>
           </a:xfrm>
           <a:prstGeom prst="rect">
             <a:avLst/>
@@ -9775,191 +8028,23 @@
           <a:p>
             <a:pPr algn="l"/>
             <a:r>
-              <a:rPr sz="1400" b="1">
+              <a:rPr sz="2100" b="0">
                 <a:solidFill>
                   <a:srgbClr val="F2F4F5"/>
                 </a:solidFill>
                 <a:latin typeface="Inter"/>
               </a:rPr>
-              <a:t>Одна команда</a:t>
-            </a:r>
-            <a:r>
-              <a:rPr sz="1100" b="0">
-                <a:solidFill>
-                  <a:srgbClr val="69737D"/>
+              <a:t>Сервис: 3 GET + 3 POST · geojson/json/shp</a:t>
+            </a:r>
+            <a:r>
+              <a:rPr sz="1500" b="0">
+                <a:solidFill>
+                  <a:srgbClr val="7D8690"/>
                 </a:solidFill>
                 <a:latin typeface="Inter"/>
               </a:rPr>
               <a:t>
-inference.py --data-dir --output (~28 сек)</a:t>
-            </a:r>
-          </a:p>
-        </p:txBody>
-      </p:sp>
-      <p:sp>
-        <p:nvSpPr>
-          <p:cNvPr id="15" name="Oval 14"/>
-          <p:cNvSpPr/>
-          <p:nvPr/>
-        </p:nvSpPr>
-        <p:spPr>
-          <a:xfrm>
-            <a:off x="594360" y="4663440"/>
-            <a:ext cx="137160" cy="137160"/>
-          </a:xfrm>
-          <a:prstGeom prst="ellipse">
-            <a:avLst/>
-          </a:prstGeom>
-          <a:solidFill>
-            <a:srgbClr val="EF5B5B"/>
-          </a:solidFill>
-          <a:ln>
-            <a:noFill/>
-          </a:ln>
-        </p:spPr>
-        <p:style>
-          <a:lnRef idx="1">
-            <a:schemeClr val="accent1"/>
-          </a:lnRef>
-          <a:fillRef idx="3">
-            <a:schemeClr val="accent1"/>
-          </a:fillRef>
-          <a:effectRef idx="2">
-            <a:schemeClr val="accent1"/>
-          </a:effectRef>
-          <a:fontRef idx="minor">
-            <a:schemeClr val="lt1"/>
-          </a:fontRef>
-        </p:style>
-        <p:txBody>
-          <a:bodyPr rtlCol="0" anchor="ctr"/>
-          <a:lstStyle/>
-          <a:p>
-            <a:pPr algn="ctr"/>
-          </a:p>
-        </p:txBody>
-      </p:sp>
-      <p:sp>
-        <p:nvSpPr>
-          <p:cNvPr id="16" name="TextBox 15"/>
-          <p:cNvSpPr txBox="1"/>
-          <p:nvPr/>
-        </p:nvSpPr>
-        <p:spPr>
-          <a:xfrm>
-            <a:off x="868680" y="4526280"/>
-            <a:ext cx="5029200" cy="594360"/>
-          </a:xfrm>
-          <a:prstGeom prst="rect">
-            <a:avLst/>
-          </a:prstGeom>
-          <a:noFill/>
-        </p:spPr>
-        <p:txBody>
-          <a:bodyPr wrap="square">
-            <a:spAutoFit/>
-          </a:bodyPr>
-          <a:lstStyle/>
-          <a:p>
-            <a:pPr algn="l"/>
-            <a:r>
-              <a:rPr sz="1400" b="1">
-                <a:solidFill>
-                  <a:srgbClr val="F2F4F5"/>
-                </a:solidFill>
-                <a:latin typeface="Inter"/>
-              </a:rPr>
-              <a:t>Сервис</a:t>
-            </a:r>
-            <a:r>
-              <a:rPr sz="1100" b="0">
-                <a:solidFill>
-                  <a:srgbClr val="69737D"/>
-                </a:solidFill>
-                <a:latin typeface="Inter"/>
-              </a:rPr>
-              <a:t>
-uvicorn service.app · фронт localhost:8000</a:t>
-            </a:r>
-          </a:p>
-        </p:txBody>
-      </p:sp>
-      <p:sp>
-        <p:nvSpPr>
-          <p:cNvPr id="17" name="Rounded Rectangle 16"/>
-          <p:cNvSpPr/>
-          <p:nvPr/>
-        </p:nvSpPr>
-        <p:spPr>
-          <a:xfrm>
-            <a:off x="320040" y="5852160"/>
-            <a:ext cx="5852160" cy="548640"/>
-          </a:xfrm>
-          <a:prstGeom prst="roundRect">
-            <a:avLst>
-              <a:gd name="adj" fmla="val 25000"/>
-            </a:avLst>
-          </a:prstGeom>
-          <a:solidFill>
-            <a:srgbClr val="FF6B35"/>
-          </a:solidFill>
-          <a:ln>
-            <a:noFill/>
-          </a:ln>
-        </p:spPr>
-        <p:style>
-          <a:lnRef idx="1">
-            <a:schemeClr val="accent1"/>
-          </a:lnRef>
-          <a:fillRef idx="3">
-            <a:schemeClr val="accent1"/>
-          </a:fillRef>
-          <a:effectRef idx="2">
-            <a:schemeClr val="accent1"/>
-          </a:effectRef>
-          <a:fontRef idx="minor">
-            <a:schemeClr val="lt1"/>
-          </a:fontRef>
-        </p:style>
-        <p:txBody>
-          <a:bodyPr rtlCol="0" anchor="ctr"/>
-          <a:lstStyle/>
-          <a:p>
-            <a:pPr algn="ctr"/>
-          </a:p>
-        </p:txBody>
-      </p:sp>
-      <p:sp>
-        <p:nvSpPr>
-          <p:cNvPr id="18" name="TextBox 17"/>
-          <p:cNvSpPr txBox="1"/>
-          <p:nvPr/>
-        </p:nvSpPr>
-        <p:spPr>
-          <a:xfrm>
-            <a:off x="320040" y="5943600"/>
-            <a:ext cx="5852160" cy="411480"/>
-          </a:xfrm>
-          <a:prstGeom prst="rect">
-            <a:avLst/>
-          </a:prstGeom>
-          <a:noFill/>
-        </p:spPr>
-        <p:txBody>
-          <a:bodyPr wrap="square">
-            <a:spAutoFit/>
-          </a:bodyPr>
-          <a:lstStyle/>
-          <a:p>
-            <a:pPr algn="ctr"/>
-            <a:r>
-              <a:rPr sz="1500" b="1">
-                <a:solidFill>
-                  <a:srgbClr val="F2F4F5"/>
-                </a:solidFill>
-                <a:latin typeface="Inter"/>
-              </a:rPr>
-              <a:t>git clone → pip install → inference.py   →</a:t>
+фронт на localhost:8000 · демо-серия в репо</a:t>
             </a:r>
           </a:p>
         </p:txBody>
@@ -10290,4 +8375,324 @@
   </a:objectDefaults>
   <a:extraClrSchemeLst/>
 </a:theme>
+</file>
+
+<file path=ppt/theme/theme2.xml><?xml version="1.0" encoding="utf-8"?>
+<a:theme xmlns:a="http://schemas.openxmlformats.org/drawingml/2006/main" name="Office Theme">
+  <a:themeElements>
+    <a:clrScheme name="Office">
+      <a:dk1>
+        <a:sysClr val="windowText" lastClr="000000"/>
+      </a:dk1>
+      <a:lt1>
+        <a:sysClr val="window" lastClr="FFFFFF"/>
+      </a:lt1>
+      <a:dk2>
+        <a:srgbClr val="1F497D"/>
+      </a:dk2>
+      <a:lt2>
+        <a:srgbClr val="EEECE1"/>
+      </a:lt2>
+      <a:accent1>
+        <a:srgbClr val="4F81BD"/>
+      </a:accent1>
+      <a:accent2>
+        <a:srgbClr val="C0504D"/>
+      </a:accent2>
+      <a:accent3>
+        <a:srgbClr val="9BBB59"/>
+      </a:accent3>
+      <a:accent4>
+        <a:srgbClr val="8064A2"/>
+      </a:accent4>
+      <a:accent5>
+        <a:srgbClr val="4BACC6"/>
+      </a:accent5>
+      <a:accent6>
+        <a:srgbClr val="F79646"/>
+      </a:accent6>
+      <a:hlink>
+        <a:srgbClr val="0000FF"/>
+      </a:hlink>
+      <a:folHlink>
+        <a:srgbClr val="800080"/>
+      </a:folHlink>
+    </a:clrScheme>
+    <a:fontScheme name="Office">
+      <a:majorFont>
+        <a:latin typeface="Calibri"/>
+        <a:ea typeface=""/>
+        <a:cs typeface=""/>
+        <a:font script="Jpan" typeface="ＭＳ Ｐゴシック"/>
+        <a:font script="Hang" typeface="맑은 고딕"/>
+        <a:font script="Hans" typeface="宋体"/>
+        <a:font script="Hant" typeface="新細明體"/>
+        <a:font script="Arab" typeface="Times New Roman"/>
+        <a:font script="Hebr" typeface="Times New Roman"/>
+        <a:font script="Thai" typeface="Angsana New"/>
+        <a:font script="Ethi" typeface="Nyala"/>
+        <a:font script="Beng" typeface="Vrinda"/>
+        <a:font script="Gujr" typeface="Shruti"/>
+        <a:font script="Khmr" typeface="MoolBoran"/>
+        <a:font script="Knda" typeface="Tunga"/>
+        <a:font script="Guru" typeface="Raavi"/>
+        <a:font script="Cans" typeface="Euphemia"/>
+        <a:font script="Cher" typeface="Plantagenet Cherokee"/>
+        <a:font script="Yiii" typeface="Microsoft Yi Baiti"/>
+        <a:font script="Tibt" typeface="Microsoft Himalaya"/>
+        <a:font script="Thaa" typeface="MV Boli"/>
+        <a:font script="Deva" typeface="Mangal"/>
+        <a:font script="Telu" typeface="Gautami"/>
+        <a:font script="Taml" typeface="Latha"/>
+        <a:font script="Syrc" typeface="Estrangelo Edessa"/>
+        <a:font script="Orya" typeface="Kalinga"/>
+        <a:font script="Mlym" typeface="Kartika"/>
+        <a:font script="Laoo" typeface="DokChampa"/>
+        <a:font script="Sinh" typeface="Iskoola Pota"/>
+        <a:font script="Mong" typeface="Mongolian Baiti"/>
+        <a:font script="Viet" typeface="Times New Roman"/>
+        <a:font script="Uigh" typeface="Microsoft Uighur"/>
+        <a:font script="Geor" typeface="Sylfaen"/>
+      </a:majorFont>
+      <a:minorFont>
+        <a:latin typeface="Calibri"/>
+        <a:ea typeface=""/>
+        <a:cs typeface=""/>
+        <a:font script="Jpan" typeface="ＭＳ Ｐゴシック"/>
+        <a:font script="Hang" typeface="맑은 고딕"/>
+        <a:font script="Hans" typeface="宋体"/>
+        <a:font script="Hant" typeface="新細明體"/>
+        <a:font script="Arab" typeface="Arial"/>
+        <a:font script="Hebr" typeface="Arial"/>
+        <a:font script="Thai" typeface="Cordia New"/>
+        <a:font script="Ethi" typeface="Nyala"/>
+        <a:font script="Beng" typeface="Vrinda"/>
+        <a:font script="Gujr" typeface="Shruti"/>
+        <a:font script="Khmr" typeface="DaunPenh"/>
+        <a:font script="Knda" typeface="Tunga"/>
+        <a:font script="Guru" typeface="Raavi"/>
+        <a:font script="Cans" typeface="Euphemia"/>
+        <a:font script="Cher" typeface="Plantagenet Cherokee"/>
+        <a:font script="Yiii" typeface="Microsoft Yi Baiti"/>
+        <a:font script="Tibt" typeface="Microsoft Himalaya"/>
+        <a:font script="Thaa" typeface="MV Boli"/>
+        <a:font script="Deva" typeface="Mangal"/>
+        <a:font script="Telu" typeface="Gautami"/>
+        <a:font script="Taml" typeface="Latha"/>
+        <a:font script="Syrc" typeface="Estrangelo Edessa"/>
+        <a:font script="Orya" typeface="Kalinga"/>
+        <a:font script="Mlym" typeface="Kartika"/>
+        <a:font script="Laoo" typeface="DokChampa"/>
+        <a:font script="Sinh" typeface="Iskoola Pota"/>
+        <a:font script="Mong" typeface="Mongolian Baiti"/>
+        <a:font script="Viet" typeface="Arial"/>
+        <a:font script="Uigh" typeface="Microsoft Uighur"/>
+        <a:font script="Geor" typeface="Sylfaen"/>
+      </a:minorFont>
+    </a:fontScheme>
+    <a:fmtScheme name="Office">
+      <a:fillStyleLst>
+        <a:solidFill>
+          <a:schemeClr val="phClr"/>
+        </a:solidFill>
+        <a:gradFill rotWithShape="1">
+          <a:gsLst>
+            <a:gs pos="0">
+              <a:schemeClr val="phClr">
+                <a:tint val="50000"/>
+                <a:satMod val="300000"/>
+              </a:schemeClr>
+            </a:gs>
+            <a:gs pos="35000">
+              <a:schemeClr val="phClr">
+                <a:tint val="37000"/>
+                <a:satMod val="300000"/>
+              </a:schemeClr>
+            </a:gs>
+            <a:gs pos="100000">
+              <a:schemeClr val="phClr">
+                <a:tint val="15000"/>
+                <a:satMod val="350000"/>
+              </a:schemeClr>
+            </a:gs>
+          </a:gsLst>
+          <a:lin ang="16200000" scaled="1"/>
+        </a:gradFill>
+        <a:gradFill rotWithShape="1">
+          <a:gsLst>
+            <a:gs pos="0">
+              <a:schemeClr val="phClr">
+                <a:tint val="100000"/>
+                <a:shade val="100000"/>
+                <a:satMod val="130000"/>
+              </a:schemeClr>
+            </a:gs>
+            <a:gs pos="100000">
+              <a:schemeClr val="phClr">
+                <a:tint val="50000"/>
+                <a:shade val="100000"/>
+                <a:satMod val="350000"/>
+              </a:schemeClr>
+            </a:gs>
+          </a:gsLst>
+          <a:lin ang="16200000" scaled="0"/>
+        </a:gradFill>
+      </a:fillStyleLst>
+      <a:lnStyleLst>
+        <a:ln w="9525" cap="flat" cmpd="sng" algn="ctr">
+          <a:solidFill>
+            <a:schemeClr val="phClr">
+              <a:shade val="95000"/>
+              <a:satMod val="105000"/>
+            </a:schemeClr>
+          </a:solidFill>
+          <a:prstDash val="solid"/>
+        </a:ln>
+        <a:ln w="25400" cap="flat" cmpd="sng" algn="ctr">
+          <a:solidFill>
+            <a:schemeClr val="phClr"/>
+          </a:solidFill>
+          <a:prstDash val="solid"/>
+        </a:ln>
+        <a:ln w="38100" cap="flat" cmpd="sng" algn="ctr">
+          <a:solidFill>
+            <a:schemeClr val="phClr"/>
+          </a:solidFill>
+          <a:prstDash val="solid"/>
+        </a:ln>
+      </a:lnStyleLst>
+      <a:effectStyleLst>
+        <a:effectStyle>
+          <a:effectLst>
+            <a:outerShdw blurRad="40000" dist="20000" dir="5400000" rotWithShape="0">
+              <a:srgbClr val="000000">
+                <a:alpha val="38000"/>
+              </a:srgbClr>
+            </a:outerShdw>
+          </a:effectLst>
+        </a:effectStyle>
+        <a:effectStyle>
+          <a:effectLst>
+            <a:outerShdw blurRad="40000" dist="23000" dir="5400000" rotWithShape="0">
+              <a:srgbClr val="000000">
+                <a:alpha val="35000"/>
+              </a:srgbClr>
+            </a:outerShdw>
+          </a:effectLst>
+        </a:effectStyle>
+        <a:effectStyle>
+          <a:effectLst>
+            <a:outerShdw blurRad="40000" dist="23000" dir="5400000" rotWithShape="0">
+              <a:srgbClr val="000000">
+                <a:alpha val="35000"/>
+              </a:srgbClr>
+            </a:outerShdw>
+          </a:effectLst>
+          <a:scene3d>
+            <a:camera prst="orthographicFront">
+              <a:rot lat="0" lon="0" rev="0"/>
+            </a:camera>
+            <a:lightRig rig="threePt" dir="t">
+              <a:rot lat="0" lon="0" rev="1200000"/>
+            </a:lightRig>
+          </a:scene3d>
+          <a:sp3d>
+            <a:bevelT w="63500" h="25400"/>
+          </a:sp3d>
+        </a:effectStyle>
+      </a:effectStyleLst>
+      <a:bgFillStyleLst>
+        <a:solidFill>
+          <a:schemeClr val="phClr"/>
+        </a:solidFill>
+        <a:gradFill rotWithShape="1">
+          <a:gsLst>
+            <a:gs pos="0">
+              <a:schemeClr val="phClr">
+                <a:tint val="40000"/>
+                <a:satMod val="350000"/>
+              </a:schemeClr>
+            </a:gs>
+            <a:gs pos="40000">
+              <a:schemeClr val="phClr">
+                <a:tint val="45000"/>
+                <a:shade val="99000"/>
+                <a:satMod val="350000"/>
+              </a:schemeClr>
+            </a:gs>
+            <a:gs pos="100000">
+              <a:schemeClr val="phClr">
+                <a:shade val="20000"/>
+                <a:satMod val="255000"/>
+              </a:schemeClr>
+            </a:gs>
+          </a:gsLst>
+          <a:path path="circle">
+            <a:fillToRect l="50000" t="-80000" r="50000" b="180000"/>
+          </a:path>
+        </a:gradFill>
+        <a:gradFill rotWithShape="1">
+          <a:gsLst>
+            <a:gs pos="0">
+              <a:schemeClr val="phClr">
+                <a:tint val="80000"/>
+                <a:satMod val="300000"/>
+              </a:schemeClr>
+            </a:gs>
+            <a:gs pos="100000">
+              <a:schemeClr val="phClr">
+                <a:shade val="30000"/>
+                <a:satMod val="200000"/>
+              </a:schemeClr>
+            </a:gs>
+          </a:gsLst>
+          <a:path path="circle">
+            <a:fillToRect l="50000" t="50000" r="50000" b="50000"/>
+          </a:path>
+        </a:gradFill>
+      </a:bgFillStyleLst>
+    </a:fmtScheme>
+  </a:themeElements>
+  <a:objectDefaults>
+    <a:spDef>
+      <a:spPr/>
+      <a:bodyPr/>
+      <a:lstStyle/>
+      <a:style>
+        <a:lnRef idx="1">
+          <a:schemeClr val="accent1"/>
+        </a:lnRef>
+        <a:fillRef idx="3">
+          <a:schemeClr val="accent1"/>
+        </a:fillRef>
+        <a:effectRef idx="2">
+          <a:schemeClr val="accent1"/>
+        </a:effectRef>
+        <a:fontRef idx="minor">
+          <a:schemeClr val="lt1"/>
+        </a:fontRef>
+      </a:style>
+    </a:spDef>
+    <a:lnDef>
+      <a:spPr/>
+      <a:bodyPr/>
+      <a:lstStyle/>
+      <a:style>
+        <a:lnRef idx="2">
+          <a:schemeClr val="accent1"/>
+        </a:lnRef>
+        <a:fillRef idx="0">
+          <a:schemeClr val="accent1"/>
+        </a:fillRef>
+        <a:effectRef idx="1">
+          <a:schemeClr val="accent1"/>
+        </a:effectRef>
+        <a:fontRef idx="minor">
+          <a:schemeClr val="tx1"/>
+        </a:fontRef>
+      </a:style>
+    </a:lnDef>
+  </a:objectDefaults>
+  <a:extraClrSchemeLst/>
+</a:theme>
 </file>
--- a/docs/slides-deck.pptx
+++ b/docs/slides-deck.pptx
@@ -511,7 +511,7 @@
           <a:lstStyle/>
           <a:p>
             <a:r>
-              <a:t>Открываем спокойно: кто мы, что построили, главная цифра. Score 0.654 — валидный воспроизводимый результат. Дальше — как пришли.</a:t>
+              <a:t>Сразу показываем что готово, без прелюдий.</a:t>
             </a:r>
           </a:p>
         </p:txBody>
@@ -581,7 +581,7 @@
           <a:lstStyle/>
           <a:p>
             <a:r>
-              <a:t>Финал: коротко поблагодарить, предложить вопросы. Не оправдываться за 0.654 — подавать как честный инженерный результат.</a:t>
+              <a:t>Коротко и уверенно. Дальше — вопросы и живое демо.</a:t>
             </a:r>
           </a:p>
         </p:txBody>
@@ -651,7 +651,7 @@
           <a:lstStyle/>
           <a:p>
             <a:r>
-              <a:t>Мотивация: дежурным нужны чистые точки без ложных выездов, региону — контуры гарей для восстановления леса и расчёта ущерба.</a:t>
+              <a:t>EDA за полминуты CPU-проходом. Тут видно что мы реально смотрели в данные.</a:t>
             </a:r>
           </a:p>
         </p:txBody>
@@ -721,7 +721,7 @@
           <a:lstStyle/>
           <a:p>
             <a:r>
-              <a:t>Три выхода кейса. Подчеркнуть: всё считается автоматически, без ручных операций с растрами.</a:t>
+              <a:t>AF — наша сильная сторона. Картинка справа — предсказание модели.</a:t>
             </a:r>
           </a:p>
         </p:txBody>
@@ -791,7 +791,7 @@
           <a:lstStyle/>
           <a:p>
             <a:r>
-              <a:t>Ключевое для жюри: честность протокола. Сплит без утечек, тест не трогаем руками, повторный прогон даёт тот же файл.</a:t>
+              <a:t>История про инженерную честность: убивать нерабочее — тоже работа.</a:t>
             </a:r>
           </a:p>
         </p:txBody>
@@ -861,7 +861,7 @@
           <a:lstStyle/>
           <a:p>
             <a:r>
-              <a:t>AF — сильная сторона. Ночной разрыв объяснить: ночью видны только тепловые каналы.</a:t>
+              <a:t>Цифры медленно. В топе чата 0.8+, но наш файл валиден и честен.</a:t>
             </a:r>
           </a:p>
         </p:txBody>
@@ -931,7 +931,7 @@
           <a:lstStyle/>
           <a:p>
             <a:r>
-              <a:t>Здесь показать инженерную зрелость: убивать нерабочие ветки — тоже результат. Пашня даёт ложные контуры — следующий шаг.</a:t>
+              <a:t>Пауза. Это не мокап — живой фронт на нашем API: 17 точек, контуры по степеням, справка.</a:t>
             </a:r>
           </a:p>
         </p:txBody>
@@ -1001,7 +1001,7 @@
           <a:lstStyle/>
           <a:p>
             <a:r>
-              <a:t>Цифры называть медленно. Акцент: файл валиден и воспроизводим — это дорогого стоит.</a:t>
+              <a:t>Слои выключаются, степени фильтруются, справка пересчитывается из слоёв.</a:t>
             </a:r>
           </a:p>
         </p:txBody>
@@ -1071,7 +1071,7 @@
           <a:lstStyle/>
           <a:p>
             <a:r>
-              <a:t>Пауза и показ: точки, полигоны по степеням, справка с гектарами. Если спросят про привязку — честно: demo-сетка, гео теста скрыто.</a:t>
+              <a:t>API делали под фронт, фронт — под жюри. Всё состыковано.</a:t>
             </a:r>
           </a:p>
         </p:txBody>
@@ -1141,7 +1141,7 @@
           <a:lstStyle/>
           <a:p>
             <a:r>
-              <a:t>Для оргов главное — воспроизводимость. Веса в репо, CPU-фолбэк, инструкция в README.</a:t>
+              <a:t>Оргам важно: воспроизводимость, CPU-фолбэк, инструкция в README.</a:t>
             </a:r>
           </a:p>
         </p:txBody>
@@ -4163,8 +4163,8 @@
         </p:nvSpPr>
         <p:spPr>
           <a:xfrm>
-            <a:off x="640080" y="457200"/>
-            <a:ext cx="10881360" cy="365760"/>
+            <a:off x="640080" y="548640"/>
+            <a:ext cx="10881360" cy="914400"/>
           </a:xfrm>
           <a:prstGeom prst="rect">
             <a:avLst/>
@@ -4179,85 +4179,71 @@
           <a:p>
             <a:pPr algn="l"/>
             <a:r>
-              <a:rPr sz="1400" b="1">
-                <a:solidFill>
-                  <a:srgbClr val="FF6B35"/>
-                </a:solidFill>
-                <a:latin typeface="Inter"/>
-              </a:rPr>
-              <a:t>КОСМОХАКАТОН 2026 · КЕЙС «МОНИТОРИНГ ПРИРОДНЫХ ПОЖАРОВ»</a:t>
-            </a:r>
-          </a:p>
-        </p:txBody>
-      </p:sp>
-      <p:sp>
-        <p:nvSpPr>
-          <p:cNvPr id="3" name="TextBox 2"/>
-          <p:cNvSpPr txBox="1"/>
-          <p:nvPr/>
-        </p:nvSpPr>
-        <p:spPr>
-          <a:xfrm>
-            <a:off x="640080" y="1005840"/>
-            <a:ext cx="10881360" cy="1280160"/>
-          </a:xfrm>
-          <a:prstGeom prst="rect">
-            <a:avLst/>
-          </a:prstGeom>
-          <a:noFill/>
-        </p:spPr>
-        <p:txBody>
-          <a:bodyPr wrap="square">
-            <a:spAutoFit/>
-          </a:bodyPr>
-          <a:lstStyle/>
-          <a:p>
-            <a:pPr algn="l"/>
-            <a:r>
-              <a:rPr sz="6400" b="1">
+              <a:rPr sz="6000" b="1">
                 <a:solidFill>
                   <a:srgbClr val="F2F4F5"/>
                 </a:solidFill>
                 <a:latin typeface="Inter"/>
               </a:rPr>
-              <a:t>Жим Ногами</a:t>
-            </a:r>
-            <a:r>
-              <a:rPr sz="2200" b="0">
+              <a:t>ЖИМ НОГАМИ</a:t>
+            </a:r>
+          </a:p>
+        </p:txBody>
+      </p:sp>
+      <p:sp>
+        <p:nvSpPr>
+          <p:cNvPr id="3" name="TextBox 2"/>
+          <p:cNvSpPr txBox="1"/>
+          <p:nvPr/>
+        </p:nvSpPr>
+        <p:spPr>
+          <a:xfrm>
+            <a:off x="640080" y="1737360"/>
+            <a:ext cx="10881360" cy="640080"/>
+          </a:xfrm>
+          <a:prstGeom prst="rect">
+            <a:avLst/>
+          </a:prstGeom>
+          <a:noFill/>
+        </p:spPr>
+        <p:txBody>
+          <a:bodyPr wrap="square">
+            <a:spAutoFit/>
+          </a:bodyPr>
+          <a:lstStyle/>
+          <a:p>
+            <a:pPr algn="l"/>
+            <a:r>
+              <a:rPr sz="2100" b="0">
                 <a:solidFill>
                   <a:srgbClr val="B8C0C8"/>
                 </a:solidFill>
                 <a:latin typeface="Inter"/>
               </a:rPr>
-              <a:t>
-Двухэтапный мониторинг пожаров по спутниковым данным</a:t>
-            </a:r>
-          </a:p>
-        </p:txBody>
-      </p:sp>
-      <p:sp>
-        <p:nvSpPr>
-          <p:cNvPr id="4" name="Rounded Rectangle 3"/>
+              <a:t>Мониторинг лесных пожаров: от сырых снимков до живой карты за один уикенд</a:t>
+            </a:r>
+          </a:p>
+        </p:txBody>
+      </p:sp>
+      <p:sp>
+        <p:nvSpPr>
+          <p:cNvPr id="4" name="Oval 3"/>
           <p:cNvSpPr/>
           <p:nvPr/>
         </p:nvSpPr>
         <p:spPr>
           <a:xfrm>
-            <a:off x="640080" y="3931920"/>
-            <a:ext cx="3657600" cy="1371600"/>
-          </a:xfrm>
-          <a:prstGeom prst="roundRect">
-            <a:avLst>
-              <a:gd name="adj" fmla="val 7000"/>
-            </a:avLst>
+            <a:off x="914400" y="2962656"/>
+            <a:ext cx="155448" cy="155448"/>
+          </a:xfrm>
+          <a:prstGeom prst="ellipse">
+            <a:avLst/>
           </a:prstGeom>
           <a:solidFill>
-            <a:srgbClr val="0D1217"/>
+            <a:srgbClr val="62D99A"/>
           </a:solidFill>
-          <a:ln w="12700">
-            <a:solidFill>
-              <a:srgbClr val="2A333D"/>
-            </a:solidFill>
+          <a:ln>
+            <a:noFill/>
           </a:ln>
         </p:spPr>
         <p:style>
@@ -4290,8 +4276,8 @@
         </p:nvSpPr>
         <p:spPr>
           <a:xfrm>
-            <a:off x="640080" y="4069080"/>
-            <a:ext cx="3657600" cy="1097280"/>
+            <a:off x="1280160" y="2761488"/>
+            <a:ext cx="10241280" cy="868680"/>
           </a:xfrm>
           <a:prstGeom prst="rect">
             <a:avLst/>
@@ -4304,42 +4290,48 @@
           </a:bodyPr>
           <a:lstStyle/>
           <a:p>
-            <a:pPr algn="ctr"/>
-            <a:r>
-              <a:rPr sz="4000" b="1">
+            <a:pPr algn="l"/>
+            <a:r>
+              <a:rPr sz="2100" b="0">
                 <a:solidFill>
-                  <a:srgbClr val="62D99A"/>
+                  <a:srgbClr val="F2F4F5"/>
                 </a:solidFill>
                 <a:latin typeface="Inter"/>
               </a:rPr>
-              <a:t>Score 0.654</a:t>
-            </a:r>
-          </a:p>
-        </p:txBody>
-      </p:sp>
-      <p:sp>
-        <p:nvSpPr>
-          <p:cNvPr id="6" name="Rounded Rectangle 5"/>
+              <a:t>Обучили две нейросети — детектор огня и картировальщик гарей</a:t>
+            </a:r>
+            <a:r>
+              <a:rPr sz="1400" b="0">
+                <a:solidFill>
+                  <a:srgbClr val="7D8690"/>
+                </a:solidFill>
+                <a:latin typeface="Inter"/>
+              </a:rPr>
+              <a:t>
+Score 0.654 · файл-ответ валиден и воспроизводим</a:t>
+            </a:r>
+          </a:p>
+        </p:txBody>
+      </p:sp>
+      <p:sp>
+        <p:nvSpPr>
+          <p:cNvPr id="6" name="Oval 5"/>
           <p:cNvSpPr/>
           <p:nvPr/>
         </p:nvSpPr>
         <p:spPr>
           <a:xfrm>
-            <a:off x="4480560" y="3931920"/>
-            <a:ext cx="3657600" cy="1371600"/>
-          </a:xfrm>
-          <a:prstGeom prst="roundRect">
-            <a:avLst>
-              <a:gd name="adj" fmla="val 7000"/>
-            </a:avLst>
+            <a:off x="914400" y="4059935"/>
+            <a:ext cx="155448" cy="155448"/>
+          </a:xfrm>
+          <a:prstGeom prst="ellipse">
+            <a:avLst/>
           </a:prstGeom>
           <a:solidFill>
-            <a:srgbClr val="0D1217"/>
+            <a:srgbClr val="FF6B35"/>
           </a:solidFill>
-          <a:ln w="12700">
-            <a:solidFill>
-              <a:srgbClr val="2A333D"/>
-            </a:solidFill>
+          <a:ln>
+            <a:noFill/>
           </a:ln>
         </p:spPr>
         <p:style>
@@ -4372,8 +4364,8 @@
         </p:nvSpPr>
         <p:spPr>
           <a:xfrm>
-            <a:off x="4480560" y="4069080"/>
-            <a:ext cx="3657600" cy="1097280"/>
+            <a:off x="1280160" y="3858768"/>
+            <a:ext cx="10241280" cy="868680"/>
           </a:xfrm>
           <a:prstGeom prst="rect">
             <a:avLst/>
@@ -4386,42 +4378,48 @@
           </a:bodyPr>
           <a:lstStyle/>
           <a:p>
-            <a:pPr algn="ctr"/>
-            <a:r>
-              <a:rPr sz="3000" b="1">
+            <a:pPr algn="l"/>
+            <a:r>
+              <a:rPr sz="2100" b="0">
                 <a:solidFill>
                   <a:srgbClr val="F2F4F5"/>
                 </a:solidFill>
                 <a:latin typeface="Inter"/>
               </a:rPr>
-              <a:t>submission FINAL</a:t>
-            </a:r>
-          </a:p>
-        </p:txBody>
-      </p:sp>
-      <p:sp>
-        <p:nvSpPr>
-          <p:cNvPr id="8" name="Rounded Rectangle 7"/>
+              <a:t>Подняли сервис и тёмную веб-карту с точками, контурами и справкой</a:t>
+            </a:r>
+            <a:r>
+              <a:rPr sz="1400" b="0">
+                <a:solidFill>
+                  <a:srgbClr val="7D8690"/>
+                </a:solidFill>
+                <a:latin typeface="Inter"/>
+              </a:rPr>
+              <a:t>
+то, что вы увидите дальше — работает прямо сейчас</a:t>
+            </a:r>
+          </a:p>
+        </p:txBody>
+      </p:sp>
+      <p:sp>
+        <p:nvSpPr>
+          <p:cNvPr id="8" name="Oval 7"/>
           <p:cNvSpPr/>
           <p:nvPr/>
         </p:nvSpPr>
         <p:spPr>
           <a:xfrm>
-            <a:off x="8321040" y="3931920"/>
-            <a:ext cx="3200400" cy="1371600"/>
-          </a:xfrm>
-          <a:prstGeom prst="roundRect">
-            <a:avLst>
-              <a:gd name="adj" fmla="val 7000"/>
-            </a:avLst>
+            <a:off x="914400" y="5157216"/>
+            <a:ext cx="155448" cy="155448"/>
+          </a:xfrm>
+          <a:prstGeom prst="ellipse">
+            <a:avLst/>
           </a:prstGeom>
           <a:solidFill>
-            <a:srgbClr val="0D1217"/>
+            <a:srgbClr val="F2F4F5"/>
           </a:solidFill>
-          <a:ln w="12700">
-            <a:solidFill>
-              <a:srgbClr val="2A333D"/>
-            </a:solidFill>
+          <a:ln>
+            <a:noFill/>
           </a:ln>
         </p:spPr>
         <p:style>
@@ -4454,8 +4452,8 @@
         </p:nvSpPr>
         <p:spPr>
           <a:xfrm>
-            <a:off x="8321040" y="4069080"/>
-            <a:ext cx="3200400" cy="1097280"/>
+            <a:off x="1280160" y="4956048"/>
+            <a:ext cx="10241280" cy="868680"/>
           </a:xfrm>
           <a:prstGeom prst="rect">
             <a:avLst/>
@@ -4468,15 +4466,25 @@
           </a:bodyPr>
           <a:lstStyle/>
           <a:p>
-            <a:pPr algn="ctr"/>
-            <a:r>
-              <a:rPr sz="3000" b="1">
+            <a:pPr algn="l"/>
+            <a:r>
+              <a:rPr sz="2100" b="0">
                 <a:solidFill>
-                  <a:srgbClr val="FF6B35"/>
+                  <a:srgbClr val="F2F4F5"/>
                 </a:solidFill>
                 <a:latin typeface="Inter"/>
               </a:rPr>
-              <a:t>сервис LIVE</a:t>
+              <a:t>Всё открыто: код, веса, отчёт</a:t>
+            </a:r>
+            <a:r>
+              <a:rPr sz="1400" b="0">
+                <a:solidFill>
+                  <a:srgbClr val="7D8690"/>
+                </a:solidFill>
+                <a:latin typeface="Inter"/>
+              </a:rPr>
+              <a:t>
+клонируй и запускай одной командой</a:t>
             </a:r>
           </a:p>
         </p:txBody>
@@ -4515,7 +4523,7 @@
         </p:nvSpPr>
         <p:spPr>
           <a:xfrm>
-            <a:off x="640080" y="1463040"/>
+            <a:off x="640080" y="1645920"/>
             <a:ext cx="10881360" cy="1097280"/>
           </a:xfrm>
           <a:prstGeom prst="rect">
@@ -4537,7 +4545,7 @@
                 </a:solidFill>
                 <a:latin typeface="Inter"/>
               </a:rPr>
-              <a:t>Жим Ногами</a:t>
+              <a:t>ЖИМ НОГАМИ</a:t>
             </a:r>
           </a:p>
         </p:txBody>
@@ -4550,7 +4558,7 @@
         </p:nvSpPr>
         <p:spPr>
           <a:xfrm>
-            <a:off x="640080" y="2834640"/>
+            <a:off x="640080" y="3017520"/>
             <a:ext cx="10881360" cy="731520"/>
           </a:xfrm>
           <a:prstGeom prst="rect">
@@ -4572,55 +4580,20 @@
                 </a:solidFill>
                 <a:latin typeface="Inter"/>
               </a:rPr>
-              <a:t>спасибо · вопросы — по коду в репозитории</a:t>
-            </a:r>
-          </a:p>
-        </p:txBody>
-      </p:sp>
-      <p:sp>
-        <p:nvSpPr>
-          <p:cNvPr id="4" name="TextBox 3"/>
-          <p:cNvSpPr txBox="1"/>
-          <p:nvPr/>
-        </p:nvSpPr>
-        <p:spPr>
-          <a:xfrm>
-            <a:off x="640080" y="3931920"/>
-            <a:ext cx="10881360" cy="548640"/>
-          </a:xfrm>
-          <a:prstGeom prst="rect">
-            <a:avLst/>
-          </a:prstGeom>
-          <a:noFill/>
-        </p:spPr>
-        <p:txBody>
-          <a:bodyPr wrap="square">
-            <a:spAutoFit/>
-          </a:bodyPr>
-          <a:lstStyle/>
-          <a:p>
-            <a:pPr algn="ctr"/>
-            <a:r>
-              <a:rPr sz="1600" b="0">
-                <a:solidFill>
-                  <a:srgbClr val="7D8690"/>
-                </a:solidFill>
-                <a:latin typeface="Inter"/>
-              </a:rPr>
-              <a:t>github.com/izislesar/kosmohack · gitverse · Score 0.654</a:t>
-            </a:r>
-          </a:p>
-        </p:txBody>
-      </p:sp>
-      <p:sp>
-        <p:nvSpPr>
-          <p:cNvPr id="5" name="Oval 4"/>
+              <a:t>код, веса и отчёт — в репозитории · вопросы?</a:t>
+            </a:r>
+          </a:p>
+        </p:txBody>
+      </p:sp>
+      <p:sp>
+        <p:nvSpPr>
+          <p:cNvPr id="4" name="Oval 3"/>
           <p:cNvSpPr/>
           <p:nvPr/>
         </p:nvSpPr>
         <p:spPr>
           <a:xfrm>
-            <a:off x="5989320" y="5120640"/>
+            <a:off x="5989320" y="4389120"/>
             <a:ext cx="182880" cy="182880"/>
           </a:xfrm>
           <a:prstGeom prst="ellipse">
@@ -4690,7 +4663,7 @@
         <p:spPr>
           <a:xfrm>
             <a:off x="640080" y="274320"/>
-            <a:ext cx="4572000" cy="365760"/>
+            <a:ext cx="10881360" cy="365760"/>
           </a:xfrm>
           <a:prstGeom prst="rect">
             <a:avLst/>
@@ -4704,15 +4677,6 @@
           <a:lstStyle/>
           <a:p>
             <a:pPr algn="l"/>
-            <a:r>
-              <a:rPr sz="1200" b="1">
-                <a:solidFill>
-                  <a:srgbClr val="7D8690"/>
-                </a:solidFill>
-                <a:latin typeface="Inter"/>
-              </a:rPr>
-              <a:t>02 / 10   </a:t>
-            </a:r>
             <a:r>
               <a:rPr sz="1200" b="1">
                 <a:solidFill>
@@ -4733,7 +4697,7 @@
         </p:nvSpPr>
         <p:spPr>
           <a:xfrm>
-            <a:off x="11612880" y="384048"/>
+            <a:off x="11658600" y="384048"/>
             <a:ext cx="128016" cy="128016"/>
           </a:xfrm>
           <a:prstGeom prst="ellipse">
@@ -4776,8 +4740,8 @@
         </p:nvSpPr>
         <p:spPr>
           <a:xfrm>
-            <a:off x="640080" y="822960"/>
-            <a:ext cx="10881360" cy="1188720"/>
+            <a:off x="640080" y="777240"/>
+            <a:ext cx="10881360" cy="1097280"/>
           </a:xfrm>
           <a:prstGeom prst="rect">
             <a:avLst/>
@@ -4792,14 +4756,13 @@
           <a:p>
             <a:pPr algn="l"/>
             <a:r>
-              <a:rPr sz="4000" b="1">
+              <a:rPr sz="3800" b="1">
                 <a:solidFill>
                   <a:srgbClr val="F2F4F5"/>
                 </a:solidFill>
                 <a:latin typeface="Inter"/>
               </a:rPr>
-              <a:t>Пожары видно из космоса.
-Беда — отличить их от заводов</a:t>
+              <a:t>Сначала — разобрали данные до винтика</a:t>
             </a:r>
           </a:p>
         </p:txBody>
@@ -4812,14 +4775,14 @@
         </p:nvSpPr>
         <p:spPr>
           <a:xfrm>
-            <a:off x="914400" y="2779776"/>
+            <a:off x="914400" y="2414016"/>
             <a:ext cx="155448" cy="155448"/>
           </a:xfrm>
           <a:prstGeom prst="ellipse">
             <a:avLst/>
           </a:prstGeom>
           <a:solidFill>
-            <a:srgbClr val="EF5B5B"/>
+            <a:srgbClr val="E6C65C"/>
           </a:solidFill>
           <a:ln>
             <a:noFill/>
@@ -4855,8 +4818,8 @@
         </p:nvSpPr>
         <p:spPr>
           <a:xfrm>
-            <a:off x="1280160" y="2578608"/>
-            <a:ext cx="10332720" cy="822960"/>
+            <a:off x="1280160" y="2212848"/>
+            <a:ext cx="10241280" cy="868680"/>
           </a:xfrm>
           <a:prstGeom prst="rect">
             <a:avLst/>
@@ -4871,23 +4834,23 @@
           <a:p>
             <a:pPr algn="l"/>
             <a:r>
-              <a:rPr sz="2200" b="0">
+              <a:rPr sz="2100" b="0">
                 <a:solidFill>
                   <a:srgbClr val="F2F4F5"/>
                 </a:solidFill>
                 <a:latin typeface="Inter"/>
               </a:rPr>
-              <a:t>Леса и степи горят с апреля по октябрь</a:t>
-            </a:r>
-            <a:r>
-              <a:rPr sz="1500" b="0">
+              <a:t>Огня в выборке 0.035% — 21 пиксель на снимок</a:t>
+            </a:r>
+            <a:r>
+              <a:rPr sz="1400" b="0">
                 <a:solidFill>
                   <a:srgbClr val="7D8690"/>
                 </a:solidFill>
                 <a:latin typeface="Inter"/>
               </a:rPr>
               <a:t>
-скорость степного фронта — километры в час</a:t>
+поэтому oversample, Dice+Focal и порог по micro-метрике, а не по средней</a:t>
             </a:r>
           </a:p>
         </p:txBody>
@@ -4900,14 +4863,14 @@
         </p:nvSpPr>
         <p:spPr>
           <a:xfrm>
-            <a:off x="914400" y="3831335"/>
+            <a:off x="914400" y="3557016"/>
             <a:ext cx="155448" cy="155448"/>
           </a:xfrm>
           <a:prstGeom prst="ellipse">
             <a:avLst/>
           </a:prstGeom>
           <a:solidFill>
-            <a:srgbClr val="E6C65C"/>
+            <a:srgbClr val="FF6B35"/>
           </a:solidFill>
           <a:ln>
             <a:noFill/>
@@ -4943,8 +4906,8 @@
         </p:nvSpPr>
         <p:spPr>
           <a:xfrm>
-            <a:off x="1280160" y="3630168"/>
-            <a:ext cx="10332720" cy="822960"/>
+            <a:off x="1280160" y="3355848"/>
+            <a:ext cx="10241280" cy="868680"/>
           </a:xfrm>
           <a:prstGeom prst="rect">
             <a:avLst/>
@@ -4959,23 +4922,23 @@
           <a:p>
             <a:pPr algn="l"/>
             <a:r>
-              <a:rPr sz="2200" b="0">
+              <a:rPr sz="2100" b="0">
                 <a:solidFill>
                   <a:srgbClr val="F2F4F5"/>
                 </a:solidFill>
                 <a:latin typeface="Inter"/>
               </a:rPr>
-              <a:t>Глобальные продукты врут</a:t>
-            </a:r>
-            <a:r>
-              <a:rPr sz="1500" b="0">
+              <a:t>Метаданным не поверили и правильно сделали</a:t>
+            </a:r>
+            <a:r>
+              <a:rPr sz="1400" b="0">
                 <a:solidFill>
                   <a:srgbClr val="7D8690"/>
                 </a:solidFill>
                 <a:latin typeface="Inter"/>
               </a:rPr>
               <a:t>
-FIRMS сыплет ложняками на факелах и ТЭЦ, пропускает малые очаги</a:t>
+облачность из таблицы не сошлась с растрами — взяли маску из снимков</a:t>
             </a:r>
           </a:p>
         </p:txBody>
@@ -4988,14 +4951,14 @@
         </p:nvSpPr>
         <p:spPr>
           <a:xfrm>
-            <a:off x="914400" y="4882895"/>
+            <a:off x="914400" y="4700016"/>
             <a:ext cx="155448" cy="155448"/>
           </a:xfrm>
           <a:prstGeom prst="ellipse">
             <a:avLst/>
           </a:prstGeom>
           <a:solidFill>
-            <a:srgbClr val="FF6B35"/>
+            <a:srgbClr val="62D99A"/>
           </a:solidFill>
           <a:ln>
             <a:noFill/>
@@ -5031,8 +4994,8 @@
         </p:nvSpPr>
         <p:spPr>
           <a:xfrm>
-            <a:off x="1280160" y="4681727"/>
-            <a:ext cx="10332720" cy="822960"/>
+            <a:off x="1280160" y="4498848"/>
+            <a:ext cx="10241280" cy="868680"/>
           </a:xfrm>
           <a:prstGeom prst="rect">
             <a:avLst/>
@@ -5047,23 +5010,23 @@
           <a:p>
             <a:pPr algn="l"/>
             <a:r>
-              <a:rPr sz="2200" b="0">
+              <a:rPr sz="2100" b="0">
                 <a:solidFill>
                   <a:srgbClr val="F2F4F5"/>
                 </a:solidFill>
                 <a:latin typeface="Inter"/>
               </a:rPr>
-              <a:t>Гари считают вручную</a:t>
-            </a:r>
-            <a:r>
-              <a:rPr sz="1500" b="0">
+              <a:t>Пороги гарей вывели под каждый ландшафт</a:t>
+            </a:r>
+            <a:r>
+              <a:rPr sz="1400" b="0">
                 <a:solidFill>
                   <a:srgbClr val="7D8690"/>
                 </a:solidFill>
                 <a:latin typeface="Inter"/>
               </a:rPr>
               <a:t>
-выборочно, с задержкой в недели, без единой методики</a:t>
+лес, степь, пашня и пойма горят по-разному — один порог врёт всем</a:t>
             </a:r>
           </a:p>
         </p:txBody>
@@ -5103,7 +5066,7 @@
         <p:spPr>
           <a:xfrm>
             <a:off x="640080" y="274320"/>
-            <a:ext cx="4572000" cy="365760"/>
+            <a:ext cx="10881360" cy="365760"/>
           </a:xfrm>
           <a:prstGeom prst="rect">
             <a:avLst/>
@@ -5117,15 +5080,6 @@
           <a:lstStyle/>
           <a:p>
             <a:pPr algn="l"/>
-            <a:r>
-              <a:rPr sz="1200" b="1">
-                <a:solidFill>
-                  <a:srgbClr val="7D8690"/>
-                </a:solidFill>
-                <a:latin typeface="Inter"/>
-              </a:rPr>
-              <a:t>03 / 10   </a:t>
-            </a:r>
             <a:r>
               <a:rPr sz="1200" b="1">
                 <a:solidFill>
@@ -5146,7 +5100,7 @@
         </p:nvSpPr>
         <p:spPr>
           <a:xfrm>
-            <a:off x="11612880" y="384048"/>
+            <a:off x="11658600" y="384048"/>
             <a:ext cx="128016" cy="128016"/>
           </a:xfrm>
           <a:prstGeom prst="ellipse">
@@ -5189,8 +5143,8 @@
         </p:nvSpPr>
         <p:spPr>
           <a:xfrm>
-            <a:off x="640080" y="822960"/>
-            <a:ext cx="10881360" cy="1188720"/>
+            <a:off x="640080" y="777240"/>
+            <a:ext cx="10881360" cy="1097280"/>
           </a:xfrm>
           <a:prstGeom prst="rect">
             <a:avLst/>
@@ -5205,40 +5159,36 @@
           <a:p>
             <a:pPr algn="l"/>
             <a:r>
-              <a:rPr sz="4000" b="1">
+              <a:rPr sz="3800" b="1">
                 <a:solidFill>
                   <a:srgbClr val="F2F4F5"/>
                 </a:solidFill>
                 <a:latin typeface="Inter"/>
               </a:rPr>
-              <a:t>Что требовалось построить</a:t>
-            </a:r>
-          </a:p>
-        </p:txBody>
-      </p:sp>
-      <p:sp>
-        <p:nvSpPr>
-          <p:cNvPr id="5" name="Rounded Rectangle 4"/>
+              <a:t>Детектор огня: 5 минут — и готово</a:t>
+            </a:r>
+          </a:p>
+        </p:txBody>
+      </p:sp>
+      <p:sp>
+        <p:nvSpPr>
+          <p:cNvPr id="5" name="Oval 4"/>
           <p:cNvSpPr/>
           <p:nvPr/>
         </p:nvSpPr>
         <p:spPr>
           <a:xfrm>
-            <a:off x="594360" y="2468880"/>
-            <a:ext cx="3474720" cy="2011680"/>
-          </a:xfrm>
-          <a:prstGeom prst="roundRect">
-            <a:avLst>
-              <a:gd name="adj" fmla="val 7000"/>
-            </a:avLst>
+            <a:off x="914400" y="2414016"/>
+            <a:ext cx="155448" cy="155448"/>
+          </a:xfrm>
+          <a:prstGeom prst="ellipse">
+            <a:avLst/>
           </a:prstGeom>
           <a:solidFill>
-            <a:srgbClr val="0D1217"/>
+            <a:srgbClr val="62D99A"/>
           </a:solidFill>
-          <a:ln w="12700">
-            <a:solidFill>
-              <a:srgbClr val="2A333D"/>
-            </a:solidFill>
+          <a:ln>
+            <a:noFill/>
           </a:ln>
         </p:spPr>
         <p:style>
@@ -5271,8 +5221,8 @@
         </p:nvSpPr>
         <p:spPr>
           <a:xfrm>
-            <a:off x="594360" y="2788920"/>
-            <a:ext cx="3474720" cy="822960"/>
+            <a:off x="1280160" y="2212848"/>
+            <a:ext cx="10241280" cy="868680"/>
           </a:xfrm>
           <a:prstGeom prst="rect">
             <a:avLst/>
@@ -5285,78 +5235,48 @@
           </a:bodyPr>
           <a:lstStyle/>
           <a:p>
-            <a:pPr algn="ctr"/>
-            <a:r>
-              <a:rPr sz="4400" b="1">
+            <a:pPr algn="l"/>
+            <a:r>
+              <a:rPr sz="2100" b="0">
                 <a:solidFill>
-                  <a:srgbClr val="FF6B35"/>
+                  <a:srgbClr val="F2F4F5"/>
                 </a:solidFill>
                 <a:latin typeface="Inter"/>
               </a:rPr>
-              <a:t>AF</a:t>
-            </a:r>
-          </a:p>
-        </p:txBody>
-      </p:sp>
-      <p:sp>
-        <p:nvSpPr>
-          <p:cNvPr id="7" name="TextBox 6"/>
-          <p:cNvSpPr txBox="1"/>
-          <p:nvPr/>
-        </p:nvSpPr>
-        <p:spPr>
-          <a:xfrm>
-            <a:off x="594360" y="3703320"/>
-            <a:ext cx="3474720" cy="548640"/>
-          </a:xfrm>
-          <a:prstGeom prst="rect">
-            <a:avLst/>
-          </a:prstGeom>
-          <a:noFill/>
-        </p:spPr>
-        <p:txBody>
-          <a:bodyPr wrap="square">
-            <a:spAutoFit/>
-          </a:bodyPr>
-          <a:lstStyle/>
-          <a:p>
-            <a:pPr algn="ctr"/>
-            <a:r>
-              <a:rPr sz="1500" b="0">
+              <a:t>Unet + EfficientNet-B4 · 12 каналов: видимый, тепло, покров, рельеф, погода</a:t>
+            </a:r>
+            <a:r>
+              <a:rPr sz="1400" b="0">
                 <a:solidFill>
-                  <a:srgbClr val="B8C0C8"/>
+                  <a:srgbClr val="7D8690"/>
                 </a:solidFill>
                 <a:latin typeface="Inter"/>
               </a:rPr>
-              <a:t>пиксели горения
-по VIIRS, 375 м</a:t>
-            </a:r>
-          </a:p>
-        </p:txBody>
-      </p:sp>
-      <p:sp>
-        <p:nvSpPr>
-          <p:cNvPr id="8" name="Rounded Rectangle 7"/>
+              <a:t>
+полное обучение за 295 секунд на арендной RTX PRO 4500</a:t>
+            </a:r>
+          </a:p>
+        </p:txBody>
+      </p:sp>
+      <p:sp>
+        <p:nvSpPr>
+          <p:cNvPr id="7" name="Oval 6"/>
           <p:cNvSpPr/>
           <p:nvPr/>
         </p:nvSpPr>
         <p:spPr>
           <a:xfrm>
-            <a:off x="4251960" y="2468880"/>
-            <a:ext cx="3474720" cy="2011680"/>
-          </a:xfrm>
-          <a:prstGeom prst="roundRect">
-            <a:avLst>
-              <a:gd name="adj" fmla="val 7000"/>
-            </a:avLst>
+            <a:off x="914400" y="3557016"/>
+            <a:ext cx="155448" cy="155448"/>
+          </a:xfrm>
+          <a:prstGeom prst="ellipse">
+            <a:avLst/>
           </a:prstGeom>
           <a:solidFill>
-            <a:srgbClr val="0D1217"/>
+            <a:srgbClr val="F2F4F5"/>
           </a:solidFill>
-          <a:ln w="12700">
-            <a:solidFill>
-              <a:srgbClr val="2A333D"/>
-            </a:solidFill>
+          <a:ln>
+            <a:noFill/>
           </a:ln>
         </p:spPr>
         <p:style>
@@ -5383,14 +5303,14 @@
       </p:sp>
       <p:sp>
         <p:nvSpPr>
-          <p:cNvPr id="9" name="TextBox 8"/>
+          <p:cNvPr id="8" name="TextBox 7"/>
           <p:cNvSpPr txBox="1"/>
           <p:nvPr/>
         </p:nvSpPr>
         <p:spPr>
           <a:xfrm>
-            <a:off x="4251960" y="2788920"/>
-            <a:ext cx="3474720" cy="822960"/>
+            <a:off x="1280160" y="3355848"/>
+            <a:ext cx="10241280" cy="868680"/>
           </a:xfrm>
           <a:prstGeom prst="rect">
             <a:avLst/>
@@ -5403,78 +5323,48 @@
           </a:bodyPr>
           <a:lstStyle/>
           <a:p>
-            <a:pPr algn="ctr"/>
-            <a:r>
-              <a:rPr sz="4400" b="1">
+            <a:pPr algn="l"/>
+            <a:r>
+              <a:rPr sz="2100" b="0">
                 <a:solidFill>
-                  <a:srgbClr val="E6C65C"/>
+                  <a:srgbClr val="F2F4F5"/>
                 </a:solidFill>
                 <a:latin typeface="Inter"/>
               </a:rPr>
-              <a:t>BS</a:t>
-            </a:r>
-          </a:p>
-        </p:txBody>
-      </p:sp>
-      <p:sp>
-        <p:nvSpPr>
-          <p:cNvPr id="10" name="TextBox 9"/>
-          <p:cNvSpPr txBox="1"/>
-          <p:nvPr/>
-        </p:nvSpPr>
-        <p:spPr>
-          <a:xfrm>
-            <a:off x="4251960" y="3703320"/>
-            <a:ext cx="3474720" cy="548640"/>
-          </a:xfrm>
-          <a:prstGeom prst="rect">
-            <a:avLst/>
-          </a:prstGeom>
-          <a:noFill/>
-        </p:spPr>
-        <p:txBody>
-          <a:bodyPr wrap="square">
-            <a:spAutoFit/>
-          </a:bodyPr>
-          <a:lstStyle/>
-          <a:p>
-            <a:pPr algn="ctr"/>
-            <a:r>
-              <a:rPr sz="1500" b="0">
+              <a:t>F1 0.8434 · днём 0.85, ночью 0.80</a:t>
+            </a:r>
+            <a:r>
+              <a:rPr sz="1400" b="0">
                 <a:solidFill>
-                  <a:srgbClr val="B8C0C8"/>
+                  <a:srgbClr val="7D8690"/>
                 </a:solidFill>
                 <a:latin typeface="Inter"/>
               </a:rPr>
-              <a:t>контуры + 3 степени
-по Sentinel-2, 20 м</a:t>
-            </a:r>
-          </a:p>
-        </p:txBody>
-      </p:sp>
-      <p:sp>
-        <p:nvSpPr>
-          <p:cNvPr id="11" name="Rounded Rectangle 10"/>
+              <a:t>
+ночью видны только тепловые каналы — отсюда разрыв</a:t>
+            </a:r>
+          </a:p>
+        </p:txBody>
+      </p:sp>
+      <p:sp>
+        <p:nvSpPr>
+          <p:cNvPr id="9" name="Oval 8"/>
           <p:cNvSpPr/>
           <p:nvPr/>
         </p:nvSpPr>
         <p:spPr>
           <a:xfrm>
-            <a:off x="7909560" y="2468880"/>
-            <a:ext cx="3474720" cy="2011680"/>
-          </a:xfrm>
-          <a:prstGeom prst="roundRect">
-            <a:avLst>
-              <a:gd name="adj" fmla="val 7000"/>
-            </a:avLst>
+            <a:off x="914400" y="4700016"/>
+            <a:ext cx="155448" cy="155448"/>
+          </a:xfrm>
+          <a:prstGeom prst="ellipse">
+            <a:avLst/>
           </a:prstGeom>
           <a:solidFill>
-            <a:srgbClr val="0D1217"/>
+            <a:srgbClr val="E6C65C"/>
           </a:solidFill>
-          <a:ln w="12700">
-            <a:solidFill>
-              <a:srgbClr val="2A333D"/>
-            </a:solidFill>
+          <a:ln>
+            <a:noFill/>
           </a:ln>
         </p:spPr>
         <p:style>
@@ -5501,14 +5391,14 @@
       </p:sp>
       <p:sp>
         <p:nvSpPr>
-          <p:cNvPr id="12" name="TextBox 11"/>
+          <p:cNvPr id="10" name="TextBox 9"/>
           <p:cNvSpPr txBox="1"/>
           <p:nvPr/>
         </p:nvSpPr>
         <p:spPr>
           <a:xfrm>
-            <a:off x="7909560" y="2788920"/>
-            <a:ext cx="3474720" cy="822960"/>
+            <a:off x="1280160" y="4498848"/>
+            <a:ext cx="10241280" cy="868680"/>
           </a:xfrm>
           <a:prstGeom prst="rect">
             <a:avLst/>
@@ -5521,90 +5411,53 @@
           </a:bodyPr>
           <a:lstStyle/>
           <a:p>
-            <a:pPr algn="ctr"/>
-            <a:r>
-              <a:rPr sz="4400" b="1">
+            <a:pPr algn="l"/>
+            <a:r>
+              <a:rPr sz="2100" b="0">
                 <a:solidFill>
-                  <a:srgbClr val="62D99A"/>
+                  <a:srgbClr val="F2F4F5"/>
                 </a:solidFill>
                 <a:latin typeface="Inter"/>
               </a:rPr>
-              <a:t>API</a:t>
-            </a:r>
-          </a:p>
-        </p:txBody>
-      </p:sp>
-      <p:sp>
-        <p:nvSpPr>
-          <p:cNvPr id="13" name="TextBox 12"/>
-          <p:cNvSpPr txBox="1"/>
-          <p:nvPr/>
-        </p:nvSpPr>
-        <p:spPr>
-          <a:xfrm>
-            <a:off x="7909560" y="3703320"/>
-            <a:ext cx="3474720" cy="548640"/>
-          </a:xfrm>
-          <a:prstGeom prst="rect">
-            <a:avLst/>
-          </a:prstGeom>
-          <a:noFill/>
-        </p:spPr>
-        <p:txBody>
-          <a:bodyPr wrap="square">
-            <a:spAutoFit/>
-          </a:bodyPr>
-          <a:lstStyle/>
-          <a:p>
-            <a:pPr algn="ctr"/>
-            <a:r>
-              <a:rPr sz="1500" b="0">
-                <a:solidFill>
-                  <a:srgbClr val="B8C0C8"/>
-                </a:solidFill>
-                <a:latin typeface="Inter"/>
-              </a:rPr>
-              <a:t>карта + справка
-по запросу</a:t>
-            </a:r>
-          </a:p>
-        </p:txBody>
-      </p:sp>
-      <p:sp>
-        <p:nvSpPr>
-          <p:cNvPr id="14" name="TextBox 13"/>
-          <p:cNvSpPr txBox="1"/>
-          <p:nvPr/>
-        </p:nvSpPr>
-        <p:spPr>
-          <a:xfrm>
-            <a:off x="640080" y="5120640"/>
-            <a:ext cx="10881360" cy="640080"/>
-          </a:xfrm>
-          <a:prstGeom prst="rect">
-            <a:avLst/>
-          </a:prstGeom>
-          <a:noFill/>
-        </p:spPr>
-        <p:txBody>
-          <a:bodyPr wrap="square">
-            <a:spAutoFit/>
-          </a:bodyPr>
-          <a:lstStyle/>
-          <a:p>
-            <a:pPr algn="ctr"/>
-            <a:r>
-              <a:rPr sz="1800" b="0">
+              <a:t>Факелы от пожаров на одном снимке неотличимы</a:t>
+            </a:r>
+            <a:r>
+              <a:rPr sz="1400" b="0">
                 <a:solidFill>
                   <a:srgbClr val="7D8690"/>
                 </a:solidFill>
                 <a:latin typeface="Inter"/>
               </a:rPr>
-              <a:t>Плюс единый submission.csv на 447 строк и воспроизводимый запуск одной командой</a:t>
-            </a:r>
-          </a:p>
-        </p:txBody>
-      </p:sp>
+              <a:t>
+давим их контекстом застройки и историей — честно пишем в отчёт</a:t>
+            </a:r>
+          </a:p>
+        </p:txBody>
+      </p:sp>
+      <p:pic>
+        <p:nvPicPr>
+          <p:cNvPr id="11" name="Picture 10" descr="af_viz_sample.png"/>
+          <p:cNvPicPr>
+            <a:picLocks noChangeAspect="1"/>
+          </p:cNvPicPr>
+          <p:nvPr/>
+        </p:nvPicPr>
+        <p:blipFill>
+          <a:blip r:embed="rId2"/>
+          <a:stretch>
+            <a:fillRect/>
+          </a:stretch>
+        </p:blipFill>
+        <p:spPr>
+          <a:xfrm>
+            <a:off x="9144000" y="4480560"/>
+            <a:ext cx="2377440" cy="792480"/>
+          </a:xfrm>
+          <a:prstGeom prst="rect">
+            <a:avLst/>
+          </a:prstGeom>
+        </p:spPr>
+      </p:pic>
     </p:spTree>
   </p:cSld>
   <p:clrMapOvr>
@@ -5640,7 +5493,7 @@
         <p:spPr>
           <a:xfrm>
             <a:off x="640080" y="274320"/>
-            <a:ext cx="4572000" cy="365760"/>
+            <a:ext cx="10881360" cy="365760"/>
           </a:xfrm>
           <a:prstGeom prst="rect">
             <a:avLst/>
@@ -5654,15 +5507,6 @@
           <a:lstStyle/>
           <a:p>
             <a:pPr algn="l"/>
-            <a:r>
-              <a:rPr sz="1200" b="1">
-                <a:solidFill>
-                  <a:srgbClr val="7D8690"/>
-                </a:solidFill>
-                <a:latin typeface="Inter"/>
-              </a:rPr>
-              <a:t>04 / 10   </a:t>
-            </a:r>
             <a:r>
               <a:rPr sz="1200" b="1">
                 <a:solidFill>
@@ -5683,7 +5527,7 @@
         </p:nvSpPr>
         <p:spPr>
           <a:xfrm>
-            <a:off x="11612880" y="384048"/>
+            <a:off x="11658600" y="384048"/>
             <a:ext cx="128016" cy="128016"/>
           </a:xfrm>
           <a:prstGeom prst="ellipse">
@@ -5726,8 +5570,8 @@
         </p:nvSpPr>
         <p:spPr>
           <a:xfrm>
-            <a:off x="640080" y="822960"/>
-            <a:ext cx="10881360" cy="1188720"/>
+            <a:off x="640080" y="777240"/>
+            <a:ext cx="10881360" cy="1097280"/>
           </a:xfrm>
           <a:prstGeom prst="rect">
             <a:avLst/>
@@ -5742,40 +5586,36 @@
           <a:p>
             <a:pPr algn="l"/>
             <a:r>
-              <a:rPr sz="4000" b="1">
+              <a:rPr sz="3800" b="1">
                 <a:solidFill>
                   <a:srgbClr val="F2F4F5"/>
                 </a:solidFill>
                 <a:latin typeface="Inter"/>
               </a:rPr>
-              <a:t>Подход: две сегментации + строгий протокол</a:t>
-            </a:r>
-          </a:p>
-        </p:txBody>
-      </p:sp>
-      <p:sp>
-        <p:nvSpPr>
-          <p:cNvPr id="5" name="Rounded Rectangle 4"/>
+              <a:t>Гари: похоронили гиганта, выиграл трудяга</a:t>
+            </a:r>
+          </a:p>
+        </p:txBody>
+      </p:sp>
+      <p:sp>
+        <p:nvSpPr>
+          <p:cNvPr id="5" name="Oval 4"/>
           <p:cNvSpPr/>
           <p:nvPr/>
         </p:nvSpPr>
         <p:spPr>
           <a:xfrm>
-            <a:off x="594360" y="2468880"/>
-            <a:ext cx="2011680" cy="1554480"/>
-          </a:xfrm>
-          <a:prstGeom prst="roundRect">
-            <a:avLst>
-              <a:gd name="adj" fmla="val 7000"/>
-            </a:avLst>
+            <a:off x="914400" y="2414016"/>
+            <a:ext cx="155448" cy="155448"/>
+          </a:xfrm>
+          <a:prstGeom prst="ellipse">
+            <a:avLst/>
           </a:prstGeom>
           <a:solidFill>
-            <a:srgbClr val="0D1217"/>
+            <a:srgbClr val="EF5B5B"/>
           </a:solidFill>
-          <a:ln w="12700">
-            <a:solidFill>
-              <a:srgbClr val="2A333D"/>
-            </a:solidFill>
+          <a:ln>
+            <a:noFill/>
           </a:ln>
         </p:spPr>
         <p:style>
@@ -5808,8 +5648,8 @@
         </p:nvSpPr>
         <p:spPr>
           <a:xfrm>
-            <a:off x="594360" y="2743200"/>
-            <a:ext cx="2011680" cy="1097280"/>
+            <a:off x="1280160" y="2212848"/>
+            <a:ext cx="10241280" cy="868680"/>
           </a:xfrm>
           <a:prstGeom prst="rect">
             <a:avLst/>
@@ -5822,78 +5662,48 @@
           </a:bodyPr>
           <a:lstStyle/>
           <a:p>
-            <a:pPr algn="ctr"/>
-            <a:r>
-              <a:rPr sz="1900" b="1">
+            <a:pPr algn="l"/>
+            <a:r>
+              <a:rPr sz="2100" b="0">
                 <a:solidFill>
                   <a:srgbClr val="F2F4F5"/>
                 </a:solidFill>
                 <a:latin typeface="Inter"/>
               </a:rPr>
-              <a:t>VIIRS
-AF Unet</a:t>
-            </a:r>
-          </a:p>
-        </p:txBody>
-      </p:sp>
-      <p:sp>
-        <p:nvSpPr>
-          <p:cNvPr id="7" name="TextBox 6"/>
-          <p:cNvSpPr txBox="1"/>
-          <p:nvPr/>
-        </p:nvSpPr>
-        <p:spPr>
-          <a:xfrm>
-            <a:off x="2606040" y="2971800"/>
-            <a:ext cx="365760" cy="457200"/>
-          </a:xfrm>
-          <a:prstGeom prst="rect">
-            <a:avLst/>
-          </a:prstGeom>
-          <a:noFill/>
-        </p:spPr>
-        <p:txBody>
-          <a:bodyPr wrap="square">
-            <a:spAutoFit/>
-          </a:bodyPr>
-          <a:lstStyle/>
-          <a:p>
-            <a:pPr algn="ctr"/>
-            <a:r>
-              <a:rPr sz="2600" b="0">
+              <a:t>Prithvi-300M сдох: IoU 0.16 — хуже тупого бейзлайна плюс nan-лосс</a:t>
+            </a:r>
+            <a:r>
+              <a:rPr sz="1400" b="0">
                 <a:solidFill>
-                  <a:srgbClr val="FF6B35"/>
+                  <a:srgbClr val="7D8690"/>
                 </a:solidFill>
                 <a:latin typeface="Inter"/>
               </a:rPr>
-              <a:t>→</a:t>
-            </a:r>
-          </a:p>
-        </p:txBody>
-      </p:sp>
-      <p:sp>
-        <p:nvSpPr>
-          <p:cNvPr id="8" name="Rounded Rectangle 7"/>
+              <a:t>
+закрыли ветку без сантиментов</a:t>
+            </a:r>
+          </a:p>
+        </p:txBody>
+      </p:sp>
+      <p:sp>
+        <p:nvSpPr>
+          <p:cNvPr id="7" name="Oval 6"/>
           <p:cNvSpPr/>
           <p:nvPr/>
         </p:nvSpPr>
         <p:spPr>
           <a:xfrm>
-            <a:off x="2926079" y="2468880"/>
-            <a:ext cx="2011680" cy="1554480"/>
-          </a:xfrm>
-          <a:prstGeom prst="roundRect">
-            <a:avLst>
-              <a:gd name="adj" fmla="val 7000"/>
-            </a:avLst>
+            <a:off x="914400" y="3557016"/>
+            <a:ext cx="155448" cy="155448"/>
+          </a:xfrm>
+          <a:prstGeom prst="ellipse">
+            <a:avLst/>
           </a:prstGeom>
           <a:solidFill>
-            <a:srgbClr val="0D1217"/>
+            <a:srgbClr val="62D99A"/>
           </a:solidFill>
-          <a:ln w="12700">
-            <a:solidFill>
-              <a:srgbClr val="2A333D"/>
-            </a:solidFill>
+          <a:ln>
+            <a:noFill/>
           </a:ln>
         </p:spPr>
         <p:style>
@@ -5920,14 +5730,14 @@
       </p:sp>
       <p:sp>
         <p:nvSpPr>
-          <p:cNvPr id="9" name="TextBox 8"/>
+          <p:cNvPr id="8" name="TextBox 7"/>
           <p:cNvSpPr txBox="1"/>
           <p:nvPr/>
         </p:nvSpPr>
         <p:spPr>
           <a:xfrm>
-            <a:off x="2926079" y="2743200"/>
-            <a:ext cx="2011680" cy="1097280"/>
+            <a:off x="1280160" y="3355848"/>
+            <a:ext cx="10241280" cy="868680"/>
           </a:xfrm>
           <a:prstGeom prst="rect">
             <a:avLst/>
@@ -5940,78 +5750,48 @@
           </a:bodyPr>
           <a:lstStyle/>
           <a:p>
-            <a:pPr algn="ctr"/>
-            <a:r>
-              <a:rPr sz="1900" b="1">
+            <a:pPr algn="l"/>
+            <a:r>
+              <a:rPr sz="2100" b="0">
                 <a:solidFill>
                   <a:srgbClr val="F2F4F5"/>
                 </a:solidFill>
                 <a:latin typeface="Inter"/>
               </a:rPr>
-              <a:t>Sentinel
-BS Unet</a:t>
-            </a:r>
-          </a:p>
-        </p:txBody>
-      </p:sp>
-      <p:sp>
-        <p:nvSpPr>
-          <p:cNvPr id="10" name="TextBox 9"/>
-          <p:cNvSpPr txBox="1"/>
-          <p:nvPr/>
-        </p:nvSpPr>
-        <p:spPr>
-          <a:xfrm>
-            <a:off x="4937760" y="2971800"/>
-            <a:ext cx="365760" cy="457200"/>
-          </a:xfrm>
-          <a:prstGeom prst="rect">
-            <a:avLst/>
-          </a:prstGeom>
-          <a:noFill/>
-        </p:spPr>
-        <p:txBody>
-          <a:bodyPr wrap="square">
-            <a:spAutoFit/>
-          </a:bodyPr>
-          <a:lstStyle/>
-          <a:p>
-            <a:pPr algn="ctr"/>
-            <a:r>
-              <a:rPr sz="2600" b="0">
+              <a:t>Обычный Unet выиграл: IoU 0.52 · mIoU 0.54</a:t>
+            </a:r>
+            <a:r>
+              <a:rPr sz="1400" b="0">
                 <a:solidFill>
-                  <a:srgbClr val="FF6B35"/>
+                  <a:srgbClr val="7D8690"/>
                 </a:solidFill>
                 <a:latin typeface="Inter"/>
               </a:rPr>
-              <a:t>→</a:t>
-            </a:r>
-          </a:p>
-        </p:txBody>
-      </p:sp>
-      <p:sp>
-        <p:nvSpPr>
-          <p:cNvPr id="11" name="Rounded Rectangle 10"/>
+              <a:t>
+27 каналов, 91 эпоха — фриз, который сдаём</a:t>
+            </a:r>
+          </a:p>
+        </p:txBody>
+      </p:sp>
+      <p:sp>
+        <p:nvSpPr>
+          <p:cNvPr id="9" name="Oval 8"/>
           <p:cNvSpPr/>
           <p:nvPr/>
         </p:nvSpPr>
         <p:spPr>
           <a:xfrm>
-            <a:off x="5257800" y="2468880"/>
-            <a:ext cx="2011680" cy="1554480"/>
-          </a:xfrm>
-          <a:prstGeom prst="roundRect">
-            <a:avLst>
-              <a:gd name="adj" fmla="val 7000"/>
-            </a:avLst>
+            <a:off x="914400" y="4700016"/>
+            <a:ext cx="155448" cy="155448"/>
+          </a:xfrm>
+          <a:prstGeom prst="ellipse">
+            <a:avLst/>
           </a:prstGeom>
           <a:solidFill>
-            <a:srgbClr val="0D1217"/>
+            <a:srgbClr val="FF6B35"/>
           </a:solidFill>
-          <a:ln w="12700">
-            <a:solidFill>
-              <a:srgbClr val="2A333D"/>
-            </a:solidFill>
+          <a:ln>
+            <a:noFill/>
           </a:ln>
         </p:spPr>
         <p:style>
@@ -6038,14 +5818,14 @@
       </p:sp>
       <p:sp>
         <p:nvSpPr>
-          <p:cNvPr id="12" name="TextBox 11"/>
+          <p:cNvPr id="10" name="TextBox 9"/>
           <p:cNvSpPr txBox="1"/>
           <p:nvPr/>
         </p:nvSpPr>
         <p:spPr>
           <a:xfrm>
-            <a:off x="5257800" y="2743200"/>
-            <a:ext cx="2011680" cy="1097280"/>
+            <a:off x="1280160" y="4498848"/>
+            <a:ext cx="10241280" cy="868680"/>
           </a:xfrm>
           <a:prstGeom prst="rect">
             <a:avLst/>
@@ -6058,287 +5838,25 @@
           </a:bodyPr>
           <a:lstStyle/>
           <a:p>
-            <a:pPr algn="ctr"/>
-            <a:r>
-              <a:rPr sz="1900" b="1">
+            <a:pPr algn="l"/>
+            <a:r>
+              <a:rPr sz="2100" b="0">
                 <a:solidFill>
                   <a:srgbClr val="F2F4F5"/>
                 </a:solidFill>
                 <a:latin typeface="Inter"/>
               </a:rPr>
-              <a:t>inference
-детерминирован</a:t>
-            </a:r>
-          </a:p>
-        </p:txBody>
-      </p:sp>
-      <p:sp>
-        <p:nvSpPr>
-          <p:cNvPr id="13" name="TextBox 12"/>
-          <p:cNvSpPr txBox="1"/>
-          <p:nvPr/>
-        </p:nvSpPr>
-        <p:spPr>
-          <a:xfrm>
-            <a:off x="7269479" y="2971800"/>
-            <a:ext cx="365760" cy="457200"/>
-          </a:xfrm>
-          <a:prstGeom prst="rect">
-            <a:avLst/>
-          </a:prstGeom>
-          <a:noFill/>
-        </p:spPr>
-        <p:txBody>
-          <a:bodyPr wrap="square">
-            <a:spAutoFit/>
-          </a:bodyPr>
-          <a:lstStyle/>
-          <a:p>
-            <a:pPr algn="ctr"/>
-            <a:r>
-              <a:rPr sz="2600" b="0">
-                <a:solidFill>
-                  <a:srgbClr val="FF6B35"/>
-                </a:solidFill>
-                <a:latin typeface="Inter"/>
-              </a:rPr>
-              <a:t>→</a:t>
-            </a:r>
-          </a:p>
-        </p:txBody>
-      </p:sp>
-      <p:sp>
-        <p:nvSpPr>
-          <p:cNvPr id="14" name="Rounded Rectangle 13"/>
-          <p:cNvSpPr/>
-          <p:nvPr/>
-        </p:nvSpPr>
-        <p:spPr>
-          <a:xfrm>
-            <a:off x="7589519" y="2468880"/>
-            <a:ext cx="2011680" cy="1554480"/>
-          </a:xfrm>
-          <a:prstGeom prst="roundRect">
-            <a:avLst>
-              <a:gd name="adj" fmla="val 7000"/>
-            </a:avLst>
-          </a:prstGeom>
-          <a:solidFill>
-            <a:srgbClr val="0D1217"/>
-          </a:solidFill>
-          <a:ln w="12700">
-            <a:solidFill>
-              <a:srgbClr val="2A333D"/>
-            </a:solidFill>
-          </a:ln>
-        </p:spPr>
-        <p:style>
-          <a:lnRef idx="1">
-            <a:schemeClr val="accent1"/>
-          </a:lnRef>
-          <a:fillRef idx="3">
-            <a:schemeClr val="accent1"/>
-          </a:fillRef>
-          <a:effectRef idx="2">
-            <a:schemeClr val="accent1"/>
-          </a:effectRef>
-          <a:fontRef idx="minor">
-            <a:schemeClr val="lt1"/>
-          </a:fontRef>
-        </p:style>
-        <p:txBody>
-          <a:bodyPr rtlCol="0" anchor="ctr"/>
-          <a:lstStyle/>
-          <a:p>
-            <a:pPr algn="ctr"/>
-          </a:p>
-        </p:txBody>
-      </p:sp>
-      <p:sp>
-        <p:nvSpPr>
-          <p:cNvPr id="15" name="TextBox 14"/>
-          <p:cNvSpPr txBox="1"/>
-          <p:nvPr/>
-        </p:nvSpPr>
-        <p:spPr>
-          <a:xfrm>
-            <a:off x="7589519" y="2743200"/>
-            <a:ext cx="2011680" cy="1097280"/>
-          </a:xfrm>
-          <a:prstGeom prst="rect">
-            <a:avLst/>
-          </a:prstGeom>
-          <a:noFill/>
-        </p:spPr>
-        <p:txBody>
-          <a:bodyPr wrap="square">
-            <a:spAutoFit/>
-          </a:bodyPr>
-          <a:lstStyle/>
-          <a:p>
-            <a:pPr algn="ctr"/>
-            <a:r>
-              <a:rPr sz="1900" b="1">
-                <a:solidFill>
-                  <a:srgbClr val="F2F4F5"/>
-                </a:solidFill>
-                <a:latin typeface="Inter"/>
-              </a:rPr>
-              <a:t>submission
-447 строк</a:t>
-            </a:r>
-          </a:p>
-        </p:txBody>
-      </p:sp>
-      <p:sp>
-        <p:nvSpPr>
-          <p:cNvPr id="16" name="TextBox 15"/>
-          <p:cNvSpPr txBox="1"/>
-          <p:nvPr/>
-        </p:nvSpPr>
-        <p:spPr>
-          <a:xfrm>
-            <a:off x="9601200" y="2971800"/>
-            <a:ext cx="365760" cy="457200"/>
-          </a:xfrm>
-          <a:prstGeom prst="rect">
-            <a:avLst/>
-          </a:prstGeom>
-          <a:noFill/>
-        </p:spPr>
-        <p:txBody>
-          <a:bodyPr wrap="square">
-            <a:spAutoFit/>
-          </a:bodyPr>
-          <a:lstStyle/>
-          <a:p>
-            <a:pPr algn="ctr"/>
-            <a:r>
-              <a:rPr sz="2600" b="0">
-                <a:solidFill>
-                  <a:srgbClr val="FF6B35"/>
-                </a:solidFill>
-                <a:latin typeface="Inter"/>
-              </a:rPr>
-              <a:t>→</a:t>
-            </a:r>
-          </a:p>
-        </p:txBody>
-      </p:sp>
-      <p:sp>
-        <p:nvSpPr>
-          <p:cNvPr id="17" name="Rounded Rectangle 16"/>
-          <p:cNvSpPr/>
-          <p:nvPr/>
-        </p:nvSpPr>
-        <p:spPr>
-          <a:xfrm>
-            <a:off x="9921240" y="2468880"/>
-            <a:ext cx="2011680" cy="1554480"/>
-          </a:xfrm>
-          <a:prstGeom prst="roundRect">
-            <a:avLst>
-              <a:gd name="adj" fmla="val 7000"/>
-            </a:avLst>
-          </a:prstGeom>
-          <a:solidFill>
-            <a:srgbClr val="0D1217"/>
-          </a:solidFill>
-          <a:ln w="12700">
-            <a:solidFill>
-              <a:srgbClr val="2A333D"/>
-            </a:solidFill>
-          </a:ln>
-        </p:spPr>
-        <p:style>
-          <a:lnRef idx="1">
-            <a:schemeClr val="accent1"/>
-          </a:lnRef>
-          <a:fillRef idx="3">
-            <a:schemeClr val="accent1"/>
-          </a:fillRef>
-          <a:effectRef idx="2">
-            <a:schemeClr val="accent1"/>
-          </a:effectRef>
-          <a:fontRef idx="minor">
-            <a:schemeClr val="lt1"/>
-          </a:fontRef>
-        </p:style>
-        <p:txBody>
-          <a:bodyPr rtlCol="0" anchor="ctr"/>
-          <a:lstStyle/>
-          <a:p>
-            <a:pPr algn="ctr"/>
-          </a:p>
-        </p:txBody>
-      </p:sp>
-      <p:sp>
-        <p:nvSpPr>
-          <p:cNvPr id="18" name="TextBox 17"/>
-          <p:cNvSpPr txBox="1"/>
-          <p:nvPr/>
-        </p:nvSpPr>
-        <p:spPr>
-          <a:xfrm>
-            <a:off x="9921240" y="2743200"/>
-            <a:ext cx="2011680" cy="1097280"/>
-          </a:xfrm>
-          <a:prstGeom prst="rect">
-            <a:avLst/>
-          </a:prstGeom>
-          <a:noFill/>
-        </p:spPr>
-        <p:txBody>
-          <a:bodyPr wrap="square">
-            <a:spAutoFit/>
-          </a:bodyPr>
-          <a:lstStyle/>
-          <a:p>
-            <a:pPr algn="ctr"/>
-            <a:r>
-              <a:rPr sz="1900" b="1">
-                <a:solidFill>
-                  <a:srgbClr val="F2F4F5"/>
-                </a:solidFill>
-                <a:latin typeface="Inter"/>
-              </a:rPr>
-              <a:t>сервис
-карта + API</a:t>
-            </a:r>
-          </a:p>
-        </p:txBody>
-      </p:sp>
-      <p:sp>
-        <p:nvSpPr>
-          <p:cNvPr id="19" name="TextBox 18"/>
-          <p:cNvSpPr txBox="1"/>
-          <p:nvPr/>
-        </p:nvSpPr>
-        <p:spPr>
-          <a:xfrm>
-            <a:off x="640080" y="4572000"/>
-            <a:ext cx="10881360" cy="1280160"/>
-          </a:xfrm>
-          <a:prstGeom prst="rect">
-            <a:avLst/>
-          </a:prstGeom>
-          <a:noFill/>
-        </p:spPr>
-        <p:txBody>
-          <a:bodyPr wrap="square">
-            <a:spAutoFit/>
-          </a:bodyPr>
-          <a:lstStyle/>
-          <a:p>
-            <a:pPr algn="ctr"/>
-            <a:r>
-              <a:rPr sz="1800" b="0">
+              <a:t>Две добивки проиграли фризу (0.62 и 0.63 против 0.65)</a:t>
+            </a:r>
+            <a:r>
+              <a:rPr sz="1400" b="0">
                 <a:solidFill>
                   <a:srgbClr val="7D8690"/>
                 </a:solidFill>
                 <a:latin typeface="Inter"/>
               </a:rPr>
-              <a:t>Сплит по очагам без утечек · сиды 19 · тест де-идентифицирован — гео не восстанавливаем</a:t>
+              <a:t>
+поэтому сдаём проверенное, а не последнее</a:t>
             </a:r>
           </a:p>
         </p:txBody>
@@ -6378,7 +5896,7 @@
         <p:spPr>
           <a:xfrm>
             <a:off x="640080" y="274320"/>
-            <a:ext cx="4572000" cy="365760"/>
+            <a:ext cx="10881360" cy="365760"/>
           </a:xfrm>
           <a:prstGeom prst="rect">
             <a:avLst/>
@@ -6392,15 +5910,6 @@
           <a:lstStyle/>
           <a:p>
             <a:pPr algn="l"/>
-            <a:r>
-              <a:rPr sz="1200" b="1">
-                <a:solidFill>
-                  <a:srgbClr val="7D8690"/>
-                </a:solidFill>
-                <a:latin typeface="Inter"/>
-              </a:rPr>
-              <a:t>05 / 10   </a:t>
-            </a:r>
             <a:r>
               <a:rPr sz="1200" b="1">
                 <a:solidFill>
@@ -6421,7 +5930,7 @@
         </p:nvSpPr>
         <p:spPr>
           <a:xfrm>
-            <a:off x="11612880" y="384048"/>
+            <a:off x="11658600" y="384048"/>
             <a:ext cx="128016" cy="128016"/>
           </a:xfrm>
           <a:prstGeom prst="ellipse">
@@ -6464,8 +5973,8 @@
         </p:nvSpPr>
         <p:spPr>
           <a:xfrm>
-            <a:off x="640080" y="822960"/>
-            <a:ext cx="10881360" cy="1188720"/>
+            <a:off x="640080" y="777240"/>
+            <a:ext cx="10881360" cy="1097280"/>
           </a:xfrm>
           <a:prstGeom prst="rect">
             <a:avLst/>
@@ -6480,36 +5989,40 @@
           <a:p>
             <a:pPr algn="l"/>
             <a:r>
-              <a:rPr sz="4000" b="1">
+              <a:rPr sz="3800" b="1">
                 <a:solidFill>
                   <a:srgbClr val="F2F4F5"/>
                 </a:solidFill>
                 <a:latin typeface="Inter"/>
               </a:rPr>
-              <a:t>Горение находим: F1 0.8434</a:t>
-            </a:r>
-          </a:p>
-        </p:txBody>
-      </p:sp>
-      <p:sp>
-        <p:nvSpPr>
-          <p:cNvPr id="5" name="Oval 4"/>
+              <a:t>Итог: 0.654 — честные</a:t>
+            </a:r>
+          </a:p>
+        </p:txBody>
+      </p:sp>
+      <p:sp>
+        <p:nvSpPr>
+          <p:cNvPr id="5" name="Rounded Rectangle 4"/>
           <p:cNvSpPr/>
           <p:nvPr/>
         </p:nvSpPr>
         <p:spPr>
           <a:xfrm>
-            <a:off x="914400" y="2596896"/>
-            <a:ext cx="155448" cy="155448"/>
-          </a:xfrm>
-          <a:prstGeom prst="ellipse">
-            <a:avLst/>
+            <a:off x="640080" y="2194560"/>
+            <a:ext cx="10881360" cy="1463040"/>
+          </a:xfrm>
+          <a:prstGeom prst="roundRect">
+            <a:avLst>
+              <a:gd name="adj" fmla="val 7000"/>
+            </a:avLst>
           </a:prstGeom>
           <a:solidFill>
-            <a:srgbClr val="62D99A"/>
+            <a:srgbClr val="0D1217"/>
           </a:solidFill>
-          <a:ln>
-            <a:noFill/>
+          <a:ln w="12700">
+            <a:solidFill>
+              <a:srgbClr val="2A333D"/>
+            </a:solidFill>
           </a:ln>
         </p:spPr>
         <p:style>
@@ -6542,8 +6055,8 @@
         </p:nvSpPr>
         <p:spPr>
           <a:xfrm>
-            <a:off x="1280160" y="2395728"/>
-            <a:ext cx="10332720" cy="822960"/>
+            <a:off x="914400" y="2377440"/>
+            <a:ext cx="10332720" cy="1097280"/>
           </a:xfrm>
           <a:prstGeom prst="rect">
             <a:avLst/>
@@ -6558,13 +6071,13 @@
           <a:p>
             <a:pPr algn="l"/>
             <a:r>
-              <a:rPr sz="2100" b="0">
+              <a:rPr sz="2700" b="1">
                 <a:solidFill>
                   <a:srgbClr val="F2F4F5"/>
                 </a:solidFill>
                 <a:latin typeface="Inter"/>
               </a:rPr>
-              <a:t>12 каналов: видимый + I4 + разность I4−I5 + покров, рельеф, метео</a:t>
+              <a:t>0.35 × 0.8434  +  0.35 × 0.5239  +  0.30 × 0.5430  =  0.654</a:t>
             </a:r>
             <a:r>
               <a:rPr sz="1500" b="0">
@@ -6574,7 +6087,7 @@
                 <a:latin typeface="Inter"/>
               </a:rPr>
               <a:t>
-Unet + EfficientNet-B4 · обучение — 5 минут</a:t>
+447 строк · RLE валиден · два прогона идентичны · md5 зафиксирован</a:t>
             </a:r>
           </a:p>
         </p:txBody>
@@ -6587,14 +6100,14 @@
         </p:nvSpPr>
         <p:spPr>
           <a:xfrm>
-            <a:off x="914400" y="3602736"/>
+            <a:off x="914400" y="4334255"/>
             <a:ext cx="155448" cy="155448"/>
           </a:xfrm>
           <a:prstGeom prst="ellipse">
             <a:avLst/>
           </a:prstGeom>
           <a:solidFill>
-            <a:srgbClr val="F2F4F5"/>
+            <a:srgbClr val="62D99A"/>
           </a:solidFill>
           <a:ln>
             <a:noFill/>
@@ -6630,8 +6143,8 @@
         </p:nvSpPr>
         <p:spPr>
           <a:xfrm>
-            <a:off x="1280160" y="3401568"/>
-            <a:ext cx="10332720" cy="822960"/>
+            <a:off x="1280160" y="4133087"/>
+            <a:ext cx="10241280" cy="868680"/>
           </a:xfrm>
           <a:prstGeom prst="rect">
             <a:avLst/>
@@ -6646,139 +6159,27 @@
           <a:p>
             <a:pPr algn="l"/>
             <a:r>
-              <a:rPr sz="2100" b="0">
+              <a:rPr sz="1900" b="0">
                 <a:solidFill>
                   <a:srgbClr val="F2F4F5"/>
                 </a:solidFill>
                 <a:latin typeface="Inter"/>
               </a:rPr>
-              <a:t>Порог 0.15 + фильтр застройки</a:t>
-            </a:r>
-            <a:r>
-              <a:rPr sz="1500" b="0">
+              <a:t>Файл примут с первого раза</a:t>
+            </a:r>
+            <a:r>
+              <a:rPr sz="1400" b="0">
                 <a:solidFill>
                   <a:srgbClr val="7D8690"/>
                 </a:solidFill>
                 <a:latin typeface="Inter"/>
               </a:rPr>
               <a:t>
-день 0.85 · ночь 0.80</a:t>
-            </a:r>
-          </a:p>
-        </p:txBody>
-      </p:sp>
-      <p:sp>
-        <p:nvSpPr>
-          <p:cNvPr id="9" name="Oval 8"/>
-          <p:cNvSpPr/>
-          <p:nvPr/>
-        </p:nvSpPr>
-        <p:spPr>
-          <a:xfrm>
-            <a:off x="914400" y="4608576"/>
-            <a:ext cx="155448" cy="155448"/>
-          </a:xfrm>
-          <a:prstGeom prst="ellipse">
-            <a:avLst/>
-          </a:prstGeom>
-          <a:solidFill>
-            <a:srgbClr val="E6C65C"/>
-          </a:solidFill>
-          <a:ln>
-            <a:noFill/>
-          </a:ln>
-        </p:spPr>
-        <p:style>
-          <a:lnRef idx="1">
-            <a:schemeClr val="accent1"/>
-          </a:lnRef>
-          <a:fillRef idx="3">
-            <a:schemeClr val="accent1"/>
-          </a:fillRef>
-          <a:effectRef idx="2">
-            <a:schemeClr val="accent1"/>
-          </a:effectRef>
-          <a:fontRef idx="minor">
-            <a:schemeClr val="lt1"/>
-          </a:fontRef>
-        </p:style>
-        <p:txBody>
-          <a:bodyPr rtlCol="0" anchor="ctr"/>
-          <a:lstStyle/>
-          <a:p>
-            <a:pPr algn="ctr"/>
-          </a:p>
-        </p:txBody>
-      </p:sp>
-      <p:sp>
-        <p:nvSpPr>
-          <p:cNvPr id="10" name="TextBox 9"/>
-          <p:cNvSpPr txBox="1"/>
-          <p:nvPr/>
-        </p:nvSpPr>
-        <p:spPr>
-          <a:xfrm>
-            <a:off x="1280160" y="4407408"/>
-            <a:ext cx="10332720" cy="822960"/>
-          </a:xfrm>
-          <a:prstGeom prst="rect">
-            <a:avLst/>
-          </a:prstGeom>
-          <a:noFill/>
-        </p:spPr>
-        <p:txBody>
-          <a:bodyPr wrap="square">
-            <a:spAutoFit/>
-          </a:bodyPr>
-          <a:lstStyle/>
-          <a:p>
-            <a:pPr algn="l"/>
-            <a:r>
-              <a:rPr sz="2100" b="0">
-                <a:solidFill>
-                  <a:srgbClr val="F2F4F5"/>
-                </a:solidFill>
-                <a:latin typeface="Inter"/>
-              </a:rPr>
-              <a:t>Ограничение признаём</a:t>
-            </a:r>
-            <a:r>
-              <a:rPr sz="1500" b="0">
-                <a:solidFill>
-                  <a:srgbClr val="7D8690"/>
-                </a:solidFill>
-                <a:latin typeface="Inter"/>
-              </a:rPr>
-              <a:t>
-факел на одном снимке неотличим от пожара — нужна история</a:t>
-            </a:r>
-          </a:p>
-        </p:txBody>
-      </p:sp>
-      <p:pic>
-        <p:nvPicPr>
-          <p:cNvPr id="11" name="Picture 10" descr="af_viz_sample.png"/>
-          <p:cNvPicPr>
-            <a:picLocks noChangeAspect="1"/>
-          </p:cNvPicPr>
-          <p:nvPr/>
-        </p:nvPicPr>
-        <p:blipFill>
-          <a:blip r:embed="rId2"/>
-          <a:stretch>
-            <a:fillRect/>
-          </a:stretch>
-        </p:blipFill>
-        <p:spPr>
-          <a:xfrm>
-            <a:off x="8412480" y="2377440"/>
-            <a:ext cx="3108960" cy="1036320"/>
-          </a:xfrm>
-          <a:prstGeom prst="rect">
-            <a:avLst/>
-          </a:prstGeom>
-        </p:spPr>
-      </p:pic>
+пары совпадают с шаблоном, NaN ноль, пересечений ноль</a:t>
+            </a:r>
+          </a:p>
+        </p:txBody>
+      </p:sp>
     </p:spTree>
   </p:cSld>
   <p:clrMapOvr>
@@ -6788,814 +6189,6 @@
 </file>
 
 <file path=ppt/slides/slide6.xml><?xml version="1.0" encoding="utf-8"?>
-<p:sld xmlns:a="http://schemas.openxmlformats.org/drawingml/2006/main" xmlns:p="http://schemas.openxmlformats.org/presentationml/2006/main" xmlns:r="http://schemas.openxmlformats.org/officeDocument/2006/relationships">
-  <p:cSld>
-    <p:bg>
-      <p:bgPr>
-        <a:solidFill>
-          <a:srgbClr val="070A0D"/>
-        </a:solidFill>
-        <a:effectLst/>
-      </p:bgPr>
-    </p:bg>
-    <p:spTree>
-      <p:nvGrpSpPr>
-        <p:cNvPr id="1" name=""/>
-        <p:cNvGrpSpPr/>
-        <p:nvPr/>
-      </p:nvGrpSpPr>
-      <p:grpSpPr/>
-      <p:sp>
-        <p:nvSpPr>
-          <p:cNvPr id="2" name="TextBox 1"/>
-          <p:cNvSpPr txBox="1"/>
-          <p:nvPr/>
-        </p:nvSpPr>
-        <p:spPr>
-          <a:xfrm>
-            <a:off x="640080" y="274320"/>
-            <a:ext cx="4572000" cy="365760"/>
-          </a:xfrm>
-          <a:prstGeom prst="rect">
-            <a:avLst/>
-          </a:prstGeom>
-          <a:noFill/>
-        </p:spPr>
-        <p:txBody>
-          <a:bodyPr wrap="square">
-            <a:spAutoFit/>
-          </a:bodyPr>
-          <a:lstStyle/>
-          <a:p>
-            <a:pPr algn="l"/>
-            <a:r>
-              <a:rPr sz="1200" b="1">
-                <a:solidFill>
-                  <a:srgbClr val="7D8690"/>
-                </a:solidFill>
-                <a:latin typeface="Inter"/>
-              </a:rPr>
-              <a:t>06 / 10   </a:t>
-            </a:r>
-            <a:r>
-              <a:rPr sz="1200" b="1">
-                <a:solidFill>
-                  <a:srgbClr val="7D8690"/>
-                </a:solidFill>
-                <a:latin typeface="Inter"/>
-              </a:rPr>
-              <a:t>ЖИМ НОГАМИ · KOSMOHACK</a:t>
-            </a:r>
-          </a:p>
-        </p:txBody>
-      </p:sp>
-      <p:sp>
-        <p:nvSpPr>
-          <p:cNvPr id="3" name="Oval 2"/>
-          <p:cNvSpPr/>
-          <p:nvPr/>
-        </p:nvSpPr>
-        <p:spPr>
-          <a:xfrm>
-            <a:off x="11612880" y="384048"/>
-            <a:ext cx="128016" cy="128016"/>
-          </a:xfrm>
-          <a:prstGeom prst="ellipse">
-            <a:avLst/>
-          </a:prstGeom>
-          <a:solidFill>
-            <a:srgbClr val="62D99A"/>
-          </a:solidFill>
-          <a:ln>
-            <a:noFill/>
-          </a:ln>
-        </p:spPr>
-        <p:style>
-          <a:lnRef idx="1">
-            <a:schemeClr val="accent1"/>
-          </a:lnRef>
-          <a:fillRef idx="3">
-            <a:schemeClr val="accent1"/>
-          </a:fillRef>
-          <a:effectRef idx="2">
-            <a:schemeClr val="accent1"/>
-          </a:effectRef>
-          <a:fontRef idx="minor">
-            <a:schemeClr val="lt1"/>
-          </a:fontRef>
-        </p:style>
-        <p:txBody>
-          <a:bodyPr rtlCol="0" anchor="ctr"/>
-          <a:lstStyle/>
-          <a:p>
-            <a:pPr algn="ctr"/>
-          </a:p>
-        </p:txBody>
-      </p:sp>
-      <p:sp>
-        <p:nvSpPr>
-          <p:cNvPr id="4" name="TextBox 3"/>
-          <p:cNvSpPr txBox="1"/>
-          <p:nvPr/>
-        </p:nvSpPr>
-        <p:spPr>
-          <a:xfrm>
-            <a:off x="640080" y="822960"/>
-            <a:ext cx="10881360" cy="1188720"/>
-          </a:xfrm>
-          <a:prstGeom prst="rect">
-            <a:avLst/>
-          </a:prstGeom>
-          <a:noFill/>
-        </p:spPr>
-        <p:txBody>
-          <a:bodyPr wrap="square">
-            <a:spAutoFit/>
-          </a:bodyPr>
-          <a:lstStyle/>
-          <a:p>
-            <a:pPr algn="l"/>
-            <a:r>
-              <a:rPr sz="4000" b="1">
-                <a:solidFill>
-                  <a:srgbClr val="F2F4F5"/>
-                </a:solidFill>
-                <a:latin typeface="Inter"/>
-              </a:rPr>
-              <a:t>Гари картируем: IoU 0.52 · mIoU 0.54</a:t>
-            </a:r>
-          </a:p>
-        </p:txBody>
-      </p:sp>
-      <p:sp>
-        <p:nvSpPr>
-          <p:cNvPr id="5" name="Oval 4"/>
-          <p:cNvSpPr/>
-          <p:nvPr/>
-        </p:nvSpPr>
-        <p:spPr>
-          <a:xfrm>
-            <a:off x="914400" y="2596896"/>
-            <a:ext cx="155448" cy="155448"/>
-          </a:xfrm>
-          <a:prstGeom prst="ellipse">
-            <a:avLst/>
-          </a:prstGeom>
-          <a:solidFill>
-            <a:srgbClr val="62D99A"/>
-          </a:solidFill>
-          <a:ln>
-            <a:noFill/>
-          </a:ln>
-        </p:spPr>
-        <p:style>
-          <a:lnRef idx="1">
-            <a:schemeClr val="accent1"/>
-          </a:lnRef>
-          <a:fillRef idx="3">
-            <a:schemeClr val="accent1"/>
-          </a:fillRef>
-          <a:effectRef idx="2">
-            <a:schemeClr val="accent1"/>
-          </a:effectRef>
-          <a:fontRef idx="minor">
-            <a:schemeClr val="lt1"/>
-          </a:fontRef>
-        </p:style>
-        <p:txBody>
-          <a:bodyPr rtlCol="0" anchor="ctr"/>
-          <a:lstStyle/>
-          <a:p>
-            <a:pPr algn="ctr"/>
-          </a:p>
-        </p:txBody>
-      </p:sp>
-      <p:sp>
-        <p:nvSpPr>
-          <p:cNvPr id="6" name="TextBox 5"/>
-          <p:cNvSpPr txBox="1"/>
-          <p:nvPr/>
-        </p:nvSpPr>
-        <p:spPr>
-          <a:xfrm>
-            <a:off x="1280160" y="2395728"/>
-            <a:ext cx="10332720" cy="822960"/>
-          </a:xfrm>
-          <a:prstGeom prst="rect">
-            <a:avLst/>
-          </a:prstGeom>
-          <a:noFill/>
-        </p:spPr>
-        <p:txBody>
-          <a:bodyPr wrap="square">
-            <a:spAutoFit/>
-          </a:bodyPr>
-          <a:lstStyle/>
-          <a:p>
-            <a:pPr algn="l"/>
-            <a:r>
-              <a:rPr sz="2100" b="0">
-                <a:solidFill>
-                  <a:srgbClr val="F2F4F5"/>
-                </a:solidFill>
-                <a:latin typeface="Inter"/>
-              </a:rPr>
-              <a:t>27 каналов + пороги dNBR под каждый тип покрова</a:t>
-            </a:r>
-            <a:r>
-              <a:rPr sz="1500" b="0">
-                <a:solidFill>
-                  <a:srgbClr val="7D8690"/>
-                </a:solidFill>
-                <a:latin typeface="Inter"/>
-              </a:rPr>
-              <a:t>
-лес, степь, пашня и пойма горят по-разному — один порог врёт</a:t>
-            </a:r>
-          </a:p>
-        </p:txBody>
-      </p:sp>
-      <p:sp>
-        <p:nvSpPr>
-          <p:cNvPr id="7" name="Oval 6"/>
-          <p:cNvSpPr/>
-          <p:nvPr/>
-        </p:nvSpPr>
-        <p:spPr>
-          <a:xfrm>
-            <a:off x="914400" y="3602736"/>
-            <a:ext cx="155448" cy="155448"/>
-          </a:xfrm>
-          <a:prstGeom prst="ellipse">
-            <a:avLst/>
-          </a:prstGeom>
-          <a:solidFill>
-            <a:srgbClr val="E6C65C"/>
-          </a:solidFill>
-          <a:ln>
-            <a:noFill/>
-          </a:ln>
-        </p:spPr>
-        <p:style>
-          <a:lnRef idx="1">
-            <a:schemeClr val="accent1"/>
-          </a:lnRef>
-          <a:fillRef idx="3">
-            <a:schemeClr val="accent1"/>
-          </a:fillRef>
-          <a:effectRef idx="2">
-            <a:schemeClr val="accent1"/>
-          </a:effectRef>
-          <a:fontRef idx="minor">
-            <a:schemeClr val="lt1"/>
-          </a:fontRef>
-        </p:style>
-        <p:txBody>
-          <a:bodyPr rtlCol="0" anchor="ctr"/>
-          <a:lstStyle/>
-          <a:p>
-            <a:pPr algn="ctr"/>
-          </a:p>
-        </p:txBody>
-      </p:sp>
-      <p:sp>
-        <p:nvSpPr>
-          <p:cNvPr id="8" name="TextBox 7"/>
-          <p:cNvSpPr txBox="1"/>
-          <p:nvPr/>
-        </p:nvSpPr>
-        <p:spPr>
-          <a:xfrm>
-            <a:off x="1280160" y="3401568"/>
-            <a:ext cx="10332720" cy="822960"/>
-          </a:xfrm>
-          <a:prstGeom prst="rect">
-            <a:avLst/>
-          </a:prstGeom>
-          <a:noFill/>
-        </p:spPr>
-        <p:txBody>
-          <a:bodyPr wrap="square">
-            <a:spAutoFit/>
-          </a:bodyPr>
-          <a:lstStyle/>
-          <a:p>
-            <a:pPr algn="l"/>
-            <a:r>
-              <a:rPr sz="2100" b="0">
-                <a:solidFill>
-                  <a:srgbClr val="F2F4F5"/>
-                </a:solidFill>
-                <a:latin typeface="Inter"/>
-              </a:rPr>
-              <a:t>Prithvi-300M не взлетел</a:t>
-            </a:r>
-            <a:r>
-              <a:rPr sz="1500" b="0">
-                <a:solidFill>
-                  <a:srgbClr val="7D8690"/>
-                </a:solidFill>
-                <a:latin typeface="Inter"/>
-              </a:rPr>
-              <a:t>
-IoU 0.16 — честно убили ветку, а не прячем</a:t>
-            </a:r>
-          </a:p>
-        </p:txBody>
-      </p:sp>
-      <p:sp>
-        <p:nvSpPr>
-          <p:cNvPr id="9" name="Oval 8"/>
-          <p:cNvSpPr/>
-          <p:nvPr/>
-        </p:nvSpPr>
-        <p:spPr>
-          <a:xfrm>
-            <a:off x="914400" y="4608576"/>
-            <a:ext cx="155448" cy="155448"/>
-          </a:xfrm>
-          <a:prstGeom prst="ellipse">
-            <a:avLst/>
-          </a:prstGeom>
-          <a:solidFill>
-            <a:srgbClr val="F2F4F5"/>
-          </a:solidFill>
-          <a:ln>
-            <a:noFill/>
-          </a:ln>
-        </p:spPr>
-        <p:style>
-          <a:lnRef idx="1">
-            <a:schemeClr val="accent1"/>
-          </a:lnRef>
-          <a:fillRef idx="3">
-            <a:schemeClr val="accent1"/>
-          </a:fillRef>
-          <a:effectRef idx="2">
-            <a:schemeClr val="accent1"/>
-          </a:effectRef>
-          <a:fontRef idx="minor">
-            <a:schemeClr val="lt1"/>
-          </a:fontRef>
-        </p:style>
-        <p:txBody>
-          <a:bodyPr rtlCol="0" anchor="ctr"/>
-          <a:lstStyle/>
-          <a:p>
-            <a:pPr algn="ctr"/>
-          </a:p>
-        </p:txBody>
-      </p:sp>
-      <p:sp>
-        <p:nvSpPr>
-          <p:cNvPr id="10" name="TextBox 9"/>
-          <p:cNvSpPr txBox="1"/>
-          <p:nvPr/>
-        </p:nvSpPr>
-        <p:spPr>
-          <a:xfrm>
-            <a:off x="1280160" y="4407408"/>
-            <a:ext cx="10332720" cy="822960"/>
-          </a:xfrm>
-          <a:prstGeom prst="rect">
-            <a:avLst/>
-          </a:prstGeom>
-          <a:noFill/>
-        </p:spPr>
-        <p:txBody>
-          <a:bodyPr wrap="square">
-            <a:spAutoFit/>
-          </a:bodyPr>
-          <a:lstStyle/>
-          <a:p>
-            <a:pPr algn="l"/>
-            <a:r>
-              <a:rPr sz="2100" b="0">
-                <a:solidFill>
-                  <a:srgbClr val="F2F4F5"/>
-                </a:solidFill>
-                <a:latin typeface="Inter"/>
-              </a:rPr>
-              <a:t>Два retry тоже проиграли фризу</a:t>
-            </a:r>
-            <a:r>
-              <a:rPr sz="1500" b="0">
-                <a:solidFill>
-                  <a:srgbClr val="7D8690"/>
-                </a:solidFill>
-                <a:latin typeface="Inter"/>
-              </a:rPr>
-              <a:t>
-сдаём проверенный вариант, а не последний</a:t>
-            </a:r>
-          </a:p>
-        </p:txBody>
-      </p:sp>
-    </p:spTree>
-  </p:cSld>
-  <p:clrMapOvr>
-    <a:masterClrMapping/>
-  </p:clrMapOvr>
-</p:sld>
-</file>
-
-<file path=ppt/slides/slide7.xml><?xml version="1.0" encoding="utf-8"?>
-<p:sld xmlns:a="http://schemas.openxmlformats.org/drawingml/2006/main" xmlns:p="http://schemas.openxmlformats.org/presentationml/2006/main" xmlns:r="http://schemas.openxmlformats.org/officeDocument/2006/relationships">
-  <p:cSld>
-    <p:bg>
-      <p:bgPr>
-        <a:solidFill>
-          <a:srgbClr val="070A0D"/>
-        </a:solidFill>
-        <a:effectLst/>
-      </p:bgPr>
-    </p:bg>
-    <p:spTree>
-      <p:nvGrpSpPr>
-        <p:cNvPr id="1" name=""/>
-        <p:cNvGrpSpPr/>
-        <p:nvPr/>
-      </p:nvGrpSpPr>
-      <p:grpSpPr/>
-      <p:sp>
-        <p:nvSpPr>
-          <p:cNvPr id="2" name="TextBox 1"/>
-          <p:cNvSpPr txBox="1"/>
-          <p:nvPr/>
-        </p:nvSpPr>
-        <p:spPr>
-          <a:xfrm>
-            <a:off x="640080" y="274320"/>
-            <a:ext cx="4572000" cy="365760"/>
-          </a:xfrm>
-          <a:prstGeom prst="rect">
-            <a:avLst/>
-          </a:prstGeom>
-          <a:noFill/>
-        </p:spPr>
-        <p:txBody>
-          <a:bodyPr wrap="square">
-            <a:spAutoFit/>
-          </a:bodyPr>
-          <a:lstStyle/>
-          <a:p>
-            <a:pPr algn="l"/>
-            <a:r>
-              <a:rPr sz="1200" b="1">
-                <a:solidFill>
-                  <a:srgbClr val="7D8690"/>
-                </a:solidFill>
-                <a:latin typeface="Inter"/>
-              </a:rPr>
-              <a:t>07 / 10   </a:t>
-            </a:r>
-            <a:r>
-              <a:rPr sz="1200" b="1">
-                <a:solidFill>
-                  <a:srgbClr val="7D8690"/>
-                </a:solidFill>
-                <a:latin typeface="Inter"/>
-              </a:rPr>
-              <a:t>ЖИМ НОГАМИ · KOSMOHACK</a:t>
-            </a:r>
-          </a:p>
-        </p:txBody>
-      </p:sp>
-      <p:sp>
-        <p:nvSpPr>
-          <p:cNvPr id="3" name="Oval 2"/>
-          <p:cNvSpPr/>
-          <p:nvPr/>
-        </p:nvSpPr>
-        <p:spPr>
-          <a:xfrm>
-            <a:off x="11612880" y="384048"/>
-            <a:ext cx="128016" cy="128016"/>
-          </a:xfrm>
-          <a:prstGeom prst="ellipse">
-            <a:avLst/>
-          </a:prstGeom>
-          <a:solidFill>
-            <a:srgbClr val="62D99A"/>
-          </a:solidFill>
-          <a:ln>
-            <a:noFill/>
-          </a:ln>
-        </p:spPr>
-        <p:style>
-          <a:lnRef idx="1">
-            <a:schemeClr val="accent1"/>
-          </a:lnRef>
-          <a:fillRef idx="3">
-            <a:schemeClr val="accent1"/>
-          </a:fillRef>
-          <a:effectRef idx="2">
-            <a:schemeClr val="accent1"/>
-          </a:effectRef>
-          <a:fontRef idx="minor">
-            <a:schemeClr val="lt1"/>
-          </a:fontRef>
-        </p:style>
-        <p:txBody>
-          <a:bodyPr rtlCol="0" anchor="ctr"/>
-          <a:lstStyle/>
-          <a:p>
-            <a:pPr algn="ctr"/>
-          </a:p>
-        </p:txBody>
-      </p:sp>
-      <p:sp>
-        <p:nvSpPr>
-          <p:cNvPr id="4" name="TextBox 3"/>
-          <p:cNvSpPr txBox="1"/>
-          <p:nvPr/>
-        </p:nvSpPr>
-        <p:spPr>
-          <a:xfrm>
-            <a:off x="640080" y="822960"/>
-            <a:ext cx="10881360" cy="1188720"/>
-          </a:xfrm>
-          <a:prstGeom prst="rect">
-            <a:avLst/>
-          </a:prstGeom>
-          <a:noFill/>
-        </p:spPr>
-        <p:txBody>
-          <a:bodyPr wrap="square">
-            <a:spAutoFit/>
-          </a:bodyPr>
-          <a:lstStyle/>
-          <a:p>
-            <a:pPr algn="l"/>
-            <a:r>
-              <a:rPr sz="4000" b="1">
-                <a:solidFill>
-                  <a:srgbClr val="F2F4F5"/>
-                </a:solidFill>
-                <a:latin typeface="Inter"/>
-              </a:rPr>
-              <a:t>Итог метрики: 0.654</a:t>
-            </a:r>
-          </a:p>
-        </p:txBody>
-      </p:sp>
-      <p:sp>
-        <p:nvSpPr>
-          <p:cNvPr id="5" name="Rounded Rectangle 4"/>
-          <p:cNvSpPr/>
-          <p:nvPr/>
-        </p:nvSpPr>
-        <p:spPr>
-          <a:xfrm>
-            <a:off x="640080" y="2286000"/>
-            <a:ext cx="10881360" cy="1463040"/>
-          </a:xfrm>
-          <a:prstGeom prst="roundRect">
-            <a:avLst>
-              <a:gd name="adj" fmla="val 7000"/>
-            </a:avLst>
-          </a:prstGeom>
-          <a:solidFill>
-            <a:srgbClr val="0D1217"/>
-          </a:solidFill>
-          <a:ln w="12700">
-            <a:solidFill>
-              <a:srgbClr val="2A333D"/>
-            </a:solidFill>
-          </a:ln>
-        </p:spPr>
-        <p:style>
-          <a:lnRef idx="1">
-            <a:schemeClr val="accent1"/>
-          </a:lnRef>
-          <a:fillRef idx="3">
-            <a:schemeClr val="accent1"/>
-          </a:fillRef>
-          <a:effectRef idx="2">
-            <a:schemeClr val="accent1"/>
-          </a:effectRef>
-          <a:fontRef idx="minor">
-            <a:schemeClr val="lt1"/>
-          </a:fontRef>
-        </p:style>
-        <p:txBody>
-          <a:bodyPr rtlCol="0" anchor="ctr"/>
-          <a:lstStyle/>
-          <a:p>
-            <a:pPr algn="ctr"/>
-          </a:p>
-        </p:txBody>
-      </p:sp>
-      <p:sp>
-        <p:nvSpPr>
-          <p:cNvPr id="6" name="TextBox 5"/>
-          <p:cNvSpPr txBox="1"/>
-          <p:nvPr/>
-        </p:nvSpPr>
-        <p:spPr>
-          <a:xfrm>
-            <a:off x="914400" y="2468880"/>
-            <a:ext cx="10332720" cy="1097280"/>
-          </a:xfrm>
-          <a:prstGeom prst="rect">
-            <a:avLst/>
-          </a:prstGeom>
-          <a:noFill/>
-        </p:spPr>
-        <p:txBody>
-          <a:bodyPr wrap="square">
-            <a:spAutoFit/>
-          </a:bodyPr>
-          <a:lstStyle/>
-          <a:p>
-            <a:pPr algn="l"/>
-            <a:r>
-              <a:rPr sz="2700" b="1">
-                <a:solidFill>
-                  <a:srgbClr val="F2F4F5"/>
-                </a:solidFill>
-                <a:latin typeface="Inter"/>
-              </a:rPr>
-              <a:t>0.35 × 0.8434  +  0.35 × 0.5239  +  0.30 × 0.5430  =  0.654</a:t>
-            </a:r>
-            <a:r>
-              <a:rPr sz="1600" b="0">
-                <a:solidFill>
-                  <a:srgbClr val="7D8690"/>
-                </a:solidFill>
-                <a:latin typeface="Inter"/>
-              </a:rPr>
-              <a:t>
-micro-pool по всем пикселям — устойчиво к редкости горения</a:t>
-            </a:r>
-          </a:p>
-        </p:txBody>
-      </p:sp>
-      <p:sp>
-        <p:nvSpPr>
-          <p:cNvPr id="7" name="Oval 6"/>
-          <p:cNvSpPr/>
-          <p:nvPr/>
-        </p:nvSpPr>
-        <p:spPr>
-          <a:xfrm>
-            <a:off x="914400" y="4334255"/>
-            <a:ext cx="155448" cy="155448"/>
-          </a:xfrm>
-          <a:prstGeom prst="ellipse">
-            <a:avLst/>
-          </a:prstGeom>
-          <a:solidFill>
-            <a:srgbClr val="62D99A"/>
-          </a:solidFill>
-          <a:ln>
-            <a:noFill/>
-          </a:ln>
-        </p:spPr>
-        <p:style>
-          <a:lnRef idx="1">
-            <a:schemeClr val="accent1"/>
-          </a:lnRef>
-          <a:fillRef idx="3">
-            <a:schemeClr val="accent1"/>
-          </a:fillRef>
-          <a:effectRef idx="2">
-            <a:schemeClr val="accent1"/>
-          </a:effectRef>
-          <a:fontRef idx="minor">
-            <a:schemeClr val="lt1"/>
-          </a:fontRef>
-        </p:style>
-        <p:txBody>
-          <a:bodyPr rtlCol="0" anchor="ctr"/>
-          <a:lstStyle/>
-          <a:p>
-            <a:pPr algn="ctr"/>
-          </a:p>
-        </p:txBody>
-      </p:sp>
-      <p:sp>
-        <p:nvSpPr>
-          <p:cNvPr id="8" name="TextBox 7"/>
-          <p:cNvSpPr txBox="1"/>
-          <p:nvPr/>
-        </p:nvSpPr>
-        <p:spPr>
-          <a:xfrm>
-            <a:off x="1280160" y="4133087"/>
-            <a:ext cx="10332720" cy="822960"/>
-          </a:xfrm>
-          <a:prstGeom prst="rect">
-            <a:avLst/>
-          </a:prstGeom>
-          <a:noFill/>
-        </p:spPr>
-        <p:txBody>
-          <a:bodyPr wrap="square">
-            <a:spAutoFit/>
-          </a:bodyPr>
-          <a:lstStyle/>
-          <a:p>
-            <a:pPr algn="l"/>
-            <a:r>
-              <a:rPr sz="1900" b="0">
-                <a:solidFill>
-                  <a:srgbClr val="F2F4F5"/>
-                </a:solidFill>
-                <a:latin typeface="Inter"/>
-              </a:rPr>
-              <a:t>447 строк = шаблону · RLE валиден · NaN 0 · пересечений 0</a:t>
-            </a:r>
-          </a:p>
-        </p:txBody>
-      </p:sp>
-      <p:sp>
-        <p:nvSpPr>
-          <p:cNvPr id="9" name="Oval 8"/>
-          <p:cNvSpPr/>
-          <p:nvPr/>
-        </p:nvSpPr>
-        <p:spPr>
-          <a:xfrm>
-            <a:off x="914400" y="5157216"/>
-            <a:ext cx="155448" cy="155448"/>
-          </a:xfrm>
-          <a:prstGeom prst="ellipse">
-            <a:avLst/>
-          </a:prstGeom>
-          <a:solidFill>
-            <a:srgbClr val="F2F4F5"/>
-          </a:solidFill>
-          <a:ln>
-            <a:noFill/>
-          </a:ln>
-        </p:spPr>
-        <p:style>
-          <a:lnRef idx="1">
-            <a:schemeClr val="accent1"/>
-          </a:lnRef>
-          <a:fillRef idx="3">
-            <a:schemeClr val="accent1"/>
-          </a:fillRef>
-          <a:effectRef idx="2">
-            <a:schemeClr val="accent1"/>
-          </a:effectRef>
-          <a:fontRef idx="minor">
-            <a:schemeClr val="lt1"/>
-          </a:fontRef>
-        </p:style>
-        <p:txBody>
-          <a:bodyPr rtlCol="0" anchor="ctr"/>
-          <a:lstStyle/>
-          <a:p>
-            <a:pPr algn="ctr"/>
-          </a:p>
-        </p:txBody>
-      </p:sp>
-      <p:sp>
-        <p:nvSpPr>
-          <p:cNvPr id="10" name="TextBox 9"/>
-          <p:cNvSpPr txBox="1"/>
-          <p:nvPr/>
-        </p:nvSpPr>
-        <p:spPr>
-          <a:xfrm>
-            <a:off x="1280160" y="4956048"/>
-            <a:ext cx="10332720" cy="822960"/>
-          </a:xfrm>
-          <a:prstGeom prst="rect">
-            <a:avLst/>
-          </a:prstGeom>
-          <a:noFill/>
-        </p:spPr>
-        <p:txBody>
-          <a:bodyPr wrap="square">
-            <a:spAutoFit/>
-          </a:bodyPr>
-          <a:lstStyle/>
-          <a:p>
-            <a:pPr algn="l"/>
-            <a:r>
-              <a:rPr sz="1900" b="0">
-                <a:solidFill>
-                  <a:srgbClr val="F2F4F5"/>
-                </a:solidFill>
-                <a:latin typeface="Inter"/>
-              </a:rPr>
-              <a:t>Два прогона — побайтово идентичны · md5 зафиксирован</a:t>
-            </a:r>
-          </a:p>
-        </p:txBody>
-      </p:sp>
-    </p:spTree>
-  </p:cSld>
-  <p:clrMapOvr>
-    <a:masterClrMapping/>
-  </p:clrMapOvr>
-</p:sld>
-</file>
-
-<file path=ppt/slides/slide8.xml><?xml version="1.0" encoding="utf-8"?>
 <p:sld xmlns:a="http://schemas.openxmlformats.org/drawingml/2006/main" xmlns:p="http://schemas.openxmlformats.org/presentationml/2006/main" xmlns:r="http://schemas.openxmlformats.org/officeDocument/2006/relationships">
   <p:cSld>
     <p:bg>
@@ -7645,6 +6238,596 @@
 </p:sld>
 </file>
 
+<file path=ppt/slides/slide7.xml><?xml version="1.0" encoding="utf-8"?>
+<p:sld xmlns:a="http://schemas.openxmlformats.org/drawingml/2006/main" xmlns:p="http://schemas.openxmlformats.org/presentationml/2006/main" xmlns:r="http://schemas.openxmlformats.org/officeDocument/2006/relationships">
+  <p:cSld>
+    <p:bg>
+      <p:bgPr>
+        <a:solidFill>
+          <a:srgbClr val="070A0D"/>
+        </a:solidFill>
+        <a:effectLst/>
+      </p:bgPr>
+    </p:bg>
+    <p:spTree>
+      <p:nvGrpSpPr>
+        <p:cNvPr id="1" name=""/>
+        <p:cNvGrpSpPr/>
+        <p:nvPr/>
+      </p:nvGrpSpPr>
+      <p:grpSpPr/>
+      <p:sp>
+        <p:nvSpPr>
+          <p:cNvPr id="2" name="TextBox 1"/>
+          <p:cNvSpPr txBox="1"/>
+          <p:nvPr/>
+        </p:nvSpPr>
+        <p:spPr>
+          <a:xfrm>
+            <a:off x="640080" y="274320"/>
+            <a:ext cx="10881360" cy="365760"/>
+          </a:xfrm>
+          <a:prstGeom prst="rect">
+            <a:avLst/>
+          </a:prstGeom>
+          <a:noFill/>
+        </p:spPr>
+        <p:txBody>
+          <a:bodyPr wrap="square">
+            <a:spAutoFit/>
+          </a:bodyPr>
+          <a:lstStyle/>
+          <a:p>
+            <a:pPr algn="l"/>
+            <a:r>
+              <a:rPr sz="1200" b="1">
+                <a:solidFill>
+                  <a:srgbClr val="7D8690"/>
+                </a:solidFill>
+                <a:latin typeface="Inter"/>
+              </a:rPr>
+              <a:t>ЖИМ НОГАМИ · KOSMOHACK</a:t>
+            </a:r>
+          </a:p>
+        </p:txBody>
+      </p:sp>
+      <p:sp>
+        <p:nvSpPr>
+          <p:cNvPr id="3" name="Oval 2"/>
+          <p:cNvSpPr/>
+          <p:nvPr/>
+        </p:nvSpPr>
+        <p:spPr>
+          <a:xfrm>
+            <a:off x="11658600" y="384048"/>
+            <a:ext cx="128016" cy="128016"/>
+          </a:xfrm>
+          <a:prstGeom prst="ellipse">
+            <a:avLst/>
+          </a:prstGeom>
+          <a:solidFill>
+            <a:srgbClr val="62D99A"/>
+          </a:solidFill>
+          <a:ln>
+            <a:noFill/>
+          </a:ln>
+        </p:spPr>
+        <p:style>
+          <a:lnRef idx="1">
+            <a:schemeClr val="accent1"/>
+          </a:lnRef>
+          <a:fillRef idx="3">
+            <a:schemeClr val="accent1"/>
+          </a:fillRef>
+          <a:effectRef idx="2">
+            <a:schemeClr val="accent1"/>
+          </a:effectRef>
+          <a:fontRef idx="minor">
+            <a:schemeClr val="lt1"/>
+          </a:fontRef>
+        </p:style>
+        <p:txBody>
+          <a:bodyPr rtlCol="0" anchor="ctr"/>
+          <a:lstStyle/>
+          <a:p>
+            <a:pPr algn="ctr"/>
+          </a:p>
+        </p:txBody>
+      </p:sp>
+      <p:sp>
+        <p:nvSpPr>
+          <p:cNvPr id="4" name="TextBox 3"/>
+          <p:cNvSpPr txBox="1"/>
+          <p:nvPr/>
+        </p:nvSpPr>
+        <p:spPr>
+          <a:xfrm>
+            <a:off x="640080" y="640080"/>
+            <a:ext cx="10881360" cy="1097280"/>
+          </a:xfrm>
+          <a:prstGeom prst="rect">
+            <a:avLst/>
+          </a:prstGeom>
+          <a:noFill/>
+        </p:spPr>
+        <p:txBody>
+          <a:bodyPr wrap="square">
+            <a:spAutoFit/>
+          </a:bodyPr>
+          <a:lstStyle/>
+          <a:p>
+            <a:pPr algn="l"/>
+            <a:r>
+              <a:rPr sz="3400" b="1">
+                <a:solidFill>
+                  <a:srgbClr val="F2F4F5"/>
+                </a:solidFill>
+                <a:latin typeface="Inter"/>
+              </a:rPr>
+              <a:t>Карта умеет: слои, степени, справка</a:t>
+            </a:r>
+          </a:p>
+        </p:txBody>
+      </p:sp>
+      <p:pic>
+        <p:nvPicPr>
+          <p:cNvPr id="5" name="Picture 4" descr="02-burned-only.png"/>
+          <p:cNvPicPr>
+            <a:picLocks noChangeAspect="1"/>
+          </p:cNvPicPr>
+          <p:nvPr/>
+        </p:nvPicPr>
+        <p:blipFill>
+          <a:blip r:embed="rId2"/>
+          <a:stretch>
+            <a:fillRect/>
+          </a:stretch>
+        </p:blipFill>
+        <p:spPr>
+          <a:xfrm>
+            <a:off x="640080" y="1828800"/>
+            <a:ext cx="6949440" cy="3909060"/>
+          </a:xfrm>
+          <a:prstGeom prst="rect">
+            <a:avLst/>
+          </a:prstGeom>
+        </p:spPr>
+      </p:pic>
+      <p:pic>
+        <p:nvPicPr>
+          <p:cNvPr id="6" name="Picture 5" descr="03-analytics.png"/>
+          <p:cNvPicPr>
+            <a:picLocks noChangeAspect="1"/>
+          </p:cNvPicPr>
+          <p:nvPr/>
+        </p:nvPicPr>
+        <p:blipFill>
+          <a:blip r:embed="rId3"/>
+          <a:stretch>
+            <a:fillRect/>
+          </a:stretch>
+        </p:blipFill>
+        <p:spPr>
+          <a:xfrm>
+            <a:off x="7863840" y="2926080"/>
+            <a:ext cx="3657600" cy="467617"/>
+          </a:xfrm>
+          <a:prstGeom prst="rect">
+            <a:avLst/>
+          </a:prstGeom>
+        </p:spPr>
+      </p:pic>
+    </p:spTree>
+  </p:cSld>
+  <p:clrMapOvr>
+    <a:masterClrMapping/>
+  </p:clrMapOvr>
+</p:sld>
+</file>
+
+<file path=ppt/slides/slide8.xml><?xml version="1.0" encoding="utf-8"?>
+<p:sld xmlns:a="http://schemas.openxmlformats.org/drawingml/2006/main" xmlns:p="http://schemas.openxmlformats.org/presentationml/2006/main" xmlns:r="http://schemas.openxmlformats.org/officeDocument/2006/relationships">
+  <p:cSld>
+    <p:bg>
+      <p:bgPr>
+        <a:solidFill>
+          <a:srgbClr val="070A0D"/>
+        </a:solidFill>
+        <a:effectLst/>
+      </p:bgPr>
+    </p:bg>
+    <p:spTree>
+      <p:nvGrpSpPr>
+        <p:cNvPr id="1" name=""/>
+        <p:cNvGrpSpPr/>
+        <p:nvPr/>
+      </p:nvGrpSpPr>
+      <p:grpSpPr/>
+      <p:sp>
+        <p:nvSpPr>
+          <p:cNvPr id="2" name="TextBox 1"/>
+          <p:cNvSpPr txBox="1"/>
+          <p:nvPr/>
+        </p:nvSpPr>
+        <p:spPr>
+          <a:xfrm>
+            <a:off x="640080" y="274320"/>
+            <a:ext cx="10881360" cy="365760"/>
+          </a:xfrm>
+          <a:prstGeom prst="rect">
+            <a:avLst/>
+          </a:prstGeom>
+          <a:noFill/>
+        </p:spPr>
+        <p:txBody>
+          <a:bodyPr wrap="square">
+            <a:spAutoFit/>
+          </a:bodyPr>
+          <a:lstStyle/>
+          <a:p>
+            <a:pPr algn="l"/>
+            <a:r>
+              <a:rPr sz="1200" b="1">
+                <a:solidFill>
+                  <a:srgbClr val="7D8690"/>
+                </a:solidFill>
+                <a:latin typeface="Inter"/>
+              </a:rPr>
+              <a:t>ЖИМ НОГАМИ · KOSMOHACK</a:t>
+            </a:r>
+          </a:p>
+        </p:txBody>
+      </p:sp>
+      <p:sp>
+        <p:nvSpPr>
+          <p:cNvPr id="3" name="Oval 2"/>
+          <p:cNvSpPr/>
+          <p:nvPr/>
+        </p:nvSpPr>
+        <p:spPr>
+          <a:xfrm>
+            <a:off x="11658600" y="384048"/>
+            <a:ext cx="128016" cy="128016"/>
+          </a:xfrm>
+          <a:prstGeom prst="ellipse">
+            <a:avLst/>
+          </a:prstGeom>
+          <a:solidFill>
+            <a:srgbClr val="62D99A"/>
+          </a:solidFill>
+          <a:ln>
+            <a:noFill/>
+          </a:ln>
+        </p:spPr>
+        <p:style>
+          <a:lnRef idx="1">
+            <a:schemeClr val="accent1"/>
+          </a:lnRef>
+          <a:fillRef idx="3">
+            <a:schemeClr val="accent1"/>
+          </a:fillRef>
+          <a:effectRef idx="2">
+            <a:schemeClr val="accent1"/>
+          </a:effectRef>
+          <a:fontRef idx="minor">
+            <a:schemeClr val="lt1"/>
+          </a:fontRef>
+        </p:style>
+        <p:txBody>
+          <a:bodyPr rtlCol="0" anchor="ctr"/>
+          <a:lstStyle/>
+          <a:p>
+            <a:pPr algn="ctr"/>
+          </a:p>
+        </p:txBody>
+      </p:sp>
+      <p:sp>
+        <p:nvSpPr>
+          <p:cNvPr id="4" name="TextBox 3"/>
+          <p:cNvSpPr txBox="1"/>
+          <p:nvPr/>
+        </p:nvSpPr>
+        <p:spPr>
+          <a:xfrm>
+            <a:off x="640080" y="777240"/>
+            <a:ext cx="10881360" cy="1097280"/>
+          </a:xfrm>
+          <a:prstGeom prst="rect">
+            <a:avLst/>
+          </a:prstGeom>
+          <a:noFill/>
+        </p:spPr>
+        <p:txBody>
+          <a:bodyPr wrap="square">
+            <a:spAutoFit/>
+          </a:bodyPr>
+          <a:lstStyle/>
+          <a:p>
+            <a:pPr algn="l"/>
+            <a:r>
+              <a:rPr sz="3800" b="1">
+                <a:solidFill>
+                  <a:srgbClr val="F2F4F5"/>
+                </a:solidFill>
+                <a:latin typeface="Inter"/>
+              </a:rPr>
+              <a:t>Под картой — настоящее API</a:t>
+            </a:r>
+          </a:p>
+        </p:txBody>
+      </p:sp>
+      <p:sp>
+        <p:nvSpPr>
+          <p:cNvPr id="5" name="Oval 4"/>
+          <p:cNvSpPr/>
+          <p:nvPr/>
+        </p:nvSpPr>
+        <p:spPr>
+          <a:xfrm>
+            <a:off x="914400" y="2414016"/>
+            <a:ext cx="155448" cy="155448"/>
+          </a:xfrm>
+          <a:prstGeom prst="ellipse">
+            <a:avLst/>
+          </a:prstGeom>
+          <a:solidFill>
+            <a:srgbClr val="62D99A"/>
+          </a:solidFill>
+          <a:ln>
+            <a:noFill/>
+          </a:ln>
+        </p:spPr>
+        <p:style>
+          <a:lnRef idx="1">
+            <a:schemeClr val="accent1"/>
+          </a:lnRef>
+          <a:fillRef idx="3">
+            <a:schemeClr val="accent1"/>
+          </a:fillRef>
+          <a:effectRef idx="2">
+            <a:schemeClr val="accent1"/>
+          </a:effectRef>
+          <a:fontRef idx="minor">
+            <a:schemeClr val="lt1"/>
+          </a:fontRef>
+        </p:style>
+        <p:txBody>
+          <a:bodyPr rtlCol="0" anchor="ctr"/>
+          <a:lstStyle/>
+          <a:p>
+            <a:pPr algn="ctr"/>
+          </a:p>
+        </p:txBody>
+      </p:sp>
+      <p:sp>
+        <p:nvSpPr>
+          <p:cNvPr id="6" name="TextBox 5"/>
+          <p:cNvSpPr txBox="1"/>
+          <p:nvPr/>
+        </p:nvSpPr>
+        <p:spPr>
+          <a:xfrm>
+            <a:off x="1280160" y="2212848"/>
+            <a:ext cx="10241280" cy="868680"/>
+          </a:xfrm>
+          <a:prstGeom prst="rect">
+            <a:avLst/>
+          </a:prstGeom>
+          <a:noFill/>
+        </p:spPr>
+        <p:txBody>
+          <a:bodyPr wrap="square">
+            <a:spAutoFit/>
+          </a:bodyPr>
+          <a:lstStyle/>
+          <a:p>
+            <a:pPr algn="l"/>
+            <a:r>
+              <a:rPr sz="2100" b="0">
+                <a:solidFill>
+                  <a:srgbClr val="F2F4F5"/>
+                </a:solidFill>
+                <a:latin typeface="Inter"/>
+              </a:rPr>
+              <a:t>3 GET по прямоугольнику + 3 POST по полигону</a:t>
+            </a:r>
+            <a:r>
+              <a:rPr sz="1400" b="0">
+                <a:solidFill>
+                  <a:srgbClr val="7D8690"/>
+                </a:solidFill>
+                <a:latin typeface="Inter"/>
+              </a:rPr>
+              <a:t>
+точки, полигоны, аналитика — geojson, json, shp-архив</a:t>
+            </a:r>
+          </a:p>
+        </p:txBody>
+      </p:sp>
+      <p:sp>
+        <p:nvSpPr>
+          <p:cNvPr id="7" name="Oval 6"/>
+          <p:cNvSpPr/>
+          <p:nvPr/>
+        </p:nvSpPr>
+        <p:spPr>
+          <a:xfrm>
+            <a:off x="914400" y="3557016"/>
+            <a:ext cx="155448" cy="155448"/>
+          </a:xfrm>
+          <a:prstGeom prst="ellipse">
+            <a:avLst/>
+          </a:prstGeom>
+          <a:solidFill>
+            <a:srgbClr val="F2F4F5"/>
+          </a:solidFill>
+          <a:ln>
+            <a:noFill/>
+          </a:ln>
+        </p:spPr>
+        <p:style>
+          <a:lnRef idx="1">
+            <a:schemeClr val="accent1"/>
+          </a:lnRef>
+          <a:fillRef idx="3">
+            <a:schemeClr val="accent1"/>
+          </a:fillRef>
+          <a:effectRef idx="2">
+            <a:schemeClr val="accent1"/>
+          </a:effectRef>
+          <a:fontRef idx="minor">
+            <a:schemeClr val="lt1"/>
+          </a:fontRef>
+        </p:style>
+        <p:txBody>
+          <a:bodyPr rtlCol="0" anchor="ctr"/>
+          <a:lstStyle/>
+          <a:p>
+            <a:pPr algn="ctr"/>
+          </a:p>
+        </p:txBody>
+      </p:sp>
+      <p:sp>
+        <p:nvSpPr>
+          <p:cNvPr id="8" name="TextBox 7"/>
+          <p:cNvSpPr txBox="1"/>
+          <p:nvPr/>
+        </p:nvSpPr>
+        <p:spPr>
+          <a:xfrm>
+            <a:off x="1280160" y="3355848"/>
+            <a:ext cx="10241280" cy="868680"/>
+          </a:xfrm>
+          <a:prstGeom prst="rect">
+            <a:avLst/>
+          </a:prstGeom>
+          <a:noFill/>
+        </p:spPr>
+        <p:txBody>
+          <a:bodyPr wrap="square">
+            <a:spAutoFit/>
+          </a:bodyPr>
+          <a:lstStyle/>
+          <a:p>
+            <a:pPr algn="l"/>
+            <a:r>
+              <a:rPr sz="2100" b="0">
+                <a:solidFill>
+                  <a:srgbClr val="F2F4F5"/>
+                </a:solidFill>
+                <a:latin typeface="Inter"/>
+              </a:rPr>
+              <a:t>Проверено серией из 9 curl-запросов</a:t>
+            </a:r>
+            <a:r>
+              <a:rPr sz="1400" b="0">
+                <a:solidFill>
+                  <a:srgbClr val="7D8690"/>
+                </a:solidFill>
+                <a:latin typeface="Inter"/>
+              </a:rPr>
+              <a:t>
+все зелёные — файл серии лежит в репозитории</a:t>
+            </a:r>
+          </a:p>
+        </p:txBody>
+      </p:sp>
+      <p:sp>
+        <p:nvSpPr>
+          <p:cNvPr id="9" name="Oval 8"/>
+          <p:cNvSpPr/>
+          <p:nvPr/>
+        </p:nvSpPr>
+        <p:spPr>
+          <a:xfrm>
+            <a:off x="914400" y="4700016"/>
+            <a:ext cx="155448" cy="155448"/>
+          </a:xfrm>
+          <a:prstGeom prst="ellipse">
+            <a:avLst/>
+          </a:prstGeom>
+          <a:solidFill>
+            <a:srgbClr val="E6C65C"/>
+          </a:solidFill>
+          <a:ln>
+            <a:noFill/>
+          </a:ln>
+        </p:spPr>
+        <p:style>
+          <a:lnRef idx="1">
+            <a:schemeClr val="accent1"/>
+          </a:lnRef>
+          <a:fillRef idx="3">
+            <a:schemeClr val="accent1"/>
+          </a:fillRef>
+          <a:effectRef idx="2">
+            <a:schemeClr val="accent1"/>
+          </a:effectRef>
+          <a:fontRef idx="minor">
+            <a:schemeClr val="lt1"/>
+          </a:fontRef>
+        </p:style>
+        <p:txBody>
+          <a:bodyPr rtlCol="0" anchor="ctr"/>
+          <a:lstStyle/>
+          <a:p>
+            <a:pPr algn="ctr"/>
+          </a:p>
+        </p:txBody>
+      </p:sp>
+      <p:sp>
+        <p:nvSpPr>
+          <p:cNvPr id="10" name="TextBox 9"/>
+          <p:cNvSpPr txBox="1"/>
+          <p:nvPr/>
+        </p:nvSpPr>
+        <p:spPr>
+          <a:xfrm>
+            <a:off x="1280160" y="4498848"/>
+            <a:ext cx="10241280" cy="868680"/>
+          </a:xfrm>
+          <a:prstGeom prst="rect">
+            <a:avLst/>
+          </a:prstGeom>
+          <a:noFill/>
+        </p:spPr>
+        <p:txBody>
+          <a:bodyPr wrap="square">
+            <a:spAutoFit/>
+          </a:bodyPr>
+          <a:lstStyle/>
+          <a:p>
+            <a:pPr algn="l"/>
+            <a:r>
+              <a:rPr sz="2100" b="0">
+                <a:solidFill>
+                  <a:srgbClr val="F2F4F5"/>
+                </a:solidFill>
+                <a:latin typeface="Inter"/>
+              </a:rPr>
+              <a:t>Без базы данных — файловый бэкенд</a:t>
+            </a:r>
+            <a:r>
+              <a:rPr sz="1400" b="0">
+                <a:solidFill>
+                  <a:srgbClr val="7D8690"/>
+                </a:solidFill>
+                <a:latin typeface="Inter"/>
+              </a:rPr>
+              <a:t>
+нечему падать на защите</a:t>
+            </a:r>
+          </a:p>
+        </p:txBody>
+      </p:sp>
+    </p:spTree>
+  </p:cSld>
+  <p:clrMapOvr>
+    <a:masterClrMapping/>
+  </p:clrMapOvr>
+</p:sld>
+</file>
+
 <file path=ppt/slides/slide9.xml><?xml version="1.0" encoding="utf-8"?>
 <p:sld xmlns:a="http://schemas.openxmlformats.org/drawingml/2006/main" xmlns:p="http://schemas.openxmlformats.org/presentationml/2006/main" xmlns:r="http://schemas.openxmlformats.org/officeDocument/2006/relationships">
   <p:cSld>
@@ -7672,7 +6855,7 @@
         <p:spPr>
           <a:xfrm>
             <a:off x="640080" y="274320"/>
-            <a:ext cx="4572000" cy="365760"/>
+            <a:ext cx="10881360" cy="365760"/>
           </a:xfrm>
           <a:prstGeom prst="rect">
             <a:avLst/>
@@ -7686,15 +6869,6 @@
           <a:lstStyle/>
           <a:p>
             <a:pPr algn="l"/>
-            <a:r>
-              <a:rPr sz="1200" b="1">
-                <a:solidFill>
-                  <a:srgbClr val="7D8690"/>
-                </a:solidFill>
-                <a:latin typeface="Inter"/>
-              </a:rPr>
-              <a:t>09 / 10   </a:t>
-            </a:r>
             <a:r>
               <a:rPr sz="1200" b="1">
                 <a:solidFill>
@@ -7715,7 +6889,7 @@
         </p:nvSpPr>
         <p:spPr>
           <a:xfrm>
-            <a:off x="11612880" y="384048"/>
+            <a:off x="11658600" y="384048"/>
             <a:ext cx="128016" cy="128016"/>
           </a:xfrm>
           <a:prstGeom prst="ellipse">
@@ -7758,8 +6932,8 @@
         </p:nvSpPr>
         <p:spPr>
           <a:xfrm>
-            <a:off x="640080" y="822960"/>
-            <a:ext cx="10881360" cy="1188720"/>
+            <a:off x="640080" y="777240"/>
+            <a:ext cx="10881360" cy="1097280"/>
           </a:xfrm>
           <a:prstGeom prst="rect">
             <a:avLst/>
@@ -7774,13 +6948,13 @@
           <a:p>
             <a:pPr algn="l"/>
             <a:r>
-              <a:rPr sz="4000" b="1">
+              <a:rPr sz="3800" b="1">
                 <a:solidFill>
                   <a:srgbClr val="F2F4F5"/>
                 </a:solidFill>
                 <a:latin typeface="Inter"/>
               </a:rPr>
-              <a:t>Запуск — одна команда. У вас тоже заведётся</a:t>
+              <a:t>Заведётся и у вас</a:t>
             </a:r>
           </a:p>
         </p:txBody>
@@ -7793,7 +6967,7 @@
         </p:nvSpPr>
         <p:spPr>
           <a:xfrm>
-            <a:off x="914400" y="2596896"/>
+            <a:off x="914400" y="2414016"/>
             <a:ext cx="155448" cy="155448"/>
           </a:xfrm>
           <a:prstGeom prst="ellipse">
@@ -7836,8 +7010,8 @@
         </p:nvSpPr>
         <p:spPr>
           <a:xfrm>
-            <a:off x="1280160" y="2395728"/>
-            <a:ext cx="10332720" cy="822960"/>
+            <a:off x="1280160" y="2212848"/>
+            <a:ext cx="10241280" cy="868680"/>
           </a:xfrm>
           <a:prstGeom prst="rect">
             <a:avLst/>
@@ -7852,7 +7026,7 @@
           <a:p>
             <a:pPr algn="l"/>
             <a:r>
-              <a:rPr sz="2100" b="0">
+              <a:rPr sz="2200" b="0">
                 <a:solidFill>
                   <a:srgbClr val="F2F4F5"/>
                 </a:solidFill>
@@ -7861,14 +7035,14 @@
               <a:t>Веса лежат в репозитории</a:t>
             </a:r>
             <a:r>
-              <a:rPr sz="1500" b="0">
+              <a:rPr sz="1400" b="0">
                 <a:solidFill>
                   <a:srgbClr val="7D8690"/>
                 </a:solidFill>
                 <a:latin typeface="Inter"/>
               </a:rPr>
               <a:t>
-докачивать нечего · pip install + requirements.lock</a:t>
+докачивать нечего</a:t>
             </a:r>
           </a:p>
         </p:txBody>
@@ -7925,7 +7099,7 @@
         <p:spPr>
           <a:xfrm>
             <a:off x="1280160" y="3401568"/>
-            <a:ext cx="10332720" cy="822960"/>
+            <a:ext cx="10241280" cy="868680"/>
           </a:xfrm>
           <a:prstGeom prst="rect">
             <a:avLst/>
@@ -7940,23 +7114,23 @@
           <a:p>
             <a:pPr algn="l"/>
             <a:r>
-              <a:rPr sz="2100" b="0">
+              <a:rPr sz="2200" b="0">
                 <a:solidFill>
                   <a:srgbClr val="F2F4F5"/>
                 </a:solidFill>
                 <a:latin typeface="Inter"/>
               </a:rPr>
-              <a:t>inference.py --data-dir --output</a:t>
-            </a:r>
-            <a:r>
-              <a:rPr sz="1500" b="0">
+              <a:t>Одна команда инференса — ~28 секунд</a:t>
+            </a:r>
+            <a:r>
+              <a:rPr sz="1400" b="0">
                 <a:solidFill>
                   <a:srgbClr val="7D8690"/>
                 </a:solidFill>
                 <a:latin typeface="Inter"/>
               </a:rPr>
               <a:t>
-~28 секунд на GPU · на CPU дольше, результат тот же</a:t>
+на CPU дольше, результат тот же</a:t>
             </a:r>
           </a:p>
         </p:txBody>
@@ -7969,7 +7143,7 @@
         </p:nvSpPr>
         <p:spPr>
           <a:xfrm>
-            <a:off x="914400" y="4608576"/>
+            <a:off x="914400" y="4791455"/>
             <a:ext cx="155448" cy="155448"/>
           </a:xfrm>
           <a:prstGeom prst="ellipse">
@@ -8012,8 +7186,8 @@
         </p:nvSpPr>
         <p:spPr>
           <a:xfrm>
-            <a:off x="1280160" y="4407408"/>
-            <a:ext cx="10332720" cy="822960"/>
+            <a:off x="1280160" y="4590288"/>
+            <a:ext cx="10241280" cy="868680"/>
           </a:xfrm>
           <a:prstGeom prst="rect">
             <a:avLst/>
@@ -8028,23 +7202,23 @@
           <a:p>
             <a:pPr algn="l"/>
             <a:r>
-              <a:rPr sz="2100" b="0">
+              <a:rPr sz="2200" b="0">
                 <a:solidFill>
                   <a:srgbClr val="F2F4F5"/>
                 </a:solidFill>
                 <a:latin typeface="Inter"/>
               </a:rPr>
-              <a:t>Сервис: 3 GET + 3 POST · geojson/json/shp</a:t>
-            </a:r>
-            <a:r>
-              <a:rPr sz="1500" b="0">
+              <a:t>Одна команда сервиса + открыть страницу</a:t>
+            </a:r>
+            <a:r>
+              <a:rPr sz="1400" b="0">
                 <a:solidFill>
                   <a:srgbClr val="7D8690"/>
                 </a:solidFill>
                 <a:latin typeface="Inter"/>
               </a:rPr>
               <a:t>
-фронт на localhost:8000 · демо-серия в репо</a:t>
+демо из коробки</a:t>
             </a:r>
           </a:p>
         </p:txBody>

--- a/docs/slides-deck.pptx
+++ b/docs/slides-deck.pptx
@@ -511,77 +511,7 @@
           <a:lstStyle/>
           <a:p>
             <a:r>
-              <a:t>Сразу показываем что готово, без прелюдий.</a:t>
-            </a:r>
-          </a:p>
-        </p:txBody>
-      </p:sp>
-      <p:sp>
-        <p:nvSpPr>
-          <p:cNvPr id="4" name="Slide Number Placeholder 3"/>
-          <p:cNvSpPr>
-            <a:spLocks noGrp="1"/>
-          </p:cNvSpPr>
-          <p:nvPr>
-            <p:ph type="sldNum" idx="5" sz="quarter"/>
-          </p:nvPr>
-        </p:nvSpPr>
-        <p:spPr/>
-      </p:sp>
-    </p:spTree>
-  </p:cSld>
-  <p:clrMapOvr>
-    <a:masterClrMapping/>
-  </p:clrMapOvr>
-</p:notes>
-</file>
-
-<file path=ppt/notesSlides/notesSlide10.xml><?xml version="1.0" encoding="utf-8"?>
-<p:notes xmlns:a="http://schemas.openxmlformats.org/drawingml/2006/main" xmlns:p="http://schemas.openxmlformats.org/presentationml/2006/main" xmlns:r="http://schemas.openxmlformats.org/officeDocument/2006/relationships">
-  <p:cSld>
-    <p:spTree>
-      <p:nvGrpSpPr>
-        <p:cNvPr id="1" name=""/>
-        <p:cNvGrpSpPr/>
-        <p:nvPr/>
-      </p:nvGrpSpPr>
-      <p:grpSpPr>
-        <a:xfrm>
-          <a:off x="0" y="0"/>
-          <a:ext cx="0" cy="0"/>
-          <a:chOff x="0" y="0"/>
-          <a:chExt cx="0" cy="0"/>
-        </a:xfrm>
-      </p:grpSpPr>
-      <p:sp>
-        <p:nvSpPr>
-          <p:cNvPr id="2" name="Slide Image Placeholder 1"/>
-          <p:cNvSpPr>
-            <a:spLocks noGrp="1"/>
-          </p:cNvSpPr>
-          <p:nvPr>
-            <p:ph type="sldImg" idx="2"/>
-          </p:nvPr>
-        </p:nvSpPr>
-        <p:spPr/>
-      </p:sp>
-      <p:sp>
-        <p:nvSpPr>
-          <p:cNvPr id="3" name="Notes Placeholder 2"/>
-          <p:cNvSpPr>
-            <a:spLocks noGrp="1"/>
-          </p:cNvSpPr>
-          <p:nvPr>
-            <p:ph type="body" idx="3" sz="quarter"/>
-          </p:nvPr>
-        </p:nvSpPr>
-        <p:spPr/>
-        <p:txBody>
-          <a:bodyPr/>
-          <a:lstStyle/>
-          <a:p>
-            <a:r>
-              <a:t>Коротко и уверенно. Дальше — вопросы и живое демо.</a:t>
+              <a:t>Открываем с команды и главной цифры.</a:t>
             </a:r>
           </a:p>
         </p:txBody>
@@ -651,7 +581,7 @@
           <a:lstStyle/>
           <a:p>
             <a:r>
-              <a:t>EDA за полминуты CPU-проходом. Тут видно что мы реально смотрели в данные.</a:t>
+              <a:t>Мотивация: ложные выезды дорого стоят, гари нужны региону.</a:t>
             </a:r>
           </a:p>
         </p:txBody>
@@ -721,7 +651,7 @@
           <a:lstStyle/>
           <a:p>
             <a:r>
-              <a:t>AF — наша сильная сторона. Картинка справа — предсказание модели.</a:t>
+              <a:t>Пять боксов — весь пайплайн одним взглядом.</a:t>
             </a:r>
           </a:p>
         </p:txBody>
@@ -791,7 +721,7 @@
           <a:lstStyle/>
           <a:p>
             <a:r>
-              <a:t>История про инженерную честность: убивать нерабочее — тоже работа.</a:t>
+              <a:t>AF — сильная сторона. Справа предсказание модели.</a:t>
             </a:r>
           </a:p>
         </p:txBody>
@@ -861,7 +791,7 @@
           <a:lstStyle/>
           <a:p>
             <a:r>
-              <a:t>Цифры медленно. В топе чата 0.8+, но наш файл валиден и честен.</a:t>
+              <a:t>Честная история: гиганта убили, выиграл трудяга.</a:t>
             </a:r>
           </a:p>
         </p:txBody>
@@ -931,7 +861,7 @@
           <a:lstStyle/>
           <a:p>
             <a:r>
-              <a:t>Пауза. Это не мокап — живой фронт на нашем API: 17 точек, контуры по степеням, справка.</a:t>
+              <a:t>Формулу читать медленно. Файл примут с первого раза.</a:t>
             </a:r>
           </a:p>
         </p:txBody>
@@ -1001,7 +931,7 @@
           <a:lstStyle/>
           <a:p>
             <a:r>
-              <a:t>Слои выключаются, степени фильтруются, справка пересчитывается из слоёв.</a:t>
+              <a:t>Пауза: живой фронт, не мокап.</a:t>
             </a:r>
           </a:p>
         </p:txBody>
@@ -1071,7 +1001,7 @@
           <a:lstStyle/>
           <a:p>
             <a:r>
-              <a:t>API делали под фронт, фронт — под жюри. Всё состыковано.</a:t>
+              <a:t>API делали под фронт, фронт — под жюри.</a:t>
             </a:r>
           </a:p>
         </p:txBody>
@@ -1141,7 +1071,7 @@
           <a:lstStyle/>
           <a:p>
             <a:r>
-              <a:t>Оргам важно: воспроизводимость, CPU-фолбэк, инструкция в README.</a:t>
+              <a:t>Оргам важно: заведётся и у них.</a:t>
             </a:r>
           </a:p>
         </p:txBody>
@@ -4140,14 +4070,6 @@
 <file path=ppt/slides/slide1.xml><?xml version="1.0" encoding="utf-8"?>
 <p:sld xmlns:a="http://schemas.openxmlformats.org/drawingml/2006/main" xmlns:p="http://schemas.openxmlformats.org/presentationml/2006/main" xmlns:r="http://schemas.openxmlformats.org/officeDocument/2006/relationships">
   <p:cSld>
-    <p:bg>
-      <p:bgPr>
-        <a:solidFill>
-          <a:srgbClr val="070A0D"/>
-        </a:solidFill>
-        <a:effectLst/>
-      </p:bgPr>
-    </p:bg>
     <p:spTree>
       <p:nvGrpSpPr>
         <p:cNvPr id="1" name=""/>
@@ -4155,95 +4077,53 @@
         <p:nvPr/>
       </p:nvGrpSpPr>
       <p:grpSpPr/>
-      <p:sp>
-        <p:nvSpPr>
-          <p:cNvPr id="2" name="TextBox 1"/>
-          <p:cNvSpPr txBox="1"/>
-          <p:nvPr/>
-        </p:nvSpPr>
-        <p:spPr>
-          <a:xfrm>
-            <a:off x="640080" y="548640"/>
-            <a:ext cx="10881360" cy="914400"/>
+      <p:pic>
+        <p:nvPicPr>
+          <p:cNvPr id="2" name="Picture 1" descr="01-map-full.png"/>
+          <p:cNvPicPr>
+            <a:picLocks noChangeAspect="1"/>
+          </p:cNvPicPr>
+          <p:nvPr/>
+        </p:nvPicPr>
+        <p:blipFill>
+          <a:blip r:embed="rId2"/>
+          <a:stretch>
+            <a:fillRect/>
+          </a:stretch>
+        </p:blipFill>
+        <p:spPr>
+          <a:xfrm>
+            <a:off x="0" y="0"/>
+            <a:ext cx="12188952" cy="6858000"/>
           </a:xfrm>
           <a:prstGeom prst="rect">
             <a:avLst/>
           </a:prstGeom>
-          <a:noFill/>
-        </p:spPr>
-        <p:txBody>
-          <a:bodyPr wrap="square">
-            <a:spAutoFit/>
-          </a:bodyPr>
-          <a:lstStyle/>
-          <a:p>
-            <a:pPr algn="l"/>
-            <a:r>
-              <a:rPr sz="6000" b="1">
-                <a:solidFill>
-                  <a:srgbClr val="F2F4F5"/>
-                </a:solidFill>
-                <a:latin typeface="Inter"/>
-              </a:rPr>
-              <a:t>ЖИМ НОГАМИ</a:t>
-            </a:r>
-          </a:p>
-        </p:txBody>
-      </p:sp>
-      <p:sp>
-        <p:nvSpPr>
-          <p:cNvPr id="3" name="TextBox 2"/>
-          <p:cNvSpPr txBox="1"/>
-          <p:nvPr/>
-        </p:nvSpPr>
-        <p:spPr>
-          <a:xfrm>
-            <a:off x="640080" y="1737360"/>
-            <a:ext cx="10881360" cy="640080"/>
-          </a:xfrm>
-          <a:prstGeom prst="rect">
-            <a:avLst/>
-          </a:prstGeom>
-          <a:noFill/>
-        </p:spPr>
-        <p:txBody>
-          <a:bodyPr wrap="square">
-            <a:spAutoFit/>
-          </a:bodyPr>
-          <a:lstStyle/>
-          <a:p>
-            <a:pPr algn="l"/>
-            <a:r>
-              <a:rPr sz="2100" b="0">
-                <a:solidFill>
-                  <a:srgbClr val="B8C0C8"/>
-                </a:solidFill>
-                <a:latin typeface="Inter"/>
-              </a:rPr>
-              <a:t>Мониторинг лесных пожаров: от сырых снимков до живой карты за один уикенд</a:t>
-            </a:r>
-          </a:p>
-        </p:txBody>
-      </p:sp>
-      <p:sp>
-        <p:nvSpPr>
-          <p:cNvPr id="4" name="Oval 3"/>
+        </p:spPr>
+      </p:pic>
+      <p:sp>
+        <p:nvSpPr>
+          <p:cNvPr id="3" name="Rounded Rectangle 2"/>
           <p:cNvSpPr/>
           <p:nvPr/>
         </p:nvSpPr>
         <p:spPr>
           <a:xfrm>
-            <a:off x="914400" y="2962656"/>
-            <a:ext cx="155448" cy="155448"/>
-          </a:xfrm>
-          <a:prstGeom prst="ellipse">
-            <a:avLst/>
+            <a:off x="457200" y="548640"/>
+            <a:ext cx="6949440" cy="5120640"/>
+          </a:xfrm>
+          <a:prstGeom prst="roundRect">
+            <a:avLst>
+              <a:gd name="adj" fmla="val 6000"/>
+            </a:avLst>
           </a:prstGeom>
           <a:solidFill>
-            <a:srgbClr val="62D99A"/>
+            <a:srgbClr val="0D1217"/>
           </a:solidFill>
-          <a:ln>
-            <a:noFill/>
+          <a:ln w="12700">
+            <a:solidFill>
+              <a:srgbClr val="2A333D"/>
+            </a:solidFill>
           </a:ln>
         </p:spPr>
         <p:style>
@@ -4270,61 +4150,16 @@
       </p:sp>
       <p:sp>
         <p:nvSpPr>
-          <p:cNvPr id="5" name="TextBox 4"/>
-          <p:cNvSpPr txBox="1"/>
-          <p:nvPr/>
-        </p:nvSpPr>
-        <p:spPr>
-          <a:xfrm>
-            <a:off x="1280160" y="2761488"/>
-            <a:ext cx="10241280" cy="868680"/>
-          </a:xfrm>
-          <a:prstGeom prst="rect">
-            <a:avLst/>
-          </a:prstGeom>
-          <a:noFill/>
-        </p:spPr>
-        <p:txBody>
-          <a:bodyPr wrap="square">
-            <a:spAutoFit/>
-          </a:bodyPr>
-          <a:lstStyle/>
-          <a:p>
-            <a:pPr algn="l"/>
-            <a:r>
-              <a:rPr sz="2100" b="0">
-                <a:solidFill>
-                  <a:srgbClr val="F2F4F5"/>
-                </a:solidFill>
-                <a:latin typeface="Inter"/>
-              </a:rPr>
-              <a:t>Обучили две нейросети — детектор огня и картировальщик гарей</a:t>
-            </a:r>
-            <a:r>
-              <a:rPr sz="1400" b="0">
-                <a:solidFill>
-                  <a:srgbClr val="7D8690"/>
-                </a:solidFill>
-                <a:latin typeface="Inter"/>
-              </a:rPr>
-              <a:t>
-Score 0.654 · файл-ответ валиден и воспроизводим</a:t>
-            </a:r>
-          </a:p>
-        </p:txBody>
-      </p:sp>
-      <p:sp>
-        <p:nvSpPr>
-          <p:cNvPr id="6" name="Oval 5"/>
+          <p:cNvPr id="4" name="Rounded Rectangle 3"/>
           <p:cNvSpPr/>
           <p:nvPr/>
         </p:nvSpPr>
         <p:spPr>
           <a:xfrm>
-            <a:off x="914400" y="4059935"/>
-            <a:ext cx="155448" cy="155448"/>
-          </a:xfrm>
-          <a:prstGeom prst="ellipse">
+            <a:off x="457200" y="685800"/>
+            <a:ext cx="82296" cy="4846320"/>
+          </a:xfrm>
+          <a:prstGeom prst="roundRect">
             <a:avLst/>
           </a:prstGeom>
           <a:solidFill>
@@ -4358,14 +4193,14 @@
       </p:sp>
       <p:sp>
         <p:nvSpPr>
-          <p:cNvPr id="7" name="TextBox 6"/>
+          <p:cNvPr id="5" name="TextBox 4"/>
           <p:cNvSpPr txBox="1"/>
           <p:nvPr/>
         </p:nvSpPr>
         <p:spPr>
           <a:xfrm>
-            <a:off x="1280160" y="3858768"/>
-            <a:ext cx="10241280" cy="868680"/>
+            <a:off x="822960" y="822960"/>
+            <a:ext cx="6309360" cy="457200"/>
           </a:xfrm>
           <a:prstGeom prst="rect">
             <a:avLst/>
@@ -4380,46 +4215,258 @@
           <a:p>
             <a:pPr algn="l"/>
             <a:r>
-              <a:rPr sz="2100" b="0">
-                <a:solidFill>
-                  <a:srgbClr val="F2F4F5"/>
+              <a:rPr sz="1500" b="1">
+                <a:solidFill>
+                  <a:srgbClr val="62D99A"/>
                 </a:solidFill>
                 <a:latin typeface="Inter"/>
               </a:rPr>
-              <a:t>Подняли сервис и тёмную веб-карту с точками, контурами и справкой</a:t>
-            </a:r>
-            <a:r>
-              <a:rPr sz="1400" b="0">
-                <a:solidFill>
-                  <a:srgbClr val="7D8690"/>
+              <a:t>KOSMOHACK 2026 · SCORE 0.654</a:t>
+            </a:r>
+          </a:p>
+        </p:txBody>
+      </p:sp>
+      <p:sp>
+        <p:nvSpPr>
+          <p:cNvPr id="6" name="TextBox 5"/>
+          <p:cNvSpPr txBox="1"/>
+          <p:nvPr/>
+        </p:nvSpPr>
+        <p:spPr>
+          <a:xfrm>
+            <a:off x="822960" y="1280160"/>
+            <a:ext cx="6309360" cy="1737360"/>
+          </a:xfrm>
+          <a:prstGeom prst="rect">
+            <a:avLst/>
+          </a:prstGeom>
+          <a:noFill/>
+        </p:spPr>
+        <p:txBody>
+          <a:bodyPr wrap="square">
+            <a:spAutoFit/>
+          </a:bodyPr>
+          <a:lstStyle/>
+          <a:p>
+            <a:pPr algn="l"/>
+            <a:r>
+              <a:rPr sz="7200" b="1">
+                <a:solidFill>
+                  <a:srgbClr val="F2F4F5"/>
                 </a:solidFill>
                 <a:latin typeface="Inter"/>
               </a:rPr>
-              <a:t>
-то, что вы увидите дальше — работает прямо сейчас</a:t>
-            </a:r>
-          </a:p>
-        </p:txBody>
-      </p:sp>
-      <p:sp>
-        <p:nvSpPr>
-          <p:cNvPr id="8" name="Oval 7"/>
+              <a:t>ЖИМ
+НОГАМИ</a:t>
+            </a:r>
+          </a:p>
+        </p:txBody>
+      </p:sp>
+      <p:sp>
+        <p:nvSpPr>
+          <p:cNvPr id="7" name="TextBox 6"/>
+          <p:cNvSpPr txBox="1"/>
+          <p:nvPr/>
+        </p:nvSpPr>
+        <p:spPr>
+          <a:xfrm>
+            <a:off x="822960" y="3749039"/>
+            <a:ext cx="6309360" cy="914400"/>
+          </a:xfrm>
+          <a:prstGeom prst="rect">
+            <a:avLst/>
+          </a:prstGeom>
+          <a:noFill/>
+        </p:spPr>
+        <p:txBody>
+          <a:bodyPr wrap="square">
+            <a:spAutoFit/>
+          </a:bodyPr>
+          <a:lstStyle/>
+          <a:p>
+            <a:pPr algn="l"/>
+            <a:r>
+              <a:rPr sz="2100" b="0">
+                <a:solidFill>
+                  <a:srgbClr val="B8C0C8"/>
+                </a:solidFill>
+                <a:latin typeface="Inter"/>
+              </a:rPr>
+              <a:t>Мониторинг лесных пожаров — от снимков до живой карты за уикенд</a:t>
+            </a:r>
+          </a:p>
+        </p:txBody>
+      </p:sp>
+      <p:sp>
+        <p:nvSpPr>
+          <p:cNvPr id="8" name="TextBox 7"/>
+          <p:cNvSpPr txBox="1"/>
+          <p:nvPr/>
+        </p:nvSpPr>
+        <p:spPr>
+          <a:xfrm>
+            <a:off x="822960" y="4754880"/>
+            <a:ext cx="6309360" cy="365760"/>
+          </a:xfrm>
+          <a:prstGeom prst="rect">
+            <a:avLst/>
+          </a:prstGeom>
+          <a:noFill/>
+        </p:spPr>
+        <p:txBody>
+          <a:bodyPr wrap="square">
+            <a:spAutoFit/>
+          </a:bodyPr>
+          <a:lstStyle/>
+          <a:p>
+            <a:pPr algn="l"/>
+            <a:r>
+              <a:rPr sz="1500" b="0">
+                <a:solidFill>
+                  <a:srgbClr val="7D8690"/>
+                </a:solidFill>
+                <a:latin typeface="Inter"/>
+              </a:rPr>
+              <a:t>AF-детекция · BS-гари · сервис · submission FINAL</a:t>
+            </a:r>
+          </a:p>
+        </p:txBody>
+      </p:sp>
+      <p:sp>
+        <p:nvSpPr>
+          <p:cNvPr id="9" name="TextBox 8"/>
+          <p:cNvSpPr txBox="1"/>
+          <p:nvPr/>
+        </p:nvSpPr>
+        <p:spPr>
+          <a:xfrm>
+            <a:off x="457200" y="6400800"/>
+            <a:ext cx="7315200" cy="274320"/>
+          </a:xfrm>
+          <a:prstGeom prst="rect">
+            <a:avLst/>
+          </a:prstGeom>
+          <a:noFill/>
+        </p:spPr>
+        <p:txBody>
+          <a:bodyPr wrap="square">
+            <a:spAutoFit/>
+          </a:bodyPr>
+          <a:lstStyle/>
+          <a:p>
+            <a:pPr algn="l"/>
+            <a:r>
+              <a:rPr sz="1100" b="1">
+                <a:solidFill>
+                  <a:srgbClr val="7D8690"/>
+                </a:solidFill>
+                <a:latin typeface="Inter"/>
+              </a:rPr>
+              <a:t>ЖИМ НОГАМИ · KOSMOHACK 2026</a:t>
+            </a:r>
+          </a:p>
+        </p:txBody>
+      </p:sp>
+      <p:sp>
+        <p:nvSpPr>
+          <p:cNvPr id="10" name="TextBox 9"/>
+          <p:cNvSpPr txBox="1"/>
+          <p:nvPr/>
+        </p:nvSpPr>
+        <p:spPr>
+          <a:xfrm>
+            <a:off x="10789920" y="6400800"/>
+            <a:ext cx="914400" cy="274320"/>
+          </a:xfrm>
+          <a:prstGeom prst="rect">
+            <a:avLst/>
+          </a:prstGeom>
+          <a:noFill/>
+        </p:spPr>
+        <p:txBody>
+          <a:bodyPr wrap="square">
+            <a:spAutoFit/>
+          </a:bodyPr>
+          <a:lstStyle/>
+          <a:p>
+            <a:pPr algn="r"/>
+            <a:r>
+              <a:rPr sz="1100" b="1">
+                <a:solidFill>
+                  <a:srgbClr val="7D8690"/>
+                </a:solidFill>
+                <a:latin typeface="Inter"/>
+              </a:rPr>
+              <a:t>01</a:t>
+            </a:r>
+          </a:p>
+        </p:txBody>
+      </p:sp>
+    </p:spTree>
+  </p:cSld>
+  <p:clrMapOvr>
+    <a:masterClrMapping/>
+  </p:clrMapOvr>
+</p:sld>
+</file>
+
+<file path=ppt/slides/slide10.xml><?xml version="1.0" encoding="utf-8"?>
+<p:sld xmlns:a="http://schemas.openxmlformats.org/drawingml/2006/main" xmlns:p="http://schemas.openxmlformats.org/presentationml/2006/main" xmlns:r="http://schemas.openxmlformats.org/officeDocument/2006/relationships">
+  <p:cSld>
+    <p:spTree>
+      <p:nvGrpSpPr>
+        <p:cNvPr id="1" name=""/>
+        <p:cNvGrpSpPr/>
+        <p:nvPr/>
+      </p:nvGrpSpPr>
+      <p:grpSpPr/>
+      <p:pic>
+        <p:nvPicPr>
+          <p:cNvPr id="2" name="Picture 1" descr="02-burned-only.png"/>
+          <p:cNvPicPr>
+            <a:picLocks noChangeAspect="1"/>
+          </p:cNvPicPr>
+          <p:nvPr/>
+        </p:nvPicPr>
+        <p:blipFill>
+          <a:blip r:embed="rId2"/>
+          <a:stretch>
+            <a:fillRect/>
+          </a:stretch>
+        </p:blipFill>
+        <p:spPr>
+          <a:xfrm>
+            <a:off x="0" y="0"/>
+            <a:ext cx="12188952" cy="6858000"/>
+          </a:xfrm>
+          <a:prstGeom prst="rect">
+            <a:avLst/>
+          </a:prstGeom>
+        </p:spPr>
+      </p:pic>
+      <p:sp>
+        <p:nvSpPr>
+          <p:cNvPr id="3" name="Rounded Rectangle 2"/>
           <p:cNvSpPr/>
           <p:nvPr/>
         </p:nvSpPr>
         <p:spPr>
           <a:xfrm>
-            <a:off x="914400" y="5157216"/>
-            <a:ext cx="155448" cy="155448"/>
-          </a:xfrm>
-          <a:prstGeom prst="ellipse">
-            <a:avLst/>
+            <a:off x="2926080" y="1463040"/>
+            <a:ext cx="6309360" cy="3657600"/>
+          </a:xfrm>
+          <a:prstGeom prst="roundRect">
+            <a:avLst>
+              <a:gd name="adj" fmla="val 6000"/>
+            </a:avLst>
           </a:prstGeom>
           <a:solidFill>
-            <a:srgbClr val="F2F4F5"/>
+            <a:srgbClr val="0D1217"/>
           </a:solidFill>
-          <a:ln>
-            <a:noFill/>
+          <a:ln w="12700">
+            <a:solidFill>
+              <a:srgbClr val="2A333D"/>
+            </a:solidFill>
           </a:ln>
         </p:spPr>
         <p:style>
@@ -4446,161 +4493,20 @@
       </p:sp>
       <p:sp>
         <p:nvSpPr>
-          <p:cNvPr id="9" name="TextBox 8"/>
-          <p:cNvSpPr txBox="1"/>
-          <p:nvPr/>
-        </p:nvSpPr>
-        <p:spPr>
-          <a:xfrm>
-            <a:off x="1280160" y="4956048"/>
-            <a:ext cx="10241280" cy="868680"/>
-          </a:xfrm>
-          <a:prstGeom prst="rect">
-            <a:avLst/>
-          </a:prstGeom>
-          <a:noFill/>
-        </p:spPr>
-        <p:txBody>
-          <a:bodyPr wrap="square">
-            <a:spAutoFit/>
-          </a:bodyPr>
-          <a:lstStyle/>
-          <a:p>
-            <a:pPr algn="l"/>
-            <a:r>
-              <a:rPr sz="2100" b="0">
-                <a:solidFill>
-                  <a:srgbClr val="F2F4F5"/>
-                </a:solidFill>
-                <a:latin typeface="Inter"/>
-              </a:rPr>
-              <a:t>Всё открыто: код, веса, отчёт</a:t>
-            </a:r>
-            <a:r>
-              <a:rPr sz="1400" b="0">
-                <a:solidFill>
-                  <a:srgbClr val="7D8690"/>
-                </a:solidFill>
-                <a:latin typeface="Inter"/>
-              </a:rPr>
-              <a:t>
-клонируй и запускай одной командой</a:t>
-            </a:r>
-          </a:p>
-        </p:txBody>
-      </p:sp>
-    </p:spTree>
-  </p:cSld>
-  <p:clrMapOvr>
-    <a:masterClrMapping/>
-  </p:clrMapOvr>
-</p:sld>
-</file>
-
-<file path=ppt/slides/slide10.xml><?xml version="1.0" encoding="utf-8"?>
-<p:sld xmlns:a="http://schemas.openxmlformats.org/drawingml/2006/main" xmlns:p="http://schemas.openxmlformats.org/presentationml/2006/main" xmlns:r="http://schemas.openxmlformats.org/officeDocument/2006/relationships">
-  <p:cSld>
-    <p:bg>
-      <p:bgPr>
-        <a:solidFill>
-          <a:srgbClr val="070A0D"/>
-        </a:solidFill>
-        <a:effectLst/>
-      </p:bgPr>
-    </p:bg>
-    <p:spTree>
-      <p:nvGrpSpPr>
-        <p:cNvPr id="1" name=""/>
-        <p:cNvGrpSpPr/>
-        <p:nvPr/>
-      </p:nvGrpSpPr>
-      <p:grpSpPr/>
-      <p:sp>
-        <p:nvSpPr>
-          <p:cNvPr id="2" name="TextBox 1"/>
-          <p:cNvSpPr txBox="1"/>
-          <p:nvPr/>
-        </p:nvSpPr>
-        <p:spPr>
-          <a:xfrm>
-            <a:off x="640080" y="1645920"/>
-            <a:ext cx="10881360" cy="1097280"/>
-          </a:xfrm>
-          <a:prstGeom prst="rect">
-            <a:avLst/>
-          </a:prstGeom>
-          <a:noFill/>
-        </p:spPr>
-        <p:txBody>
-          <a:bodyPr wrap="square">
-            <a:spAutoFit/>
-          </a:bodyPr>
-          <a:lstStyle/>
-          <a:p>
-            <a:pPr algn="ctr"/>
-            <a:r>
-              <a:rPr sz="6400" b="1">
-                <a:solidFill>
-                  <a:srgbClr val="F2F4F5"/>
-                </a:solidFill>
-                <a:latin typeface="Inter"/>
-              </a:rPr>
-              <a:t>ЖИМ НОГАМИ</a:t>
-            </a:r>
-          </a:p>
-        </p:txBody>
-      </p:sp>
-      <p:sp>
-        <p:nvSpPr>
-          <p:cNvPr id="3" name="TextBox 2"/>
-          <p:cNvSpPr txBox="1"/>
-          <p:nvPr/>
-        </p:nvSpPr>
-        <p:spPr>
-          <a:xfrm>
-            <a:off x="640080" y="3017520"/>
-            <a:ext cx="10881360" cy="731520"/>
-          </a:xfrm>
-          <a:prstGeom prst="rect">
-            <a:avLst/>
-          </a:prstGeom>
-          <a:noFill/>
-        </p:spPr>
-        <p:txBody>
-          <a:bodyPr wrap="square">
-            <a:spAutoFit/>
-          </a:bodyPr>
-          <a:lstStyle/>
-          <a:p>
-            <a:pPr algn="ctr"/>
-            <a:r>
-              <a:rPr sz="2200" b="0">
-                <a:solidFill>
-                  <a:srgbClr val="B8C0C8"/>
-                </a:solidFill>
-                <a:latin typeface="Inter"/>
-              </a:rPr>
-              <a:t>код, веса и отчёт — в репозитории · вопросы?</a:t>
-            </a:r>
-          </a:p>
-        </p:txBody>
-      </p:sp>
-      <p:sp>
-        <p:nvSpPr>
-          <p:cNvPr id="4" name="Oval 3"/>
+          <p:cNvPr id="4" name="Rounded Rectangle 3"/>
           <p:cNvSpPr/>
           <p:nvPr/>
         </p:nvSpPr>
         <p:spPr>
           <a:xfrm>
-            <a:off x="5989320" y="4389120"/>
-            <a:ext cx="182880" cy="182880"/>
-          </a:xfrm>
-          <a:prstGeom prst="ellipse">
+            <a:off x="2926080" y="1600200"/>
+            <a:ext cx="82296" cy="3383280"/>
+          </a:xfrm>
+          <a:prstGeom prst="roundRect">
             <a:avLst/>
           </a:prstGeom>
           <a:solidFill>
-            <a:srgbClr val="62D99A"/>
+            <a:srgbClr val="FF6B35"/>
           </a:solidFill>
           <a:ln>
             <a:noFill/>
@@ -4628,6 +4534,112 @@
           </a:p>
         </p:txBody>
       </p:sp>
+      <p:sp>
+        <p:nvSpPr>
+          <p:cNvPr id="5" name="TextBox 4"/>
+          <p:cNvSpPr txBox="1"/>
+          <p:nvPr/>
+        </p:nvSpPr>
+        <p:spPr>
+          <a:xfrm>
+            <a:off x="2926080" y="1737360"/>
+            <a:ext cx="6309360" cy="914400"/>
+          </a:xfrm>
+          <a:prstGeom prst="rect">
+            <a:avLst/>
+          </a:prstGeom>
+          <a:noFill/>
+        </p:spPr>
+        <p:txBody>
+          <a:bodyPr wrap="square">
+            <a:spAutoFit/>
+          </a:bodyPr>
+          <a:lstStyle/>
+          <a:p>
+            <a:pPr algn="ctr"/>
+            <a:r>
+              <a:rPr sz="5200" b="1">
+                <a:solidFill>
+                  <a:srgbClr val="F2F4F5"/>
+                </a:solidFill>
+                <a:latin typeface="Inter"/>
+              </a:rPr>
+              <a:t>ЖИМ НОГАМИ</a:t>
+            </a:r>
+          </a:p>
+        </p:txBody>
+      </p:sp>
+      <p:sp>
+        <p:nvSpPr>
+          <p:cNvPr id="6" name="TextBox 5"/>
+          <p:cNvSpPr txBox="1"/>
+          <p:nvPr/>
+        </p:nvSpPr>
+        <p:spPr>
+          <a:xfrm>
+            <a:off x="2926080" y="2926080"/>
+            <a:ext cx="6309360" cy="1097280"/>
+          </a:xfrm>
+          <a:prstGeom prst="rect">
+            <a:avLst/>
+          </a:prstGeom>
+          <a:noFill/>
+        </p:spPr>
+        <p:txBody>
+          <a:bodyPr wrap="square">
+            <a:spAutoFit/>
+          </a:bodyPr>
+          <a:lstStyle/>
+          <a:p>
+            <a:pPr algn="ctr"/>
+            <a:r>
+              <a:rPr sz="2000" b="0">
+                <a:solidFill>
+                  <a:srgbClr val="B8C0C8"/>
+                </a:solidFill>
+                <a:latin typeface="Inter"/>
+              </a:rPr>
+              <a:t>спасибо · вопросы?
+код, веса и отчёт — в репозитории</a:t>
+            </a:r>
+          </a:p>
+        </p:txBody>
+      </p:sp>
+      <p:sp>
+        <p:nvSpPr>
+          <p:cNvPr id="7" name="TextBox 6"/>
+          <p:cNvSpPr txBox="1"/>
+          <p:nvPr/>
+        </p:nvSpPr>
+        <p:spPr>
+          <a:xfrm>
+            <a:off x="2926080" y="4389120"/>
+            <a:ext cx="6309360" cy="365760"/>
+          </a:xfrm>
+          <a:prstGeom prst="rect">
+            <a:avLst/>
+          </a:prstGeom>
+          <a:noFill/>
+        </p:spPr>
+        <p:txBody>
+          <a:bodyPr wrap="square">
+            <a:spAutoFit/>
+          </a:bodyPr>
+          <a:lstStyle/>
+          <a:p>
+            <a:pPr algn="ctr"/>
+            <a:r>
+              <a:rPr sz="1400" b="0">
+                <a:solidFill>
+                  <a:srgbClr val="7D8690"/>
+                </a:solidFill>
+                <a:latin typeface="Inter"/>
+              </a:rPr>
+              <a:t>Score 0.654 · submission FINAL</a:t>
+            </a:r>
+          </a:p>
+        </p:txBody>
+      </p:sp>
     </p:spTree>
   </p:cSld>
   <p:clrMapOvr>
@@ -4639,14 +4651,6 @@
 <file path=ppt/slides/slide2.xml><?xml version="1.0" encoding="utf-8"?>
 <p:sld xmlns:a="http://schemas.openxmlformats.org/drawingml/2006/main" xmlns:p="http://schemas.openxmlformats.org/presentationml/2006/main" xmlns:r="http://schemas.openxmlformats.org/officeDocument/2006/relationships">
   <p:cSld>
-    <p:bg>
-      <p:bgPr>
-        <a:solidFill>
-          <a:srgbClr val="070A0D"/>
-        </a:solidFill>
-        <a:effectLst/>
-      </p:bgPr>
-    </p:bg>
     <p:spTree>
       <p:nvGrpSpPr>
         <p:cNvPr id="1" name=""/>
@@ -4654,60 +4658,53 @@
         <p:nvPr/>
       </p:nvGrpSpPr>
       <p:grpSpPr/>
-      <p:sp>
-        <p:nvSpPr>
-          <p:cNvPr id="2" name="TextBox 1"/>
-          <p:cNvSpPr txBox="1"/>
-          <p:nvPr/>
-        </p:nvSpPr>
-        <p:spPr>
-          <a:xfrm>
-            <a:off x="640080" y="274320"/>
-            <a:ext cx="10881360" cy="365760"/>
+      <p:pic>
+        <p:nvPicPr>
+          <p:cNvPr id="2" name="Picture 1" descr="02-burned-only.png"/>
+          <p:cNvPicPr>
+            <a:picLocks noChangeAspect="1"/>
+          </p:cNvPicPr>
+          <p:nvPr/>
+        </p:nvPicPr>
+        <p:blipFill>
+          <a:blip r:embed="rId2"/>
+          <a:stretch>
+            <a:fillRect/>
+          </a:stretch>
+        </p:blipFill>
+        <p:spPr>
+          <a:xfrm>
+            <a:off x="0" y="0"/>
+            <a:ext cx="12188952" cy="6858000"/>
           </a:xfrm>
           <a:prstGeom prst="rect">
             <a:avLst/>
           </a:prstGeom>
-          <a:noFill/>
-        </p:spPr>
-        <p:txBody>
-          <a:bodyPr wrap="square">
-            <a:spAutoFit/>
-          </a:bodyPr>
-          <a:lstStyle/>
-          <a:p>
-            <a:pPr algn="l"/>
-            <a:r>
-              <a:rPr sz="1200" b="1">
-                <a:solidFill>
-                  <a:srgbClr val="7D8690"/>
-                </a:solidFill>
-                <a:latin typeface="Inter"/>
-              </a:rPr>
-              <a:t>ЖИМ НОГАМИ · KOSMOHACK</a:t>
-            </a:r>
-          </a:p>
-        </p:txBody>
-      </p:sp>
-      <p:sp>
-        <p:nvSpPr>
-          <p:cNvPr id="3" name="Oval 2"/>
+        </p:spPr>
+      </p:pic>
+      <p:sp>
+        <p:nvSpPr>
+          <p:cNvPr id="3" name="Rounded Rectangle 2"/>
           <p:cNvSpPr/>
           <p:nvPr/>
         </p:nvSpPr>
         <p:spPr>
           <a:xfrm>
-            <a:off x="11658600" y="384048"/>
-            <a:ext cx="128016" cy="128016"/>
-          </a:xfrm>
-          <a:prstGeom prst="ellipse">
-            <a:avLst/>
+            <a:off x="457200" y="457200"/>
+            <a:ext cx="5669280" cy="5486400"/>
+          </a:xfrm>
+          <a:prstGeom prst="roundRect">
+            <a:avLst>
+              <a:gd name="adj" fmla="val 6000"/>
+            </a:avLst>
           </a:prstGeom>
           <a:solidFill>
-            <a:srgbClr val="62D99A"/>
+            <a:srgbClr val="0D1217"/>
           </a:solidFill>
-          <a:ln>
-            <a:noFill/>
+          <a:ln w="12700">
+            <a:solidFill>
+              <a:srgbClr val="2A333D"/>
+            </a:solidFill>
           </a:ln>
         </p:spPr>
         <p:style>
@@ -4734,55 +4731,20 @@
       </p:sp>
       <p:sp>
         <p:nvSpPr>
-          <p:cNvPr id="4" name="TextBox 3"/>
-          <p:cNvSpPr txBox="1"/>
-          <p:nvPr/>
-        </p:nvSpPr>
-        <p:spPr>
-          <a:xfrm>
-            <a:off x="640080" y="777240"/>
-            <a:ext cx="10881360" cy="1097280"/>
-          </a:xfrm>
-          <a:prstGeom prst="rect">
-            <a:avLst/>
-          </a:prstGeom>
-          <a:noFill/>
-        </p:spPr>
-        <p:txBody>
-          <a:bodyPr wrap="square">
-            <a:spAutoFit/>
-          </a:bodyPr>
-          <a:lstStyle/>
-          <a:p>
-            <a:pPr algn="l"/>
-            <a:r>
-              <a:rPr sz="3800" b="1">
-                <a:solidFill>
-                  <a:srgbClr val="F2F4F5"/>
-                </a:solidFill>
-                <a:latin typeface="Inter"/>
-              </a:rPr>
-              <a:t>Сначала — разобрали данные до винтика</a:t>
-            </a:r>
-          </a:p>
-        </p:txBody>
-      </p:sp>
-      <p:sp>
-        <p:nvSpPr>
-          <p:cNvPr id="5" name="Oval 4"/>
+          <p:cNvPr id="4" name="Rounded Rectangle 3"/>
           <p:cNvSpPr/>
           <p:nvPr/>
         </p:nvSpPr>
         <p:spPr>
           <a:xfrm>
-            <a:off x="914400" y="2414016"/>
-            <a:ext cx="155448" cy="155448"/>
-          </a:xfrm>
-          <a:prstGeom prst="ellipse">
+            <a:off x="457200" y="594360"/>
+            <a:ext cx="82296" cy="5212080"/>
+          </a:xfrm>
+          <a:prstGeom prst="roundRect">
             <a:avLst/>
           </a:prstGeom>
           <a:solidFill>
-            <a:srgbClr val="E6C65C"/>
+            <a:srgbClr val="FF6B35"/>
           </a:solidFill>
           <a:ln>
             <a:noFill/>
@@ -4812,14 +4774,14 @@
       </p:sp>
       <p:sp>
         <p:nvSpPr>
-          <p:cNvPr id="6" name="TextBox 5"/>
+          <p:cNvPr id="5" name="TextBox 4"/>
           <p:cNvSpPr txBox="1"/>
           <p:nvPr/>
         </p:nvSpPr>
         <p:spPr>
           <a:xfrm>
-            <a:off x="1280160" y="2212848"/>
-            <a:ext cx="10241280" cy="868680"/>
+            <a:off x="822960" y="685800"/>
+            <a:ext cx="5029200" cy="457200"/>
           </a:xfrm>
           <a:prstGeom prst="rect">
             <a:avLst/>
@@ -4834,23 +4796,49 @@
           <a:p>
             <a:pPr algn="l"/>
             <a:r>
-              <a:rPr sz="2100" b="0">
-                <a:solidFill>
-                  <a:srgbClr val="F2F4F5"/>
+              <a:rPr sz="1500" b="1">
+                <a:solidFill>
+                  <a:srgbClr val="FF6B35"/>
                 </a:solidFill>
                 <a:latin typeface="Inter"/>
               </a:rPr>
-              <a:t>Огня в выборке 0.035% — 21 пиксель на снимок</a:t>
-            </a:r>
-            <a:r>
-              <a:rPr sz="1400" b="0">
-                <a:solidFill>
-                  <a:srgbClr val="7D8690"/>
+              <a:t>Проблема</a:t>
+            </a:r>
+          </a:p>
+        </p:txBody>
+      </p:sp>
+      <p:sp>
+        <p:nvSpPr>
+          <p:cNvPr id="6" name="TextBox 5"/>
+          <p:cNvSpPr txBox="1"/>
+          <p:nvPr/>
+        </p:nvSpPr>
+        <p:spPr>
+          <a:xfrm>
+            <a:off x="822960" y="1143000"/>
+            <a:ext cx="5029200" cy="1005840"/>
+          </a:xfrm>
+          <a:prstGeom prst="rect">
+            <a:avLst/>
+          </a:prstGeom>
+          <a:noFill/>
+        </p:spPr>
+        <p:txBody>
+          <a:bodyPr wrap="square">
+            <a:spAutoFit/>
+          </a:bodyPr>
+          <a:lstStyle/>
+          <a:p>
+            <a:pPr algn="l"/>
+            <a:r>
+              <a:rPr sz="4000" b="1">
+                <a:solidFill>
+                  <a:srgbClr val="F2F4F5"/>
                 </a:solidFill>
                 <a:latin typeface="Inter"/>
               </a:rPr>
-              <a:t>
-поэтому oversample, Dice+Focal и порог по micro-метрике, а не по средней</a:t>
+              <a:t>Огонь видно.
+Заводы — тоже</a:t>
             </a:r>
           </a:p>
         </p:txBody>
@@ -4863,14 +4851,14 @@
         </p:nvSpPr>
         <p:spPr>
           <a:xfrm>
-            <a:off x="914400" y="3557016"/>
+            <a:off x="822960" y="3383280"/>
             <a:ext cx="155448" cy="155448"/>
           </a:xfrm>
           <a:prstGeom prst="ellipse">
             <a:avLst/>
           </a:prstGeom>
           <a:solidFill>
-            <a:srgbClr val="FF6B35"/>
+            <a:srgbClr val="EF5B5B"/>
           </a:solidFill>
           <a:ln>
             <a:noFill/>
@@ -4906,8 +4894,8 @@
         </p:nvSpPr>
         <p:spPr>
           <a:xfrm>
-            <a:off x="1280160" y="3355848"/>
-            <a:ext cx="10241280" cy="868680"/>
+            <a:off x="1097280" y="3310128"/>
+            <a:ext cx="4572000" cy="548640"/>
           </a:xfrm>
           <a:prstGeom prst="rect">
             <a:avLst/>
@@ -4922,23 +4910,13 @@
           <a:p>
             <a:pPr algn="l"/>
             <a:r>
-              <a:rPr sz="2100" b="0">
-                <a:solidFill>
-                  <a:srgbClr val="F2F4F5"/>
+              <a:rPr sz="1900" b="0">
+                <a:solidFill>
+                  <a:srgbClr val="B8C0C8"/>
                 </a:solidFill>
                 <a:latin typeface="Inter"/>
               </a:rPr>
-              <a:t>Метаданным не поверили и правильно сделали</a:t>
-            </a:r>
-            <a:r>
-              <a:rPr sz="1400" b="0">
-                <a:solidFill>
-                  <a:srgbClr val="7D8690"/>
-                </a:solidFill>
-                <a:latin typeface="Inter"/>
-              </a:rPr>
-              <a:t>
-облачность из таблицы не сошлась с растрами — взяли маску из снимков</a:t>
+              <a:t>Ложняки FIRMS на факелах и ТЭЦ</a:t>
             </a:r>
           </a:p>
         </p:txBody>
@@ -4951,14 +4929,14 @@
         </p:nvSpPr>
         <p:spPr>
           <a:xfrm>
-            <a:off x="914400" y="4700016"/>
+            <a:off x="822960" y="4069080"/>
             <a:ext cx="155448" cy="155448"/>
           </a:xfrm>
           <a:prstGeom prst="ellipse">
             <a:avLst/>
           </a:prstGeom>
           <a:solidFill>
-            <a:srgbClr val="62D99A"/>
+            <a:srgbClr val="E6C65C"/>
           </a:solidFill>
           <a:ln>
             <a:noFill/>
@@ -4994,8 +4972,8 @@
         </p:nvSpPr>
         <p:spPr>
           <a:xfrm>
-            <a:off x="1280160" y="4498848"/>
-            <a:ext cx="10241280" cy="868680"/>
+            <a:off x="1097280" y="3995928"/>
+            <a:ext cx="4572000" cy="548640"/>
           </a:xfrm>
           <a:prstGeom prst="rect">
             <a:avLst/>
@@ -5010,23 +4988,161 @@
           <a:p>
             <a:pPr algn="l"/>
             <a:r>
-              <a:rPr sz="2100" b="0">
-                <a:solidFill>
-                  <a:srgbClr val="F2F4F5"/>
+              <a:rPr sz="1900" b="0">
+                <a:solidFill>
+                  <a:srgbClr val="B8C0C8"/>
                 </a:solidFill>
                 <a:latin typeface="Inter"/>
               </a:rPr>
-              <a:t>Пороги гарей вывели под каждый ландшафт</a:t>
-            </a:r>
-            <a:r>
-              <a:rPr sz="1400" b="0">
-                <a:solidFill>
-                  <a:srgbClr val="7D8690"/>
+              <a:t>Пропуски малых очагов и дыма</a:t>
+            </a:r>
+          </a:p>
+        </p:txBody>
+      </p:sp>
+      <p:sp>
+        <p:nvSpPr>
+          <p:cNvPr id="11" name="Oval 10"/>
+          <p:cNvSpPr/>
+          <p:nvPr/>
+        </p:nvSpPr>
+        <p:spPr>
+          <a:xfrm>
+            <a:off x="822960" y="4754880"/>
+            <a:ext cx="155448" cy="155448"/>
+          </a:xfrm>
+          <a:prstGeom prst="ellipse">
+            <a:avLst/>
+          </a:prstGeom>
+          <a:solidFill>
+            <a:srgbClr val="FF6B35"/>
+          </a:solidFill>
+          <a:ln>
+            <a:noFill/>
+          </a:ln>
+        </p:spPr>
+        <p:style>
+          <a:lnRef idx="1">
+            <a:schemeClr val="accent1"/>
+          </a:lnRef>
+          <a:fillRef idx="3">
+            <a:schemeClr val="accent1"/>
+          </a:fillRef>
+          <a:effectRef idx="2">
+            <a:schemeClr val="accent1"/>
+          </a:effectRef>
+          <a:fontRef idx="minor">
+            <a:schemeClr val="lt1"/>
+          </a:fontRef>
+        </p:style>
+        <p:txBody>
+          <a:bodyPr rtlCol="0" anchor="ctr"/>
+          <a:lstStyle/>
+          <a:p>
+            <a:pPr algn="ctr"/>
+          </a:p>
+        </p:txBody>
+      </p:sp>
+      <p:sp>
+        <p:nvSpPr>
+          <p:cNvPr id="12" name="TextBox 11"/>
+          <p:cNvSpPr txBox="1"/>
+          <p:nvPr/>
+        </p:nvSpPr>
+        <p:spPr>
+          <a:xfrm>
+            <a:off x="1097280" y="4681728"/>
+            <a:ext cx="4572000" cy="548640"/>
+          </a:xfrm>
+          <a:prstGeom prst="rect">
+            <a:avLst/>
+          </a:prstGeom>
+          <a:noFill/>
+        </p:spPr>
+        <p:txBody>
+          <a:bodyPr wrap="square">
+            <a:spAutoFit/>
+          </a:bodyPr>
+          <a:lstStyle/>
+          <a:p>
+            <a:pPr algn="l"/>
+            <a:r>
+              <a:rPr sz="1900" b="0">
+                <a:solidFill>
+                  <a:srgbClr val="B8C0C8"/>
                 </a:solidFill>
                 <a:latin typeface="Inter"/>
               </a:rPr>
-              <a:t>
-лес, степь, пашня и пойма горят по-разному — один порог врёт всем</a:t>
+              <a:t>Гари считают вручную, неделями</a:t>
+            </a:r>
+          </a:p>
+        </p:txBody>
+      </p:sp>
+      <p:sp>
+        <p:nvSpPr>
+          <p:cNvPr id="13" name="TextBox 12"/>
+          <p:cNvSpPr txBox="1"/>
+          <p:nvPr/>
+        </p:nvSpPr>
+        <p:spPr>
+          <a:xfrm>
+            <a:off x="457200" y="6400800"/>
+            <a:ext cx="7315200" cy="274320"/>
+          </a:xfrm>
+          <a:prstGeom prst="rect">
+            <a:avLst/>
+          </a:prstGeom>
+          <a:noFill/>
+        </p:spPr>
+        <p:txBody>
+          <a:bodyPr wrap="square">
+            <a:spAutoFit/>
+          </a:bodyPr>
+          <a:lstStyle/>
+          <a:p>
+            <a:pPr algn="l"/>
+            <a:r>
+              <a:rPr sz="1100" b="1">
+                <a:solidFill>
+                  <a:srgbClr val="7D8690"/>
+                </a:solidFill>
+                <a:latin typeface="Inter"/>
+              </a:rPr>
+              <a:t>ЖИМ НОГАМИ · KOSMOHACK 2026</a:t>
+            </a:r>
+          </a:p>
+        </p:txBody>
+      </p:sp>
+      <p:sp>
+        <p:nvSpPr>
+          <p:cNvPr id="14" name="TextBox 13"/>
+          <p:cNvSpPr txBox="1"/>
+          <p:nvPr/>
+        </p:nvSpPr>
+        <p:spPr>
+          <a:xfrm>
+            <a:off x="10789920" y="6400800"/>
+            <a:ext cx="914400" cy="274320"/>
+          </a:xfrm>
+          <a:prstGeom prst="rect">
+            <a:avLst/>
+          </a:prstGeom>
+          <a:noFill/>
+        </p:spPr>
+        <p:txBody>
+          <a:bodyPr wrap="square">
+            <a:spAutoFit/>
+          </a:bodyPr>
+          <a:lstStyle/>
+          <a:p>
+            <a:pPr algn="r"/>
+            <a:r>
+              <a:rPr sz="1100" b="1">
+                <a:solidFill>
+                  <a:srgbClr val="7D8690"/>
+                </a:solidFill>
+                <a:latin typeface="Inter"/>
+              </a:rPr>
+              <a:t>02</a:t>
             </a:r>
           </a:p>
         </p:txBody>
@@ -5065,8 +5181,8 @@
         </p:nvSpPr>
         <p:spPr>
           <a:xfrm>
-            <a:off x="640080" y="274320"/>
-            <a:ext cx="10881360" cy="365760"/>
+            <a:off x="640080" y="457200"/>
+            <a:ext cx="10881360" cy="731520"/>
           </a:xfrm>
           <a:prstGeom prst="rect">
             <a:avLst/>
@@ -5081,36 +5197,40 @@
           <a:p>
             <a:pPr algn="l"/>
             <a:r>
-              <a:rPr sz="1200" b="1">
-                <a:solidFill>
-                  <a:srgbClr val="7D8690"/>
+              <a:rPr sz="3800" b="1">
+                <a:solidFill>
+                  <a:srgbClr val="F2F4F5"/>
                 </a:solidFill>
                 <a:latin typeface="Inter"/>
               </a:rPr>
-              <a:t>ЖИМ НОГАМИ · KOSMOHACK</a:t>
-            </a:r>
-          </a:p>
-        </p:txBody>
-      </p:sp>
-      <p:sp>
-        <p:nvSpPr>
-          <p:cNvPr id="3" name="Oval 2"/>
+              <a:t>Конвейер</a:t>
+            </a:r>
+          </a:p>
+        </p:txBody>
+      </p:sp>
+      <p:sp>
+        <p:nvSpPr>
+          <p:cNvPr id="3" name="Rounded Rectangle 2"/>
           <p:cNvSpPr/>
           <p:nvPr/>
         </p:nvSpPr>
         <p:spPr>
           <a:xfrm>
-            <a:off x="11658600" y="384048"/>
-            <a:ext cx="128016" cy="128016"/>
-          </a:xfrm>
-          <a:prstGeom prst="ellipse">
-            <a:avLst/>
+            <a:off x="640080" y="2011680"/>
+            <a:ext cx="2103120" cy="2377440"/>
+          </a:xfrm>
+          <a:prstGeom prst="roundRect">
+            <a:avLst>
+              <a:gd name="adj" fmla="val 6000"/>
+            </a:avLst>
           </a:prstGeom>
           <a:solidFill>
-            <a:srgbClr val="62D99A"/>
+            <a:srgbClr val="0D1217"/>
           </a:solidFill>
-          <a:ln>
-            <a:noFill/>
+          <a:ln w="12700">
+            <a:solidFill>
+              <a:srgbClr val="2A333D"/>
+            </a:solidFill>
           </a:ln>
         </p:spPr>
         <p:style>
@@ -5137,55 +5257,20 @@
       </p:sp>
       <p:sp>
         <p:nvSpPr>
-          <p:cNvPr id="4" name="TextBox 3"/>
-          <p:cNvSpPr txBox="1"/>
-          <p:nvPr/>
-        </p:nvSpPr>
-        <p:spPr>
-          <a:xfrm>
-            <a:off x="640080" y="777240"/>
-            <a:ext cx="10881360" cy="1097280"/>
-          </a:xfrm>
-          <a:prstGeom prst="rect">
-            <a:avLst/>
-          </a:prstGeom>
-          <a:noFill/>
-        </p:spPr>
-        <p:txBody>
-          <a:bodyPr wrap="square">
-            <a:spAutoFit/>
-          </a:bodyPr>
-          <a:lstStyle/>
-          <a:p>
-            <a:pPr algn="l"/>
-            <a:r>
-              <a:rPr sz="3800" b="1">
-                <a:solidFill>
-                  <a:srgbClr val="F2F4F5"/>
-                </a:solidFill>
-                <a:latin typeface="Inter"/>
-              </a:rPr>
-              <a:t>Детектор огня: 5 минут — и готово</a:t>
-            </a:r>
-          </a:p>
-        </p:txBody>
-      </p:sp>
-      <p:sp>
-        <p:nvSpPr>
-          <p:cNvPr id="5" name="Oval 4"/>
+          <p:cNvPr id="4" name="Rounded Rectangle 3"/>
           <p:cNvSpPr/>
           <p:nvPr/>
         </p:nvSpPr>
         <p:spPr>
           <a:xfrm>
-            <a:off x="914400" y="2414016"/>
-            <a:ext cx="155448" cy="155448"/>
-          </a:xfrm>
-          <a:prstGeom prst="ellipse">
+            <a:off x="640080" y="2148840"/>
+            <a:ext cx="82296" cy="2103120"/>
+          </a:xfrm>
+          <a:prstGeom prst="roundRect">
             <a:avLst/>
           </a:prstGeom>
           <a:solidFill>
-            <a:srgbClr val="62D99A"/>
+            <a:srgbClr val="EF5B5B"/>
           </a:solidFill>
           <a:ln>
             <a:noFill/>
@@ -5215,14 +5300,14 @@
       </p:sp>
       <p:sp>
         <p:nvSpPr>
-          <p:cNvPr id="6" name="TextBox 5"/>
+          <p:cNvPr id="5" name="TextBox 4"/>
           <p:cNvSpPr txBox="1"/>
           <p:nvPr/>
         </p:nvSpPr>
         <p:spPr>
           <a:xfrm>
-            <a:off x="1280160" y="2212848"/>
-            <a:ext cx="10241280" cy="868680"/>
+            <a:off x="960120" y="2331720"/>
+            <a:ext cx="1554480" cy="1737360"/>
           </a:xfrm>
           <a:prstGeom prst="rect">
             <a:avLst/>
@@ -5237,46 +5322,85 @@
           <a:p>
             <a:pPr algn="l"/>
             <a:r>
-              <a:rPr sz="2100" b="0">
+              <a:rPr sz="2100" b="1">
                 <a:solidFill>
                   <a:srgbClr val="F2F4F5"/>
                 </a:solidFill>
                 <a:latin typeface="Inter"/>
               </a:rPr>
-              <a:t>Unet + EfficientNet-B4 · 12 каналов: видимый, тепло, покров, рельеф, погода</a:t>
-            </a:r>
-            <a:r>
-              <a:rPr sz="1400" b="0">
+              <a:t>VIIRS AF</a:t>
+            </a:r>
+            <a:r>
+              <a:rPr sz="1500" b="0">
                 <a:solidFill>
                   <a:srgbClr val="7D8690"/>
                 </a:solidFill>
                 <a:latin typeface="Inter"/>
               </a:rPr>
               <a:t>
-полное обучение за 295 секунд на арендной RTX PRO 4500</a:t>
-            </a:r>
-          </a:p>
-        </p:txBody>
-      </p:sp>
-      <p:sp>
-        <p:nvSpPr>
-          <p:cNvPr id="7" name="Oval 6"/>
+Unet · 12ch</a:t>
+            </a:r>
+          </a:p>
+        </p:txBody>
+      </p:sp>
+      <p:sp>
+        <p:nvSpPr>
+          <p:cNvPr id="6" name="TextBox 5"/>
+          <p:cNvSpPr txBox="1"/>
+          <p:nvPr/>
+        </p:nvSpPr>
+        <p:spPr>
+          <a:xfrm>
+            <a:off x="2743200" y="2834640"/>
+            <a:ext cx="365760" cy="457200"/>
+          </a:xfrm>
+          <a:prstGeom prst="rect">
+            <a:avLst/>
+          </a:prstGeom>
+          <a:noFill/>
+        </p:spPr>
+        <p:txBody>
+          <a:bodyPr wrap="square">
+            <a:spAutoFit/>
+          </a:bodyPr>
+          <a:lstStyle/>
+          <a:p>
+            <a:pPr algn="l"/>
+            <a:r>
+              <a:rPr sz="3000" b="0">
+                <a:solidFill>
+                  <a:srgbClr val="FF6B35"/>
+                </a:solidFill>
+                <a:latin typeface="Inter"/>
+              </a:rPr>
+              <a:t>›</a:t>
+            </a:r>
+          </a:p>
+        </p:txBody>
+      </p:sp>
+      <p:sp>
+        <p:nvSpPr>
+          <p:cNvPr id="7" name="Rounded Rectangle 6"/>
           <p:cNvSpPr/>
           <p:nvPr/>
         </p:nvSpPr>
         <p:spPr>
           <a:xfrm>
-            <a:off x="914400" y="3557016"/>
-            <a:ext cx="155448" cy="155448"/>
-          </a:xfrm>
-          <a:prstGeom prst="ellipse">
-            <a:avLst/>
+            <a:off x="2944368" y="2011680"/>
+            <a:ext cx="2103120" cy="2377440"/>
+          </a:xfrm>
+          <a:prstGeom prst="roundRect">
+            <a:avLst>
+              <a:gd name="adj" fmla="val 6000"/>
+            </a:avLst>
           </a:prstGeom>
           <a:solidFill>
-            <a:srgbClr val="F2F4F5"/>
+            <a:srgbClr val="0D1217"/>
           </a:solidFill>
-          <a:ln>
-            <a:noFill/>
+          <a:ln w="12700">
+            <a:solidFill>
+              <a:srgbClr val="2A333D"/>
+            </a:solidFill>
           </a:ln>
         </p:spPr>
         <p:style>
@@ -5303,61 +5427,16 @@
       </p:sp>
       <p:sp>
         <p:nvSpPr>
-          <p:cNvPr id="8" name="TextBox 7"/>
-          <p:cNvSpPr txBox="1"/>
-          <p:nvPr/>
-        </p:nvSpPr>
-        <p:spPr>
-          <a:xfrm>
-            <a:off x="1280160" y="3355848"/>
-            <a:ext cx="10241280" cy="868680"/>
-          </a:xfrm>
-          <a:prstGeom prst="rect">
-            <a:avLst/>
-          </a:prstGeom>
-          <a:noFill/>
-        </p:spPr>
-        <p:txBody>
-          <a:bodyPr wrap="square">
-            <a:spAutoFit/>
-          </a:bodyPr>
-          <a:lstStyle/>
-          <a:p>
-            <a:pPr algn="l"/>
-            <a:r>
-              <a:rPr sz="2100" b="0">
-                <a:solidFill>
-                  <a:srgbClr val="F2F4F5"/>
-                </a:solidFill>
-                <a:latin typeface="Inter"/>
-              </a:rPr>
-              <a:t>F1 0.8434 · днём 0.85, ночью 0.80</a:t>
-            </a:r>
-            <a:r>
-              <a:rPr sz="1400" b="0">
-                <a:solidFill>
-                  <a:srgbClr val="7D8690"/>
-                </a:solidFill>
-                <a:latin typeface="Inter"/>
-              </a:rPr>
-              <a:t>
-ночью видны только тепловые каналы — отсюда разрыв</a:t>
-            </a:r>
-          </a:p>
-        </p:txBody>
-      </p:sp>
-      <p:sp>
-        <p:nvSpPr>
-          <p:cNvPr id="9" name="Oval 8"/>
+          <p:cNvPr id="8" name="Rounded Rectangle 7"/>
           <p:cNvSpPr/>
           <p:nvPr/>
         </p:nvSpPr>
         <p:spPr>
           <a:xfrm>
-            <a:off x="914400" y="4700016"/>
-            <a:ext cx="155448" cy="155448"/>
-          </a:xfrm>
-          <a:prstGeom prst="ellipse">
+            <a:off x="2944368" y="2148840"/>
+            <a:ext cx="82296" cy="2103120"/>
+          </a:xfrm>
+          <a:prstGeom prst="roundRect">
             <a:avLst/>
           </a:prstGeom>
           <a:solidFill>
@@ -5391,14 +5470,14 @@
       </p:sp>
       <p:sp>
         <p:nvSpPr>
-          <p:cNvPr id="10" name="TextBox 9"/>
+          <p:cNvPr id="9" name="TextBox 8"/>
           <p:cNvSpPr txBox="1"/>
           <p:nvPr/>
         </p:nvSpPr>
         <p:spPr>
           <a:xfrm>
-            <a:off x="1280160" y="4498848"/>
-            <a:ext cx="10241280" cy="868680"/>
+            <a:off x="3264408" y="2331720"/>
+            <a:ext cx="1554480" cy="1737360"/>
           </a:xfrm>
           <a:prstGeom prst="rect">
             <a:avLst/>
@@ -5413,51 +5492,642 @@
           <a:p>
             <a:pPr algn="l"/>
             <a:r>
-              <a:rPr sz="2100" b="0">
+              <a:rPr sz="2100" b="1">
                 <a:solidFill>
                   <a:srgbClr val="F2F4F5"/>
                 </a:solidFill>
                 <a:latin typeface="Inter"/>
               </a:rPr>
-              <a:t>Факелы от пожаров на одном снимке неотличимы</a:t>
-            </a:r>
-            <a:r>
-              <a:rPr sz="1400" b="0">
+              <a:t>S2 BS</a:t>
+            </a:r>
+            <a:r>
+              <a:rPr sz="1500" b="0">
                 <a:solidFill>
                   <a:srgbClr val="7D8690"/>
                 </a:solidFill>
                 <a:latin typeface="Inter"/>
               </a:rPr>
               <a:t>
-давим их контекстом застройки и историей — честно пишем в отчёт</a:t>
-            </a:r>
-          </a:p>
-        </p:txBody>
-      </p:sp>
-      <p:pic>
-        <p:nvPicPr>
-          <p:cNvPr id="11" name="Picture 10" descr="af_viz_sample.png"/>
-          <p:cNvPicPr>
-            <a:picLocks noChangeAspect="1"/>
-          </p:cNvPicPr>
-          <p:nvPr/>
-        </p:nvPicPr>
-        <p:blipFill>
-          <a:blip r:embed="rId2"/>
-          <a:stretch>
-            <a:fillRect/>
-          </a:stretch>
-        </p:blipFill>
-        <p:spPr>
-          <a:xfrm>
-            <a:off x="9144000" y="4480560"/>
-            <a:ext cx="2377440" cy="792480"/>
+Unet · 27ch</a:t>
+            </a:r>
+          </a:p>
+        </p:txBody>
+      </p:sp>
+      <p:sp>
+        <p:nvSpPr>
+          <p:cNvPr id="10" name="TextBox 9"/>
+          <p:cNvSpPr txBox="1"/>
+          <p:nvPr/>
+        </p:nvSpPr>
+        <p:spPr>
+          <a:xfrm>
+            <a:off x="5047488" y="2834640"/>
+            <a:ext cx="365760" cy="457200"/>
           </a:xfrm>
           <a:prstGeom prst="rect">
             <a:avLst/>
           </a:prstGeom>
-        </p:spPr>
-      </p:pic>
+          <a:noFill/>
+        </p:spPr>
+        <p:txBody>
+          <a:bodyPr wrap="square">
+            <a:spAutoFit/>
+          </a:bodyPr>
+          <a:lstStyle/>
+          <a:p>
+            <a:pPr algn="l"/>
+            <a:r>
+              <a:rPr sz="3000" b="0">
+                <a:solidFill>
+                  <a:srgbClr val="FF6B35"/>
+                </a:solidFill>
+                <a:latin typeface="Inter"/>
+              </a:rPr>
+              <a:t>›</a:t>
+            </a:r>
+          </a:p>
+        </p:txBody>
+      </p:sp>
+      <p:sp>
+        <p:nvSpPr>
+          <p:cNvPr id="11" name="Rounded Rectangle 10"/>
+          <p:cNvSpPr/>
+          <p:nvPr/>
+        </p:nvSpPr>
+        <p:spPr>
+          <a:xfrm>
+            <a:off x="5248656" y="2011680"/>
+            <a:ext cx="2103120" cy="2377440"/>
+          </a:xfrm>
+          <a:prstGeom prst="roundRect">
+            <a:avLst>
+              <a:gd name="adj" fmla="val 6000"/>
+            </a:avLst>
+          </a:prstGeom>
+          <a:solidFill>
+            <a:srgbClr val="0D1217"/>
+          </a:solidFill>
+          <a:ln w="12700">
+            <a:solidFill>
+              <a:srgbClr val="2A333D"/>
+            </a:solidFill>
+          </a:ln>
+        </p:spPr>
+        <p:style>
+          <a:lnRef idx="1">
+            <a:schemeClr val="accent1"/>
+          </a:lnRef>
+          <a:fillRef idx="3">
+            <a:schemeClr val="accent1"/>
+          </a:fillRef>
+          <a:effectRef idx="2">
+            <a:schemeClr val="accent1"/>
+          </a:effectRef>
+          <a:fontRef idx="minor">
+            <a:schemeClr val="lt1"/>
+          </a:fontRef>
+        </p:style>
+        <p:txBody>
+          <a:bodyPr rtlCol="0" anchor="ctr"/>
+          <a:lstStyle/>
+          <a:p>
+            <a:pPr algn="ctr"/>
+          </a:p>
+        </p:txBody>
+      </p:sp>
+      <p:sp>
+        <p:nvSpPr>
+          <p:cNvPr id="12" name="Rounded Rectangle 11"/>
+          <p:cNvSpPr/>
+          <p:nvPr/>
+        </p:nvSpPr>
+        <p:spPr>
+          <a:xfrm>
+            <a:off x="5248656" y="2148840"/>
+            <a:ext cx="82296" cy="2103120"/>
+          </a:xfrm>
+          <a:prstGeom prst="roundRect">
+            <a:avLst/>
+          </a:prstGeom>
+          <a:solidFill>
+            <a:srgbClr val="FF6B35"/>
+          </a:solidFill>
+          <a:ln>
+            <a:noFill/>
+          </a:ln>
+        </p:spPr>
+        <p:style>
+          <a:lnRef idx="1">
+            <a:schemeClr val="accent1"/>
+          </a:lnRef>
+          <a:fillRef idx="3">
+            <a:schemeClr val="accent1"/>
+          </a:fillRef>
+          <a:effectRef idx="2">
+            <a:schemeClr val="accent1"/>
+          </a:effectRef>
+          <a:fontRef idx="minor">
+            <a:schemeClr val="lt1"/>
+          </a:fontRef>
+        </p:style>
+        <p:txBody>
+          <a:bodyPr rtlCol="0" anchor="ctr"/>
+          <a:lstStyle/>
+          <a:p>
+            <a:pPr algn="ctr"/>
+          </a:p>
+        </p:txBody>
+      </p:sp>
+      <p:sp>
+        <p:nvSpPr>
+          <p:cNvPr id="13" name="TextBox 12"/>
+          <p:cNvSpPr txBox="1"/>
+          <p:nvPr/>
+        </p:nvSpPr>
+        <p:spPr>
+          <a:xfrm>
+            <a:off x="5568696" y="2331720"/>
+            <a:ext cx="1554480" cy="1737360"/>
+          </a:xfrm>
+          <a:prstGeom prst="rect">
+            <a:avLst/>
+          </a:prstGeom>
+          <a:noFill/>
+        </p:spPr>
+        <p:txBody>
+          <a:bodyPr wrap="square">
+            <a:spAutoFit/>
+          </a:bodyPr>
+          <a:lstStyle/>
+          <a:p>
+            <a:pPr algn="l"/>
+            <a:r>
+              <a:rPr sz="2100" b="1">
+                <a:solidFill>
+                  <a:srgbClr val="F2F4F5"/>
+                </a:solidFill>
+                <a:latin typeface="Inter"/>
+              </a:rPr>
+              <a:t>inference</a:t>
+            </a:r>
+            <a:r>
+              <a:rPr sz="1500" b="0">
+                <a:solidFill>
+                  <a:srgbClr val="7D8690"/>
+                </a:solidFill>
+                <a:latin typeface="Inter"/>
+              </a:rPr>
+              <a:t>
+~28 сек</a:t>
+            </a:r>
+          </a:p>
+        </p:txBody>
+      </p:sp>
+      <p:sp>
+        <p:nvSpPr>
+          <p:cNvPr id="14" name="TextBox 13"/>
+          <p:cNvSpPr txBox="1"/>
+          <p:nvPr/>
+        </p:nvSpPr>
+        <p:spPr>
+          <a:xfrm>
+            <a:off x="7351775" y="2834640"/>
+            <a:ext cx="365760" cy="457200"/>
+          </a:xfrm>
+          <a:prstGeom prst="rect">
+            <a:avLst/>
+          </a:prstGeom>
+          <a:noFill/>
+        </p:spPr>
+        <p:txBody>
+          <a:bodyPr wrap="square">
+            <a:spAutoFit/>
+          </a:bodyPr>
+          <a:lstStyle/>
+          <a:p>
+            <a:pPr algn="l"/>
+            <a:r>
+              <a:rPr sz="3000" b="0">
+                <a:solidFill>
+                  <a:srgbClr val="FF6B35"/>
+                </a:solidFill>
+                <a:latin typeface="Inter"/>
+              </a:rPr>
+              <a:t>›</a:t>
+            </a:r>
+          </a:p>
+        </p:txBody>
+      </p:sp>
+      <p:sp>
+        <p:nvSpPr>
+          <p:cNvPr id="15" name="Rounded Rectangle 14"/>
+          <p:cNvSpPr/>
+          <p:nvPr/>
+        </p:nvSpPr>
+        <p:spPr>
+          <a:xfrm>
+            <a:off x="7552944" y="2011680"/>
+            <a:ext cx="2103120" cy="2377440"/>
+          </a:xfrm>
+          <a:prstGeom prst="roundRect">
+            <a:avLst>
+              <a:gd name="adj" fmla="val 6000"/>
+            </a:avLst>
+          </a:prstGeom>
+          <a:solidFill>
+            <a:srgbClr val="0D1217"/>
+          </a:solidFill>
+          <a:ln w="12700">
+            <a:solidFill>
+              <a:srgbClr val="2A333D"/>
+            </a:solidFill>
+          </a:ln>
+        </p:spPr>
+        <p:style>
+          <a:lnRef idx="1">
+            <a:schemeClr val="accent1"/>
+          </a:lnRef>
+          <a:fillRef idx="3">
+            <a:schemeClr val="accent1"/>
+          </a:fillRef>
+          <a:effectRef idx="2">
+            <a:schemeClr val="accent1"/>
+          </a:effectRef>
+          <a:fontRef idx="minor">
+            <a:schemeClr val="lt1"/>
+          </a:fontRef>
+        </p:style>
+        <p:txBody>
+          <a:bodyPr rtlCol="0" anchor="ctr"/>
+          <a:lstStyle/>
+          <a:p>
+            <a:pPr algn="ctr"/>
+          </a:p>
+        </p:txBody>
+      </p:sp>
+      <p:sp>
+        <p:nvSpPr>
+          <p:cNvPr id="16" name="Rounded Rectangle 15"/>
+          <p:cNvSpPr/>
+          <p:nvPr/>
+        </p:nvSpPr>
+        <p:spPr>
+          <a:xfrm>
+            <a:off x="7552944" y="2148840"/>
+            <a:ext cx="82296" cy="2103120"/>
+          </a:xfrm>
+          <a:prstGeom prst="roundRect">
+            <a:avLst/>
+          </a:prstGeom>
+          <a:solidFill>
+            <a:srgbClr val="62D99A"/>
+          </a:solidFill>
+          <a:ln>
+            <a:noFill/>
+          </a:ln>
+        </p:spPr>
+        <p:style>
+          <a:lnRef idx="1">
+            <a:schemeClr val="accent1"/>
+          </a:lnRef>
+          <a:fillRef idx="3">
+            <a:schemeClr val="accent1"/>
+          </a:fillRef>
+          <a:effectRef idx="2">
+            <a:schemeClr val="accent1"/>
+          </a:effectRef>
+          <a:fontRef idx="minor">
+            <a:schemeClr val="lt1"/>
+          </a:fontRef>
+        </p:style>
+        <p:txBody>
+          <a:bodyPr rtlCol="0" anchor="ctr"/>
+          <a:lstStyle/>
+          <a:p>
+            <a:pPr algn="ctr"/>
+          </a:p>
+        </p:txBody>
+      </p:sp>
+      <p:sp>
+        <p:nvSpPr>
+          <p:cNvPr id="17" name="TextBox 16"/>
+          <p:cNvSpPr txBox="1"/>
+          <p:nvPr/>
+        </p:nvSpPr>
+        <p:spPr>
+          <a:xfrm>
+            <a:off x="7872984" y="2331720"/>
+            <a:ext cx="1554480" cy="1737360"/>
+          </a:xfrm>
+          <a:prstGeom prst="rect">
+            <a:avLst/>
+          </a:prstGeom>
+          <a:noFill/>
+        </p:spPr>
+        <p:txBody>
+          <a:bodyPr wrap="square">
+            <a:spAutoFit/>
+          </a:bodyPr>
+          <a:lstStyle/>
+          <a:p>
+            <a:pPr algn="l"/>
+            <a:r>
+              <a:rPr sz="2100" b="1">
+                <a:solidFill>
+                  <a:srgbClr val="F2F4F5"/>
+                </a:solidFill>
+                <a:latin typeface="Inter"/>
+              </a:rPr>
+              <a:t>CSV-ответ</a:t>
+            </a:r>
+            <a:r>
+              <a:rPr sz="1500" b="0">
+                <a:solidFill>
+                  <a:srgbClr val="7D8690"/>
+                </a:solidFill>
+                <a:latin typeface="Inter"/>
+              </a:rPr>
+              <a:t>
+447 строк</a:t>
+            </a:r>
+          </a:p>
+        </p:txBody>
+      </p:sp>
+      <p:sp>
+        <p:nvSpPr>
+          <p:cNvPr id="18" name="TextBox 17"/>
+          <p:cNvSpPr txBox="1"/>
+          <p:nvPr/>
+        </p:nvSpPr>
+        <p:spPr>
+          <a:xfrm>
+            <a:off x="9656064" y="2834640"/>
+            <a:ext cx="365760" cy="457200"/>
+          </a:xfrm>
+          <a:prstGeom prst="rect">
+            <a:avLst/>
+          </a:prstGeom>
+          <a:noFill/>
+        </p:spPr>
+        <p:txBody>
+          <a:bodyPr wrap="square">
+            <a:spAutoFit/>
+          </a:bodyPr>
+          <a:lstStyle/>
+          <a:p>
+            <a:pPr algn="l"/>
+            <a:r>
+              <a:rPr sz="3000" b="0">
+                <a:solidFill>
+                  <a:srgbClr val="FF6B35"/>
+                </a:solidFill>
+                <a:latin typeface="Inter"/>
+              </a:rPr>
+              <a:t>›</a:t>
+            </a:r>
+          </a:p>
+        </p:txBody>
+      </p:sp>
+      <p:sp>
+        <p:nvSpPr>
+          <p:cNvPr id="19" name="Rounded Rectangle 18"/>
+          <p:cNvSpPr/>
+          <p:nvPr/>
+        </p:nvSpPr>
+        <p:spPr>
+          <a:xfrm>
+            <a:off x="9857232" y="2011680"/>
+            <a:ext cx="2103120" cy="2377440"/>
+          </a:xfrm>
+          <a:prstGeom prst="roundRect">
+            <a:avLst>
+              <a:gd name="adj" fmla="val 6000"/>
+            </a:avLst>
+          </a:prstGeom>
+          <a:solidFill>
+            <a:srgbClr val="0D1217"/>
+          </a:solidFill>
+          <a:ln w="12700">
+            <a:solidFill>
+              <a:srgbClr val="2A333D"/>
+            </a:solidFill>
+          </a:ln>
+        </p:spPr>
+        <p:style>
+          <a:lnRef idx="1">
+            <a:schemeClr val="accent1"/>
+          </a:lnRef>
+          <a:fillRef idx="3">
+            <a:schemeClr val="accent1"/>
+          </a:fillRef>
+          <a:effectRef idx="2">
+            <a:schemeClr val="accent1"/>
+          </a:effectRef>
+          <a:fontRef idx="minor">
+            <a:schemeClr val="lt1"/>
+          </a:fontRef>
+        </p:style>
+        <p:txBody>
+          <a:bodyPr rtlCol="0" anchor="ctr"/>
+          <a:lstStyle/>
+          <a:p>
+            <a:pPr algn="ctr"/>
+          </a:p>
+        </p:txBody>
+      </p:sp>
+      <p:sp>
+        <p:nvSpPr>
+          <p:cNvPr id="20" name="Rounded Rectangle 19"/>
+          <p:cNvSpPr/>
+          <p:nvPr/>
+        </p:nvSpPr>
+        <p:spPr>
+          <a:xfrm>
+            <a:off x="9857232" y="2148840"/>
+            <a:ext cx="82296" cy="2103120"/>
+          </a:xfrm>
+          <a:prstGeom prst="roundRect">
+            <a:avLst/>
+          </a:prstGeom>
+          <a:solidFill>
+            <a:srgbClr val="F2F4F5"/>
+          </a:solidFill>
+          <a:ln>
+            <a:noFill/>
+          </a:ln>
+        </p:spPr>
+        <p:style>
+          <a:lnRef idx="1">
+            <a:schemeClr val="accent1"/>
+          </a:lnRef>
+          <a:fillRef idx="3">
+            <a:schemeClr val="accent1"/>
+          </a:fillRef>
+          <a:effectRef idx="2">
+            <a:schemeClr val="accent1"/>
+          </a:effectRef>
+          <a:fontRef idx="minor">
+            <a:schemeClr val="lt1"/>
+          </a:fontRef>
+        </p:style>
+        <p:txBody>
+          <a:bodyPr rtlCol="0" anchor="ctr"/>
+          <a:lstStyle/>
+          <a:p>
+            <a:pPr algn="ctr"/>
+          </a:p>
+        </p:txBody>
+      </p:sp>
+      <p:sp>
+        <p:nvSpPr>
+          <p:cNvPr id="21" name="TextBox 20"/>
+          <p:cNvSpPr txBox="1"/>
+          <p:nvPr/>
+        </p:nvSpPr>
+        <p:spPr>
+          <a:xfrm>
+            <a:off x="10177272" y="2331720"/>
+            <a:ext cx="1554480" cy="1737360"/>
+          </a:xfrm>
+          <a:prstGeom prst="rect">
+            <a:avLst/>
+          </a:prstGeom>
+          <a:noFill/>
+        </p:spPr>
+        <p:txBody>
+          <a:bodyPr wrap="square">
+            <a:spAutoFit/>
+          </a:bodyPr>
+          <a:lstStyle/>
+          <a:p>
+            <a:pPr algn="l"/>
+            <a:r>
+              <a:rPr sz="2100" b="1">
+                <a:solidFill>
+                  <a:srgbClr val="F2F4F5"/>
+                </a:solidFill>
+                <a:latin typeface="Inter"/>
+              </a:rPr>
+              <a:t>сервис</a:t>
+            </a:r>
+            <a:r>
+              <a:rPr sz="1500" b="0">
+                <a:solidFill>
+                  <a:srgbClr val="7D8690"/>
+                </a:solidFill>
+                <a:latin typeface="Inter"/>
+              </a:rPr>
+              <a:t>
+карта + API</a:t>
+            </a:r>
+          </a:p>
+        </p:txBody>
+      </p:sp>
+      <p:sp>
+        <p:nvSpPr>
+          <p:cNvPr id="22" name="TextBox 21"/>
+          <p:cNvSpPr txBox="1"/>
+          <p:nvPr/>
+        </p:nvSpPr>
+        <p:spPr>
+          <a:xfrm>
+            <a:off x="640080" y="4937760"/>
+            <a:ext cx="10881360" cy="731520"/>
+          </a:xfrm>
+          <a:prstGeom prst="rect">
+            <a:avLst/>
+          </a:prstGeom>
+          <a:noFill/>
+        </p:spPr>
+        <p:txBody>
+          <a:bodyPr wrap="square">
+            <a:spAutoFit/>
+          </a:bodyPr>
+          <a:lstStyle/>
+          <a:p>
+            <a:pPr algn="ctr"/>
+            <a:r>
+              <a:rPr sz="1700" b="0">
+                <a:solidFill>
+                  <a:srgbClr val="7D8690"/>
+                </a:solidFill>
+                <a:latin typeface="Inter"/>
+              </a:rPr>
+              <a:t>Сплит по очагам · сиды 19 · гео теста не трогаем · повтор = тот же файл</a:t>
+            </a:r>
+          </a:p>
+        </p:txBody>
+      </p:sp>
+      <p:sp>
+        <p:nvSpPr>
+          <p:cNvPr id="23" name="TextBox 22"/>
+          <p:cNvSpPr txBox="1"/>
+          <p:nvPr/>
+        </p:nvSpPr>
+        <p:spPr>
+          <a:xfrm>
+            <a:off x="457200" y="6400800"/>
+            <a:ext cx="7315200" cy="274320"/>
+          </a:xfrm>
+          <a:prstGeom prst="rect">
+            <a:avLst/>
+          </a:prstGeom>
+          <a:noFill/>
+        </p:spPr>
+        <p:txBody>
+          <a:bodyPr wrap="square">
+            <a:spAutoFit/>
+          </a:bodyPr>
+          <a:lstStyle/>
+          <a:p>
+            <a:pPr algn="l"/>
+            <a:r>
+              <a:rPr sz="1100" b="1">
+                <a:solidFill>
+                  <a:srgbClr val="7D8690"/>
+                </a:solidFill>
+                <a:latin typeface="Inter"/>
+              </a:rPr>
+              <a:t>ЖИМ НОГАМИ · KOSMOHACK 2026</a:t>
+            </a:r>
+          </a:p>
+        </p:txBody>
+      </p:sp>
+      <p:sp>
+        <p:nvSpPr>
+          <p:cNvPr id="24" name="TextBox 23"/>
+          <p:cNvSpPr txBox="1"/>
+          <p:nvPr/>
+        </p:nvSpPr>
+        <p:spPr>
+          <a:xfrm>
+            <a:off x="10789920" y="6400800"/>
+            <a:ext cx="914400" cy="274320"/>
+          </a:xfrm>
+          <a:prstGeom prst="rect">
+            <a:avLst/>
+          </a:prstGeom>
+          <a:noFill/>
+        </p:spPr>
+        <p:txBody>
+          <a:bodyPr wrap="square">
+            <a:spAutoFit/>
+          </a:bodyPr>
+          <a:lstStyle/>
+          <a:p>
+            <a:pPr algn="r"/>
+            <a:r>
+              <a:rPr sz="1100" b="1">
+                <a:solidFill>
+                  <a:srgbClr val="7D8690"/>
+                </a:solidFill>
+                <a:latin typeface="Inter"/>
+              </a:rPr>
+              <a:t>03</a:t>
+            </a:r>
+          </a:p>
+        </p:txBody>
+      </p:sp>
     </p:spTree>
   </p:cSld>
   <p:clrMapOvr>
@@ -5492,8 +6162,8 @@
         </p:nvSpPr>
         <p:spPr>
           <a:xfrm>
-            <a:off x="640080" y="274320"/>
-            <a:ext cx="10881360" cy="365760"/>
+            <a:off x="640080" y="457200"/>
+            <a:ext cx="10881360" cy="548640"/>
           </a:xfrm>
           <a:prstGeom prst="rect">
             <a:avLst/>
@@ -5508,70 +6178,27 @@
           <a:p>
             <a:pPr algn="l"/>
             <a:r>
-              <a:rPr sz="1200" b="1">
-                <a:solidFill>
-                  <a:srgbClr val="7D8690"/>
+              <a:rPr sz="1500" b="1">
+                <a:solidFill>
+                  <a:srgbClr val="FF6B35"/>
                 </a:solidFill>
                 <a:latin typeface="Inter"/>
               </a:rPr>
-              <a:t>ЖИМ НОГАМИ · KOSMOHACK</a:t>
-            </a:r>
-          </a:p>
-        </p:txBody>
-      </p:sp>
-      <p:sp>
-        <p:nvSpPr>
-          <p:cNvPr id="3" name="Oval 2"/>
-          <p:cNvSpPr/>
-          <p:nvPr/>
-        </p:nvSpPr>
-        <p:spPr>
-          <a:xfrm>
-            <a:off x="11658600" y="384048"/>
-            <a:ext cx="128016" cy="128016"/>
-          </a:xfrm>
-          <a:prstGeom prst="ellipse">
-            <a:avLst/>
-          </a:prstGeom>
-          <a:solidFill>
-            <a:srgbClr val="62D99A"/>
-          </a:solidFill>
-          <a:ln>
-            <a:noFill/>
-          </a:ln>
-        </p:spPr>
-        <p:style>
-          <a:lnRef idx="1">
-            <a:schemeClr val="accent1"/>
-          </a:lnRef>
-          <a:fillRef idx="3">
-            <a:schemeClr val="accent1"/>
-          </a:fillRef>
-          <a:effectRef idx="2">
-            <a:schemeClr val="accent1"/>
-          </a:effectRef>
-          <a:fontRef idx="minor">
-            <a:schemeClr val="lt1"/>
-          </a:fontRef>
-        </p:style>
-        <p:txBody>
-          <a:bodyPr rtlCol="0" anchor="ctr"/>
-          <a:lstStyle/>
-          <a:p>
-            <a:pPr algn="ctr"/>
-          </a:p>
-        </p:txBody>
-      </p:sp>
-      <p:sp>
-        <p:nvSpPr>
-          <p:cNvPr id="4" name="TextBox 3"/>
+              <a:t>Детектор огня</a:t>
+            </a:r>
+          </a:p>
+        </p:txBody>
+      </p:sp>
+      <p:sp>
+        <p:nvSpPr>
+          <p:cNvPr id="3" name="TextBox 2"/>
           <p:cNvSpPr txBox="1"/>
           <p:nvPr/>
         </p:nvSpPr>
         <p:spPr>
           <a:xfrm>
-            <a:off x="640080" y="777240"/>
-            <a:ext cx="10881360" cy="1097280"/>
+            <a:off x="640080" y="1005840"/>
+            <a:ext cx="4572000" cy="1280160"/>
           </a:xfrm>
           <a:prstGeom prst="rect">
             <a:avLst/>
@@ -5586,70 +6213,27 @@
           <a:p>
             <a:pPr algn="l"/>
             <a:r>
-              <a:rPr sz="3800" b="1">
-                <a:solidFill>
-                  <a:srgbClr val="F2F4F5"/>
+              <a:rPr sz="11000" b="1">
+                <a:solidFill>
+                  <a:srgbClr val="62D99A"/>
                 </a:solidFill>
                 <a:latin typeface="Inter"/>
               </a:rPr>
-              <a:t>Гари: похоронили гиганта, выиграл трудяга</a:t>
-            </a:r>
-          </a:p>
-        </p:txBody>
-      </p:sp>
-      <p:sp>
-        <p:nvSpPr>
-          <p:cNvPr id="5" name="Oval 4"/>
-          <p:cNvSpPr/>
-          <p:nvPr/>
-        </p:nvSpPr>
-        <p:spPr>
-          <a:xfrm>
-            <a:off x="914400" y="2414016"/>
-            <a:ext cx="155448" cy="155448"/>
-          </a:xfrm>
-          <a:prstGeom prst="ellipse">
-            <a:avLst/>
-          </a:prstGeom>
-          <a:solidFill>
-            <a:srgbClr val="EF5B5B"/>
-          </a:solidFill>
-          <a:ln>
-            <a:noFill/>
-          </a:ln>
-        </p:spPr>
-        <p:style>
-          <a:lnRef idx="1">
-            <a:schemeClr val="accent1"/>
-          </a:lnRef>
-          <a:fillRef idx="3">
-            <a:schemeClr val="accent1"/>
-          </a:fillRef>
-          <a:effectRef idx="2">
-            <a:schemeClr val="accent1"/>
-          </a:effectRef>
-          <a:fontRef idx="minor">
-            <a:schemeClr val="lt1"/>
-          </a:fontRef>
-        </p:style>
-        <p:txBody>
-          <a:bodyPr rtlCol="0" anchor="ctr"/>
-          <a:lstStyle/>
-          <a:p>
-            <a:pPr algn="ctr"/>
-          </a:p>
-        </p:txBody>
-      </p:sp>
-      <p:sp>
-        <p:nvSpPr>
-          <p:cNvPr id="6" name="TextBox 5"/>
+              <a:t>0.84</a:t>
+            </a:r>
+          </a:p>
+        </p:txBody>
+      </p:sp>
+      <p:sp>
+        <p:nvSpPr>
+          <p:cNvPr id="4" name="TextBox 3"/>
           <p:cNvSpPr txBox="1"/>
           <p:nvPr/>
         </p:nvSpPr>
         <p:spPr>
           <a:xfrm>
-            <a:off x="1280160" y="2212848"/>
-            <a:ext cx="10241280" cy="868680"/>
+            <a:off x="640080" y="2651760"/>
+            <a:ext cx="4572000" cy="457200"/>
           </a:xfrm>
           <a:prstGeom prst="rect">
             <a:avLst/>
@@ -5664,80 +6248,96 @@
           <a:p>
             <a:pPr algn="l"/>
             <a:r>
-              <a:rPr sz="2100" b="0">
-                <a:solidFill>
-                  <a:srgbClr val="F2F4F5"/>
+              <a:rPr sz="1900" b="0">
+                <a:solidFill>
+                  <a:srgbClr val="B8C0C8"/>
                 </a:solidFill>
                 <a:latin typeface="Inter"/>
               </a:rPr>
-              <a:t>Prithvi-300M сдох: IoU 0.16 — хуже тупого бейзлайна плюс nan-лосс</a:t>
-            </a:r>
-            <a:r>
-              <a:rPr sz="1400" b="0">
+              <a:t>micro-F1 · день 0.85 / ночь 0.80</a:t>
+            </a:r>
+          </a:p>
+        </p:txBody>
+      </p:sp>
+      <p:sp>
+        <p:nvSpPr>
+          <p:cNvPr id="5" name="TextBox 4"/>
+          <p:cNvSpPr txBox="1"/>
+          <p:nvPr/>
+        </p:nvSpPr>
+        <p:spPr>
+          <a:xfrm>
+            <a:off x="640080" y="3291840"/>
+            <a:ext cx="4572000" cy="2011680"/>
+          </a:xfrm>
+          <a:prstGeom prst="rect">
+            <a:avLst/>
+          </a:prstGeom>
+          <a:noFill/>
+        </p:spPr>
+        <p:txBody>
+          <a:bodyPr wrap="square">
+            <a:spAutoFit/>
+          </a:bodyPr>
+          <a:lstStyle/>
+          <a:p>
+            <a:pPr algn="l"/>
+            <a:r>
+              <a:rPr sz="1900" b="1">
+                <a:solidFill>
+                  <a:srgbClr val="F2F4F5"/>
+                </a:solidFill>
+                <a:latin typeface="Inter"/>
+              </a:rPr>
+              <a:t>5 минут обучения</a:t>
+            </a:r>
+            <a:r>
+              <a:rPr sz="1600" b="0">
                 <a:solidFill>
                   <a:srgbClr val="7D8690"/>
                 </a:solidFill>
                 <a:latin typeface="Inter"/>
               </a:rPr>
               <a:t>
-закрыли ветку без сантиментов</a:t>
-            </a:r>
-          </a:p>
-        </p:txBody>
-      </p:sp>
-      <p:sp>
-        <p:nvSpPr>
-          <p:cNvPr id="7" name="Oval 6"/>
-          <p:cNvSpPr/>
-          <p:nvPr/>
-        </p:nvSpPr>
-        <p:spPr>
-          <a:xfrm>
-            <a:off x="914400" y="3557016"/>
-            <a:ext cx="155448" cy="155448"/>
-          </a:xfrm>
-          <a:prstGeom prst="ellipse">
-            <a:avLst/>
-          </a:prstGeom>
-          <a:solidFill>
-            <a:srgbClr val="62D99A"/>
-          </a:solidFill>
-          <a:ln>
-            <a:noFill/>
-          </a:ln>
-        </p:spPr>
-        <p:style>
-          <a:lnRef idx="1">
-            <a:schemeClr val="accent1"/>
-          </a:lnRef>
-          <a:fillRef idx="3">
-            <a:schemeClr val="accent1"/>
-          </a:fillRef>
-          <a:effectRef idx="2">
-            <a:schemeClr val="accent1"/>
-          </a:effectRef>
-          <a:fontRef idx="minor">
-            <a:schemeClr val="lt1"/>
-          </a:fontRef>
-        </p:style>
-        <p:txBody>
-          <a:bodyPr rtlCol="0" anchor="ctr"/>
-          <a:lstStyle/>
-          <a:p>
-            <a:pPr algn="ctr"/>
-          </a:p>
-        </p:txBody>
-      </p:sp>
-      <p:sp>
-        <p:nvSpPr>
-          <p:cNvPr id="8" name="TextBox 7"/>
+Порог 0.15 + фильтр застройки · факелы на одном снимке неотличимы — пишем честно</a:t>
+            </a:r>
+          </a:p>
+        </p:txBody>
+      </p:sp>
+      <p:pic>
+        <p:nvPicPr>
+          <p:cNvPr id="6" name="Picture 5" descr="af_viz_dark.png"/>
+          <p:cNvPicPr>
+            <a:picLocks noChangeAspect="1"/>
+          </p:cNvPicPr>
+          <p:nvPr/>
+        </p:nvPicPr>
+        <p:blipFill>
+          <a:blip r:embed="rId2"/>
+          <a:stretch>
+            <a:fillRect/>
+          </a:stretch>
+        </p:blipFill>
+        <p:spPr>
+          <a:xfrm>
+            <a:off x="6035040" y="1097280"/>
+            <a:ext cx="5486400" cy="1964440"/>
+          </a:xfrm>
+          <a:prstGeom prst="rect">
+            <a:avLst/>
+          </a:prstGeom>
+        </p:spPr>
+      </p:pic>
+      <p:sp>
+        <p:nvSpPr>
+          <p:cNvPr id="7" name="TextBox 6"/>
           <p:cNvSpPr txBox="1"/>
           <p:nvPr/>
         </p:nvSpPr>
         <p:spPr>
           <a:xfrm>
-            <a:off x="1280160" y="3355848"/>
-            <a:ext cx="10241280" cy="868680"/>
+            <a:off x="457200" y="6400800"/>
+            <a:ext cx="7315200" cy="274320"/>
           </a:xfrm>
           <a:prstGeom prst="rect">
             <a:avLst/>
@@ -5752,80 +6352,27 @@
           <a:p>
             <a:pPr algn="l"/>
             <a:r>
-              <a:rPr sz="2100" b="0">
-                <a:solidFill>
-                  <a:srgbClr val="F2F4F5"/>
+              <a:rPr sz="1100" b="1">
+                <a:solidFill>
+                  <a:srgbClr val="7D8690"/>
                 </a:solidFill>
                 <a:latin typeface="Inter"/>
               </a:rPr>
-              <a:t>Обычный Unet выиграл: IoU 0.52 · mIoU 0.54</a:t>
-            </a:r>
-            <a:r>
-              <a:rPr sz="1400" b="0">
-                <a:solidFill>
-                  <a:srgbClr val="7D8690"/>
-                </a:solidFill>
-                <a:latin typeface="Inter"/>
-              </a:rPr>
-              <a:t>
-27 каналов, 91 эпоха — фриз, который сдаём</a:t>
-            </a:r>
-          </a:p>
-        </p:txBody>
-      </p:sp>
-      <p:sp>
-        <p:nvSpPr>
-          <p:cNvPr id="9" name="Oval 8"/>
-          <p:cNvSpPr/>
-          <p:nvPr/>
-        </p:nvSpPr>
-        <p:spPr>
-          <a:xfrm>
-            <a:off x="914400" y="4700016"/>
-            <a:ext cx="155448" cy="155448"/>
-          </a:xfrm>
-          <a:prstGeom prst="ellipse">
-            <a:avLst/>
-          </a:prstGeom>
-          <a:solidFill>
-            <a:srgbClr val="FF6B35"/>
-          </a:solidFill>
-          <a:ln>
-            <a:noFill/>
-          </a:ln>
-        </p:spPr>
-        <p:style>
-          <a:lnRef idx="1">
-            <a:schemeClr val="accent1"/>
-          </a:lnRef>
-          <a:fillRef idx="3">
-            <a:schemeClr val="accent1"/>
-          </a:fillRef>
-          <a:effectRef idx="2">
-            <a:schemeClr val="accent1"/>
-          </a:effectRef>
-          <a:fontRef idx="minor">
-            <a:schemeClr val="lt1"/>
-          </a:fontRef>
-        </p:style>
-        <p:txBody>
-          <a:bodyPr rtlCol="0" anchor="ctr"/>
-          <a:lstStyle/>
-          <a:p>
-            <a:pPr algn="ctr"/>
-          </a:p>
-        </p:txBody>
-      </p:sp>
-      <p:sp>
-        <p:nvSpPr>
-          <p:cNvPr id="10" name="TextBox 9"/>
+              <a:t>ЖИМ НОГАМИ · KOSMOHACK 2026</a:t>
+            </a:r>
+          </a:p>
+        </p:txBody>
+      </p:sp>
+      <p:sp>
+        <p:nvSpPr>
+          <p:cNvPr id="8" name="TextBox 7"/>
           <p:cNvSpPr txBox="1"/>
           <p:nvPr/>
         </p:nvSpPr>
         <p:spPr>
           <a:xfrm>
-            <a:off x="1280160" y="4498848"/>
-            <a:ext cx="10241280" cy="868680"/>
+            <a:off x="10789920" y="6400800"/>
+            <a:ext cx="914400" cy="274320"/>
           </a:xfrm>
           <a:prstGeom prst="rect">
             <a:avLst/>
@@ -5838,25 +6385,15 @@
           </a:bodyPr>
           <a:lstStyle/>
           <a:p>
-            <a:pPr algn="l"/>
-            <a:r>
-              <a:rPr sz="2100" b="0">
-                <a:solidFill>
-                  <a:srgbClr val="F2F4F5"/>
+            <a:pPr algn="r"/>
+            <a:r>
+              <a:rPr sz="1100" b="1">
+                <a:solidFill>
+                  <a:srgbClr val="7D8690"/>
                 </a:solidFill>
                 <a:latin typeface="Inter"/>
               </a:rPr>
-              <a:t>Две добивки проиграли фризу (0.62 и 0.63 против 0.65)</a:t>
-            </a:r>
-            <a:r>
-              <a:rPr sz="1400" b="0">
-                <a:solidFill>
-                  <a:srgbClr val="7D8690"/>
-                </a:solidFill>
-                <a:latin typeface="Inter"/>
-              </a:rPr>
-              <a:t>
-поэтому сдаём проверенное, а не последнее</a:t>
+              <a:t>04</a:t>
             </a:r>
           </a:p>
         </p:txBody>
@@ -5895,8 +6432,8 @@
         </p:nvSpPr>
         <p:spPr>
           <a:xfrm>
-            <a:off x="640080" y="274320"/>
-            <a:ext cx="10881360" cy="365760"/>
+            <a:off x="640080" y="457200"/>
+            <a:ext cx="10881360" cy="548640"/>
           </a:xfrm>
           <a:prstGeom prst="rect">
             <a:avLst/>
@@ -5911,70 +6448,27 @@
           <a:p>
             <a:pPr algn="l"/>
             <a:r>
-              <a:rPr sz="1200" b="1">
-                <a:solidFill>
-                  <a:srgbClr val="7D8690"/>
+              <a:rPr sz="1500" b="1">
+                <a:solidFill>
+                  <a:srgbClr val="E6C65C"/>
                 </a:solidFill>
                 <a:latin typeface="Inter"/>
               </a:rPr>
-              <a:t>ЖИМ НОГАМИ · KOSMOHACK</a:t>
-            </a:r>
-          </a:p>
-        </p:txBody>
-      </p:sp>
-      <p:sp>
-        <p:nvSpPr>
-          <p:cNvPr id="3" name="Oval 2"/>
-          <p:cNvSpPr/>
-          <p:nvPr/>
-        </p:nvSpPr>
-        <p:spPr>
-          <a:xfrm>
-            <a:off x="11658600" y="384048"/>
-            <a:ext cx="128016" cy="128016"/>
-          </a:xfrm>
-          <a:prstGeom prst="ellipse">
-            <a:avLst/>
-          </a:prstGeom>
-          <a:solidFill>
-            <a:srgbClr val="62D99A"/>
-          </a:solidFill>
-          <a:ln>
-            <a:noFill/>
-          </a:ln>
-        </p:spPr>
-        <p:style>
-          <a:lnRef idx="1">
-            <a:schemeClr val="accent1"/>
-          </a:lnRef>
-          <a:fillRef idx="3">
-            <a:schemeClr val="accent1"/>
-          </a:fillRef>
-          <a:effectRef idx="2">
-            <a:schemeClr val="accent1"/>
-          </a:effectRef>
-          <a:fontRef idx="minor">
-            <a:schemeClr val="lt1"/>
-          </a:fontRef>
-        </p:style>
-        <p:txBody>
-          <a:bodyPr rtlCol="0" anchor="ctr"/>
-          <a:lstStyle/>
-          <a:p>
-            <a:pPr algn="ctr"/>
-          </a:p>
-        </p:txBody>
-      </p:sp>
-      <p:sp>
-        <p:nvSpPr>
-          <p:cNvPr id="4" name="TextBox 3"/>
+              <a:t>Карты гарей</a:t>
+            </a:r>
+          </a:p>
+        </p:txBody>
+      </p:sp>
+      <p:sp>
+        <p:nvSpPr>
+          <p:cNvPr id="3" name="TextBox 2"/>
           <p:cNvSpPr txBox="1"/>
           <p:nvPr/>
         </p:nvSpPr>
         <p:spPr>
           <a:xfrm>
-            <a:off x="640080" y="777240"/>
-            <a:ext cx="10881360" cy="1097280"/>
+            <a:off x="640080" y="1005840"/>
+            <a:ext cx="4572000" cy="1280160"/>
           </a:xfrm>
           <a:prstGeom prst="rect">
             <a:avLst/>
@@ -5989,74 +6483,27 @@
           <a:p>
             <a:pPr algn="l"/>
             <a:r>
-              <a:rPr sz="3800" b="1">
-                <a:solidFill>
-                  <a:srgbClr val="F2F4F5"/>
+              <a:rPr sz="11000" b="1">
+                <a:solidFill>
+                  <a:srgbClr val="E6C65C"/>
                 </a:solidFill>
                 <a:latin typeface="Inter"/>
               </a:rPr>
-              <a:t>Итог: 0.654 — честные</a:t>
-            </a:r>
-          </a:p>
-        </p:txBody>
-      </p:sp>
-      <p:sp>
-        <p:nvSpPr>
-          <p:cNvPr id="5" name="Rounded Rectangle 4"/>
-          <p:cNvSpPr/>
-          <p:nvPr/>
-        </p:nvSpPr>
-        <p:spPr>
-          <a:xfrm>
-            <a:off x="640080" y="2194560"/>
-            <a:ext cx="10881360" cy="1463040"/>
-          </a:xfrm>
-          <a:prstGeom prst="roundRect">
-            <a:avLst>
-              <a:gd name="adj" fmla="val 7000"/>
-            </a:avLst>
-          </a:prstGeom>
-          <a:solidFill>
-            <a:srgbClr val="0D1217"/>
-          </a:solidFill>
-          <a:ln w="12700">
-            <a:solidFill>
-              <a:srgbClr val="2A333D"/>
-            </a:solidFill>
-          </a:ln>
-        </p:spPr>
-        <p:style>
-          <a:lnRef idx="1">
-            <a:schemeClr val="accent1"/>
-          </a:lnRef>
-          <a:fillRef idx="3">
-            <a:schemeClr val="accent1"/>
-          </a:fillRef>
-          <a:effectRef idx="2">
-            <a:schemeClr val="accent1"/>
-          </a:effectRef>
-          <a:fontRef idx="minor">
-            <a:schemeClr val="lt1"/>
-          </a:fontRef>
-        </p:style>
-        <p:txBody>
-          <a:bodyPr rtlCol="0" anchor="ctr"/>
-          <a:lstStyle/>
-          <a:p>
-            <a:pPr algn="ctr"/>
-          </a:p>
-        </p:txBody>
-      </p:sp>
-      <p:sp>
-        <p:nvSpPr>
-          <p:cNvPr id="6" name="TextBox 5"/>
+              <a:t>0.52</a:t>
+            </a:r>
+          </a:p>
+        </p:txBody>
+      </p:sp>
+      <p:sp>
+        <p:nvSpPr>
+          <p:cNvPr id="4" name="TextBox 3"/>
           <p:cNvSpPr txBox="1"/>
           <p:nvPr/>
         </p:nvSpPr>
         <p:spPr>
           <a:xfrm>
-            <a:off x="914400" y="2377440"/>
-            <a:ext cx="10332720" cy="1097280"/>
+            <a:off x="640080" y="2651760"/>
+            <a:ext cx="4572000" cy="457200"/>
           </a:xfrm>
           <a:prstGeom prst="rect">
             <a:avLst/>
@@ -6071,80 +6518,96 @@
           <a:p>
             <a:pPr algn="l"/>
             <a:r>
-              <a:rPr sz="2700" b="1">
-                <a:solidFill>
-                  <a:srgbClr val="F2F4F5"/>
+              <a:rPr sz="1900" b="0">
+                <a:solidFill>
+                  <a:srgbClr val="B8C0C8"/>
                 </a:solidFill>
                 <a:latin typeface="Inter"/>
               </a:rPr>
-              <a:t>0.35 × 0.8434  +  0.35 × 0.5239  +  0.30 × 0.5430  =  0.654</a:t>
-            </a:r>
-            <a:r>
-              <a:rPr sz="1500" b="0">
+              <a:t>IoU · mIoU severity 0.54</a:t>
+            </a:r>
+          </a:p>
+        </p:txBody>
+      </p:sp>
+      <p:sp>
+        <p:nvSpPr>
+          <p:cNvPr id="5" name="TextBox 4"/>
+          <p:cNvSpPr txBox="1"/>
+          <p:nvPr/>
+        </p:nvSpPr>
+        <p:spPr>
+          <a:xfrm>
+            <a:off x="640080" y="3291840"/>
+            <a:ext cx="4572000" cy="2011680"/>
+          </a:xfrm>
+          <a:prstGeom prst="rect">
+            <a:avLst/>
+          </a:prstGeom>
+          <a:noFill/>
+        </p:spPr>
+        <p:txBody>
+          <a:bodyPr wrap="square">
+            <a:spAutoFit/>
+          </a:bodyPr>
+          <a:lstStyle/>
+          <a:p>
+            <a:pPr algn="l"/>
+            <a:r>
+              <a:rPr sz="1900" b="1">
+                <a:solidFill>
+                  <a:srgbClr val="F2F4F5"/>
+                </a:solidFill>
+                <a:latin typeface="Inter"/>
+              </a:rPr>
+              <a:t>Prithvi-300M похоронен: 0.16</a:t>
+            </a:r>
+            <a:r>
+              <a:rPr sz="1600" b="0">
                 <a:solidFill>
                   <a:srgbClr val="7D8690"/>
                 </a:solidFill>
                 <a:latin typeface="Inter"/>
               </a:rPr>
               <a:t>
-447 строк · RLE валиден · два прогона идентичны · md5 зафиксирован</a:t>
-            </a:r>
-          </a:p>
-        </p:txBody>
-      </p:sp>
-      <p:sp>
-        <p:nvSpPr>
-          <p:cNvPr id="7" name="Oval 6"/>
-          <p:cNvSpPr/>
-          <p:nvPr/>
-        </p:nvSpPr>
-        <p:spPr>
-          <a:xfrm>
-            <a:off x="914400" y="4334255"/>
-            <a:ext cx="155448" cy="155448"/>
-          </a:xfrm>
-          <a:prstGeom prst="ellipse">
-            <a:avLst/>
-          </a:prstGeom>
-          <a:solidFill>
-            <a:srgbClr val="62D99A"/>
-          </a:solidFill>
-          <a:ln>
-            <a:noFill/>
-          </a:ln>
-        </p:spPr>
-        <p:style>
-          <a:lnRef idx="1">
-            <a:schemeClr val="accent1"/>
-          </a:lnRef>
-          <a:fillRef idx="3">
-            <a:schemeClr val="accent1"/>
-          </a:fillRef>
-          <a:effectRef idx="2">
-            <a:schemeClr val="accent1"/>
-          </a:effectRef>
-          <a:fontRef idx="minor">
-            <a:schemeClr val="lt1"/>
-          </a:fontRef>
-        </p:style>
-        <p:txBody>
-          <a:bodyPr rtlCol="0" anchor="ctr"/>
-          <a:lstStyle/>
-          <a:p>
-            <a:pPr algn="ctr"/>
-          </a:p>
-        </p:txBody>
-      </p:sp>
-      <p:sp>
-        <p:nvSpPr>
-          <p:cNvPr id="8" name="TextBox 7"/>
+Пороги dNBR под каждый ландшафт · retry-ветки проиграли фризу ep91</a:t>
+            </a:r>
+          </a:p>
+        </p:txBody>
+      </p:sp>
+      <p:pic>
+        <p:nvPicPr>
+          <p:cNvPr id="6" name="Picture 5" descr="02-burned-only.png"/>
+          <p:cNvPicPr>
+            <a:picLocks noChangeAspect="1"/>
+          </p:cNvPicPr>
+          <p:nvPr/>
+        </p:nvPicPr>
+        <p:blipFill>
+          <a:blip r:embed="rId2"/>
+          <a:stretch>
+            <a:fillRect/>
+          </a:stretch>
+        </p:blipFill>
+        <p:spPr>
+          <a:xfrm>
+            <a:off x="6035040" y="1097280"/>
+            <a:ext cx="5486400" cy="4663440"/>
+          </a:xfrm>
+          <a:prstGeom prst="rect">
+            <a:avLst/>
+          </a:prstGeom>
+        </p:spPr>
+      </p:pic>
+      <p:sp>
+        <p:nvSpPr>
+          <p:cNvPr id="7" name="TextBox 6"/>
           <p:cNvSpPr txBox="1"/>
           <p:nvPr/>
         </p:nvSpPr>
         <p:spPr>
           <a:xfrm>
-            <a:off x="1280160" y="4133087"/>
-            <a:ext cx="10241280" cy="868680"/>
+            <a:off x="457200" y="6400800"/>
+            <a:ext cx="7315200" cy="274320"/>
           </a:xfrm>
           <a:prstGeom prst="rect">
             <a:avLst/>
@@ -6159,23 +6622,48 @@
           <a:p>
             <a:pPr algn="l"/>
             <a:r>
-              <a:rPr sz="1900" b="0">
-                <a:solidFill>
-                  <a:srgbClr val="F2F4F5"/>
+              <a:rPr sz="1100" b="1">
+                <a:solidFill>
+                  <a:srgbClr val="7D8690"/>
                 </a:solidFill>
                 <a:latin typeface="Inter"/>
               </a:rPr>
-              <a:t>Файл примут с первого раза</a:t>
-            </a:r>
-            <a:r>
-              <a:rPr sz="1400" b="0">
+              <a:t>ЖИМ НОГАМИ · KOSMOHACK 2026</a:t>
+            </a:r>
+          </a:p>
+        </p:txBody>
+      </p:sp>
+      <p:sp>
+        <p:nvSpPr>
+          <p:cNvPr id="8" name="TextBox 7"/>
+          <p:cNvSpPr txBox="1"/>
+          <p:nvPr/>
+        </p:nvSpPr>
+        <p:spPr>
+          <a:xfrm>
+            <a:off x="10789920" y="6400800"/>
+            <a:ext cx="914400" cy="274320"/>
+          </a:xfrm>
+          <a:prstGeom prst="rect">
+            <a:avLst/>
+          </a:prstGeom>
+          <a:noFill/>
+        </p:spPr>
+        <p:txBody>
+          <a:bodyPr wrap="square">
+            <a:spAutoFit/>
+          </a:bodyPr>
+          <a:lstStyle/>
+          <a:p>
+            <a:pPr algn="r"/>
+            <a:r>
+              <a:rPr sz="1100" b="1">
                 <a:solidFill>
                   <a:srgbClr val="7D8690"/>
                 </a:solidFill>
                 <a:latin typeface="Inter"/>
               </a:rPr>
-              <a:t>
-пары совпадают с шаблоном, NaN ноль, пересечений ноль</a:t>
+              <a:t>05</a:t>
             </a:r>
           </a:p>
         </p:txBody>
@@ -6206,30 +6694,216 @@
         <p:nvPr/>
       </p:nvGrpSpPr>
       <p:grpSpPr/>
-      <p:pic>
-        <p:nvPicPr>
-          <p:cNvPr id="2" name="Picture 1" descr="01-map-full.png"/>
-          <p:cNvPicPr>
-            <a:picLocks noChangeAspect="1"/>
-          </p:cNvPicPr>
-          <p:nvPr/>
-        </p:nvPicPr>
-        <p:blipFill>
-          <a:blip r:embed="rId2"/>
-          <a:stretch>
-            <a:fillRect/>
-          </a:stretch>
-        </p:blipFill>
-        <p:spPr>
-          <a:xfrm>
-            <a:off x="0" y="0"/>
-            <a:ext cx="12188952" cy="6858000"/>
+      <p:sp>
+        <p:nvSpPr>
+          <p:cNvPr id="2" name="TextBox 1"/>
+          <p:cNvSpPr txBox="1"/>
+          <p:nvPr/>
+        </p:nvSpPr>
+        <p:spPr>
+          <a:xfrm>
+            <a:off x="640080" y="457200"/>
+            <a:ext cx="10881360" cy="548640"/>
           </a:xfrm>
           <a:prstGeom prst="rect">
             <a:avLst/>
           </a:prstGeom>
-        </p:spPr>
-      </p:pic>
+          <a:noFill/>
+        </p:spPr>
+        <p:txBody>
+          <a:bodyPr wrap="square">
+            <a:spAutoFit/>
+          </a:bodyPr>
+          <a:lstStyle/>
+          <a:p>
+            <a:pPr algn="l"/>
+            <a:r>
+              <a:rPr sz="1500" b="1">
+                <a:solidFill>
+                  <a:srgbClr val="62D99A"/>
+                </a:solidFill>
+                <a:latin typeface="Inter"/>
+              </a:rPr>
+              <a:t>Метрика · FINAL</a:t>
+            </a:r>
+          </a:p>
+        </p:txBody>
+      </p:sp>
+      <p:sp>
+        <p:nvSpPr>
+          <p:cNvPr id="3" name="TextBox 2"/>
+          <p:cNvSpPr txBox="1"/>
+          <p:nvPr/>
+        </p:nvSpPr>
+        <p:spPr>
+          <a:xfrm>
+            <a:off x="640080" y="1005840"/>
+            <a:ext cx="10881360" cy="1371600"/>
+          </a:xfrm>
+          <a:prstGeom prst="rect">
+            <a:avLst/>
+          </a:prstGeom>
+          <a:noFill/>
+        </p:spPr>
+        <p:txBody>
+          <a:bodyPr wrap="square">
+            <a:spAutoFit/>
+          </a:bodyPr>
+          <a:lstStyle/>
+          <a:p>
+            <a:pPr algn="ctr"/>
+            <a:r>
+              <a:rPr sz="11000" b="1">
+                <a:solidFill>
+                  <a:srgbClr val="F2F4F5"/>
+                </a:solidFill>
+                <a:latin typeface="Inter"/>
+              </a:rPr>
+              <a:t>0.654</a:t>
+            </a:r>
+          </a:p>
+        </p:txBody>
+      </p:sp>
+      <p:sp>
+        <p:nvSpPr>
+          <p:cNvPr id="4" name="TextBox 3"/>
+          <p:cNvSpPr txBox="1"/>
+          <p:nvPr/>
+        </p:nvSpPr>
+        <p:spPr>
+          <a:xfrm>
+            <a:off x="640080" y="2651760"/>
+            <a:ext cx="10881360" cy="548640"/>
+          </a:xfrm>
+          <a:prstGeom prst="rect">
+            <a:avLst/>
+          </a:prstGeom>
+          <a:noFill/>
+        </p:spPr>
+        <p:txBody>
+          <a:bodyPr wrap="square">
+            <a:spAutoFit/>
+          </a:bodyPr>
+          <a:lstStyle/>
+          <a:p>
+            <a:pPr algn="ctr"/>
+            <a:r>
+              <a:rPr sz="2200" b="0">
+                <a:solidFill>
+                  <a:srgbClr val="B8C0C8"/>
+                </a:solidFill>
+                <a:latin typeface="Inter"/>
+              </a:rPr>
+              <a:t>0.35 × 0.8434  +  0.35 × 0.5239  +  0.30 × 0.5430</a:t>
+            </a:r>
+          </a:p>
+        </p:txBody>
+      </p:sp>
+      <p:sp>
+        <p:nvSpPr>
+          <p:cNvPr id="5" name="TextBox 4"/>
+          <p:cNvSpPr txBox="1"/>
+          <p:nvPr/>
+        </p:nvSpPr>
+        <p:spPr>
+          <a:xfrm>
+            <a:off x="640080" y="3474720"/>
+            <a:ext cx="10881360" cy="1463040"/>
+          </a:xfrm>
+          <a:prstGeom prst="rect">
+            <a:avLst/>
+          </a:prstGeom>
+          <a:noFill/>
+        </p:spPr>
+        <p:txBody>
+          <a:bodyPr wrap="square">
+            <a:spAutoFit/>
+          </a:bodyPr>
+          <a:lstStyle/>
+          <a:p>
+            <a:pPr algn="ctr"/>
+            <a:r>
+              <a:rPr sz="1800" b="0">
+                <a:solidFill>
+                  <a:srgbClr val="7D8690"/>
+                </a:solidFill>
+                <a:latin typeface="Inter"/>
+              </a:rPr>
+              <a:t>447 строк = шаблону · RLE валиден · NaN 0 · пересечений 0 · md5 97b86c67 · переобучение запрещено</a:t>
+            </a:r>
+          </a:p>
+        </p:txBody>
+      </p:sp>
+      <p:sp>
+        <p:nvSpPr>
+          <p:cNvPr id="6" name="TextBox 5"/>
+          <p:cNvSpPr txBox="1"/>
+          <p:nvPr/>
+        </p:nvSpPr>
+        <p:spPr>
+          <a:xfrm>
+            <a:off x="457200" y="6400800"/>
+            <a:ext cx="7315200" cy="274320"/>
+          </a:xfrm>
+          <a:prstGeom prst="rect">
+            <a:avLst/>
+          </a:prstGeom>
+          <a:noFill/>
+        </p:spPr>
+        <p:txBody>
+          <a:bodyPr wrap="square">
+            <a:spAutoFit/>
+          </a:bodyPr>
+          <a:lstStyle/>
+          <a:p>
+            <a:pPr algn="l"/>
+            <a:r>
+              <a:rPr sz="1100" b="1">
+                <a:solidFill>
+                  <a:srgbClr val="7D8690"/>
+                </a:solidFill>
+                <a:latin typeface="Inter"/>
+              </a:rPr>
+              <a:t>ЖИМ НОГАМИ · KOSMOHACK 2026</a:t>
+            </a:r>
+          </a:p>
+        </p:txBody>
+      </p:sp>
+      <p:sp>
+        <p:nvSpPr>
+          <p:cNvPr id="7" name="TextBox 6"/>
+          <p:cNvSpPr txBox="1"/>
+          <p:nvPr/>
+        </p:nvSpPr>
+        <p:spPr>
+          <a:xfrm>
+            <a:off x="10789920" y="6400800"/>
+            <a:ext cx="914400" cy="274320"/>
+          </a:xfrm>
+          <a:prstGeom prst="rect">
+            <a:avLst/>
+          </a:prstGeom>
+          <a:noFill/>
+        </p:spPr>
+        <p:txBody>
+          <a:bodyPr wrap="square">
+            <a:spAutoFit/>
+          </a:bodyPr>
+          <a:lstStyle/>
+          <a:p>
+            <a:pPr algn="r"/>
+            <a:r>
+              <a:rPr sz="1100" b="1">
+                <a:solidFill>
+                  <a:srgbClr val="7D8690"/>
+                </a:solidFill>
+                <a:latin typeface="Inter"/>
+              </a:rPr>
+              <a:t>06</a:t>
+            </a:r>
+          </a:p>
+        </p:txBody>
+      </p:sp>
     </p:spTree>
   </p:cSld>
   <p:clrMapOvr>
@@ -6256,122 +6930,9 @@
         <p:nvPr/>
       </p:nvGrpSpPr>
       <p:grpSpPr/>
-      <p:sp>
-        <p:nvSpPr>
-          <p:cNvPr id="2" name="TextBox 1"/>
-          <p:cNvSpPr txBox="1"/>
-          <p:nvPr/>
-        </p:nvSpPr>
-        <p:spPr>
-          <a:xfrm>
-            <a:off x="640080" y="274320"/>
-            <a:ext cx="10881360" cy="365760"/>
-          </a:xfrm>
-          <a:prstGeom prst="rect">
-            <a:avLst/>
-          </a:prstGeom>
-          <a:noFill/>
-        </p:spPr>
-        <p:txBody>
-          <a:bodyPr wrap="square">
-            <a:spAutoFit/>
-          </a:bodyPr>
-          <a:lstStyle/>
-          <a:p>
-            <a:pPr algn="l"/>
-            <a:r>
-              <a:rPr sz="1200" b="1">
-                <a:solidFill>
-                  <a:srgbClr val="7D8690"/>
-                </a:solidFill>
-                <a:latin typeface="Inter"/>
-              </a:rPr>
-              <a:t>ЖИМ НОГАМИ · KOSMOHACK</a:t>
-            </a:r>
-          </a:p>
-        </p:txBody>
-      </p:sp>
-      <p:sp>
-        <p:nvSpPr>
-          <p:cNvPr id="3" name="Oval 2"/>
-          <p:cNvSpPr/>
-          <p:nvPr/>
-        </p:nvSpPr>
-        <p:spPr>
-          <a:xfrm>
-            <a:off x="11658600" y="384048"/>
-            <a:ext cx="128016" cy="128016"/>
-          </a:xfrm>
-          <a:prstGeom prst="ellipse">
-            <a:avLst/>
-          </a:prstGeom>
-          <a:solidFill>
-            <a:srgbClr val="62D99A"/>
-          </a:solidFill>
-          <a:ln>
-            <a:noFill/>
-          </a:ln>
-        </p:spPr>
-        <p:style>
-          <a:lnRef idx="1">
-            <a:schemeClr val="accent1"/>
-          </a:lnRef>
-          <a:fillRef idx="3">
-            <a:schemeClr val="accent1"/>
-          </a:fillRef>
-          <a:effectRef idx="2">
-            <a:schemeClr val="accent1"/>
-          </a:effectRef>
-          <a:fontRef idx="minor">
-            <a:schemeClr val="lt1"/>
-          </a:fontRef>
-        </p:style>
-        <p:txBody>
-          <a:bodyPr rtlCol="0" anchor="ctr"/>
-          <a:lstStyle/>
-          <a:p>
-            <a:pPr algn="ctr"/>
-          </a:p>
-        </p:txBody>
-      </p:sp>
-      <p:sp>
-        <p:nvSpPr>
-          <p:cNvPr id="4" name="TextBox 3"/>
-          <p:cNvSpPr txBox="1"/>
-          <p:nvPr/>
-        </p:nvSpPr>
-        <p:spPr>
-          <a:xfrm>
-            <a:off x="640080" y="640080"/>
-            <a:ext cx="10881360" cy="1097280"/>
-          </a:xfrm>
-          <a:prstGeom prst="rect">
-            <a:avLst/>
-          </a:prstGeom>
-          <a:noFill/>
-        </p:spPr>
-        <p:txBody>
-          <a:bodyPr wrap="square">
-            <a:spAutoFit/>
-          </a:bodyPr>
-          <a:lstStyle/>
-          <a:p>
-            <a:pPr algn="l"/>
-            <a:r>
-              <a:rPr sz="3400" b="1">
-                <a:solidFill>
-                  <a:srgbClr val="F2F4F5"/>
-                </a:solidFill>
-                <a:latin typeface="Inter"/>
-              </a:rPr>
-              <a:t>Карта умеет: слои, степени, справка</a:t>
-            </a:r>
-          </a:p>
-        </p:txBody>
-      </p:sp>
       <p:pic>
         <p:nvPicPr>
-          <p:cNvPr id="5" name="Picture 4" descr="02-burned-only.png"/>
+          <p:cNvPr id="2" name="Picture 1" descr="01-map-full.png"/>
           <p:cNvPicPr>
             <a:picLocks noChangeAspect="1"/>
           </p:cNvPicPr>
@@ -6385,32 +6946,8 @@
         </p:blipFill>
         <p:spPr>
           <a:xfrm>
-            <a:off x="640080" y="1828800"/>
-            <a:ext cx="6949440" cy="3909060"/>
-          </a:xfrm>
-          <a:prstGeom prst="rect">
-            <a:avLst/>
-          </a:prstGeom>
-        </p:spPr>
-      </p:pic>
-      <p:pic>
-        <p:nvPicPr>
-          <p:cNvPr id="6" name="Picture 5" descr="03-analytics.png"/>
-          <p:cNvPicPr>
-            <a:picLocks noChangeAspect="1"/>
-          </p:cNvPicPr>
-          <p:nvPr/>
-        </p:nvPicPr>
-        <p:blipFill>
-          <a:blip r:embed="rId3"/>
-          <a:stretch>
-            <a:fillRect/>
-          </a:stretch>
-        </p:blipFill>
-        <p:spPr>
-          <a:xfrm>
-            <a:off x="7863840" y="2926080"/>
-            <a:ext cx="3657600" cy="467617"/>
+            <a:off x="0" y="0"/>
+            <a:ext cx="12188952" cy="6858000"/>
           </a:xfrm>
           <a:prstGeom prst="rect">
             <a:avLst/>
@@ -6451,8 +6988,8 @@
         </p:nvSpPr>
         <p:spPr>
           <a:xfrm>
-            <a:off x="640080" y="274320"/>
-            <a:ext cx="10881360" cy="365760"/>
+            <a:off x="640080" y="457200"/>
+            <a:ext cx="10881360" cy="548640"/>
           </a:xfrm>
           <a:prstGeom prst="rect">
             <a:avLst/>
@@ -6467,27 +7004,62 @@
           <a:p>
             <a:pPr algn="l"/>
             <a:r>
-              <a:rPr sz="1200" b="1">
-                <a:solidFill>
-                  <a:srgbClr val="7D8690"/>
+              <a:rPr sz="1500" b="1">
+                <a:solidFill>
+                  <a:srgbClr val="FF6B35"/>
                 </a:solidFill>
                 <a:latin typeface="Inter"/>
               </a:rPr>
-              <a:t>ЖИМ НОГАМИ · KOSMOHACK</a:t>
-            </a:r>
-          </a:p>
-        </p:txBody>
-      </p:sp>
-      <p:sp>
-        <p:nvSpPr>
-          <p:cNvPr id="3" name="Oval 2"/>
+              <a:t>Сервис</a:t>
+            </a:r>
+          </a:p>
+        </p:txBody>
+      </p:sp>
+      <p:sp>
+        <p:nvSpPr>
+          <p:cNvPr id="3" name="TextBox 2"/>
+          <p:cNvSpPr txBox="1"/>
+          <p:nvPr/>
+        </p:nvSpPr>
+        <p:spPr>
+          <a:xfrm>
+            <a:off x="640080" y="914400"/>
+            <a:ext cx="10881360" cy="1097280"/>
+          </a:xfrm>
+          <a:prstGeom prst="rect">
+            <a:avLst/>
+          </a:prstGeom>
+          <a:noFill/>
+        </p:spPr>
+        <p:txBody>
+          <a:bodyPr wrap="square">
+            <a:spAutoFit/>
+          </a:bodyPr>
+          <a:lstStyle/>
+          <a:p>
+            <a:pPr algn="l"/>
+            <a:r>
+              <a:rPr sz="6400" b="1">
+                <a:solidFill>
+                  <a:srgbClr val="F2F4F5"/>
+                </a:solidFill>
+                <a:latin typeface="Inter"/>
+              </a:rPr>
+              <a:t>Живое API</a:t>
+            </a:r>
+          </a:p>
+        </p:txBody>
+      </p:sp>
+      <p:sp>
+        <p:nvSpPr>
+          <p:cNvPr id="4" name="Oval 3"/>
           <p:cNvSpPr/>
           <p:nvPr/>
         </p:nvSpPr>
         <p:spPr>
           <a:xfrm>
-            <a:off x="11658600" y="384048"/>
-            <a:ext cx="128016" cy="128016"/>
+            <a:off x="914400" y="3566160"/>
+            <a:ext cx="155448" cy="155448"/>
           </a:xfrm>
           <a:prstGeom prst="ellipse">
             <a:avLst/>
@@ -6523,14 +7095,14 @@
       </p:sp>
       <p:sp>
         <p:nvSpPr>
-          <p:cNvPr id="4" name="TextBox 3"/>
+          <p:cNvPr id="5" name="TextBox 4"/>
           <p:cNvSpPr txBox="1"/>
           <p:nvPr/>
         </p:nvSpPr>
         <p:spPr>
           <a:xfrm>
-            <a:off x="640080" y="777240"/>
-            <a:ext cx="10881360" cy="1097280"/>
+            <a:off x="1280160" y="3493008"/>
+            <a:ext cx="10241280" cy="731520"/>
           </a:xfrm>
           <a:prstGeom prst="rect">
             <a:avLst/>
@@ -6545,33 +7117,43 @@
           <a:p>
             <a:pPr algn="l"/>
             <a:r>
-              <a:rPr sz="3800" b="1">
+              <a:rPr sz="2100" b="0">
                 <a:solidFill>
                   <a:srgbClr val="F2F4F5"/>
                 </a:solidFill>
                 <a:latin typeface="Inter"/>
               </a:rPr>
-              <a:t>Под картой — настоящее API</a:t>
-            </a:r>
-          </a:p>
-        </p:txBody>
-      </p:sp>
-      <p:sp>
-        <p:nvSpPr>
-          <p:cNvPr id="5" name="Oval 4"/>
+              <a:t>3 GET + 3 POST</a:t>
+            </a:r>
+            <a:r>
+              <a:rPr sz="1500" b="0">
+                <a:solidFill>
+                  <a:srgbClr val="7D8690"/>
+                </a:solidFill>
+                <a:latin typeface="Inter"/>
+              </a:rPr>
+              <a:t>
+точки · полигоны · аналитика · shp-архив</a:t>
+            </a:r>
+          </a:p>
+        </p:txBody>
+      </p:sp>
+      <p:sp>
+        <p:nvSpPr>
+          <p:cNvPr id="6" name="Oval 5"/>
           <p:cNvSpPr/>
           <p:nvPr/>
         </p:nvSpPr>
         <p:spPr>
           <a:xfrm>
-            <a:off x="914400" y="2414016"/>
+            <a:off x="914400" y="4389120"/>
             <a:ext cx="155448" cy="155448"/>
           </a:xfrm>
           <a:prstGeom prst="ellipse">
             <a:avLst/>
           </a:prstGeom>
           <a:solidFill>
-            <a:srgbClr val="62D99A"/>
+            <a:srgbClr val="F2F4F5"/>
           </a:solidFill>
           <a:ln>
             <a:noFill/>
@@ -6601,14 +7183,14 @@
       </p:sp>
       <p:sp>
         <p:nvSpPr>
-          <p:cNvPr id="6" name="TextBox 5"/>
+          <p:cNvPr id="7" name="TextBox 6"/>
           <p:cNvSpPr txBox="1"/>
           <p:nvPr/>
         </p:nvSpPr>
         <p:spPr>
           <a:xfrm>
-            <a:off x="1280160" y="2212848"/>
-            <a:ext cx="10241280" cy="868680"/>
+            <a:off x="1280160" y="4315968"/>
+            <a:ext cx="10241280" cy="731520"/>
           </a:xfrm>
           <a:prstGeom prst="rect">
             <a:avLst/>
@@ -6629,37 +7211,37 @@
                 </a:solidFill>
                 <a:latin typeface="Inter"/>
               </a:rPr>
-              <a:t>3 GET по прямоугольнику + 3 POST по полигону</a:t>
-            </a:r>
-            <a:r>
-              <a:rPr sz="1400" b="0">
+              <a:t>9 curl-проверок — все зелёные</a:t>
+            </a:r>
+            <a:r>
+              <a:rPr sz="1500" b="0">
                 <a:solidFill>
                   <a:srgbClr val="7D8690"/>
                 </a:solidFill>
                 <a:latin typeface="Inter"/>
               </a:rPr>
               <a:t>
-точки, полигоны, аналитика — geojson, json, shp-архив</a:t>
-            </a:r>
-          </a:p>
-        </p:txBody>
-      </p:sp>
-      <p:sp>
-        <p:nvSpPr>
-          <p:cNvPr id="7" name="Oval 6"/>
+серия лежит в репозитории</a:t>
+            </a:r>
+          </a:p>
+        </p:txBody>
+      </p:sp>
+      <p:sp>
+        <p:nvSpPr>
+          <p:cNvPr id="8" name="Oval 7"/>
           <p:cNvSpPr/>
           <p:nvPr/>
         </p:nvSpPr>
         <p:spPr>
           <a:xfrm>
-            <a:off x="914400" y="3557016"/>
+            <a:off x="914400" y="5212080"/>
             <a:ext cx="155448" cy="155448"/>
           </a:xfrm>
           <a:prstGeom prst="ellipse">
             <a:avLst/>
           </a:prstGeom>
           <a:solidFill>
-            <a:srgbClr val="F2F4F5"/>
+            <a:srgbClr val="E6C65C"/>
           </a:solidFill>
           <a:ln>
             <a:noFill/>
@@ -6689,14 +7271,14 @@
       </p:sp>
       <p:sp>
         <p:nvSpPr>
-          <p:cNvPr id="8" name="TextBox 7"/>
+          <p:cNvPr id="9" name="TextBox 8"/>
           <p:cNvSpPr txBox="1"/>
           <p:nvPr/>
         </p:nvSpPr>
         <p:spPr>
           <a:xfrm>
-            <a:off x="1280160" y="3355848"/>
-            <a:ext cx="10241280" cy="868680"/>
+            <a:off x="1280160" y="5138928"/>
+            <a:ext cx="10241280" cy="731520"/>
           </a:xfrm>
           <a:prstGeom prst="rect">
             <a:avLst/>
@@ -6717,61 +7299,18 @@
                 </a:solidFill>
                 <a:latin typeface="Inter"/>
               </a:rPr>
-              <a:t>Проверено серией из 9 curl-запросов</a:t>
-            </a:r>
-            <a:r>
-              <a:rPr sz="1400" b="0">
+              <a:t>Без базы — нечему падать</a:t>
+            </a:r>
+            <a:r>
+              <a:rPr sz="1500" b="0">
                 <a:solidFill>
                   <a:srgbClr val="7D8690"/>
                 </a:solidFill>
                 <a:latin typeface="Inter"/>
               </a:rPr>
               <a:t>
-все зелёные — файл серии лежит в репозитории</a:t>
-            </a:r>
-          </a:p>
-        </p:txBody>
-      </p:sp>
-      <p:sp>
-        <p:nvSpPr>
-          <p:cNvPr id="9" name="Oval 8"/>
-          <p:cNvSpPr/>
-          <p:nvPr/>
-        </p:nvSpPr>
-        <p:spPr>
-          <a:xfrm>
-            <a:off x="914400" y="4700016"/>
-            <a:ext cx="155448" cy="155448"/>
-          </a:xfrm>
-          <a:prstGeom prst="ellipse">
-            <a:avLst/>
-          </a:prstGeom>
-          <a:solidFill>
-            <a:srgbClr val="E6C65C"/>
-          </a:solidFill>
-          <a:ln>
-            <a:noFill/>
-          </a:ln>
-        </p:spPr>
-        <p:style>
-          <a:lnRef idx="1">
-            <a:schemeClr val="accent1"/>
-          </a:lnRef>
-          <a:fillRef idx="3">
-            <a:schemeClr val="accent1"/>
-          </a:fillRef>
-          <a:effectRef idx="2">
-            <a:schemeClr val="accent1"/>
-          </a:effectRef>
-          <a:fontRef idx="minor">
-            <a:schemeClr val="lt1"/>
-          </a:fontRef>
-        </p:style>
-        <p:txBody>
-          <a:bodyPr rtlCol="0" anchor="ctr"/>
-          <a:lstStyle/>
-          <a:p>
-            <a:pPr algn="ctr"/>
+файловый бэкенд</a:t>
+            </a:r>
           </a:p>
         </p:txBody>
       </p:sp>
@@ -6783,8 +7322,8 @@
         </p:nvSpPr>
         <p:spPr>
           <a:xfrm>
-            <a:off x="1280160" y="4498848"/>
-            <a:ext cx="10241280" cy="868680"/>
+            <a:off x="457200" y="6400800"/>
+            <a:ext cx="7315200" cy="274320"/>
           </a:xfrm>
           <a:prstGeom prst="rect">
             <a:avLst/>
@@ -6799,23 +7338,48 @@
           <a:p>
             <a:pPr algn="l"/>
             <a:r>
-              <a:rPr sz="2100" b="0">
-                <a:solidFill>
-                  <a:srgbClr val="F2F4F5"/>
+              <a:rPr sz="1100" b="1">
+                <a:solidFill>
+                  <a:srgbClr val="7D8690"/>
                 </a:solidFill>
                 <a:latin typeface="Inter"/>
               </a:rPr>
-              <a:t>Без базы данных — файловый бэкенд</a:t>
-            </a:r>
-            <a:r>
-              <a:rPr sz="1400" b="0">
+              <a:t>ЖИМ НОГАМИ · KOSMOHACK 2026</a:t>
+            </a:r>
+          </a:p>
+        </p:txBody>
+      </p:sp>
+      <p:sp>
+        <p:nvSpPr>
+          <p:cNvPr id="11" name="TextBox 10"/>
+          <p:cNvSpPr txBox="1"/>
+          <p:nvPr/>
+        </p:nvSpPr>
+        <p:spPr>
+          <a:xfrm>
+            <a:off x="10789920" y="6400800"/>
+            <a:ext cx="914400" cy="274320"/>
+          </a:xfrm>
+          <a:prstGeom prst="rect">
+            <a:avLst/>
+          </a:prstGeom>
+          <a:noFill/>
+        </p:spPr>
+        <p:txBody>
+          <a:bodyPr wrap="square">
+            <a:spAutoFit/>
+          </a:bodyPr>
+          <a:lstStyle/>
+          <a:p>
+            <a:pPr algn="r"/>
+            <a:r>
+              <a:rPr sz="1100" b="1">
                 <a:solidFill>
                   <a:srgbClr val="7D8690"/>
                 </a:solidFill>
                 <a:latin typeface="Inter"/>
               </a:rPr>
-              <a:t>
-нечему падать на защите</a:t>
+              <a:t>08</a:t>
             </a:r>
           </a:p>
         </p:txBody>
@@ -6854,8 +7418,8 @@
         </p:nvSpPr>
         <p:spPr>
           <a:xfrm>
-            <a:off x="640080" y="274320"/>
-            <a:ext cx="10881360" cy="365760"/>
+            <a:off x="640080" y="457200"/>
+            <a:ext cx="10881360" cy="548640"/>
           </a:xfrm>
           <a:prstGeom prst="rect">
             <a:avLst/>
@@ -6870,36 +7434,75 @@
           <a:p>
             <a:pPr algn="l"/>
             <a:r>
-              <a:rPr sz="1200" b="1">
-                <a:solidFill>
-                  <a:srgbClr val="7D8690"/>
+              <a:rPr sz="1500" b="1">
+                <a:solidFill>
+                  <a:srgbClr val="62D99A"/>
                 </a:solidFill>
                 <a:latin typeface="Inter"/>
               </a:rPr>
-              <a:t>ЖИМ НОГАМИ · KOSMOHACK</a:t>
-            </a:r>
-          </a:p>
-        </p:txBody>
-      </p:sp>
-      <p:sp>
-        <p:nvSpPr>
-          <p:cNvPr id="3" name="Oval 2"/>
+              <a:t>Воспроизводимость</a:t>
+            </a:r>
+          </a:p>
+        </p:txBody>
+      </p:sp>
+      <p:sp>
+        <p:nvSpPr>
+          <p:cNvPr id="3" name="TextBox 2"/>
+          <p:cNvSpPr txBox="1"/>
+          <p:nvPr/>
+        </p:nvSpPr>
+        <p:spPr>
+          <a:xfrm>
+            <a:off x="640080" y="914400"/>
+            <a:ext cx="10881360" cy="1097280"/>
+          </a:xfrm>
+          <a:prstGeom prst="rect">
+            <a:avLst/>
+          </a:prstGeom>
+          <a:noFill/>
+        </p:spPr>
+        <p:txBody>
+          <a:bodyPr wrap="square">
+            <a:spAutoFit/>
+          </a:bodyPr>
+          <a:lstStyle/>
+          <a:p>
+            <a:pPr algn="l"/>
+            <a:r>
+              <a:rPr sz="6400" b="1">
+                <a:solidFill>
+                  <a:srgbClr val="F2F4F5"/>
+                </a:solidFill>
+                <a:latin typeface="Inter"/>
+              </a:rPr>
+              <a:t>Одна команда</a:t>
+            </a:r>
+          </a:p>
+        </p:txBody>
+      </p:sp>
+      <p:sp>
+        <p:nvSpPr>
+          <p:cNvPr id="4" name="Rounded Rectangle 3"/>
           <p:cNvSpPr/>
           <p:nvPr/>
         </p:nvSpPr>
         <p:spPr>
           <a:xfrm>
-            <a:off x="11658600" y="384048"/>
-            <a:ext cx="128016" cy="128016"/>
-          </a:xfrm>
-          <a:prstGeom prst="ellipse">
-            <a:avLst/>
+            <a:off x="640080" y="2651760"/>
+            <a:ext cx="10881360" cy="1371600"/>
+          </a:xfrm>
+          <a:prstGeom prst="roundRect">
+            <a:avLst>
+              <a:gd name="adj" fmla="val 6000"/>
+            </a:avLst>
           </a:prstGeom>
           <a:solidFill>
-            <a:srgbClr val="62D99A"/>
+            <a:srgbClr val="0D1217"/>
           </a:solidFill>
-          <a:ln>
-            <a:noFill/>
+          <a:ln w="12700">
+            <a:solidFill>
+              <a:srgbClr val="2A333D"/>
+            </a:solidFill>
           </a:ln>
         </p:spPr>
         <p:style>
@@ -6926,51 +7529,16 @@
       </p:sp>
       <p:sp>
         <p:nvSpPr>
-          <p:cNvPr id="4" name="TextBox 3"/>
-          <p:cNvSpPr txBox="1"/>
-          <p:nvPr/>
-        </p:nvSpPr>
-        <p:spPr>
-          <a:xfrm>
-            <a:off x="640080" y="777240"/>
-            <a:ext cx="10881360" cy="1097280"/>
-          </a:xfrm>
-          <a:prstGeom prst="rect">
-            <a:avLst/>
-          </a:prstGeom>
-          <a:noFill/>
-        </p:spPr>
-        <p:txBody>
-          <a:bodyPr wrap="square">
-            <a:spAutoFit/>
-          </a:bodyPr>
-          <a:lstStyle/>
-          <a:p>
-            <a:pPr algn="l"/>
-            <a:r>
-              <a:rPr sz="3800" b="1">
-                <a:solidFill>
-                  <a:srgbClr val="F2F4F5"/>
-                </a:solidFill>
-                <a:latin typeface="Inter"/>
-              </a:rPr>
-              <a:t>Заведётся и у вас</a:t>
-            </a:r>
-          </a:p>
-        </p:txBody>
-      </p:sp>
-      <p:sp>
-        <p:nvSpPr>
-          <p:cNvPr id="5" name="Oval 4"/>
+          <p:cNvPr id="5" name="Rounded Rectangle 4"/>
           <p:cNvSpPr/>
           <p:nvPr/>
         </p:nvSpPr>
         <p:spPr>
           <a:xfrm>
-            <a:off x="914400" y="2414016"/>
-            <a:ext cx="155448" cy="155448"/>
-          </a:xfrm>
-          <a:prstGeom prst="ellipse">
+            <a:off x="640080" y="2788920"/>
+            <a:ext cx="82296" cy="1097280"/>
+          </a:xfrm>
+          <a:prstGeom prst="roundRect">
             <a:avLst/>
           </a:prstGeom>
           <a:solidFill>
@@ -7010,8 +7578,8 @@
         </p:nvSpPr>
         <p:spPr>
           <a:xfrm>
-            <a:off x="1280160" y="2212848"/>
-            <a:ext cx="10241280" cy="868680"/>
+            <a:off x="1005840" y="2834640"/>
+            <a:ext cx="10149840" cy="1005840"/>
           </a:xfrm>
           <a:prstGeom prst="rect">
             <a:avLst/>
@@ -7026,80 +7594,37 @@
           <a:p>
             <a:pPr algn="l"/>
             <a:r>
-              <a:rPr sz="2200" b="0">
+              <a:rPr sz="2100" b="1">
                 <a:solidFill>
                   <a:srgbClr val="F2F4F5"/>
                 </a:solidFill>
                 <a:latin typeface="Inter"/>
               </a:rPr>
-              <a:t>Веса лежат в репозитории</a:t>
-            </a:r>
-            <a:r>
-              <a:rPr sz="1400" b="0">
+              <a:t>inference.py --data-dir &lt;test&gt; --output submission.csv</a:t>
+            </a:r>
+            <a:r>
+              <a:rPr sz="1600" b="0">
                 <a:solidFill>
                   <a:srgbClr val="7D8690"/>
                 </a:solidFill>
                 <a:latin typeface="Inter"/>
               </a:rPr>
               <a:t>
-докачивать нечего</a:t>
-            </a:r>
-          </a:p>
-        </p:txBody>
-      </p:sp>
-      <p:sp>
-        <p:nvSpPr>
-          <p:cNvPr id="7" name="Oval 6"/>
-          <p:cNvSpPr/>
-          <p:nvPr/>
-        </p:nvSpPr>
-        <p:spPr>
-          <a:xfrm>
-            <a:off x="914400" y="3602736"/>
-            <a:ext cx="155448" cy="155448"/>
-          </a:xfrm>
-          <a:prstGeom prst="ellipse">
-            <a:avLst/>
-          </a:prstGeom>
-          <a:solidFill>
-            <a:srgbClr val="F2F4F5"/>
-          </a:solidFill>
-          <a:ln>
-            <a:noFill/>
-          </a:ln>
-        </p:spPr>
-        <p:style>
-          <a:lnRef idx="1">
-            <a:schemeClr val="accent1"/>
-          </a:lnRef>
-          <a:fillRef idx="3">
-            <a:schemeClr val="accent1"/>
-          </a:fillRef>
-          <a:effectRef idx="2">
-            <a:schemeClr val="accent1"/>
-          </a:effectRef>
-          <a:fontRef idx="minor">
-            <a:schemeClr val="lt1"/>
-          </a:fontRef>
-        </p:style>
-        <p:txBody>
-          <a:bodyPr rtlCol="0" anchor="ctr"/>
-          <a:lstStyle/>
-          <a:p>
-            <a:pPr algn="ctr"/>
-          </a:p>
-        </p:txBody>
-      </p:sp>
-      <p:sp>
-        <p:nvSpPr>
-          <p:cNvPr id="8" name="TextBox 7"/>
+Веса в репо · CPU-фолбэк · README для оргов</a:t>
+            </a:r>
+          </a:p>
+        </p:txBody>
+      </p:sp>
+      <p:sp>
+        <p:nvSpPr>
+          <p:cNvPr id="7" name="TextBox 6"/>
           <p:cNvSpPr txBox="1"/>
           <p:nvPr/>
         </p:nvSpPr>
         <p:spPr>
           <a:xfrm>
-            <a:off x="1280160" y="3401568"/>
-            <a:ext cx="10241280" cy="868680"/>
+            <a:off x="457200" y="6400800"/>
+            <a:ext cx="7315200" cy="274320"/>
           </a:xfrm>
           <a:prstGeom prst="rect">
             <a:avLst/>
@@ -7114,80 +7639,27 @@
           <a:p>
             <a:pPr algn="l"/>
             <a:r>
-              <a:rPr sz="2200" b="0">
-                <a:solidFill>
-                  <a:srgbClr val="F2F4F5"/>
+              <a:rPr sz="1100" b="1">
+                <a:solidFill>
+                  <a:srgbClr val="7D8690"/>
                 </a:solidFill>
                 <a:latin typeface="Inter"/>
               </a:rPr>
-              <a:t>Одна команда инференса — ~28 секунд</a:t>
-            </a:r>
-            <a:r>
-              <a:rPr sz="1400" b="0">
-                <a:solidFill>
-                  <a:srgbClr val="7D8690"/>
-                </a:solidFill>
-                <a:latin typeface="Inter"/>
-              </a:rPr>
-              <a:t>
-на CPU дольше, результат тот же</a:t>
-            </a:r>
-          </a:p>
-        </p:txBody>
-      </p:sp>
-      <p:sp>
-        <p:nvSpPr>
-          <p:cNvPr id="9" name="Oval 8"/>
-          <p:cNvSpPr/>
-          <p:nvPr/>
-        </p:nvSpPr>
-        <p:spPr>
-          <a:xfrm>
-            <a:off x="914400" y="4791455"/>
-            <a:ext cx="155448" cy="155448"/>
-          </a:xfrm>
-          <a:prstGeom prst="ellipse">
-            <a:avLst/>
-          </a:prstGeom>
-          <a:solidFill>
-            <a:srgbClr val="FF6B35"/>
-          </a:solidFill>
-          <a:ln>
-            <a:noFill/>
-          </a:ln>
-        </p:spPr>
-        <p:style>
-          <a:lnRef idx="1">
-            <a:schemeClr val="accent1"/>
-          </a:lnRef>
-          <a:fillRef idx="3">
-            <a:schemeClr val="accent1"/>
-          </a:fillRef>
-          <a:effectRef idx="2">
-            <a:schemeClr val="accent1"/>
-          </a:effectRef>
-          <a:fontRef idx="minor">
-            <a:schemeClr val="lt1"/>
-          </a:fontRef>
-        </p:style>
-        <p:txBody>
-          <a:bodyPr rtlCol="0" anchor="ctr"/>
-          <a:lstStyle/>
-          <a:p>
-            <a:pPr algn="ctr"/>
-          </a:p>
-        </p:txBody>
-      </p:sp>
-      <p:sp>
-        <p:nvSpPr>
-          <p:cNvPr id="10" name="TextBox 9"/>
+              <a:t>ЖИМ НОГАМИ · KOSMOHACK 2026</a:t>
+            </a:r>
+          </a:p>
+        </p:txBody>
+      </p:sp>
+      <p:sp>
+        <p:nvSpPr>
+          <p:cNvPr id="8" name="TextBox 7"/>
           <p:cNvSpPr txBox="1"/>
           <p:nvPr/>
         </p:nvSpPr>
         <p:spPr>
           <a:xfrm>
-            <a:off x="1280160" y="4590288"/>
-            <a:ext cx="10241280" cy="868680"/>
+            <a:off x="10789920" y="6400800"/>
+            <a:ext cx="914400" cy="274320"/>
           </a:xfrm>
           <a:prstGeom prst="rect">
             <a:avLst/>
@@ -7200,25 +7672,15 @@
           </a:bodyPr>
           <a:lstStyle/>
           <a:p>
-            <a:pPr algn="l"/>
-            <a:r>
-              <a:rPr sz="2200" b="0">
-                <a:solidFill>
-                  <a:srgbClr val="F2F4F5"/>
+            <a:pPr algn="r"/>
+            <a:r>
+              <a:rPr sz="1100" b="1">
+                <a:solidFill>
+                  <a:srgbClr val="7D8690"/>
                 </a:solidFill>
                 <a:latin typeface="Inter"/>
               </a:rPr>
-              <a:t>Одна команда сервиса + открыть страницу</a:t>
-            </a:r>
-            <a:r>
-              <a:rPr sz="1400" b="0">
-                <a:solidFill>
-                  <a:srgbClr val="7D8690"/>
-                </a:solidFill>
-                <a:latin typeface="Inter"/>
-              </a:rPr>
-              <a:t>
-демо из коробки</a:t>
+              <a:t>09</a:t>
             </a:r>
           </a:p>
         </p:txBody>
